--- a/doft_diwali_popup/Doft_Kiosk_Concept_Presentation.pptx
+++ b/doft_diwali_popup/Doft_Kiosk_Concept_Presentation.pptx
@@ -17,10 +17,9 @@
     <p:sldId id="265" r:id="rId11"/>
     <p:sldId id="266" r:id="rId12"/>
     <p:sldId id="267" r:id="rId13"/>
-    <p:sldId id="268" r:id="rId14"/>
   </p:sldIdLst>
   <p:notesMasterIdLst>
-    <p:notesMasterId r:id="rId15"/>
+    <p:notesMasterId r:id="rId14"/>
   </p:notesMasterIdLst>
   <p:sldSz cx="12191695" cy="6858000"/>
   <p:notesSz cx="6858000" cy="12191695"/>
@@ -514,7 +513,7 @@
           <a:p>
             <a:r>
               <a:rPr lang="en-US" dirty="0"/>
-              <a:t>Cover — DOFT Diwali Pop-Up Retail Kiosk concept, premium home-fragrance island, 8x8 ft, 14 malls, presented by ProMarcom.</a:t>
+              <a:t>Cover: DOFT Diwali Pop-Up boutique kiosk, premium home-fragrance salon, 8x8 ft, 14 malls, by ProMarcom.</a:t>
             </a:r>
             <a:endParaRPr lang="en-US" dirty="0"/>
           </a:p>
@@ -602,7 +601,7 @@
           <a:p>
             <a:r>
               <a:rPr lang="en-US" dirty="0"/>
-              <a:t>Product story — candles, gift hampers, reed diffusers, room sprays &amp; wax melts merchandised on backlit shelving.</a:t>
+              <a:t>14 malls pan-India per revised client list. Same window; select extend to Xmas/NY.</a:t>
             </a:r>
             <a:endParaRPr lang="en-US" dirty="0"/>
           </a:p>
@@ -690,7 +689,7 @@
           <a:p>
             <a:r>
               <a:rPr lang="en-US" dirty="0"/>
-              <a:t>14 malls pan-India as per revised client list. Same window; select extend to Xmas/NY.</a:t>
+              <a:t>Turnkey scope: build, transport/install, manpower, logistics, licences, daily operations &amp; reporting.</a:t>
             </a:r>
             <a:endParaRPr lang="en-US" dirty="0"/>
           </a:p>
@@ -778,7 +777,7 @@
           <a:p>
             <a:r>
               <a:rPr lang="en-US" dirty="0"/>
-              <a:t>Turnkey scope — design, build/install, manpower, logistics, licences, daily operations &amp; reporting.</a:t>
+              <a:t>Closing: next step is the detailed commercial proposal &amp; costing (separate workbook).</a:t>
             </a:r>
             <a:endParaRPr lang="en-US" dirty="0"/>
           </a:p>
@@ -802,94 +801,6 @@
             <a:fld id="{F7021451-1387-4CA6-816F-3879F97B5CBC}" type="slidenum">
               <a:rPr lang="en-US"/>
               <a:t>12</a:t>
-            </a:fld>
-            <a:endParaRPr lang="en-US"/>
-          </a:p>
-        </p:txBody>
-      </p:sp>
-    </p:spTree>
-    <p:extLst>
-      <p:ext uri="{BB962C8B-B14F-4D97-AF65-F5344CB8AC3E}">
-        <p14:creationId xmlns:p14="http://schemas.microsoft.com/office/powerpoint/2010/main" val="1024086991"/>
-      </p:ext>
-    </p:extLst>
-  </p:cSld>
-  <p:clrMapOvr>
-    <a:masterClrMapping/>
-  </p:clrMapOvr>
-</p:notes>
-</file>
-
-<file path=ppt/notesSlides/notesSlide13.xml><?xml version="1.0" encoding="utf-8"?>
-<p:notes xmlns:a="http://schemas.openxmlformats.org/drawingml/2006/main" xmlns:r="http://schemas.openxmlformats.org/officeDocument/2006/relationships" xmlns:p="http://schemas.openxmlformats.org/presentationml/2006/main">
-  <p:cSld>
-    <p:spTree>
-      <p:nvGrpSpPr>
-        <p:cNvPr id="1" name=""/>
-        <p:cNvGrpSpPr/>
-        <p:nvPr/>
-      </p:nvGrpSpPr>
-      <p:grpSpPr>
-        <a:xfrm>
-          <a:off x="0" y="0"/>
-          <a:ext cx="0" cy="0"/>
-          <a:chOff x="0" y="0"/>
-          <a:chExt cx="0" cy="0"/>
-        </a:xfrm>
-      </p:grpSpPr>
-      <p:sp>
-        <p:nvSpPr>
-          <p:cNvPr id="2" name="Slide Image Placeholder 1"/>
-          <p:cNvSpPr>
-            <a:spLocks noGrp="1" noRot="1" noChangeAspect="1"/>
-          </p:cNvSpPr>
-          <p:nvPr>
-            <p:ph type="sldImg"/>
-          </p:nvPr>
-        </p:nvSpPr>
-        <p:spPr/>
-      </p:sp>
-      <p:sp>
-        <p:nvSpPr>
-          <p:cNvPr id="3" name="Notes Placeholder 2"/>
-          <p:cNvSpPr>
-            <a:spLocks noGrp="1"/>
-          </p:cNvSpPr>
-          <p:nvPr>
-            <p:ph type="body" idx="1"/>
-          </p:nvPr>
-        </p:nvSpPr>
-        <p:spPr/>
-        <p:txBody>
-          <a:bodyPr/>
-          <a:lstStyle/>
-          <a:p>
-            <a:r>
-              <a:rPr lang="en-US" dirty="0"/>
-              <a:t>Closing — next step is the detailed commercial proposal &amp; costing (separate workbook).</a:t>
-            </a:r>
-            <a:endParaRPr lang="en-US" dirty="0"/>
-          </a:p>
-        </p:txBody>
-      </p:sp>
-      <p:sp>
-        <p:nvSpPr>
-          <p:cNvPr id="4" name="Slide Number Placeholder 3"/>
-          <p:cNvSpPr>
-            <a:spLocks noGrp="1"/>
-          </p:cNvSpPr>
-          <p:nvPr>
-            <p:ph type="sldNum" sz="quarter" idx="10"/>
-          </p:nvPr>
-        </p:nvSpPr>
-        <p:spPr/>
-        <p:txBody>
-          <a:bodyPr/>
-          <a:lstStyle/>
-          <a:p>
-            <a:fld id="{F7021451-1387-4CA6-816F-3879F97B5CBC}" type="slidenum">
-              <a:rPr lang="en-US"/>
-              <a:t>13</a:t>
             </a:fld>
             <a:endParaRPr lang="en-US"/>
           </a:p>
@@ -954,7 +865,7 @@
           <a:p>
             <a:r>
               <a:rPr lang="en-US" dirty="0"/>
-              <a:t>The opportunity — premium home fragrance brand, Diwali gifting, 14 malls, 8x8 kiosk, turnkey.</a:t>
+              <a:t>The opportunity: premium home fragrance, Diwali gifting, 14 malls, 8x8 boutique kiosk, turnkey.</a:t>
             </a:r>
             <a:endParaRPr lang="en-US" dirty="0"/>
           </a:p>
@@ -1042,7 +953,7 @@
           <a:p>
             <a:r>
               <a:rPr lang="en-US" dirty="0"/>
-              <a:t>Design concept — the DOFT Island: premium build language + Doft green/gold identity + warm backlit totem + built-in storage.</a:t>
+              <a:t>Design concept: warm boutique fragrance salon: backlit brand wall, brass shelving, consultation seating, digital screen.</a:t>
             </a:r>
             <a:endParaRPr lang="en-US" dirty="0"/>
           </a:p>
@@ -1394,7 +1305,7 @@
           <a:p>
             <a:r>
               <a:rPr lang="en-US" dirty="0"/>
-              <a:t/>
+              <a:t>Top layout: dimensioned 8x8 ft plan: backlit brand wall, perimeter U-counter, central seating, open-corner entries, digital screen.</a:t>
             </a:r>
             <a:endParaRPr lang="en-US" dirty="0"/>
           </a:p>
@@ -1482,7 +1393,7 @@
           <a:p>
             <a:r>
               <a:rPr lang="en-US" dirty="0"/>
-              <a:t>Top layout — dimensioned 2D plan of the 8x8 island: U-counter, central totem, lockable storage, cash safe, staff entry, seating.</a:t>
+              <a:t>Materials: warm white lacquer, brushed brass, black stone, backlit acrylic seal, warm LED, digital screen.</a:t>
             </a:r>
             <a:endParaRPr lang="en-US" dirty="0"/>
           </a:p>
@@ -1570,7 +1481,7 @@
           <a:p>
             <a:r>
               <a:rPr lang="en-US" dirty="0"/>
-              <a:t>Materials — emerald lacquer, brushed gold, white lacquer, cream marble, warm LED, charcoal.</a:t>
+              <a:t>Product story: candles, gift hampers, reed diffusers, room sprays &amp; wax melts on backlit shelving.</a:t>
             </a:r>
             <a:endParaRPr lang="en-US" dirty="0"/>
           </a:p>
@@ -1925,7 +1836,7 @@
     <p:bg>
       <p:bgPr>
         <a:solidFill>
-          <a:srgbClr val="1E4D39"/>
+          <a:srgbClr val="1E1B17"/>
         </a:solidFill>
       </p:bgPr>
     </p:bg>
@@ -1945,7 +1856,7 @@
       </p:grpSpPr>
       <p:pic>
         <p:nvPicPr>
-          <p:cNvPr id="2" name="Image 0" descr="r_D_hero.png">    </p:cNvPr>
+          <p:cNvPr id="2" name="Image 0" descr="ref_imgs/P1_s2_2.jpg">    </p:cNvPr>
           <p:cNvPicPr>
             <a:picLocks noChangeAspect="1"/>
           </p:cNvPicPr>
@@ -1975,13 +1886,13 @@
         <p:spPr>
           <a:xfrm>
             <a:off x="0" y="0"/>
-            <a:ext cx="6035040" cy="6858000"/>
+            <a:ext cx="5852160" cy="6858000"/>
           </a:xfrm>
           <a:prstGeom prst="rect">
             <a:avLst/>
           </a:prstGeom>
           <a:solidFill>
-            <a:srgbClr val="1E4D39"/>
+            <a:srgbClr val="1E1B17"/>
           </a:solidFill>
           <a:ln/>
         </p:spPr>
@@ -1994,15 +1905,15 @@
         </p:nvSpPr>
         <p:spPr>
           <a:xfrm>
-            <a:off x="6035040" y="0"/>
-            <a:ext cx="2377440" cy="6858000"/>
+            <a:off x="5852160" y="0"/>
+            <a:ext cx="2194560" cy="6858000"/>
           </a:xfrm>
           <a:prstGeom prst="rect">
             <a:avLst/>
           </a:prstGeom>
           <a:solidFill>
-            <a:srgbClr val="1E4D39">
-              <a:alpha val="65000"/>
+            <a:srgbClr val="1E1B17">
+              <a:alpha val="62000"/>
             </a:srgbClr>
           </a:solidFill>
           <a:ln/>
@@ -2036,7 +1947,7 @@
         </p:nvSpPr>
         <p:spPr>
           <a:xfrm>
-            <a:off x="777240" y="1143000"/>
+            <a:off x="777240" y="1051560"/>
             <a:ext cx="5486400" cy="1097280"/>
           </a:xfrm>
           <a:prstGeom prst="rect">
@@ -2049,7 +1960,7 @@
           <a:bodyPr wrap="square" rtlCol="0" anchor="ctr"/>
           <a:lstStyle/>
           <a:p>
-            <a:pPr algn="l" indent="0" marL="0">
+            <a:pPr indent="0" marL="0">
               <a:buNone/>
             </a:pPr>
             <a:r>
@@ -2075,7 +1986,7 @@
         </p:nvSpPr>
         <p:spPr>
           <a:xfrm>
-            <a:off x="868680" y="2240280"/>
+            <a:off x="868680" y="2194560"/>
             <a:ext cx="5486400" cy="365760"/>
           </a:xfrm>
           <a:prstGeom prst="rect">
@@ -2094,7 +2005,7 @@
             <a:r>
               <a:rPr lang="en-US" sz="1600" spc="600" kern="0" dirty="0">
                 <a:solidFill>
-                  <a:srgbClr val="E7DFC9"/>
+                  <a:srgbClr val="D8CDB6"/>
                 </a:solidFill>
                 <a:latin typeface="Calibri" pitchFamily="34" charset="0"/>
                 <a:ea typeface="Calibri" pitchFamily="34" charset="-122"/>
@@ -2114,7 +2025,7 @@
         </p:nvSpPr>
         <p:spPr>
           <a:xfrm>
-            <a:off x="822960" y="2880360"/>
+            <a:off x="822960" y="2834640"/>
             <a:ext cx="2194560" cy="0"/>
           </a:xfrm>
           <a:prstGeom prst="line">
@@ -2137,8 +2048,8 @@
         </p:nvSpPr>
         <p:spPr>
           <a:xfrm>
-            <a:off x="777240" y="3108960"/>
-            <a:ext cx="5486400" cy="1280160"/>
+            <a:off x="777240" y="3017520"/>
+            <a:ext cx="5486400" cy="1371600"/>
           </a:xfrm>
           <a:prstGeom prst="rect">
             <a:avLst/>
@@ -2165,10 +2076,30 @@
                 <a:ea typeface="Cambria" pitchFamily="34" charset="-122"/>
                 <a:cs typeface="Cambria" pitchFamily="34" charset="-120"/>
               </a:rPr>
-              <a:t>Diwali Pop-Up Retail Kiosk</a:t>
+              <a:t>Diwali Pop-Up</a:t>
             </a:r>
             <a:endParaRPr lang="en-US" sz="3800" dirty="0"/>
           </a:p>
+          <a:p>
+            <a:pPr indent="0" marL="0">
+              <a:lnSpc>
+                <a:spcPct val="98000"/>
+              </a:lnSpc>
+              <a:buNone/>
+            </a:pPr>
+            <a:r>
+              <a:rPr lang="en-US" sz="3800" b="1" dirty="0">
+                <a:solidFill>
+                  <a:srgbClr val="FFFFFF"/>
+                </a:solidFill>
+                <a:latin typeface="Cambria" pitchFamily="34" charset="0"/>
+                <a:ea typeface="Cambria" pitchFamily="34" charset="-122"/>
+                <a:cs typeface="Cambria" pitchFamily="34" charset="-120"/>
+              </a:rPr>
+              <a:t>Boutique Kiosk</a:t>
+            </a:r>
+            <a:endParaRPr lang="en-US" sz="3800" dirty="0"/>
+          </a:p>
         </p:txBody>
       </p:sp>
       <p:sp>
@@ -2179,7 +2110,7 @@
         </p:nvSpPr>
         <p:spPr>
           <a:xfrm>
-            <a:off x="795528" y="4343400"/>
+            <a:off x="795528" y="4892040"/>
             <a:ext cx="5486400" cy="457200"/>
           </a:xfrm>
           <a:prstGeom prst="rect">
@@ -2198,13 +2129,13 @@
             <a:r>
               <a:rPr lang="en-US" sz="1550" dirty="0">
                 <a:solidFill>
-                  <a:srgbClr val="D9E4DC"/>
+                  <a:srgbClr val="C9BFAD"/>
                 </a:solidFill>
                 <a:latin typeface="Calibri" pitchFamily="34" charset="0"/>
                 <a:ea typeface="Calibri" pitchFamily="34" charset="-122"/>
                 <a:cs typeface="Calibri" pitchFamily="34" charset="-120"/>
               </a:rPr>
-              <a:t>Concept Design  ·  Premium home-fragrance island</a:t>
+              <a:t>Concept Design  ·  Premium home-fragrance salon</a:t>
             </a:r>
             <a:endParaRPr lang="en-US" sz="1550" dirty="0"/>
           </a:p>
@@ -2218,7 +2149,7 @@
         </p:nvSpPr>
         <p:spPr>
           <a:xfrm>
-            <a:off x="795528" y="4846320"/>
+            <a:off x="795528" y="5349240"/>
             <a:ext cx="5486400" cy="365760"/>
           </a:xfrm>
           <a:prstGeom prst="rect">
@@ -2251,7 +2182,7 @@
             <a:r>
               <a:rPr lang="en-US" sz="1400" dirty="0">
                 <a:solidFill>
-                  <a:srgbClr val="CFDAD1"/>
+                  <a:srgbClr val="B8AE9C"/>
                 </a:solidFill>
                 <a:latin typeface="Calibri" pitchFamily="34" charset="0"/>
                 <a:ea typeface="Calibri" pitchFamily="34" charset="-122"/>
@@ -2271,7 +2202,7 @@
         </p:nvSpPr>
         <p:spPr>
           <a:xfrm>
-            <a:off x="795528" y="5806440"/>
+            <a:off x="795528" y="5897880"/>
             <a:ext cx="2743200" cy="274320"/>
           </a:xfrm>
           <a:prstGeom prst="rect">
@@ -2290,13 +2221,13 @@
             <a:r>
               <a:rPr lang="en-US" sz="1100" spc="200" kern="0" dirty="0">
                 <a:solidFill>
-                  <a:srgbClr val="A9BBAE"/>
+                  <a:srgbClr val="9A9184"/>
                 </a:solidFill>
                 <a:latin typeface="Calibri" pitchFamily="34" charset="0"/>
                 <a:ea typeface="Calibri" pitchFamily="34" charset="-122"/>
                 <a:cs typeface="Calibri" pitchFamily="34" charset="-120"/>
               </a:rPr>
-              <a:t>Presented by</a:t>
+              <a:t>PRESENTED BY</a:t>
             </a:r>
             <a:endParaRPr lang="en-US" sz="1100" dirty="0"/>
           </a:p>
@@ -2310,7 +2241,7 @@
         </p:nvSpPr>
         <p:spPr>
           <a:xfrm>
-            <a:off x="777240" y="6053328"/>
+            <a:off x="777240" y="6144768"/>
             <a:ext cx="3657600" cy="457200"/>
           </a:xfrm>
           <a:prstGeom prst="rect">
@@ -2352,659 +2283,6 @@
 <file path=ppt/slides/slide10.xml><?xml version="1.0" encoding="utf-8"?>
 <p:sld xmlns:a="http://schemas.openxmlformats.org/drawingml/2006/main" xmlns:r="http://schemas.openxmlformats.org/officeDocument/2006/relationships" xmlns:p="http://schemas.openxmlformats.org/presentationml/2006/main">
   <p:cSld name="Slide 10">
-    <p:bg>
-      <p:bgPr>
-        <a:solidFill>
-          <a:srgbClr val="1E4D39"/>
-        </a:solidFill>
-      </p:bgPr>
-    </p:bg>
-    <p:spTree>
-      <p:nvGrpSpPr>
-        <p:cNvPr id="1" name=""/>
-        <p:cNvGrpSpPr/>
-        <p:nvPr/>
-      </p:nvGrpSpPr>
-      <p:grpSpPr>
-        <a:xfrm>
-          <a:off x="0" y="0"/>
-          <a:ext cx="0" cy="0"/>
-          <a:chOff x="0" y="0"/>
-          <a:chExt cx="0" cy="0"/>
-        </a:xfrm>
-      </p:grpSpPr>
-      <p:sp>
-        <p:nvSpPr>
-          <p:cNvPr id="2" name="Text 0"/>
-          <p:cNvSpPr/>
-          <p:nvPr/>
-        </p:nvSpPr>
-        <p:spPr>
-          <a:xfrm>
-            <a:off x="548640" y="548640"/>
-            <a:ext cx="5486400" cy="274320"/>
-          </a:xfrm>
-          <a:prstGeom prst="rect">
-            <a:avLst/>
-          </a:prstGeom>
-          <a:noFill/>
-          <a:ln/>
-        </p:spPr>
-        <p:txBody>
-          <a:bodyPr wrap="square" rtlCol="0" anchor="ctr"/>
-          <a:lstStyle/>
-          <a:p>
-            <a:pPr algn="l" indent="0" marL="0">
-              <a:buNone/>
-            </a:pPr>
-            <a:r>
-              <a:rPr lang="en-US" sz="1250" b="1" spc="300" kern="0" dirty="0">
-                <a:solidFill>
-                  <a:srgbClr val="C6A24E"/>
-                </a:solidFill>
-                <a:latin typeface="Calibri" pitchFamily="34" charset="0"/>
-                <a:ea typeface="Calibri" pitchFamily="34" charset="-122"/>
-                <a:cs typeface="Calibri" pitchFamily="34" charset="-120"/>
-              </a:rPr>
-              <a:t>THE RANGE</a:t>
-            </a:r>
-            <a:endParaRPr lang="en-US" sz="1250" dirty="0"/>
-          </a:p>
-        </p:txBody>
-      </p:sp>
-      <p:sp>
-        <p:nvSpPr>
-          <p:cNvPr id="3" name="Text 1"/>
-          <p:cNvSpPr/>
-          <p:nvPr/>
-        </p:nvSpPr>
-        <p:spPr>
-          <a:xfrm>
-            <a:off x="502920" y="868680"/>
-            <a:ext cx="8229600" cy="640080"/>
-          </a:xfrm>
-          <a:prstGeom prst="rect">
-            <a:avLst/>
-          </a:prstGeom>
-          <a:noFill/>
-          <a:ln/>
-        </p:spPr>
-        <p:txBody>
-          <a:bodyPr wrap="square" rtlCol="0" anchor="ctr"/>
-          <a:lstStyle/>
-          <a:p>
-            <a:pPr indent="0" marL="0">
-              <a:buNone/>
-            </a:pPr>
-            <a:r>
-              <a:rPr lang="en-US" sz="3000" b="1" dirty="0">
-                <a:solidFill>
-                  <a:srgbClr val="FFFFFF"/>
-                </a:solidFill>
-                <a:latin typeface="Cambria" pitchFamily="34" charset="0"/>
-                <a:ea typeface="Cambria" pitchFamily="34" charset="-122"/>
-                <a:cs typeface="Cambria" pitchFamily="34" charset="-120"/>
-              </a:rPr>
-              <a:t>Merchandising the Doft story</a:t>
-            </a:r>
-            <a:endParaRPr lang="en-US" sz="3000" dirty="0"/>
-          </a:p>
-        </p:txBody>
-      </p:sp>
-      <p:sp>
-        <p:nvSpPr>
-          <p:cNvPr id="4" name="Text 2"/>
-          <p:cNvSpPr/>
-          <p:nvPr/>
-        </p:nvSpPr>
-        <p:spPr>
-          <a:xfrm>
-            <a:off x="502920" y="1508760"/>
-            <a:ext cx="8229600" cy="365760"/>
-          </a:xfrm>
-          <a:prstGeom prst="rect">
-            <a:avLst/>
-          </a:prstGeom>
-          <a:noFill/>
-          <a:ln/>
-        </p:spPr>
-        <p:txBody>
-          <a:bodyPr wrap="square" rtlCol="0" anchor="ctr"/>
-          <a:lstStyle/>
-          <a:p>
-            <a:pPr indent="0" marL="0">
-              <a:buNone/>
-            </a:pPr>
-            <a:r>
-              <a:rPr lang="en-US" sz="1400" dirty="0">
-                <a:solidFill>
-                  <a:srgbClr val="D9E4DC"/>
-                </a:solidFill>
-                <a:latin typeface="Calibri" pitchFamily="34" charset="0"/>
-                <a:ea typeface="Calibri" pitchFamily="34" charset="-122"/>
-                <a:cs typeface="Calibri" pitchFamily="34" charset="-120"/>
-              </a:rPr>
-              <a:t>Backlit shelving and glass showcases stage the full gifting range at eye level.</a:t>
-            </a:r>
-            <a:endParaRPr lang="en-US" sz="1400" dirty="0"/>
-          </a:p>
-        </p:txBody>
-      </p:sp>
-      <p:sp>
-        <p:nvSpPr>
-          <p:cNvPr id="5" name="Shape 3"/>
-          <p:cNvSpPr/>
-          <p:nvPr/>
-        </p:nvSpPr>
-        <p:spPr>
-          <a:xfrm>
-            <a:off x="502920" y="2148840"/>
-            <a:ext cx="2606040" cy="2331720"/>
-          </a:xfrm>
-          <a:prstGeom prst="rect">
-            <a:avLst/>
-          </a:prstGeom>
-          <a:solidFill>
-            <a:srgbClr val="FCF8EF"/>
-          </a:solidFill>
-          <a:ln w="12700">
-            <a:solidFill>
-              <a:srgbClr val="C6A24E"/>
-            </a:solidFill>
-            <a:prstDash val="solid"/>
-          </a:ln>
-        </p:spPr>
-      </p:sp>
-      <p:pic>
-        <p:nvPicPr>
-          <p:cNvPr id="6" name="Image 0" descr="brief_assets/DOFT/16871dda-65d9-4f51-acfd-b2b5ad6183e9.JPG">    </p:cNvPr>
-          <p:cNvPicPr>
-            <a:picLocks noChangeAspect="1"/>
-          </p:cNvPicPr>
-          <p:nvPr/>
-        </p:nvPicPr>
-        <p:blipFill>
-          <a:blip r:embed="rId1"/>
-          <a:srcRect l="0" r="0" t="0" b="0"/>
-          <a:stretch/>
-        </p:blipFill>
-        <p:spPr>
-          <a:xfrm>
-            <a:off x="612648" y="2258568"/>
-            <a:ext cx="2386584" cy="1691640"/>
-          </a:xfrm>
-          <a:prstGeom prst="rect">
-            <a:avLst/>
-          </a:prstGeom>
-        </p:spPr>
-      </p:pic>
-      <p:sp>
-        <p:nvSpPr>
-          <p:cNvPr id="7" name="Text 4"/>
-          <p:cNvSpPr/>
-          <p:nvPr/>
-        </p:nvSpPr>
-        <p:spPr>
-          <a:xfrm>
-            <a:off x="502920" y="4023360"/>
-            <a:ext cx="2606040" cy="365760"/>
-          </a:xfrm>
-          <a:prstGeom prst="rect">
-            <a:avLst/>
-          </a:prstGeom>
-          <a:noFill/>
-          <a:ln/>
-        </p:spPr>
-        <p:txBody>
-          <a:bodyPr wrap="square" rtlCol="0" anchor="ctr"/>
-          <a:lstStyle/>
-          <a:p>
-            <a:pPr algn="ctr" indent="0" marL="0">
-              <a:buNone/>
-            </a:pPr>
-            <a:r>
-              <a:rPr lang="en-US" sz="1250" b="1" dirty="0">
-                <a:solidFill>
-                  <a:srgbClr val="1E4D39"/>
-                </a:solidFill>
-                <a:latin typeface="Cambria" pitchFamily="34" charset="0"/>
-                <a:ea typeface="Cambria" pitchFamily="34" charset="-122"/>
-                <a:cs typeface="Cambria" pitchFamily="34" charset="-120"/>
-              </a:rPr>
-              <a:t>Scented candles</a:t>
-            </a:r>
-            <a:endParaRPr lang="en-US" sz="1250" dirty="0"/>
-          </a:p>
-        </p:txBody>
-      </p:sp>
-      <p:sp>
-        <p:nvSpPr>
-          <p:cNvPr id="8" name="Shape 5"/>
-          <p:cNvSpPr/>
-          <p:nvPr/>
-        </p:nvSpPr>
-        <p:spPr>
-          <a:xfrm>
-            <a:off x="3429000" y="2148840"/>
-            <a:ext cx="2606040" cy="2331720"/>
-          </a:xfrm>
-          <a:prstGeom prst="rect">
-            <a:avLst/>
-          </a:prstGeom>
-          <a:solidFill>
-            <a:srgbClr val="FCF8EF"/>
-          </a:solidFill>
-          <a:ln w="12700">
-            <a:solidFill>
-              <a:srgbClr val="C6A24E"/>
-            </a:solidFill>
-            <a:prstDash val="solid"/>
-          </a:ln>
-        </p:spPr>
-      </p:sp>
-      <p:pic>
-        <p:nvPicPr>
-          <p:cNvPr id="9" name="Image 1" descr="brief_assets/DOFT/5dc4e2f7-31d9-4a47-ba1e-1ed1f98adf47.JPG">    </p:cNvPr>
-          <p:cNvPicPr>
-            <a:picLocks noChangeAspect="1"/>
-          </p:cNvPicPr>
-          <p:nvPr/>
-        </p:nvPicPr>
-        <p:blipFill>
-          <a:blip r:embed="rId2"/>
-          <a:srcRect l="0" r="0" t="0" b="0"/>
-          <a:stretch/>
-        </p:blipFill>
-        <p:spPr>
-          <a:xfrm>
-            <a:off x="3538728" y="2258568"/>
-            <a:ext cx="2386584" cy="1691640"/>
-          </a:xfrm>
-          <a:prstGeom prst="rect">
-            <a:avLst/>
-          </a:prstGeom>
-        </p:spPr>
-      </p:pic>
-      <p:sp>
-        <p:nvSpPr>
-          <p:cNvPr id="10" name="Text 6"/>
-          <p:cNvSpPr/>
-          <p:nvPr/>
-        </p:nvSpPr>
-        <p:spPr>
-          <a:xfrm>
-            <a:off x="3429000" y="4023360"/>
-            <a:ext cx="2606040" cy="365760"/>
-          </a:xfrm>
-          <a:prstGeom prst="rect">
-            <a:avLst/>
-          </a:prstGeom>
-          <a:noFill/>
-          <a:ln/>
-        </p:spPr>
-        <p:txBody>
-          <a:bodyPr wrap="square" rtlCol="0" anchor="ctr"/>
-          <a:lstStyle/>
-          <a:p>
-            <a:pPr algn="ctr" indent="0" marL="0">
-              <a:buNone/>
-            </a:pPr>
-            <a:r>
-              <a:rPr lang="en-US" sz="1250" b="1" dirty="0">
-                <a:solidFill>
-                  <a:srgbClr val="1E4D39"/>
-                </a:solidFill>
-                <a:latin typeface="Cambria" pitchFamily="34" charset="0"/>
-                <a:ea typeface="Cambria" pitchFamily="34" charset="-122"/>
-                <a:cs typeface="Cambria" pitchFamily="34" charset="-120"/>
-              </a:rPr>
-              <a:t>Gift hampers</a:t>
-            </a:r>
-            <a:endParaRPr lang="en-US" sz="1250" dirty="0"/>
-          </a:p>
-        </p:txBody>
-      </p:sp>
-      <p:sp>
-        <p:nvSpPr>
-          <p:cNvPr id="11" name="Shape 7"/>
-          <p:cNvSpPr/>
-          <p:nvPr/>
-        </p:nvSpPr>
-        <p:spPr>
-          <a:xfrm>
-            <a:off x="6355080" y="2148840"/>
-            <a:ext cx="2606040" cy="2331720"/>
-          </a:xfrm>
-          <a:prstGeom prst="rect">
-            <a:avLst/>
-          </a:prstGeom>
-          <a:solidFill>
-            <a:srgbClr val="FCF8EF"/>
-          </a:solidFill>
-          <a:ln w="12700">
-            <a:solidFill>
-              <a:srgbClr val="C6A24E"/>
-            </a:solidFill>
-            <a:prstDash val="solid"/>
-          </a:ln>
-        </p:spPr>
-      </p:sp>
-      <p:pic>
-        <p:nvPicPr>
-          <p:cNvPr id="12" name="Image 2" descr="brief_assets/DOFT/14f3dd5c-717d-40c6-9314-74ee5f820af0.JPG">    </p:cNvPr>
-          <p:cNvPicPr>
-            <a:picLocks noChangeAspect="1"/>
-          </p:cNvPicPr>
-          <p:nvPr/>
-        </p:nvPicPr>
-        <p:blipFill>
-          <a:blip r:embed="rId3"/>
-          <a:srcRect l="0" r="0" t="0" b="0"/>
-          <a:stretch/>
-        </p:blipFill>
-        <p:spPr>
-          <a:xfrm>
-            <a:off x="6464808" y="2258568"/>
-            <a:ext cx="2386584" cy="1691640"/>
-          </a:xfrm>
-          <a:prstGeom prst="rect">
-            <a:avLst/>
-          </a:prstGeom>
-        </p:spPr>
-      </p:pic>
-      <p:sp>
-        <p:nvSpPr>
-          <p:cNvPr id="13" name="Text 8"/>
-          <p:cNvSpPr/>
-          <p:nvPr/>
-        </p:nvSpPr>
-        <p:spPr>
-          <a:xfrm>
-            <a:off x="6355080" y="4023360"/>
-            <a:ext cx="2606040" cy="365760"/>
-          </a:xfrm>
-          <a:prstGeom prst="rect">
-            <a:avLst/>
-          </a:prstGeom>
-          <a:noFill/>
-          <a:ln/>
-        </p:spPr>
-        <p:txBody>
-          <a:bodyPr wrap="square" rtlCol="0" anchor="ctr"/>
-          <a:lstStyle/>
-          <a:p>
-            <a:pPr algn="ctr" indent="0" marL="0">
-              <a:buNone/>
-            </a:pPr>
-            <a:r>
-              <a:rPr lang="en-US" sz="1250" b="1" dirty="0">
-                <a:solidFill>
-                  <a:srgbClr val="1E4D39"/>
-                </a:solidFill>
-                <a:latin typeface="Cambria" pitchFamily="34" charset="0"/>
-                <a:ea typeface="Cambria" pitchFamily="34" charset="-122"/>
-                <a:cs typeface="Cambria" pitchFamily="34" charset="-120"/>
-              </a:rPr>
-              <a:t>Reed diffusers &amp; sprays</a:t>
-            </a:r>
-            <a:endParaRPr lang="en-US" sz="1250" dirty="0"/>
-          </a:p>
-        </p:txBody>
-      </p:sp>
-      <p:sp>
-        <p:nvSpPr>
-          <p:cNvPr id="14" name="Shape 9"/>
-          <p:cNvSpPr/>
-          <p:nvPr/>
-        </p:nvSpPr>
-        <p:spPr>
-          <a:xfrm>
-            <a:off x="9281160" y="2148840"/>
-            <a:ext cx="2606040" cy="2331720"/>
-          </a:xfrm>
-          <a:prstGeom prst="rect">
-            <a:avLst/>
-          </a:prstGeom>
-          <a:solidFill>
-            <a:srgbClr val="FCF8EF"/>
-          </a:solidFill>
-          <a:ln w="12700">
-            <a:solidFill>
-              <a:srgbClr val="C6A24E"/>
-            </a:solidFill>
-            <a:prstDash val="solid"/>
-          </a:ln>
-        </p:spPr>
-      </p:sp>
-      <p:pic>
-        <p:nvPicPr>
-          <p:cNvPr id="15" name="Image 3" descr="brief_assets/DOFT/66d435a3-c7c1-44d9-b723-01f7df92b433.JPG">    </p:cNvPr>
-          <p:cNvPicPr>
-            <a:picLocks noChangeAspect="1"/>
-          </p:cNvPicPr>
-          <p:nvPr/>
-        </p:nvPicPr>
-        <p:blipFill>
-          <a:blip r:embed="rId4"/>
-          <a:srcRect l="0" r="0" t="0" b="0"/>
-          <a:stretch/>
-        </p:blipFill>
-        <p:spPr>
-          <a:xfrm>
-            <a:off x="9390888" y="2258568"/>
-            <a:ext cx="2386584" cy="1691640"/>
-          </a:xfrm>
-          <a:prstGeom prst="rect">
-            <a:avLst/>
-          </a:prstGeom>
-        </p:spPr>
-      </p:pic>
-      <p:sp>
-        <p:nvSpPr>
-          <p:cNvPr id="16" name="Text 10"/>
-          <p:cNvSpPr/>
-          <p:nvPr/>
-        </p:nvSpPr>
-        <p:spPr>
-          <a:xfrm>
-            <a:off x="9281160" y="4023360"/>
-            <a:ext cx="2606040" cy="365760"/>
-          </a:xfrm>
-          <a:prstGeom prst="rect">
-            <a:avLst/>
-          </a:prstGeom>
-          <a:noFill/>
-          <a:ln/>
-        </p:spPr>
-        <p:txBody>
-          <a:bodyPr wrap="square" rtlCol="0" anchor="ctr"/>
-          <a:lstStyle/>
-          <a:p>
-            <a:pPr algn="ctr" indent="0" marL="0">
-              <a:buNone/>
-            </a:pPr>
-            <a:r>
-              <a:rPr lang="en-US" sz="1250" b="1" dirty="0">
-                <a:solidFill>
-                  <a:srgbClr val="1E4D39"/>
-                </a:solidFill>
-                <a:latin typeface="Cambria" pitchFamily="34" charset="0"/>
-                <a:ea typeface="Cambria" pitchFamily="34" charset="-122"/>
-                <a:cs typeface="Cambria" pitchFamily="34" charset="-120"/>
-              </a:rPr>
-              <a:t>Festive gift boxes</a:t>
-            </a:r>
-            <a:endParaRPr lang="en-US" sz="1250" dirty="0"/>
-          </a:p>
-        </p:txBody>
-      </p:sp>
-      <p:sp>
-        <p:nvSpPr>
-          <p:cNvPr id="17" name="Text 11"/>
-          <p:cNvSpPr/>
-          <p:nvPr/>
-        </p:nvSpPr>
-        <p:spPr>
-          <a:xfrm>
-            <a:off x="457200" y="6419088"/>
-            <a:ext cx="7315200" cy="320040"/>
-          </a:xfrm>
-          <a:prstGeom prst="rect">
-            <a:avLst/>
-          </a:prstGeom>
-          <a:noFill/>
-          <a:ln/>
-        </p:spPr>
-        <p:txBody>
-          <a:bodyPr wrap="square" rtlCol="0" anchor="ctr"/>
-          <a:lstStyle/>
-          <a:p>
-            <a:pPr algn="l" indent="0" marL="0">
-              <a:buNone/>
-            </a:pPr>
-            <a:r>
-              <a:rPr lang="en-US" sz="950" b="1" spc="100" kern="0" dirty="0">
-                <a:solidFill>
-                  <a:srgbClr val="C6A24E"/>
-                </a:solidFill>
-                <a:latin typeface="Cambria" pitchFamily="34" charset="0"/>
-                <a:ea typeface="Cambria" pitchFamily="34" charset="-122"/>
-                <a:cs typeface="Cambria" pitchFamily="34" charset="-120"/>
-              </a:rPr>
-              <a:t>DOFT</a:t>
-            </a:r>
-            <a:pPr algn="l" indent="0" marL="0">
-              <a:buNone/>
-            </a:pPr>
-            <a:r>
-              <a:rPr lang="en-US" sz="950" spc="100" kern="0" dirty="0">
-                <a:solidFill>
-                  <a:srgbClr val="7A7264"/>
-                </a:solidFill>
-                <a:latin typeface="Calibri" pitchFamily="34" charset="0"/>
-                <a:ea typeface="Calibri" pitchFamily="34" charset="-122"/>
-                <a:cs typeface="Calibri" pitchFamily="34" charset="-120"/>
-              </a:rPr>
-              <a:t>  ·  SCENTED MEMORIES  ·  Diwali Pop-Up Kiosk Concept</a:t>
-            </a:r>
-            <a:endParaRPr lang="en-US" sz="950" dirty="0"/>
-          </a:p>
-        </p:txBody>
-      </p:sp>
-      <p:sp>
-        <p:nvSpPr>
-          <p:cNvPr id="18" name="Text 12"/>
-          <p:cNvSpPr/>
-          <p:nvPr/>
-        </p:nvSpPr>
-        <p:spPr>
-          <a:xfrm>
-            <a:off x="10058400" y="6419088"/>
-            <a:ext cx="1691640" cy="320040"/>
-          </a:xfrm>
-          <a:prstGeom prst="rect">
-            <a:avLst/>
-          </a:prstGeom>
-          <a:noFill/>
-          <a:ln/>
-        </p:spPr>
-        <p:txBody>
-          <a:bodyPr wrap="square" rtlCol="0" anchor="ctr"/>
-          <a:lstStyle/>
-          <a:p>
-            <a:pPr algn="r" indent="0" marL="0">
-              <a:buNone/>
-            </a:pPr>
-            <a:r>
-              <a:rPr lang="en-US" sz="950" dirty="0">
-                <a:solidFill>
-                  <a:srgbClr val="7A7264"/>
-                </a:solidFill>
-                <a:latin typeface="Calibri" pitchFamily="34" charset="0"/>
-                <a:ea typeface="Calibri" pitchFamily="34" charset="-122"/>
-                <a:cs typeface="Calibri" pitchFamily="34" charset="-120"/>
-              </a:rPr>
-              <a:t>ProMarcom</a:t>
-            </a:r>
-            <a:endParaRPr lang="en-US" sz="950" dirty="0"/>
-          </a:p>
-        </p:txBody>
-      </p:sp>
-      <p:sp>
-        <p:nvSpPr>
-          <p:cNvPr id="19" name="Shape 13"/>
-          <p:cNvSpPr/>
-          <p:nvPr/>
-        </p:nvSpPr>
-        <p:spPr>
-          <a:xfrm>
-            <a:off x="11475720" y="6364224"/>
-            <a:ext cx="402336" cy="402336"/>
-          </a:xfrm>
-          <a:prstGeom prst="ellipse">
-            <a:avLst/>
-          </a:prstGeom>
-          <a:solidFill>
-            <a:srgbClr val="FFFFFF"/>
-          </a:solidFill>
-          <a:ln w="12700">
-            <a:solidFill>
-              <a:srgbClr val="C6A24E"/>
-            </a:solidFill>
-            <a:prstDash val="solid"/>
-          </a:ln>
-        </p:spPr>
-      </p:sp>
-      <p:sp>
-        <p:nvSpPr>
-          <p:cNvPr id="20" name="Text 14"/>
-          <p:cNvSpPr/>
-          <p:nvPr/>
-        </p:nvSpPr>
-        <p:spPr>
-          <a:xfrm>
-            <a:off x="11475720" y="6364224"/>
-            <a:ext cx="402336" cy="402336"/>
-          </a:xfrm>
-          <a:prstGeom prst="rect">
-            <a:avLst/>
-          </a:prstGeom>
-          <a:noFill/>
-          <a:ln/>
-        </p:spPr>
-        <p:txBody>
-          <a:bodyPr wrap="square" rtlCol="0" anchor="ctr"/>
-          <a:lstStyle/>
-          <a:p>
-            <a:pPr algn="ctr" indent="0" marL="0">
-              <a:buNone/>
-            </a:pPr>
-            <a:r>
-              <a:rPr lang="en-US" sz="1100" b="1" dirty="0">
-                <a:solidFill>
-                  <a:srgbClr val="1E4D39"/>
-                </a:solidFill>
-                <a:latin typeface="Cambria" pitchFamily="34" charset="0"/>
-                <a:ea typeface="Cambria" pitchFamily="34" charset="-122"/>
-                <a:cs typeface="Cambria" pitchFamily="34" charset="-120"/>
-              </a:rPr>
-              <a:t>10</a:t>
-            </a:r>
-            <a:endParaRPr lang="en-US" sz="1100" dirty="0"/>
-          </a:p>
-        </p:txBody>
-      </p:sp>
-    </p:spTree>
-  </p:cSld>
-  <p:clrMapOvr>
-    <a:masterClrMapping/>
-  </p:clrMapOvr>
-</p:sld>
-</file>
-
-<file path=ppt/slides/slide11.xml><?xml version="1.0" encoding="utf-8"?>
-<p:sld xmlns:a="http://schemas.openxmlformats.org/drawingml/2006/main" xmlns:r="http://schemas.openxmlformats.org/officeDocument/2006/relationships" xmlns:p="http://schemas.openxmlformats.org/presentationml/2006/main">
-  <p:cSld name="Slide 11">
     <p:bg>
       <p:bgPr>
         <a:solidFill>
@@ -3035,7 +2313,7 @@
         <p:spPr>
           <a:xfrm>
             <a:off x="548640" y="457200"/>
-            <a:ext cx="5486400" cy="274320"/>
+            <a:ext cx="6400800" cy="274320"/>
           </a:xfrm>
           <a:prstGeom prst="rect">
             <a:avLst/>
@@ -3092,7 +2370,7 @@
             <a:r>
               <a:rPr lang="en-US" sz="3000" b="1" dirty="0">
                 <a:solidFill>
-                  <a:srgbClr val="1E4D39"/>
+                  <a:srgbClr val="2B2621"/>
                 </a:solidFill>
                 <a:latin typeface="Cambria" pitchFamily="34" charset="0"/>
                 <a:ea typeface="Cambria" pitchFamily="34" charset="-122"/>
@@ -3151,7 +2429,7 @@
             <a:r>
               <a:rPr lang="en-US" sz="1350" b="1" dirty="0">
                 <a:solidFill>
-                  <a:srgbClr val="1E4D39"/>
+                  <a:srgbClr val="2B2621"/>
                 </a:solidFill>
                 <a:latin typeface="Cambria" pitchFamily="34" charset="0"/>
                 <a:ea typeface="Cambria" pitchFamily="34" charset="-122"/>
@@ -3165,7 +2443,7 @@
             <a:r>
               <a:rPr lang="en-US" sz="1350" dirty="0">
                 <a:solidFill>
-                  <a:srgbClr val="7A7264"/>
+                  <a:srgbClr val="857B6C"/>
                 </a:solidFill>
                 <a:latin typeface="Calibri" pitchFamily="34" charset="0"/>
                 <a:ea typeface="Calibri" pitchFamily="34" charset="-122"/>
@@ -3224,7 +2502,7 @@
             <a:r>
               <a:rPr lang="en-US" sz="1350" b="1" dirty="0">
                 <a:solidFill>
-                  <a:srgbClr val="1E4D39"/>
+                  <a:srgbClr val="2B2621"/>
                 </a:solidFill>
                 <a:latin typeface="Cambria" pitchFamily="34" charset="0"/>
                 <a:ea typeface="Cambria" pitchFamily="34" charset="-122"/>
@@ -3238,7 +2516,7 @@
             <a:r>
               <a:rPr lang="en-US" sz="1350" dirty="0">
                 <a:solidFill>
-                  <a:srgbClr val="7A7264"/>
+                  <a:srgbClr val="857B6C"/>
                 </a:solidFill>
                 <a:latin typeface="Calibri" pitchFamily="34" charset="0"/>
                 <a:ea typeface="Calibri" pitchFamily="34" charset="-122"/>
@@ -3297,7 +2575,7 @@
             <a:r>
               <a:rPr lang="en-US" sz="1350" b="1" dirty="0">
                 <a:solidFill>
-                  <a:srgbClr val="1E4D39"/>
+                  <a:srgbClr val="2B2621"/>
                 </a:solidFill>
                 <a:latin typeface="Cambria" pitchFamily="34" charset="0"/>
                 <a:ea typeface="Cambria" pitchFamily="34" charset="-122"/>
@@ -3311,7 +2589,7 @@
             <a:r>
               <a:rPr lang="en-US" sz="1350" dirty="0">
                 <a:solidFill>
-                  <a:srgbClr val="7A7264"/>
+                  <a:srgbClr val="857B6C"/>
                 </a:solidFill>
                 <a:latin typeface="Calibri" pitchFamily="34" charset="0"/>
                 <a:ea typeface="Calibri" pitchFamily="34" charset="-122"/>
@@ -3370,7 +2648,7 @@
             <a:r>
               <a:rPr lang="en-US" sz="1350" b="1" dirty="0">
                 <a:solidFill>
-                  <a:srgbClr val="1E4D39"/>
+                  <a:srgbClr val="2B2621"/>
                 </a:solidFill>
                 <a:latin typeface="Cambria" pitchFamily="34" charset="0"/>
                 <a:ea typeface="Cambria" pitchFamily="34" charset="-122"/>
@@ -3384,7 +2662,7 @@
             <a:r>
               <a:rPr lang="en-US" sz="1350" dirty="0">
                 <a:solidFill>
-                  <a:srgbClr val="7A7264"/>
+                  <a:srgbClr val="857B6C"/>
                 </a:solidFill>
                 <a:latin typeface="Calibri" pitchFamily="34" charset="0"/>
                 <a:ea typeface="Calibri" pitchFamily="34" charset="-122"/>
@@ -3443,7 +2721,7 @@
             <a:r>
               <a:rPr lang="en-US" sz="1350" b="1" dirty="0">
                 <a:solidFill>
-                  <a:srgbClr val="1E4D39"/>
+                  <a:srgbClr val="2B2621"/>
                 </a:solidFill>
                 <a:latin typeface="Cambria" pitchFamily="34" charset="0"/>
                 <a:ea typeface="Cambria" pitchFamily="34" charset="-122"/>
@@ -3457,7 +2735,7 @@
             <a:r>
               <a:rPr lang="en-US" sz="1350" dirty="0">
                 <a:solidFill>
-                  <a:srgbClr val="7A7264"/>
+                  <a:srgbClr val="857B6C"/>
                 </a:solidFill>
                 <a:latin typeface="Calibri" pitchFamily="34" charset="0"/>
                 <a:ea typeface="Calibri" pitchFamily="34" charset="-122"/>
@@ -3516,7 +2794,7 @@
             <a:r>
               <a:rPr lang="en-US" sz="1350" b="1" dirty="0">
                 <a:solidFill>
-                  <a:srgbClr val="1E4D39"/>
+                  <a:srgbClr val="2B2621"/>
                 </a:solidFill>
                 <a:latin typeface="Cambria" pitchFamily="34" charset="0"/>
                 <a:ea typeface="Cambria" pitchFamily="34" charset="-122"/>
@@ -3530,7 +2808,7 @@
             <a:r>
               <a:rPr lang="en-US" sz="1350" dirty="0">
                 <a:solidFill>
-                  <a:srgbClr val="7A7264"/>
+                  <a:srgbClr val="857B6C"/>
                 </a:solidFill>
                 <a:latin typeface="Calibri" pitchFamily="34" charset="0"/>
                 <a:ea typeface="Calibri" pitchFamily="34" charset="-122"/>
@@ -3589,7 +2867,7 @@
             <a:r>
               <a:rPr lang="en-US" sz="1350" b="1" dirty="0">
                 <a:solidFill>
-                  <a:srgbClr val="1E4D39"/>
+                  <a:srgbClr val="2B2621"/>
                 </a:solidFill>
                 <a:latin typeface="Cambria" pitchFamily="34" charset="0"/>
                 <a:ea typeface="Cambria" pitchFamily="34" charset="-122"/>
@@ -3603,7 +2881,7 @@
             <a:r>
               <a:rPr lang="en-US" sz="1350" dirty="0">
                 <a:solidFill>
-                  <a:srgbClr val="7A7264"/>
+                  <a:srgbClr val="857B6C"/>
                 </a:solidFill>
                 <a:latin typeface="Calibri" pitchFamily="34" charset="0"/>
                 <a:ea typeface="Calibri" pitchFamily="34" charset="-122"/>
@@ -3662,7 +2940,7 @@
             <a:r>
               <a:rPr lang="en-US" sz="1350" b="1" dirty="0">
                 <a:solidFill>
-                  <a:srgbClr val="1E4D39"/>
+                  <a:srgbClr val="2B2621"/>
                 </a:solidFill>
                 <a:latin typeface="Cambria" pitchFamily="34" charset="0"/>
                 <a:ea typeface="Cambria" pitchFamily="34" charset="-122"/>
@@ -3676,7 +2954,7 @@
             <a:r>
               <a:rPr lang="en-US" sz="1350" dirty="0">
                 <a:solidFill>
-                  <a:srgbClr val="7A7264"/>
+                  <a:srgbClr val="857B6C"/>
                 </a:solidFill>
                 <a:latin typeface="Calibri" pitchFamily="34" charset="0"/>
                 <a:ea typeface="Calibri" pitchFamily="34" charset="-122"/>
@@ -3735,7 +3013,7 @@
             <a:r>
               <a:rPr lang="en-US" sz="1350" b="1" dirty="0">
                 <a:solidFill>
-                  <a:srgbClr val="1E4D39"/>
+                  <a:srgbClr val="2B2621"/>
                 </a:solidFill>
                 <a:latin typeface="Cambria" pitchFamily="34" charset="0"/>
                 <a:ea typeface="Cambria" pitchFamily="34" charset="-122"/>
@@ -3749,7 +3027,7 @@
             <a:r>
               <a:rPr lang="en-US" sz="1350" dirty="0">
                 <a:solidFill>
-                  <a:srgbClr val="7A7264"/>
+                  <a:srgbClr val="857B6C"/>
                 </a:solidFill>
                 <a:latin typeface="Calibri" pitchFamily="34" charset="0"/>
                 <a:ea typeface="Calibri" pitchFamily="34" charset="-122"/>
@@ -3808,7 +3086,7 @@
             <a:r>
               <a:rPr lang="en-US" sz="1350" b="1" dirty="0">
                 <a:solidFill>
-                  <a:srgbClr val="1E4D39"/>
+                  <a:srgbClr val="2B2621"/>
                 </a:solidFill>
                 <a:latin typeface="Cambria" pitchFamily="34" charset="0"/>
                 <a:ea typeface="Cambria" pitchFamily="34" charset="-122"/>
@@ -3822,7 +3100,7 @@
             <a:r>
               <a:rPr lang="en-US" sz="1350" dirty="0">
                 <a:solidFill>
-                  <a:srgbClr val="7A7264"/>
+                  <a:srgbClr val="857B6C"/>
                 </a:solidFill>
                 <a:latin typeface="Calibri" pitchFamily="34" charset="0"/>
                 <a:ea typeface="Calibri" pitchFamily="34" charset="-122"/>
@@ -3881,7 +3159,7 @@
             <a:r>
               <a:rPr lang="en-US" sz="1350" b="1" dirty="0">
                 <a:solidFill>
-                  <a:srgbClr val="1E4D39"/>
+                  <a:srgbClr val="2B2621"/>
                 </a:solidFill>
                 <a:latin typeface="Cambria" pitchFamily="34" charset="0"/>
                 <a:ea typeface="Cambria" pitchFamily="34" charset="-122"/>
@@ -3895,7 +3173,7 @@
             <a:r>
               <a:rPr lang="en-US" sz="1350" dirty="0">
                 <a:solidFill>
-                  <a:srgbClr val="7A7264"/>
+                  <a:srgbClr val="857B6C"/>
                 </a:solidFill>
                 <a:latin typeface="Calibri" pitchFamily="34" charset="0"/>
                 <a:ea typeface="Calibri" pitchFamily="34" charset="-122"/>
@@ -3954,7 +3232,7 @@
             <a:r>
               <a:rPr lang="en-US" sz="1350" b="1" dirty="0">
                 <a:solidFill>
-                  <a:srgbClr val="1E4D39"/>
+                  <a:srgbClr val="2B2621"/>
                 </a:solidFill>
                 <a:latin typeface="Cambria" pitchFamily="34" charset="0"/>
                 <a:ea typeface="Cambria" pitchFamily="34" charset="-122"/>
@@ -3968,7 +3246,7 @@
             <a:r>
               <a:rPr lang="en-US" sz="1350" dirty="0">
                 <a:solidFill>
-                  <a:srgbClr val="7A7264"/>
+                  <a:srgbClr val="857B6C"/>
                 </a:solidFill>
                 <a:latin typeface="Calibri" pitchFamily="34" charset="0"/>
                 <a:ea typeface="Calibri" pitchFamily="34" charset="-122"/>
@@ -4027,7 +3305,7 @@
             <a:r>
               <a:rPr lang="en-US" sz="1350" b="1" dirty="0">
                 <a:solidFill>
-                  <a:srgbClr val="1E4D39"/>
+                  <a:srgbClr val="2B2621"/>
                 </a:solidFill>
                 <a:latin typeface="Cambria" pitchFamily="34" charset="0"/>
                 <a:ea typeface="Cambria" pitchFamily="34" charset="-122"/>
@@ -4041,7 +3319,7 @@
             <a:r>
               <a:rPr lang="en-US" sz="1350" dirty="0">
                 <a:solidFill>
-                  <a:srgbClr val="7A7264"/>
+                  <a:srgbClr val="857B6C"/>
                 </a:solidFill>
                 <a:latin typeface="Calibri" pitchFamily="34" charset="0"/>
                 <a:ea typeface="Calibri" pitchFamily="34" charset="-122"/>
@@ -4100,7 +3378,7 @@
             <a:r>
               <a:rPr lang="en-US" sz="1350" b="1" dirty="0">
                 <a:solidFill>
-                  <a:srgbClr val="1E4D39"/>
+                  <a:srgbClr val="2B2621"/>
                 </a:solidFill>
                 <a:latin typeface="Cambria" pitchFamily="34" charset="0"/>
                 <a:ea typeface="Cambria" pitchFamily="34" charset="-122"/>
@@ -4114,7 +3392,7 @@
             <a:r>
               <a:rPr lang="en-US" sz="1350" dirty="0">
                 <a:solidFill>
-                  <a:srgbClr val="7A7264"/>
+                  <a:srgbClr val="857B6C"/>
                 </a:solidFill>
                 <a:latin typeface="Calibri" pitchFamily="34" charset="0"/>
                 <a:ea typeface="Calibri" pitchFamily="34" charset="-122"/>
@@ -4141,11 +3419,11 @@
             <a:avLst/>
           </a:prstGeom>
           <a:solidFill>
-            <a:srgbClr val="FCF8EF"/>
+            <a:srgbClr val="FBF7EF"/>
           </a:solidFill>
           <a:ln w="12700">
             <a:solidFill>
-              <a:srgbClr val="E4DCC9"/>
+              <a:srgbClr val="E6DECB"/>
             </a:solidFill>
             <a:prstDash val="solid"/>
           </a:ln>
@@ -4178,7 +3456,7 @@
             <a:r>
               <a:rPr lang="en-US" sz="1250" b="1" dirty="0">
                 <a:solidFill>
-                  <a:srgbClr val="1E4D39"/>
+                  <a:srgbClr val="A9813A"/>
                 </a:solidFill>
                 <a:latin typeface="Calibri" pitchFamily="34" charset="0"/>
                 <a:ea typeface="Calibri" pitchFamily="34" charset="-122"/>
@@ -4192,7 +3470,7 @@
             <a:r>
               <a:rPr lang="en-US" sz="1250" dirty="0">
                 <a:solidFill>
-                  <a:srgbClr val="2C2924"/>
+                  <a:srgbClr val="2A2621"/>
                 </a:solidFill>
                 <a:latin typeface="Calibri" pitchFamily="34" charset="0"/>
                 <a:ea typeface="Calibri" pitchFamily="34" charset="-122"/>
@@ -4245,7 +3523,7 @@
             <a:r>
               <a:rPr lang="en-US" sz="950" spc="100" kern="0" dirty="0">
                 <a:solidFill>
-                  <a:srgbClr val="7A7264"/>
+                  <a:srgbClr val="857B6C"/>
                 </a:solidFill>
                 <a:latin typeface="Calibri" pitchFamily="34" charset="0"/>
                 <a:ea typeface="Calibri" pitchFamily="34" charset="-122"/>
@@ -4284,7 +3562,7 @@
             <a:r>
               <a:rPr lang="en-US" sz="950" dirty="0">
                 <a:solidFill>
-                  <a:srgbClr val="7A7264"/>
+                  <a:srgbClr val="857B6C"/>
                 </a:solidFill>
                 <a:latin typeface="Calibri" pitchFamily="34" charset="0"/>
                 <a:ea typeface="Calibri" pitchFamily="34" charset="-122"/>
@@ -4348,13 +3626,13 @@
             <a:r>
               <a:rPr lang="en-US" sz="1100" b="1" dirty="0">
                 <a:solidFill>
-                  <a:srgbClr val="1E4D39"/>
+                  <a:srgbClr val="2B2621"/>
                 </a:solidFill>
                 <a:latin typeface="Cambria" pitchFamily="34" charset="0"/>
                 <a:ea typeface="Cambria" pitchFamily="34" charset="-122"/>
                 <a:cs typeface="Cambria" pitchFamily="34" charset="-120"/>
               </a:rPr>
-              <a:t>11</a:t>
+              <a:t>10</a:t>
             </a:r>
             <a:endParaRPr lang="en-US" sz="1100" dirty="0"/>
           </a:p>
@@ -4368,13 +3646,13 @@
 </p:sld>
 </file>
 
-<file path=ppt/slides/slide12.xml><?xml version="1.0" encoding="utf-8"?>
+<file path=ppt/slides/slide11.xml><?xml version="1.0" encoding="utf-8"?>
 <p:sld xmlns:a="http://schemas.openxmlformats.org/drawingml/2006/main" xmlns:r="http://schemas.openxmlformats.org/officeDocument/2006/relationships" xmlns:p="http://schemas.openxmlformats.org/presentationml/2006/main">
-  <p:cSld name="Slide 12">
+  <p:cSld name="Slide 11">
     <p:bg>
       <p:bgPr>
         <a:solidFill>
-          <a:srgbClr val="FCF8EF"/>
+          <a:srgbClr val="EFEAE0"/>
         </a:solidFill>
       </p:bgPr>
     </p:bg>
@@ -4401,7 +3679,7 @@
         <p:spPr>
           <a:xfrm>
             <a:off x="548640" y="548640"/>
-            <a:ext cx="5486400" cy="274320"/>
+            <a:ext cx="6400800" cy="274320"/>
           </a:xfrm>
           <a:prstGeom prst="rect">
             <a:avLst/>
@@ -4458,7 +3736,7 @@
             <a:r>
               <a:rPr lang="en-US" sz="3000" b="1" dirty="0">
                 <a:solidFill>
-                  <a:srgbClr val="1E4D39"/>
+                  <a:srgbClr val="2B2621"/>
                 </a:solidFill>
                 <a:latin typeface="Cambria" pitchFamily="34" charset="0"/>
                 <a:ea typeface="Cambria" pitchFamily="34" charset="-122"/>
@@ -4489,7 +3767,7 @@
           </a:solidFill>
           <a:ln w="12700">
             <a:solidFill>
-              <a:srgbClr val="E4DCC9"/>
+              <a:srgbClr val="E6DECB"/>
             </a:solidFill>
             <a:prstDash val="solid"/>
           </a:ln>
@@ -4510,7 +3788,7 @@
             <a:avLst/>
           </a:prstGeom>
           <a:solidFill>
-            <a:srgbClr val="1E4D39"/>
+            <a:srgbClr val="2B2621"/>
           </a:solidFill>
           <a:ln/>
         </p:spPr>
@@ -4581,13 +3859,13 @@
             <a:r>
               <a:rPr lang="en-US" sz="1600" b="1" dirty="0">
                 <a:solidFill>
-                  <a:srgbClr val="1E4D39"/>
+                  <a:srgbClr val="2B2621"/>
                 </a:solidFill>
                 <a:latin typeface="Cambria" pitchFamily="34" charset="0"/>
                 <a:ea typeface="Cambria" pitchFamily="34" charset="-122"/>
                 <a:cs typeface="Cambria" pitchFamily="34" charset="-120"/>
               </a:rPr>
-              <a:t>Kiosk design</a:t>
+              <a:t>Kiosk build</a:t>
             </a:r>
             <a:endParaRPr lang="en-US" sz="1600" dirty="0"/>
           </a:p>
@@ -4623,13 +3901,13 @@
             <a:r>
               <a:rPr lang="en-US" sz="1200" dirty="0">
                 <a:solidFill>
-                  <a:srgbClr val="7A7264"/>
+                  <a:srgbClr val="857B6C"/>
                 </a:solidFill>
                 <a:latin typeface="Calibri" pitchFamily="34" charset="0"/>
                 <a:ea typeface="Calibri" pitchFamily="34" charset="-122"/>
                 <a:cs typeface="Calibri" pitchFamily="34" charset="-120"/>
               </a:rPr>
-              <a:t>Concept, 3D &amp; GA drawings</a:t>
+              <a:t>Fabrication to the approved design</a:t>
             </a:r>
             <a:endParaRPr lang="en-US" sz="1200" dirty="0"/>
           </a:p>
@@ -4654,7 +3932,7 @@
           </a:solidFill>
           <a:ln w="12700">
             <a:solidFill>
-              <a:srgbClr val="E4DCC9"/>
+              <a:srgbClr val="E6DECB"/>
             </a:solidFill>
             <a:prstDash val="solid"/>
           </a:ln>
@@ -4675,7 +3953,7 @@
             <a:avLst/>
           </a:prstGeom>
           <a:solidFill>
-            <a:srgbClr val="1E4D39"/>
+            <a:srgbClr val="2B2621"/>
           </a:solidFill>
           <a:ln/>
         </p:spPr>
@@ -4746,13 +4024,13 @@
             <a:r>
               <a:rPr lang="en-US" sz="1600" b="1" dirty="0">
                 <a:solidFill>
-                  <a:srgbClr val="1E4D39"/>
+                  <a:srgbClr val="2B2621"/>
                 </a:solidFill>
                 <a:latin typeface="Cambria" pitchFamily="34" charset="0"/>
                 <a:ea typeface="Cambria" pitchFamily="34" charset="-122"/>
                 <a:cs typeface="Cambria" pitchFamily="34" charset="-120"/>
               </a:rPr>
-              <a:t>Build &amp; install</a:t>
+              <a:t>Transport &amp; install</a:t>
             </a:r>
             <a:endParaRPr lang="en-US" sz="1600" dirty="0"/>
           </a:p>
@@ -4788,13 +4066,13 @@
             <a:r>
               <a:rPr lang="en-US" sz="1200" dirty="0">
                 <a:solidFill>
-                  <a:srgbClr val="7A7264"/>
+                  <a:srgbClr val="857B6C"/>
                 </a:solidFill>
                 <a:latin typeface="Calibri" pitchFamily="34" charset="0"/>
                 <a:ea typeface="Calibri" pitchFamily="34" charset="-122"/>
                 <a:cs typeface="Calibri" pitchFamily="34" charset="-120"/>
               </a:rPr>
-              <a:t>Fabrication, transport, on-site setup</a:t>
+              <a:t>Delivery, on-site setup &amp; finishing</a:t>
             </a:r>
             <a:endParaRPr lang="en-US" sz="1200" dirty="0"/>
           </a:p>
@@ -4819,7 +4097,7 @@
           </a:solidFill>
           <a:ln w="12700">
             <a:solidFill>
-              <a:srgbClr val="E4DCC9"/>
+              <a:srgbClr val="E6DECB"/>
             </a:solidFill>
             <a:prstDash val="solid"/>
           </a:ln>
@@ -4840,7 +4118,7 @@
             <a:avLst/>
           </a:prstGeom>
           <a:solidFill>
-            <a:srgbClr val="1E4D39"/>
+            <a:srgbClr val="2B2621"/>
           </a:solidFill>
           <a:ln/>
         </p:spPr>
@@ -4911,7 +4189,7 @@
             <a:r>
               <a:rPr lang="en-US" sz="1600" b="1" dirty="0">
                 <a:solidFill>
-                  <a:srgbClr val="1E4D39"/>
+                  <a:srgbClr val="2B2621"/>
                 </a:solidFill>
                 <a:latin typeface="Cambria" pitchFamily="34" charset="0"/>
                 <a:ea typeface="Cambria" pitchFamily="34" charset="-122"/>
@@ -4953,7 +4231,7 @@
             <a:r>
               <a:rPr lang="en-US" sz="1200" dirty="0">
                 <a:solidFill>
-                  <a:srgbClr val="7A7264"/>
+                  <a:srgbClr val="857B6C"/>
                 </a:solidFill>
                 <a:latin typeface="Calibri" pitchFamily="34" charset="0"/>
                 <a:ea typeface="Calibri" pitchFamily="34" charset="-122"/>
@@ -4984,7 +4262,7 @@
           </a:solidFill>
           <a:ln w="12700">
             <a:solidFill>
-              <a:srgbClr val="E4DCC9"/>
+              <a:srgbClr val="E6DECB"/>
             </a:solidFill>
             <a:prstDash val="solid"/>
           </a:ln>
@@ -5005,7 +4283,7 @@
             <a:avLst/>
           </a:prstGeom>
           <a:solidFill>
-            <a:srgbClr val="1E4D39"/>
+            <a:srgbClr val="2B2621"/>
           </a:solidFill>
           <a:ln/>
         </p:spPr>
@@ -5076,7 +4354,7 @@
             <a:r>
               <a:rPr lang="en-US" sz="1600" b="1" dirty="0">
                 <a:solidFill>
-                  <a:srgbClr val="1E4D39"/>
+                  <a:srgbClr val="2B2621"/>
                 </a:solidFill>
                 <a:latin typeface="Cambria" pitchFamily="34" charset="0"/>
                 <a:ea typeface="Cambria" pitchFamily="34" charset="-122"/>
@@ -5118,7 +4396,7 @@
             <a:r>
               <a:rPr lang="en-US" sz="1200" dirty="0">
                 <a:solidFill>
-                  <a:srgbClr val="7A7264"/>
+                  <a:srgbClr val="857B6C"/>
                 </a:solidFill>
                 <a:latin typeface="Calibri" pitchFamily="34" charset="0"/>
                 <a:ea typeface="Calibri" pitchFamily="34" charset="-122"/>
@@ -5149,7 +4427,7 @@
           </a:solidFill>
           <a:ln w="12700">
             <a:solidFill>
-              <a:srgbClr val="E4DCC9"/>
+              <a:srgbClr val="E6DECB"/>
             </a:solidFill>
             <a:prstDash val="solid"/>
           </a:ln>
@@ -5170,7 +4448,7 @@
             <a:avLst/>
           </a:prstGeom>
           <a:solidFill>
-            <a:srgbClr val="1E4D39"/>
+            <a:srgbClr val="2B2621"/>
           </a:solidFill>
           <a:ln/>
         </p:spPr>
@@ -5241,7 +4519,7 @@
             <a:r>
               <a:rPr lang="en-US" sz="1600" b="1" dirty="0">
                 <a:solidFill>
-                  <a:srgbClr val="1E4D39"/>
+                  <a:srgbClr val="2B2621"/>
                 </a:solidFill>
                 <a:latin typeface="Cambria" pitchFamily="34" charset="0"/>
                 <a:ea typeface="Cambria" pitchFamily="34" charset="-122"/>
@@ -5283,7 +4561,7 @@
             <a:r>
               <a:rPr lang="en-US" sz="1200" dirty="0">
                 <a:solidFill>
-                  <a:srgbClr val="7A7264"/>
+                  <a:srgbClr val="857B6C"/>
                 </a:solidFill>
                 <a:latin typeface="Calibri" pitchFamily="34" charset="0"/>
                 <a:ea typeface="Calibri" pitchFamily="34" charset="-122"/>
@@ -5314,7 +4592,7 @@
           </a:solidFill>
           <a:ln w="12700">
             <a:solidFill>
-              <a:srgbClr val="E4DCC9"/>
+              <a:srgbClr val="E6DECB"/>
             </a:solidFill>
             <a:prstDash val="solid"/>
           </a:ln>
@@ -5335,7 +4613,7 @@
             <a:avLst/>
           </a:prstGeom>
           <a:solidFill>
-            <a:srgbClr val="1E4D39"/>
+            <a:srgbClr val="2B2621"/>
           </a:solidFill>
           <a:ln/>
         </p:spPr>
@@ -5406,7 +4684,7 @@
             <a:r>
               <a:rPr lang="en-US" sz="1600" b="1" dirty="0">
                 <a:solidFill>
-                  <a:srgbClr val="1E4D39"/>
+                  <a:srgbClr val="2B2621"/>
                 </a:solidFill>
                 <a:latin typeface="Cambria" pitchFamily="34" charset="0"/>
                 <a:ea typeface="Cambria" pitchFamily="34" charset="-122"/>
@@ -5448,7 +4726,7 @@
             <a:r>
               <a:rPr lang="en-US" sz="1200" dirty="0">
                 <a:solidFill>
-                  <a:srgbClr val="7A7264"/>
+                  <a:srgbClr val="857B6C"/>
                 </a:solidFill>
                 <a:latin typeface="Calibri" pitchFamily="34" charset="0"/>
                 <a:ea typeface="Calibri" pitchFamily="34" charset="-122"/>
@@ -5501,7 +4779,7 @@
             <a:r>
               <a:rPr lang="en-US" sz="950" spc="100" kern="0" dirty="0">
                 <a:solidFill>
-                  <a:srgbClr val="7A7264"/>
+                  <a:srgbClr val="857B6C"/>
                 </a:solidFill>
                 <a:latin typeface="Calibri" pitchFamily="34" charset="0"/>
                 <a:ea typeface="Calibri" pitchFamily="34" charset="-122"/>
@@ -5540,7 +4818,7 @@
             <a:r>
               <a:rPr lang="en-US" sz="950" dirty="0">
                 <a:solidFill>
-                  <a:srgbClr val="7A7264"/>
+                  <a:srgbClr val="857B6C"/>
                 </a:solidFill>
                 <a:latin typeface="Calibri" pitchFamily="34" charset="0"/>
                 <a:ea typeface="Calibri" pitchFamily="34" charset="-122"/>
@@ -5604,13 +4882,13 @@
             <a:r>
               <a:rPr lang="en-US" sz="1100" b="1" dirty="0">
                 <a:solidFill>
-                  <a:srgbClr val="1E4D39"/>
+                  <a:srgbClr val="2B2621"/>
                 </a:solidFill>
                 <a:latin typeface="Cambria" pitchFamily="34" charset="0"/>
                 <a:ea typeface="Cambria" pitchFamily="34" charset="-122"/>
                 <a:cs typeface="Cambria" pitchFamily="34" charset="-120"/>
               </a:rPr>
-              <a:t>12</a:t>
+              <a:t>11</a:t>
             </a:r>
             <a:endParaRPr lang="en-US" sz="1100" dirty="0"/>
           </a:p>
@@ -5624,13 +4902,13 @@
 </p:sld>
 </file>
 
-<file path=ppt/slides/slide13.xml><?xml version="1.0" encoding="utf-8"?>
+<file path=ppt/slides/slide12.xml><?xml version="1.0" encoding="utf-8"?>
 <p:sld xmlns:a="http://schemas.openxmlformats.org/drawingml/2006/main" xmlns:r="http://schemas.openxmlformats.org/officeDocument/2006/relationships" xmlns:p="http://schemas.openxmlformats.org/presentationml/2006/main">
-  <p:cSld name="Slide 13">
+  <p:cSld name="Slide 12">
     <p:bg>
       <p:bgPr>
         <a:solidFill>
-          <a:srgbClr val="1E4D39"/>
+          <a:srgbClr val="1E1B17"/>
         </a:solidFill>
       </p:bgPr>
     </p:bg>
@@ -5650,7 +4928,7 @@
       </p:grpSpPr>
       <p:pic>
         <p:nvPicPr>
-          <p:cNvPr id="2" name="Image 0" descr="r_D_left.png">    </p:cNvPr>
+          <p:cNvPr id="2" name="Image 0" descr="ref_imgs/P1_s2_2.jpg">    </p:cNvPr>
           <p:cNvPicPr>
             <a:picLocks noChangeAspect="1"/>
           </p:cNvPicPr>
@@ -5680,14 +4958,14 @@
         <p:spPr>
           <a:xfrm>
             <a:off x="6309360" y="0"/>
-            <a:ext cx="2011680" cy="6858000"/>
+            <a:ext cx="1828800" cy="6858000"/>
           </a:xfrm>
           <a:prstGeom prst="rect">
             <a:avLst/>
           </a:prstGeom>
           <a:solidFill>
-            <a:srgbClr val="1E4D39">
-              <a:alpha val="70000"/>
+            <a:srgbClr val="1E1B17">
+              <a:alpha val="68000"/>
             </a:srgbClr>
           </a:solidFill>
           <a:ln/>
@@ -5708,7 +4986,7 @@
             <a:avLst/>
           </a:prstGeom>
           <a:solidFill>
-            <a:srgbClr val="1E4D39"/>
+            <a:srgbClr val="1E1B17"/>
           </a:solidFill>
           <a:ln/>
         </p:spPr>
@@ -5873,7 +5151,7 @@
                 <a:ea typeface="Calibri" pitchFamily="34" charset="-122"/>
                 <a:cs typeface="Calibri" pitchFamily="34" charset="-120"/>
               </a:rPr>
-              <a:t>Next  </a:t>
+              <a:t>Next:  </a:t>
             </a:r>
             <a:pPr indent="0" marL="0">
               <a:lnSpc>
@@ -5884,13 +5162,13 @@
             <a:r>
               <a:rPr lang="en-US" sz="1500" dirty="0">
                 <a:solidFill>
-                  <a:srgbClr val="E7DFC9"/>
+                  <a:srgbClr val="D8CDB6"/>
                 </a:solidFill>
                 <a:latin typeface="Calibri" pitchFamily="34" charset="0"/>
                 <a:ea typeface="Calibri" pitchFamily="34" charset="-122"/>
                 <a:cs typeface="Calibri" pitchFamily="34" charset="-120"/>
               </a:rPr>
-              <a:t>— detailed commercial proposal &amp; costing:</a:t>
+              <a:t>detailed commercial proposal &amp; costing:</a:t>
             </a:r>
             <a:endParaRPr lang="en-US" sz="1500" dirty="0"/>
           </a:p>
@@ -5904,7 +5182,7 @@
             <a:r>
               <a:rPr lang="en-US" sz="1500" dirty="0">
                 <a:solidFill>
-                  <a:srgbClr val="E7DFC9"/>
+                  <a:srgbClr val="D8CDB6"/>
                 </a:solidFill>
                 <a:latin typeface="Calibri" pitchFamily="34" charset="0"/>
                 <a:ea typeface="Calibri" pitchFamily="34" charset="-122"/>
@@ -5982,7 +5260,7 @@
             <a:r>
               <a:rPr lang="en-US" sz="1200" dirty="0">
                 <a:solidFill>
-                  <a:srgbClr val="A9BBAE"/>
+                  <a:srgbClr val="9A9184"/>
                 </a:solidFill>
                 <a:latin typeface="Calibri" pitchFamily="34" charset="0"/>
                 <a:ea typeface="Calibri" pitchFamily="34" charset="-122"/>
@@ -6035,7 +5313,7 @@
         <p:spPr>
           <a:xfrm>
             <a:off x="548640" y="548640"/>
-            <a:ext cx="5486400" cy="274320"/>
+            <a:ext cx="6400800" cy="274320"/>
           </a:xfrm>
           <a:prstGeom prst="rect">
             <a:avLst/>
@@ -6074,7 +5352,7 @@
         <p:spPr>
           <a:xfrm>
             <a:off x="502920" y="868680"/>
-            <a:ext cx="6766560" cy="1280160"/>
+            <a:ext cx="6766560" cy="1371600"/>
           </a:xfrm>
           <a:prstGeom prst="rect">
             <a:avLst/>
@@ -6095,16 +5373,36 @@
             <a:r>
               <a:rPr lang="en-US" sz="3200" b="1" dirty="0">
                 <a:solidFill>
-                  <a:srgbClr val="1E4D39"/>
+                  <a:srgbClr val="2B2621"/>
                 </a:solidFill>
                 <a:latin typeface="Cambria" pitchFamily="34" charset="0"/>
                 <a:ea typeface="Cambria" pitchFamily="34" charset="-122"/>
                 <a:cs typeface="Cambria" pitchFamily="34" charset="-120"/>
               </a:rPr>
-              <a:t>A premium festive stage for Doft Candles</a:t>
+              <a:t>A premium festive stage</a:t>
             </a:r>
             <a:endParaRPr lang="en-US" sz="3200" dirty="0"/>
           </a:p>
+          <a:p>
+            <a:pPr indent="0" marL="0">
+              <a:lnSpc>
+                <a:spcPct val="98000"/>
+              </a:lnSpc>
+              <a:buNone/>
+            </a:pPr>
+            <a:r>
+              <a:rPr lang="en-US" sz="3200" b="1" dirty="0">
+                <a:solidFill>
+                  <a:srgbClr val="2B2621"/>
+                </a:solidFill>
+                <a:latin typeface="Cambria" pitchFamily="34" charset="0"/>
+                <a:ea typeface="Cambria" pitchFamily="34" charset="-122"/>
+                <a:cs typeface="Cambria" pitchFamily="34" charset="-120"/>
+              </a:rPr>
+              <a:t>for Doft Candles</a:t>
+            </a:r>
+            <a:endParaRPr lang="en-US" sz="3200" dirty="0"/>
+          </a:p>
         </p:txBody>
       </p:sp>
       <p:sp>
@@ -6115,7 +5413,7 @@
         </p:nvSpPr>
         <p:spPr>
           <a:xfrm>
-            <a:off x="502920" y="2286000"/>
+            <a:off x="502920" y="2331720"/>
             <a:ext cx="6126480" cy="2377440"/>
           </a:xfrm>
           <a:prstGeom prst="rect">
@@ -6137,13 +5435,13 @@
             <a:r>
               <a:rPr lang="en-US" sz="1500" dirty="0">
                 <a:solidFill>
-                  <a:srgbClr val="2C2924"/>
+                  <a:srgbClr val="2A2621"/>
                 </a:solidFill>
                 <a:latin typeface="Calibri" pitchFamily="34" charset="0"/>
                 <a:ea typeface="Calibri" pitchFamily="34" charset="-122"/>
                 <a:cs typeface="Calibri" pitchFamily="34" charset="-120"/>
               </a:rPr>
-              <a:t>Doft Candles is a premium home-fragrance brand. For the Diwali gifting season we take the brand into India's highest-footfall malls with a turnkey pop-up retail kiosk — a compact, luxurious island that sells and tells the Doft story.
+              <a:t>Doft Candles is a premium home-fragrance brand. For the Diwali gifting season we take the brand into India's highest-footfall malls with a turnkey pop-up boutique kiosk, a warm and luminous salon that invites shoppers to sit, smell and gift.
 </a:t>
             </a:r>
             <a:pPr indent="0" marL="0">
@@ -6155,7 +5453,7 @@
             <a:r>
               <a:rPr lang="en-US" sz="1500" b="1" dirty="0">
                 <a:solidFill>
-                  <a:srgbClr val="1E4D39"/>
+                  <a:srgbClr val="A9813A"/>
                 </a:solidFill>
                 <a:latin typeface="Calibri" pitchFamily="34" charset="0"/>
                 <a:ea typeface="Calibri" pitchFamily="34" charset="-122"/>
@@ -6172,7 +5470,7 @@
             <a:r>
               <a:rPr lang="en-US" sz="1500" dirty="0">
                 <a:solidFill>
-                  <a:srgbClr val="2C2924"/>
+                  <a:srgbClr val="2A2621"/>
                 </a:solidFill>
                 <a:latin typeface="Calibri" pitchFamily="34" charset="0"/>
                 <a:ea typeface="Calibri" pitchFamily="34" charset="-122"/>
@@ -6199,11 +5497,11 @@
             <a:avLst/>
           </a:prstGeom>
           <a:solidFill>
-            <a:srgbClr val="FCF8EF"/>
+            <a:srgbClr val="FBF7EF"/>
           </a:solidFill>
           <a:ln w="12700">
             <a:solidFill>
-              <a:srgbClr val="E4DCC9"/>
+              <a:srgbClr val="E6DECB"/>
             </a:solidFill>
             <a:prstDash val="solid"/>
           </a:ln>
@@ -6278,7 +5576,7 @@
             <a:r>
               <a:rPr lang="en-US" sz="1250" dirty="0">
                 <a:solidFill>
-                  <a:srgbClr val="1E4D39"/>
+                  <a:srgbClr val="2B2621"/>
                 </a:solidFill>
                 <a:latin typeface="Calibri" pitchFamily="34" charset="0"/>
                 <a:ea typeface="Calibri" pitchFamily="34" charset="-122"/>
@@ -6298,7 +5596,7 @@
             <a:r>
               <a:rPr lang="en-US" sz="1250" dirty="0">
                 <a:solidFill>
-                  <a:srgbClr val="1E4D39"/>
+                  <a:srgbClr val="2B2621"/>
                 </a:solidFill>
                 <a:latin typeface="Calibri" pitchFamily="34" charset="0"/>
                 <a:ea typeface="Calibri" pitchFamily="34" charset="-122"/>
@@ -6325,11 +5623,11 @@
             <a:avLst/>
           </a:prstGeom>
           <a:solidFill>
-            <a:srgbClr val="FCF8EF"/>
+            <a:srgbClr val="FBF7EF"/>
           </a:solidFill>
           <a:ln w="12700">
             <a:solidFill>
-              <a:srgbClr val="E4DCC9"/>
+              <a:srgbClr val="E6DECB"/>
             </a:solidFill>
             <a:prstDash val="solid"/>
           </a:ln>
@@ -6404,13 +5702,13 @@
             <a:r>
               <a:rPr lang="en-US" sz="1250" dirty="0">
                 <a:solidFill>
-                  <a:srgbClr val="1E4D39"/>
+                  <a:srgbClr val="2B2621"/>
                 </a:solidFill>
                 <a:latin typeface="Calibri" pitchFamily="34" charset="0"/>
                 <a:ea typeface="Calibri" pitchFamily="34" charset="-122"/>
                 <a:cs typeface="Calibri" pitchFamily="34" charset="-120"/>
               </a:rPr>
-              <a:t>Feet island</a:t>
+              <a:t>Feet kiosk</a:t>
             </a:r>
             <a:endParaRPr lang="en-US" sz="1250" dirty="0"/>
           </a:p>
@@ -6424,7 +5722,7 @@
             <a:r>
               <a:rPr lang="en-US" sz="1250" dirty="0">
                 <a:solidFill>
-                  <a:srgbClr val="1E4D39"/>
+                  <a:srgbClr val="2B2621"/>
                 </a:solidFill>
                 <a:latin typeface="Calibri" pitchFamily="34" charset="0"/>
                 <a:ea typeface="Calibri" pitchFamily="34" charset="-122"/>
@@ -6451,11 +5749,11 @@
             <a:avLst/>
           </a:prstGeom>
           <a:solidFill>
-            <a:srgbClr val="FCF8EF"/>
+            <a:srgbClr val="FBF7EF"/>
           </a:solidFill>
           <a:ln w="12700">
             <a:solidFill>
-              <a:srgbClr val="E4DCC9"/>
+              <a:srgbClr val="E6DECB"/>
             </a:solidFill>
             <a:prstDash val="solid"/>
           </a:ln>
@@ -6530,7 +5828,7 @@
             <a:r>
               <a:rPr lang="en-US" sz="1250" dirty="0">
                 <a:solidFill>
-                  <a:srgbClr val="1E4D39"/>
+                  <a:srgbClr val="2B2621"/>
                 </a:solidFill>
                 <a:latin typeface="Calibri" pitchFamily="34" charset="0"/>
                 <a:ea typeface="Calibri" pitchFamily="34" charset="-122"/>
@@ -6550,7 +5848,7 @@
             <a:r>
               <a:rPr lang="en-US" sz="1250" dirty="0">
                 <a:solidFill>
-                  <a:srgbClr val="1E4D39"/>
+                  <a:srgbClr val="2B2621"/>
                 </a:solidFill>
                 <a:latin typeface="Calibri" pitchFamily="34" charset="0"/>
                 <a:ea typeface="Calibri" pitchFamily="34" charset="-122"/>
@@ -6577,11 +5875,11 @@
             <a:avLst/>
           </a:prstGeom>
           <a:solidFill>
-            <a:srgbClr val="FCF8EF"/>
+            <a:srgbClr val="FBF7EF"/>
           </a:solidFill>
           <a:ln w="12700">
             <a:solidFill>
-              <a:srgbClr val="E4DCC9"/>
+              <a:srgbClr val="E6DECB"/>
             </a:solidFill>
             <a:prstDash val="solid"/>
           </a:ln>
@@ -6656,7 +5954,7 @@
             <a:r>
               <a:rPr lang="en-US" sz="1250" dirty="0">
                 <a:solidFill>
-                  <a:srgbClr val="1E4D39"/>
+                  <a:srgbClr val="2B2621"/>
                 </a:solidFill>
                 <a:latin typeface="Calibri" pitchFamily="34" charset="0"/>
                 <a:ea typeface="Calibri" pitchFamily="34" charset="-122"/>
@@ -6676,7 +5974,7 @@
             <a:r>
               <a:rPr lang="en-US" sz="1250" dirty="0">
                 <a:solidFill>
-                  <a:srgbClr val="1E4D39"/>
+                  <a:srgbClr val="2B2621"/>
                 </a:solidFill>
                 <a:latin typeface="Calibri" pitchFamily="34" charset="0"/>
                 <a:ea typeface="Calibri" pitchFamily="34" charset="-122"/>
@@ -6729,7 +6027,7 @@
             <a:r>
               <a:rPr lang="en-US" sz="950" spc="100" kern="0" dirty="0">
                 <a:solidFill>
-                  <a:srgbClr val="7A7264"/>
+                  <a:srgbClr val="857B6C"/>
                 </a:solidFill>
                 <a:latin typeface="Calibri" pitchFamily="34" charset="0"/>
                 <a:ea typeface="Calibri" pitchFamily="34" charset="-122"/>
@@ -6768,7 +6066,7 @@
             <a:r>
               <a:rPr lang="en-US" sz="950" dirty="0">
                 <a:solidFill>
-                  <a:srgbClr val="7A7264"/>
+                  <a:srgbClr val="857B6C"/>
                 </a:solidFill>
                 <a:latin typeface="Calibri" pitchFamily="34" charset="0"/>
                 <a:ea typeface="Calibri" pitchFamily="34" charset="-122"/>
@@ -6832,7 +6130,7 @@
             <a:r>
               <a:rPr lang="en-US" sz="1100" b="1" dirty="0">
                 <a:solidFill>
-                  <a:srgbClr val="1E4D39"/>
+                  <a:srgbClr val="2B2621"/>
                 </a:solidFill>
                 <a:latin typeface="Cambria" pitchFamily="34" charset="0"/>
                 <a:ea typeface="Cambria" pitchFamily="34" charset="-122"/>
@@ -6858,7 +6156,7 @@
     <p:bg>
       <p:bgPr>
         <a:solidFill>
-          <a:srgbClr val="FCF8EF"/>
+          <a:srgbClr val="EFEAE0"/>
         </a:solidFill>
       </p:bgPr>
     </p:bg>
@@ -6905,7 +6203,7 @@
         <p:spPr>
           <a:xfrm>
             <a:off x="548640" y="594360"/>
-            <a:ext cx="5486400" cy="274320"/>
+            <a:ext cx="6400800" cy="274320"/>
           </a:xfrm>
           <a:prstGeom prst="rect">
             <a:avLst/>
@@ -6944,33 +6242,36 @@
         <p:spPr>
           <a:xfrm>
             <a:off x="502920" y="914400"/>
-            <a:ext cx="4937760" cy="822960"/>
-          </a:xfrm>
-          <a:prstGeom prst="rect">
-            <a:avLst/>
-          </a:prstGeom>
-          <a:noFill/>
-          <a:ln/>
-        </p:spPr>
-        <p:txBody>
-          <a:bodyPr wrap="square" rtlCol="0" anchor="ctr"/>
-          <a:lstStyle/>
-          <a:p>
-            <a:pPr indent="0" marL="0">
-              <a:buNone/>
-            </a:pPr>
-            <a:r>
-              <a:rPr lang="en-US" sz="3400" b="1" dirty="0">
-                <a:solidFill>
-                  <a:srgbClr val="1E4D39"/>
+            <a:ext cx="4937760" cy="1280160"/>
+          </a:xfrm>
+          <a:prstGeom prst="rect">
+            <a:avLst/>
+          </a:prstGeom>
+          <a:noFill/>
+          <a:ln/>
+        </p:spPr>
+        <p:txBody>
+          <a:bodyPr wrap="square" rtlCol="0" anchor="ctr"/>
+          <a:lstStyle/>
+          <a:p>
+            <a:pPr indent="0" marL="0">
+              <a:lnSpc>
+                <a:spcPct val="95000"/>
+              </a:lnSpc>
+              <a:buNone/>
+            </a:pPr>
+            <a:r>
+              <a:rPr lang="en-US" sz="3100" b="1" dirty="0">
+                <a:solidFill>
+                  <a:srgbClr val="2B2621"/>
                 </a:solidFill>
                 <a:latin typeface="Cambria" pitchFamily="34" charset="0"/>
                 <a:ea typeface="Cambria" pitchFamily="34" charset="-122"/>
                 <a:cs typeface="Cambria" pitchFamily="34" charset="-120"/>
               </a:rPr>
-              <a:t>The DOFT Island</a:t>
-            </a:r>
-            <a:endParaRPr lang="en-US" sz="3400" dirty="0"/>
+              <a:t>The DOFT boutique kiosk</a:t>
+            </a:r>
+            <a:endParaRPr lang="en-US" sz="3100" dirty="0"/>
           </a:p>
         </p:txBody>
       </p:sp>
@@ -6982,8 +6283,8 @@
         </p:nvSpPr>
         <p:spPr>
           <a:xfrm>
-            <a:off x="502920" y="1783080"/>
-            <a:ext cx="4754880" cy="1188720"/>
+            <a:off x="502920" y="1965960"/>
+            <a:ext cx="4754880" cy="1005840"/>
           </a:xfrm>
           <a:prstGeom prst="rect">
             <a:avLst/>
@@ -7004,13 +6305,13 @@
             <a:r>
               <a:rPr lang="en-US" sz="1450" dirty="0">
                 <a:solidFill>
-                  <a:srgbClr val="2C2924"/>
+                  <a:srgbClr val="2A2621"/>
                 </a:solidFill>
                 <a:latin typeface="Calibri" pitchFamily="34" charset="0"/>
                 <a:ea typeface="Calibri" pitchFamily="34" charset="-122"/>
                 <a:cs typeface="Calibri" pitchFamily="34" charset="-120"/>
               </a:rPr>
-              <a:t>A premium open island that reads unmistakably Doft from every aisle — luxury build language wrapped in the brand's own green-and-gold identity.</a:t>
+              <a:t>A warm, luminous fragrance salon with a backlit brand wall, brass gallery shelving and a place to sit, smell and gift.</a:t>
             </a:r>
             <a:endParaRPr lang="en-US" sz="1450" dirty="0"/>
           </a:p>
@@ -7024,7 +6325,7 @@
         </p:nvSpPr>
         <p:spPr>
           <a:xfrm>
-            <a:off x="502920" y="3108960"/>
+            <a:off x="502920" y="3154680"/>
             <a:ext cx="146304" cy="146304"/>
           </a:xfrm>
           <a:prstGeom prst="ellipse">
@@ -7044,7 +6345,7 @@
         </p:nvSpPr>
         <p:spPr>
           <a:xfrm>
-            <a:off x="777240" y="2971800"/>
+            <a:off x="777240" y="3017520"/>
             <a:ext cx="4663440" cy="320040"/>
           </a:xfrm>
           <a:prstGeom prst="rect">
@@ -7063,13 +6364,13 @@
             <a:r>
               <a:rPr lang="en-US" sz="1450" b="1" dirty="0">
                 <a:solidFill>
-                  <a:srgbClr val="1E4D39"/>
+                  <a:srgbClr val="2B2621"/>
                 </a:solidFill>
                 <a:latin typeface="Cambria" pitchFamily="34" charset="0"/>
                 <a:ea typeface="Cambria" pitchFamily="34" charset="-122"/>
                 <a:cs typeface="Cambria" pitchFamily="34" charset="-120"/>
               </a:rPr>
-              <a:t>Warm-backlit brand totem</a:t>
+              <a:t>Backlit brand-seal wall</a:t>
             </a:r>
             <a:endParaRPr lang="en-US" sz="1450" dirty="0"/>
           </a:p>
@@ -7083,7 +6384,7 @@
         </p:nvSpPr>
         <p:spPr>
           <a:xfrm>
-            <a:off x="777240" y="3282696"/>
+            <a:off x="777240" y="3328416"/>
             <a:ext cx="4663440" cy="502920"/>
           </a:xfrm>
           <a:prstGeom prst="rect">
@@ -7105,13 +6406,13 @@
             <a:r>
               <a:rPr lang="en-US" sz="1150" dirty="0">
                 <a:solidFill>
-                  <a:srgbClr val="7A7264"/>
+                  <a:srgbClr val="857B6C"/>
                 </a:solidFill>
                 <a:latin typeface="Calibri" pitchFamily="34" charset="0"/>
                 <a:ea typeface="Calibri" pitchFamily="34" charset="-122"/>
                 <a:cs typeface="Calibri" pitchFamily="34" charset="-120"/>
               </a:rPr>
-              <a:t>Illuminated DOFT seal rising above the counter — a beacon across the mall court.</a:t>
+              <a:t>The illuminated DOFT seal anchors the kiosk as a warm beacon across the mall court.</a:t>
             </a:r>
             <a:endParaRPr lang="en-US" sz="1150" dirty="0"/>
           </a:p>
@@ -7125,7 +6426,7 @@
         </p:nvSpPr>
         <p:spPr>
           <a:xfrm>
-            <a:off x="502920" y="3931920"/>
+            <a:off x="502920" y="3959352"/>
             <a:ext cx="146304" cy="146304"/>
           </a:xfrm>
           <a:prstGeom prst="ellipse">
@@ -7145,7 +6446,7 @@
         </p:nvSpPr>
         <p:spPr>
           <a:xfrm>
-            <a:off x="777240" y="3794760"/>
+            <a:off x="777240" y="3822192"/>
             <a:ext cx="4663440" cy="320040"/>
           </a:xfrm>
           <a:prstGeom prst="rect">
@@ -7164,13 +6465,13 @@
             <a:r>
               <a:rPr lang="en-US" sz="1450" b="1" dirty="0">
                 <a:solidFill>
-                  <a:srgbClr val="1E4D39"/>
+                  <a:srgbClr val="2B2621"/>
                 </a:solidFill>
                 <a:latin typeface="Cambria" pitchFamily="34" charset="0"/>
                 <a:ea typeface="Cambria" pitchFamily="34" charset="-122"/>
                 <a:cs typeface="Cambria" pitchFamily="34" charset="-120"/>
               </a:rPr>
-              <a:t>White lacquer + brushed gold</a:t>
+              <a:t>Brass gallery shelving</a:t>
             </a:r>
             <a:endParaRPr lang="en-US" sz="1450" dirty="0"/>
           </a:p>
@@ -7184,7 +6485,7 @@
         </p:nvSpPr>
         <p:spPr>
           <a:xfrm>
-            <a:off x="777240" y="4105656"/>
+            <a:off x="777240" y="4133088"/>
             <a:ext cx="4663440" cy="502920"/>
           </a:xfrm>
           <a:prstGeom prst="rect">
@@ -7206,13 +6507,13 @@
             <a:r>
               <a:rPr lang="en-US" sz="1150" dirty="0">
                 <a:solidFill>
-                  <a:srgbClr val="7A7264"/>
+                  <a:srgbClr val="857B6C"/>
                 </a:solidFill>
                 <a:latin typeface="Calibri" pitchFamily="34" charset="0"/>
                 <a:ea typeface="Calibri" pitchFamily="34" charset="-122"/>
                 <a:cs typeface="Calibri" pitchFamily="34" charset="-120"/>
               </a:rPr>
-              <a:t>Fluted, backlit bases and gold-framed glass showcases for a jewellery-counter feel.</a:t>
+              <a:t>Warm-lit floating shelves stage candles, diffusers and gift sets like a boutique.</a:t>
             </a:r>
             <a:endParaRPr lang="en-US" sz="1150" dirty="0"/>
           </a:p>
@@ -7226,7 +6527,7 @@
         </p:nvSpPr>
         <p:spPr>
           <a:xfrm>
-            <a:off x="502920" y="4754880"/>
+            <a:off x="502920" y="4764024"/>
             <a:ext cx="146304" cy="146304"/>
           </a:xfrm>
           <a:prstGeom prst="ellipse">
@@ -7246,7 +6547,7 @@
         </p:nvSpPr>
         <p:spPr>
           <a:xfrm>
-            <a:off x="777240" y="4617720"/>
+            <a:off x="777240" y="4626864"/>
             <a:ext cx="4663440" cy="320040"/>
           </a:xfrm>
           <a:prstGeom prst="rect">
@@ -7265,13 +6566,13 @@
             <a:r>
               <a:rPr lang="en-US" sz="1450" b="1" dirty="0">
                 <a:solidFill>
-                  <a:srgbClr val="1E4D39"/>
+                  <a:srgbClr val="2B2621"/>
                 </a:solidFill>
                 <a:latin typeface="Cambria" pitchFamily="34" charset="0"/>
                 <a:ea typeface="Cambria" pitchFamily="34" charset="-122"/>
                 <a:cs typeface="Cambria" pitchFamily="34" charset="-120"/>
               </a:rPr>
-              <a:t>Emerald brand niches</a:t>
+              <a:t>Consultation seating</a:t>
             </a:r>
             <a:endParaRPr lang="en-US" sz="1450" dirty="0"/>
           </a:p>
@@ -7285,7 +6586,7 @@
         </p:nvSpPr>
         <p:spPr>
           <a:xfrm>
-            <a:off x="777240" y="4928616"/>
+            <a:off x="777240" y="4937760"/>
             <a:ext cx="4663440" cy="502920"/>
           </a:xfrm>
           <a:prstGeom prst="rect">
@@ -7307,13 +6608,13 @@
             <a:r>
               <a:rPr lang="en-US" sz="1150" dirty="0">
                 <a:solidFill>
-                  <a:srgbClr val="7A7264"/>
+                  <a:srgbClr val="857B6C"/>
                 </a:solidFill>
                 <a:latin typeface="Calibri" pitchFamily="34" charset="0"/>
                 <a:ea typeface="Calibri" pitchFamily="34" charset="-122"/>
                 <a:cs typeface="Calibri" pitchFamily="34" charset="-120"/>
               </a:rPr>
-              <a:t>Backlit green display bays carry Doft's signature retail colour and warm product glow.</a:t>
+              <a:t>A central table and chairs invite shoppers to sit, sample scents and choose gifts.</a:t>
             </a:r>
             <a:endParaRPr lang="en-US" sz="1150" dirty="0"/>
           </a:p>
@@ -7327,7 +6628,7 @@
         </p:nvSpPr>
         <p:spPr>
           <a:xfrm>
-            <a:off x="502920" y="5577840"/>
+            <a:off x="502920" y="5568696"/>
             <a:ext cx="146304" cy="146304"/>
           </a:xfrm>
           <a:prstGeom prst="ellipse">
@@ -7347,7 +6648,7 @@
         </p:nvSpPr>
         <p:spPr>
           <a:xfrm>
-            <a:off x="777240" y="5440680"/>
+            <a:off x="777240" y="5431536"/>
             <a:ext cx="4663440" cy="320040"/>
           </a:xfrm>
           <a:prstGeom prst="rect">
@@ -7366,13 +6667,13 @@
             <a:r>
               <a:rPr lang="en-US" sz="1450" b="1" dirty="0">
                 <a:solidFill>
-                  <a:srgbClr val="1E4D39"/>
+                  <a:srgbClr val="2B2621"/>
                 </a:solidFill>
                 <a:latin typeface="Cambria" pitchFamily="34" charset="0"/>
                 <a:ea typeface="Cambria" pitchFamily="34" charset="-122"/>
                 <a:cs typeface="Cambria" pitchFamily="34" charset="-120"/>
               </a:rPr>
-              <a:t>Designed to sell &amp; store</a:t>
+              <a:t>Digital brand screen</a:t>
             </a:r>
             <a:endParaRPr lang="en-US" sz="1450" dirty="0"/>
           </a:p>
@@ -7386,7 +6687,7 @@
         </p:nvSpPr>
         <p:spPr>
           <a:xfrm>
-            <a:off x="777240" y="5751576"/>
+            <a:off x="777240" y="5742432"/>
             <a:ext cx="4663440" cy="502920"/>
           </a:xfrm>
           <a:prstGeom prst="rect">
@@ -7408,13 +6709,13 @@
             <a:r>
               <a:rPr lang="en-US" sz="1150" dirty="0">
                 <a:solidFill>
-                  <a:srgbClr val="7A7264"/>
+                  <a:srgbClr val="857B6C"/>
                 </a:solidFill>
                 <a:latin typeface="Calibri" pitchFamily="34" charset="0"/>
                 <a:ea typeface="Calibri" pitchFamily="34" charset="-122"/>
                 <a:cs typeface="Calibri" pitchFamily="34" charset="-120"/>
               </a:rPr>
-              <a:t>Lockable stock storage, cash safe and staff seating built in — clean front, working back.</a:t>
+              <a:t>A screen at the aisle plays the Doft film and draws footfall in.</a:t>
             </a:r>
             <a:endParaRPr lang="en-US" sz="1150" dirty="0"/>
           </a:p>
@@ -7422,7 +6723,7 @@
       </p:sp>
       <p:pic>
         <p:nvPicPr>
-          <p:cNvPr id="18" name="Image 0" descr="r_D_right.png">    </p:cNvPr>
+          <p:cNvPr id="18" name="Image 0" descr="ref_imgs/P1_s4_4.jpg">    </p:cNvPr>
           <p:cNvPicPr>
             <a:picLocks noChangeAspect="1"/>
           </p:cNvPicPr>
@@ -7435,8 +6736,8 @@
         </p:blipFill>
         <p:spPr>
           <a:xfrm>
-            <a:off x="5806440" y="685800"/>
-            <a:ext cx="6126480" cy="5486400"/>
+            <a:off x="5806440" y="822960"/>
+            <a:ext cx="6126480" cy="5212080"/>
           </a:xfrm>
           <a:prstGeom prst="rect">
             <a:avLst/>
@@ -7484,7 +6785,7 @@
             <a:r>
               <a:rPr lang="en-US" sz="950" spc="100" kern="0" dirty="0">
                 <a:solidFill>
-                  <a:srgbClr val="7A7264"/>
+                  <a:srgbClr val="857B6C"/>
                 </a:solidFill>
                 <a:latin typeface="Calibri" pitchFamily="34" charset="0"/>
                 <a:ea typeface="Calibri" pitchFamily="34" charset="-122"/>
@@ -7523,7 +6824,7 @@
             <a:r>
               <a:rPr lang="en-US" sz="950" dirty="0">
                 <a:solidFill>
-                  <a:srgbClr val="7A7264"/>
+                  <a:srgbClr val="857B6C"/>
                 </a:solidFill>
                 <a:latin typeface="Calibri" pitchFamily="34" charset="0"/>
                 <a:ea typeface="Calibri" pitchFamily="34" charset="-122"/>
@@ -7587,7 +6888,7 @@
             <a:r>
               <a:rPr lang="en-US" sz="1100" b="1" dirty="0">
                 <a:solidFill>
-                  <a:srgbClr val="1E4D39"/>
+                  <a:srgbClr val="2B2621"/>
                 </a:solidFill>
                 <a:latin typeface="Cambria" pitchFamily="34" charset="0"/>
                 <a:ea typeface="Cambria" pitchFamily="34" charset="-122"/>
@@ -7613,7 +6914,7 @@
     <p:bg>
       <p:bgPr>
         <a:solidFill>
-          <a:srgbClr val="FCF8EF"/>
+          <a:srgbClr val="EFEAE0"/>
         </a:solidFill>
       </p:bgPr>
     </p:bg>
@@ -7639,21 +6940,21 @@
         </p:nvSpPr>
         <p:spPr>
           <a:xfrm>
-            <a:off x="4297680" y="0"/>
+            <a:off x="0" y="0"/>
             <a:ext cx="7894015" cy="6858000"/>
           </a:xfrm>
           <a:prstGeom prst="rect">
             <a:avLst/>
           </a:prstGeom>
           <a:solidFill>
-            <a:srgbClr val="EFEBE1"/>
+            <a:srgbClr val="E7E2D8"/>
           </a:solidFill>
           <a:ln/>
         </p:spPr>
       </p:sp>
       <p:pic>
         <p:nvPicPr>
-          <p:cNvPr id="3" name="Image 0" descr="r_D_left.png">    </p:cNvPr>
+          <p:cNvPr id="3" name="Image 0" descr="ref_imgs/P1_s4_4.jpg">    </p:cNvPr>
           <p:cNvPicPr>
             <a:picLocks noChangeAspect="1"/>
           </p:cNvPicPr>
@@ -7666,8 +6967,8 @@
         </p:blipFill>
         <p:spPr>
           <a:xfrm>
-            <a:off x="4434840" y="457200"/>
-            <a:ext cx="7619695" cy="5669280"/>
+            <a:off x="91440" y="320040"/>
+            <a:ext cx="7711135" cy="5989320"/>
           </a:xfrm>
           <a:prstGeom prst="rect">
             <a:avLst/>
@@ -7682,14 +6983,14 @@
         </p:nvSpPr>
         <p:spPr>
           <a:xfrm>
-            <a:off x="0" y="0"/>
+            <a:off x="7894015" y="0"/>
             <a:ext cx="4297680" cy="6858000"/>
           </a:xfrm>
           <a:prstGeom prst="rect">
             <a:avLst/>
           </a:prstGeom>
           <a:solidFill>
-            <a:srgbClr val="1E4D39"/>
+            <a:srgbClr val="2B2621"/>
           </a:solidFill>
           <a:ln/>
         </p:spPr>
@@ -7702,7 +7003,7 @@
         </p:nvSpPr>
         <p:spPr>
           <a:xfrm>
-            <a:off x="4261104" y="0"/>
+            <a:off x="7894015" y="0"/>
             <a:ext cx="36576" cy="6858000"/>
           </a:xfrm>
           <a:prstGeom prst="rect">
@@ -7722,8 +7023,8 @@
         </p:nvSpPr>
         <p:spPr>
           <a:xfrm>
-            <a:off x="502920" y="868680"/>
-            <a:ext cx="5486400" cy="274320"/>
+            <a:off x="8396935" y="868680"/>
+            <a:ext cx="6400800" cy="274320"/>
           </a:xfrm>
           <a:prstGeom prst="rect">
             <a:avLst/>
@@ -7747,7 +7048,7 @@
                 <a:ea typeface="Calibri" pitchFamily="34" charset="-122"/>
                 <a:cs typeface="Calibri" pitchFamily="34" charset="-120"/>
               </a:rPr>
-              <a:t>DESIGN · ELEVATION A</a:t>
+              <a:t>DESIGN · PERSPECTIVE</a:t>
             </a:r>
             <a:endParaRPr lang="en-US" sz="1250" dirty="0"/>
           </a:p>
@@ -7761,7 +7062,7 @@
         </p:nvSpPr>
         <p:spPr>
           <a:xfrm>
-            <a:off x="502920" y="1234440"/>
+            <a:off x="8396935" y="1234440"/>
             <a:ext cx="3383280" cy="1371600"/>
           </a:xfrm>
           <a:prstGeom prst="rect">
@@ -7781,7 +7082,7 @@
               <a:buNone/>
             </a:pPr>
             <a:r>
-              <a:rPr lang="en-US" sz="3000" b="1" dirty="0">
+              <a:rPr lang="en-US" sz="2900" b="1" dirty="0">
                 <a:solidFill>
                   <a:srgbClr val="FFFFFF"/>
                 </a:solidFill>
@@ -7789,9 +7090,9 @@
                 <a:ea typeface="Cambria" pitchFamily="34" charset="-122"/>
                 <a:cs typeface="Cambria" pitchFamily="34" charset="-120"/>
               </a:rPr>
-              <a:t>Left three-quarter</a:t>
-            </a:r>
-            <a:endParaRPr lang="en-US" sz="3000" dirty="0"/>
+              <a:t>Three-quarter view</a:t>
+            </a:r>
+            <a:endParaRPr lang="en-US" sz="2900" dirty="0"/>
           </a:p>
         </p:txBody>
       </p:sp>
@@ -7803,7 +7104,7 @@
         </p:nvSpPr>
         <p:spPr>
           <a:xfrm>
-            <a:off x="502920" y="2697480"/>
+            <a:off x="8396935" y="2697480"/>
             <a:ext cx="822960" cy="0"/>
           </a:xfrm>
           <a:prstGeom prst="line">
@@ -7826,7 +7127,7 @@
         </p:nvSpPr>
         <p:spPr>
           <a:xfrm>
-            <a:off x="502920" y="2971800"/>
+            <a:off x="8396935" y="2971800"/>
             <a:ext cx="3429000" cy="640080"/>
           </a:xfrm>
           <a:prstGeom prst="rect">
@@ -7854,7 +7155,7 @@
                 <a:ea typeface="Calibri" pitchFamily="34" charset="-122"/>
                 <a:cs typeface="Calibri" pitchFamily="34" charset="-120"/>
               </a:rPr>
-              <a:t>—  </a:t>
+              <a:t>·   </a:t>
             </a:r>
             <a:pPr indent="0" marL="0">
               <a:lnSpc>
@@ -7865,13 +7166,13 @@
             <a:r>
               <a:rPr lang="en-US" sz="1450" dirty="0">
                 <a:solidFill>
-                  <a:srgbClr val="EDE7D8"/>
+                  <a:srgbClr val="E9E2D3"/>
                 </a:solidFill>
                 <a:latin typeface="Calibri" pitchFamily="34" charset="0"/>
                 <a:ea typeface="Calibri" pitchFamily="34" charset="-122"/>
                 <a:cs typeface="Calibri" pitchFamily="34" charset="-120"/>
               </a:rPr>
-              <a:t>White-lacquer body with brushed-gold reveals</a:t>
+              <a:t>Backlit MEMORIES DOFT SCENTED seal wall</a:t>
             </a:r>
             <a:endParaRPr lang="en-US" sz="1450" dirty="0"/>
           </a:p>
@@ -7885,7 +7186,7 @@
         </p:nvSpPr>
         <p:spPr>
           <a:xfrm>
-            <a:off x="502920" y="3630168"/>
+            <a:off x="8396935" y="3630168"/>
             <a:ext cx="3429000" cy="640080"/>
           </a:xfrm>
           <a:prstGeom prst="rect">
@@ -7913,7 +7214,7 @@
                 <a:ea typeface="Calibri" pitchFamily="34" charset="-122"/>
                 <a:cs typeface="Calibri" pitchFamily="34" charset="-120"/>
               </a:rPr>
-              <a:t>—  </a:t>
+              <a:t>·   </a:t>
             </a:r>
             <a:pPr indent="0" marL="0">
               <a:lnSpc>
@@ -7924,13 +7225,13 @@
             <a:r>
               <a:rPr lang="en-US" sz="1450" dirty="0">
                 <a:solidFill>
-                  <a:srgbClr val="EDE7D8"/>
+                  <a:srgbClr val="E9E2D3"/>
                 </a:solidFill>
                 <a:latin typeface="Calibri" pitchFamily="34" charset="0"/>
                 <a:ea typeface="Calibri" pitchFamily="34" charset="-122"/>
                 <a:cs typeface="Calibri" pitchFamily="34" charset="-120"/>
               </a:rPr>
-              <a:t>Warm-backlit fluted base panels</a:t>
+              <a:t>Warm-lit brass gallery shelving</a:t>
             </a:r>
             <a:endParaRPr lang="en-US" sz="1450" dirty="0"/>
           </a:p>
@@ -7944,7 +7245,7 @@
         </p:nvSpPr>
         <p:spPr>
           <a:xfrm>
-            <a:off x="502920" y="4288536"/>
+            <a:off x="8396935" y="4288536"/>
             <a:ext cx="3429000" cy="640080"/>
           </a:xfrm>
           <a:prstGeom prst="rect">
@@ -7972,7 +7273,7 @@
                 <a:ea typeface="Calibri" pitchFamily="34" charset="-122"/>
                 <a:cs typeface="Calibri" pitchFamily="34" charset="-120"/>
               </a:rPr>
-              <a:t>—  </a:t>
+              <a:t>·   </a:t>
             </a:r>
             <a:pPr indent="0" marL="0">
               <a:lnSpc>
@@ -7983,13 +7284,13 @@
             <a:r>
               <a:rPr lang="en-US" sz="1450" dirty="0">
                 <a:solidFill>
-                  <a:srgbClr val="EDE7D8"/>
+                  <a:srgbClr val="E9E2D3"/>
                 </a:solidFill>
                 <a:latin typeface="Calibri" pitchFamily="34" charset="0"/>
                 <a:ea typeface="Calibri" pitchFamily="34" charset="-122"/>
                 <a:cs typeface="Calibri" pitchFamily="34" charset="-120"/>
               </a:rPr>
-              <a:t>Gold-framed glass showcases with candles</a:t>
+              <a:t>White counters with black-stone tops</a:t>
             </a:r>
             <a:endParaRPr lang="en-US" sz="1450" dirty="0"/>
           </a:p>
@@ -8003,7 +7304,7 @@
         </p:nvSpPr>
         <p:spPr>
           <a:xfrm>
-            <a:off x="502920" y="4946904"/>
+            <a:off x="8396935" y="4946904"/>
             <a:ext cx="3429000" cy="640080"/>
           </a:xfrm>
           <a:prstGeom prst="rect">
@@ -8031,7 +7332,7 @@
                 <a:ea typeface="Calibri" pitchFamily="34" charset="-122"/>
                 <a:cs typeface="Calibri" pitchFamily="34" charset="-120"/>
               </a:rPr>
-              <a:t>—  </a:t>
+              <a:t>·   </a:t>
             </a:r>
             <a:pPr indent="0" marL="0">
               <a:lnSpc>
@@ -8042,13 +7343,13 @@
             <a:r>
               <a:rPr lang="en-US" sz="1450" dirty="0">
                 <a:solidFill>
-                  <a:srgbClr val="EDE7D8"/>
+                  <a:srgbClr val="E9E2D3"/>
                 </a:solidFill>
                 <a:latin typeface="Calibri" pitchFamily="34" charset="0"/>
                 <a:ea typeface="Calibri" pitchFamily="34" charset="-122"/>
                 <a:cs typeface="Calibri" pitchFamily="34" charset="-120"/>
               </a:rPr>
-              <a:t>DOFT wordmark on every customer face</a:t>
+              <a:t>Backlit seal counter fronts</a:t>
             </a:r>
             <a:endParaRPr lang="en-US" sz="1450" dirty="0"/>
           </a:p>
@@ -8095,7 +7396,7 @@
             <a:r>
               <a:rPr lang="en-US" sz="950" spc="100" kern="0" dirty="0">
                 <a:solidFill>
-                  <a:srgbClr val="7A7264"/>
+                  <a:srgbClr val="B8AE9C"/>
                 </a:solidFill>
                 <a:latin typeface="Calibri" pitchFamily="34" charset="0"/>
                 <a:ea typeface="Calibri" pitchFamily="34" charset="-122"/>
@@ -8134,7 +7435,7 @@
             <a:r>
               <a:rPr lang="en-US" sz="950" dirty="0">
                 <a:solidFill>
-                  <a:srgbClr val="7A7264"/>
+                  <a:srgbClr val="B8AE9C"/>
                 </a:solidFill>
                 <a:latin typeface="Calibri" pitchFamily="34" charset="0"/>
                 <a:ea typeface="Calibri" pitchFamily="34" charset="-122"/>
@@ -8161,7 +7462,7 @@
             <a:avLst/>
           </a:prstGeom>
           <a:solidFill>
-            <a:srgbClr val="FFFFFF"/>
+            <a:srgbClr val="1E1B17"/>
           </a:solidFill>
           <a:ln w="12700">
             <a:solidFill>
@@ -8198,7 +7499,7 @@
             <a:r>
               <a:rPr lang="en-US" sz="1100" b="1" dirty="0">
                 <a:solidFill>
-                  <a:srgbClr val="1E4D39"/>
+                  <a:srgbClr val="C6A24E"/>
                 </a:solidFill>
                 <a:latin typeface="Cambria" pitchFamily="34" charset="0"/>
                 <a:ea typeface="Cambria" pitchFamily="34" charset="-122"/>
@@ -8224,7 +7525,7 @@
     <p:bg>
       <p:bgPr>
         <a:solidFill>
-          <a:srgbClr val="FCF8EF"/>
+          <a:srgbClr val="EFEAE0"/>
         </a:solidFill>
       </p:bgPr>
     </p:bg>
@@ -8250,21 +7551,21 @@
         </p:nvSpPr>
         <p:spPr>
           <a:xfrm>
-            <a:off x="0" y="0"/>
+            <a:off x="4297680" y="0"/>
             <a:ext cx="7894015" cy="6858000"/>
           </a:xfrm>
           <a:prstGeom prst="rect">
             <a:avLst/>
           </a:prstGeom>
           <a:solidFill>
-            <a:srgbClr val="EFEBE1"/>
+            <a:srgbClr val="E7E2D8"/>
           </a:solidFill>
           <a:ln/>
         </p:spPr>
       </p:sp>
       <p:pic>
         <p:nvPicPr>
-          <p:cNvPr id="3" name="Image 0" descr="r_D_right.png">    </p:cNvPr>
+          <p:cNvPr id="3" name="Image 0" descr="ref_imgs/P1_s3_3.jpg">    </p:cNvPr>
           <p:cNvPicPr>
             <a:picLocks noChangeAspect="1"/>
           </p:cNvPicPr>
@@ -8277,8 +7578,8 @@
         </p:blipFill>
         <p:spPr>
           <a:xfrm>
-            <a:off x="137160" y="457200"/>
-            <a:ext cx="7619695" cy="5669280"/>
+            <a:off x="4389120" y="320040"/>
+            <a:ext cx="7711135" cy="5989320"/>
           </a:xfrm>
           <a:prstGeom prst="rect">
             <a:avLst/>
@@ -8293,14 +7594,14 @@
         </p:nvSpPr>
         <p:spPr>
           <a:xfrm>
-            <a:off x="7894015" y="0"/>
+            <a:off x="0" y="0"/>
             <a:ext cx="4297680" cy="6858000"/>
           </a:xfrm>
           <a:prstGeom prst="rect">
             <a:avLst/>
           </a:prstGeom>
           <a:solidFill>
-            <a:srgbClr val="1E4D39"/>
+            <a:srgbClr val="2B2621"/>
           </a:solidFill>
           <a:ln/>
         </p:spPr>
@@ -8313,7 +7614,7 @@
         </p:nvSpPr>
         <p:spPr>
           <a:xfrm>
-            <a:off x="7894015" y="0"/>
+            <a:off x="4261104" y="0"/>
             <a:ext cx="36576" cy="6858000"/>
           </a:xfrm>
           <a:prstGeom prst="rect">
@@ -8333,8 +7634,8 @@
         </p:nvSpPr>
         <p:spPr>
           <a:xfrm>
-            <a:off x="8396935" y="868680"/>
-            <a:ext cx="5486400" cy="274320"/>
+            <a:off x="502920" y="868680"/>
+            <a:ext cx="6400800" cy="274320"/>
           </a:xfrm>
           <a:prstGeom prst="rect">
             <a:avLst/>
@@ -8358,7 +7659,7 @@
                 <a:ea typeface="Calibri" pitchFamily="34" charset="-122"/>
                 <a:cs typeface="Calibri" pitchFamily="34" charset="-120"/>
               </a:rPr>
-              <a:t>DESIGN · ELEVATION B</a:t>
+              <a:t>DESIGN · STOREFRONT</a:t>
             </a:r>
             <a:endParaRPr lang="en-US" sz="1250" dirty="0"/>
           </a:p>
@@ -8372,7 +7673,7 @@
         </p:nvSpPr>
         <p:spPr>
           <a:xfrm>
-            <a:off x="8396935" y="1234440"/>
+            <a:off x="502920" y="1234440"/>
             <a:ext cx="3383280" cy="1371600"/>
           </a:xfrm>
           <a:prstGeom prst="rect">
@@ -8392,7 +7693,7 @@
               <a:buNone/>
             </a:pPr>
             <a:r>
-              <a:rPr lang="en-US" sz="3000" b="1" dirty="0">
+              <a:rPr lang="en-US" sz="2900" b="1" dirty="0">
                 <a:solidFill>
                   <a:srgbClr val="FFFFFF"/>
                 </a:solidFill>
@@ -8400,9 +7701,9 @@
                 <a:ea typeface="Cambria" pitchFamily="34" charset="-122"/>
                 <a:cs typeface="Cambria" pitchFamily="34" charset="-120"/>
               </a:rPr>
-              <a:t>Right three-quarter</a:t>
-            </a:r>
-            <a:endParaRPr lang="en-US" sz="3000" dirty="0"/>
+              <a:t>Front elevation</a:t>
+            </a:r>
+            <a:endParaRPr lang="en-US" sz="2900" dirty="0"/>
           </a:p>
         </p:txBody>
       </p:sp>
@@ -8414,7 +7715,7 @@
         </p:nvSpPr>
         <p:spPr>
           <a:xfrm>
-            <a:off x="8396935" y="2697480"/>
+            <a:off x="502920" y="2697480"/>
             <a:ext cx="822960" cy="0"/>
           </a:xfrm>
           <a:prstGeom prst="line">
@@ -8437,7 +7738,7 @@
         </p:nvSpPr>
         <p:spPr>
           <a:xfrm>
-            <a:off x="8396935" y="2971800"/>
+            <a:off x="502920" y="2971800"/>
             <a:ext cx="3429000" cy="640080"/>
           </a:xfrm>
           <a:prstGeom prst="rect">
@@ -8465,7 +7766,7 @@
                 <a:ea typeface="Calibri" pitchFamily="34" charset="-122"/>
                 <a:cs typeface="Calibri" pitchFamily="34" charset="-120"/>
               </a:rPr>
-              <a:t>—  </a:t>
+              <a:t>·   </a:t>
             </a:r>
             <a:pPr indent="0" marL="0">
               <a:lnSpc>
@@ -8476,13 +7777,13 @@
             <a:r>
               <a:rPr lang="en-US" sz="1450" dirty="0">
                 <a:solidFill>
-                  <a:srgbClr val="EDE7D8"/>
+                  <a:srgbClr val="E9E2D3"/>
                 </a:solidFill>
                 <a:latin typeface="Calibri" pitchFamily="34" charset="0"/>
                 <a:ea typeface="Calibri" pitchFamily="34" charset="-122"/>
                 <a:cs typeface="Calibri" pitchFamily="34" charset="-120"/>
               </a:rPr>
-              <a:t>Backlit emerald display niches</a:t>
+              <a:t>Symmetrical premium storefront</a:t>
             </a:r>
             <a:endParaRPr lang="en-US" sz="1450" dirty="0"/>
           </a:p>
@@ -8496,7 +7797,7 @@
         </p:nvSpPr>
         <p:spPr>
           <a:xfrm>
-            <a:off x="8396935" y="3630168"/>
+            <a:off x="502920" y="3630168"/>
             <a:ext cx="3429000" cy="640080"/>
           </a:xfrm>
           <a:prstGeom prst="rect">
@@ -8524,7 +7825,7 @@
                 <a:ea typeface="Calibri" pitchFamily="34" charset="-122"/>
                 <a:cs typeface="Calibri" pitchFamily="34" charset="-120"/>
               </a:rPr>
-              <a:t>—  </a:t>
+              <a:t>·   </a:t>
             </a:r>
             <a:pPr indent="0" marL="0">
               <a:lnSpc>
@@ -8535,13 +7836,13 @@
             <a:r>
               <a:rPr lang="en-US" sz="1450" dirty="0">
                 <a:solidFill>
-                  <a:srgbClr val="EDE7D8"/>
+                  <a:srgbClr val="E9E2D3"/>
                 </a:solidFill>
                 <a:latin typeface="Calibri" pitchFamily="34" charset="0"/>
                 <a:ea typeface="Calibri" pitchFamily="34" charset="-122"/>
                 <a:cs typeface="Calibri" pitchFamily="34" charset="-120"/>
               </a:rPr>
-              <a:t>Illuminated DOFT seal totem beacon</a:t>
+              <a:t>Illuminated brand seal as the hero</a:t>
             </a:r>
             <a:endParaRPr lang="en-US" sz="1450" dirty="0"/>
           </a:p>
@@ -8555,7 +7856,7 @@
         </p:nvSpPr>
         <p:spPr>
           <a:xfrm>
-            <a:off x="8396935" y="4288536"/>
+            <a:off x="502920" y="4288536"/>
             <a:ext cx="3429000" cy="640080"/>
           </a:xfrm>
           <a:prstGeom prst="rect">
@@ -8583,7 +7884,7 @@
                 <a:ea typeface="Calibri" pitchFamily="34" charset="-122"/>
                 <a:cs typeface="Calibri" pitchFamily="34" charset="-120"/>
               </a:rPr>
-              <a:t>—  </a:t>
+              <a:t>·   </a:t>
             </a:r>
             <a:pPr indent="0" marL="0">
               <a:lnSpc>
@@ -8594,13 +7895,13 @@
             <a:r>
               <a:rPr lang="en-US" sz="1450" dirty="0">
                 <a:solidFill>
-                  <a:srgbClr val="EDE7D8"/>
+                  <a:srgbClr val="E9E2D3"/>
                 </a:solidFill>
                 <a:latin typeface="Calibri" pitchFamily="34" charset="0"/>
                 <a:ea typeface="Calibri" pitchFamily="34" charset="-122"/>
                 <a:cs typeface="Calibri" pitchFamily="34" charset="-120"/>
               </a:rPr>
-              <a:t>Marble counter tops, brushed-gold trim</a:t>
+              <a:t>Reed diffusers, candles &amp; gift sets staged</a:t>
             </a:r>
             <a:endParaRPr lang="en-US" sz="1450" dirty="0"/>
           </a:p>
@@ -8614,7 +7915,7 @@
         </p:nvSpPr>
         <p:spPr>
           <a:xfrm>
-            <a:off x="8396935" y="4946904"/>
+            <a:off x="502920" y="4946904"/>
             <a:ext cx="3429000" cy="640080"/>
           </a:xfrm>
           <a:prstGeom prst="rect">
@@ -8642,7 +7943,7 @@
                 <a:ea typeface="Calibri" pitchFamily="34" charset="-122"/>
                 <a:cs typeface="Calibri" pitchFamily="34" charset="-120"/>
               </a:rPr>
-              <a:t>—  </a:t>
+              <a:t>·   </a:t>
             </a:r>
             <a:pPr indent="0" marL="0">
               <a:lnSpc>
@@ -8653,13 +7954,13 @@
             <a:r>
               <a:rPr lang="en-US" sz="1450" dirty="0">
                 <a:solidFill>
-                  <a:srgbClr val="EDE7D8"/>
+                  <a:srgbClr val="E9E2D3"/>
                 </a:solidFill>
                 <a:latin typeface="Calibri" pitchFamily="34" charset="0"/>
                 <a:ea typeface="Calibri" pitchFamily="34" charset="-122"/>
                 <a:cs typeface="Calibri" pitchFamily="34" charset="-120"/>
               </a:rPr>
-              <a:t>Dried-floral styling — Doft's retail signature</a:t>
+              <a:t>Downlit header fascia &amp; warm LED base</a:t>
             </a:r>
             <a:endParaRPr lang="en-US" sz="1450" dirty="0"/>
           </a:p>
@@ -8706,7 +8007,7 @@
             <a:r>
               <a:rPr lang="en-US" sz="950" spc="100" kern="0" dirty="0">
                 <a:solidFill>
-                  <a:srgbClr val="7A7264"/>
+                  <a:srgbClr val="B8AE9C"/>
                 </a:solidFill>
                 <a:latin typeface="Calibri" pitchFamily="34" charset="0"/>
                 <a:ea typeface="Calibri" pitchFamily="34" charset="-122"/>
@@ -8745,7 +8046,7 @@
             <a:r>
               <a:rPr lang="en-US" sz="950" dirty="0">
                 <a:solidFill>
-                  <a:srgbClr val="7A7264"/>
+                  <a:srgbClr val="B8AE9C"/>
                 </a:solidFill>
                 <a:latin typeface="Calibri" pitchFamily="34" charset="0"/>
                 <a:ea typeface="Calibri" pitchFamily="34" charset="-122"/>
@@ -8772,7 +8073,7 @@
             <a:avLst/>
           </a:prstGeom>
           <a:solidFill>
-            <a:srgbClr val="FFFFFF"/>
+            <a:srgbClr val="1E1B17"/>
           </a:solidFill>
           <a:ln w="12700">
             <a:solidFill>
@@ -8809,7 +8110,7 @@
             <a:r>
               <a:rPr lang="en-US" sz="1100" b="1" dirty="0">
                 <a:solidFill>
-                  <a:srgbClr val="1E4D39"/>
+                  <a:srgbClr val="C6A24E"/>
                 </a:solidFill>
                 <a:latin typeface="Cambria" pitchFamily="34" charset="0"/>
                 <a:ea typeface="Cambria" pitchFamily="34" charset="-122"/>
@@ -8835,7 +8136,7 @@
     <p:bg>
       <p:bgPr>
         <a:solidFill>
-          <a:srgbClr val="FCF8EF"/>
+          <a:srgbClr val="EFEAE0"/>
         </a:solidFill>
       </p:bgPr>
     </p:bg>
@@ -8861,21 +8162,21 @@
         </p:nvSpPr>
         <p:spPr>
           <a:xfrm>
-            <a:off x="4297680" y="0"/>
+            <a:off x="0" y="0"/>
             <a:ext cx="7894015" cy="6858000"/>
           </a:xfrm>
           <a:prstGeom prst="rect">
             <a:avLst/>
           </a:prstGeom>
           <a:solidFill>
-            <a:srgbClr val="EFEBE1"/>
+            <a:srgbClr val="E7E2D8"/>
           </a:solidFill>
           <a:ln/>
         </p:spPr>
       </p:sp>
       <p:pic>
         <p:nvPicPr>
-          <p:cNvPr id="3" name="Image 0" descr="r_D_l45.png">    </p:cNvPr>
+          <p:cNvPr id="3" name="Image 0" descr="ref_imgs/P1_s1_1.jpg">    </p:cNvPr>
           <p:cNvPicPr>
             <a:picLocks noChangeAspect="1"/>
           </p:cNvPicPr>
@@ -8888,8 +8189,8 @@
         </p:blipFill>
         <p:spPr>
           <a:xfrm>
-            <a:off x="4434840" y="457200"/>
-            <a:ext cx="7619695" cy="5669280"/>
+            <a:off x="91440" y="320040"/>
+            <a:ext cx="7711135" cy="5989320"/>
           </a:xfrm>
           <a:prstGeom prst="rect">
             <a:avLst/>
@@ -8904,14 +8205,14 @@
         </p:nvSpPr>
         <p:spPr>
           <a:xfrm>
-            <a:off x="0" y="0"/>
+            <a:off x="7894015" y="0"/>
             <a:ext cx="4297680" cy="6858000"/>
           </a:xfrm>
           <a:prstGeom prst="rect">
             <a:avLst/>
           </a:prstGeom>
           <a:solidFill>
-            <a:srgbClr val="1E4D39"/>
+            <a:srgbClr val="2B2621"/>
           </a:solidFill>
           <a:ln/>
         </p:spPr>
@@ -8924,7 +8225,7 @@
         </p:nvSpPr>
         <p:spPr>
           <a:xfrm>
-            <a:off x="4261104" y="0"/>
+            <a:off x="7894015" y="0"/>
             <a:ext cx="36576" cy="6858000"/>
           </a:xfrm>
           <a:prstGeom prst="rect">
@@ -8944,8 +8245,8 @@
         </p:nvSpPr>
         <p:spPr>
           <a:xfrm>
-            <a:off x="502920" y="868680"/>
-            <a:ext cx="5486400" cy="274320"/>
+            <a:off x="8396935" y="868680"/>
+            <a:ext cx="6400800" cy="274320"/>
           </a:xfrm>
           <a:prstGeom prst="rect">
             <a:avLst/>
@@ -8969,7 +8270,7 @@
                 <a:ea typeface="Calibri" pitchFamily="34" charset="-122"/>
                 <a:cs typeface="Calibri" pitchFamily="34" charset="-120"/>
               </a:rPr>
-              <a:t>DESIGN · INTERIOR</a:t>
+              <a:t>DESIGN · LAYOUT</a:t>
             </a:r>
             <a:endParaRPr lang="en-US" sz="1250" dirty="0"/>
           </a:p>
@@ -8983,7 +8284,7 @@
         </p:nvSpPr>
         <p:spPr>
           <a:xfrm>
-            <a:off x="502920" y="1234440"/>
+            <a:off x="8396935" y="1234440"/>
             <a:ext cx="3383280" cy="1371600"/>
           </a:xfrm>
           <a:prstGeom prst="rect">
@@ -9003,7 +8304,7 @@
               <a:buNone/>
             </a:pPr>
             <a:r>
-              <a:rPr lang="en-US" sz="3000" b="1" dirty="0">
+              <a:rPr lang="en-US" sz="2900" b="1" dirty="0">
                 <a:solidFill>
                   <a:srgbClr val="FFFFFF"/>
                 </a:solidFill>
@@ -9011,9 +8312,9 @@
                 <a:ea typeface="Cambria" pitchFamily="34" charset="-122"/>
                 <a:cs typeface="Cambria" pitchFamily="34" charset="-120"/>
               </a:rPr>
-              <a:t>Cross-section · 45° left</a:t>
-            </a:r>
-            <a:endParaRPr lang="en-US" sz="3000" dirty="0"/>
+              <a:t>Interior view</a:t>
+            </a:r>
+            <a:endParaRPr lang="en-US" sz="2900" dirty="0"/>
           </a:p>
         </p:txBody>
       </p:sp>
@@ -9025,7 +8326,7 @@
         </p:nvSpPr>
         <p:spPr>
           <a:xfrm>
-            <a:off x="502920" y="2697480"/>
+            <a:off x="8396935" y="2697480"/>
             <a:ext cx="822960" cy="0"/>
           </a:xfrm>
           <a:prstGeom prst="line">
@@ -9048,7 +8349,7 @@
         </p:nvSpPr>
         <p:spPr>
           <a:xfrm>
-            <a:off x="502920" y="2971800"/>
+            <a:off x="8396935" y="2971800"/>
             <a:ext cx="3429000" cy="640080"/>
           </a:xfrm>
           <a:prstGeom prst="rect">
@@ -9076,7 +8377,7 @@
                 <a:ea typeface="Calibri" pitchFamily="34" charset="-122"/>
                 <a:cs typeface="Calibri" pitchFamily="34" charset="-120"/>
               </a:rPr>
-              <a:t>—  </a:t>
+              <a:t>·   </a:t>
             </a:r>
             <a:pPr indent="0" marL="0">
               <a:lnSpc>
@@ -9087,13 +8388,13 @@
             <a:r>
               <a:rPr lang="en-US" sz="1450" dirty="0">
                 <a:solidFill>
-                  <a:srgbClr val="EDE7D8"/>
+                  <a:srgbClr val="E9E2D3"/>
                 </a:solidFill>
                 <a:latin typeface="Calibri" pitchFamily="34" charset="0"/>
                 <a:ea typeface="Calibri" pitchFamily="34" charset="-122"/>
                 <a:cs typeface="Calibri" pitchFamily="34" charset="-120"/>
               </a:rPr>
-              <a:t>Lockable under-counter stock storage</a:t>
+              <a:t>Open-corner customer entry</a:t>
             </a:r>
             <a:endParaRPr lang="en-US" sz="1450" dirty="0"/>
           </a:p>
@@ -9107,7 +8408,7 @@
         </p:nvSpPr>
         <p:spPr>
           <a:xfrm>
-            <a:off x="502920" y="3630168"/>
+            <a:off x="8396935" y="3630168"/>
             <a:ext cx="3429000" cy="640080"/>
           </a:xfrm>
           <a:prstGeom prst="rect">
@@ -9135,7 +8436,7 @@
                 <a:ea typeface="Calibri" pitchFamily="34" charset="-122"/>
                 <a:cs typeface="Calibri" pitchFamily="34" charset="-120"/>
               </a:rPr>
-              <a:t>—  </a:t>
+              <a:t>·   </a:t>
             </a:r>
             <a:pPr indent="0" marL="0">
               <a:lnSpc>
@@ -9146,13 +8447,13 @@
             <a:r>
               <a:rPr lang="en-US" sz="1450" dirty="0">
                 <a:solidFill>
-                  <a:srgbClr val="EDE7D8"/>
+                  <a:srgbClr val="E9E2D3"/>
                 </a:solidFill>
                 <a:latin typeface="Calibri" pitchFamily="34" charset="0"/>
                 <a:ea typeface="Calibri" pitchFamily="34" charset="-122"/>
                 <a:cs typeface="Calibri" pitchFamily="34" charset="-120"/>
               </a:rPr>
-              <a:t>Two bar stools for staff seating</a:t>
+              <a:t>U-counter wraps the display zone</a:t>
             </a:r>
             <a:endParaRPr lang="en-US" sz="1450" dirty="0"/>
           </a:p>
@@ -9166,7 +8467,7 @@
         </p:nvSpPr>
         <p:spPr>
           <a:xfrm>
-            <a:off x="502920" y="4288536"/>
+            <a:off x="8396935" y="4288536"/>
             <a:ext cx="3429000" cy="640080"/>
           </a:xfrm>
           <a:prstGeom prst="rect">
@@ -9194,7 +8495,7 @@
                 <a:ea typeface="Calibri" pitchFamily="34" charset="-122"/>
                 <a:cs typeface="Calibri" pitchFamily="34" charset="-120"/>
               </a:rPr>
-              <a:t>—  </a:t>
+              <a:t>·   </a:t>
             </a:r>
             <a:pPr indent="0" marL="0">
               <a:lnSpc>
@@ -9205,13 +8506,13 @@
             <a:r>
               <a:rPr lang="en-US" sz="1450" dirty="0">
                 <a:solidFill>
-                  <a:srgbClr val="EDE7D8"/>
+                  <a:srgbClr val="E9E2D3"/>
                 </a:solidFill>
                 <a:latin typeface="Calibri" pitchFamily="34" charset="0"/>
                 <a:ea typeface="Calibri" pitchFamily="34" charset="-122"/>
                 <a:cs typeface="Calibri" pitchFamily="34" charset="-120"/>
               </a:rPr>
-              <a:t>Emerald staff-zone floor</a:t>
+              <a:t>Central table &amp; seating for gifting consults</a:t>
             </a:r>
             <a:endParaRPr lang="en-US" sz="1450" dirty="0"/>
           </a:p>
@@ -9225,7 +8526,7 @@
         </p:nvSpPr>
         <p:spPr>
           <a:xfrm>
-            <a:off x="502920" y="4946904"/>
+            <a:off x="8396935" y="4946904"/>
             <a:ext cx="3429000" cy="640080"/>
           </a:xfrm>
           <a:prstGeom prst="rect">
@@ -9253,7 +8554,7 @@
                 <a:ea typeface="Calibri" pitchFamily="34" charset="-122"/>
                 <a:cs typeface="Calibri" pitchFamily="34" charset="-120"/>
               </a:rPr>
-              <a:t>—  </a:t>
+              <a:t>·   </a:t>
             </a:r>
             <a:pPr indent="0" marL="0">
               <a:lnSpc>
@@ -9264,13 +8565,13 @@
             <a:r>
               <a:rPr lang="en-US" sz="1450" dirty="0">
                 <a:solidFill>
-                  <a:srgbClr val="EDE7D8"/>
+                  <a:srgbClr val="E9E2D3"/>
                 </a:solidFill>
                 <a:latin typeface="Calibri" pitchFamily="34" charset="0"/>
                 <a:ea typeface="Calibri" pitchFamily="34" charset="-122"/>
                 <a:cs typeface="Calibri" pitchFamily="34" charset="-120"/>
               </a:rPr>
-              <a:t>Front stays clean &amp; fully branded</a:t>
+              <a:t>Digital brand screen at the aisle</a:t>
             </a:r>
             <a:endParaRPr lang="en-US" sz="1450" dirty="0"/>
           </a:p>
@@ -9317,7 +8618,7 @@
             <a:r>
               <a:rPr lang="en-US" sz="950" spc="100" kern="0" dirty="0">
                 <a:solidFill>
-                  <a:srgbClr val="7A7264"/>
+                  <a:srgbClr val="B8AE9C"/>
                 </a:solidFill>
                 <a:latin typeface="Calibri" pitchFamily="34" charset="0"/>
                 <a:ea typeface="Calibri" pitchFamily="34" charset="-122"/>
@@ -9356,7 +8657,7 @@
             <a:r>
               <a:rPr lang="en-US" sz="950" dirty="0">
                 <a:solidFill>
-                  <a:srgbClr val="7A7264"/>
+                  <a:srgbClr val="B8AE9C"/>
                 </a:solidFill>
                 <a:latin typeface="Calibri" pitchFamily="34" charset="0"/>
                 <a:ea typeface="Calibri" pitchFamily="34" charset="-122"/>
@@ -9383,7 +8684,7 @@
             <a:avLst/>
           </a:prstGeom>
           <a:solidFill>
-            <a:srgbClr val="FFFFFF"/>
+            <a:srgbClr val="1E1B17"/>
           </a:solidFill>
           <a:ln w="12700">
             <a:solidFill>
@@ -9420,7 +8721,7 @@
             <a:r>
               <a:rPr lang="en-US" sz="1100" b="1" dirty="0">
                 <a:solidFill>
-                  <a:srgbClr val="1E4D39"/>
+                  <a:srgbClr val="C6A24E"/>
                 </a:solidFill>
                 <a:latin typeface="Cambria" pitchFamily="34" charset="0"/>
                 <a:ea typeface="Cambria" pitchFamily="34" charset="-122"/>
@@ -9446,7 +8747,7 @@
     <p:bg>
       <p:bgPr>
         <a:solidFill>
-          <a:srgbClr val="FCF8EF"/>
+          <a:srgbClr val="FFFFFF"/>
         </a:solidFill>
       </p:bgPr>
     </p:bg>
@@ -9466,27 +8767,85 @@
       </p:grpSpPr>
       <p:sp>
         <p:nvSpPr>
-          <p:cNvPr id="2" name="Shape 0"/>
-          <p:cNvSpPr/>
-          <p:nvPr/>
-        </p:nvSpPr>
-        <p:spPr>
-          <a:xfrm>
-            <a:off x="0" y="0"/>
-            <a:ext cx="7894015" cy="6858000"/>
-          </a:xfrm>
-          <a:prstGeom prst="rect">
-            <a:avLst/>
-          </a:prstGeom>
-          <a:solidFill>
-            <a:srgbClr val="EFEBE1"/>
-          </a:solidFill>
-          <a:ln/>
-        </p:spPr>
+          <p:cNvPr id="2" name="Text 0"/>
+          <p:cNvSpPr/>
+          <p:nvPr/>
+        </p:nvSpPr>
+        <p:spPr>
+          <a:xfrm>
+            <a:off x="548640" y="457200"/>
+            <a:ext cx="6400800" cy="274320"/>
+          </a:xfrm>
+          <a:prstGeom prst="rect">
+            <a:avLst/>
+          </a:prstGeom>
+          <a:noFill/>
+          <a:ln/>
+        </p:spPr>
+        <p:txBody>
+          <a:bodyPr wrap="square" rtlCol="0" anchor="ctr"/>
+          <a:lstStyle/>
+          <a:p>
+            <a:pPr algn="l" indent="0" marL="0">
+              <a:buNone/>
+            </a:pPr>
+            <a:r>
+              <a:rPr lang="en-US" sz="1250" b="1" spc="300" kern="0" dirty="0">
+                <a:solidFill>
+                  <a:srgbClr val="A9813A"/>
+                </a:solidFill>
+                <a:latin typeface="Calibri" pitchFamily="34" charset="0"/>
+                <a:ea typeface="Calibri" pitchFamily="34" charset="-122"/>
+                <a:cs typeface="Calibri" pitchFamily="34" charset="-120"/>
+              </a:rPr>
+              <a:t>TOP LAYOUT · PLAN</a:t>
+            </a:r>
+            <a:endParaRPr lang="en-US" sz="1250" dirty="0"/>
+          </a:p>
+        </p:txBody>
+      </p:sp>
+      <p:sp>
+        <p:nvSpPr>
+          <p:cNvPr id="3" name="Text 1"/>
+          <p:cNvSpPr/>
+          <p:nvPr/>
+        </p:nvSpPr>
+        <p:spPr>
+          <a:xfrm>
+            <a:off x="502920" y="777240"/>
+            <a:ext cx="8229600" cy="548640"/>
+          </a:xfrm>
+          <a:prstGeom prst="rect">
+            <a:avLst/>
+          </a:prstGeom>
+          <a:noFill/>
+          <a:ln/>
+        </p:spPr>
+        <p:txBody>
+          <a:bodyPr wrap="square" rtlCol="0" anchor="ctr"/>
+          <a:lstStyle/>
+          <a:p>
+            <a:pPr indent="0" marL="0">
+              <a:buNone/>
+            </a:pPr>
+            <a:r>
+              <a:rPr lang="en-US" sz="2800" b="1" dirty="0">
+                <a:solidFill>
+                  <a:srgbClr val="2B2621"/>
+                </a:solidFill>
+                <a:latin typeface="Cambria" pitchFamily="34" charset="0"/>
+                <a:ea typeface="Cambria" pitchFamily="34" charset="-122"/>
+                <a:cs typeface="Cambria" pitchFamily="34" charset="-120"/>
+              </a:rPr>
+              <a:t>8 ft × 8 ft kiosk footprint</a:t>
+            </a:r>
+            <a:endParaRPr lang="en-US" sz="2800" dirty="0"/>
+          </a:p>
+        </p:txBody>
       </p:sp>
       <p:pic>
         <p:nvPicPr>
-          <p:cNvPr id="3" name="Image 0" descr="r_D_r45.png">    </p:cNvPr>
+          <p:cNvPr id="4" name="Image 0" descr="ref_imgs/P1_s5_5.jpg">    </p:cNvPr>
           <p:cNvPicPr>
             <a:picLocks noChangeAspect="1"/>
           </p:cNvPicPr>
@@ -9499,8 +8858,8 @@
         </p:blipFill>
         <p:spPr>
           <a:xfrm>
-            <a:off x="137160" y="457200"/>
-            <a:ext cx="7619695" cy="5669280"/>
+            <a:off x="548640" y="1325880"/>
+            <a:ext cx="7589520" cy="5212080"/>
           </a:xfrm>
           <a:prstGeom prst="rect">
             <a:avLst/>
@@ -9509,36 +8868,80 @@
       </p:pic>
       <p:sp>
         <p:nvSpPr>
-          <p:cNvPr id="4" name="Shape 1"/>
-          <p:cNvSpPr/>
-          <p:nvPr/>
-        </p:nvSpPr>
-        <p:spPr>
-          <a:xfrm>
-            <a:off x="7894015" y="0"/>
-            <a:ext cx="4297680" cy="6858000"/>
+          <p:cNvPr id="5" name="Shape 2"/>
+          <p:cNvSpPr/>
+          <p:nvPr/>
+        </p:nvSpPr>
+        <p:spPr>
+          <a:xfrm>
+            <a:off x="8503920" y="1371600"/>
+            <a:ext cx="3200400" cy="4937760"/>
           </a:xfrm>
           <a:prstGeom prst="rect">
             <a:avLst/>
           </a:prstGeom>
           <a:solidFill>
-            <a:srgbClr val="1E4D39"/>
+            <a:srgbClr val="FBF7EF"/>
           </a:solidFill>
-          <a:ln/>
-        </p:spPr>
-      </p:sp>
-      <p:sp>
-        <p:nvSpPr>
-          <p:cNvPr id="5" name="Shape 2"/>
-          <p:cNvSpPr/>
-          <p:nvPr/>
-        </p:nvSpPr>
-        <p:spPr>
-          <a:xfrm>
-            <a:off x="7894015" y="0"/>
-            <a:ext cx="36576" cy="6858000"/>
-          </a:xfrm>
-          <a:prstGeom prst="rect">
+          <a:ln w="12700">
+            <a:solidFill>
+              <a:srgbClr val="E6DECB"/>
+            </a:solidFill>
+            <a:prstDash val="solid"/>
+          </a:ln>
+        </p:spPr>
+      </p:sp>
+      <p:sp>
+        <p:nvSpPr>
+          <p:cNvPr id="6" name="Text 3"/>
+          <p:cNvSpPr/>
+          <p:nvPr/>
+        </p:nvSpPr>
+        <p:spPr>
+          <a:xfrm>
+            <a:off x="8778240" y="1572768"/>
+            <a:ext cx="2743200" cy="320040"/>
+          </a:xfrm>
+          <a:prstGeom prst="rect">
+            <a:avLst/>
+          </a:prstGeom>
+          <a:noFill/>
+          <a:ln/>
+        </p:spPr>
+        <p:txBody>
+          <a:bodyPr wrap="square" rtlCol="0" anchor="ctr"/>
+          <a:lstStyle/>
+          <a:p>
+            <a:pPr indent="0" marL="0">
+              <a:buNone/>
+            </a:pPr>
+            <a:r>
+              <a:rPr lang="en-US" sz="1300" b="1" spc="200" kern="0" dirty="0">
+                <a:solidFill>
+                  <a:srgbClr val="A9813A"/>
+                </a:solidFill>
+                <a:latin typeface="Calibri" pitchFamily="34" charset="0"/>
+                <a:ea typeface="Calibri" pitchFamily="34" charset="-122"/>
+                <a:cs typeface="Calibri" pitchFamily="34" charset="-120"/>
+              </a:rPr>
+              <a:t>KEY ZONES</a:t>
+            </a:r>
+            <a:endParaRPr lang="en-US" sz="1300" dirty="0"/>
+          </a:p>
+        </p:txBody>
+      </p:sp>
+      <p:sp>
+        <p:nvSpPr>
+          <p:cNvPr id="7" name="Shape 4"/>
+          <p:cNvSpPr/>
+          <p:nvPr/>
+        </p:nvSpPr>
+        <p:spPr>
+          <a:xfrm>
+            <a:off x="8796528" y="2157984"/>
+            <a:ext cx="128016" cy="128016"/>
+          </a:xfrm>
+          <a:prstGeom prst="ellipse">
             <a:avLst/>
           </a:prstGeom>
           <a:solidFill>
@@ -9549,392 +8952,576 @@
       </p:sp>
       <p:sp>
         <p:nvSpPr>
-          <p:cNvPr id="6" name="Text 3"/>
-          <p:cNvSpPr/>
-          <p:nvPr/>
-        </p:nvSpPr>
-        <p:spPr>
-          <a:xfrm>
-            <a:off x="8396935" y="868680"/>
-            <a:ext cx="5486400" cy="274320"/>
-          </a:xfrm>
-          <a:prstGeom prst="rect">
-            <a:avLst/>
-          </a:prstGeom>
-          <a:noFill/>
-          <a:ln/>
-        </p:spPr>
-        <p:txBody>
-          <a:bodyPr wrap="square" rtlCol="0" anchor="ctr"/>
-          <a:lstStyle/>
-          <a:p>
-            <a:pPr algn="l" indent="0" marL="0">
-              <a:buNone/>
-            </a:pPr>
-            <a:r>
-              <a:rPr lang="en-US" sz="1250" b="1" spc="300" kern="0" dirty="0">
-                <a:solidFill>
-                  <a:srgbClr val="C6A24E"/>
+          <p:cNvPr id="8" name="Text 5"/>
+          <p:cNvSpPr/>
+          <p:nvPr/>
+        </p:nvSpPr>
+        <p:spPr>
+          <a:xfrm>
+            <a:off x="9052560" y="2011680"/>
+            <a:ext cx="2514600" cy="292608"/>
+          </a:xfrm>
+          <a:prstGeom prst="rect">
+            <a:avLst/>
+          </a:prstGeom>
+          <a:noFill/>
+          <a:ln/>
+        </p:spPr>
+        <p:txBody>
+          <a:bodyPr wrap="square" rtlCol="0" anchor="ctr"/>
+          <a:lstStyle/>
+          <a:p>
+            <a:pPr indent="0" marL="0">
+              <a:buNone/>
+            </a:pPr>
+            <a:r>
+              <a:rPr lang="en-US" sz="1350" b="1" dirty="0">
+                <a:solidFill>
+                  <a:srgbClr val="2B2621"/>
+                </a:solidFill>
+                <a:latin typeface="Cambria" pitchFamily="34" charset="0"/>
+                <a:ea typeface="Cambria" pitchFamily="34" charset="-122"/>
+                <a:cs typeface="Cambria" pitchFamily="34" charset="-120"/>
+              </a:rPr>
+              <a:t>Backlit brand wall</a:t>
+            </a:r>
+            <a:endParaRPr lang="en-US" sz="1350" dirty="0"/>
+          </a:p>
+        </p:txBody>
+      </p:sp>
+      <p:sp>
+        <p:nvSpPr>
+          <p:cNvPr id="9" name="Text 6"/>
+          <p:cNvSpPr/>
+          <p:nvPr/>
+        </p:nvSpPr>
+        <p:spPr>
+          <a:xfrm>
+            <a:off x="9052560" y="2304288"/>
+            <a:ext cx="2514600" cy="411480"/>
+          </a:xfrm>
+          <a:prstGeom prst="rect">
+            <a:avLst/>
+          </a:prstGeom>
+          <a:noFill/>
+          <a:ln/>
+        </p:spPr>
+        <p:txBody>
+          <a:bodyPr wrap="square" rtlCol="0" anchor="ctr"/>
+          <a:lstStyle/>
+          <a:p>
+            <a:pPr indent="0" marL="0">
+              <a:lnSpc>
+                <a:spcPct val="95000"/>
+              </a:lnSpc>
+              <a:buNone/>
+            </a:pPr>
+            <a:r>
+              <a:rPr lang="en-US" sz="1100" dirty="0">
+                <a:solidFill>
+                  <a:srgbClr val="857B6C"/>
                 </a:solidFill>
                 <a:latin typeface="Calibri" pitchFamily="34" charset="0"/>
                 <a:ea typeface="Calibri" pitchFamily="34" charset="-122"/>
                 <a:cs typeface="Calibri" pitchFamily="34" charset="-120"/>
               </a:rPr>
-              <a:t>DESIGN · INTERIOR</a:t>
-            </a:r>
-            <a:endParaRPr lang="en-US" sz="1250" dirty="0"/>
-          </a:p>
-        </p:txBody>
-      </p:sp>
-      <p:sp>
-        <p:nvSpPr>
-          <p:cNvPr id="7" name="Text 4"/>
-          <p:cNvSpPr/>
-          <p:nvPr/>
-        </p:nvSpPr>
-        <p:spPr>
-          <a:xfrm>
-            <a:off x="8396935" y="1234440"/>
-            <a:ext cx="3383280" cy="1371600"/>
-          </a:xfrm>
-          <a:prstGeom prst="rect">
-            <a:avLst/>
-          </a:prstGeom>
-          <a:noFill/>
-          <a:ln/>
-        </p:spPr>
-        <p:txBody>
-          <a:bodyPr wrap="square" rtlCol="0" anchor="ctr"/>
-          <a:lstStyle/>
-          <a:p>
-            <a:pPr indent="0" marL="0">
-              <a:lnSpc>
-                <a:spcPct val="98000"/>
-              </a:lnSpc>
-              <a:buNone/>
-            </a:pPr>
-            <a:r>
-              <a:rPr lang="en-US" sz="3000" b="1" dirty="0">
-                <a:solidFill>
-                  <a:srgbClr val="FFFFFF"/>
+              <a:t>Illuminated seal + gallery shelving</a:t>
+            </a:r>
+            <a:endParaRPr lang="en-US" sz="1100" dirty="0"/>
+          </a:p>
+        </p:txBody>
+      </p:sp>
+      <p:sp>
+        <p:nvSpPr>
+          <p:cNvPr id="10" name="Shape 7"/>
+          <p:cNvSpPr/>
+          <p:nvPr/>
+        </p:nvSpPr>
+        <p:spPr>
+          <a:xfrm>
+            <a:off x="8796528" y="2980944"/>
+            <a:ext cx="128016" cy="128016"/>
+          </a:xfrm>
+          <a:prstGeom prst="ellipse">
+            <a:avLst/>
+          </a:prstGeom>
+          <a:solidFill>
+            <a:srgbClr val="C6A24E"/>
+          </a:solidFill>
+          <a:ln/>
+        </p:spPr>
+      </p:sp>
+      <p:sp>
+        <p:nvSpPr>
+          <p:cNvPr id="11" name="Text 8"/>
+          <p:cNvSpPr/>
+          <p:nvPr/>
+        </p:nvSpPr>
+        <p:spPr>
+          <a:xfrm>
+            <a:off x="9052560" y="2834640"/>
+            <a:ext cx="2514600" cy="292608"/>
+          </a:xfrm>
+          <a:prstGeom prst="rect">
+            <a:avLst/>
+          </a:prstGeom>
+          <a:noFill/>
+          <a:ln/>
+        </p:spPr>
+        <p:txBody>
+          <a:bodyPr wrap="square" rtlCol="0" anchor="ctr"/>
+          <a:lstStyle/>
+          <a:p>
+            <a:pPr indent="0" marL="0">
+              <a:buNone/>
+            </a:pPr>
+            <a:r>
+              <a:rPr lang="en-US" sz="1350" b="1" dirty="0">
+                <a:solidFill>
+                  <a:srgbClr val="2B2621"/>
                 </a:solidFill>
                 <a:latin typeface="Cambria" pitchFamily="34" charset="0"/>
                 <a:ea typeface="Cambria" pitchFamily="34" charset="-122"/>
                 <a:cs typeface="Cambria" pitchFamily="34" charset="-120"/>
               </a:rPr>
-              <a:t>Cross-section · 45° right</a:t>
-            </a:r>
-            <a:endParaRPr lang="en-US" sz="3000" dirty="0"/>
-          </a:p>
-        </p:txBody>
-      </p:sp>
-      <p:sp>
-        <p:nvSpPr>
-          <p:cNvPr id="8" name="Shape 5"/>
-          <p:cNvSpPr/>
-          <p:nvPr/>
-        </p:nvSpPr>
-        <p:spPr>
-          <a:xfrm>
-            <a:off x="8396935" y="2697480"/>
-            <a:ext cx="822960" cy="0"/>
-          </a:xfrm>
-          <a:prstGeom prst="line">
-            <a:avLst/>
-          </a:prstGeom>
-          <a:noFill/>
-          <a:ln w="19050">
-            <a:solidFill>
-              <a:srgbClr val="C6A24E"/>
-            </a:solidFill>
-            <a:prstDash val="solid"/>
-          </a:ln>
-        </p:spPr>
-      </p:sp>
-      <p:sp>
-        <p:nvSpPr>
-          <p:cNvPr id="9" name="Text 6"/>
-          <p:cNvSpPr/>
-          <p:nvPr/>
-        </p:nvSpPr>
-        <p:spPr>
-          <a:xfrm>
-            <a:off x="8396935" y="2971800"/>
-            <a:ext cx="3429000" cy="640080"/>
-          </a:xfrm>
-          <a:prstGeom prst="rect">
-            <a:avLst/>
-          </a:prstGeom>
-          <a:noFill/>
-          <a:ln/>
-        </p:spPr>
-        <p:txBody>
-          <a:bodyPr wrap="square" rtlCol="0" anchor="t"/>
+              <a:t>Perimeter counters</a:t>
+            </a:r>
+            <a:endParaRPr lang="en-US" sz="1350" dirty="0"/>
+          </a:p>
+        </p:txBody>
+      </p:sp>
+      <p:sp>
+        <p:nvSpPr>
+          <p:cNvPr id="12" name="Text 9"/>
+          <p:cNvSpPr/>
+          <p:nvPr/>
+        </p:nvSpPr>
+        <p:spPr>
+          <a:xfrm>
+            <a:off x="9052560" y="3127248"/>
+            <a:ext cx="2514600" cy="411480"/>
+          </a:xfrm>
+          <a:prstGeom prst="rect">
+            <a:avLst/>
+          </a:prstGeom>
+          <a:noFill/>
+          <a:ln/>
+        </p:spPr>
+        <p:txBody>
+          <a:bodyPr wrap="square" rtlCol="0" anchor="ctr"/>
           <a:lstStyle/>
           <a:p>
             <a:pPr indent="0" marL="0">
               <a:lnSpc>
-                <a:spcPct val="102000"/>
+                <a:spcPct val="95000"/>
               </a:lnSpc>
               <a:buNone/>
             </a:pPr>
             <a:r>
-              <a:rPr lang="en-US" sz="1450" dirty="0">
-                <a:solidFill>
-                  <a:srgbClr val="C6A24E"/>
+              <a:rPr lang="en-US" sz="1100" dirty="0">
+                <a:solidFill>
+                  <a:srgbClr val="857B6C"/>
                 </a:solidFill>
                 <a:latin typeface="Calibri" pitchFamily="34" charset="0"/>
                 <a:ea typeface="Calibri" pitchFamily="34" charset="-122"/>
                 <a:cs typeface="Calibri" pitchFamily="34" charset="-120"/>
               </a:rPr>
-              <a:t>—  </a:t>
-            </a:r>
+              <a:t>U-display wraps three sides</a:t>
+            </a:r>
+            <a:endParaRPr lang="en-US" sz="1100" dirty="0"/>
+          </a:p>
+        </p:txBody>
+      </p:sp>
+      <p:sp>
+        <p:nvSpPr>
+          <p:cNvPr id="13" name="Shape 10"/>
+          <p:cNvSpPr/>
+          <p:nvPr/>
+        </p:nvSpPr>
+        <p:spPr>
+          <a:xfrm>
+            <a:off x="8796528" y="3803904"/>
+            <a:ext cx="128016" cy="128016"/>
+          </a:xfrm>
+          <a:prstGeom prst="ellipse">
+            <a:avLst/>
+          </a:prstGeom>
+          <a:solidFill>
+            <a:srgbClr val="C6A24E"/>
+          </a:solidFill>
+          <a:ln/>
+        </p:spPr>
+      </p:sp>
+      <p:sp>
+        <p:nvSpPr>
+          <p:cNvPr id="14" name="Text 11"/>
+          <p:cNvSpPr/>
+          <p:nvPr/>
+        </p:nvSpPr>
+        <p:spPr>
+          <a:xfrm>
+            <a:off x="9052560" y="3657600"/>
+            <a:ext cx="2514600" cy="292608"/>
+          </a:xfrm>
+          <a:prstGeom prst="rect">
+            <a:avLst/>
+          </a:prstGeom>
+          <a:noFill/>
+          <a:ln/>
+        </p:spPr>
+        <p:txBody>
+          <a:bodyPr wrap="square" rtlCol="0" anchor="ctr"/>
+          <a:lstStyle/>
+          <a:p>
+            <a:pPr indent="0" marL="0">
+              <a:buNone/>
+            </a:pPr>
+            <a:r>
+              <a:rPr lang="en-US" sz="1350" b="1" dirty="0">
+                <a:solidFill>
+                  <a:srgbClr val="2B2621"/>
+                </a:solidFill>
+                <a:latin typeface="Cambria" pitchFamily="34" charset="0"/>
+                <a:ea typeface="Cambria" pitchFamily="34" charset="-122"/>
+                <a:cs typeface="Cambria" pitchFamily="34" charset="-120"/>
+              </a:rPr>
+              <a:t>Consultation seating</a:t>
+            </a:r>
+            <a:endParaRPr lang="en-US" sz="1350" dirty="0"/>
+          </a:p>
+        </p:txBody>
+      </p:sp>
+      <p:sp>
+        <p:nvSpPr>
+          <p:cNvPr id="15" name="Text 12"/>
+          <p:cNvSpPr/>
+          <p:nvPr/>
+        </p:nvSpPr>
+        <p:spPr>
+          <a:xfrm>
+            <a:off x="9052560" y="3950208"/>
+            <a:ext cx="2514600" cy="411480"/>
+          </a:xfrm>
+          <a:prstGeom prst="rect">
+            <a:avLst/>
+          </a:prstGeom>
+          <a:noFill/>
+          <a:ln/>
+        </p:spPr>
+        <p:txBody>
+          <a:bodyPr wrap="square" rtlCol="0" anchor="ctr"/>
+          <a:lstStyle/>
+          <a:p>
             <a:pPr indent="0" marL="0">
               <a:lnSpc>
-                <a:spcPct val="102000"/>
+                <a:spcPct val="95000"/>
               </a:lnSpc>
               <a:buNone/>
             </a:pPr>
             <a:r>
-              <a:rPr lang="en-US" sz="1450" dirty="0">
-                <a:solidFill>
-                  <a:srgbClr val="EDE7D8"/>
+              <a:rPr lang="en-US" sz="1100" dirty="0">
+                <a:solidFill>
+                  <a:srgbClr val="857B6C"/>
                 </a:solidFill>
                 <a:latin typeface="Calibri" pitchFamily="34" charset="0"/>
                 <a:ea typeface="Calibri" pitchFamily="34" charset="-122"/>
                 <a:cs typeface="Calibri" pitchFamily="34" charset="-120"/>
               </a:rPr>
-              <a:t>Lockable storage both sides</a:t>
-            </a:r>
-            <a:endParaRPr lang="en-US" sz="1450" dirty="0"/>
-          </a:p>
-        </p:txBody>
-      </p:sp>
-      <p:sp>
-        <p:nvSpPr>
-          <p:cNvPr id="10" name="Text 7"/>
-          <p:cNvSpPr/>
-          <p:nvPr/>
-        </p:nvSpPr>
-        <p:spPr>
-          <a:xfrm>
-            <a:off x="8396935" y="3630168"/>
-            <a:ext cx="3429000" cy="640080"/>
-          </a:xfrm>
-          <a:prstGeom prst="rect">
-            <a:avLst/>
-          </a:prstGeom>
-          <a:noFill/>
-          <a:ln/>
-        </p:spPr>
-        <p:txBody>
-          <a:bodyPr wrap="square" rtlCol="0" anchor="t"/>
+              <a:t>Central table + four chairs</a:t>
+            </a:r>
+            <a:endParaRPr lang="en-US" sz="1100" dirty="0"/>
+          </a:p>
+        </p:txBody>
+      </p:sp>
+      <p:sp>
+        <p:nvSpPr>
+          <p:cNvPr id="16" name="Shape 13"/>
+          <p:cNvSpPr/>
+          <p:nvPr/>
+        </p:nvSpPr>
+        <p:spPr>
+          <a:xfrm>
+            <a:off x="8796528" y="4626864"/>
+            <a:ext cx="128016" cy="128016"/>
+          </a:xfrm>
+          <a:prstGeom prst="ellipse">
+            <a:avLst/>
+          </a:prstGeom>
+          <a:solidFill>
+            <a:srgbClr val="C6A24E"/>
+          </a:solidFill>
+          <a:ln/>
+        </p:spPr>
+      </p:sp>
+      <p:sp>
+        <p:nvSpPr>
+          <p:cNvPr id="17" name="Text 14"/>
+          <p:cNvSpPr/>
+          <p:nvPr/>
+        </p:nvSpPr>
+        <p:spPr>
+          <a:xfrm>
+            <a:off x="9052560" y="4480560"/>
+            <a:ext cx="2514600" cy="292608"/>
+          </a:xfrm>
+          <a:prstGeom prst="rect">
+            <a:avLst/>
+          </a:prstGeom>
+          <a:noFill/>
+          <a:ln/>
+        </p:spPr>
+        <p:txBody>
+          <a:bodyPr wrap="square" rtlCol="0" anchor="ctr"/>
+          <a:lstStyle/>
+          <a:p>
+            <a:pPr indent="0" marL="0">
+              <a:buNone/>
+            </a:pPr>
+            <a:r>
+              <a:rPr lang="en-US" sz="1350" b="1" dirty="0">
+                <a:solidFill>
+                  <a:srgbClr val="2B2621"/>
+                </a:solidFill>
+                <a:latin typeface="Cambria" pitchFamily="34" charset="0"/>
+                <a:ea typeface="Cambria" pitchFamily="34" charset="-122"/>
+                <a:cs typeface="Cambria" pitchFamily="34" charset="-120"/>
+              </a:rPr>
+              <a:t>Open-corner entries</a:t>
+            </a:r>
+            <a:endParaRPr lang="en-US" sz="1350" dirty="0"/>
+          </a:p>
+        </p:txBody>
+      </p:sp>
+      <p:sp>
+        <p:nvSpPr>
+          <p:cNvPr id="18" name="Text 15"/>
+          <p:cNvSpPr/>
+          <p:nvPr/>
+        </p:nvSpPr>
+        <p:spPr>
+          <a:xfrm>
+            <a:off x="9052560" y="4773168"/>
+            <a:ext cx="2514600" cy="411480"/>
+          </a:xfrm>
+          <a:prstGeom prst="rect">
+            <a:avLst/>
+          </a:prstGeom>
+          <a:noFill/>
+          <a:ln/>
+        </p:spPr>
+        <p:txBody>
+          <a:bodyPr wrap="square" rtlCol="0" anchor="ctr"/>
           <a:lstStyle/>
           <a:p>
             <a:pPr indent="0" marL="0">
               <a:lnSpc>
-                <a:spcPct val="102000"/>
+                <a:spcPct val="95000"/>
               </a:lnSpc>
               <a:buNone/>
             </a:pPr>
             <a:r>
-              <a:rPr lang="en-US" sz="1450" dirty="0">
-                <a:solidFill>
-                  <a:srgbClr val="C6A24E"/>
+              <a:rPr lang="en-US" sz="1100" dirty="0">
+                <a:solidFill>
+                  <a:srgbClr val="857B6C"/>
                 </a:solidFill>
                 <a:latin typeface="Calibri" pitchFamily="34" charset="0"/>
                 <a:ea typeface="Calibri" pitchFamily="34" charset="-122"/>
                 <a:cs typeface="Calibri" pitchFamily="34" charset="-120"/>
               </a:rPr>
-              <a:t>—  </a:t>
-            </a:r>
+              <a:t>Easy customer flow in &amp; out</a:t>
+            </a:r>
+            <a:endParaRPr lang="en-US" sz="1100" dirty="0"/>
+          </a:p>
+        </p:txBody>
+      </p:sp>
+      <p:sp>
+        <p:nvSpPr>
+          <p:cNvPr id="19" name="Shape 16"/>
+          <p:cNvSpPr/>
+          <p:nvPr/>
+        </p:nvSpPr>
+        <p:spPr>
+          <a:xfrm>
+            <a:off x="8796528" y="5449824"/>
+            <a:ext cx="128016" cy="128016"/>
+          </a:xfrm>
+          <a:prstGeom prst="ellipse">
+            <a:avLst/>
+          </a:prstGeom>
+          <a:solidFill>
+            <a:srgbClr val="C6A24E"/>
+          </a:solidFill>
+          <a:ln/>
+        </p:spPr>
+      </p:sp>
+      <p:sp>
+        <p:nvSpPr>
+          <p:cNvPr id="20" name="Text 17"/>
+          <p:cNvSpPr/>
+          <p:nvPr/>
+        </p:nvSpPr>
+        <p:spPr>
+          <a:xfrm>
+            <a:off x="9052560" y="5303520"/>
+            <a:ext cx="2514600" cy="292608"/>
+          </a:xfrm>
+          <a:prstGeom prst="rect">
+            <a:avLst/>
+          </a:prstGeom>
+          <a:noFill/>
+          <a:ln/>
+        </p:spPr>
+        <p:txBody>
+          <a:bodyPr wrap="square" rtlCol="0" anchor="ctr"/>
+          <a:lstStyle/>
+          <a:p>
+            <a:pPr indent="0" marL="0">
+              <a:buNone/>
+            </a:pPr>
+            <a:r>
+              <a:rPr lang="en-US" sz="1350" b="1" dirty="0">
+                <a:solidFill>
+                  <a:srgbClr val="2B2621"/>
+                </a:solidFill>
+                <a:latin typeface="Cambria" pitchFamily="34" charset="0"/>
+                <a:ea typeface="Cambria" pitchFamily="34" charset="-122"/>
+                <a:cs typeface="Cambria" pitchFamily="34" charset="-120"/>
+              </a:rPr>
+              <a:t>Digital screen</a:t>
+            </a:r>
+            <a:endParaRPr lang="en-US" sz="1350" dirty="0"/>
+          </a:p>
+        </p:txBody>
+      </p:sp>
+      <p:sp>
+        <p:nvSpPr>
+          <p:cNvPr id="21" name="Text 18"/>
+          <p:cNvSpPr/>
+          <p:nvPr/>
+        </p:nvSpPr>
+        <p:spPr>
+          <a:xfrm>
+            <a:off x="9052560" y="5596128"/>
+            <a:ext cx="2514600" cy="411480"/>
+          </a:xfrm>
+          <a:prstGeom prst="rect">
+            <a:avLst/>
+          </a:prstGeom>
+          <a:noFill/>
+          <a:ln/>
+        </p:spPr>
+        <p:txBody>
+          <a:bodyPr wrap="square" rtlCol="0" anchor="ctr"/>
+          <a:lstStyle/>
+          <a:p>
             <a:pPr indent="0" marL="0">
               <a:lnSpc>
-                <a:spcPct val="102000"/>
+                <a:spcPct val="95000"/>
               </a:lnSpc>
               <a:buNone/>
             </a:pPr>
             <a:r>
-              <a:rPr lang="en-US" sz="1450" dirty="0">
-                <a:solidFill>
-                  <a:srgbClr val="EDE7D8"/>
+              <a:rPr lang="en-US" sz="1100" dirty="0">
+                <a:solidFill>
+                  <a:srgbClr val="857B6C"/>
                 </a:solidFill>
                 <a:latin typeface="Calibri" pitchFamily="34" charset="0"/>
                 <a:ea typeface="Calibri" pitchFamily="34" charset="-122"/>
                 <a:cs typeface="Calibri" pitchFamily="34" charset="-120"/>
               </a:rPr>
-              <a:t>In-built cash safe</a:t>
-            </a:r>
-            <a:endParaRPr lang="en-US" sz="1450" dirty="0"/>
-          </a:p>
-        </p:txBody>
-      </p:sp>
-      <p:sp>
-        <p:nvSpPr>
-          <p:cNvPr id="11" name="Text 8"/>
-          <p:cNvSpPr/>
-          <p:nvPr/>
-        </p:nvSpPr>
-        <p:spPr>
-          <a:xfrm>
-            <a:off x="8396935" y="4288536"/>
-            <a:ext cx="3429000" cy="640080"/>
-          </a:xfrm>
-          <a:prstGeom prst="rect">
-            <a:avLst/>
-          </a:prstGeom>
-          <a:noFill/>
-          <a:ln/>
-        </p:spPr>
-        <p:txBody>
-          <a:bodyPr wrap="square" rtlCol="0" anchor="t"/>
-          <a:lstStyle/>
-          <a:p>
-            <a:pPr indent="0" marL="0">
-              <a:lnSpc>
-                <a:spcPct val="102000"/>
-              </a:lnSpc>
-              <a:buNone/>
-            </a:pPr>
-            <a:r>
-              <a:rPr lang="en-US" sz="1450" dirty="0">
+              <a:t>Brand film at the aisle edge</a:t>
+            </a:r>
+            <a:endParaRPr lang="en-US" sz="1100" dirty="0"/>
+          </a:p>
+        </p:txBody>
+      </p:sp>
+      <p:sp>
+        <p:nvSpPr>
+          <p:cNvPr id="22" name="Text 19"/>
+          <p:cNvSpPr/>
+          <p:nvPr/>
+        </p:nvSpPr>
+        <p:spPr>
+          <a:xfrm>
+            <a:off x="457200" y="6419088"/>
+            <a:ext cx="7315200" cy="320040"/>
+          </a:xfrm>
+          <a:prstGeom prst="rect">
+            <a:avLst/>
+          </a:prstGeom>
+          <a:noFill/>
+          <a:ln/>
+        </p:spPr>
+        <p:txBody>
+          <a:bodyPr wrap="square" rtlCol="0" anchor="ctr"/>
+          <a:lstStyle/>
+          <a:p>
+            <a:pPr algn="l" indent="0" marL="0">
+              <a:buNone/>
+            </a:pPr>
+            <a:r>
+              <a:rPr lang="en-US" sz="950" b="1" spc="100" kern="0" dirty="0">
                 <a:solidFill>
                   <a:srgbClr val="C6A24E"/>
+                </a:solidFill>
+                <a:latin typeface="Cambria" pitchFamily="34" charset="0"/>
+                <a:ea typeface="Cambria" pitchFamily="34" charset="-122"/>
+                <a:cs typeface="Cambria" pitchFamily="34" charset="-120"/>
+              </a:rPr>
+              <a:t>DOFT</a:t>
+            </a:r>
+            <a:pPr algn="l" indent="0" marL="0">
+              <a:buNone/>
+            </a:pPr>
+            <a:r>
+              <a:rPr lang="en-US" sz="950" spc="100" kern="0" dirty="0">
+                <a:solidFill>
+                  <a:srgbClr val="857B6C"/>
                 </a:solidFill>
                 <a:latin typeface="Calibri" pitchFamily="34" charset="0"/>
                 <a:ea typeface="Calibri" pitchFamily="34" charset="-122"/>
                 <a:cs typeface="Calibri" pitchFamily="34" charset="-120"/>
               </a:rPr>
-              <a:t>—  </a:t>
-            </a:r>
-            <a:pPr indent="0" marL="0">
-              <a:lnSpc>
-                <a:spcPct val="102000"/>
-              </a:lnSpc>
-              <a:buNone/>
-            </a:pPr>
-            <a:r>
-              <a:rPr lang="en-US" sz="1450" dirty="0">
-                <a:solidFill>
-                  <a:srgbClr val="EDE7D8"/>
+              <a:t>  ·  SCENTED MEMORIES  ·  Diwali Pop-Up Kiosk Concept</a:t>
+            </a:r>
+            <a:endParaRPr lang="en-US" sz="950" dirty="0"/>
+          </a:p>
+        </p:txBody>
+      </p:sp>
+      <p:sp>
+        <p:nvSpPr>
+          <p:cNvPr id="23" name="Text 20"/>
+          <p:cNvSpPr/>
+          <p:nvPr/>
+        </p:nvSpPr>
+        <p:spPr>
+          <a:xfrm>
+            <a:off x="10058400" y="6419088"/>
+            <a:ext cx="1691640" cy="320040"/>
+          </a:xfrm>
+          <a:prstGeom prst="rect">
+            <a:avLst/>
+          </a:prstGeom>
+          <a:noFill/>
+          <a:ln/>
+        </p:spPr>
+        <p:txBody>
+          <a:bodyPr wrap="square" rtlCol="0" anchor="ctr"/>
+          <a:lstStyle/>
+          <a:p>
+            <a:pPr algn="r" indent="0" marL="0">
+              <a:buNone/>
+            </a:pPr>
+            <a:r>
+              <a:rPr lang="en-US" sz="950" dirty="0">
+                <a:solidFill>
+                  <a:srgbClr val="857B6C"/>
                 </a:solidFill>
                 <a:latin typeface="Calibri" pitchFamily="34" charset="0"/>
                 <a:ea typeface="Calibri" pitchFamily="34" charset="-122"/>
                 <a:cs typeface="Calibri" pitchFamily="34" charset="-120"/>
               </a:rPr>
-              <a:t>Clear staff entry to the rear</a:t>
-            </a:r>
-            <a:endParaRPr lang="en-US" sz="1450" dirty="0"/>
-          </a:p>
-        </p:txBody>
-      </p:sp>
-      <p:sp>
-        <p:nvSpPr>
-          <p:cNvPr id="12" name="Text 9"/>
-          <p:cNvSpPr/>
-          <p:nvPr/>
-        </p:nvSpPr>
-        <p:spPr>
-          <a:xfrm>
-            <a:off x="8396935" y="4946904"/>
-            <a:ext cx="3429000" cy="640080"/>
-          </a:xfrm>
-          <a:prstGeom prst="rect">
-            <a:avLst/>
-          </a:prstGeom>
-          <a:noFill/>
-          <a:ln/>
-        </p:spPr>
-        <p:txBody>
-          <a:bodyPr wrap="square" rtlCol="0" anchor="t"/>
-          <a:lstStyle/>
-          <a:p>
-            <a:pPr indent="0" marL="0">
-              <a:lnSpc>
-                <a:spcPct val="102000"/>
-              </a:lnSpc>
-              <a:buNone/>
-            </a:pPr>
-            <a:r>
-              <a:rPr lang="en-US" sz="1450" dirty="0">
-                <a:solidFill>
-                  <a:srgbClr val="C6A24E"/>
-                </a:solidFill>
-                <a:latin typeface="Calibri" pitchFamily="34" charset="0"/>
-                <a:ea typeface="Calibri" pitchFamily="34" charset="-122"/>
-                <a:cs typeface="Calibri" pitchFamily="34" charset="-120"/>
-              </a:rPr>
-              <a:t>—  </a:t>
-            </a:r>
-            <a:pPr indent="0" marL="0">
-              <a:lnSpc>
-                <a:spcPct val="102000"/>
-              </a:lnSpc>
-              <a:buNone/>
-            </a:pPr>
-            <a:r>
-              <a:rPr lang="en-US" sz="1450" dirty="0">
-                <a:solidFill>
-                  <a:srgbClr val="EDE7D8"/>
-                </a:solidFill>
-                <a:latin typeface="Calibri" pitchFamily="34" charset="0"/>
-                <a:ea typeface="Calibri" pitchFamily="34" charset="-122"/>
-                <a:cs typeface="Calibri" pitchFamily="34" charset="-120"/>
-              </a:rPr>
-              <a:t>~ working island, premium storefront</a:t>
-            </a:r>
-            <a:endParaRPr lang="en-US" sz="1450" dirty="0"/>
-          </a:p>
-        </p:txBody>
-      </p:sp>
-      <p:sp>
-        <p:nvSpPr>
-          <p:cNvPr id="13" name="Text 10"/>
-          <p:cNvSpPr/>
-          <p:nvPr/>
-        </p:nvSpPr>
-        <p:spPr>
-          <a:xfrm>
-            <a:off x="457200" y="6419088"/>
-            <a:ext cx="7315200" cy="320040"/>
-          </a:xfrm>
-          <a:prstGeom prst="rect">
-            <a:avLst/>
-          </a:prstGeom>
-          <a:noFill/>
-          <a:ln/>
-        </p:spPr>
-        <p:txBody>
-          <a:bodyPr wrap="square" rtlCol="0" anchor="ctr"/>
-          <a:lstStyle/>
-          <a:p>
-            <a:pPr algn="l" indent="0" marL="0">
-              <a:buNone/>
-            </a:pPr>
-            <a:r>
-              <a:rPr lang="en-US" sz="950" b="1" spc="100" kern="0" dirty="0">
-                <a:solidFill>
-                  <a:srgbClr val="C6A24E"/>
-                </a:solidFill>
-                <a:latin typeface="Cambria" pitchFamily="34" charset="0"/>
-                <a:ea typeface="Cambria" pitchFamily="34" charset="-122"/>
-                <a:cs typeface="Cambria" pitchFamily="34" charset="-120"/>
-              </a:rPr>
-              <a:t>DOFT</a:t>
-            </a:r>
-            <a:pPr algn="l" indent="0" marL="0">
-              <a:buNone/>
-            </a:pPr>
-            <a:r>
-              <a:rPr lang="en-US" sz="950" spc="100" kern="0" dirty="0">
-                <a:solidFill>
-                  <a:srgbClr val="7A7264"/>
-                </a:solidFill>
-                <a:latin typeface="Calibri" pitchFamily="34" charset="0"/>
-                <a:ea typeface="Calibri" pitchFamily="34" charset="-122"/>
-                <a:cs typeface="Calibri" pitchFamily="34" charset="-120"/>
-              </a:rPr>
-              <a:t>  ·  SCENTED MEMORIES  ·  Diwali Pop-Up Kiosk Concept</a:t>
+              <a:t>ProMarcom</a:t>
             </a:r>
             <a:endParaRPr lang="en-US" sz="950" dirty="0"/>
           </a:p>
@@ -9942,46 +9529,7 @@
       </p:sp>
       <p:sp>
         <p:nvSpPr>
-          <p:cNvPr id="14" name="Text 11"/>
-          <p:cNvSpPr/>
-          <p:nvPr/>
-        </p:nvSpPr>
-        <p:spPr>
-          <a:xfrm>
-            <a:off x="10058400" y="6419088"/>
-            <a:ext cx="1691640" cy="320040"/>
-          </a:xfrm>
-          <a:prstGeom prst="rect">
-            <a:avLst/>
-          </a:prstGeom>
-          <a:noFill/>
-          <a:ln/>
-        </p:spPr>
-        <p:txBody>
-          <a:bodyPr wrap="square" rtlCol="0" anchor="ctr"/>
-          <a:lstStyle/>
-          <a:p>
-            <a:pPr algn="r" indent="0" marL="0">
-              <a:buNone/>
-            </a:pPr>
-            <a:r>
-              <a:rPr lang="en-US" sz="950" dirty="0">
-                <a:solidFill>
-                  <a:srgbClr val="7A7264"/>
-                </a:solidFill>
-                <a:latin typeface="Calibri" pitchFamily="34" charset="0"/>
-                <a:ea typeface="Calibri" pitchFamily="34" charset="-122"/>
-                <a:cs typeface="Calibri" pitchFamily="34" charset="-120"/>
-              </a:rPr>
-              <a:t>ProMarcom</a:t>
-            </a:r>
-            <a:endParaRPr lang="en-US" sz="950" dirty="0"/>
-          </a:p>
-        </p:txBody>
-      </p:sp>
-      <p:sp>
-        <p:nvSpPr>
-          <p:cNvPr id="15" name="Shape 12"/>
+          <p:cNvPr id="24" name="Shape 21"/>
           <p:cNvSpPr/>
           <p:nvPr/>
         </p:nvSpPr>
@@ -10006,7 +9554,7 @@
       </p:sp>
       <p:sp>
         <p:nvSpPr>
-          <p:cNvPr id="16" name="Text 13"/>
+          <p:cNvPr id="25" name="Text 22"/>
           <p:cNvSpPr/>
           <p:nvPr/>
         </p:nvSpPr>
@@ -10031,7 +9579,7 @@
             <a:r>
               <a:rPr lang="en-US" sz="1100" b="1" dirty="0">
                 <a:solidFill>
-                  <a:srgbClr val="1E4D39"/>
+                  <a:srgbClr val="2B2621"/>
                 </a:solidFill>
                 <a:latin typeface="Cambria" pitchFamily="34" charset="0"/>
                 <a:ea typeface="Cambria" pitchFamily="34" charset="-122"/>
@@ -10083,8 +9631,8 @@
         </p:nvSpPr>
         <p:spPr>
           <a:xfrm>
-            <a:off x="548640" y="457200"/>
-            <a:ext cx="5486400" cy="274320"/>
+            <a:off x="548640" y="548640"/>
+            <a:ext cx="6400800" cy="274320"/>
           </a:xfrm>
           <a:prstGeom prst="rect">
             <a:avLst/>
@@ -10108,7 +9656,7 @@
                 <a:ea typeface="Calibri" pitchFamily="34" charset="-122"/>
                 <a:cs typeface="Calibri" pitchFamily="34" charset="-120"/>
               </a:rPr>
-              <a:t>TOP LAYOUT · PLAN</a:t>
+              <a:t>MATERIALS &amp; FINISHES</a:t>
             </a:r>
             <a:endParaRPr lang="en-US" sz="1250" dirty="0"/>
           </a:p>
@@ -10122,80 +9670,57 @@
         </p:nvSpPr>
         <p:spPr>
           <a:xfrm>
-            <a:off x="502920" y="777240"/>
-            <a:ext cx="8229600" cy="548640"/>
-          </a:xfrm>
-          <a:prstGeom prst="rect">
-            <a:avLst/>
-          </a:prstGeom>
-          <a:noFill/>
-          <a:ln/>
-        </p:spPr>
-        <p:txBody>
-          <a:bodyPr wrap="square" rtlCol="0" anchor="ctr"/>
-          <a:lstStyle/>
-          <a:p>
-            <a:pPr indent="0" marL="0">
-              <a:buNone/>
-            </a:pPr>
-            <a:r>
-              <a:rPr lang="en-US" sz="2800" b="1" dirty="0">
-                <a:solidFill>
-                  <a:srgbClr val="1E4D39"/>
+            <a:off x="502920" y="868680"/>
+            <a:ext cx="10058400" cy="640080"/>
+          </a:xfrm>
+          <a:prstGeom prst="rect">
+            <a:avLst/>
+          </a:prstGeom>
+          <a:noFill/>
+          <a:ln/>
+        </p:spPr>
+        <p:txBody>
+          <a:bodyPr wrap="square" rtlCol="0" anchor="ctr"/>
+          <a:lstStyle/>
+          <a:p>
+            <a:pPr indent="0" marL="0">
+              <a:buNone/>
+            </a:pPr>
+            <a:r>
+              <a:rPr lang="en-US" sz="3000" b="1" dirty="0">
+                <a:solidFill>
+                  <a:srgbClr val="2B2621"/>
                 </a:solidFill>
                 <a:latin typeface="Cambria" pitchFamily="34" charset="0"/>
                 <a:ea typeface="Cambria" pitchFamily="34" charset="-122"/>
                 <a:cs typeface="Cambria" pitchFamily="34" charset="-120"/>
               </a:rPr>
-              <a:t>8 ft × 8 ft island footprint</a:t>
-            </a:r>
-            <a:endParaRPr lang="en-US" sz="2800" dirty="0"/>
-          </a:p>
-        </p:txBody>
-      </p:sp>
-      <p:pic>
-        <p:nvPicPr>
-          <p:cNvPr id="4" name="Image 0" descr="view_kiosk_plan.png">    </p:cNvPr>
-          <p:cNvPicPr>
-            <a:picLocks noChangeAspect="1"/>
-          </p:cNvPicPr>
-          <p:nvPr/>
-        </p:nvPicPr>
-        <p:blipFill>
-          <a:blip r:embed="rId1"/>
-          <a:srcRect l="0" r="0" t="0" b="0"/>
-          <a:stretch/>
-        </p:blipFill>
-        <p:spPr>
-          <a:xfrm>
-            <a:off x="457200" y="1371600"/>
-            <a:ext cx="7818120" cy="5120640"/>
-          </a:xfrm>
-          <a:prstGeom prst="rect">
-            <a:avLst/>
-          </a:prstGeom>
-        </p:spPr>
-      </p:pic>
-      <p:sp>
-        <p:nvSpPr>
-          <p:cNvPr id="5" name="Shape 2"/>
-          <p:cNvSpPr/>
-          <p:nvPr/>
-        </p:nvSpPr>
-        <p:spPr>
-          <a:xfrm>
-            <a:off x="8549640" y="1417320"/>
-            <a:ext cx="3154680" cy="4892040"/>
+              <a:t>A warm, premium material palette</a:t>
+            </a:r>
+            <a:endParaRPr lang="en-US" sz="3000" dirty="0"/>
+          </a:p>
+        </p:txBody>
+      </p:sp>
+      <p:sp>
+        <p:nvSpPr>
+          <p:cNvPr id="4" name="Shape 2"/>
+          <p:cNvSpPr/>
+          <p:nvPr/>
+        </p:nvSpPr>
+        <p:spPr>
+          <a:xfrm>
+            <a:off x="502920" y="1828800"/>
+            <a:ext cx="3429000" cy="1234440"/>
           </a:xfrm>
           <a:prstGeom prst="rect">
             <a:avLst/>
           </a:prstGeom>
           <a:solidFill>
-            <a:srgbClr val="FCF8EF"/>
+            <a:srgbClr val="F0ECE3"/>
           </a:solidFill>
-          <a:ln w="12700">
+          <a:ln w="9525">
             <a:solidFill>
-              <a:srgbClr val="E4DCC9"/>
+              <a:srgbClr val="E6DECB"/>
             </a:solidFill>
             <a:prstDash val="solid"/>
           </a:ln>
@@ -10203,536 +9728,600 @@
       </p:sp>
       <p:sp>
         <p:nvSpPr>
-          <p:cNvPr id="6" name="Text 3"/>
-          <p:cNvSpPr/>
-          <p:nvPr/>
-        </p:nvSpPr>
-        <p:spPr>
-          <a:xfrm>
-            <a:off x="8823960" y="1600200"/>
-            <a:ext cx="2743200" cy="320040"/>
-          </a:xfrm>
-          <a:prstGeom prst="rect">
-            <a:avLst/>
-          </a:prstGeom>
-          <a:noFill/>
-          <a:ln/>
-        </p:spPr>
-        <p:txBody>
-          <a:bodyPr wrap="square" rtlCol="0" anchor="ctr"/>
-          <a:lstStyle/>
-          <a:p>
-            <a:pPr indent="0" marL="0">
-              <a:buNone/>
-            </a:pPr>
-            <a:r>
-              <a:rPr lang="en-US" sz="1300" b="1" spc="200" kern="0" dirty="0">
-                <a:solidFill>
-                  <a:srgbClr val="A9813A"/>
+          <p:cNvPr id="5" name="Text 3"/>
+          <p:cNvSpPr/>
+          <p:nvPr/>
+        </p:nvSpPr>
+        <p:spPr>
+          <a:xfrm>
+            <a:off x="502920" y="3127248"/>
+            <a:ext cx="3429000" cy="320040"/>
+          </a:xfrm>
+          <a:prstGeom prst="rect">
+            <a:avLst/>
+          </a:prstGeom>
+          <a:noFill/>
+          <a:ln/>
+        </p:spPr>
+        <p:txBody>
+          <a:bodyPr wrap="square" rtlCol="0" anchor="ctr"/>
+          <a:lstStyle/>
+          <a:p>
+            <a:pPr indent="0" marL="0">
+              <a:buNone/>
+            </a:pPr>
+            <a:r>
+              <a:rPr lang="en-US" sz="1500" b="1" dirty="0">
+                <a:solidFill>
+                  <a:srgbClr val="2B2621"/>
+                </a:solidFill>
+                <a:latin typeface="Cambria" pitchFamily="34" charset="0"/>
+                <a:ea typeface="Cambria" pitchFamily="34" charset="-122"/>
+                <a:cs typeface="Cambria" pitchFamily="34" charset="-120"/>
+              </a:rPr>
+              <a:t>Warm white lacquer</a:t>
+            </a:r>
+            <a:endParaRPr lang="en-US" sz="1500" dirty="0"/>
+          </a:p>
+        </p:txBody>
+      </p:sp>
+      <p:sp>
+        <p:nvSpPr>
+          <p:cNvPr id="6" name="Text 4"/>
+          <p:cNvSpPr/>
+          <p:nvPr/>
+        </p:nvSpPr>
+        <p:spPr>
+          <a:xfrm>
+            <a:off x="502920" y="3429000"/>
+            <a:ext cx="3429000" cy="274320"/>
+          </a:xfrm>
+          <a:prstGeom prst="rect">
+            <a:avLst/>
+          </a:prstGeom>
+          <a:noFill/>
+          <a:ln/>
+        </p:spPr>
+        <p:txBody>
+          <a:bodyPr wrap="square" rtlCol="0" anchor="ctr"/>
+          <a:lstStyle/>
+          <a:p>
+            <a:pPr indent="0" marL="0">
+              <a:buNone/>
+            </a:pPr>
+            <a:r>
+              <a:rPr lang="en-US" sz="1150" dirty="0">
+                <a:solidFill>
+                  <a:srgbClr val="857B6C"/>
                 </a:solidFill>
                 <a:latin typeface="Calibri" pitchFamily="34" charset="0"/>
                 <a:ea typeface="Calibri" pitchFamily="34" charset="-122"/>
                 <a:cs typeface="Calibri" pitchFamily="34" charset="-120"/>
               </a:rPr>
-              <a:t>KEY ZONES</a:t>
-            </a:r>
-            <a:endParaRPr lang="en-US" sz="1300" dirty="0"/>
-          </a:p>
-        </p:txBody>
-      </p:sp>
-      <p:sp>
-        <p:nvSpPr>
-          <p:cNvPr id="7" name="Shape 4"/>
-          <p:cNvSpPr/>
-          <p:nvPr/>
-        </p:nvSpPr>
-        <p:spPr>
-          <a:xfrm>
-            <a:off x="8833104" y="2185416"/>
-            <a:ext cx="128016" cy="128016"/>
-          </a:xfrm>
-          <a:prstGeom prst="ellipse">
+              <a:t>Body &amp; display walls</a:t>
+            </a:r>
+            <a:endParaRPr lang="en-US" sz="1150" dirty="0"/>
+          </a:p>
+        </p:txBody>
+      </p:sp>
+      <p:sp>
+        <p:nvSpPr>
+          <p:cNvPr id="7" name="Shape 5"/>
+          <p:cNvSpPr/>
+          <p:nvPr/>
+        </p:nvSpPr>
+        <p:spPr>
+          <a:xfrm>
+            <a:off x="4389120" y="1828800"/>
+            <a:ext cx="3429000" cy="1234440"/>
+          </a:xfrm>
+          <a:prstGeom prst="rect">
             <a:avLst/>
           </a:prstGeom>
           <a:solidFill>
             <a:srgbClr val="C6A24E"/>
           </a:solidFill>
-          <a:ln/>
-        </p:spPr>
-      </p:sp>
-      <p:sp>
-        <p:nvSpPr>
-          <p:cNvPr id="8" name="Text 5"/>
-          <p:cNvSpPr/>
-          <p:nvPr/>
-        </p:nvSpPr>
-        <p:spPr>
-          <a:xfrm>
-            <a:off x="9098280" y="2039112"/>
-            <a:ext cx="2468880" cy="292608"/>
-          </a:xfrm>
-          <a:prstGeom prst="rect">
-            <a:avLst/>
-          </a:prstGeom>
-          <a:noFill/>
-          <a:ln/>
-        </p:spPr>
-        <p:txBody>
-          <a:bodyPr wrap="square" rtlCol="0" anchor="ctr"/>
-          <a:lstStyle/>
-          <a:p>
-            <a:pPr indent="0" marL="0">
-              <a:buNone/>
-            </a:pPr>
-            <a:r>
-              <a:rPr lang="en-US" sz="1350" b="1" dirty="0">
-                <a:solidFill>
-                  <a:srgbClr val="1E4D39"/>
+          <a:ln w="9525">
+            <a:solidFill>
+              <a:srgbClr val="E6DECB"/>
+            </a:solidFill>
+            <a:prstDash val="solid"/>
+          </a:ln>
+        </p:spPr>
+      </p:sp>
+      <p:sp>
+        <p:nvSpPr>
+          <p:cNvPr id="8" name="Text 6"/>
+          <p:cNvSpPr/>
+          <p:nvPr/>
+        </p:nvSpPr>
+        <p:spPr>
+          <a:xfrm>
+            <a:off x="4389120" y="3127248"/>
+            <a:ext cx="3429000" cy="320040"/>
+          </a:xfrm>
+          <a:prstGeom prst="rect">
+            <a:avLst/>
+          </a:prstGeom>
+          <a:noFill/>
+          <a:ln/>
+        </p:spPr>
+        <p:txBody>
+          <a:bodyPr wrap="square" rtlCol="0" anchor="ctr"/>
+          <a:lstStyle/>
+          <a:p>
+            <a:pPr indent="0" marL="0">
+              <a:buNone/>
+            </a:pPr>
+            <a:r>
+              <a:rPr lang="en-US" sz="1500" b="1" dirty="0">
+                <a:solidFill>
+                  <a:srgbClr val="2B2621"/>
                 </a:solidFill>
                 <a:latin typeface="Cambria" pitchFamily="34" charset="0"/>
                 <a:ea typeface="Cambria" pitchFamily="34" charset="-122"/>
                 <a:cs typeface="Cambria" pitchFamily="34" charset="-120"/>
               </a:rPr>
-              <a:t>U-shaped display counter</a:t>
-            </a:r>
-            <a:endParaRPr lang="en-US" sz="1350" dirty="0"/>
-          </a:p>
-        </p:txBody>
-      </p:sp>
-      <p:sp>
-        <p:nvSpPr>
-          <p:cNvPr id="9" name="Text 6"/>
-          <p:cNvSpPr/>
-          <p:nvPr/>
-        </p:nvSpPr>
-        <p:spPr>
-          <a:xfrm>
-            <a:off x="9098280" y="2331720"/>
-            <a:ext cx="2468880" cy="365760"/>
-          </a:xfrm>
-          <a:prstGeom prst="rect">
-            <a:avLst/>
-          </a:prstGeom>
-          <a:noFill/>
-          <a:ln/>
-        </p:spPr>
-        <p:txBody>
-          <a:bodyPr wrap="square" rtlCol="0" anchor="ctr"/>
-          <a:lstStyle/>
-          <a:p>
-            <a:pPr indent="0" marL="0">
-              <a:buNone/>
-            </a:pPr>
-            <a:r>
-              <a:rPr lang="en-US" sz="1100" dirty="0">
-                <a:solidFill>
-                  <a:srgbClr val="7A7264"/>
+              <a:t>Brushed brass</a:t>
+            </a:r>
+            <a:endParaRPr lang="en-US" sz="1500" dirty="0"/>
+          </a:p>
+        </p:txBody>
+      </p:sp>
+      <p:sp>
+        <p:nvSpPr>
+          <p:cNvPr id="9" name="Text 7"/>
+          <p:cNvSpPr/>
+          <p:nvPr/>
+        </p:nvSpPr>
+        <p:spPr>
+          <a:xfrm>
+            <a:off x="4389120" y="3429000"/>
+            <a:ext cx="3429000" cy="274320"/>
+          </a:xfrm>
+          <a:prstGeom prst="rect">
+            <a:avLst/>
+          </a:prstGeom>
+          <a:noFill/>
+          <a:ln/>
+        </p:spPr>
+        <p:txBody>
+          <a:bodyPr wrap="square" rtlCol="0" anchor="ctr"/>
+          <a:lstStyle/>
+          <a:p>
+            <a:pPr indent="0" marL="0">
+              <a:buNone/>
+            </a:pPr>
+            <a:r>
+              <a:rPr lang="en-US" sz="1150" dirty="0">
+                <a:solidFill>
+                  <a:srgbClr val="857B6C"/>
                 </a:solidFill>
                 <a:latin typeface="Calibri" pitchFamily="34" charset="0"/>
                 <a:ea typeface="Calibri" pitchFamily="34" charset="-122"/>
                 <a:cs typeface="Calibri" pitchFamily="34" charset="-120"/>
               </a:rPr>
-              <a:t>Wraps three customer faces</a:t>
-            </a:r>
-            <a:endParaRPr lang="en-US" sz="1100" dirty="0"/>
-          </a:p>
-        </p:txBody>
-      </p:sp>
-      <p:sp>
-        <p:nvSpPr>
-          <p:cNvPr id="10" name="Shape 7"/>
-          <p:cNvSpPr/>
-          <p:nvPr/>
-        </p:nvSpPr>
-        <p:spPr>
-          <a:xfrm>
-            <a:off x="8833104" y="2971800"/>
-            <a:ext cx="128016" cy="128016"/>
-          </a:xfrm>
-          <a:prstGeom prst="ellipse">
+              <a:t>Shelving, trims &amp; legs</a:t>
+            </a:r>
+            <a:endParaRPr lang="en-US" sz="1150" dirty="0"/>
+          </a:p>
+        </p:txBody>
+      </p:sp>
+      <p:sp>
+        <p:nvSpPr>
+          <p:cNvPr id="10" name="Shape 8"/>
+          <p:cNvSpPr/>
+          <p:nvPr/>
+        </p:nvSpPr>
+        <p:spPr>
+          <a:xfrm>
+            <a:off x="8275320" y="1828800"/>
+            <a:ext cx="3429000" cy="1234440"/>
+          </a:xfrm>
+          <a:prstGeom prst="rect">
             <a:avLst/>
           </a:prstGeom>
           <a:solidFill>
-            <a:srgbClr val="C6A24E"/>
+            <a:srgbClr val="20201E"/>
           </a:solidFill>
-          <a:ln/>
-        </p:spPr>
-      </p:sp>
-      <p:sp>
-        <p:nvSpPr>
-          <p:cNvPr id="11" name="Text 8"/>
-          <p:cNvSpPr/>
-          <p:nvPr/>
-        </p:nvSpPr>
-        <p:spPr>
-          <a:xfrm>
-            <a:off x="9098280" y="2825496"/>
-            <a:ext cx="2468880" cy="292608"/>
-          </a:xfrm>
-          <a:prstGeom prst="rect">
-            <a:avLst/>
-          </a:prstGeom>
-          <a:noFill/>
-          <a:ln/>
-        </p:spPr>
-        <p:txBody>
-          <a:bodyPr wrap="square" rtlCol="0" anchor="ctr"/>
-          <a:lstStyle/>
-          <a:p>
-            <a:pPr indent="0" marL="0">
-              <a:buNone/>
-            </a:pPr>
-            <a:r>
-              <a:rPr lang="en-US" sz="1350" b="1" dirty="0">
-                <a:solidFill>
-                  <a:srgbClr val="1E4D39"/>
+          <a:ln w="9525">
+            <a:solidFill>
+              <a:srgbClr val="E6DECB"/>
+            </a:solidFill>
+            <a:prstDash val="solid"/>
+          </a:ln>
+        </p:spPr>
+      </p:sp>
+      <p:sp>
+        <p:nvSpPr>
+          <p:cNvPr id="11" name="Text 9"/>
+          <p:cNvSpPr/>
+          <p:nvPr/>
+        </p:nvSpPr>
+        <p:spPr>
+          <a:xfrm>
+            <a:off x="8275320" y="3127248"/>
+            <a:ext cx="3429000" cy="320040"/>
+          </a:xfrm>
+          <a:prstGeom prst="rect">
+            <a:avLst/>
+          </a:prstGeom>
+          <a:noFill/>
+          <a:ln/>
+        </p:spPr>
+        <p:txBody>
+          <a:bodyPr wrap="square" rtlCol="0" anchor="ctr"/>
+          <a:lstStyle/>
+          <a:p>
+            <a:pPr indent="0" marL="0">
+              <a:buNone/>
+            </a:pPr>
+            <a:r>
+              <a:rPr lang="en-US" sz="1500" b="1" dirty="0">
+                <a:solidFill>
+                  <a:srgbClr val="2B2621"/>
                 </a:solidFill>
                 <a:latin typeface="Cambria" pitchFamily="34" charset="0"/>
                 <a:ea typeface="Cambria" pitchFamily="34" charset="-122"/>
                 <a:cs typeface="Cambria" pitchFamily="34" charset="-120"/>
               </a:rPr>
-              <a:t>Central totem</a:t>
-            </a:r>
-            <a:endParaRPr lang="en-US" sz="1350" dirty="0"/>
-          </a:p>
-        </p:txBody>
-      </p:sp>
-      <p:sp>
-        <p:nvSpPr>
-          <p:cNvPr id="12" name="Text 9"/>
-          <p:cNvSpPr/>
-          <p:nvPr/>
-        </p:nvSpPr>
-        <p:spPr>
-          <a:xfrm>
-            <a:off x="9098280" y="3118104"/>
-            <a:ext cx="2468880" cy="365760"/>
-          </a:xfrm>
-          <a:prstGeom prst="rect">
-            <a:avLst/>
-          </a:prstGeom>
-          <a:noFill/>
-          <a:ln/>
-        </p:spPr>
-        <p:txBody>
-          <a:bodyPr wrap="square" rtlCol="0" anchor="ctr"/>
-          <a:lstStyle/>
-          <a:p>
-            <a:pPr indent="0" marL="0">
-              <a:buNone/>
-            </a:pPr>
-            <a:r>
-              <a:rPr lang="en-US" sz="1100" dirty="0">
-                <a:solidFill>
-                  <a:srgbClr val="7A7264"/>
+              <a:t>Black-stone top</a:t>
+            </a:r>
+            <a:endParaRPr lang="en-US" sz="1500" dirty="0"/>
+          </a:p>
+        </p:txBody>
+      </p:sp>
+      <p:sp>
+        <p:nvSpPr>
+          <p:cNvPr id="12" name="Text 10"/>
+          <p:cNvSpPr/>
+          <p:nvPr/>
+        </p:nvSpPr>
+        <p:spPr>
+          <a:xfrm>
+            <a:off x="8275320" y="3429000"/>
+            <a:ext cx="3429000" cy="274320"/>
+          </a:xfrm>
+          <a:prstGeom prst="rect">
+            <a:avLst/>
+          </a:prstGeom>
+          <a:noFill/>
+          <a:ln/>
+        </p:spPr>
+        <p:txBody>
+          <a:bodyPr wrap="square" rtlCol="0" anchor="ctr"/>
+          <a:lstStyle/>
+          <a:p>
+            <a:pPr indent="0" marL="0">
+              <a:buNone/>
+            </a:pPr>
+            <a:r>
+              <a:rPr lang="en-US" sz="1150" dirty="0">
+                <a:solidFill>
+                  <a:srgbClr val="857B6C"/>
                 </a:solidFill>
                 <a:latin typeface="Calibri" pitchFamily="34" charset="0"/>
                 <a:ea typeface="Calibri" pitchFamily="34" charset="-122"/>
                 <a:cs typeface="Calibri" pitchFamily="34" charset="-120"/>
               </a:rPr>
-              <a:t>Backlit DOFT seal beacon</a:t>
-            </a:r>
-            <a:endParaRPr lang="en-US" sz="1100" dirty="0"/>
-          </a:p>
-        </p:txBody>
-      </p:sp>
-      <p:sp>
-        <p:nvSpPr>
-          <p:cNvPr id="13" name="Shape 10"/>
-          <p:cNvSpPr/>
-          <p:nvPr/>
-        </p:nvSpPr>
-        <p:spPr>
-          <a:xfrm>
-            <a:off x="8833104" y="3758184"/>
-            <a:ext cx="128016" cy="128016"/>
-          </a:xfrm>
-          <a:prstGeom prst="ellipse">
+              <a:t>Counter surfaces</a:t>
+            </a:r>
+            <a:endParaRPr lang="en-US" sz="1150" dirty="0"/>
+          </a:p>
+        </p:txBody>
+      </p:sp>
+      <p:sp>
+        <p:nvSpPr>
+          <p:cNvPr id="13" name="Shape 11"/>
+          <p:cNvSpPr/>
+          <p:nvPr/>
+        </p:nvSpPr>
+        <p:spPr>
+          <a:xfrm>
+            <a:off x="502920" y="4251960"/>
+            <a:ext cx="3429000" cy="1234440"/>
+          </a:xfrm>
+          <a:prstGeom prst="rect">
             <a:avLst/>
           </a:prstGeom>
           <a:solidFill>
-            <a:srgbClr val="C6A24E"/>
+            <a:srgbClr val="F2E4C4"/>
           </a:solidFill>
-          <a:ln/>
-        </p:spPr>
-      </p:sp>
-      <p:sp>
-        <p:nvSpPr>
-          <p:cNvPr id="14" name="Text 11"/>
-          <p:cNvSpPr/>
-          <p:nvPr/>
-        </p:nvSpPr>
-        <p:spPr>
-          <a:xfrm>
-            <a:off x="9098280" y="3611880"/>
-            <a:ext cx="2468880" cy="292608"/>
-          </a:xfrm>
-          <a:prstGeom prst="rect">
-            <a:avLst/>
-          </a:prstGeom>
-          <a:noFill/>
-          <a:ln/>
-        </p:spPr>
-        <p:txBody>
-          <a:bodyPr wrap="square" rtlCol="0" anchor="ctr"/>
-          <a:lstStyle/>
-          <a:p>
-            <a:pPr indent="0" marL="0">
-              <a:buNone/>
-            </a:pPr>
-            <a:r>
-              <a:rPr lang="en-US" sz="1350" b="1" dirty="0">
-                <a:solidFill>
-                  <a:srgbClr val="1E4D39"/>
+          <a:ln w="9525">
+            <a:solidFill>
+              <a:srgbClr val="E6DECB"/>
+            </a:solidFill>
+            <a:prstDash val="solid"/>
+          </a:ln>
+        </p:spPr>
+      </p:sp>
+      <p:sp>
+        <p:nvSpPr>
+          <p:cNvPr id="14" name="Text 12"/>
+          <p:cNvSpPr/>
+          <p:nvPr/>
+        </p:nvSpPr>
+        <p:spPr>
+          <a:xfrm>
+            <a:off x="502920" y="5550408"/>
+            <a:ext cx="3429000" cy="320040"/>
+          </a:xfrm>
+          <a:prstGeom prst="rect">
+            <a:avLst/>
+          </a:prstGeom>
+          <a:noFill/>
+          <a:ln/>
+        </p:spPr>
+        <p:txBody>
+          <a:bodyPr wrap="square" rtlCol="0" anchor="ctr"/>
+          <a:lstStyle/>
+          <a:p>
+            <a:pPr indent="0" marL="0">
+              <a:buNone/>
+            </a:pPr>
+            <a:r>
+              <a:rPr lang="en-US" sz="1500" b="1" dirty="0">
+                <a:solidFill>
+                  <a:srgbClr val="2B2621"/>
                 </a:solidFill>
                 <a:latin typeface="Cambria" pitchFamily="34" charset="0"/>
                 <a:ea typeface="Cambria" pitchFamily="34" charset="-122"/>
                 <a:cs typeface="Cambria" pitchFamily="34" charset="-120"/>
               </a:rPr>
-              <a:t>Lockable storage</a:t>
-            </a:r>
-            <a:endParaRPr lang="en-US" sz="1350" dirty="0"/>
-          </a:p>
-        </p:txBody>
-      </p:sp>
-      <p:sp>
-        <p:nvSpPr>
-          <p:cNvPr id="15" name="Text 12"/>
-          <p:cNvSpPr/>
-          <p:nvPr/>
-        </p:nvSpPr>
-        <p:spPr>
-          <a:xfrm>
-            <a:off x="9098280" y="3904488"/>
-            <a:ext cx="2468880" cy="365760"/>
-          </a:xfrm>
-          <a:prstGeom prst="rect">
-            <a:avLst/>
-          </a:prstGeom>
-          <a:noFill/>
-          <a:ln/>
-        </p:spPr>
-        <p:txBody>
-          <a:bodyPr wrap="square" rtlCol="0" anchor="ctr"/>
-          <a:lstStyle/>
-          <a:p>
-            <a:pPr indent="0" marL="0">
-              <a:buNone/>
-            </a:pPr>
-            <a:r>
-              <a:rPr lang="en-US" sz="1100" dirty="0">
-                <a:solidFill>
-                  <a:srgbClr val="7A7264"/>
+              <a:t>Backlit brand seal</a:t>
+            </a:r>
+            <a:endParaRPr lang="en-US" sz="1500" dirty="0"/>
+          </a:p>
+        </p:txBody>
+      </p:sp>
+      <p:sp>
+        <p:nvSpPr>
+          <p:cNvPr id="15" name="Text 13"/>
+          <p:cNvSpPr/>
+          <p:nvPr/>
+        </p:nvSpPr>
+        <p:spPr>
+          <a:xfrm>
+            <a:off x="502920" y="5852160"/>
+            <a:ext cx="3429000" cy="274320"/>
+          </a:xfrm>
+          <a:prstGeom prst="rect">
+            <a:avLst/>
+          </a:prstGeom>
+          <a:noFill/>
+          <a:ln/>
+        </p:spPr>
+        <p:txBody>
+          <a:bodyPr wrap="square" rtlCol="0" anchor="ctr"/>
+          <a:lstStyle/>
+          <a:p>
+            <a:pPr indent="0" marL="0">
+              <a:buNone/>
+            </a:pPr>
+            <a:r>
+              <a:rPr lang="en-US" sz="1150" dirty="0">
+                <a:solidFill>
+                  <a:srgbClr val="857B6C"/>
                 </a:solidFill>
                 <a:latin typeface="Calibri" pitchFamily="34" charset="0"/>
                 <a:ea typeface="Calibri" pitchFamily="34" charset="-122"/>
                 <a:cs typeface="Calibri" pitchFamily="34" charset="-120"/>
               </a:rPr>
-              <a:t>Both side runs + cash safe</a:t>
-            </a:r>
-            <a:endParaRPr lang="en-US" sz="1100" dirty="0"/>
-          </a:p>
-        </p:txBody>
-      </p:sp>
-      <p:sp>
-        <p:nvSpPr>
-          <p:cNvPr id="16" name="Shape 13"/>
-          <p:cNvSpPr/>
-          <p:nvPr/>
-        </p:nvSpPr>
-        <p:spPr>
-          <a:xfrm>
-            <a:off x="8833104" y="4544568"/>
-            <a:ext cx="128016" cy="128016"/>
-          </a:xfrm>
-          <a:prstGeom prst="ellipse">
+              <a:t>Illuminated acrylic panels</a:t>
+            </a:r>
+            <a:endParaRPr lang="en-US" sz="1150" dirty="0"/>
+          </a:p>
+        </p:txBody>
+      </p:sp>
+      <p:sp>
+        <p:nvSpPr>
+          <p:cNvPr id="16" name="Shape 14"/>
+          <p:cNvSpPr/>
+          <p:nvPr/>
+        </p:nvSpPr>
+        <p:spPr>
+          <a:xfrm>
+            <a:off x="4389120" y="4251960"/>
+            <a:ext cx="3429000" cy="1234440"/>
+          </a:xfrm>
+          <a:prstGeom prst="rect">
             <a:avLst/>
           </a:prstGeom>
           <a:solidFill>
-            <a:srgbClr val="C6A24E"/>
+            <a:srgbClr val="F3D9A6"/>
           </a:solidFill>
-          <a:ln/>
-        </p:spPr>
-      </p:sp>
-      <p:sp>
-        <p:nvSpPr>
-          <p:cNvPr id="17" name="Text 14"/>
-          <p:cNvSpPr/>
-          <p:nvPr/>
-        </p:nvSpPr>
-        <p:spPr>
-          <a:xfrm>
-            <a:off x="9098280" y="4398264"/>
-            <a:ext cx="2468880" cy="292608"/>
-          </a:xfrm>
-          <a:prstGeom prst="rect">
-            <a:avLst/>
-          </a:prstGeom>
-          <a:noFill/>
-          <a:ln/>
-        </p:spPr>
-        <p:txBody>
-          <a:bodyPr wrap="square" rtlCol="0" anchor="ctr"/>
-          <a:lstStyle/>
-          <a:p>
-            <a:pPr indent="0" marL="0">
-              <a:buNone/>
-            </a:pPr>
-            <a:r>
-              <a:rPr lang="en-US" sz="1350" b="1" dirty="0">
-                <a:solidFill>
-                  <a:srgbClr val="1E4D39"/>
+          <a:ln w="9525">
+            <a:solidFill>
+              <a:srgbClr val="E6DECB"/>
+            </a:solidFill>
+            <a:prstDash val="solid"/>
+          </a:ln>
+        </p:spPr>
+      </p:sp>
+      <p:sp>
+        <p:nvSpPr>
+          <p:cNvPr id="17" name="Text 15"/>
+          <p:cNvSpPr/>
+          <p:nvPr/>
+        </p:nvSpPr>
+        <p:spPr>
+          <a:xfrm>
+            <a:off x="4389120" y="5550408"/>
+            <a:ext cx="3429000" cy="320040"/>
+          </a:xfrm>
+          <a:prstGeom prst="rect">
+            <a:avLst/>
+          </a:prstGeom>
+          <a:noFill/>
+          <a:ln/>
+        </p:spPr>
+        <p:txBody>
+          <a:bodyPr wrap="square" rtlCol="0" anchor="ctr"/>
+          <a:lstStyle/>
+          <a:p>
+            <a:pPr indent="0" marL="0">
+              <a:buNone/>
+            </a:pPr>
+            <a:r>
+              <a:rPr lang="en-US" sz="1500" b="1" dirty="0">
+                <a:solidFill>
+                  <a:srgbClr val="2B2621"/>
                 </a:solidFill>
                 <a:latin typeface="Cambria" pitchFamily="34" charset="0"/>
                 <a:ea typeface="Cambria" pitchFamily="34" charset="-122"/>
                 <a:cs typeface="Cambria" pitchFamily="34" charset="-120"/>
               </a:rPr>
-              <a:t>Staff entry</a:t>
-            </a:r>
-            <a:endParaRPr lang="en-US" sz="1350" dirty="0"/>
-          </a:p>
-        </p:txBody>
-      </p:sp>
-      <p:sp>
-        <p:nvSpPr>
-          <p:cNvPr id="18" name="Text 15"/>
-          <p:cNvSpPr/>
-          <p:nvPr/>
-        </p:nvSpPr>
-        <p:spPr>
-          <a:xfrm>
-            <a:off x="9098280" y="4690872"/>
-            <a:ext cx="2468880" cy="365760"/>
-          </a:xfrm>
-          <a:prstGeom prst="rect">
-            <a:avLst/>
-          </a:prstGeom>
-          <a:noFill/>
-          <a:ln/>
-        </p:spPr>
-        <p:txBody>
-          <a:bodyPr wrap="square" rtlCol="0" anchor="ctr"/>
-          <a:lstStyle/>
-          <a:p>
-            <a:pPr indent="0" marL="0">
-              <a:buNone/>
-            </a:pPr>
-            <a:r>
-              <a:rPr lang="en-US" sz="1100" dirty="0">
-                <a:solidFill>
-                  <a:srgbClr val="7A7264"/>
+              <a:t>Warm LED glow</a:t>
+            </a:r>
+            <a:endParaRPr lang="en-US" sz="1500" dirty="0"/>
+          </a:p>
+        </p:txBody>
+      </p:sp>
+      <p:sp>
+        <p:nvSpPr>
+          <p:cNvPr id="18" name="Text 16"/>
+          <p:cNvSpPr/>
+          <p:nvPr/>
+        </p:nvSpPr>
+        <p:spPr>
+          <a:xfrm>
+            <a:off x="4389120" y="5852160"/>
+            <a:ext cx="3429000" cy="274320"/>
+          </a:xfrm>
+          <a:prstGeom prst="rect">
+            <a:avLst/>
+          </a:prstGeom>
+          <a:noFill/>
+          <a:ln/>
+        </p:spPr>
+        <p:txBody>
+          <a:bodyPr wrap="square" rtlCol="0" anchor="ctr"/>
+          <a:lstStyle/>
+          <a:p>
+            <a:pPr indent="0" marL="0">
+              <a:buNone/>
+            </a:pPr>
+            <a:r>
+              <a:rPr lang="en-US" sz="1150" dirty="0">
+                <a:solidFill>
+                  <a:srgbClr val="857B6C"/>
                 </a:solidFill>
                 <a:latin typeface="Calibri" pitchFamily="34" charset="0"/>
                 <a:ea typeface="Calibri" pitchFamily="34" charset="-122"/>
                 <a:cs typeface="Calibri" pitchFamily="34" charset="-120"/>
               </a:rPr>
-              <a:t>Clear opening to the rear</a:t>
-            </a:r>
-            <a:endParaRPr lang="en-US" sz="1100" dirty="0"/>
-          </a:p>
-        </p:txBody>
-      </p:sp>
-      <p:sp>
-        <p:nvSpPr>
-          <p:cNvPr id="19" name="Shape 16"/>
-          <p:cNvSpPr/>
-          <p:nvPr/>
-        </p:nvSpPr>
-        <p:spPr>
-          <a:xfrm>
-            <a:off x="8833104" y="5330952"/>
-            <a:ext cx="128016" cy="128016"/>
-          </a:xfrm>
-          <a:prstGeom prst="ellipse">
+              <a:t>Perimeter &amp; downlights</a:t>
+            </a:r>
+            <a:endParaRPr lang="en-US" sz="1150" dirty="0"/>
+          </a:p>
+        </p:txBody>
+      </p:sp>
+      <p:sp>
+        <p:nvSpPr>
+          <p:cNvPr id="19" name="Shape 17"/>
+          <p:cNvSpPr/>
+          <p:nvPr/>
+        </p:nvSpPr>
+        <p:spPr>
+          <a:xfrm>
+            <a:off x="8275320" y="4251960"/>
+            <a:ext cx="3429000" cy="1234440"/>
+          </a:xfrm>
+          <a:prstGeom prst="rect">
             <a:avLst/>
           </a:prstGeom>
           <a:solidFill>
-            <a:srgbClr val="C6A24E"/>
+            <a:srgbClr val="2B2621"/>
           </a:solidFill>
-          <a:ln/>
-        </p:spPr>
-      </p:sp>
-      <p:sp>
-        <p:nvSpPr>
-          <p:cNvPr id="20" name="Text 17"/>
-          <p:cNvSpPr/>
-          <p:nvPr/>
-        </p:nvSpPr>
-        <p:spPr>
-          <a:xfrm>
-            <a:off x="9098280" y="5184648"/>
-            <a:ext cx="2468880" cy="292608"/>
-          </a:xfrm>
-          <a:prstGeom prst="rect">
-            <a:avLst/>
-          </a:prstGeom>
-          <a:noFill/>
-          <a:ln/>
-        </p:spPr>
-        <p:txBody>
-          <a:bodyPr wrap="square" rtlCol="0" anchor="ctr"/>
-          <a:lstStyle/>
-          <a:p>
-            <a:pPr indent="0" marL="0">
-              <a:buNone/>
-            </a:pPr>
-            <a:r>
-              <a:rPr lang="en-US" sz="1350" b="1" dirty="0">
-                <a:solidFill>
-                  <a:srgbClr val="1E4D39"/>
+          <a:ln w="9525">
+            <a:solidFill>
+              <a:srgbClr val="E6DECB"/>
+            </a:solidFill>
+            <a:prstDash val="solid"/>
+          </a:ln>
+        </p:spPr>
+      </p:sp>
+      <p:sp>
+        <p:nvSpPr>
+          <p:cNvPr id="20" name="Text 18"/>
+          <p:cNvSpPr/>
+          <p:nvPr/>
+        </p:nvSpPr>
+        <p:spPr>
+          <a:xfrm>
+            <a:off x="8275320" y="5550408"/>
+            <a:ext cx="3429000" cy="320040"/>
+          </a:xfrm>
+          <a:prstGeom prst="rect">
+            <a:avLst/>
+          </a:prstGeom>
+          <a:noFill/>
+          <a:ln/>
+        </p:spPr>
+        <p:txBody>
+          <a:bodyPr wrap="square" rtlCol="0" anchor="ctr"/>
+          <a:lstStyle/>
+          <a:p>
+            <a:pPr indent="0" marL="0">
+              <a:buNone/>
+            </a:pPr>
+            <a:r>
+              <a:rPr lang="en-US" sz="1500" b="1" dirty="0">
+                <a:solidFill>
+                  <a:srgbClr val="2B2621"/>
                 </a:solidFill>
                 <a:latin typeface="Cambria" pitchFamily="34" charset="0"/>
                 <a:ea typeface="Cambria" pitchFamily="34" charset="-122"/>
                 <a:cs typeface="Cambria" pitchFamily="34" charset="-120"/>
               </a:rPr>
-              <a:t>Seating</a:t>
-            </a:r>
-            <a:endParaRPr lang="en-US" sz="1350" dirty="0"/>
-          </a:p>
-        </p:txBody>
-      </p:sp>
-      <p:sp>
-        <p:nvSpPr>
-          <p:cNvPr id="21" name="Text 18"/>
-          <p:cNvSpPr/>
-          <p:nvPr/>
-        </p:nvSpPr>
-        <p:spPr>
-          <a:xfrm>
-            <a:off x="9098280" y="5477256"/>
-            <a:ext cx="2468880" cy="365760"/>
-          </a:xfrm>
-          <a:prstGeom prst="rect">
-            <a:avLst/>
-          </a:prstGeom>
-          <a:noFill/>
-          <a:ln/>
-        </p:spPr>
-        <p:txBody>
-          <a:bodyPr wrap="square" rtlCol="0" anchor="ctr"/>
-          <a:lstStyle/>
-          <a:p>
-            <a:pPr indent="0" marL="0">
-              <a:buNone/>
-            </a:pPr>
-            <a:r>
-              <a:rPr lang="en-US" sz="1100" dirty="0">
-                <a:solidFill>
-                  <a:srgbClr val="7A7264"/>
+              <a:t>Digital screen</a:t>
+            </a:r>
+            <a:endParaRPr lang="en-US" sz="1500" dirty="0"/>
+          </a:p>
+        </p:txBody>
+      </p:sp>
+      <p:sp>
+        <p:nvSpPr>
+          <p:cNvPr id="21" name="Text 19"/>
+          <p:cNvSpPr/>
+          <p:nvPr/>
+        </p:nvSpPr>
+        <p:spPr>
+          <a:xfrm>
+            <a:off x="8275320" y="5852160"/>
+            <a:ext cx="3429000" cy="274320"/>
+          </a:xfrm>
+          <a:prstGeom prst="rect">
+            <a:avLst/>
+          </a:prstGeom>
+          <a:noFill/>
+          <a:ln/>
+        </p:spPr>
+        <p:txBody>
+          <a:bodyPr wrap="square" rtlCol="0" anchor="ctr"/>
+          <a:lstStyle/>
+          <a:p>
+            <a:pPr indent="0" marL="0">
+              <a:buNone/>
+            </a:pPr>
+            <a:r>
+              <a:rPr lang="en-US" sz="1150" dirty="0">
+                <a:solidFill>
+                  <a:srgbClr val="857B6C"/>
                 </a:solidFill>
                 <a:latin typeface="Calibri" pitchFamily="34" charset="0"/>
                 <a:ea typeface="Calibri" pitchFamily="34" charset="-122"/>
                 <a:cs typeface="Calibri" pitchFamily="34" charset="-120"/>
               </a:rPr>
-              <a:t>Two bar stools inside</a:t>
-            </a:r>
-            <a:endParaRPr lang="en-US" sz="1100" dirty="0"/>
-          </a:p>
-        </p:txBody>
-      </p:sp>
-      <p:sp>
-        <p:nvSpPr>
-          <p:cNvPr id="22" name="Text 19"/>
+              <a:t>Brand film &amp; catalogue</a:t>
+            </a:r>
+            <a:endParaRPr lang="en-US" sz="1150" dirty="0"/>
+          </a:p>
+        </p:txBody>
+      </p:sp>
+      <p:sp>
+        <p:nvSpPr>
+          <p:cNvPr id="22" name="Text 20"/>
           <p:cNvSpPr/>
           <p:nvPr/>
         </p:nvSpPr>
@@ -10771,7 +10360,7 @@
             <a:r>
               <a:rPr lang="en-US" sz="950" spc="100" kern="0" dirty="0">
                 <a:solidFill>
-                  <a:srgbClr val="7A7264"/>
+                  <a:srgbClr val="857B6C"/>
                 </a:solidFill>
                 <a:latin typeface="Calibri" pitchFamily="34" charset="0"/>
                 <a:ea typeface="Calibri" pitchFamily="34" charset="-122"/>
@@ -10785,7 +10374,7 @@
       </p:sp>
       <p:sp>
         <p:nvSpPr>
-          <p:cNvPr id="23" name="Text 20"/>
+          <p:cNvPr id="23" name="Text 21"/>
           <p:cNvSpPr/>
           <p:nvPr/>
         </p:nvSpPr>
@@ -10810,7 +10399,7 @@
             <a:r>
               <a:rPr lang="en-US" sz="950" dirty="0">
                 <a:solidFill>
-                  <a:srgbClr val="7A7264"/>
+                  <a:srgbClr val="857B6C"/>
                 </a:solidFill>
                 <a:latin typeface="Calibri" pitchFamily="34" charset="0"/>
                 <a:ea typeface="Calibri" pitchFamily="34" charset="-122"/>
@@ -10824,7 +10413,7 @@
       </p:sp>
       <p:sp>
         <p:nvSpPr>
-          <p:cNvPr id="24" name="Shape 21"/>
+          <p:cNvPr id="24" name="Shape 22"/>
           <p:cNvSpPr/>
           <p:nvPr/>
         </p:nvSpPr>
@@ -10849,7 +10438,7 @@
       </p:sp>
       <p:sp>
         <p:nvSpPr>
-          <p:cNvPr id="25" name="Text 22"/>
+          <p:cNvPr id="25" name="Text 23"/>
           <p:cNvSpPr/>
           <p:nvPr/>
         </p:nvSpPr>
@@ -10874,7 +10463,7 @@
             <a:r>
               <a:rPr lang="en-US" sz="1100" b="1" dirty="0">
                 <a:solidFill>
-                  <a:srgbClr val="1E4D39"/>
+                  <a:srgbClr val="2B2621"/>
                 </a:solidFill>
                 <a:latin typeface="Cambria" pitchFamily="34" charset="0"/>
                 <a:ea typeface="Cambria" pitchFamily="34" charset="-122"/>
@@ -10900,7 +10489,7 @@
     <p:bg>
       <p:bgPr>
         <a:solidFill>
-          <a:srgbClr val="FFFFFF"/>
+          <a:srgbClr val="1E1B17"/>
         </a:solidFill>
       </p:bgPr>
     </p:bg>
@@ -10927,7 +10516,7 @@
         <p:spPr>
           <a:xfrm>
             <a:off x="548640" y="548640"/>
-            <a:ext cx="5486400" cy="274320"/>
+            <a:ext cx="6400800" cy="274320"/>
           </a:xfrm>
           <a:prstGeom prst="rect">
             <a:avLst/>
@@ -10945,13 +10534,13 @@
             <a:r>
               <a:rPr lang="en-US" sz="1250" b="1" spc="300" kern="0" dirty="0">
                 <a:solidFill>
-                  <a:srgbClr val="A9813A"/>
+                  <a:srgbClr val="C6A24E"/>
                 </a:solidFill>
                 <a:latin typeface="Calibri" pitchFamily="34" charset="0"/>
                 <a:ea typeface="Calibri" pitchFamily="34" charset="-122"/>
                 <a:cs typeface="Calibri" pitchFamily="34" charset="-120"/>
               </a:rPr>
-              <a:t>MATERIALS &amp; FINISHES</a:t>
+              <a:t>THE RANGE</a:t>
             </a:r>
             <a:endParaRPr lang="en-US" sz="1250" dirty="0"/>
           </a:p>
@@ -10984,13 +10573,13 @@
             <a:r>
               <a:rPr lang="en-US" sz="3000" b="1" dirty="0">
                 <a:solidFill>
-                  <a:srgbClr val="1E4D39"/>
+                  <a:srgbClr val="FFFFFF"/>
                 </a:solidFill>
                 <a:latin typeface="Cambria" pitchFamily="34" charset="0"/>
                 <a:ea typeface="Cambria" pitchFamily="34" charset="-122"/>
                 <a:cs typeface="Cambria" pitchFamily="34" charset="-120"/>
               </a:rPr>
-              <a:t>A premium, warm material palette</a:t>
+              <a:t>Merchandising the Doft story</a:t>
             </a:r>
             <a:endParaRPr lang="en-US" sz="3000" dirty="0"/>
           </a:p>
@@ -10998,730 +10587,59 @@
       </p:sp>
       <p:sp>
         <p:nvSpPr>
-          <p:cNvPr id="4" name="Shape 2"/>
-          <p:cNvSpPr/>
-          <p:nvPr/>
-        </p:nvSpPr>
-        <p:spPr>
-          <a:xfrm>
-            <a:off x="502920" y="1828800"/>
-            <a:ext cx="3429000" cy="1234440"/>
-          </a:xfrm>
-          <a:prstGeom prst="rect">
-            <a:avLst/>
-          </a:prstGeom>
-          <a:solidFill>
-            <a:srgbClr val="1E4D39"/>
-          </a:solidFill>
-          <a:ln w="9525">
-            <a:solidFill>
-              <a:srgbClr val="E4DCC9"/>
-            </a:solidFill>
-            <a:prstDash val="solid"/>
-          </a:ln>
-        </p:spPr>
-      </p:sp>
-      <p:sp>
-        <p:nvSpPr>
-          <p:cNvPr id="5" name="Text 3"/>
-          <p:cNvSpPr/>
-          <p:nvPr/>
-        </p:nvSpPr>
-        <p:spPr>
-          <a:xfrm>
-            <a:off x="502920" y="3127248"/>
-            <a:ext cx="3429000" cy="320040"/>
-          </a:xfrm>
-          <a:prstGeom prst="rect">
-            <a:avLst/>
-          </a:prstGeom>
-          <a:noFill/>
-          <a:ln/>
-        </p:spPr>
-        <p:txBody>
-          <a:bodyPr wrap="square" rtlCol="0" anchor="ctr"/>
-          <a:lstStyle/>
-          <a:p>
-            <a:pPr indent="0" marL="0">
-              <a:buNone/>
-            </a:pPr>
-            <a:r>
-              <a:rPr lang="en-US" sz="1500" b="1" dirty="0">
-                <a:solidFill>
-                  <a:srgbClr val="1E4D39"/>
-                </a:solidFill>
-                <a:latin typeface="Cambria" pitchFamily="34" charset="0"/>
-                <a:ea typeface="Cambria" pitchFamily="34" charset="-122"/>
-                <a:cs typeface="Cambria" pitchFamily="34" charset="-120"/>
-              </a:rPr>
-              <a:t>Emerald lacquer</a:t>
-            </a:r>
-            <a:endParaRPr lang="en-US" sz="1500" dirty="0"/>
-          </a:p>
-        </p:txBody>
-      </p:sp>
-      <p:sp>
-        <p:nvSpPr>
-          <p:cNvPr id="6" name="Text 4"/>
-          <p:cNvSpPr/>
-          <p:nvPr/>
-        </p:nvSpPr>
-        <p:spPr>
-          <a:xfrm>
-            <a:off x="502920" y="3429000"/>
-            <a:ext cx="3429000" cy="274320"/>
-          </a:xfrm>
-          <a:prstGeom prst="rect">
-            <a:avLst/>
-          </a:prstGeom>
-          <a:noFill/>
-          <a:ln/>
-        </p:spPr>
-        <p:txBody>
-          <a:bodyPr wrap="square" rtlCol="0" anchor="ctr"/>
-          <a:lstStyle/>
-          <a:p>
-            <a:pPr indent="0" marL="0">
-              <a:buNone/>
-            </a:pPr>
-            <a:r>
-              <a:rPr lang="en-US" sz="1150" dirty="0">
-                <a:solidFill>
-                  <a:srgbClr val="7A7264"/>
+          <p:cNvPr id="4" name="Text 2"/>
+          <p:cNvSpPr/>
+          <p:nvPr/>
+        </p:nvSpPr>
+        <p:spPr>
+          <a:xfrm>
+            <a:off x="502920" y="1508760"/>
+            <a:ext cx="8229600" cy="365760"/>
+          </a:xfrm>
+          <a:prstGeom prst="rect">
+            <a:avLst/>
+          </a:prstGeom>
+          <a:noFill/>
+          <a:ln/>
+        </p:spPr>
+        <p:txBody>
+          <a:bodyPr wrap="square" rtlCol="0" anchor="ctr"/>
+          <a:lstStyle/>
+          <a:p>
+            <a:pPr indent="0" marL="0">
+              <a:buNone/>
+            </a:pPr>
+            <a:r>
+              <a:rPr lang="en-US" sz="1400" dirty="0">
+                <a:solidFill>
+                  <a:srgbClr val="CFC6B5"/>
                 </a:solidFill>
                 <a:latin typeface="Calibri" pitchFamily="34" charset="0"/>
                 <a:ea typeface="Calibri" pitchFamily="34" charset="-122"/>
                 <a:cs typeface="Calibri" pitchFamily="34" charset="-120"/>
               </a:rPr>
-              <a:t>Brand niches &amp; fascia</a:t>
-            </a:r>
-            <a:endParaRPr lang="en-US" sz="1150" dirty="0"/>
-          </a:p>
-        </p:txBody>
-      </p:sp>
-      <p:sp>
-        <p:nvSpPr>
-          <p:cNvPr id="7" name="Shape 5"/>
-          <p:cNvSpPr/>
-          <p:nvPr/>
-        </p:nvSpPr>
-        <p:spPr>
-          <a:xfrm>
-            <a:off x="4389120" y="1828800"/>
-            <a:ext cx="3429000" cy="1234440"/>
+              <a:t>Backlit brass shelving and counter displays stage the full gifting range at eye level.</a:t>
+            </a:r>
+            <a:endParaRPr lang="en-US" sz="1400" dirty="0"/>
+          </a:p>
+        </p:txBody>
+      </p:sp>
+      <p:sp>
+        <p:nvSpPr>
+          <p:cNvPr id="5" name="Shape 3"/>
+          <p:cNvSpPr/>
+          <p:nvPr/>
+        </p:nvSpPr>
+        <p:spPr>
+          <a:xfrm>
+            <a:off x="502920" y="2148840"/>
+            <a:ext cx="2606040" cy="2331720"/>
           </a:xfrm>
           <a:prstGeom prst="rect">
             <a:avLst/>
           </a:prstGeom>
           <a:solidFill>
-            <a:srgbClr val="C6A24E"/>
-          </a:solidFill>
-          <a:ln w="9525">
-            <a:solidFill>
-              <a:srgbClr val="E4DCC9"/>
-            </a:solidFill>
-            <a:prstDash val="solid"/>
-          </a:ln>
-        </p:spPr>
-      </p:sp>
-      <p:sp>
-        <p:nvSpPr>
-          <p:cNvPr id="8" name="Text 6"/>
-          <p:cNvSpPr/>
-          <p:nvPr/>
-        </p:nvSpPr>
-        <p:spPr>
-          <a:xfrm>
-            <a:off x="4389120" y="3127248"/>
-            <a:ext cx="3429000" cy="320040"/>
-          </a:xfrm>
-          <a:prstGeom prst="rect">
-            <a:avLst/>
-          </a:prstGeom>
-          <a:noFill/>
-          <a:ln/>
-        </p:spPr>
-        <p:txBody>
-          <a:bodyPr wrap="square" rtlCol="0" anchor="ctr"/>
-          <a:lstStyle/>
-          <a:p>
-            <a:pPr indent="0" marL="0">
-              <a:buNone/>
-            </a:pPr>
-            <a:r>
-              <a:rPr lang="en-US" sz="1500" b="1" dirty="0">
-                <a:solidFill>
-                  <a:srgbClr val="1E4D39"/>
-                </a:solidFill>
-                <a:latin typeface="Cambria" pitchFamily="34" charset="0"/>
-                <a:ea typeface="Cambria" pitchFamily="34" charset="-122"/>
-                <a:cs typeface="Cambria" pitchFamily="34" charset="-120"/>
-              </a:rPr>
-              <a:t>Brushed gold</a:t>
-            </a:r>
-            <a:endParaRPr lang="en-US" sz="1500" dirty="0"/>
-          </a:p>
-        </p:txBody>
-      </p:sp>
-      <p:sp>
-        <p:nvSpPr>
-          <p:cNvPr id="9" name="Text 7"/>
-          <p:cNvSpPr/>
-          <p:nvPr/>
-        </p:nvSpPr>
-        <p:spPr>
-          <a:xfrm>
-            <a:off x="4389120" y="3429000"/>
-            <a:ext cx="3429000" cy="274320"/>
-          </a:xfrm>
-          <a:prstGeom prst="rect">
-            <a:avLst/>
-          </a:prstGeom>
-          <a:noFill/>
-          <a:ln/>
-        </p:spPr>
-        <p:txBody>
-          <a:bodyPr wrap="square" rtlCol="0" anchor="ctr"/>
-          <a:lstStyle/>
-          <a:p>
-            <a:pPr indent="0" marL="0">
-              <a:buNone/>
-            </a:pPr>
-            <a:r>
-              <a:rPr lang="en-US" sz="1150" dirty="0">
-                <a:solidFill>
-                  <a:srgbClr val="7A7264"/>
-                </a:solidFill>
-                <a:latin typeface="Calibri" pitchFamily="34" charset="0"/>
-                <a:ea typeface="Calibri" pitchFamily="34" charset="-122"/>
-                <a:cs typeface="Calibri" pitchFamily="34" charset="-120"/>
-              </a:rPr>
-              <a:t>Frames, trims &amp; reveals</a:t>
-            </a:r>
-            <a:endParaRPr lang="en-US" sz="1150" dirty="0"/>
-          </a:p>
-        </p:txBody>
-      </p:sp>
-      <p:sp>
-        <p:nvSpPr>
-          <p:cNvPr id="10" name="Shape 8"/>
-          <p:cNvSpPr/>
-          <p:nvPr/>
-        </p:nvSpPr>
-        <p:spPr>
-          <a:xfrm>
-            <a:off x="8275320" y="1828800"/>
-            <a:ext cx="3429000" cy="1234440"/>
-          </a:xfrm>
-          <a:prstGeom prst="rect">
-            <a:avLst/>
-          </a:prstGeom>
-          <a:solidFill>
-            <a:srgbClr val="F0ECE3"/>
-          </a:solidFill>
-          <a:ln w="9525">
-            <a:solidFill>
-              <a:srgbClr val="E4DCC9"/>
-            </a:solidFill>
-            <a:prstDash val="solid"/>
-          </a:ln>
-        </p:spPr>
-      </p:sp>
-      <p:sp>
-        <p:nvSpPr>
-          <p:cNvPr id="11" name="Text 9"/>
-          <p:cNvSpPr/>
-          <p:nvPr/>
-        </p:nvSpPr>
-        <p:spPr>
-          <a:xfrm>
-            <a:off x="8275320" y="3127248"/>
-            <a:ext cx="3429000" cy="320040"/>
-          </a:xfrm>
-          <a:prstGeom prst="rect">
-            <a:avLst/>
-          </a:prstGeom>
-          <a:noFill/>
-          <a:ln/>
-        </p:spPr>
-        <p:txBody>
-          <a:bodyPr wrap="square" rtlCol="0" anchor="ctr"/>
-          <a:lstStyle/>
-          <a:p>
-            <a:pPr indent="0" marL="0">
-              <a:buNone/>
-            </a:pPr>
-            <a:r>
-              <a:rPr lang="en-US" sz="1500" b="1" dirty="0">
-                <a:solidFill>
-                  <a:srgbClr val="1E4D39"/>
-                </a:solidFill>
-                <a:latin typeface="Cambria" pitchFamily="34" charset="0"/>
-                <a:ea typeface="Cambria" pitchFamily="34" charset="-122"/>
-                <a:cs typeface="Cambria" pitchFamily="34" charset="-120"/>
-              </a:rPr>
-              <a:t>White lacquer</a:t>
-            </a:r>
-            <a:endParaRPr lang="en-US" sz="1500" dirty="0"/>
-          </a:p>
-        </p:txBody>
-      </p:sp>
-      <p:sp>
-        <p:nvSpPr>
-          <p:cNvPr id="12" name="Text 10"/>
-          <p:cNvSpPr/>
-          <p:nvPr/>
-        </p:nvSpPr>
-        <p:spPr>
-          <a:xfrm>
-            <a:off x="8275320" y="3429000"/>
-            <a:ext cx="3429000" cy="274320"/>
-          </a:xfrm>
-          <a:prstGeom prst="rect">
-            <a:avLst/>
-          </a:prstGeom>
-          <a:noFill/>
-          <a:ln/>
-        </p:spPr>
-        <p:txBody>
-          <a:bodyPr wrap="square" rtlCol="0" anchor="ctr"/>
-          <a:lstStyle/>
-          <a:p>
-            <a:pPr indent="0" marL="0">
-              <a:buNone/>
-            </a:pPr>
-            <a:r>
-              <a:rPr lang="en-US" sz="1150" dirty="0">
-                <a:solidFill>
-                  <a:srgbClr val="7A7264"/>
-                </a:solidFill>
-                <a:latin typeface="Calibri" pitchFamily="34" charset="0"/>
-                <a:ea typeface="Calibri" pitchFamily="34" charset="-122"/>
-                <a:cs typeface="Calibri" pitchFamily="34" charset="-120"/>
-              </a:rPr>
-              <a:t>Counter &amp; totem body</a:t>
-            </a:r>
-            <a:endParaRPr lang="en-US" sz="1150" dirty="0"/>
-          </a:p>
-        </p:txBody>
-      </p:sp>
-      <p:sp>
-        <p:nvSpPr>
-          <p:cNvPr id="13" name="Shape 11"/>
-          <p:cNvSpPr/>
-          <p:nvPr/>
-        </p:nvSpPr>
-        <p:spPr>
-          <a:xfrm>
-            <a:off x="502920" y="4251960"/>
-            <a:ext cx="3429000" cy="1234440"/>
-          </a:xfrm>
-          <a:prstGeom prst="rect">
-            <a:avLst/>
-          </a:prstGeom>
-          <a:solidFill>
-            <a:srgbClr val="E7DECB"/>
-          </a:solidFill>
-          <a:ln w="9525">
-            <a:solidFill>
-              <a:srgbClr val="E4DCC9"/>
-            </a:solidFill>
-            <a:prstDash val="solid"/>
-          </a:ln>
-        </p:spPr>
-      </p:sp>
-      <p:sp>
-        <p:nvSpPr>
-          <p:cNvPr id="14" name="Text 12"/>
-          <p:cNvSpPr/>
-          <p:nvPr/>
-        </p:nvSpPr>
-        <p:spPr>
-          <a:xfrm>
-            <a:off x="502920" y="5550408"/>
-            <a:ext cx="3429000" cy="320040"/>
-          </a:xfrm>
-          <a:prstGeom prst="rect">
-            <a:avLst/>
-          </a:prstGeom>
-          <a:noFill/>
-          <a:ln/>
-        </p:spPr>
-        <p:txBody>
-          <a:bodyPr wrap="square" rtlCol="0" anchor="ctr"/>
-          <a:lstStyle/>
-          <a:p>
-            <a:pPr indent="0" marL="0">
-              <a:buNone/>
-            </a:pPr>
-            <a:r>
-              <a:rPr lang="en-US" sz="1500" b="1" dirty="0">
-                <a:solidFill>
-                  <a:srgbClr val="1E4D39"/>
-                </a:solidFill>
-                <a:latin typeface="Cambria" pitchFamily="34" charset="0"/>
-                <a:ea typeface="Cambria" pitchFamily="34" charset="-122"/>
-                <a:cs typeface="Cambria" pitchFamily="34" charset="-120"/>
-              </a:rPr>
-              <a:t>Cream marble</a:t>
-            </a:r>
-            <a:endParaRPr lang="en-US" sz="1500" dirty="0"/>
-          </a:p>
-        </p:txBody>
-      </p:sp>
-      <p:sp>
-        <p:nvSpPr>
-          <p:cNvPr id="15" name="Text 13"/>
-          <p:cNvSpPr/>
-          <p:nvPr/>
-        </p:nvSpPr>
-        <p:spPr>
-          <a:xfrm>
-            <a:off x="502920" y="5852160"/>
-            <a:ext cx="3429000" cy="274320"/>
-          </a:xfrm>
-          <a:prstGeom prst="rect">
-            <a:avLst/>
-          </a:prstGeom>
-          <a:noFill/>
-          <a:ln/>
-        </p:spPr>
-        <p:txBody>
-          <a:bodyPr wrap="square" rtlCol="0" anchor="ctr"/>
-          <a:lstStyle/>
-          <a:p>
-            <a:pPr indent="0" marL="0">
-              <a:buNone/>
-            </a:pPr>
-            <a:r>
-              <a:rPr lang="en-US" sz="1150" dirty="0">
-                <a:solidFill>
-                  <a:srgbClr val="7A7264"/>
-                </a:solidFill>
-                <a:latin typeface="Calibri" pitchFamily="34" charset="0"/>
-                <a:ea typeface="Calibri" pitchFamily="34" charset="-122"/>
-                <a:cs typeface="Calibri" pitchFamily="34" charset="-120"/>
-              </a:rPr>
-              <a:t>Counter tops</a:t>
-            </a:r>
-            <a:endParaRPr lang="en-US" sz="1150" dirty="0"/>
-          </a:p>
-        </p:txBody>
-      </p:sp>
-      <p:sp>
-        <p:nvSpPr>
-          <p:cNvPr id="16" name="Shape 14"/>
-          <p:cNvSpPr/>
-          <p:nvPr/>
-        </p:nvSpPr>
-        <p:spPr>
-          <a:xfrm>
-            <a:off x="4389120" y="4251960"/>
-            <a:ext cx="3429000" cy="1234440"/>
-          </a:xfrm>
-          <a:prstGeom prst="rect">
-            <a:avLst/>
-          </a:prstGeom>
-          <a:solidFill>
-            <a:srgbClr val="F3D9A6"/>
-          </a:solidFill>
-          <a:ln w="9525">
-            <a:solidFill>
-              <a:srgbClr val="E4DCC9"/>
-            </a:solidFill>
-            <a:prstDash val="solid"/>
-          </a:ln>
-        </p:spPr>
-      </p:sp>
-      <p:sp>
-        <p:nvSpPr>
-          <p:cNvPr id="17" name="Text 15"/>
-          <p:cNvSpPr/>
-          <p:nvPr/>
-        </p:nvSpPr>
-        <p:spPr>
-          <a:xfrm>
-            <a:off x="4389120" y="5550408"/>
-            <a:ext cx="3429000" cy="320040"/>
-          </a:xfrm>
-          <a:prstGeom prst="rect">
-            <a:avLst/>
-          </a:prstGeom>
-          <a:noFill/>
-          <a:ln/>
-        </p:spPr>
-        <p:txBody>
-          <a:bodyPr wrap="square" rtlCol="0" anchor="ctr"/>
-          <a:lstStyle/>
-          <a:p>
-            <a:pPr indent="0" marL="0">
-              <a:buNone/>
-            </a:pPr>
-            <a:r>
-              <a:rPr lang="en-US" sz="1500" b="1" dirty="0">
-                <a:solidFill>
-                  <a:srgbClr val="1E4D39"/>
-                </a:solidFill>
-                <a:latin typeface="Cambria" pitchFamily="34" charset="0"/>
-                <a:ea typeface="Cambria" pitchFamily="34" charset="-122"/>
-                <a:cs typeface="Cambria" pitchFamily="34" charset="-120"/>
-              </a:rPr>
-              <a:t>Warm LED glow</a:t>
-            </a:r>
-            <a:endParaRPr lang="en-US" sz="1500" dirty="0"/>
-          </a:p>
-        </p:txBody>
-      </p:sp>
-      <p:sp>
-        <p:nvSpPr>
-          <p:cNvPr id="18" name="Text 16"/>
-          <p:cNvSpPr/>
-          <p:nvPr/>
-        </p:nvSpPr>
-        <p:spPr>
-          <a:xfrm>
-            <a:off x="4389120" y="5852160"/>
-            <a:ext cx="3429000" cy="274320"/>
-          </a:xfrm>
-          <a:prstGeom prst="rect">
-            <a:avLst/>
-          </a:prstGeom>
-          <a:noFill/>
-          <a:ln/>
-        </p:spPr>
-        <p:txBody>
-          <a:bodyPr wrap="square" rtlCol="0" anchor="ctr"/>
-          <a:lstStyle/>
-          <a:p>
-            <a:pPr indent="0" marL="0">
-              <a:buNone/>
-            </a:pPr>
-            <a:r>
-              <a:rPr lang="en-US" sz="1150" dirty="0">
-                <a:solidFill>
-                  <a:srgbClr val="7A7264"/>
-                </a:solidFill>
-                <a:latin typeface="Calibri" pitchFamily="34" charset="0"/>
-                <a:ea typeface="Calibri" pitchFamily="34" charset="-122"/>
-                <a:cs typeface="Calibri" pitchFamily="34" charset="-120"/>
-              </a:rPr>
-              <a:t>Backlit reveals &amp; seal</a:t>
-            </a:r>
-            <a:endParaRPr lang="en-US" sz="1150" dirty="0"/>
-          </a:p>
-        </p:txBody>
-      </p:sp>
-      <p:sp>
-        <p:nvSpPr>
-          <p:cNvPr id="19" name="Shape 17"/>
-          <p:cNvSpPr/>
-          <p:nvPr/>
-        </p:nvSpPr>
-        <p:spPr>
-          <a:xfrm>
-            <a:off x="8275320" y="4251960"/>
-            <a:ext cx="3429000" cy="1234440"/>
-          </a:xfrm>
-          <a:prstGeom prst="rect">
-            <a:avLst/>
-          </a:prstGeom>
-          <a:solidFill>
-            <a:srgbClr val="2C2924"/>
-          </a:solidFill>
-          <a:ln w="9525">
-            <a:solidFill>
-              <a:srgbClr val="E4DCC9"/>
-            </a:solidFill>
-            <a:prstDash val="solid"/>
-          </a:ln>
-        </p:spPr>
-      </p:sp>
-      <p:sp>
-        <p:nvSpPr>
-          <p:cNvPr id="20" name="Text 18"/>
-          <p:cNvSpPr/>
-          <p:nvPr/>
-        </p:nvSpPr>
-        <p:spPr>
-          <a:xfrm>
-            <a:off x="8275320" y="5550408"/>
-            <a:ext cx="3429000" cy="320040"/>
-          </a:xfrm>
-          <a:prstGeom prst="rect">
-            <a:avLst/>
-          </a:prstGeom>
-          <a:noFill/>
-          <a:ln/>
-        </p:spPr>
-        <p:txBody>
-          <a:bodyPr wrap="square" rtlCol="0" anchor="ctr"/>
-          <a:lstStyle/>
-          <a:p>
-            <a:pPr indent="0" marL="0">
-              <a:buNone/>
-            </a:pPr>
-            <a:r>
-              <a:rPr lang="en-US" sz="1500" b="1" dirty="0">
-                <a:solidFill>
-                  <a:srgbClr val="1E4D39"/>
-                </a:solidFill>
-                <a:latin typeface="Cambria" pitchFamily="34" charset="0"/>
-                <a:ea typeface="Cambria" pitchFamily="34" charset="-122"/>
-                <a:cs typeface="Cambria" pitchFamily="34" charset="-120"/>
-              </a:rPr>
-              <a:t>Charcoal</a:t>
-            </a:r>
-            <a:endParaRPr lang="en-US" sz="1500" dirty="0"/>
-          </a:p>
-        </p:txBody>
-      </p:sp>
-      <p:sp>
-        <p:nvSpPr>
-          <p:cNvPr id="21" name="Text 19"/>
-          <p:cNvSpPr/>
-          <p:nvPr/>
-        </p:nvSpPr>
-        <p:spPr>
-          <a:xfrm>
-            <a:off x="8275320" y="5852160"/>
-            <a:ext cx="3429000" cy="274320"/>
-          </a:xfrm>
-          <a:prstGeom prst="rect">
-            <a:avLst/>
-          </a:prstGeom>
-          <a:noFill/>
-          <a:ln/>
-        </p:spPr>
-        <p:txBody>
-          <a:bodyPr wrap="square" rtlCol="0" anchor="ctr"/>
-          <a:lstStyle/>
-          <a:p>
-            <a:pPr indent="0" marL="0">
-              <a:buNone/>
-            </a:pPr>
-            <a:r>
-              <a:rPr lang="en-US" sz="1150" dirty="0">
-                <a:solidFill>
-                  <a:srgbClr val="7A7264"/>
-                </a:solidFill>
-                <a:latin typeface="Calibri" pitchFamily="34" charset="0"/>
-                <a:ea typeface="Calibri" pitchFamily="34" charset="-122"/>
-                <a:cs typeface="Calibri" pitchFamily="34" charset="-120"/>
-              </a:rPr>
-              <a:t>Skirting &amp; accents</a:t>
-            </a:r>
-            <a:endParaRPr lang="en-US" sz="1150" dirty="0"/>
-          </a:p>
-        </p:txBody>
-      </p:sp>
-      <p:sp>
-        <p:nvSpPr>
-          <p:cNvPr id="22" name="Text 20"/>
-          <p:cNvSpPr/>
-          <p:nvPr/>
-        </p:nvSpPr>
-        <p:spPr>
-          <a:xfrm>
-            <a:off x="457200" y="6419088"/>
-            <a:ext cx="7315200" cy="320040"/>
-          </a:xfrm>
-          <a:prstGeom prst="rect">
-            <a:avLst/>
-          </a:prstGeom>
-          <a:noFill/>
-          <a:ln/>
-        </p:spPr>
-        <p:txBody>
-          <a:bodyPr wrap="square" rtlCol="0" anchor="ctr"/>
-          <a:lstStyle/>
-          <a:p>
-            <a:pPr algn="l" indent="0" marL="0">
-              <a:buNone/>
-            </a:pPr>
-            <a:r>
-              <a:rPr lang="en-US" sz="950" b="1" spc="100" kern="0" dirty="0">
-                <a:solidFill>
-                  <a:srgbClr val="C6A24E"/>
-                </a:solidFill>
-                <a:latin typeface="Cambria" pitchFamily="34" charset="0"/>
-                <a:ea typeface="Cambria" pitchFamily="34" charset="-122"/>
-                <a:cs typeface="Cambria" pitchFamily="34" charset="-120"/>
-              </a:rPr>
-              <a:t>DOFT</a:t>
-            </a:r>
-            <a:pPr algn="l" indent="0" marL="0">
-              <a:buNone/>
-            </a:pPr>
-            <a:r>
-              <a:rPr lang="en-US" sz="950" spc="100" kern="0" dirty="0">
-                <a:solidFill>
-                  <a:srgbClr val="7A7264"/>
-                </a:solidFill>
-                <a:latin typeface="Calibri" pitchFamily="34" charset="0"/>
-                <a:ea typeface="Calibri" pitchFamily="34" charset="-122"/>
-                <a:cs typeface="Calibri" pitchFamily="34" charset="-120"/>
-              </a:rPr>
-              <a:t>  ·  SCENTED MEMORIES  ·  Diwali Pop-Up Kiosk Concept</a:t>
-            </a:r>
-            <a:endParaRPr lang="en-US" sz="950" dirty="0"/>
-          </a:p>
-        </p:txBody>
-      </p:sp>
-      <p:sp>
-        <p:nvSpPr>
-          <p:cNvPr id="23" name="Text 21"/>
-          <p:cNvSpPr/>
-          <p:nvPr/>
-        </p:nvSpPr>
-        <p:spPr>
-          <a:xfrm>
-            <a:off x="10058400" y="6419088"/>
-            <a:ext cx="1691640" cy="320040"/>
-          </a:xfrm>
-          <a:prstGeom prst="rect">
-            <a:avLst/>
-          </a:prstGeom>
-          <a:noFill/>
-          <a:ln/>
-        </p:spPr>
-        <p:txBody>
-          <a:bodyPr wrap="square" rtlCol="0" anchor="ctr"/>
-          <a:lstStyle/>
-          <a:p>
-            <a:pPr algn="r" indent="0" marL="0">
-              <a:buNone/>
-            </a:pPr>
-            <a:r>
-              <a:rPr lang="en-US" sz="950" dirty="0">
-                <a:solidFill>
-                  <a:srgbClr val="7A7264"/>
-                </a:solidFill>
-                <a:latin typeface="Calibri" pitchFamily="34" charset="0"/>
-                <a:ea typeface="Calibri" pitchFamily="34" charset="-122"/>
-                <a:cs typeface="Calibri" pitchFamily="34" charset="-120"/>
-              </a:rPr>
-              <a:t>ProMarcom</a:t>
-            </a:r>
-            <a:endParaRPr lang="en-US" sz="950" dirty="0"/>
-          </a:p>
-        </p:txBody>
-      </p:sp>
-      <p:sp>
-        <p:nvSpPr>
-          <p:cNvPr id="24" name="Shape 22"/>
-          <p:cNvSpPr/>
-          <p:nvPr/>
-        </p:nvSpPr>
-        <p:spPr>
-          <a:xfrm>
-            <a:off x="11475720" y="6364224"/>
-            <a:ext cx="402336" cy="402336"/>
-          </a:xfrm>
-          <a:prstGeom prst="ellipse">
-            <a:avLst/>
-          </a:prstGeom>
-          <a:solidFill>
-            <a:srgbClr val="FFFFFF"/>
+            <a:srgbClr val="FBF7EF"/>
           </a:solidFill>
           <a:ln w="12700">
             <a:solidFill>
@@ -11731,9 +10649,424 @@
           </a:ln>
         </p:spPr>
       </p:sp>
-      <p:sp>
-        <p:nvSpPr>
-          <p:cNvPr id="25" name="Text 23"/>
+      <p:pic>
+        <p:nvPicPr>
+          <p:cNvPr id="6" name="Image 0" descr="brief_assets/DOFT/16871dda-65d9-4f51-acfd-b2b5ad6183e9.JPG">    </p:cNvPr>
+          <p:cNvPicPr>
+            <a:picLocks noChangeAspect="1"/>
+          </p:cNvPicPr>
+          <p:nvPr/>
+        </p:nvPicPr>
+        <p:blipFill>
+          <a:blip r:embed="rId1"/>
+          <a:srcRect l="0" r="0" t="0" b="0"/>
+          <a:stretch/>
+        </p:blipFill>
+        <p:spPr>
+          <a:xfrm>
+            <a:off x="612648" y="2258568"/>
+            <a:ext cx="2386584" cy="1691640"/>
+          </a:xfrm>
+          <a:prstGeom prst="rect">
+            <a:avLst/>
+          </a:prstGeom>
+        </p:spPr>
+      </p:pic>
+      <p:sp>
+        <p:nvSpPr>
+          <p:cNvPr id="7" name="Text 4"/>
+          <p:cNvSpPr/>
+          <p:nvPr/>
+        </p:nvSpPr>
+        <p:spPr>
+          <a:xfrm>
+            <a:off x="502920" y="4023360"/>
+            <a:ext cx="2606040" cy="365760"/>
+          </a:xfrm>
+          <a:prstGeom prst="rect">
+            <a:avLst/>
+          </a:prstGeom>
+          <a:noFill/>
+          <a:ln/>
+        </p:spPr>
+        <p:txBody>
+          <a:bodyPr wrap="square" rtlCol="0" anchor="ctr"/>
+          <a:lstStyle/>
+          <a:p>
+            <a:pPr algn="ctr" indent="0" marL="0">
+              <a:buNone/>
+            </a:pPr>
+            <a:r>
+              <a:rPr lang="en-US" sz="1250" b="1" dirty="0">
+                <a:solidFill>
+                  <a:srgbClr val="2B2621"/>
+                </a:solidFill>
+                <a:latin typeface="Cambria" pitchFamily="34" charset="0"/>
+                <a:ea typeface="Cambria" pitchFamily="34" charset="-122"/>
+                <a:cs typeface="Cambria" pitchFamily="34" charset="-120"/>
+              </a:rPr>
+              <a:t>Scented candles</a:t>
+            </a:r>
+            <a:endParaRPr lang="en-US" sz="1250" dirty="0"/>
+          </a:p>
+        </p:txBody>
+      </p:sp>
+      <p:sp>
+        <p:nvSpPr>
+          <p:cNvPr id="8" name="Shape 5"/>
+          <p:cNvSpPr/>
+          <p:nvPr/>
+        </p:nvSpPr>
+        <p:spPr>
+          <a:xfrm>
+            <a:off x="3429000" y="2148840"/>
+            <a:ext cx="2606040" cy="2331720"/>
+          </a:xfrm>
+          <a:prstGeom prst="rect">
+            <a:avLst/>
+          </a:prstGeom>
+          <a:solidFill>
+            <a:srgbClr val="FBF7EF"/>
+          </a:solidFill>
+          <a:ln w="12700">
+            <a:solidFill>
+              <a:srgbClr val="C6A24E"/>
+            </a:solidFill>
+            <a:prstDash val="solid"/>
+          </a:ln>
+        </p:spPr>
+      </p:sp>
+      <p:pic>
+        <p:nvPicPr>
+          <p:cNvPr id="9" name="Image 1" descr="brief_assets/DOFT/5dc4e2f7-31d9-4a47-ba1e-1ed1f98adf47.JPG">    </p:cNvPr>
+          <p:cNvPicPr>
+            <a:picLocks noChangeAspect="1"/>
+          </p:cNvPicPr>
+          <p:nvPr/>
+        </p:nvPicPr>
+        <p:blipFill>
+          <a:blip r:embed="rId2"/>
+          <a:srcRect l="0" r="0" t="0" b="0"/>
+          <a:stretch/>
+        </p:blipFill>
+        <p:spPr>
+          <a:xfrm>
+            <a:off x="3538728" y="2258568"/>
+            <a:ext cx="2386584" cy="1691640"/>
+          </a:xfrm>
+          <a:prstGeom prst="rect">
+            <a:avLst/>
+          </a:prstGeom>
+        </p:spPr>
+      </p:pic>
+      <p:sp>
+        <p:nvSpPr>
+          <p:cNvPr id="10" name="Text 6"/>
+          <p:cNvSpPr/>
+          <p:nvPr/>
+        </p:nvSpPr>
+        <p:spPr>
+          <a:xfrm>
+            <a:off x="3429000" y="4023360"/>
+            <a:ext cx="2606040" cy="365760"/>
+          </a:xfrm>
+          <a:prstGeom prst="rect">
+            <a:avLst/>
+          </a:prstGeom>
+          <a:noFill/>
+          <a:ln/>
+        </p:spPr>
+        <p:txBody>
+          <a:bodyPr wrap="square" rtlCol="0" anchor="ctr"/>
+          <a:lstStyle/>
+          <a:p>
+            <a:pPr algn="ctr" indent="0" marL="0">
+              <a:buNone/>
+            </a:pPr>
+            <a:r>
+              <a:rPr lang="en-US" sz="1250" b="1" dirty="0">
+                <a:solidFill>
+                  <a:srgbClr val="2B2621"/>
+                </a:solidFill>
+                <a:latin typeface="Cambria" pitchFamily="34" charset="0"/>
+                <a:ea typeface="Cambria" pitchFamily="34" charset="-122"/>
+                <a:cs typeface="Cambria" pitchFamily="34" charset="-120"/>
+              </a:rPr>
+              <a:t>Gift hampers</a:t>
+            </a:r>
+            <a:endParaRPr lang="en-US" sz="1250" dirty="0"/>
+          </a:p>
+        </p:txBody>
+      </p:sp>
+      <p:sp>
+        <p:nvSpPr>
+          <p:cNvPr id="11" name="Shape 7"/>
+          <p:cNvSpPr/>
+          <p:nvPr/>
+        </p:nvSpPr>
+        <p:spPr>
+          <a:xfrm>
+            <a:off x="6355080" y="2148840"/>
+            <a:ext cx="2606040" cy="2331720"/>
+          </a:xfrm>
+          <a:prstGeom prst="rect">
+            <a:avLst/>
+          </a:prstGeom>
+          <a:solidFill>
+            <a:srgbClr val="FBF7EF"/>
+          </a:solidFill>
+          <a:ln w="12700">
+            <a:solidFill>
+              <a:srgbClr val="C6A24E"/>
+            </a:solidFill>
+            <a:prstDash val="solid"/>
+          </a:ln>
+        </p:spPr>
+      </p:sp>
+      <p:pic>
+        <p:nvPicPr>
+          <p:cNvPr id="12" name="Image 2" descr="brief_assets/DOFT/14f3dd5c-717d-40c6-9314-74ee5f820af0.JPG">    </p:cNvPr>
+          <p:cNvPicPr>
+            <a:picLocks noChangeAspect="1"/>
+          </p:cNvPicPr>
+          <p:nvPr/>
+        </p:nvPicPr>
+        <p:blipFill>
+          <a:blip r:embed="rId3"/>
+          <a:srcRect l="0" r="0" t="0" b="0"/>
+          <a:stretch/>
+        </p:blipFill>
+        <p:spPr>
+          <a:xfrm>
+            <a:off x="6464808" y="2258568"/>
+            <a:ext cx="2386584" cy="1691640"/>
+          </a:xfrm>
+          <a:prstGeom prst="rect">
+            <a:avLst/>
+          </a:prstGeom>
+        </p:spPr>
+      </p:pic>
+      <p:sp>
+        <p:nvSpPr>
+          <p:cNvPr id="13" name="Text 8"/>
+          <p:cNvSpPr/>
+          <p:nvPr/>
+        </p:nvSpPr>
+        <p:spPr>
+          <a:xfrm>
+            <a:off x="6355080" y="4023360"/>
+            <a:ext cx="2606040" cy="365760"/>
+          </a:xfrm>
+          <a:prstGeom prst="rect">
+            <a:avLst/>
+          </a:prstGeom>
+          <a:noFill/>
+          <a:ln/>
+        </p:spPr>
+        <p:txBody>
+          <a:bodyPr wrap="square" rtlCol="0" anchor="ctr"/>
+          <a:lstStyle/>
+          <a:p>
+            <a:pPr algn="ctr" indent="0" marL="0">
+              <a:buNone/>
+            </a:pPr>
+            <a:r>
+              <a:rPr lang="en-US" sz="1250" b="1" dirty="0">
+                <a:solidFill>
+                  <a:srgbClr val="2B2621"/>
+                </a:solidFill>
+                <a:latin typeface="Cambria" pitchFamily="34" charset="0"/>
+                <a:ea typeface="Cambria" pitchFamily="34" charset="-122"/>
+                <a:cs typeface="Cambria" pitchFamily="34" charset="-120"/>
+              </a:rPr>
+              <a:t>Reed diffusers &amp; sprays</a:t>
+            </a:r>
+            <a:endParaRPr lang="en-US" sz="1250" dirty="0"/>
+          </a:p>
+        </p:txBody>
+      </p:sp>
+      <p:sp>
+        <p:nvSpPr>
+          <p:cNvPr id="14" name="Shape 9"/>
+          <p:cNvSpPr/>
+          <p:nvPr/>
+        </p:nvSpPr>
+        <p:spPr>
+          <a:xfrm>
+            <a:off x="9281160" y="2148840"/>
+            <a:ext cx="2606040" cy="2331720"/>
+          </a:xfrm>
+          <a:prstGeom prst="rect">
+            <a:avLst/>
+          </a:prstGeom>
+          <a:solidFill>
+            <a:srgbClr val="FBF7EF"/>
+          </a:solidFill>
+          <a:ln w="12700">
+            <a:solidFill>
+              <a:srgbClr val="C6A24E"/>
+            </a:solidFill>
+            <a:prstDash val="solid"/>
+          </a:ln>
+        </p:spPr>
+      </p:sp>
+      <p:pic>
+        <p:nvPicPr>
+          <p:cNvPr id="15" name="Image 3" descr="brief_assets/DOFT/66d435a3-c7c1-44d9-b723-01f7df92b433.JPG">    </p:cNvPr>
+          <p:cNvPicPr>
+            <a:picLocks noChangeAspect="1"/>
+          </p:cNvPicPr>
+          <p:nvPr/>
+        </p:nvPicPr>
+        <p:blipFill>
+          <a:blip r:embed="rId4"/>
+          <a:srcRect l="0" r="0" t="0" b="0"/>
+          <a:stretch/>
+        </p:blipFill>
+        <p:spPr>
+          <a:xfrm>
+            <a:off x="9390888" y="2258568"/>
+            <a:ext cx="2386584" cy="1691640"/>
+          </a:xfrm>
+          <a:prstGeom prst="rect">
+            <a:avLst/>
+          </a:prstGeom>
+        </p:spPr>
+      </p:pic>
+      <p:sp>
+        <p:nvSpPr>
+          <p:cNvPr id="16" name="Text 10"/>
+          <p:cNvSpPr/>
+          <p:nvPr/>
+        </p:nvSpPr>
+        <p:spPr>
+          <a:xfrm>
+            <a:off x="9281160" y="4023360"/>
+            <a:ext cx="2606040" cy="365760"/>
+          </a:xfrm>
+          <a:prstGeom prst="rect">
+            <a:avLst/>
+          </a:prstGeom>
+          <a:noFill/>
+          <a:ln/>
+        </p:spPr>
+        <p:txBody>
+          <a:bodyPr wrap="square" rtlCol="0" anchor="ctr"/>
+          <a:lstStyle/>
+          <a:p>
+            <a:pPr algn="ctr" indent="0" marL="0">
+              <a:buNone/>
+            </a:pPr>
+            <a:r>
+              <a:rPr lang="en-US" sz="1250" b="1" dirty="0">
+                <a:solidFill>
+                  <a:srgbClr val="2B2621"/>
+                </a:solidFill>
+                <a:latin typeface="Cambria" pitchFamily="34" charset="0"/>
+                <a:ea typeface="Cambria" pitchFamily="34" charset="-122"/>
+                <a:cs typeface="Cambria" pitchFamily="34" charset="-120"/>
+              </a:rPr>
+              <a:t>Festive gift boxes</a:t>
+            </a:r>
+            <a:endParaRPr lang="en-US" sz="1250" dirty="0"/>
+          </a:p>
+        </p:txBody>
+      </p:sp>
+      <p:sp>
+        <p:nvSpPr>
+          <p:cNvPr id="17" name="Text 11"/>
+          <p:cNvSpPr/>
+          <p:nvPr/>
+        </p:nvSpPr>
+        <p:spPr>
+          <a:xfrm>
+            <a:off x="457200" y="6419088"/>
+            <a:ext cx="7315200" cy="320040"/>
+          </a:xfrm>
+          <a:prstGeom prst="rect">
+            <a:avLst/>
+          </a:prstGeom>
+          <a:noFill/>
+          <a:ln/>
+        </p:spPr>
+        <p:txBody>
+          <a:bodyPr wrap="square" rtlCol="0" anchor="ctr"/>
+          <a:lstStyle/>
+          <a:p>
+            <a:pPr algn="l" indent="0" marL="0">
+              <a:buNone/>
+            </a:pPr>
+            <a:r>
+              <a:rPr lang="en-US" sz="950" b="1" spc="100" kern="0" dirty="0">
+                <a:solidFill>
+                  <a:srgbClr val="C6A24E"/>
+                </a:solidFill>
+                <a:latin typeface="Cambria" pitchFamily="34" charset="0"/>
+                <a:ea typeface="Cambria" pitchFamily="34" charset="-122"/>
+                <a:cs typeface="Cambria" pitchFamily="34" charset="-120"/>
+              </a:rPr>
+              <a:t>DOFT</a:t>
+            </a:r>
+            <a:pPr algn="l" indent="0" marL="0">
+              <a:buNone/>
+            </a:pPr>
+            <a:r>
+              <a:rPr lang="en-US" sz="950" spc="100" kern="0" dirty="0">
+                <a:solidFill>
+                  <a:srgbClr val="B8AE9C"/>
+                </a:solidFill>
+                <a:latin typeface="Calibri" pitchFamily="34" charset="0"/>
+                <a:ea typeface="Calibri" pitchFamily="34" charset="-122"/>
+                <a:cs typeface="Calibri" pitchFamily="34" charset="-120"/>
+              </a:rPr>
+              <a:t>  ·  SCENTED MEMORIES  ·  Diwali Pop-Up Kiosk Concept</a:t>
+            </a:r>
+            <a:endParaRPr lang="en-US" sz="950" dirty="0"/>
+          </a:p>
+        </p:txBody>
+      </p:sp>
+      <p:sp>
+        <p:nvSpPr>
+          <p:cNvPr id="18" name="Text 12"/>
+          <p:cNvSpPr/>
+          <p:nvPr/>
+        </p:nvSpPr>
+        <p:spPr>
+          <a:xfrm>
+            <a:off x="10058400" y="6419088"/>
+            <a:ext cx="1691640" cy="320040"/>
+          </a:xfrm>
+          <a:prstGeom prst="rect">
+            <a:avLst/>
+          </a:prstGeom>
+          <a:noFill/>
+          <a:ln/>
+        </p:spPr>
+        <p:txBody>
+          <a:bodyPr wrap="square" rtlCol="0" anchor="ctr"/>
+          <a:lstStyle/>
+          <a:p>
+            <a:pPr algn="r" indent="0" marL="0">
+              <a:buNone/>
+            </a:pPr>
+            <a:r>
+              <a:rPr lang="en-US" sz="950" dirty="0">
+                <a:solidFill>
+                  <a:srgbClr val="B8AE9C"/>
+                </a:solidFill>
+                <a:latin typeface="Calibri" pitchFamily="34" charset="0"/>
+                <a:ea typeface="Calibri" pitchFamily="34" charset="-122"/>
+                <a:cs typeface="Calibri" pitchFamily="34" charset="-120"/>
+              </a:rPr>
+              <a:t>ProMarcom</a:t>
+            </a:r>
+            <a:endParaRPr lang="en-US" sz="950" dirty="0"/>
+          </a:p>
+        </p:txBody>
+      </p:sp>
+      <p:sp>
+        <p:nvSpPr>
+          <p:cNvPr id="19" name="Shape 13"/>
           <p:cNvSpPr/>
           <p:nvPr/>
         </p:nvSpPr>
@@ -11742,6 +11075,31 @@
             <a:off x="11475720" y="6364224"/>
             <a:ext cx="402336" cy="402336"/>
           </a:xfrm>
+          <a:prstGeom prst="ellipse">
+            <a:avLst/>
+          </a:prstGeom>
+          <a:solidFill>
+            <a:srgbClr val="1E1B17"/>
+          </a:solidFill>
+          <a:ln w="12700">
+            <a:solidFill>
+              <a:srgbClr val="C6A24E"/>
+            </a:solidFill>
+            <a:prstDash val="solid"/>
+          </a:ln>
+        </p:spPr>
+      </p:sp>
+      <p:sp>
+        <p:nvSpPr>
+          <p:cNvPr id="20" name="Text 14"/>
+          <p:cNvSpPr/>
+          <p:nvPr/>
+        </p:nvSpPr>
+        <p:spPr>
+          <a:xfrm>
+            <a:off x="11475720" y="6364224"/>
+            <a:ext cx="402336" cy="402336"/>
+          </a:xfrm>
           <a:prstGeom prst="rect">
             <a:avLst/>
           </a:prstGeom>
@@ -11758,7 +11116,7 @@
             <a:r>
               <a:rPr lang="en-US" sz="1100" b="1" dirty="0">
                 <a:solidFill>
-                  <a:srgbClr val="1E4D39"/>
+                  <a:srgbClr val="C6A24E"/>
                 </a:solidFill>
                 <a:latin typeface="Cambria" pitchFamily="34" charset="0"/>
                 <a:ea typeface="Cambria" pitchFamily="34" charset="-122"/>

--- a/doft_diwali_popup/Doft_Kiosk_Concept_Presentation.pptx
+++ b/doft_diwali_popup/Doft_Kiosk_Concept_Presentation.pptx
@@ -17,9 +17,13 @@
     <p:sldId id="265" r:id="rId11"/>
     <p:sldId id="266" r:id="rId12"/>
     <p:sldId id="267" r:id="rId13"/>
+    <p:sldId id="268" r:id="rId14"/>
+    <p:sldId id="269" r:id="rId15"/>
+    <p:sldId id="270" r:id="rId16"/>
+    <p:sldId id="271" r:id="rId17"/>
   </p:sldIdLst>
   <p:notesMasterIdLst>
-    <p:notesMasterId r:id="rId14"/>
+    <p:notesMasterId r:id="rId18"/>
   </p:notesMasterIdLst>
   <p:sldSz cx="12191695" cy="6858000"/>
   <p:notesSz cx="6858000" cy="12191695"/>
@@ -689,7 +693,7 @@
           <a:p>
             <a:r>
               <a:rPr lang="en-US" dirty="0"/>
-              <a:t>Turnkey scope: build, transport/install, manpower, logistics, licences, daily operations &amp; reporting.</a:t>
+              <a:t>Rationale: atrium space limited; propose PVR/INOX multiplex foyer activation in the same malls. 14 multiplexes, 107 screens, ~20,000 seats/show.</a:t>
             </a:r>
             <a:endParaRPr lang="en-US" dirty="0"/>
           </a:p>
@@ -777,7 +781,7 @@
           <a:p>
             <a:r>
               <a:rPr lang="en-US" dirty="0"/>
-              <a:t>Closing: next step is the detailed commercial proposal &amp; costing (separate workbook).</a:t>
+              <a:t>Multiplex concept: 8x8 foyer activation stall, high dwell, sampling and direct sales. Reference activation photos.</a:t>
             </a:r>
             <a:endParaRPr lang="en-US" dirty="0"/>
           </a:p>
@@ -801,6 +805,358 @@
             <a:fld id="{F7021451-1387-4CA6-816F-3879F97B5CBC}" type="slidenum">
               <a:rPr lang="en-US"/>
               <a:t>12</a:t>
+            </a:fld>
+            <a:endParaRPr lang="en-US"/>
+          </a:p>
+        </p:txBody>
+      </p:sp>
+    </p:spTree>
+    <p:extLst>
+      <p:ext uri="{BB962C8B-B14F-4D97-AF65-F5344CB8AC3E}">
+        <p14:creationId xmlns:p14="http://schemas.microsoft.com/office/powerpoint/2010/main" val="1024086991"/>
+      </p:ext>
+    </p:extLst>
+  </p:cSld>
+  <p:clrMapOvr>
+    <a:masterClrMapping/>
+  </p:clrMapOvr>
+</p:notes>
+</file>
+
+<file path=ppt/notesSlides/notesSlide13.xml><?xml version="1.0" encoding="utf-8"?>
+<p:notes xmlns:a="http://schemas.openxmlformats.org/drawingml/2006/main" xmlns:r="http://schemas.openxmlformats.org/officeDocument/2006/relationships" xmlns:p="http://schemas.openxmlformats.org/presentationml/2006/main">
+  <p:cSld>
+    <p:spTree>
+      <p:nvGrpSpPr>
+        <p:cNvPr id="1" name=""/>
+        <p:cNvGrpSpPr/>
+        <p:nvPr/>
+      </p:nvGrpSpPr>
+      <p:grpSpPr>
+        <a:xfrm>
+          <a:off x="0" y="0"/>
+          <a:ext cx="0" cy="0"/>
+          <a:chOff x="0" y="0"/>
+          <a:chExt cx="0" cy="0"/>
+        </a:xfrm>
+      </p:grpSpPr>
+      <p:sp>
+        <p:nvSpPr>
+          <p:cNvPr id="2" name="Slide Image Placeholder 1"/>
+          <p:cNvSpPr>
+            <a:spLocks noGrp="1" noRot="1" noChangeAspect="1"/>
+          </p:cNvSpPr>
+          <p:nvPr>
+            <p:ph type="sldImg"/>
+          </p:nvPr>
+        </p:nvSpPr>
+        <p:spPr/>
+      </p:sp>
+      <p:sp>
+        <p:nvSpPr>
+          <p:cNvPr id="3" name="Notes Placeholder 2"/>
+          <p:cNvSpPr>
+            <a:spLocks noGrp="1"/>
+          </p:cNvSpPr>
+          <p:nvPr>
+            <p:ph type="body" idx="1"/>
+          </p:nvPr>
+        </p:nvSpPr>
+        <p:spPr/>
+        <p:txBody>
+          <a:bodyPr/>
+          <a:lstStyle/>
+          <a:p>
+            <a:r>
+              <a:rPr lang="en-US" dirty="0"/>
+              <a:t>Network: 14 PVR/INOX multiplexes in the same malls; 107 screens; ~20,000 seats/show.</a:t>
+            </a:r>
+            <a:endParaRPr lang="en-US" dirty="0"/>
+          </a:p>
+        </p:txBody>
+      </p:sp>
+      <p:sp>
+        <p:nvSpPr>
+          <p:cNvPr id="4" name="Slide Number Placeholder 3"/>
+          <p:cNvSpPr>
+            <a:spLocks noGrp="1"/>
+          </p:cNvSpPr>
+          <p:nvPr>
+            <p:ph type="sldNum" sz="quarter" idx="10"/>
+          </p:nvPr>
+        </p:nvSpPr>
+        <p:spPr/>
+        <p:txBody>
+          <a:bodyPr/>
+          <a:lstStyle/>
+          <a:p>
+            <a:fld id="{F7021451-1387-4CA6-816F-3879F97B5CBC}" type="slidenum">
+              <a:rPr lang="en-US"/>
+              <a:t>13</a:t>
+            </a:fld>
+            <a:endParaRPr lang="en-US"/>
+          </a:p>
+        </p:txBody>
+      </p:sp>
+    </p:spTree>
+    <p:extLst>
+      <p:ext uri="{BB962C8B-B14F-4D97-AF65-F5344CB8AC3E}">
+        <p14:creationId xmlns:p14="http://schemas.microsoft.com/office/powerpoint/2010/main" val="1024086991"/>
+      </p:ext>
+    </p:extLst>
+  </p:cSld>
+  <p:clrMapOvr>
+    <a:masterClrMapping/>
+  </p:clrMapOvr>
+</p:notes>
+</file>
+
+<file path=ppt/notesSlides/notesSlide14.xml><?xml version="1.0" encoding="utf-8"?>
+<p:notes xmlns:a="http://schemas.openxmlformats.org/drawingml/2006/main" xmlns:r="http://schemas.openxmlformats.org/officeDocument/2006/relationships" xmlns:p="http://schemas.openxmlformats.org/presentationml/2006/main">
+  <p:cSld>
+    <p:spTree>
+      <p:nvGrpSpPr>
+        <p:cNvPr id="1" name=""/>
+        <p:cNvGrpSpPr/>
+        <p:nvPr/>
+      </p:nvGrpSpPr>
+      <p:grpSpPr>
+        <a:xfrm>
+          <a:off x="0" y="0"/>
+          <a:ext cx="0" cy="0"/>
+          <a:chOff x="0" y="0"/>
+          <a:chExt cx="0" cy="0"/>
+        </a:xfrm>
+      </p:grpSpPr>
+      <p:sp>
+        <p:nvSpPr>
+          <p:cNvPr id="2" name="Slide Image Placeholder 1"/>
+          <p:cNvSpPr>
+            <a:spLocks noGrp="1" noRot="1" noChangeAspect="1"/>
+          </p:cNvSpPr>
+          <p:nvPr>
+            <p:ph type="sldImg"/>
+          </p:nvPr>
+        </p:nvSpPr>
+        <p:spPr/>
+      </p:sp>
+      <p:sp>
+        <p:nvSpPr>
+          <p:cNvPr id="3" name="Notes Placeholder 2"/>
+          <p:cNvSpPr>
+            <a:spLocks noGrp="1"/>
+          </p:cNvSpPr>
+          <p:nvPr>
+            <p:ph type="body" idx="1"/>
+          </p:nvPr>
+        </p:nvSpPr>
+        <p:spPr/>
+        <p:txBody>
+          <a:bodyPr/>
+          <a:lstStyle/>
+          <a:p>
+            <a:r>
+              <a:rPr lang="en-US" dirty="0"/>
+              <a:t>Multiplex commercials: Rs 3,00,000 per site (6 weeks), x14 = Rs 42,00,000, +18% GST = Rs 49,56,000. Terms in favour of ProMarcom.</a:t>
+            </a:r>
+            <a:endParaRPr lang="en-US" dirty="0"/>
+          </a:p>
+        </p:txBody>
+      </p:sp>
+      <p:sp>
+        <p:nvSpPr>
+          <p:cNvPr id="4" name="Slide Number Placeholder 3"/>
+          <p:cNvSpPr>
+            <a:spLocks noGrp="1"/>
+          </p:cNvSpPr>
+          <p:nvPr>
+            <p:ph type="sldNum" sz="quarter" idx="10"/>
+          </p:nvPr>
+        </p:nvSpPr>
+        <p:spPr/>
+        <p:txBody>
+          <a:bodyPr/>
+          <a:lstStyle/>
+          <a:p>
+            <a:fld id="{F7021451-1387-4CA6-816F-3879F97B5CBC}" type="slidenum">
+              <a:rPr lang="en-US"/>
+              <a:t>14</a:t>
+            </a:fld>
+            <a:endParaRPr lang="en-US"/>
+          </a:p>
+        </p:txBody>
+      </p:sp>
+    </p:spTree>
+    <p:extLst>
+      <p:ext uri="{BB962C8B-B14F-4D97-AF65-F5344CB8AC3E}">
+        <p14:creationId xmlns:p14="http://schemas.microsoft.com/office/powerpoint/2010/main" val="1024086991"/>
+      </p:ext>
+    </p:extLst>
+  </p:cSld>
+  <p:clrMapOvr>
+    <a:masterClrMapping/>
+  </p:clrMapOvr>
+</p:notes>
+</file>
+
+<file path=ppt/notesSlides/notesSlide15.xml><?xml version="1.0" encoding="utf-8"?>
+<p:notes xmlns:a="http://schemas.openxmlformats.org/drawingml/2006/main" xmlns:r="http://schemas.openxmlformats.org/officeDocument/2006/relationships" xmlns:p="http://schemas.openxmlformats.org/presentationml/2006/main">
+  <p:cSld>
+    <p:spTree>
+      <p:nvGrpSpPr>
+        <p:cNvPr id="1" name=""/>
+        <p:cNvGrpSpPr/>
+        <p:nvPr/>
+      </p:nvGrpSpPr>
+      <p:grpSpPr>
+        <a:xfrm>
+          <a:off x="0" y="0"/>
+          <a:ext cx="0" cy="0"/>
+          <a:chOff x="0" y="0"/>
+          <a:chExt cx="0" cy="0"/>
+        </a:xfrm>
+      </p:grpSpPr>
+      <p:sp>
+        <p:nvSpPr>
+          <p:cNvPr id="2" name="Slide Image Placeholder 1"/>
+          <p:cNvSpPr>
+            <a:spLocks noGrp="1" noRot="1" noChangeAspect="1"/>
+          </p:cNvSpPr>
+          <p:nvPr>
+            <p:ph type="sldImg"/>
+          </p:nvPr>
+        </p:nvSpPr>
+        <p:spPr/>
+      </p:sp>
+      <p:sp>
+        <p:nvSpPr>
+          <p:cNvPr id="3" name="Notes Placeholder 2"/>
+          <p:cNvSpPr>
+            <a:spLocks noGrp="1"/>
+          </p:cNvSpPr>
+          <p:nvPr>
+            <p:ph type="body" idx="1"/>
+          </p:nvPr>
+        </p:nvSpPr>
+        <p:spPr/>
+        <p:txBody>
+          <a:bodyPr/>
+          <a:lstStyle/>
+          <a:p>
+            <a:r>
+              <a:rPr lang="en-US" dirty="0"/>
+              <a:t>Turnkey scope: build, transport/install, manpower, logistics, licences, daily operations &amp; reporting.</a:t>
+            </a:r>
+            <a:endParaRPr lang="en-US" dirty="0"/>
+          </a:p>
+        </p:txBody>
+      </p:sp>
+      <p:sp>
+        <p:nvSpPr>
+          <p:cNvPr id="4" name="Slide Number Placeholder 3"/>
+          <p:cNvSpPr>
+            <a:spLocks noGrp="1"/>
+          </p:cNvSpPr>
+          <p:nvPr>
+            <p:ph type="sldNum" sz="quarter" idx="10"/>
+          </p:nvPr>
+        </p:nvSpPr>
+        <p:spPr/>
+        <p:txBody>
+          <a:bodyPr/>
+          <a:lstStyle/>
+          <a:p>
+            <a:fld id="{F7021451-1387-4CA6-816F-3879F97B5CBC}" type="slidenum">
+              <a:rPr lang="en-US"/>
+              <a:t>15</a:t>
+            </a:fld>
+            <a:endParaRPr lang="en-US"/>
+          </a:p>
+        </p:txBody>
+      </p:sp>
+    </p:spTree>
+    <p:extLst>
+      <p:ext uri="{BB962C8B-B14F-4D97-AF65-F5344CB8AC3E}">
+        <p14:creationId xmlns:p14="http://schemas.microsoft.com/office/powerpoint/2010/main" val="1024086991"/>
+      </p:ext>
+    </p:extLst>
+  </p:cSld>
+  <p:clrMapOvr>
+    <a:masterClrMapping/>
+  </p:clrMapOvr>
+</p:notes>
+</file>
+
+<file path=ppt/notesSlides/notesSlide16.xml><?xml version="1.0" encoding="utf-8"?>
+<p:notes xmlns:a="http://schemas.openxmlformats.org/drawingml/2006/main" xmlns:r="http://schemas.openxmlformats.org/officeDocument/2006/relationships" xmlns:p="http://schemas.openxmlformats.org/presentationml/2006/main">
+  <p:cSld>
+    <p:spTree>
+      <p:nvGrpSpPr>
+        <p:cNvPr id="1" name=""/>
+        <p:cNvGrpSpPr/>
+        <p:nvPr/>
+      </p:nvGrpSpPr>
+      <p:grpSpPr>
+        <a:xfrm>
+          <a:off x="0" y="0"/>
+          <a:ext cx="0" cy="0"/>
+          <a:chOff x="0" y="0"/>
+          <a:chExt cx="0" cy="0"/>
+        </a:xfrm>
+      </p:grpSpPr>
+      <p:sp>
+        <p:nvSpPr>
+          <p:cNvPr id="2" name="Slide Image Placeholder 1"/>
+          <p:cNvSpPr>
+            <a:spLocks noGrp="1" noRot="1" noChangeAspect="1"/>
+          </p:cNvSpPr>
+          <p:nvPr>
+            <p:ph type="sldImg"/>
+          </p:nvPr>
+        </p:nvSpPr>
+        <p:spPr/>
+      </p:sp>
+      <p:sp>
+        <p:nvSpPr>
+          <p:cNvPr id="3" name="Notes Placeholder 2"/>
+          <p:cNvSpPr>
+            <a:spLocks noGrp="1"/>
+          </p:cNvSpPr>
+          <p:nvPr>
+            <p:ph type="body" idx="1"/>
+          </p:nvPr>
+        </p:nvSpPr>
+        <p:spPr/>
+        <p:txBody>
+          <a:bodyPr/>
+          <a:lstStyle/>
+          <a:p>
+            <a:r>
+              <a:rPr lang="en-US" dirty="0"/>
+              <a:t>Closing: next step is the detailed commercial proposal &amp; costing (separate workbook).</a:t>
+            </a:r>
+            <a:endParaRPr lang="en-US" dirty="0"/>
+          </a:p>
+        </p:txBody>
+      </p:sp>
+      <p:sp>
+        <p:nvSpPr>
+          <p:cNvPr id="4" name="Slide Number Placeholder 3"/>
+          <p:cNvSpPr>
+            <a:spLocks noGrp="1"/>
+          </p:cNvSpPr>
+          <p:nvPr>
+            <p:ph type="sldNum" sz="quarter" idx="10"/>
+          </p:nvPr>
+        </p:nvSpPr>
+        <p:spPr/>
+        <p:txBody>
+          <a:bodyPr/>
+          <a:lstStyle/>
+          <a:p>
+            <a:fld id="{F7021451-1387-4CA6-816F-3879F97B5CBC}" type="slidenum">
+              <a:rPr lang="en-US"/>
+              <a:t>16</a:t>
             </a:fld>
             <a:endParaRPr lang="en-US"/>
           </a:p>
@@ -3652,6 +4008,6889 @@
     <p:bg>
       <p:bgPr>
         <a:solidFill>
+          <a:srgbClr val="FFFFFF"/>
+        </a:solidFill>
+      </p:bgPr>
+    </p:bg>
+    <p:spTree>
+      <p:nvGrpSpPr>
+        <p:cNvPr id="1" name=""/>
+        <p:cNvGrpSpPr/>
+        <p:nvPr/>
+      </p:nvGrpSpPr>
+      <p:grpSpPr>
+        <a:xfrm>
+          <a:off x="0" y="0"/>
+          <a:ext cx="0" cy="0"/>
+          <a:chOff x="0" y="0"/>
+          <a:chExt cx="0" cy="0"/>
+        </a:xfrm>
+      </p:grpSpPr>
+      <p:sp>
+        <p:nvSpPr>
+          <p:cNvPr id="2" name="Text 0"/>
+          <p:cNvSpPr/>
+          <p:nvPr/>
+        </p:nvSpPr>
+        <p:spPr>
+          <a:xfrm>
+            <a:off x="548640" y="548640"/>
+            <a:ext cx="6400800" cy="274320"/>
+          </a:xfrm>
+          <a:prstGeom prst="rect">
+            <a:avLst/>
+          </a:prstGeom>
+          <a:noFill/>
+          <a:ln/>
+        </p:spPr>
+        <p:txBody>
+          <a:bodyPr wrap="square" rtlCol="0" anchor="ctr"/>
+          <a:lstStyle/>
+          <a:p>
+            <a:pPr algn="l" indent="0" marL="0">
+              <a:buNone/>
+            </a:pPr>
+            <a:r>
+              <a:rPr lang="en-US" sz="1250" b="1" spc="300" kern="0" dirty="0">
+                <a:solidFill>
+                  <a:srgbClr val="A9813A"/>
+                </a:solidFill>
+                <a:latin typeface="Calibri" pitchFamily="34" charset="0"/>
+                <a:ea typeface="Calibri" pitchFamily="34" charset="-122"/>
+                <a:cs typeface="Calibri" pitchFamily="34" charset="-120"/>
+              </a:rPr>
+              <a:t>EXTENDING REACH  ·  CHANNEL 2</a:t>
+            </a:r>
+            <a:endParaRPr lang="en-US" sz="1250" dirty="0"/>
+          </a:p>
+        </p:txBody>
+      </p:sp>
+      <p:sp>
+        <p:nvSpPr>
+          <p:cNvPr id="3" name="Text 1"/>
+          <p:cNvSpPr/>
+          <p:nvPr/>
+        </p:nvSpPr>
+        <p:spPr>
+          <a:xfrm>
+            <a:off x="502920" y="868680"/>
+            <a:ext cx="10058400" cy="640080"/>
+          </a:xfrm>
+          <a:prstGeom prst="rect">
+            <a:avLst/>
+          </a:prstGeom>
+          <a:noFill/>
+          <a:ln/>
+        </p:spPr>
+        <p:txBody>
+          <a:bodyPr wrap="square" rtlCol="0" anchor="ctr"/>
+          <a:lstStyle/>
+          <a:p>
+            <a:pPr indent="0" marL="0">
+              <a:buNone/>
+            </a:pPr>
+            <a:r>
+              <a:rPr lang="en-US" sz="3000" b="1" dirty="0">
+                <a:solidFill>
+                  <a:srgbClr val="2B2621"/>
+                </a:solidFill>
+                <a:latin typeface="Cambria" pitchFamily="34" charset="0"/>
+                <a:ea typeface="Cambria" pitchFamily="34" charset="-122"/>
+                <a:cs typeface="Cambria" pitchFamily="34" charset="-120"/>
+              </a:rPr>
+              <a:t>Adding multiplex activation</a:t>
+            </a:r>
+            <a:endParaRPr lang="en-US" sz="3000" dirty="0"/>
+          </a:p>
+        </p:txBody>
+      </p:sp>
+      <p:sp>
+        <p:nvSpPr>
+          <p:cNvPr id="4" name="Text 2"/>
+          <p:cNvSpPr/>
+          <p:nvPr/>
+        </p:nvSpPr>
+        <p:spPr>
+          <a:xfrm>
+            <a:off x="502920" y="1600200"/>
+            <a:ext cx="11155680" cy="1280160"/>
+          </a:xfrm>
+          <a:prstGeom prst="rect">
+            <a:avLst/>
+          </a:prstGeom>
+          <a:noFill/>
+          <a:ln/>
+        </p:spPr>
+        <p:txBody>
+          <a:bodyPr wrap="square" rtlCol="0" anchor="t"/>
+          <a:lstStyle/>
+          <a:p>
+            <a:pPr indent="0" marL="0">
+              <a:lnSpc>
+                <a:spcPct val="125000"/>
+              </a:lnSpc>
+              <a:buNone/>
+            </a:pPr>
+            <a:r>
+              <a:rPr lang="en-US" sz="1600" dirty="0">
+                <a:solidFill>
+                  <a:srgbClr val="2A2621"/>
+                </a:solidFill>
+                <a:latin typeface="Calibri" pitchFamily="34" charset="0"/>
+                <a:ea typeface="Calibri" pitchFamily="34" charset="-122"/>
+                <a:cs typeface="Calibri" pitchFamily="34" charset="-120"/>
+              </a:rPr>
+              <a:t>Premium atrium space on a six-week rental is limited and highly contested. To secure reach across every target city we propose a parallel Doft activation inside the </a:t>
+            </a:r>
+            <a:pPr indent="0" marL="0">
+              <a:lnSpc>
+                <a:spcPct val="125000"/>
+              </a:lnSpc>
+              <a:buNone/>
+            </a:pPr>
+            <a:r>
+              <a:rPr lang="en-US" sz="1600" b="1" dirty="0">
+                <a:solidFill>
+                  <a:srgbClr val="A9813A"/>
+                </a:solidFill>
+                <a:latin typeface="Calibri" pitchFamily="34" charset="0"/>
+                <a:ea typeface="Calibri" pitchFamily="34" charset="-122"/>
+                <a:cs typeface="Calibri" pitchFamily="34" charset="-120"/>
+              </a:rPr>
+              <a:t>PVR / INOX multiplexes located in the same malls</a:t>
+            </a:r>
+            <a:pPr indent="0" marL="0">
+              <a:lnSpc>
+                <a:spcPct val="125000"/>
+              </a:lnSpc>
+              <a:buNone/>
+            </a:pPr>
+            <a:r>
+              <a:rPr lang="en-US" sz="1600" dirty="0">
+                <a:solidFill>
+                  <a:srgbClr val="2A2621"/>
+                </a:solidFill>
+                <a:latin typeface="Calibri" pitchFamily="34" charset="0"/>
+                <a:ea typeface="Calibri" pitchFamily="34" charset="-122"/>
+                <a:cs typeface="Calibri" pitchFamily="34" charset="-120"/>
+              </a:rPr>
+              <a:t>, a captive, premium, high-dwell audience already in a leisure and gifting mindset.</a:t>
+            </a:r>
+            <a:endParaRPr lang="en-US" sz="1600" dirty="0"/>
+          </a:p>
+        </p:txBody>
+      </p:sp>
+      <p:sp>
+        <p:nvSpPr>
+          <p:cNvPr id="5" name="Shape 3"/>
+          <p:cNvSpPr/>
+          <p:nvPr/>
+        </p:nvSpPr>
+        <p:spPr>
+          <a:xfrm>
+            <a:off x="502920" y="3383280"/>
+            <a:ext cx="2697480" cy="2194560"/>
+          </a:xfrm>
+          <a:prstGeom prst="rect">
+            <a:avLst/>
+          </a:prstGeom>
+          <a:solidFill>
+            <a:srgbClr val="FBF7EF"/>
+          </a:solidFill>
+          <a:ln w="12700">
+            <a:solidFill>
+              <a:srgbClr val="E6DECB"/>
+            </a:solidFill>
+            <a:prstDash val="solid"/>
+          </a:ln>
+        </p:spPr>
+      </p:sp>
+      <p:sp>
+        <p:nvSpPr>
+          <p:cNvPr id="6" name="Text 4"/>
+          <p:cNvSpPr/>
+          <p:nvPr/>
+        </p:nvSpPr>
+        <p:spPr>
+          <a:xfrm>
+            <a:off x="502920" y="3703320"/>
+            <a:ext cx="2697480" cy="822960"/>
+          </a:xfrm>
+          <a:prstGeom prst="rect">
+            <a:avLst/>
+          </a:prstGeom>
+          <a:noFill/>
+          <a:ln/>
+        </p:spPr>
+        <p:txBody>
+          <a:bodyPr wrap="square" rtlCol="0" anchor="ctr"/>
+          <a:lstStyle/>
+          <a:p>
+            <a:pPr algn="ctr" indent="0" marL="0">
+              <a:buNone/>
+            </a:pPr>
+            <a:r>
+              <a:rPr lang="en-US" sz="3800" b="1" dirty="0">
+                <a:solidFill>
+                  <a:srgbClr val="A9813A"/>
+                </a:solidFill>
+                <a:latin typeface="Cambria" pitchFamily="34" charset="0"/>
+                <a:ea typeface="Cambria" pitchFamily="34" charset="-122"/>
+                <a:cs typeface="Cambria" pitchFamily="34" charset="-120"/>
+              </a:rPr>
+              <a:t>14</a:t>
+            </a:r>
+            <a:endParaRPr lang="en-US" sz="3800" dirty="0"/>
+          </a:p>
+        </p:txBody>
+      </p:sp>
+      <p:sp>
+        <p:nvSpPr>
+          <p:cNvPr id="7" name="Text 5"/>
+          <p:cNvSpPr/>
+          <p:nvPr/>
+        </p:nvSpPr>
+        <p:spPr>
+          <a:xfrm>
+            <a:off x="502920" y="4617720"/>
+            <a:ext cx="2697480" cy="365760"/>
+          </a:xfrm>
+          <a:prstGeom prst="rect">
+            <a:avLst/>
+          </a:prstGeom>
+          <a:noFill/>
+          <a:ln/>
+        </p:spPr>
+        <p:txBody>
+          <a:bodyPr wrap="square" rtlCol="0" anchor="ctr"/>
+          <a:lstStyle/>
+          <a:p>
+            <a:pPr algn="ctr" indent="0" marL="0">
+              <a:buNone/>
+            </a:pPr>
+            <a:r>
+              <a:rPr lang="en-US" sz="1500" b="1" dirty="0">
+                <a:solidFill>
+                  <a:srgbClr val="2B2621"/>
+                </a:solidFill>
+                <a:latin typeface="Cambria" pitchFamily="34" charset="0"/>
+                <a:ea typeface="Cambria" pitchFamily="34" charset="-122"/>
+                <a:cs typeface="Cambria" pitchFamily="34" charset="-120"/>
+              </a:rPr>
+              <a:t>Multiplexes</a:t>
+            </a:r>
+            <a:endParaRPr lang="en-US" sz="1500" dirty="0"/>
+          </a:p>
+        </p:txBody>
+      </p:sp>
+      <p:sp>
+        <p:nvSpPr>
+          <p:cNvPr id="8" name="Text 6"/>
+          <p:cNvSpPr/>
+          <p:nvPr/>
+        </p:nvSpPr>
+        <p:spPr>
+          <a:xfrm>
+            <a:off x="502920" y="5010912"/>
+            <a:ext cx="2697480" cy="365760"/>
+          </a:xfrm>
+          <a:prstGeom prst="rect">
+            <a:avLst/>
+          </a:prstGeom>
+          <a:noFill/>
+          <a:ln/>
+        </p:spPr>
+        <p:txBody>
+          <a:bodyPr wrap="square" rtlCol="0" anchor="ctr"/>
+          <a:lstStyle/>
+          <a:p>
+            <a:pPr algn="ctr" indent="0" marL="0">
+              <a:buNone/>
+            </a:pPr>
+            <a:r>
+              <a:rPr lang="en-US" sz="1150" dirty="0">
+                <a:solidFill>
+                  <a:srgbClr val="857B6C"/>
+                </a:solidFill>
+                <a:latin typeface="Calibri" pitchFamily="34" charset="0"/>
+                <a:ea typeface="Calibri" pitchFamily="34" charset="-122"/>
+                <a:cs typeface="Calibri" pitchFamily="34" charset="-120"/>
+              </a:rPr>
+              <a:t>PVR &amp; INOX</a:t>
+            </a:r>
+            <a:endParaRPr lang="en-US" sz="1150" dirty="0"/>
+          </a:p>
+        </p:txBody>
+      </p:sp>
+      <p:sp>
+        <p:nvSpPr>
+          <p:cNvPr id="9" name="Shape 7"/>
+          <p:cNvSpPr/>
+          <p:nvPr/>
+        </p:nvSpPr>
+        <p:spPr>
+          <a:xfrm>
+            <a:off x="3502152" y="3383280"/>
+            <a:ext cx="2697480" cy="2194560"/>
+          </a:xfrm>
+          <a:prstGeom prst="rect">
+            <a:avLst/>
+          </a:prstGeom>
+          <a:solidFill>
+            <a:srgbClr val="FBF7EF"/>
+          </a:solidFill>
+          <a:ln w="12700">
+            <a:solidFill>
+              <a:srgbClr val="E6DECB"/>
+            </a:solidFill>
+            <a:prstDash val="solid"/>
+          </a:ln>
+        </p:spPr>
+      </p:sp>
+      <p:sp>
+        <p:nvSpPr>
+          <p:cNvPr id="10" name="Text 8"/>
+          <p:cNvSpPr/>
+          <p:nvPr/>
+        </p:nvSpPr>
+        <p:spPr>
+          <a:xfrm>
+            <a:off x="3502152" y="3703320"/>
+            <a:ext cx="2697480" cy="822960"/>
+          </a:xfrm>
+          <a:prstGeom prst="rect">
+            <a:avLst/>
+          </a:prstGeom>
+          <a:noFill/>
+          <a:ln/>
+        </p:spPr>
+        <p:txBody>
+          <a:bodyPr wrap="square" rtlCol="0" anchor="ctr"/>
+          <a:lstStyle/>
+          <a:p>
+            <a:pPr algn="ctr" indent="0" marL="0">
+              <a:buNone/>
+            </a:pPr>
+            <a:r>
+              <a:rPr lang="en-US" sz="3800" b="1" dirty="0">
+                <a:solidFill>
+                  <a:srgbClr val="A9813A"/>
+                </a:solidFill>
+                <a:latin typeface="Cambria" pitchFamily="34" charset="0"/>
+                <a:ea typeface="Cambria" pitchFamily="34" charset="-122"/>
+                <a:cs typeface="Cambria" pitchFamily="34" charset="-120"/>
+              </a:rPr>
+              <a:t>107</a:t>
+            </a:r>
+            <a:endParaRPr lang="en-US" sz="3800" dirty="0"/>
+          </a:p>
+        </p:txBody>
+      </p:sp>
+      <p:sp>
+        <p:nvSpPr>
+          <p:cNvPr id="11" name="Text 9"/>
+          <p:cNvSpPr/>
+          <p:nvPr/>
+        </p:nvSpPr>
+        <p:spPr>
+          <a:xfrm>
+            <a:off x="3502152" y="4617720"/>
+            <a:ext cx="2697480" cy="365760"/>
+          </a:xfrm>
+          <a:prstGeom prst="rect">
+            <a:avLst/>
+          </a:prstGeom>
+          <a:noFill/>
+          <a:ln/>
+        </p:spPr>
+        <p:txBody>
+          <a:bodyPr wrap="square" rtlCol="0" anchor="ctr"/>
+          <a:lstStyle/>
+          <a:p>
+            <a:pPr algn="ctr" indent="0" marL="0">
+              <a:buNone/>
+            </a:pPr>
+            <a:r>
+              <a:rPr lang="en-US" sz="1500" b="1" dirty="0">
+                <a:solidFill>
+                  <a:srgbClr val="2B2621"/>
+                </a:solidFill>
+                <a:latin typeface="Cambria" pitchFamily="34" charset="0"/>
+                <a:ea typeface="Cambria" pitchFamily="34" charset="-122"/>
+                <a:cs typeface="Cambria" pitchFamily="34" charset="-120"/>
+              </a:rPr>
+              <a:t>Screens</a:t>
+            </a:r>
+            <a:endParaRPr lang="en-US" sz="1500" dirty="0"/>
+          </a:p>
+        </p:txBody>
+      </p:sp>
+      <p:sp>
+        <p:nvSpPr>
+          <p:cNvPr id="12" name="Text 10"/>
+          <p:cNvSpPr/>
+          <p:nvPr/>
+        </p:nvSpPr>
+        <p:spPr>
+          <a:xfrm>
+            <a:off x="3502152" y="5010912"/>
+            <a:ext cx="2697480" cy="365760"/>
+          </a:xfrm>
+          <a:prstGeom prst="rect">
+            <a:avLst/>
+          </a:prstGeom>
+          <a:noFill/>
+          <a:ln/>
+        </p:spPr>
+        <p:txBody>
+          <a:bodyPr wrap="square" rtlCol="0" anchor="ctr"/>
+          <a:lstStyle/>
+          <a:p>
+            <a:pPr algn="ctr" indent="0" marL="0">
+              <a:buNone/>
+            </a:pPr>
+            <a:r>
+              <a:rPr lang="en-US" sz="1150" dirty="0">
+                <a:solidFill>
+                  <a:srgbClr val="857B6C"/>
+                </a:solidFill>
+                <a:latin typeface="Calibri" pitchFamily="34" charset="0"/>
+                <a:ea typeface="Calibri" pitchFamily="34" charset="-122"/>
+                <a:cs typeface="Calibri" pitchFamily="34" charset="-120"/>
+              </a:rPr>
+              <a:t>across the network</a:t>
+            </a:r>
+            <a:endParaRPr lang="en-US" sz="1150" dirty="0"/>
+          </a:p>
+        </p:txBody>
+      </p:sp>
+      <p:sp>
+        <p:nvSpPr>
+          <p:cNvPr id="13" name="Shape 11"/>
+          <p:cNvSpPr/>
+          <p:nvPr/>
+        </p:nvSpPr>
+        <p:spPr>
+          <a:xfrm>
+            <a:off x="6501384" y="3383280"/>
+            <a:ext cx="2697480" cy="2194560"/>
+          </a:xfrm>
+          <a:prstGeom prst="rect">
+            <a:avLst/>
+          </a:prstGeom>
+          <a:solidFill>
+            <a:srgbClr val="FBF7EF"/>
+          </a:solidFill>
+          <a:ln w="12700">
+            <a:solidFill>
+              <a:srgbClr val="E6DECB"/>
+            </a:solidFill>
+            <a:prstDash val="solid"/>
+          </a:ln>
+        </p:spPr>
+      </p:sp>
+      <p:sp>
+        <p:nvSpPr>
+          <p:cNvPr id="14" name="Text 12"/>
+          <p:cNvSpPr/>
+          <p:nvPr/>
+        </p:nvSpPr>
+        <p:spPr>
+          <a:xfrm>
+            <a:off x="6501384" y="3703320"/>
+            <a:ext cx="2697480" cy="822960"/>
+          </a:xfrm>
+          <a:prstGeom prst="rect">
+            <a:avLst/>
+          </a:prstGeom>
+          <a:noFill/>
+          <a:ln/>
+        </p:spPr>
+        <p:txBody>
+          <a:bodyPr wrap="square" rtlCol="0" anchor="ctr"/>
+          <a:lstStyle/>
+          <a:p>
+            <a:pPr algn="ctr" indent="0" marL="0">
+              <a:buNone/>
+            </a:pPr>
+            <a:r>
+              <a:rPr lang="en-US" sz="3800" b="1" dirty="0">
+                <a:solidFill>
+                  <a:srgbClr val="A9813A"/>
+                </a:solidFill>
+                <a:latin typeface="Cambria" pitchFamily="34" charset="0"/>
+                <a:ea typeface="Cambria" pitchFamily="34" charset="-122"/>
+                <a:cs typeface="Cambria" pitchFamily="34" charset="-120"/>
+              </a:rPr>
+              <a:t>~20,000</a:t>
+            </a:r>
+            <a:endParaRPr lang="en-US" sz="3800" dirty="0"/>
+          </a:p>
+        </p:txBody>
+      </p:sp>
+      <p:sp>
+        <p:nvSpPr>
+          <p:cNvPr id="15" name="Text 13"/>
+          <p:cNvSpPr/>
+          <p:nvPr/>
+        </p:nvSpPr>
+        <p:spPr>
+          <a:xfrm>
+            <a:off x="6501384" y="4617720"/>
+            <a:ext cx="2697480" cy="365760"/>
+          </a:xfrm>
+          <a:prstGeom prst="rect">
+            <a:avLst/>
+          </a:prstGeom>
+          <a:noFill/>
+          <a:ln/>
+        </p:spPr>
+        <p:txBody>
+          <a:bodyPr wrap="square" rtlCol="0" anchor="ctr"/>
+          <a:lstStyle/>
+          <a:p>
+            <a:pPr algn="ctr" indent="0" marL="0">
+              <a:buNone/>
+            </a:pPr>
+            <a:r>
+              <a:rPr lang="en-US" sz="1500" b="1" dirty="0">
+                <a:solidFill>
+                  <a:srgbClr val="2B2621"/>
+                </a:solidFill>
+                <a:latin typeface="Cambria" pitchFamily="34" charset="0"/>
+                <a:ea typeface="Cambria" pitchFamily="34" charset="-122"/>
+                <a:cs typeface="Cambria" pitchFamily="34" charset="-120"/>
+              </a:rPr>
+              <a:t>Seats / show</a:t>
+            </a:r>
+            <a:endParaRPr lang="en-US" sz="1500" dirty="0"/>
+          </a:p>
+        </p:txBody>
+      </p:sp>
+      <p:sp>
+        <p:nvSpPr>
+          <p:cNvPr id="16" name="Text 14"/>
+          <p:cNvSpPr/>
+          <p:nvPr/>
+        </p:nvSpPr>
+        <p:spPr>
+          <a:xfrm>
+            <a:off x="6501384" y="5010912"/>
+            <a:ext cx="2697480" cy="365760"/>
+          </a:xfrm>
+          <a:prstGeom prst="rect">
+            <a:avLst/>
+          </a:prstGeom>
+          <a:noFill/>
+          <a:ln/>
+        </p:spPr>
+        <p:txBody>
+          <a:bodyPr wrap="square" rtlCol="0" anchor="ctr"/>
+          <a:lstStyle/>
+          <a:p>
+            <a:pPr algn="ctr" indent="0" marL="0">
+              <a:buNone/>
+            </a:pPr>
+            <a:r>
+              <a:rPr lang="en-US" sz="1150" dirty="0">
+                <a:solidFill>
+                  <a:srgbClr val="857B6C"/>
+                </a:solidFill>
+                <a:latin typeface="Calibri" pitchFamily="34" charset="0"/>
+                <a:ea typeface="Calibri" pitchFamily="34" charset="-122"/>
+                <a:cs typeface="Calibri" pitchFamily="34" charset="-120"/>
+              </a:rPr>
+              <a:t>combined capacity</a:t>
+            </a:r>
+            <a:endParaRPr lang="en-US" sz="1150" dirty="0"/>
+          </a:p>
+        </p:txBody>
+      </p:sp>
+      <p:sp>
+        <p:nvSpPr>
+          <p:cNvPr id="17" name="Shape 15"/>
+          <p:cNvSpPr/>
+          <p:nvPr/>
+        </p:nvSpPr>
+        <p:spPr>
+          <a:xfrm>
+            <a:off x="9500616" y="3383280"/>
+            <a:ext cx="2697480" cy="2194560"/>
+          </a:xfrm>
+          <a:prstGeom prst="rect">
+            <a:avLst/>
+          </a:prstGeom>
+          <a:solidFill>
+            <a:srgbClr val="FBF7EF"/>
+          </a:solidFill>
+          <a:ln w="12700">
+            <a:solidFill>
+              <a:srgbClr val="E6DECB"/>
+            </a:solidFill>
+            <a:prstDash val="solid"/>
+          </a:ln>
+        </p:spPr>
+      </p:sp>
+      <p:sp>
+        <p:nvSpPr>
+          <p:cNvPr id="18" name="Text 16"/>
+          <p:cNvSpPr/>
+          <p:nvPr/>
+        </p:nvSpPr>
+        <p:spPr>
+          <a:xfrm>
+            <a:off x="9500616" y="3703320"/>
+            <a:ext cx="2697480" cy="822960"/>
+          </a:xfrm>
+          <a:prstGeom prst="rect">
+            <a:avLst/>
+          </a:prstGeom>
+          <a:noFill/>
+          <a:ln/>
+        </p:spPr>
+        <p:txBody>
+          <a:bodyPr wrap="square" rtlCol="0" anchor="ctr"/>
+          <a:lstStyle/>
+          <a:p>
+            <a:pPr algn="ctr" indent="0" marL="0">
+              <a:buNone/>
+            </a:pPr>
+            <a:r>
+              <a:rPr lang="en-US" sz="3800" b="1" dirty="0">
+                <a:solidFill>
+                  <a:srgbClr val="A9813A"/>
+                </a:solidFill>
+                <a:latin typeface="Cambria" pitchFamily="34" charset="0"/>
+                <a:ea typeface="Cambria" pitchFamily="34" charset="-122"/>
+                <a:cs typeface="Cambria" pitchFamily="34" charset="-120"/>
+              </a:rPr>
+              <a:t>8×8 ft</a:t>
+            </a:r>
+            <a:endParaRPr lang="en-US" sz="3800" dirty="0"/>
+          </a:p>
+        </p:txBody>
+      </p:sp>
+      <p:sp>
+        <p:nvSpPr>
+          <p:cNvPr id="19" name="Text 17"/>
+          <p:cNvSpPr/>
+          <p:nvPr/>
+        </p:nvSpPr>
+        <p:spPr>
+          <a:xfrm>
+            <a:off x="9500616" y="4617720"/>
+            <a:ext cx="2697480" cy="365760"/>
+          </a:xfrm>
+          <a:prstGeom prst="rect">
+            <a:avLst/>
+          </a:prstGeom>
+          <a:noFill/>
+          <a:ln/>
+        </p:spPr>
+        <p:txBody>
+          <a:bodyPr wrap="square" rtlCol="0" anchor="ctr"/>
+          <a:lstStyle/>
+          <a:p>
+            <a:pPr algn="ctr" indent="0" marL="0">
+              <a:buNone/>
+            </a:pPr>
+            <a:r>
+              <a:rPr lang="en-US" sz="1500" b="1" dirty="0">
+                <a:solidFill>
+                  <a:srgbClr val="2B2621"/>
+                </a:solidFill>
+                <a:latin typeface="Cambria" pitchFamily="34" charset="0"/>
+                <a:ea typeface="Cambria" pitchFamily="34" charset="-122"/>
+                <a:cs typeface="Cambria" pitchFamily="34" charset="-120"/>
+              </a:rPr>
+              <a:t>Foyer stall</a:t>
+            </a:r>
+            <a:endParaRPr lang="en-US" sz="1500" dirty="0"/>
+          </a:p>
+        </p:txBody>
+      </p:sp>
+      <p:sp>
+        <p:nvSpPr>
+          <p:cNvPr id="20" name="Text 18"/>
+          <p:cNvSpPr/>
+          <p:nvPr/>
+        </p:nvSpPr>
+        <p:spPr>
+          <a:xfrm>
+            <a:off x="9500616" y="5010912"/>
+            <a:ext cx="2697480" cy="365760"/>
+          </a:xfrm>
+          <a:prstGeom prst="rect">
+            <a:avLst/>
+          </a:prstGeom>
+          <a:noFill/>
+          <a:ln/>
+        </p:spPr>
+        <p:txBody>
+          <a:bodyPr wrap="square" rtlCol="0" anchor="ctr"/>
+          <a:lstStyle/>
+          <a:p>
+            <a:pPr algn="ctr" indent="0" marL="0">
+              <a:buNone/>
+            </a:pPr>
+            <a:r>
+              <a:rPr lang="en-US" sz="1150" dirty="0">
+                <a:solidFill>
+                  <a:srgbClr val="857B6C"/>
+                </a:solidFill>
+                <a:latin typeface="Calibri" pitchFamily="34" charset="0"/>
+                <a:ea typeface="Calibri" pitchFamily="34" charset="-122"/>
+                <a:cs typeface="Calibri" pitchFamily="34" charset="-120"/>
+              </a:rPr>
+              <a:t>6-week window</a:t>
+            </a:r>
+            <a:endParaRPr lang="en-US" sz="1150" dirty="0"/>
+          </a:p>
+        </p:txBody>
+      </p:sp>
+      <p:sp>
+        <p:nvSpPr>
+          <p:cNvPr id="21" name="Text 19"/>
+          <p:cNvSpPr/>
+          <p:nvPr/>
+        </p:nvSpPr>
+        <p:spPr>
+          <a:xfrm>
+            <a:off x="457200" y="6419088"/>
+            <a:ext cx="7315200" cy="320040"/>
+          </a:xfrm>
+          <a:prstGeom prst="rect">
+            <a:avLst/>
+          </a:prstGeom>
+          <a:noFill/>
+          <a:ln/>
+        </p:spPr>
+        <p:txBody>
+          <a:bodyPr wrap="square" rtlCol="0" anchor="ctr"/>
+          <a:lstStyle/>
+          <a:p>
+            <a:pPr algn="l" indent="0" marL="0">
+              <a:buNone/>
+            </a:pPr>
+            <a:r>
+              <a:rPr lang="en-US" sz="950" b="1" spc="100" kern="0" dirty="0">
+                <a:solidFill>
+                  <a:srgbClr val="C6A24E"/>
+                </a:solidFill>
+                <a:latin typeface="Cambria" pitchFamily="34" charset="0"/>
+                <a:ea typeface="Cambria" pitchFamily="34" charset="-122"/>
+                <a:cs typeface="Cambria" pitchFamily="34" charset="-120"/>
+              </a:rPr>
+              <a:t>DOFT</a:t>
+            </a:r>
+            <a:pPr algn="l" indent="0" marL="0">
+              <a:buNone/>
+            </a:pPr>
+            <a:r>
+              <a:rPr lang="en-US" sz="950" spc="100" kern="0" dirty="0">
+                <a:solidFill>
+                  <a:srgbClr val="857B6C"/>
+                </a:solidFill>
+                <a:latin typeface="Calibri" pitchFamily="34" charset="0"/>
+                <a:ea typeface="Calibri" pitchFamily="34" charset="-122"/>
+                <a:cs typeface="Calibri" pitchFamily="34" charset="-120"/>
+              </a:rPr>
+              <a:t>  ·  SCENTED MEMORIES  ·  Diwali Pop-Up Kiosk Concept</a:t>
+            </a:r>
+            <a:endParaRPr lang="en-US" sz="950" dirty="0"/>
+          </a:p>
+        </p:txBody>
+      </p:sp>
+      <p:sp>
+        <p:nvSpPr>
+          <p:cNvPr id="22" name="Text 20"/>
+          <p:cNvSpPr/>
+          <p:nvPr/>
+        </p:nvSpPr>
+        <p:spPr>
+          <a:xfrm>
+            <a:off x="10058400" y="6419088"/>
+            <a:ext cx="1691640" cy="320040"/>
+          </a:xfrm>
+          <a:prstGeom prst="rect">
+            <a:avLst/>
+          </a:prstGeom>
+          <a:noFill/>
+          <a:ln/>
+        </p:spPr>
+        <p:txBody>
+          <a:bodyPr wrap="square" rtlCol="0" anchor="ctr"/>
+          <a:lstStyle/>
+          <a:p>
+            <a:pPr algn="r" indent="0" marL="0">
+              <a:buNone/>
+            </a:pPr>
+            <a:r>
+              <a:rPr lang="en-US" sz="950" dirty="0">
+                <a:solidFill>
+                  <a:srgbClr val="857B6C"/>
+                </a:solidFill>
+                <a:latin typeface="Calibri" pitchFamily="34" charset="0"/>
+                <a:ea typeface="Calibri" pitchFamily="34" charset="-122"/>
+                <a:cs typeface="Calibri" pitchFamily="34" charset="-120"/>
+              </a:rPr>
+              <a:t>ProMarcom</a:t>
+            </a:r>
+            <a:endParaRPr lang="en-US" sz="950" dirty="0"/>
+          </a:p>
+        </p:txBody>
+      </p:sp>
+      <p:sp>
+        <p:nvSpPr>
+          <p:cNvPr id="23" name="Shape 21"/>
+          <p:cNvSpPr/>
+          <p:nvPr/>
+        </p:nvSpPr>
+        <p:spPr>
+          <a:xfrm>
+            <a:off x="11475720" y="6364224"/>
+            <a:ext cx="402336" cy="402336"/>
+          </a:xfrm>
+          <a:prstGeom prst="ellipse">
+            <a:avLst/>
+          </a:prstGeom>
+          <a:solidFill>
+            <a:srgbClr val="FFFFFF"/>
+          </a:solidFill>
+          <a:ln w="12700">
+            <a:solidFill>
+              <a:srgbClr val="C6A24E"/>
+            </a:solidFill>
+            <a:prstDash val="solid"/>
+          </a:ln>
+        </p:spPr>
+      </p:sp>
+      <p:sp>
+        <p:nvSpPr>
+          <p:cNvPr id="24" name="Text 22"/>
+          <p:cNvSpPr/>
+          <p:nvPr/>
+        </p:nvSpPr>
+        <p:spPr>
+          <a:xfrm>
+            <a:off x="11475720" y="6364224"/>
+            <a:ext cx="402336" cy="402336"/>
+          </a:xfrm>
+          <a:prstGeom prst="rect">
+            <a:avLst/>
+          </a:prstGeom>
+          <a:noFill/>
+          <a:ln/>
+        </p:spPr>
+        <p:txBody>
+          <a:bodyPr wrap="square" rtlCol="0" anchor="ctr"/>
+          <a:lstStyle/>
+          <a:p>
+            <a:pPr algn="ctr" indent="0" marL="0">
+              <a:buNone/>
+            </a:pPr>
+            <a:r>
+              <a:rPr lang="en-US" sz="1100" b="1" dirty="0">
+                <a:solidFill>
+                  <a:srgbClr val="2B2621"/>
+                </a:solidFill>
+                <a:latin typeface="Cambria" pitchFamily="34" charset="0"/>
+                <a:ea typeface="Cambria" pitchFamily="34" charset="-122"/>
+                <a:cs typeface="Cambria" pitchFamily="34" charset="-120"/>
+              </a:rPr>
+              <a:t>11</a:t>
+            </a:r>
+            <a:endParaRPr lang="en-US" sz="1100" dirty="0"/>
+          </a:p>
+        </p:txBody>
+      </p:sp>
+    </p:spTree>
+  </p:cSld>
+  <p:clrMapOvr>
+    <a:masterClrMapping/>
+  </p:clrMapOvr>
+</p:sld>
+</file>
+
+<file path=ppt/slides/slide12.xml><?xml version="1.0" encoding="utf-8"?>
+<p:sld xmlns:a="http://schemas.openxmlformats.org/drawingml/2006/main" xmlns:r="http://schemas.openxmlformats.org/officeDocument/2006/relationships" xmlns:p="http://schemas.openxmlformats.org/presentationml/2006/main">
+  <p:cSld name="Slide 12">
+    <p:bg>
+      <p:bgPr>
+        <a:solidFill>
+          <a:srgbClr val="FFFFFF"/>
+        </a:solidFill>
+      </p:bgPr>
+    </p:bg>
+    <p:spTree>
+      <p:nvGrpSpPr>
+        <p:cNvPr id="1" name=""/>
+        <p:cNvGrpSpPr/>
+        <p:nvPr/>
+      </p:nvGrpSpPr>
+      <p:grpSpPr>
+        <a:xfrm>
+          <a:off x="0" y="0"/>
+          <a:ext cx="0" cy="0"/>
+          <a:chOff x="0" y="0"/>
+          <a:chExt cx="0" cy="0"/>
+        </a:xfrm>
+      </p:grpSpPr>
+      <p:sp>
+        <p:nvSpPr>
+          <p:cNvPr id="2" name="Text 0"/>
+          <p:cNvSpPr/>
+          <p:nvPr/>
+        </p:nvSpPr>
+        <p:spPr>
+          <a:xfrm>
+            <a:off x="548640" y="548640"/>
+            <a:ext cx="6400800" cy="274320"/>
+          </a:xfrm>
+          <a:prstGeom prst="rect">
+            <a:avLst/>
+          </a:prstGeom>
+          <a:noFill/>
+          <a:ln/>
+        </p:spPr>
+        <p:txBody>
+          <a:bodyPr wrap="square" rtlCol="0" anchor="ctr"/>
+          <a:lstStyle/>
+          <a:p>
+            <a:pPr algn="l" indent="0" marL="0">
+              <a:buNone/>
+            </a:pPr>
+            <a:r>
+              <a:rPr lang="en-US" sz="1250" b="1" spc="300" kern="0" dirty="0">
+                <a:solidFill>
+                  <a:srgbClr val="A9813A"/>
+                </a:solidFill>
+                <a:latin typeface="Calibri" pitchFamily="34" charset="0"/>
+                <a:ea typeface="Calibri" pitchFamily="34" charset="-122"/>
+                <a:cs typeface="Calibri" pitchFamily="34" charset="-120"/>
+              </a:rPr>
+              <a:t>MULTIPLEX ACTIVATION</a:t>
+            </a:r>
+            <a:endParaRPr lang="en-US" sz="1250" dirty="0"/>
+          </a:p>
+        </p:txBody>
+      </p:sp>
+      <p:sp>
+        <p:nvSpPr>
+          <p:cNvPr id="3" name="Text 1"/>
+          <p:cNvSpPr/>
+          <p:nvPr/>
+        </p:nvSpPr>
+        <p:spPr>
+          <a:xfrm>
+            <a:off x="502920" y="868680"/>
+            <a:ext cx="10972800" cy="640080"/>
+          </a:xfrm>
+          <a:prstGeom prst="rect">
+            <a:avLst/>
+          </a:prstGeom>
+          <a:noFill/>
+          <a:ln/>
+        </p:spPr>
+        <p:txBody>
+          <a:bodyPr wrap="square" rtlCol="0" anchor="ctr"/>
+          <a:lstStyle/>
+          <a:p>
+            <a:pPr indent="0" marL="0">
+              <a:buNone/>
+            </a:pPr>
+            <a:r>
+              <a:rPr lang="en-US" sz="3000" b="1" dirty="0">
+                <a:solidFill>
+                  <a:srgbClr val="2B2621"/>
+                </a:solidFill>
+                <a:latin typeface="Cambria" pitchFamily="34" charset="0"/>
+                <a:ea typeface="Cambria" pitchFamily="34" charset="-122"/>
+                <a:cs typeface="Cambria" pitchFamily="34" charset="-120"/>
+              </a:rPr>
+              <a:t>Brand presence in the cinema foyer</a:t>
+            </a:r>
+            <a:endParaRPr lang="en-US" sz="3000" dirty="0"/>
+          </a:p>
+        </p:txBody>
+      </p:sp>
+      <p:sp>
+        <p:nvSpPr>
+          <p:cNvPr id="4" name="Text 2"/>
+          <p:cNvSpPr/>
+          <p:nvPr/>
+        </p:nvSpPr>
+        <p:spPr>
+          <a:xfrm>
+            <a:off x="502920" y="1554480"/>
+            <a:ext cx="11155680" cy="640080"/>
+          </a:xfrm>
+          <a:prstGeom prst="rect">
+            <a:avLst/>
+          </a:prstGeom>
+          <a:noFill/>
+          <a:ln/>
+        </p:spPr>
+        <p:txBody>
+          <a:bodyPr wrap="square" rtlCol="0" anchor="ctr"/>
+          <a:lstStyle/>
+          <a:p>
+            <a:pPr indent="0" marL="0">
+              <a:lnSpc>
+                <a:spcPct val="110000"/>
+              </a:lnSpc>
+              <a:buNone/>
+            </a:pPr>
+            <a:r>
+              <a:rPr lang="en-US" sz="1450" dirty="0">
+                <a:solidFill>
+                  <a:srgbClr val="2A2621"/>
+                </a:solidFill>
+                <a:latin typeface="Calibri" pitchFamily="34" charset="0"/>
+                <a:ea typeface="Calibri" pitchFamily="34" charset="-122"/>
+                <a:cs typeface="Calibri" pitchFamily="34" charset="-120"/>
+              </a:rPr>
+              <a:t>An 8x8 ft Doft activation stall in the foyer, seen by every patron entering, waiting and exiting: high dwell time, a festive gifting mindset, live sampling and direct sales.</a:t>
+            </a:r>
+            <a:endParaRPr lang="en-US" sz="1450" dirty="0"/>
+          </a:p>
+        </p:txBody>
+      </p:sp>
+      <p:sp>
+        <p:nvSpPr>
+          <p:cNvPr id="5" name="Shape 3"/>
+          <p:cNvSpPr/>
+          <p:nvPr/>
+        </p:nvSpPr>
+        <p:spPr>
+          <a:xfrm>
+            <a:off x="502920" y="2331720"/>
+            <a:ext cx="3611880" cy="3200400"/>
+          </a:xfrm>
+          <a:prstGeom prst="rect">
+            <a:avLst/>
+          </a:prstGeom>
+          <a:solidFill>
+            <a:srgbClr val="E7E2D8"/>
+          </a:solidFill>
+          <a:ln w="12700">
+            <a:solidFill>
+              <a:srgbClr val="E6DECB"/>
+            </a:solidFill>
+            <a:prstDash val="solid"/>
+          </a:ln>
+        </p:spPr>
+      </p:sp>
+      <p:pic>
+        <p:nvPicPr>
+          <p:cNvPr id="6" name="Image 0" descr="ref_imgs/cinema_s6.jpg">    </p:cNvPr>
+          <p:cNvPicPr>
+            <a:picLocks noChangeAspect="1"/>
+          </p:cNvPicPr>
+          <p:nvPr/>
+        </p:nvPicPr>
+        <p:blipFill>
+          <a:blip r:embed="rId1"/>
+          <a:srcRect l="0" r="0" t="0" b="0"/>
+          <a:stretch/>
+        </p:blipFill>
+        <p:spPr>
+          <a:xfrm>
+            <a:off x="576072" y="2404872"/>
+            <a:ext cx="3465576" cy="3054096"/>
+          </a:xfrm>
+          <a:prstGeom prst="rect">
+            <a:avLst/>
+          </a:prstGeom>
+        </p:spPr>
+      </p:pic>
+      <p:sp>
+        <p:nvSpPr>
+          <p:cNvPr id="7" name="Shape 4"/>
+          <p:cNvSpPr/>
+          <p:nvPr/>
+        </p:nvSpPr>
+        <p:spPr>
+          <a:xfrm>
+            <a:off x="4389120" y="2331720"/>
+            <a:ext cx="3611880" cy="3200400"/>
+          </a:xfrm>
+          <a:prstGeom prst="rect">
+            <a:avLst/>
+          </a:prstGeom>
+          <a:solidFill>
+            <a:srgbClr val="E7E2D8"/>
+          </a:solidFill>
+          <a:ln w="12700">
+            <a:solidFill>
+              <a:srgbClr val="E6DECB"/>
+            </a:solidFill>
+            <a:prstDash val="solid"/>
+          </a:ln>
+        </p:spPr>
+      </p:sp>
+      <p:pic>
+        <p:nvPicPr>
+          <p:cNvPr id="8" name="Image 1" descr="ref_imgs/cinema_s2.jpg">    </p:cNvPr>
+          <p:cNvPicPr>
+            <a:picLocks noChangeAspect="1"/>
+          </p:cNvPicPr>
+          <p:nvPr/>
+        </p:nvPicPr>
+        <p:blipFill>
+          <a:blip r:embed="rId2"/>
+          <a:srcRect l="0" r="0" t="0" b="0"/>
+          <a:stretch/>
+        </p:blipFill>
+        <p:spPr>
+          <a:xfrm>
+            <a:off x="4462272" y="2404872"/>
+            <a:ext cx="3465576" cy="3054096"/>
+          </a:xfrm>
+          <a:prstGeom prst="rect">
+            <a:avLst/>
+          </a:prstGeom>
+        </p:spPr>
+      </p:pic>
+      <p:sp>
+        <p:nvSpPr>
+          <p:cNvPr id="9" name="Shape 5"/>
+          <p:cNvSpPr/>
+          <p:nvPr/>
+        </p:nvSpPr>
+        <p:spPr>
+          <a:xfrm>
+            <a:off x="8275320" y="2331720"/>
+            <a:ext cx="3611880" cy="3200400"/>
+          </a:xfrm>
+          <a:prstGeom prst="rect">
+            <a:avLst/>
+          </a:prstGeom>
+          <a:solidFill>
+            <a:srgbClr val="E7E2D8"/>
+          </a:solidFill>
+          <a:ln w="12700">
+            <a:solidFill>
+              <a:srgbClr val="E6DECB"/>
+            </a:solidFill>
+            <a:prstDash val="solid"/>
+          </a:ln>
+        </p:spPr>
+      </p:sp>
+      <p:pic>
+        <p:nvPicPr>
+          <p:cNvPr id="10" name="Image 2" descr="ref_imgs/cinema_s4.jpg">    </p:cNvPr>
+          <p:cNvPicPr>
+            <a:picLocks noChangeAspect="1"/>
+          </p:cNvPicPr>
+          <p:nvPr/>
+        </p:nvPicPr>
+        <p:blipFill>
+          <a:blip r:embed="rId3"/>
+          <a:srcRect l="0" r="0" t="0" b="0"/>
+          <a:stretch/>
+        </p:blipFill>
+        <p:spPr>
+          <a:xfrm>
+            <a:off x="8348472" y="2404872"/>
+            <a:ext cx="3465576" cy="3054096"/>
+          </a:xfrm>
+          <a:prstGeom prst="rect">
+            <a:avLst/>
+          </a:prstGeom>
+        </p:spPr>
+      </p:pic>
+      <p:sp>
+        <p:nvSpPr>
+          <p:cNvPr id="11" name="Text 6"/>
+          <p:cNvSpPr/>
+          <p:nvPr/>
+        </p:nvSpPr>
+        <p:spPr>
+          <a:xfrm>
+            <a:off x="502920" y="5641848"/>
+            <a:ext cx="10972800" cy="320040"/>
+          </a:xfrm>
+          <a:prstGeom prst="rect">
+            <a:avLst/>
+          </a:prstGeom>
+          <a:noFill/>
+          <a:ln/>
+        </p:spPr>
+        <p:txBody>
+          <a:bodyPr wrap="square" rtlCol="0" anchor="ctr"/>
+          <a:lstStyle/>
+          <a:p>
+            <a:pPr indent="0" marL="0">
+              <a:buNone/>
+            </a:pPr>
+            <a:r>
+              <a:rPr lang="en-US" sz="1150" i="1" dirty="0">
+                <a:solidFill>
+                  <a:srgbClr val="857B6C"/>
+                </a:solidFill>
+                <a:latin typeface="Calibri" pitchFamily="34" charset="0"/>
+                <a:ea typeface="Calibri" pitchFamily="34" charset="-122"/>
+                <a:cs typeface="Calibri" pitchFamily="34" charset="-120"/>
+              </a:rPr>
+              <a:t>Reference foyer activations  ·  PVR / INOX network</a:t>
+            </a:r>
+            <a:endParaRPr lang="en-US" sz="1150" dirty="0"/>
+          </a:p>
+        </p:txBody>
+      </p:sp>
+      <p:sp>
+        <p:nvSpPr>
+          <p:cNvPr id="12" name="Text 7"/>
+          <p:cNvSpPr/>
+          <p:nvPr/>
+        </p:nvSpPr>
+        <p:spPr>
+          <a:xfrm>
+            <a:off x="457200" y="6419088"/>
+            <a:ext cx="7315200" cy="320040"/>
+          </a:xfrm>
+          <a:prstGeom prst="rect">
+            <a:avLst/>
+          </a:prstGeom>
+          <a:noFill/>
+          <a:ln/>
+        </p:spPr>
+        <p:txBody>
+          <a:bodyPr wrap="square" rtlCol="0" anchor="ctr"/>
+          <a:lstStyle/>
+          <a:p>
+            <a:pPr algn="l" indent="0" marL="0">
+              <a:buNone/>
+            </a:pPr>
+            <a:r>
+              <a:rPr lang="en-US" sz="950" b="1" spc="100" kern="0" dirty="0">
+                <a:solidFill>
+                  <a:srgbClr val="C6A24E"/>
+                </a:solidFill>
+                <a:latin typeface="Cambria" pitchFamily="34" charset="0"/>
+                <a:ea typeface="Cambria" pitchFamily="34" charset="-122"/>
+                <a:cs typeface="Cambria" pitchFamily="34" charset="-120"/>
+              </a:rPr>
+              <a:t>DOFT</a:t>
+            </a:r>
+            <a:pPr algn="l" indent="0" marL="0">
+              <a:buNone/>
+            </a:pPr>
+            <a:r>
+              <a:rPr lang="en-US" sz="950" spc="100" kern="0" dirty="0">
+                <a:solidFill>
+                  <a:srgbClr val="857B6C"/>
+                </a:solidFill>
+                <a:latin typeface="Calibri" pitchFamily="34" charset="0"/>
+                <a:ea typeface="Calibri" pitchFamily="34" charset="-122"/>
+                <a:cs typeface="Calibri" pitchFamily="34" charset="-120"/>
+              </a:rPr>
+              <a:t>  ·  SCENTED MEMORIES  ·  Diwali Pop-Up Kiosk Concept</a:t>
+            </a:r>
+            <a:endParaRPr lang="en-US" sz="950" dirty="0"/>
+          </a:p>
+        </p:txBody>
+      </p:sp>
+      <p:sp>
+        <p:nvSpPr>
+          <p:cNvPr id="13" name="Text 8"/>
+          <p:cNvSpPr/>
+          <p:nvPr/>
+        </p:nvSpPr>
+        <p:spPr>
+          <a:xfrm>
+            <a:off x="10058400" y="6419088"/>
+            <a:ext cx="1691640" cy="320040"/>
+          </a:xfrm>
+          <a:prstGeom prst="rect">
+            <a:avLst/>
+          </a:prstGeom>
+          <a:noFill/>
+          <a:ln/>
+        </p:spPr>
+        <p:txBody>
+          <a:bodyPr wrap="square" rtlCol="0" anchor="ctr"/>
+          <a:lstStyle/>
+          <a:p>
+            <a:pPr algn="r" indent="0" marL="0">
+              <a:buNone/>
+            </a:pPr>
+            <a:r>
+              <a:rPr lang="en-US" sz="950" dirty="0">
+                <a:solidFill>
+                  <a:srgbClr val="857B6C"/>
+                </a:solidFill>
+                <a:latin typeface="Calibri" pitchFamily="34" charset="0"/>
+                <a:ea typeface="Calibri" pitchFamily="34" charset="-122"/>
+                <a:cs typeface="Calibri" pitchFamily="34" charset="-120"/>
+              </a:rPr>
+              <a:t>ProMarcom</a:t>
+            </a:r>
+            <a:endParaRPr lang="en-US" sz="950" dirty="0"/>
+          </a:p>
+        </p:txBody>
+      </p:sp>
+      <p:sp>
+        <p:nvSpPr>
+          <p:cNvPr id="14" name="Shape 9"/>
+          <p:cNvSpPr/>
+          <p:nvPr/>
+        </p:nvSpPr>
+        <p:spPr>
+          <a:xfrm>
+            <a:off x="11475720" y="6364224"/>
+            <a:ext cx="402336" cy="402336"/>
+          </a:xfrm>
+          <a:prstGeom prst="ellipse">
+            <a:avLst/>
+          </a:prstGeom>
+          <a:solidFill>
+            <a:srgbClr val="FFFFFF"/>
+          </a:solidFill>
+          <a:ln w="12700">
+            <a:solidFill>
+              <a:srgbClr val="C6A24E"/>
+            </a:solidFill>
+            <a:prstDash val="solid"/>
+          </a:ln>
+        </p:spPr>
+      </p:sp>
+      <p:sp>
+        <p:nvSpPr>
+          <p:cNvPr id="15" name="Text 10"/>
+          <p:cNvSpPr/>
+          <p:nvPr/>
+        </p:nvSpPr>
+        <p:spPr>
+          <a:xfrm>
+            <a:off x="11475720" y="6364224"/>
+            <a:ext cx="402336" cy="402336"/>
+          </a:xfrm>
+          <a:prstGeom prst="rect">
+            <a:avLst/>
+          </a:prstGeom>
+          <a:noFill/>
+          <a:ln/>
+        </p:spPr>
+        <p:txBody>
+          <a:bodyPr wrap="square" rtlCol="0" anchor="ctr"/>
+          <a:lstStyle/>
+          <a:p>
+            <a:pPr algn="ctr" indent="0" marL="0">
+              <a:buNone/>
+            </a:pPr>
+            <a:r>
+              <a:rPr lang="en-US" sz="1100" b="1" dirty="0">
+                <a:solidFill>
+                  <a:srgbClr val="2B2621"/>
+                </a:solidFill>
+                <a:latin typeface="Cambria" pitchFamily="34" charset="0"/>
+                <a:ea typeface="Cambria" pitchFamily="34" charset="-122"/>
+                <a:cs typeface="Cambria" pitchFamily="34" charset="-120"/>
+              </a:rPr>
+              <a:t>12</a:t>
+            </a:r>
+            <a:endParaRPr lang="en-US" sz="1100" dirty="0"/>
+          </a:p>
+        </p:txBody>
+      </p:sp>
+    </p:spTree>
+  </p:cSld>
+  <p:clrMapOvr>
+    <a:masterClrMapping/>
+  </p:clrMapOvr>
+</p:sld>
+</file>
+
+<file path=ppt/slides/slide13.xml><?xml version="1.0" encoding="utf-8"?>
+<p:sld xmlns:a="http://schemas.openxmlformats.org/drawingml/2006/main" xmlns:r="http://schemas.openxmlformats.org/officeDocument/2006/relationships" xmlns:p="http://schemas.openxmlformats.org/presentationml/2006/main">
+  <p:cSld name="Slide 13">
+    <p:bg>
+      <p:bgPr>
+        <a:solidFill>
+          <a:srgbClr val="FFFFFF"/>
+        </a:solidFill>
+      </p:bgPr>
+    </p:bg>
+    <p:spTree>
+      <p:nvGrpSpPr>
+        <p:cNvPr id="1" name=""/>
+        <p:cNvGrpSpPr/>
+        <p:nvPr/>
+      </p:nvGrpSpPr>
+      <p:grpSpPr>
+        <a:xfrm>
+          <a:off x="0" y="0"/>
+          <a:ext cx="0" cy="0"/>
+          <a:chOff x="0" y="0"/>
+          <a:chExt cx="0" cy="0"/>
+        </a:xfrm>
+      </p:grpSpPr>
+      <p:sp>
+        <p:nvSpPr>
+          <p:cNvPr id="2" name="Text 0"/>
+          <p:cNvSpPr/>
+          <p:nvPr/>
+        </p:nvSpPr>
+        <p:spPr>
+          <a:xfrm>
+            <a:off x="548640" y="411480"/>
+            <a:ext cx="6400800" cy="274320"/>
+          </a:xfrm>
+          <a:prstGeom prst="rect">
+            <a:avLst/>
+          </a:prstGeom>
+          <a:noFill/>
+          <a:ln/>
+        </p:spPr>
+        <p:txBody>
+          <a:bodyPr wrap="square" rtlCol="0" anchor="ctr"/>
+          <a:lstStyle/>
+          <a:p>
+            <a:pPr algn="l" indent="0" marL="0">
+              <a:buNone/>
+            </a:pPr>
+            <a:r>
+              <a:rPr lang="en-US" sz="1250" b="1" spc="300" kern="0" dirty="0">
+                <a:solidFill>
+                  <a:srgbClr val="A9813A"/>
+                </a:solidFill>
+                <a:latin typeface="Calibri" pitchFamily="34" charset="0"/>
+                <a:ea typeface="Calibri" pitchFamily="34" charset="-122"/>
+                <a:cs typeface="Calibri" pitchFamily="34" charset="-120"/>
+              </a:rPr>
+              <a:t>THE NETWORK</a:t>
+            </a:r>
+            <a:endParaRPr lang="en-US" sz="1250" dirty="0"/>
+          </a:p>
+        </p:txBody>
+      </p:sp>
+      <p:sp>
+        <p:nvSpPr>
+          <p:cNvPr id="3" name="Text 1"/>
+          <p:cNvSpPr/>
+          <p:nvPr/>
+        </p:nvSpPr>
+        <p:spPr>
+          <a:xfrm>
+            <a:off x="502920" y="731520"/>
+            <a:ext cx="10972800" cy="548640"/>
+          </a:xfrm>
+          <a:prstGeom prst="rect">
+            <a:avLst/>
+          </a:prstGeom>
+          <a:noFill/>
+          <a:ln/>
+        </p:spPr>
+        <p:txBody>
+          <a:bodyPr wrap="square" rtlCol="0" anchor="ctr"/>
+          <a:lstStyle/>
+          <a:p>
+            <a:pPr indent="0" marL="0">
+              <a:buNone/>
+            </a:pPr>
+            <a:r>
+              <a:rPr lang="en-US" sz="2800" b="1" dirty="0">
+                <a:solidFill>
+                  <a:srgbClr val="2B2621"/>
+                </a:solidFill>
+                <a:latin typeface="Cambria" pitchFamily="34" charset="0"/>
+                <a:ea typeface="Cambria" pitchFamily="34" charset="-122"/>
+                <a:cs typeface="Cambria" pitchFamily="34" charset="-120"/>
+              </a:rPr>
+              <a:t>14 premium multiplexes, pan-India</a:t>
+            </a:r>
+            <a:endParaRPr lang="en-US" sz="2800" dirty="0"/>
+          </a:p>
+        </p:txBody>
+      </p:sp>
+      <p:graphicFrame>
+        <p:nvGraphicFramePr>
+          <p:cNvPr id="14" name="Table 0"/>
+          <p:cNvGraphicFramePr>
+            <a:graphicFrameLocks noGrp="1"/>
+          </p:cNvGraphicFramePr>
+          <p:nvPr>
+            <p:extLst>
+              <p:ext uri="{D42A27DB-BD31-4B8C-83A1-F6EECF244321}">
+                <p14:modId xmlns:p14="http://schemas.microsoft.com/office/powerpoint/2010/main" val="1579011935"/>
+              </p:ext>
+            </p:extLst>
+          </p:nvPr>
+        </p:nvGraphicFramePr>
+        <p:xfrm>
+          <a:off x="502920" y="1417320"/>
+          <a:ext cx="11155680" cy="914400"/>
+        </p:xfrm>
+        <a:graphic>
+          <a:graphicData uri="http://schemas.openxmlformats.org/drawingml/2006/table">
+            <a:tbl>
+              <a:tblPr/>
+              <a:tblGrid>
+                <a:gridCol w="2743200"/>
+                <a:gridCol w="3566160"/>
+                <a:gridCol w="1554480"/>
+                <a:gridCol w="1737360"/>
+                <a:gridCol w="1554480"/>
+              </a:tblGrid>
+              <a:tr h="310896">
+                <a:tc>
+                  <a:txBody>
+                    <a:bodyPr/>
+                    <a:lstStyle/>
+                    <a:p>
+                      <a:pPr algn="l" indent="0" marL="0">
+                        <a:buNone/>
+                      </a:pPr>
+                      <a:r>
+                        <a:rPr lang="en-US" sz="1100" b="1" dirty="0">
+                          <a:solidFill>
+                            <a:srgbClr val="FFFFFF"/>
+                          </a:solidFill>
+                          <a:latin typeface="Calibri" pitchFamily="34" charset="0"/>
+                          <a:ea typeface="Calibri" pitchFamily="34" charset="-122"/>
+                          <a:cs typeface="Calibri" pitchFamily="34" charset="-120"/>
+                        </a:rPr>
+                        <a:t>City</a:t>
+                      </a:r>
+                      <a:endParaRPr lang="en-US" sz="1100" dirty="0">
+                        <a:latin typeface="Calibri" charset="0"/>
+                        <a:ea typeface="Calibri" charset="0"/>
+                        <a:cs typeface="Calibri" charset="0"/>
+                      </a:endParaRPr>
+                    </a:p>
+                  </a:txBody>
+                  <a:tcPr marL="91440" marR="91440" marT="45720" marB="45720" anchor="ctr">
+                    <a:lnL w="6350" cap="flat" cmpd="sng" algn="ctr">
+                      <a:solidFill>
+                        <a:srgbClr val="E6DECB"/>
+                      </a:solidFill>
+                      <a:prstDash val="solid"/>
+                      <a:round/>
+                      <a:headEnd type="none" w="med" len="med"/>
+                      <a:tailEnd type="none" w="med" len="med"/>
+                    </a:lnL>
+                    <a:lnR w="6350" cap="flat" cmpd="sng" algn="ctr">
+                      <a:solidFill>
+                        <a:srgbClr val="E6DECB"/>
+                      </a:solidFill>
+                      <a:prstDash val="solid"/>
+                      <a:round/>
+                      <a:headEnd type="none" w="med" len="med"/>
+                      <a:tailEnd type="none" w="med" len="med"/>
+                    </a:lnR>
+                    <a:lnT w="6350" cap="flat" cmpd="sng" algn="ctr">
+                      <a:solidFill>
+                        <a:srgbClr val="E6DECB"/>
+                      </a:solidFill>
+                      <a:prstDash val="solid"/>
+                      <a:round/>
+                      <a:headEnd type="none" w="med" len="med"/>
+                      <a:tailEnd type="none" w="med" len="med"/>
+                    </a:lnT>
+                    <a:lnB w="6350" cap="flat" cmpd="sng" algn="ctr">
+                      <a:solidFill>
+                        <a:srgbClr val="E6DECB"/>
+                      </a:solidFill>
+                      <a:prstDash val="solid"/>
+                      <a:round/>
+                      <a:headEnd type="none" w="med" len="med"/>
+                      <a:tailEnd type="none" w="med" len="med"/>
+                    </a:lnB>
+                    <a:solidFill>
+                      <a:srgbClr val="2B2621"/>
+                    </a:solidFill>
+                  </a:tcPr>
+                </a:tc>
+                <a:tc>
+                  <a:txBody>
+                    <a:bodyPr/>
+                    <a:lstStyle/>
+                    <a:p>
+                      <a:pPr algn="l" indent="0" marL="0">
+                        <a:buNone/>
+                      </a:pPr>
+                      <a:r>
+                        <a:rPr lang="en-US" sz="1100" b="1" dirty="0">
+                          <a:solidFill>
+                            <a:srgbClr val="FFFFFF"/>
+                          </a:solidFill>
+                          <a:latin typeface="Calibri" pitchFamily="34" charset="0"/>
+                          <a:ea typeface="Calibri" pitchFamily="34" charset="-122"/>
+                          <a:cs typeface="Calibri" pitchFamily="34" charset="-120"/>
+                        </a:rPr>
+                        <a:t>Multiplex / Cinema</a:t>
+                      </a:r>
+                      <a:endParaRPr lang="en-US" sz="1100" dirty="0">
+                        <a:latin typeface="Calibri" charset="0"/>
+                        <a:ea typeface="Calibri" charset="0"/>
+                        <a:cs typeface="Calibri" charset="0"/>
+                      </a:endParaRPr>
+                    </a:p>
+                  </a:txBody>
+                  <a:tcPr marL="91440" marR="91440" marT="45720" marB="45720" anchor="ctr">
+                    <a:lnL w="6350" cap="flat" cmpd="sng" algn="ctr">
+                      <a:solidFill>
+                        <a:srgbClr val="E6DECB"/>
+                      </a:solidFill>
+                      <a:prstDash val="solid"/>
+                      <a:round/>
+                      <a:headEnd type="none" w="med" len="med"/>
+                      <a:tailEnd type="none" w="med" len="med"/>
+                    </a:lnL>
+                    <a:lnR w="6350" cap="flat" cmpd="sng" algn="ctr">
+                      <a:solidFill>
+                        <a:srgbClr val="E6DECB"/>
+                      </a:solidFill>
+                      <a:prstDash val="solid"/>
+                      <a:round/>
+                      <a:headEnd type="none" w="med" len="med"/>
+                      <a:tailEnd type="none" w="med" len="med"/>
+                    </a:lnR>
+                    <a:lnT w="6350" cap="flat" cmpd="sng" algn="ctr">
+                      <a:solidFill>
+                        <a:srgbClr val="E6DECB"/>
+                      </a:solidFill>
+                      <a:prstDash val="solid"/>
+                      <a:round/>
+                      <a:headEnd type="none" w="med" len="med"/>
+                      <a:tailEnd type="none" w="med" len="med"/>
+                    </a:lnT>
+                    <a:lnB w="6350" cap="flat" cmpd="sng" algn="ctr">
+                      <a:solidFill>
+                        <a:srgbClr val="E6DECB"/>
+                      </a:solidFill>
+                      <a:prstDash val="solid"/>
+                      <a:round/>
+                      <a:headEnd type="none" w="med" len="med"/>
+                      <a:tailEnd type="none" w="med" len="med"/>
+                    </a:lnB>
+                    <a:solidFill>
+                      <a:srgbClr val="2B2621"/>
+                    </a:solidFill>
+                  </a:tcPr>
+                </a:tc>
+                <a:tc>
+                  <a:txBody>
+                    <a:bodyPr/>
+                    <a:lstStyle/>
+                    <a:p>
+                      <a:pPr algn="l" indent="0" marL="0">
+                        <a:buNone/>
+                      </a:pPr>
+                      <a:r>
+                        <a:rPr lang="en-US" sz="1100" b="1" dirty="0">
+                          <a:solidFill>
+                            <a:srgbClr val="FFFFFF"/>
+                          </a:solidFill>
+                          <a:latin typeface="Calibri" pitchFamily="34" charset="0"/>
+                          <a:ea typeface="Calibri" pitchFamily="34" charset="-122"/>
+                          <a:cs typeface="Calibri" pitchFamily="34" charset="-120"/>
+                        </a:rPr>
+                        <a:t>Screens</a:t>
+                      </a:r>
+                      <a:endParaRPr lang="en-US" sz="1100" dirty="0">
+                        <a:latin typeface="Calibri" charset="0"/>
+                        <a:ea typeface="Calibri" charset="0"/>
+                        <a:cs typeface="Calibri" charset="0"/>
+                      </a:endParaRPr>
+                    </a:p>
+                  </a:txBody>
+                  <a:tcPr marL="91440" marR="91440" marT="45720" marB="45720" anchor="ctr">
+                    <a:lnL w="6350" cap="flat" cmpd="sng" algn="ctr">
+                      <a:solidFill>
+                        <a:srgbClr val="E6DECB"/>
+                      </a:solidFill>
+                      <a:prstDash val="solid"/>
+                      <a:round/>
+                      <a:headEnd type="none" w="med" len="med"/>
+                      <a:tailEnd type="none" w="med" len="med"/>
+                    </a:lnL>
+                    <a:lnR w="6350" cap="flat" cmpd="sng" algn="ctr">
+                      <a:solidFill>
+                        <a:srgbClr val="E6DECB"/>
+                      </a:solidFill>
+                      <a:prstDash val="solid"/>
+                      <a:round/>
+                      <a:headEnd type="none" w="med" len="med"/>
+                      <a:tailEnd type="none" w="med" len="med"/>
+                    </a:lnR>
+                    <a:lnT w="6350" cap="flat" cmpd="sng" algn="ctr">
+                      <a:solidFill>
+                        <a:srgbClr val="E6DECB"/>
+                      </a:solidFill>
+                      <a:prstDash val="solid"/>
+                      <a:round/>
+                      <a:headEnd type="none" w="med" len="med"/>
+                      <a:tailEnd type="none" w="med" len="med"/>
+                    </a:lnT>
+                    <a:lnB w="6350" cap="flat" cmpd="sng" algn="ctr">
+                      <a:solidFill>
+                        <a:srgbClr val="E6DECB"/>
+                      </a:solidFill>
+                      <a:prstDash val="solid"/>
+                      <a:round/>
+                      <a:headEnd type="none" w="med" len="med"/>
+                      <a:tailEnd type="none" w="med" len="med"/>
+                    </a:lnB>
+                    <a:solidFill>
+                      <a:srgbClr val="2B2621"/>
+                    </a:solidFill>
+                  </a:tcPr>
+                </a:tc>
+                <a:tc>
+                  <a:txBody>
+                    <a:bodyPr/>
+                    <a:lstStyle/>
+                    <a:p>
+                      <a:pPr algn="l" indent="0" marL="0">
+                        <a:buNone/>
+                      </a:pPr>
+                      <a:r>
+                        <a:rPr lang="en-US" sz="1100" b="1" dirty="0">
+                          <a:solidFill>
+                            <a:srgbClr val="FFFFFF"/>
+                          </a:solidFill>
+                          <a:latin typeface="Calibri" pitchFamily="34" charset="0"/>
+                          <a:ea typeface="Calibri" pitchFamily="34" charset="-122"/>
+                          <a:cs typeface="Calibri" pitchFamily="34" charset="-120"/>
+                        </a:rPr>
+                        <a:t>Seats / show</a:t>
+                      </a:r>
+                      <a:endParaRPr lang="en-US" sz="1100" dirty="0">
+                        <a:latin typeface="Calibri" charset="0"/>
+                        <a:ea typeface="Calibri" charset="0"/>
+                        <a:cs typeface="Calibri" charset="0"/>
+                      </a:endParaRPr>
+                    </a:p>
+                  </a:txBody>
+                  <a:tcPr marL="91440" marR="91440" marT="45720" marB="45720" anchor="ctr">
+                    <a:lnL w="6350" cap="flat" cmpd="sng" algn="ctr">
+                      <a:solidFill>
+                        <a:srgbClr val="E6DECB"/>
+                      </a:solidFill>
+                      <a:prstDash val="solid"/>
+                      <a:round/>
+                      <a:headEnd type="none" w="med" len="med"/>
+                      <a:tailEnd type="none" w="med" len="med"/>
+                    </a:lnL>
+                    <a:lnR w="6350" cap="flat" cmpd="sng" algn="ctr">
+                      <a:solidFill>
+                        <a:srgbClr val="E6DECB"/>
+                      </a:solidFill>
+                      <a:prstDash val="solid"/>
+                      <a:round/>
+                      <a:headEnd type="none" w="med" len="med"/>
+                      <a:tailEnd type="none" w="med" len="med"/>
+                    </a:lnR>
+                    <a:lnT w="6350" cap="flat" cmpd="sng" algn="ctr">
+                      <a:solidFill>
+                        <a:srgbClr val="E6DECB"/>
+                      </a:solidFill>
+                      <a:prstDash val="solid"/>
+                      <a:round/>
+                      <a:headEnd type="none" w="med" len="med"/>
+                      <a:tailEnd type="none" w="med" len="med"/>
+                    </a:lnT>
+                    <a:lnB w="6350" cap="flat" cmpd="sng" algn="ctr">
+                      <a:solidFill>
+                        <a:srgbClr val="E6DECB"/>
+                      </a:solidFill>
+                      <a:prstDash val="solid"/>
+                      <a:round/>
+                      <a:headEnd type="none" w="med" len="med"/>
+                      <a:tailEnd type="none" w="med" len="med"/>
+                    </a:lnB>
+                    <a:solidFill>
+                      <a:srgbClr val="2B2621"/>
+                    </a:solidFill>
+                  </a:tcPr>
+                </a:tc>
+                <a:tc>
+                  <a:txBody>
+                    <a:bodyPr/>
+                    <a:lstStyle/>
+                    <a:p>
+                      <a:pPr algn="l" indent="0" marL="0">
+                        <a:buNone/>
+                      </a:pPr>
+                      <a:r>
+                        <a:rPr lang="en-US" sz="1100" b="1" dirty="0">
+                          <a:solidFill>
+                            <a:srgbClr val="FFFFFF"/>
+                          </a:solidFill>
+                          <a:latin typeface="Calibri" pitchFamily="34" charset="0"/>
+                          <a:ea typeface="Calibri" pitchFamily="34" charset="-122"/>
+                          <a:cs typeface="Calibri" pitchFamily="34" charset="-120"/>
+                        </a:rPr>
+                        <a:t>Space</a:t>
+                      </a:r>
+                      <a:endParaRPr lang="en-US" sz="1100" dirty="0">
+                        <a:latin typeface="Calibri" charset="0"/>
+                        <a:ea typeface="Calibri" charset="0"/>
+                        <a:cs typeface="Calibri" charset="0"/>
+                      </a:endParaRPr>
+                    </a:p>
+                  </a:txBody>
+                  <a:tcPr marL="91440" marR="91440" marT="45720" marB="45720" anchor="ctr">
+                    <a:lnL w="6350" cap="flat" cmpd="sng" algn="ctr">
+                      <a:solidFill>
+                        <a:srgbClr val="E6DECB"/>
+                      </a:solidFill>
+                      <a:prstDash val="solid"/>
+                      <a:round/>
+                      <a:headEnd type="none" w="med" len="med"/>
+                      <a:tailEnd type="none" w="med" len="med"/>
+                    </a:lnL>
+                    <a:lnR w="6350" cap="flat" cmpd="sng" algn="ctr">
+                      <a:solidFill>
+                        <a:srgbClr val="E6DECB"/>
+                      </a:solidFill>
+                      <a:prstDash val="solid"/>
+                      <a:round/>
+                      <a:headEnd type="none" w="med" len="med"/>
+                      <a:tailEnd type="none" w="med" len="med"/>
+                    </a:lnR>
+                    <a:lnT w="6350" cap="flat" cmpd="sng" algn="ctr">
+                      <a:solidFill>
+                        <a:srgbClr val="E6DECB"/>
+                      </a:solidFill>
+                      <a:prstDash val="solid"/>
+                      <a:round/>
+                      <a:headEnd type="none" w="med" len="med"/>
+                      <a:tailEnd type="none" w="med" len="med"/>
+                    </a:lnT>
+                    <a:lnB w="6350" cap="flat" cmpd="sng" algn="ctr">
+                      <a:solidFill>
+                        <a:srgbClr val="E6DECB"/>
+                      </a:solidFill>
+                      <a:prstDash val="solid"/>
+                      <a:round/>
+                      <a:headEnd type="none" w="med" len="med"/>
+                      <a:tailEnd type="none" w="med" len="med"/>
+                    </a:lnB>
+                    <a:solidFill>
+                      <a:srgbClr val="2B2621"/>
+                    </a:solidFill>
+                  </a:tcPr>
+                </a:tc>
+              </a:tr>
+              <a:tr h="310896">
+                <a:tc>
+                  <a:txBody>
+                    <a:bodyPr/>
+                    <a:lstStyle/>
+                    <a:p>
+                      <a:pPr algn="l" indent="0" marL="0">
+                        <a:buNone/>
+                      </a:pPr>
+                      <a:r>
+                        <a:rPr lang="en-US" sz="1100" b="1" dirty="0">
+                          <a:solidFill>
+                            <a:srgbClr val="2B2621"/>
+                          </a:solidFill>
+                          <a:latin typeface="Calibri" pitchFamily="34" charset="0"/>
+                          <a:ea typeface="Calibri" pitchFamily="34" charset="-122"/>
+                          <a:cs typeface="Calibri" pitchFamily="34" charset="-120"/>
+                        </a:rPr>
+                        <a:t>Mumbai · Lower Parel</a:t>
+                      </a:r>
+                      <a:endParaRPr lang="en-US" sz="1100" dirty="0">
+                        <a:latin typeface="Calibri" charset="0"/>
+                        <a:ea typeface="Calibri" charset="0"/>
+                        <a:cs typeface="Calibri" charset="0"/>
+                      </a:endParaRPr>
+                    </a:p>
+                  </a:txBody>
+                  <a:tcPr marL="91440" marR="91440" marT="45720" marB="45720" anchor="ctr">
+                    <a:lnL w="6350" cap="flat" cmpd="sng" algn="ctr">
+                      <a:solidFill>
+                        <a:srgbClr val="E6DECB"/>
+                      </a:solidFill>
+                      <a:prstDash val="solid"/>
+                      <a:round/>
+                      <a:headEnd type="none" w="med" len="med"/>
+                      <a:tailEnd type="none" w="med" len="med"/>
+                    </a:lnL>
+                    <a:lnR w="6350" cap="flat" cmpd="sng" algn="ctr">
+                      <a:solidFill>
+                        <a:srgbClr val="E6DECB"/>
+                      </a:solidFill>
+                      <a:prstDash val="solid"/>
+                      <a:round/>
+                      <a:headEnd type="none" w="med" len="med"/>
+                      <a:tailEnd type="none" w="med" len="med"/>
+                    </a:lnR>
+                    <a:lnT w="6350" cap="flat" cmpd="sng" algn="ctr">
+                      <a:solidFill>
+                        <a:srgbClr val="E6DECB"/>
+                      </a:solidFill>
+                      <a:prstDash val="solid"/>
+                      <a:round/>
+                      <a:headEnd type="none" w="med" len="med"/>
+                      <a:tailEnd type="none" w="med" len="med"/>
+                    </a:lnT>
+                    <a:lnB w="6350" cap="flat" cmpd="sng" algn="ctr">
+                      <a:solidFill>
+                        <a:srgbClr val="E6DECB"/>
+                      </a:solidFill>
+                      <a:prstDash val="solid"/>
+                      <a:round/>
+                      <a:headEnd type="none" w="med" len="med"/>
+                      <a:tailEnd type="none" w="med" len="med"/>
+                    </a:lnB>
+                    <a:solidFill>
+                      <a:srgbClr val="FFFFFF"/>
+                    </a:solidFill>
+                  </a:tcPr>
+                </a:tc>
+                <a:tc>
+                  <a:txBody>
+                    <a:bodyPr/>
+                    <a:lstStyle/>
+                    <a:p>
+                      <a:pPr algn="l" indent="0" marL="0">
+                        <a:buNone/>
+                      </a:pPr>
+                      <a:r>
+                        <a:rPr lang="en-US" sz="1100" dirty="0">
+                          <a:solidFill>
+                            <a:srgbClr val="2A2621"/>
+                          </a:solidFill>
+                          <a:latin typeface="Cambria" pitchFamily="34" charset="0"/>
+                          <a:ea typeface="Cambria" pitchFamily="34" charset="-122"/>
+                          <a:cs typeface="Cambria" pitchFamily="34" charset="-120"/>
+                        </a:rPr>
+                        <a:t>PVR Phoenix (Worli)</a:t>
+                      </a:r>
+                      <a:endParaRPr lang="en-US" sz="1100" dirty="0">
+                        <a:latin typeface="Cambria" charset="0"/>
+                        <a:ea typeface="Cambria" charset="0"/>
+                        <a:cs typeface="Cambria" charset="0"/>
+                      </a:endParaRPr>
+                    </a:p>
+                  </a:txBody>
+                  <a:tcPr marL="91440" marR="91440" marT="45720" marB="45720" anchor="ctr">
+                    <a:lnL w="6350" cap="flat" cmpd="sng" algn="ctr">
+                      <a:solidFill>
+                        <a:srgbClr val="E6DECB"/>
+                      </a:solidFill>
+                      <a:prstDash val="solid"/>
+                      <a:round/>
+                      <a:headEnd type="none" w="med" len="med"/>
+                      <a:tailEnd type="none" w="med" len="med"/>
+                    </a:lnL>
+                    <a:lnR w="6350" cap="flat" cmpd="sng" algn="ctr">
+                      <a:solidFill>
+                        <a:srgbClr val="E6DECB"/>
+                      </a:solidFill>
+                      <a:prstDash val="solid"/>
+                      <a:round/>
+                      <a:headEnd type="none" w="med" len="med"/>
+                      <a:tailEnd type="none" w="med" len="med"/>
+                    </a:lnR>
+                    <a:lnT w="6350" cap="flat" cmpd="sng" algn="ctr">
+                      <a:solidFill>
+                        <a:srgbClr val="E6DECB"/>
+                      </a:solidFill>
+                      <a:prstDash val="solid"/>
+                      <a:round/>
+                      <a:headEnd type="none" w="med" len="med"/>
+                      <a:tailEnd type="none" w="med" len="med"/>
+                    </a:lnT>
+                    <a:lnB w="6350" cap="flat" cmpd="sng" algn="ctr">
+                      <a:solidFill>
+                        <a:srgbClr val="E6DECB"/>
+                      </a:solidFill>
+                      <a:prstDash val="solid"/>
+                      <a:round/>
+                      <a:headEnd type="none" w="med" len="med"/>
+                      <a:tailEnd type="none" w="med" len="med"/>
+                    </a:lnB>
+                    <a:solidFill>
+                      <a:srgbClr val="FFFFFF"/>
+                    </a:solidFill>
+                  </a:tcPr>
+                </a:tc>
+                <a:tc>
+                  <a:txBody>
+                    <a:bodyPr/>
+                    <a:lstStyle/>
+                    <a:p>
+                      <a:pPr algn="ctr" indent="0" marL="0">
+                        <a:buNone/>
+                      </a:pPr>
+                      <a:r>
+                        <a:rPr lang="en-US" sz="1100" dirty="0">
+                          <a:solidFill>
+                            <a:srgbClr val="2A2621"/>
+                          </a:solidFill>
+                          <a:latin typeface="Calibri" pitchFamily="34" charset="0"/>
+                          <a:ea typeface="Calibri" pitchFamily="34" charset="-122"/>
+                          <a:cs typeface="Calibri" pitchFamily="34" charset="-120"/>
+                        </a:rPr>
+                        <a:t>7</a:t>
+                      </a:r>
+                      <a:endParaRPr lang="en-US" sz="1100" dirty="0">
+                        <a:latin typeface="Calibri" charset="0"/>
+                        <a:ea typeface="Calibri" charset="0"/>
+                        <a:cs typeface="Calibri" charset="0"/>
+                      </a:endParaRPr>
+                    </a:p>
+                  </a:txBody>
+                  <a:tcPr marL="91440" marR="91440" marT="45720" marB="45720" anchor="ctr">
+                    <a:lnL w="6350" cap="flat" cmpd="sng" algn="ctr">
+                      <a:solidFill>
+                        <a:srgbClr val="E6DECB"/>
+                      </a:solidFill>
+                      <a:prstDash val="solid"/>
+                      <a:round/>
+                      <a:headEnd type="none" w="med" len="med"/>
+                      <a:tailEnd type="none" w="med" len="med"/>
+                    </a:lnL>
+                    <a:lnR w="6350" cap="flat" cmpd="sng" algn="ctr">
+                      <a:solidFill>
+                        <a:srgbClr val="E6DECB"/>
+                      </a:solidFill>
+                      <a:prstDash val="solid"/>
+                      <a:round/>
+                      <a:headEnd type="none" w="med" len="med"/>
+                      <a:tailEnd type="none" w="med" len="med"/>
+                    </a:lnR>
+                    <a:lnT w="6350" cap="flat" cmpd="sng" algn="ctr">
+                      <a:solidFill>
+                        <a:srgbClr val="E6DECB"/>
+                      </a:solidFill>
+                      <a:prstDash val="solid"/>
+                      <a:round/>
+                      <a:headEnd type="none" w="med" len="med"/>
+                      <a:tailEnd type="none" w="med" len="med"/>
+                    </a:lnT>
+                    <a:lnB w="6350" cap="flat" cmpd="sng" algn="ctr">
+                      <a:solidFill>
+                        <a:srgbClr val="E6DECB"/>
+                      </a:solidFill>
+                      <a:prstDash val="solid"/>
+                      <a:round/>
+                      <a:headEnd type="none" w="med" len="med"/>
+                      <a:tailEnd type="none" w="med" len="med"/>
+                    </a:lnB>
+                    <a:solidFill>
+                      <a:srgbClr val="FFFFFF"/>
+                    </a:solidFill>
+                  </a:tcPr>
+                </a:tc>
+                <a:tc>
+                  <a:txBody>
+                    <a:bodyPr/>
+                    <a:lstStyle/>
+                    <a:p>
+                      <a:pPr algn="ctr" indent="0" marL="0">
+                        <a:buNone/>
+                      </a:pPr>
+                      <a:r>
+                        <a:rPr lang="en-US" sz="1100" dirty="0">
+                          <a:solidFill>
+                            <a:srgbClr val="2A2621"/>
+                          </a:solidFill>
+                          <a:latin typeface="Calibri" pitchFamily="34" charset="0"/>
+                          <a:ea typeface="Calibri" pitchFamily="34" charset="-122"/>
+                          <a:cs typeface="Calibri" pitchFamily="34" charset="-120"/>
+                        </a:rPr>
+                        <a:t>1,275</a:t>
+                      </a:r>
+                      <a:endParaRPr lang="en-US" sz="1100" dirty="0">
+                        <a:latin typeface="Calibri" charset="0"/>
+                        <a:ea typeface="Calibri" charset="0"/>
+                        <a:cs typeface="Calibri" charset="0"/>
+                      </a:endParaRPr>
+                    </a:p>
+                  </a:txBody>
+                  <a:tcPr marL="91440" marR="91440" marT="45720" marB="45720" anchor="ctr">
+                    <a:lnL w="6350" cap="flat" cmpd="sng" algn="ctr">
+                      <a:solidFill>
+                        <a:srgbClr val="E6DECB"/>
+                      </a:solidFill>
+                      <a:prstDash val="solid"/>
+                      <a:round/>
+                      <a:headEnd type="none" w="med" len="med"/>
+                      <a:tailEnd type="none" w="med" len="med"/>
+                    </a:lnL>
+                    <a:lnR w="6350" cap="flat" cmpd="sng" algn="ctr">
+                      <a:solidFill>
+                        <a:srgbClr val="E6DECB"/>
+                      </a:solidFill>
+                      <a:prstDash val="solid"/>
+                      <a:round/>
+                      <a:headEnd type="none" w="med" len="med"/>
+                      <a:tailEnd type="none" w="med" len="med"/>
+                    </a:lnR>
+                    <a:lnT w="6350" cap="flat" cmpd="sng" algn="ctr">
+                      <a:solidFill>
+                        <a:srgbClr val="E6DECB"/>
+                      </a:solidFill>
+                      <a:prstDash val="solid"/>
+                      <a:round/>
+                      <a:headEnd type="none" w="med" len="med"/>
+                      <a:tailEnd type="none" w="med" len="med"/>
+                    </a:lnT>
+                    <a:lnB w="6350" cap="flat" cmpd="sng" algn="ctr">
+                      <a:solidFill>
+                        <a:srgbClr val="E6DECB"/>
+                      </a:solidFill>
+                      <a:prstDash val="solid"/>
+                      <a:round/>
+                      <a:headEnd type="none" w="med" len="med"/>
+                      <a:tailEnd type="none" w="med" len="med"/>
+                    </a:lnB>
+                    <a:solidFill>
+                      <a:srgbClr val="FFFFFF"/>
+                    </a:solidFill>
+                  </a:tcPr>
+                </a:tc>
+                <a:tc>
+                  <a:txBody>
+                    <a:bodyPr/>
+                    <a:lstStyle/>
+                    <a:p>
+                      <a:pPr algn="ctr" indent="0" marL="0">
+                        <a:buNone/>
+                      </a:pPr>
+                      <a:r>
+                        <a:rPr lang="en-US" sz="1100" dirty="0">
+                          <a:solidFill>
+                            <a:srgbClr val="2A2621"/>
+                          </a:solidFill>
+                          <a:latin typeface="Calibri" pitchFamily="34" charset="0"/>
+                          <a:ea typeface="Calibri" pitchFamily="34" charset="-122"/>
+                          <a:cs typeface="Calibri" pitchFamily="34" charset="-120"/>
+                        </a:rPr>
+                        <a:t>8×8</a:t>
+                      </a:r>
+                      <a:endParaRPr lang="en-US" sz="1100" dirty="0">
+                        <a:latin typeface="Calibri" charset="0"/>
+                        <a:ea typeface="Calibri" charset="0"/>
+                        <a:cs typeface="Calibri" charset="0"/>
+                      </a:endParaRPr>
+                    </a:p>
+                  </a:txBody>
+                  <a:tcPr marL="91440" marR="91440" marT="45720" marB="45720" anchor="ctr">
+                    <a:lnL w="6350" cap="flat" cmpd="sng" algn="ctr">
+                      <a:solidFill>
+                        <a:srgbClr val="E6DECB"/>
+                      </a:solidFill>
+                      <a:prstDash val="solid"/>
+                      <a:round/>
+                      <a:headEnd type="none" w="med" len="med"/>
+                      <a:tailEnd type="none" w="med" len="med"/>
+                    </a:lnL>
+                    <a:lnR w="6350" cap="flat" cmpd="sng" algn="ctr">
+                      <a:solidFill>
+                        <a:srgbClr val="E6DECB"/>
+                      </a:solidFill>
+                      <a:prstDash val="solid"/>
+                      <a:round/>
+                      <a:headEnd type="none" w="med" len="med"/>
+                      <a:tailEnd type="none" w="med" len="med"/>
+                    </a:lnR>
+                    <a:lnT w="6350" cap="flat" cmpd="sng" algn="ctr">
+                      <a:solidFill>
+                        <a:srgbClr val="E6DECB"/>
+                      </a:solidFill>
+                      <a:prstDash val="solid"/>
+                      <a:round/>
+                      <a:headEnd type="none" w="med" len="med"/>
+                      <a:tailEnd type="none" w="med" len="med"/>
+                    </a:lnT>
+                    <a:lnB w="6350" cap="flat" cmpd="sng" algn="ctr">
+                      <a:solidFill>
+                        <a:srgbClr val="E6DECB"/>
+                      </a:solidFill>
+                      <a:prstDash val="solid"/>
+                      <a:round/>
+                      <a:headEnd type="none" w="med" len="med"/>
+                      <a:tailEnd type="none" w="med" len="med"/>
+                    </a:lnB>
+                    <a:solidFill>
+                      <a:srgbClr val="FFFFFF"/>
+                    </a:solidFill>
+                  </a:tcPr>
+                </a:tc>
+              </a:tr>
+              <a:tr h="310896">
+                <a:tc>
+                  <a:txBody>
+                    <a:bodyPr/>
+                    <a:lstStyle/>
+                    <a:p>
+                      <a:pPr algn="l" indent="0" marL="0">
+                        <a:buNone/>
+                      </a:pPr>
+                      <a:r>
+                        <a:rPr lang="en-US" sz="1100" b="1" dirty="0">
+                          <a:solidFill>
+                            <a:srgbClr val="2B2621"/>
+                          </a:solidFill>
+                          <a:latin typeface="Calibri" pitchFamily="34" charset="0"/>
+                          <a:ea typeface="Calibri" pitchFamily="34" charset="-122"/>
+                          <a:cs typeface="Calibri" pitchFamily="34" charset="-120"/>
+                        </a:rPr>
+                        <a:t>Mumbai · BKC</a:t>
+                      </a:r>
+                      <a:endParaRPr lang="en-US" sz="1100" dirty="0">
+                        <a:latin typeface="Calibri" charset="0"/>
+                        <a:ea typeface="Calibri" charset="0"/>
+                        <a:cs typeface="Calibri" charset="0"/>
+                      </a:endParaRPr>
+                    </a:p>
+                  </a:txBody>
+                  <a:tcPr marL="91440" marR="91440" marT="45720" marB="45720" anchor="ctr">
+                    <a:lnL w="6350" cap="flat" cmpd="sng" algn="ctr">
+                      <a:solidFill>
+                        <a:srgbClr val="E6DECB"/>
+                      </a:solidFill>
+                      <a:prstDash val="solid"/>
+                      <a:round/>
+                      <a:headEnd type="none" w="med" len="med"/>
+                      <a:tailEnd type="none" w="med" len="med"/>
+                    </a:lnL>
+                    <a:lnR w="6350" cap="flat" cmpd="sng" algn="ctr">
+                      <a:solidFill>
+                        <a:srgbClr val="E6DECB"/>
+                      </a:solidFill>
+                      <a:prstDash val="solid"/>
+                      <a:round/>
+                      <a:headEnd type="none" w="med" len="med"/>
+                      <a:tailEnd type="none" w="med" len="med"/>
+                    </a:lnR>
+                    <a:lnT w="6350" cap="flat" cmpd="sng" algn="ctr">
+                      <a:solidFill>
+                        <a:srgbClr val="E6DECB"/>
+                      </a:solidFill>
+                      <a:prstDash val="solid"/>
+                      <a:round/>
+                      <a:headEnd type="none" w="med" len="med"/>
+                      <a:tailEnd type="none" w="med" len="med"/>
+                    </a:lnT>
+                    <a:lnB w="6350" cap="flat" cmpd="sng" algn="ctr">
+                      <a:solidFill>
+                        <a:srgbClr val="E6DECB"/>
+                      </a:solidFill>
+                      <a:prstDash val="solid"/>
+                      <a:round/>
+                      <a:headEnd type="none" w="med" len="med"/>
+                      <a:tailEnd type="none" w="med" len="med"/>
+                    </a:lnB>
+                    <a:solidFill>
+                      <a:srgbClr val="F7F3EA"/>
+                    </a:solidFill>
+                  </a:tcPr>
+                </a:tc>
+                <a:tc>
+                  <a:txBody>
+                    <a:bodyPr/>
+                    <a:lstStyle/>
+                    <a:p>
+                      <a:pPr algn="l" indent="0" marL="0">
+                        <a:buNone/>
+                      </a:pPr>
+                      <a:r>
+                        <a:rPr lang="en-US" sz="1100" dirty="0">
+                          <a:solidFill>
+                            <a:srgbClr val="2A2621"/>
+                          </a:solidFill>
+                          <a:latin typeface="Cambria" pitchFamily="34" charset="0"/>
+                          <a:ea typeface="Cambria" pitchFamily="34" charset="-122"/>
+                          <a:cs typeface="Cambria" pitchFamily="34" charset="-120"/>
+                        </a:rPr>
+                        <a:t>PVR Maison BKC</a:t>
+                      </a:r>
+                      <a:endParaRPr lang="en-US" sz="1100" dirty="0">
+                        <a:latin typeface="Cambria" charset="0"/>
+                        <a:ea typeface="Cambria" charset="0"/>
+                        <a:cs typeface="Cambria" charset="0"/>
+                      </a:endParaRPr>
+                    </a:p>
+                  </a:txBody>
+                  <a:tcPr marL="91440" marR="91440" marT="45720" marB="45720" anchor="ctr">
+                    <a:lnL w="6350" cap="flat" cmpd="sng" algn="ctr">
+                      <a:solidFill>
+                        <a:srgbClr val="E6DECB"/>
+                      </a:solidFill>
+                      <a:prstDash val="solid"/>
+                      <a:round/>
+                      <a:headEnd type="none" w="med" len="med"/>
+                      <a:tailEnd type="none" w="med" len="med"/>
+                    </a:lnL>
+                    <a:lnR w="6350" cap="flat" cmpd="sng" algn="ctr">
+                      <a:solidFill>
+                        <a:srgbClr val="E6DECB"/>
+                      </a:solidFill>
+                      <a:prstDash val="solid"/>
+                      <a:round/>
+                      <a:headEnd type="none" w="med" len="med"/>
+                      <a:tailEnd type="none" w="med" len="med"/>
+                    </a:lnR>
+                    <a:lnT w="6350" cap="flat" cmpd="sng" algn="ctr">
+                      <a:solidFill>
+                        <a:srgbClr val="E6DECB"/>
+                      </a:solidFill>
+                      <a:prstDash val="solid"/>
+                      <a:round/>
+                      <a:headEnd type="none" w="med" len="med"/>
+                      <a:tailEnd type="none" w="med" len="med"/>
+                    </a:lnT>
+                    <a:lnB w="6350" cap="flat" cmpd="sng" algn="ctr">
+                      <a:solidFill>
+                        <a:srgbClr val="E6DECB"/>
+                      </a:solidFill>
+                      <a:prstDash val="solid"/>
+                      <a:round/>
+                      <a:headEnd type="none" w="med" len="med"/>
+                      <a:tailEnd type="none" w="med" len="med"/>
+                    </a:lnB>
+                    <a:solidFill>
+                      <a:srgbClr val="F7F3EA"/>
+                    </a:solidFill>
+                  </a:tcPr>
+                </a:tc>
+                <a:tc>
+                  <a:txBody>
+                    <a:bodyPr/>
+                    <a:lstStyle/>
+                    <a:p>
+                      <a:pPr algn="ctr" indent="0" marL="0">
+                        <a:buNone/>
+                      </a:pPr>
+                      <a:r>
+                        <a:rPr lang="en-US" sz="1100" dirty="0">
+                          <a:solidFill>
+                            <a:srgbClr val="2A2621"/>
+                          </a:solidFill>
+                          <a:latin typeface="Calibri" pitchFamily="34" charset="0"/>
+                          <a:ea typeface="Calibri" pitchFamily="34" charset="-122"/>
+                          <a:cs typeface="Calibri" pitchFamily="34" charset="-120"/>
+                        </a:rPr>
+                        <a:t>6</a:t>
+                      </a:r>
+                      <a:endParaRPr lang="en-US" sz="1100" dirty="0">
+                        <a:latin typeface="Calibri" charset="0"/>
+                        <a:ea typeface="Calibri" charset="0"/>
+                        <a:cs typeface="Calibri" charset="0"/>
+                      </a:endParaRPr>
+                    </a:p>
+                  </a:txBody>
+                  <a:tcPr marL="91440" marR="91440" marT="45720" marB="45720" anchor="ctr">
+                    <a:lnL w="6350" cap="flat" cmpd="sng" algn="ctr">
+                      <a:solidFill>
+                        <a:srgbClr val="E6DECB"/>
+                      </a:solidFill>
+                      <a:prstDash val="solid"/>
+                      <a:round/>
+                      <a:headEnd type="none" w="med" len="med"/>
+                      <a:tailEnd type="none" w="med" len="med"/>
+                    </a:lnL>
+                    <a:lnR w="6350" cap="flat" cmpd="sng" algn="ctr">
+                      <a:solidFill>
+                        <a:srgbClr val="E6DECB"/>
+                      </a:solidFill>
+                      <a:prstDash val="solid"/>
+                      <a:round/>
+                      <a:headEnd type="none" w="med" len="med"/>
+                      <a:tailEnd type="none" w="med" len="med"/>
+                    </a:lnR>
+                    <a:lnT w="6350" cap="flat" cmpd="sng" algn="ctr">
+                      <a:solidFill>
+                        <a:srgbClr val="E6DECB"/>
+                      </a:solidFill>
+                      <a:prstDash val="solid"/>
+                      <a:round/>
+                      <a:headEnd type="none" w="med" len="med"/>
+                      <a:tailEnd type="none" w="med" len="med"/>
+                    </a:lnT>
+                    <a:lnB w="6350" cap="flat" cmpd="sng" algn="ctr">
+                      <a:solidFill>
+                        <a:srgbClr val="E6DECB"/>
+                      </a:solidFill>
+                      <a:prstDash val="solid"/>
+                      <a:round/>
+                      <a:headEnd type="none" w="med" len="med"/>
+                      <a:tailEnd type="none" w="med" len="med"/>
+                    </a:lnB>
+                    <a:solidFill>
+                      <a:srgbClr val="F7F3EA"/>
+                    </a:solidFill>
+                  </a:tcPr>
+                </a:tc>
+                <a:tc>
+                  <a:txBody>
+                    <a:bodyPr/>
+                    <a:lstStyle/>
+                    <a:p>
+                      <a:pPr algn="ctr" indent="0" marL="0">
+                        <a:buNone/>
+                      </a:pPr>
+                      <a:r>
+                        <a:rPr lang="en-US" sz="1100" dirty="0">
+                          <a:solidFill>
+                            <a:srgbClr val="2A2621"/>
+                          </a:solidFill>
+                          <a:latin typeface="Calibri" pitchFamily="34" charset="0"/>
+                          <a:ea typeface="Calibri" pitchFamily="34" charset="-122"/>
+                          <a:cs typeface="Calibri" pitchFamily="34" charset="-120"/>
+                        </a:rPr>
+                        <a:t>882</a:t>
+                      </a:r>
+                      <a:endParaRPr lang="en-US" sz="1100" dirty="0">
+                        <a:latin typeface="Calibri" charset="0"/>
+                        <a:ea typeface="Calibri" charset="0"/>
+                        <a:cs typeface="Calibri" charset="0"/>
+                      </a:endParaRPr>
+                    </a:p>
+                  </a:txBody>
+                  <a:tcPr marL="91440" marR="91440" marT="45720" marB="45720" anchor="ctr">
+                    <a:lnL w="6350" cap="flat" cmpd="sng" algn="ctr">
+                      <a:solidFill>
+                        <a:srgbClr val="E6DECB"/>
+                      </a:solidFill>
+                      <a:prstDash val="solid"/>
+                      <a:round/>
+                      <a:headEnd type="none" w="med" len="med"/>
+                      <a:tailEnd type="none" w="med" len="med"/>
+                    </a:lnL>
+                    <a:lnR w="6350" cap="flat" cmpd="sng" algn="ctr">
+                      <a:solidFill>
+                        <a:srgbClr val="E6DECB"/>
+                      </a:solidFill>
+                      <a:prstDash val="solid"/>
+                      <a:round/>
+                      <a:headEnd type="none" w="med" len="med"/>
+                      <a:tailEnd type="none" w="med" len="med"/>
+                    </a:lnR>
+                    <a:lnT w="6350" cap="flat" cmpd="sng" algn="ctr">
+                      <a:solidFill>
+                        <a:srgbClr val="E6DECB"/>
+                      </a:solidFill>
+                      <a:prstDash val="solid"/>
+                      <a:round/>
+                      <a:headEnd type="none" w="med" len="med"/>
+                      <a:tailEnd type="none" w="med" len="med"/>
+                    </a:lnT>
+                    <a:lnB w="6350" cap="flat" cmpd="sng" algn="ctr">
+                      <a:solidFill>
+                        <a:srgbClr val="E6DECB"/>
+                      </a:solidFill>
+                      <a:prstDash val="solid"/>
+                      <a:round/>
+                      <a:headEnd type="none" w="med" len="med"/>
+                      <a:tailEnd type="none" w="med" len="med"/>
+                    </a:lnB>
+                    <a:solidFill>
+                      <a:srgbClr val="F7F3EA"/>
+                    </a:solidFill>
+                  </a:tcPr>
+                </a:tc>
+                <a:tc>
+                  <a:txBody>
+                    <a:bodyPr/>
+                    <a:lstStyle/>
+                    <a:p>
+                      <a:pPr algn="ctr" indent="0" marL="0">
+                        <a:buNone/>
+                      </a:pPr>
+                      <a:r>
+                        <a:rPr lang="en-US" sz="1100" dirty="0">
+                          <a:solidFill>
+                            <a:srgbClr val="2A2621"/>
+                          </a:solidFill>
+                          <a:latin typeface="Calibri" pitchFamily="34" charset="0"/>
+                          <a:ea typeface="Calibri" pitchFamily="34" charset="-122"/>
+                          <a:cs typeface="Calibri" pitchFamily="34" charset="-120"/>
+                        </a:rPr>
+                        <a:t>6×6</a:t>
+                      </a:r>
+                      <a:endParaRPr lang="en-US" sz="1100" dirty="0">
+                        <a:latin typeface="Calibri" charset="0"/>
+                        <a:ea typeface="Calibri" charset="0"/>
+                        <a:cs typeface="Calibri" charset="0"/>
+                      </a:endParaRPr>
+                    </a:p>
+                  </a:txBody>
+                  <a:tcPr marL="91440" marR="91440" marT="45720" marB="45720" anchor="ctr">
+                    <a:lnL w="6350" cap="flat" cmpd="sng" algn="ctr">
+                      <a:solidFill>
+                        <a:srgbClr val="E6DECB"/>
+                      </a:solidFill>
+                      <a:prstDash val="solid"/>
+                      <a:round/>
+                      <a:headEnd type="none" w="med" len="med"/>
+                      <a:tailEnd type="none" w="med" len="med"/>
+                    </a:lnL>
+                    <a:lnR w="6350" cap="flat" cmpd="sng" algn="ctr">
+                      <a:solidFill>
+                        <a:srgbClr val="E6DECB"/>
+                      </a:solidFill>
+                      <a:prstDash val="solid"/>
+                      <a:round/>
+                      <a:headEnd type="none" w="med" len="med"/>
+                      <a:tailEnd type="none" w="med" len="med"/>
+                    </a:lnR>
+                    <a:lnT w="6350" cap="flat" cmpd="sng" algn="ctr">
+                      <a:solidFill>
+                        <a:srgbClr val="E6DECB"/>
+                      </a:solidFill>
+                      <a:prstDash val="solid"/>
+                      <a:round/>
+                      <a:headEnd type="none" w="med" len="med"/>
+                      <a:tailEnd type="none" w="med" len="med"/>
+                    </a:lnT>
+                    <a:lnB w="6350" cap="flat" cmpd="sng" algn="ctr">
+                      <a:solidFill>
+                        <a:srgbClr val="E6DECB"/>
+                      </a:solidFill>
+                      <a:prstDash val="solid"/>
+                      <a:round/>
+                      <a:headEnd type="none" w="med" len="med"/>
+                      <a:tailEnd type="none" w="med" len="med"/>
+                    </a:lnB>
+                    <a:solidFill>
+                      <a:srgbClr val="F7F3EA"/>
+                    </a:solidFill>
+                  </a:tcPr>
+                </a:tc>
+              </a:tr>
+              <a:tr h="310896">
+                <a:tc>
+                  <a:txBody>
+                    <a:bodyPr/>
+                    <a:lstStyle/>
+                    <a:p>
+                      <a:pPr algn="l" indent="0" marL="0">
+                        <a:buNone/>
+                      </a:pPr>
+                      <a:r>
+                        <a:rPr lang="en-US" sz="1100" b="1" dirty="0">
+                          <a:solidFill>
+                            <a:srgbClr val="2B2621"/>
+                          </a:solidFill>
+                          <a:latin typeface="Calibri" pitchFamily="34" charset="0"/>
+                          <a:ea typeface="Calibri" pitchFamily="34" charset="-122"/>
+                          <a:cs typeface="Calibri" pitchFamily="34" charset="-120"/>
+                        </a:rPr>
+                        <a:t>Ahmedabad</a:t>
+                      </a:r>
+                      <a:endParaRPr lang="en-US" sz="1100" dirty="0">
+                        <a:latin typeface="Calibri" charset="0"/>
+                        <a:ea typeface="Calibri" charset="0"/>
+                        <a:cs typeface="Calibri" charset="0"/>
+                      </a:endParaRPr>
+                    </a:p>
+                  </a:txBody>
+                  <a:tcPr marL="91440" marR="91440" marT="45720" marB="45720" anchor="ctr">
+                    <a:lnL w="6350" cap="flat" cmpd="sng" algn="ctr">
+                      <a:solidFill>
+                        <a:srgbClr val="E6DECB"/>
+                      </a:solidFill>
+                      <a:prstDash val="solid"/>
+                      <a:round/>
+                      <a:headEnd type="none" w="med" len="med"/>
+                      <a:tailEnd type="none" w="med" len="med"/>
+                    </a:lnL>
+                    <a:lnR w="6350" cap="flat" cmpd="sng" algn="ctr">
+                      <a:solidFill>
+                        <a:srgbClr val="E6DECB"/>
+                      </a:solidFill>
+                      <a:prstDash val="solid"/>
+                      <a:round/>
+                      <a:headEnd type="none" w="med" len="med"/>
+                      <a:tailEnd type="none" w="med" len="med"/>
+                    </a:lnR>
+                    <a:lnT w="6350" cap="flat" cmpd="sng" algn="ctr">
+                      <a:solidFill>
+                        <a:srgbClr val="E6DECB"/>
+                      </a:solidFill>
+                      <a:prstDash val="solid"/>
+                      <a:round/>
+                      <a:headEnd type="none" w="med" len="med"/>
+                      <a:tailEnd type="none" w="med" len="med"/>
+                    </a:lnT>
+                    <a:lnB w="6350" cap="flat" cmpd="sng" algn="ctr">
+                      <a:solidFill>
+                        <a:srgbClr val="E6DECB"/>
+                      </a:solidFill>
+                      <a:prstDash val="solid"/>
+                      <a:round/>
+                      <a:headEnd type="none" w="med" len="med"/>
+                      <a:tailEnd type="none" w="med" len="med"/>
+                    </a:lnB>
+                    <a:solidFill>
+                      <a:srgbClr val="FFFFFF"/>
+                    </a:solidFill>
+                  </a:tcPr>
+                </a:tc>
+                <a:tc>
+                  <a:txBody>
+                    <a:bodyPr/>
+                    <a:lstStyle/>
+                    <a:p>
+                      <a:pPr algn="l" indent="0" marL="0">
+                        <a:buNone/>
+                      </a:pPr>
+                      <a:r>
+                        <a:rPr lang="en-US" sz="1100" dirty="0">
+                          <a:solidFill>
+                            <a:srgbClr val="2A2621"/>
+                          </a:solidFill>
+                          <a:latin typeface="Cambria" pitchFamily="34" charset="0"/>
+                          <a:ea typeface="Cambria" pitchFamily="34" charset="-122"/>
+                          <a:cs typeface="Cambria" pitchFamily="34" charset="-120"/>
+                        </a:rPr>
+                        <a:t>PVR Palladium</a:t>
+                      </a:r>
+                      <a:endParaRPr lang="en-US" sz="1100" dirty="0">
+                        <a:latin typeface="Cambria" charset="0"/>
+                        <a:ea typeface="Cambria" charset="0"/>
+                        <a:cs typeface="Cambria" charset="0"/>
+                      </a:endParaRPr>
+                    </a:p>
+                  </a:txBody>
+                  <a:tcPr marL="91440" marR="91440" marT="45720" marB="45720" anchor="ctr">
+                    <a:lnL w="6350" cap="flat" cmpd="sng" algn="ctr">
+                      <a:solidFill>
+                        <a:srgbClr val="E6DECB"/>
+                      </a:solidFill>
+                      <a:prstDash val="solid"/>
+                      <a:round/>
+                      <a:headEnd type="none" w="med" len="med"/>
+                      <a:tailEnd type="none" w="med" len="med"/>
+                    </a:lnL>
+                    <a:lnR w="6350" cap="flat" cmpd="sng" algn="ctr">
+                      <a:solidFill>
+                        <a:srgbClr val="E6DECB"/>
+                      </a:solidFill>
+                      <a:prstDash val="solid"/>
+                      <a:round/>
+                      <a:headEnd type="none" w="med" len="med"/>
+                      <a:tailEnd type="none" w="med" len="med"/>
+                    </a:lnR>
+                    <a:lnT w="6350" cap="flat" cmpd="sng" algn="ctr">
+                      <a:solidFill>
+                        <a:srgbClr val="E6DECB"/>
+                      </a:solidFill>
+                      <a:prstDash val="solid"/>
+                      <a:round/>
+                      <a:headEnd type="none" w="med" len="med"/>
+                      <a:tailEnd type="none" w="med" len="med"/>
+                    </a:lnT>
+                    <a:lnB w="6350" cap="flat" cmpd="sng" algn="ctr">
+                      <a:solidFill>
+                        <a:srgbClr val="E6DECB"/>
+                      </a:solidFill>
+                      <a:prstDash val="solid"/>
+                      <a:round/>
+                      <a:headEnd type="none" w="med" len="med"/>
+                      <a:tailEnd type="none" w="med" len="med"/>
+                    </a:lnB>
+                    <a:solidFill>
+                      <a:srgbClr val="FFFFFF"/>
+                    </a:solidFill>
+                  </a:tcPr>
+                </a:tc>
+                <a:tc>
+                  <a:txBody>
+                    <a:bodyPr/>
+                    <a:lstStyle/>
+                    <a:p>
+                      <a:pPr algn="ctr" indent="0" marL="0">
+                        <a:buNone/>
+                      </a:pPr>
+                      <a:r>
+                        <a:rPr lang="en-US" sz="1100" dirty="0">
+                          <a:solidFill>
+                            <a:srgbClr val="2A2621"/>
+                          </a:solidFill>
+                          <a:latin typeface="Calibri" pitchFamily="34" charset="0"/>
+                          <a:ea typeface="Calibri" pitchFamily="34" charset="-122"/>
+                          <a:cs typeface="Calibri" pitchFamily="34" charset="-120"/>
+                        </a:rPr>
+                        <a:t>9</a:t>
+                      </a:r>
+                      <a:endParaRPr lang="en-US" sz="1100" dirty="0">
+                        <a:latin typeface="Calibri" charset="0"/>
+                        <a:ea typeface="Calibri" charset="0"/>
+                        <a:cs typeface="Calibri" charset="0"/>
+                      </a:endParaRPr>
+                    </a:p>
+                  </a:txBody>
+                  <a:tcPr marL="91440" marR="91440" marT="45720" marB="45720" anchor="ctr">
+                    <a:lnL w="6350" cap="flat" cmpd="sng" algn="ctr">
+                      <a:solidFill>
+                        <a:srgbClr val="E6DECB"/>
+                      </a:solidFill>
+                      <a:prstDash val="solid"/>
+                      <a:round/>
+                      <a:headEnd type="none" w="med" len="med"/>
+                      <a:tailEnd type="none" w="med" len="med"/>
+                    </a:lnL>
+                    <a:lnR w="6350" cap="flat" cmpd="sng" algn="ctr">
+                      <a:solidFill>
+                        <a:srgbClr val="E6DECB"/>
+                      </a:solidFill>
+                      <a:prstDash val="solid"/>
+                      <a:round/>
+                      <a:headEnd type="none" w="med" len="med"/>
+                      <a:tailEnd type="none" w="med" len="med"/>
+                    </a:lnR>
+                    <a:lnT w="6350" cap="flat" cmpd="sng" algn="ctr">
+                      <a:solidFill>
+                        <a:srgbClr val="E6DECB"/>
+                      </a:solidFill>
+                      <a:prstDash val="solid"/>
+                      <a:round/>
+                      <a:headEnd type="none" w="med" len="med"/>
+                      <a:tailEnd type="none" w="med" len="med"/>
+                    </a:lnT>
+                    <a:lnB w="6350" cap="flat" cmpd="sng" algn="ctr">
+                      <a:solidFill>
+                        <a:srgbClr val="E6DECB"/>
+                      </a:solidFill>
+                      <a:prstDash val="solid"/>
+                      <a:round/>
+                      <a:headEnd type="none" w="med" len="med"/>
+                      <a:tailEnd type="none" w="med" len="med"/>
+                    </a:lnB>
+                    <a:solidFill>
+                      <a:srgbClr val="FFFFFF"/>
+                    </a:solidFill>
+                  </a:tcPr>
+                </a:tc>
+                <a:tc>
+                  <a:txBody>
+                    <a:bodyPr/>
+                    <a:lstStyle/>
+                    <a:p>
+                      <a:pPr algn="ctr" indent="0" marL="0">
+                        <a:buNone/>
+                      </a:pPr>
+                      <a:r>
+                        <a:rPr lang="en-US" sz="1100" dirty="0">
+                          <a:solidFill>
+                            <a:srgbClr val="2A2621"/>
+                          </a:solidFill>
+                          <a:latin typeface="Calibri" pitchFamily="34" charset="0"/>
+                          <a:ea typeface="Calibri" pitchFamily="34" charset="-122"/>
+                          <a:cs typeface="Calibri" pitchFamily="34" charset="-120"/>
+                        </a:rPr>
+                        <a:t>1,283</a:t>
+                      </a:r>
+                      <a:endParaRPr lang="en-US" sz="1100" dirty="0">
+                        <a:latin typeface="Calibri" charset="0"/>
+                        <a:ea typeface="Calibri" charset="0"/>
+                        <a:cs typeface="Calibri" charset="0"/>
+                      </a:endParaRPr>
+                    </a:p>
+                  </a:txBody>
+                  <a:tcPr marL="91440" marR="91440" marT="45720" marB="45720" anchor="ctr">
+                    <a:lnL w="6350" cap="flat" cmpd="sng" algn="ctr">
+                      <a:solidFill>
+                        <a:srgbClr val="E6DECB"/>
+                      </a:solidFill>
+                      <a:prstDash val="solid"/>
+                      <a:round/>
+                      <a:headEnd type="none" w="med" len="med"/>
+                      <a:tailEnd type="none" w="med" len="med"/>
+                    </a:lnL>
+                    <a:lnR w="6350" cap="flat" cmpd="sng" algn="ctr">
+                      <a:solidFill>
+                        <a:srgbClr val="E6DECB"/>
+                      </a:solidFill>
+                      <a:prstDash val="solid"/>
+                      <a:round/>
+                      <a:headEnd type="none" w="med" len="med"/>
+                      <a:tailEnd type="none" w="med" len="med"/>
+                    </a:lnR>
+                    <a:lnT w="6350" cap="flat" cmpd="sng" algn="ctr">
+                      <a:solidFill>
+                        <a:srgbClr val="E6DECB"/>
+                      </a:solidFill>
+                      <a:prstDash val="solid"/>
+                      <a:round/>
+                      <a:headEnd type="none" w="med" len="med"/>
+                      <a:tailEnd type="none" w="med" len="med"/>
+                    </a:lnT>
+                    <a:lnB w="6350" cap="flat" cmpd="sng" algn="ctr">
+                      <a:solidFill>
+                        <a:srgbClr val="E6DECB"/>
+                      </a:solidFill>
+                      <a:prstDash val="solid"/>
+                      <a:round/>
+                      <a:headEnd type="none" w="med" len="med"/>
+                      <a:tailEnd type="none" w="med" len="med"/>
+                    </a:lnB>
+                    <a:solidFill>
+                      <a:srgbClr val="FFFFFF"/>
+                    </a:solidFill>
+                  </a:tcPr>
+                </a:tc>
+                <a:tc>
+                  <a:txBody>
+                    <a:bodyPr/>
+                    <a:lstStyle/>
+                    <a:p>
+                      <a:pPr algn="ctr" indent="0" marL="0">
+                        <a:buNone/>
+                      </a:pPr>
+                      <a:r>
+                        <a:rPr lang="en-US" sz="1100" dirty="0">
+                          <a:solidFill>
+                            <a:srgbClr val="2A2621"/>
+                          </a:solidFill>
+                          <a:latin typeface="Calibri" pitchFamily="34" charset="0"/>
+                          <a:ea typeface="Calibri" pitchFamily="34" charset="-122"/>
+                          <a:cs typeface="Calibri" pitchFamily="34" charset="-120"/>
+                        </a:rPr>
+                        <a:t>8×8</a:t>
+                      </a:r>
+                      <a:endParaRPr lang="en-US" sz="1100" dirty="0">
+                        <a:latin typeface="Calibri" charset="0"/>
+                        <a:ea typeface="Calibri" charset="0"/>
+                        <a:cs typeface="Calibri" charset="0"/>
+                      </a:endParaRPr>
+                    </a:p>
+                  </a:txBody>
+                  <a:tcPr marL="91440" marR="91440" marT="45720" marB="45720" anchor="ctr">
+                    <a:lnL w="6350" cap="flat" cmpd="sng" algn="ctr">
+                      <a:solidFill>
+                        <a:srgbClr val="E6DECB"/>
+                      </a:solidFill>
+                      <a:prstDash val="solid"/>
+                      <a:round/>
+                      <a:headEnd type="none" w="med" len="med"/>
+                      <a:tailEnd type="none" w="med" len="med"/>
+                    </a:lnL>
+                    <a:lnR w="6350" cap="flat" cmpd="sng" algn="ctr">
+                      <a:solidFill>
+                        <a:srgbClr val="E6DECB"/>
+                      </a:solidFill>
+                      <a:prstDash val="solid"/>
+                      <a:round/>
+                      <a:headEnd type="none" w="med" len="med"/>
+                      <a:tailEnd type="none" w="med" len="med"/>
+                    </a:lnR>
+                    <a:lnT w="6350" cap="flat" cmpd="sng" algn="ctr">
+                      <a:solidFill>
+                        <a:srgbClr val="E6DECB"/>
+                      </a:solidFill>
+                      <a:prstDash val="solid"/>
+                      <a:round/>
+                      <a:headEnd type="none" w="med" len="med"/>
+                      <a:tailEnd type="none" w="med" len="med"/>
+                    </a:lnT>
+                    <a:lnB w="6350" cap="flat" cmpd="sng" algn="ctr">
+                      <a:solidFill>
+                        <a:srgbClr val="E6DECB"/>
+                      </a:solidFill>
+                      <a:prstDash val="solid"/>
+                      <a:round/>
+                      <a:headEnd type="none" w="med" len="med"/>
+                      <a:tailEnd type="none" w="med" len="med"/>
+                    </a:lnB>
+                    <a:solidFill>
+                      <a:srgbClr val="FFFFFF"/>
+                    </a:solidFill>
+                  </a:tcPr>
+                </a:tc>
+              </a:tr>
+              <a:tr h="310896">
+                <a:tc>
+                  <a:txBody>
+                    <a:bodyPr/>
+                    <a:lstStyle/>
+                    <a:p>
+                      <a:pPr algn="l" indent="0" marL="0">
+                        <a:buNone/>
+                      </a:pPr>
+                      <a:r>
+                        <a:rPr lang="en-US" sz="1100" b="1" dirty="0">
+                          <a:solidFill>
+                            <a:srgbClr val="2B2621"/>
+                          </a:solidFill>
+                          <a:latin typeface="Calibri" pitchFamily="34" charset="0"/>
+                          <a:ea typeface="Calibri" pitchFamily="34" charset="-122"/>
+                          <a:cs typeface="Calibri" pitchFamily="34" charset="-120"/>
+                        </a:rPr>
+                        <a:t>Delhi · Saket</a:t>
+                      </a:r>
+                      <a:endParaRPr lang="en-US" sz="1100" dirty="0">
+                        <a:latin typeface="Calibri" charset="0"/>
+                        <a:ea typeface="Calibri" charset="0"/>
+                        <a:cs typeface="Calibri" charset="0"/>
+                      </a:endParaRPr>
+                    </a:p>
+                  </a:txBody>
+                  <a:tcPr marL="91440" marR="91440" marT="45720" marB="45720" anchor="ctr">
+                    <a:lnL w="6350" cap="flat" cmpd="sng" algn="ctr">
+                      <a:solidFill>
+                        <a:srgbClr val="E6DECB"/>
+                      </a:solidFill>
+                      <a:prstDash val="solid"/>
+                      <a:round/>
+                      <a:headEnd type="none" w="med" len="med"/>
+                      <a:tailEnd type="none" w="med" len="med"/>
+                    </a:lnL>
+                    <a:lnR w="6350" cap="flat" cmpd="sng" algn="ctr">
+                      <a:solidFill>
+                        <a:srgbClr val="E6DECB"/>
+                      </a:solidFill>
+                      <a:prstDash val="solid"/>
+                      <a:round/>
+                      <a:headEnd type="none" w="med" len="med"/>
+                      <a:tailEnd type="none" w="med" len="med"/>
+                    </a:lnR>
+                    <a:lnT w="6350" cap="flat" cmpd="sng" algn="ctr">
+                      <a:solidFill>
+                        <a:srgbClr val="E6DECB"/>
+                      </a:solidFill>
+                      <a:prstDash val="solid"/>
+                      <a:round/>
+                      <a:headEnd type="none" w="med" len="med"/>
+                      <a:tailEnd type="none" w="med" len="med"/>
+                    </a:lnT>
+                    <a:lnB w="6350" cap="flat" cmpd="sng" algn="ctr">
+                      <a:solidFill>
+                        <a:srgbClr val="E6DECB"/>
+                      </a:solidFill>
+                      <a:prstDash val="solid"/>
+                      <a:round/>
+                      <a:headEnd type="none" w="med" len="med"/>
+                      <a:tailEnd type="none" w="med" len="med"/>
+                    </a:lnB>
+                    <a:solidFill>
+                      <a:srgbClr val="F7F3EA"/>
+                    </a:solidFill>
+                  </a:tcPr>
+                </a:tc>
+                <a:tc>
+                  <a:txBody>
+                    <a:bodyPr/>
+                    <a:lstStyle/>
+                    <a:p>
+                      <a:pPr algn="l" indent="0" marL="0">
+                        <a:buNone/>
+                      </a:pPr>
+                      <a:r>
+                        <a:rPr lang="en-US" sz="1100" dirty="0">
+                          <a:solidFill>
+                            <a:srgbClr val="2A2621"/>
+                          </a:solidFill>
+                          <a:latin typeface="Cambria" pitchFamily="34" charset="0"/>
+                          <a:ea typeface="Cambria" pitchFamily="34" charset="-122"/>
+                          <a:cs typeface="Cambria" pitchFamily="34" charset="-120"/>
+                        </a:rPr>
+                        <a:t>PVR Select Citywalk</a:t>
+                      </a:r>
+                      <a:endParaRPr lang="en-US" sz="1100" dirty="0">
+                        <a:latin typeface="Cambria" charset="0"/>
+                        <a:ea typeface="Cambria" charset="0"/>
+                        <a:cs typeface="Cambria" charset="0"/>
+                      </a:endParaRPr>
+                    </a:p>
+                  </a:txBody>
+                  <a:tcPr marL="91440" marR="91440" marT="45720" marB="45720" anchor="ctr">
+                    <a:lnL w="6350" cap="flat" cmpd="sng" algn="ctr">
+                      <a:solidFill>
+                        <a:srgbClr val="E6DECB"/>
+                      </a:solidFill>
+                      <a:prstDash val="solid"/>
+                      <a:round/>
+                      <a:headEnd type="none" w="med" len="med"/>
+                      <a:tailEnd type="none" w="med" len="med"/>
+                    </a:lnL>
+                    <a:lnR w="6350" cap="flat" cmpd="sng" algn="ctr">
+                      <a:solidFill>
+                        <a:srgbClr val="E6DECB"/>
+                      </a:solidFill>
+                      <a:prstDash val="solid"/>
+                      <a:round/>
+                      <a:headEnd type="none" w="med" len="med"/>
+                      <a:tailEnd type="none" w="med" len="med"/>
+                    </a:lnR>
+                    <a:lnT w="6350" cap="flat" cmpd="sng" algn="ctr">
+                      <a:solidFill>
+                        <a:srgbClr val="E6DECB"/>
+                      </a:solidFill>
+                      <a:prstDash val="solid"/>
+                      <a:round/>
+                      <a:headEnd type="none" w="med" len="med"/>
+                      <a:tailEnd type="none" w="med" len="med"/>
+                    </a:lnT>
+                    <a:lnB w="6350" cap="flat" cmpd="sng" algn="ctr">
+                      <a:solidFill>
+                        <a:srgbClr val="E6DECB"/>
+                      </a:solidFill>
+                      <a:prstDash val="solid"/>
+                      <a:round/>
+                      <a:headEnd type="none" w="med" len="med"/>
+                      <a:tailEnd type="none" w="med" len="med"/>
+                    </a:lnB>
+                    <a:solidFill>
+                      <a:srgbClr val="F7F3EA"/>
+                    </a:solidFill>
+                  </a:tcPr>
+                </a:tc>
+                <a:tc>
+                  <a:txBody>
+                    <a:bodyPr/>
+                    <a:lstStyle/>
+                    <a:p>
+                      <a:pPr algn="ctr" indent="0" marL="0">
+                        <a:buNone/>
+                      </a:pPr>
+                      <a:r>
+                        <a:rPr lang="en-US" sz="1100" dirty="0">
+                          <a:solidFill>
+                            <a:srgbClr val="2A2621"/>
+                          </a:solidFill>
+                          <a:latin typeface="Calibri" pitchFamily="34" charset="0"/>
+                          <a:ea typeface="Calibri" pitchFamily="34" charset="-122"/>
+                          <a:cs typeface="Calibri" pitchFamily="34" charset="-120"/>
+                        </a:rPr>
+                        <a:t>6</a:t>
+                      </a:r>
+                      <a:endParaRPr lang="en-US" sz="1100" dirty="0">
+                        <a:latin typeface="Calibri" charset="0"/>
+                        <a:ea typeface="Calibri" charset="0"/>
+                        <a:cs typeface="Calibri" charset="0"/>
+                      </a:endParaRPr>
+                    </a:p>
+                  </a:txBody>
+                  <a:tcPr marL="91440" marR="91440" marT="45720" marB="45720" anchor="ctr">
+                    <a:lnL w="6350" cap="flat" cmpd="sng" algn="ctr">
+                      <a:solidFill>
+                        <a:srgbClr val="E6DECB"/>
+                      </a:solidFill>
+                      <a:prstDash val="solid"/>
+                      <a:round/>
+                      <a:headEnd type="none" w="med" len="med"/>
+                      <a:tailEnd type="none" w="med" len="med"/>
+                    </a:lnL>
+                    <a:lnR w="6350" cap="flat" cmpd="sng" algn="ctr">
+                      <a:solidFill>
+                        <a:srgbClr val="E6DECB"/>
+                      </a:solidFill>
+                      <a:prstDash val="solid"/>
+                      <a:round/>
+                      <a:headEnd type="none" w="med" len="med"/>
+                      <a:tailEnd type="none" w="med" len="med"/>
+                    </a:lnR>
+                    <a:lnT w="6350" cap="flat" cmpd="sng" algn="ctr">
+                      <a:solidFill>
+                        <a:srgbClr val="E6DECB"/>
+                      </a:solidFill>
+                      <a:prstDash val="solid"/>
+                      <a:round/>
+                      <a:headEnd type="none" w="med" len="med"/>
+                      <a:tailEnd type="none" w="med" len="med"/>
+                    </a:lnT>
+                    <a:lnB w="6350" cap="flat" cmpd="sng" algn="ctr">
+                      <a:solidFill>
+                        <a:srgbClr val="E6DECB"/>
+                      </a:solidFill>
+                      <a:prstDash val="solid"/>
+                      <a:round/>
+                      <a:headEnd type="none" w="med" len="med"/>
+                      <a:tailEnd type="none" w="med" len="med"/>
+                    </a:lnB>
+                    <a:solidFill>
+                      <a:srgbClr val="F7F3EA"/>
+                    </a:solidFill>
+                  </a:tcPr>
+                </a:tc>
+                <a:tc>
+                  <a:txBody>
+                    <a:bodyPr/>
+                    <a:lstStyle/>
+                    <a:p>
+                      <a:pPr algn="ctr" indent="0" marL="0">
+                        <a:buNone/>
+                      </a:pPr>
+                      <a:r>
+                        <a:rPr lang="en-US" sz="1100" dirty="0">
+                          <a:solidFill>
+                            <a:srgbClr val="2A2621"/>
+                          </a:solidFill>
+                          <a:latin typeface="Calibri" pitchFamily="34" charset="0"/>
+                          <a:ea typeface="Calibri" pitchFamily="34" charset="-122"/>
+                          <a:cs typeface="Calibri" pitchFamily="34" charset="-120"/>
+                        </a:rPr>
+                        <a:t>1,056</a:t>
+                      </a:r>
+                      <a:endParaRPr lang="en-US" sz="1100" dirty="0">
+                        <a:latin typeface="Calibri" charset="0"/>
+                        <a:ea typeface="Calibri" charset="0"/>
+                        <a:cs typeface="Calibri" charset="0"/>
+                      </a:endParaRPr>
+                    </a:p>
+                  </a:txBody>
+                  <a:tcPr marL="91440" marR="91440" marT="45720" marB="45720" anchor="ctr">
+                    <a:lnL w="6350" cap="flat" cmpd="sng" algn="ctr">
+                      <a:solidFill>
+                        <a:srgbClr val="E6DECB"/>
+                      </a:solidFill>
+                      <a:prstDash val="solid"/>
+                      <a:round/>
+                      <a:headEnd type="none" w="med" len="med"/>
+                      <a:tailEnd type="none" w="med" len="med"/>
+                    </a:lnL>
+                    <a:lnR w="6350" cap="flat" cmpd="sng" algn="ctr">
+                      <a:solidFill>
+                        <a:srgbClr val="E6DECB"/>
+                      </a:solidFill>
+                      <a:prstDash val="solid"/>
+                      <a:round/>
+                      <a:headEnd type="none" w="med" len="med"/>
+                      <a:tailEnd type="none" w="med" len="med"/>
+                    </a:lnR>
+                    <a:lnT w="6350" cap="flat" cmpd="sng" algn="ctr">
+                      <a:solidFill>
+                        <a:srgbClr val="E6DECB"/>
+                      </a:solidFill>
+                      <a:prstDash val="solid"/>
+                      <a:round/>
+                      <a:headEnd type="none" w="med" len="med"/>
+                      <a:tailEnd type="none" w="med" len="med"/>
+                    </a:lnT>
+                    <a:lnB w="6350" cap="flat" cmpd="sng" algn="ctr">
+                      <a:solidFill>
+                        <a:srgbClr val="E6DECB"/>
+                      </a:solidFill>
+                      <a:prstDash val="solid"/>
+                      <a:round/>
+                      <a:headEnd type="none" w="med" len="med"/>
+                      <a:tailEnd type="none" w="med" len="med"/>
+                    </a:lnB>
+                    <a:solidFill>
+                      <a:srgbClr val="F7F3EA"/>
+                    </a:solidFill>
+                  </a:tcPr>
+                </a:tc>
+                <a:tc>
+                  <a:txBody>
+                    <a:bodyPr/>
+                    <a:lstStyle/>
+                    <a:p>
+                      <a:pPr algn="ctr" indent="0" marL="0">
+                        <a:buNone/>
+                      </a:pPr>
+                      <a:r>
+                        <a:rPr lang="en-US" sz="1100" dirty="0">
+                          <a:solidFill>
+                            <a:srgbClr val="2A2621"/>
+                          </a:solidFill>
+                          <a:latin typeface="Calibri" pitchFamily="34" charset="0"/>
+                          <a:ea typeface="Calibri" pitchFamily="34" charset="-122"/>
+                          <a:cs typeface="Calibri" pitchFamily="34" charset="-120"/>
+                        </a:rPr>
+                        <a:t>8×8</a:t>
+                      </a:r>
+                      <a:endParaRPr lang="en-US" sz="1100" dirty="0">
+                        <a:latin typeface="Calibri" charset="0"/>
+                        <a:ea typeface="Calibri" charset="0"/>
+                        <a:cs typeface="Calibri" charset="0"/>
+                      </a:endParaRPr>
+                    </a:p>
+                  </a:txBody>
+                  <a:tcPr marL="91440" marR="91440" marT="45720" marB="45720" anchor="ctr">
+                    <a:lnL w="6350" cap="flat" cmpd="sng" algn="ctr">
+                      <a:solidFill>
+                        <a:srgbClr val="E6DECB"/>
+                      </a:solidFill>
+                      <a:prstDash val="solid"/>
+                      <a:round/>
+                      <a:headEnd type="none" w="med" len="med"/>
+                      <a:tailEnd type="none" w="med" len="med"/>
+                    </a:lnL>
+                    <a:lnR w="6350" cap="flat" cmpd="sng" algn="ctr">
+                      <a:solidFill>
+                        <a:srgbClr val="E6DECB"/>
+                      </a:solidFill>
+                      <a:prstDash val="solid"/>
+                      <a:round/>
+                      <a:headEnd type="none" w="med" len="med"/>
+                      <a:tailEnd type="none" w="med" len="med"/>
+                    </a:lnR>
+                    <a:lnT w="6350" cap="flat" cmpd="sng" algn="ctr">
+                      <a:solidFill>
+                        <a:srgbClr val="E6DECB"/>
+                      </a:solidFill>
+                      <a:prstDash val="solid"/>
+                      <a:round/>
+                      <a:headEnd type="none" w="med" len="med"/>
+                      <a:tailEnd type="none" w="med" len="med"/>
+                    </a:lnT>
+                    <a:lnB w="6350" cap="flat" cmpd="sng" algn="ctr">
+                      <a:solidFill>
+                        <a:srgbClr val="E6DECB"/>
+                      </a:solidFill>
+                      <a:prstDash val="solid"/>
+                      <a:round/>
+                      <a:headEnd type="none" w="med" len="med"/>
+                      <a:tailEnd type="none" w="med" len="med"/>
+                    </a:lnB>
+                    <a:solidFill>
+                      <a:srgbClr val="F7F3EA"/>
+                    </a:solidFill>
+                  </a:tcPr>
+                </a:tc>
+              </a:tr>
+              <a:tr h="310896">
+                <a:tc>
+                  <a:txBody>
+                    <a:bodyPr/>
+                    <a:lstStyle/>
+                    <a:p>
+                      <a:pPr algn="l" indent="0" marL="0">
+                        <a:buNone/>
+                      </a:pPr>
+                      <a:r>
+                        <a:rPr lang="en-US" sz="1100" b="1" dirty="0">
+                          <a:solidFill>
+                            <a:srgbClr val="2B2621"/>
+                          </a:solidFill>
+                          <a:latin typeface="Calibri" pitchFamily="34" charset="0"/>
+                          <a:ea typeface="Calibri" pitchFamily="34" charset="-122"/>
+                          <a:cs typeface="Calibri" pitchFamily="34" charset="-120"/>
+                        </a:rPr>
+                        <a:t>Noida</a:t>
+                      </a:r>
+                      <a:endParaRPr lang="en-US" sz="1100" dirty="0">
+                        <a:latin typeface="Calibri" charset="0"/>
+                        <a:ea typeface="Calibri" charset="0"/>
+                        <a:cs typeface="Calibri" charset="0"/>
+                      </a:endParaRPr>
+                    </a:p>
+                  </a:txBody>
+                  <a:tcPr marL="91440" marR="91440" marT="45720" marB="45720" anchor="ctr">
+                    <a:lnL w="6350" cap="flat" cmpd="sng" algn="ctr">
+                      <a:solidFill>
+                        <a:srgbClr val="E6DECB"/>
+                      </a:solidFill>
+                      <a:prstDash val="solid"/>
+                      <a:round/>
+                      <a:headEnd type="none" w="med" len="med"/>
+                      <a:tailEnd type="none" w="med" len="med"/>
+                    </a:lnL>
+                    <a:lnR w="6350" cap="flat" cmpd="sng" algn="ctr">
+                      <a:solidFill>
+                        <a:srgbClr val="E6DECB"/>
+                      </a:solidFill>
+                      <a:prstDash val="solid"/>
+                      <a:round/>
+                      <a:headEnd type="none" w="med" len="med"/>
+                      <a:tailEnd type="none" w="med" len="med"/>
+                    </a:lnR>
+                    <a:lnT w="6350" cap="flat" cmpd="sng" algn="ctr">
+                      <a:solidFill>
+                        <a:srgbClr val="E6DECB"/>
+                      </a:solidFill>
+                      <a:prstDash val="solid"/>
+                      <a:round/>
+                      <a:headEnd type="none" w="med" len="med"/>
+                      <a:tailEnd type="none" w="med" len="med"/>
+                    </a:lnT>
+                    <a:lnB w="6350" cap="flat" cmpd="sng" algn="ctr">
+                      <a:solidFill>
+                        <a:srgbClr val="E6DECB"/>
+                      </a:solidFill>
+                      <a:prstDash val="solid"/>
+                      <a:round/>
+                      <a:headEnd type="none" w="med" len="med"/>
+                      <a:tailEnd type="none" w="med" len="med"/>
+                    </a:lnB>
+                    <a:solidFill>
+                      <a:srgbClr val="FFFFFF"/>
+                    </a:solidFill>
+                  </a:tcPr>
+                </a:tc>
+                <a:tc>
+                  <a:txBody>
+                    <a:bodyPr/>
+                    <a:lstStyle/>
+                    <a:p>
+                      <a:pPr algn="l" indent="0" marL="0">
+                        <a:buNone/>
+                      </a:pPr>
+                      <a:r>
+                        <a:rPr lang="en-US" sz="1100" dirty="0">
+                          <a:solidFill>
+                            <a:srgbClr val="2A2621"/>
+                          </a:solidFill>
+                          <a:latin typeface="Cambria" pitchFamily="34" charset="0"/>
+                          <a:ea typeface="Cambria" pitchFamily="34" charset="-122"/>
+                          <a:cs typeface="Cambria" pitchFamily="34" charset="-120"/>
+                        </a:rPr>
+                        <a:t>PVR DT · Mall of India</a:t>
+                      </a:r>
+                      <a:endParaRPr lang="en-US" sz="1100" dirty="0">
+                        <a:latin typeface="Cambria" charset="0"/>
+                        <a:ea typeface="Cambria" charset="0"/>
+                        <a:cs typeface="Cambria" charset="0"/>
+                      </a:endParaRPr>
+                    </a:p>
+                  </a:txBody>
+                  <a:tcPr marL="91440" marR="91440" marT="45720" marB="45720" anchor="ctr">
+                    <a:lnL w="6350" cap="flat" cmpd="sng" algn="ctr">
+                      <a:solidFill>
+                        <a:srgbClr val="E6DECB"/>
+                      </a:solidFill>
+                      <a:prstDash val="solid"/>
+                      <a:round/>
+                      <a:headEnd type="none" w="med" len="med"/>
+                      <a:tailEnd type="none" w="med" len="med"/>
+                    </a:lnL>
+                    <a:lnR w="6350" cap="flat" cmpd="sng" algn="ctr">
+                      <a:solidFill>
+                        <a:srgbClr val="E6DECB"/>
+                      </a:solidFill>
+                      <a:prstDash val="solid"/>
+                      <a:round/>
+                      <a:headEnd type="none" w="med" len="med"/>
+                      <a:tailEnd type="none" w="med" len="med"/>
+                    </a:lnR>
+                    <a:lnT w="6350" cap="flat" cmpd="sng" algn="ctr">
+                      <a:solidFill>
+                        <a:srgbClr val="E6DECB"/>
+                      </a:solidFill>
+                      <a:prstDash val="solid"/>
+                      <a:round/>
+                      <a:headEnd type="none" w="med" len="med"/>
+                      <a:tailEnd type="none" w="med" len="med"/>
+                    </a:lnT>
+                    <a:lnB w="6350" cap="flat" cmpd="sng" algn="ctr">
+                      <a:solidFill>
+                        <a:srgbClr val="E6DECB"/>
+                      </a:solidFill>
+                      <a:prstDash val="solid"/>
+                      <a:round/>
+                      <a:headEnd type="none" w="med" len="med"/>
+                      <a:tailEnd type="none" w="med" len="med"/>
+                    </a:lnB>
+                    <a:solidFill>
+                      <a:srgbClr val="FFFFFF"/>
+                    </a:solidFill>
+                  </a:tcPr>
+                </a:tc>
+                <a:tc>
+                  <a:txBody>
+                    <a:bodyPr/>
+                    <a:lstStyle/>
+                    <a:p>
+                      <a:pPr algn="ctr" indent="0" marL="0">
+                        <a:buNone/>
+                      </a:pPr>
+                      <a:r>
+                        <a:rPr lang="en-US" sz="1100" dirty="0">
+                          <a:solidFill>
+                            <a:srgbClr val="2A2621"/>
+                          </a:solidFill>
+                          <a:latin typeface="Calibri" pitchFamily="34" charset="0"/>
+                          <a:ea typeface="Calibri" pitchFamily="34" charset="-122"/>
+                          <a:cs typeface="Calibri" pitchFamily="34" charset="-120"/>
+                        </a:rPr>
+                        <a:t>7</a:t>
+                      </a:r>
+                      <a:endParaRPr lang="en-US" sz="1100" dirty="0">
+                        <a:latin typeface="Calibri" charset="0"/>
+                        <a:ea typeface="Calibri" charset="0"/>
+                        <a:cs typeface="Calibri" charset="0"/>
+                      </a:endParaRPr>
+                    </a:p>
+                  </a:txBody>
+                  <a:tcPr marL="91440" marR="91440" marT="45720" marB="45720" anchor="ctr">
+                    <a:lnL w="6350" cap="flat" cmpd="sng" algn="ctr">
+                      <a:solidFill>
+                        <a:srgbClr val="E6DECB"/>
+                      </a:solidFill>
+                      <a:prstDash val="solid"/>
+                      <a:round/>
+                      <a:headEnd type="none" w="med" len="med"/>
+                      <a:tailEnd type="none" w="med" len="med"/>
+                    </a:lnL>
+                    <a:lnR w="6350" cap="flat" cmpd="sng" algn="ctr">
+                      <a:solidFill>
+                        <a:srgbClr val="E6DECB"/>
+                      </a:solidFill>
+                      <a:prstDash val="solid"/>
+                      <a:round/>
+                      <a:headEnd type="none" w="med" len="med"/>
+                      <a:tailEnd type="none" w="med" len="med"/>
+                    </a:lnR>
+                    <a:lnT w="6350" cap="flat" cmpd="sng" algn="ctr">
+                      <a:solidFill>
+                        <a:srgbClr val="E6DECB"/>
+                      </a:solidFill>
+                      <a:prstDash val="solid"/>
+                      <a:round/>
+                      <a:headEnd type="none" w="med" len="med"/>
+                      <a:tailEnd type="none" w="med" len="med"/>
+                    </a:lnT>
+                    <a:lnB w="6350" cap="flat" cmpd="sng" algn="ctr">
+                      <a:solidFill>
+                        <a:srgbClr val="E6DECB"/>
+                      </a:solidFill>
+                      <a:prstDash val="solid"/>
+                      <a:round/>
+                      <a:headEnd type="none" w="med" len="med"/>
+                      <a:tailEnd type="none" w="med" len="med"/>
+                    </a:lnB>
+                    <a:solidFill>
+                      <a:srgbClr val="FFFFFF"/>
+                    </a:solidFill>
+                  </a:tcPr>
+                </a:tc>
+                <a:tc>
+                  <a:txBody>
+                    <a:bodyPr/>
+                    <a:lstStyle/>
+                    <a:p>
+                      <a:pPr algn="ctr" indent="0" marL="0">
+                        <a:buNone/>
+                      </a:pPr>
+                      <a:r>
+                        <a:rPr lang="en-US" sz="1100" dirty="0">
+                          <a:solidFill>
+                            <a:srgbClr val="2A2621"/>
+                          </a:solidFill>
+                          <a:latin typeface="Calibri" pitchFamily="34" charset="0"/>
+                          <a:ea typeface="Calibri" pitchFamily="34" charset="-122"/>
+                          <a:cs typeface="Calibri" pitchFamily="34" charset="-120"/>
+                        </a:rPr>
+                        <a:t>1,712</a:t>
+                      </a:r>
+                      <a:endParaRPr lang="en-US" sz="1100" dirty="0">
+                        <a:latin typeface="Calibri" charset="0"/>
+                        <a:ea typeface="Calibri" charset="0"/>
+                        <a:cs typeface="Calibri" charset="0"/>
+                      </a:endParaRPr>
+                    </a:p>
+                  </a:txBody>
+                  <a:tcPr marL="91440" marR="91440" marT="45720" marB="45720" anchor="ctr">
+                    <a:lnL w="6350" cap="flat" cmpd="sng" algn="ctr">
+                      <a:solidFill>
+                        <a:srgbClr val="E6DECB"/>
+                      </a:solidFill>
+                      <a:prstDash val="solid"/>
+                      <a:round/>
+                      <a:headEnd type="none" w="med" len="med"/>
+                      <a:tailEnd type="none" w="med" len="med"/>
+                    </a:lnL>
+                    <a:lnR w="6350" cap="flat" cmpd="sng" algn="ctr">
+                      <a:solidFill>
+                        <a:srgbClr val="E6DECB"/>
+                      </a:solidFill>
+                      <a:prstDash val="solid"/>
+                      <a:round/>
+                      <a:headEnd type="none" w="med" len="med"/>
+                      <a:tailEnd type="none" w="med" len="med"/>
+                    </a:lnR>
+                    <a:lnT w="6350" cap="flat" cmpd="sng" algn="ctr">
+                      <a:solidFill>
+                        <a:srgbClr val="E6DECB"/>
+                      </a:solidFill>
+                      <a:prstDash val="solid"/>
+                      <a:round/>
+                      <a:headEnd type="none" w="med" len="med"/>
+                      <a:tailEnd type="none" w="med" len="med"/>
+                    </a:lnT>
+                    <a:lnB w="6350" cap="flat" cmpd="sng" algn="ctr">
+                      <a:solidFill>
+                        <a:srgbClr val="E6DECB"/>
+                      </a:solidFill>
+                      <a:prstDash val="solid"/>
+                      <a:round/>
+                      <a:headEnd type="none" w="med" len="med"/>
+                      <a:tailEnd type="none" w="med" len="med"/>
+                    </a:lnB>
+                    <a:solidFill>
+                      <a:srgbClr val="FFFFFF"/>
+                    </a:solidFill>
+                  </a:tcPr>
+                </a:tc>
+                <a:tc>
+                  <a:txBody>
+                    <a:bodyPr/>
+                    <a:lstStyle/>
+                    <a:p>
+                      <a:pPr algn="ctr" indent="0" marL="0">
+                        <a:buNone/>
+                      </a:pPr>
+                      <a:r>
+                        <a:rPr lang="en-US" sz="1100" dirty="0">
+                          <a:solidFill>
+                            <a:srgbClr val="2A2621"/>
+                          </a:solidFill>
+                          <a:latin typeface="Calibri" pitchFamily="34" charset="0"/>
+                          <a:ea typeface="Calibri" pitchFamily="34" charset="-122"/>
+                          <a:cs typeface="Calibri" pitchFamily="34" charset="-120"/>
+                        </a:rPr>
+                        <a:t>8×8</a:t>
+                      </a:r>
+                      <a:endParaRPr lang="en-US" sz="1100" dirty="0">
+                        <a:latin typeface="Calibri" charset="0"/>
+                        <a:ea typeface="Calibri" charset="0"/>
+                        <a:cs typeface="Calibri" charset="0"/>
+                      </a:endParaRPr>
+                    </a:p>
+                  </a:txBody>
+                  <a:tcPr marL="91440" marR="91440" marT="45720" marB="45720" anchor="ctr">
+                    <a:lnL w="6350" cap="flat" cmpd="sng" algn="ctr">
+                      <a:solidFill>
+                        <a:srgbClr val="E6DECB"/>
+                      </a:solidFill>
+                      <a:prstDash val="solid"/>
+                      <a:round/>
+                      <a:headEnd type="none" w="med" len="med"/>
+                      <a:tailEnd type="none" w="med" len="med"/>
+                    </a:lnL>
+                    <a:lnR w="6350" cap="flat" cmpd="sng" algn="ctr">
+                      <a:solidFill>
+                        <a:srgbClr val="E6DECB"/>
+                      </a:solidFill>
+                      <a:prstDash val="solid"/>
+                      <a:round/>
+                      <a:headEnd type="none" w="med" len="med"/>
+                      <a:tailEnd type="none" w="med" len="med"/>
+                    </a:lnR>
+                    <a:lnT w="6350" cap="flat" cmpd="sng" algn="ctr">
+                      <a:solidFill>
+                        <a:srgbClr val="E6DECB"/>
+                      </a:solidFill>
+                      <a:prstDash val="solid"/>
+                      <a:round/>
+                      <a:headEnd type="none" w="med" len="med"/>
+                      <a:tailEnd type="none" w="med" len="med"/>
+                    </a:lnT>
+                    <a:lnB w="6350" cap="flat" cmpd="sng" algn="ctr">
+                      <a:solidFill>
+                        <a:srgbClr val="E6DECB"/>
+                      </a:solidFill>
+                      <a:prstDash val="solid"/>
+                      <a:round/>
+                      <a:headEnd type="none" w="med" len="med"/>
+                      <a:tailEnd type="none" w="med" len="med"/>
+                    </a:lnB>
+                    <a:solidFill>
+                      <a:srgbClr val="FFFFFF"/>
+                    </a:solidFill>
+                  </a:tcPr>
+                </a:tc>
+              </a:tr>
+              <a:tr h="310896">
+                <a:tc>
+                  <a:txBody>
+                    <a:bodyPr/>
+                    <a:lstStyle/>
+                    <a:p>
+                      <a:pPr algn="l" indent="0" marL="0">
+                        <a:buNone/>
+                      </a:pPr>
+                      <a:r>
+                        <a:rPr lang="en-US" sz="1100" b="1" dirty="0">
+                          <a:solidFill>
+                            <a:srgbClr val="2B2621"/>
+                          </a:solidFill>
+                          <a:latin typeface="Calibri" pitchFamily="34" charset="0"/>
+                          <a:ea typeface="Calibri" pitchFamily="34" charset="-122"/>
+                          <a:cs typeface="Calibri" pitchFamily="34" charset="-120"/>
+                        </a:rPr>
+                        <a:t>Gurgaon</a:t>
+                      </a:r>
+                      <a:endParaRPr lang="en-US" sz="1100" dirty="0">
+                        <a:latin typeface="Calibri" charset="0"/>
+                        <a:ea typeface="Calibri" charset="0"/>
+                        <a:cs typeface="Calibri" charset="0"/>
+                      </a:endParaRPr>
+                    </a:p>
+                  </a:txBody>
+                  <a:tcPr marL="91440" marR="91440" marT="45720" marB="45720" anchor="ctr">
+                    <a:lnL w="6350" cap="flat" cmpd="sng" algn="ctr">
+                      <a:solidFill>
+                        <a:srgbClr val="E6DECB"/>
+                      </a:solidFill>
+                      <a:prstDash val="solid"/>
+                      <a:round/>
+                      <a:headEnd type="none" w="med" len="med"/>
+                      <a:tailEnd type="none" w="med" len="med"/>
+                    </a:lnL>
+                    <a:lnR w="6350" cap="flat" cmpd="sng" algn="ctr">
+                      <a:solidFill>
+                        <a:srgbClr val="E6DECB"/>
+                      </a:solidFill>
+                      <a:prstDash val="solid"/>
+                      <a:round/>
+                      <a:headEnd type="none" w="med" len="med"/>
+                      <a:tailEnd type="none" w="med" len="med"/>
+                    </a:lnR>
+                    <a:lnT w="6350" cap="flat" cmpd="sng" algn="ctr">
+                      <a:solidFill>
+                        <a:srgbClr val="E6DECB"/>
+                      </a:solidFill>
+                      <a:prstDash val="solid"/>
+                      <a:round/>
+                      <a:headEnd type="none" w="med" len="med"/>
+                      <a:tailEnd type="none" w="med" len="med"/>
+                    </a:lnT>
+                    <a:lnB w="6350" cap="flat" cmpd="sng" algn="ctr">
+                      <a:solidFill>
+                        <a:srgbClr val="E6DECB"/>
+                      </a:solidFill>
+                      <a:prstDash val="solid"/>
+                      <a:round/>
+                      <a:headEnd type="none" w="med" len="med"/>
+                      <a:tailEnd type="none" w="med" len="med"/>
+                    </a:lnB>
+                    <a:solidFill>
+                      <a:srgbClr val="F7F3EA"/>
+                    </a:solidFill>
+                  </a:tcPr>
+                </a:tc>
+                <a:tc>
+                  <a:txBody>
+                    <a:bodyPr/>
+                    <a:lstStyle/>
+                    <a:p>
+                      <a:pPr algn="l" indent="0" marL="0">
+                        <a:buNone/>
+                      </a:pPr>
+                      <a:r>
+                        <a:rPr lang="en-US" sz="1100" dirty="0">
+                          <a:solidFill>
+                            <a:srgbClr val="2A2621"/>
+                          </a:solidFill>
+                          <a:latin typeface="Cambria" pitchFamily="34" charset="0"/>
+                          <a:ea typeface="Cambria" pitchFamily="34" charset="-122"/>
+                          <a:cs typeface="Cambria" pitchFamily="34" charset="-120"/>
+                        </a:rPr>
+                        <a:t>PVR Ambience Mall</a:t>
+                      </a:r>
+                      <a:endParaRPr lang="en-US" sz="1100" dirty="0">
+                        <a:latin typeface="Cambria" charset="0"/>
+                        <a:ea typeface="Cambria" charset="0"/>
+                        <a:cs typeface="Cambria" charset="0"/>
+                      </a:endParaRPr>
+                    </a:p>
+                  </a:txBody>
+                  <a:tcPr marL="91440" marR="91440" marT="45720" marB="45720" anchor="ctr">
+                    <a:lnL w="6350" cap="flat" cmpd="sng" algn="ctr">
+                      <a:solidFill>
+                        <a:srgbClr val="E6DECB"/>
+                      </a:solidFill>
+                      <a:prstDash val="solid"/>
+                      <a:round/>
+                      <a:headEnd type="none" w="med" len="med"/>
+                      <a:tailEnd type="none" w="med" len="med"/>
+                    </a:lnL>
+                    <a:lnR w="6350" cap="flat" cmpd="sng" algn="ctr">
+                      <a:solidFill>
+                        <a:srgbClr val="E6DECB"/>
+                      </a:solidFill>
+                      <a:prstDash val="solid"/>
+                      <a:round/>
+                      <a:headEnd type="none" w="med" len="med"/>
+                      <a:tailEnd type="none" w="med" len="med"/>
+                    </a:lnR>
+                    <a:lnT w="6350" cap="flat" cmpd="sng" algn="ctr">
+                      <a:solidFill>
+                        <a:srgbClr val="E6DECB"/>
+                      </a:solidFill>
+                      <a:prstDash val="solid"/>
+                      <a:round/>
+                      <a:headEnd type="none" w="med" len="med"/>
+                      <a:tailEnd type="none" w="med" len="med"/>
+                    </a:lnT>
+                    <a:lnB w="6350" cap="flat" cmpd="sng" algn="ctr">
+                      <a:solidFill>
+                        <a:srgbClr val="E6DECB"/>
+                      </a:solidFill>
+                      <a:prstDash val="solid"/>
+                      <a:round/>
+                      <a:headEnd type="none" w="med" len="med"/>
+                      <a:tailEnd type="none" w="med" len="med"/>
+                    </a:lnB>
+                    <a:solidFill>
+                      <a:srgbClr val="F7F3EA"/>
+                    </a:solidFill>
+                  </a:tcPr>
+                </a:tc>
+                <a:tc>
+                  <a:txBody>
+                    <a:bodyPr/>
+                    <a:lstStyle/>
+                    <a:p>
+                      <a:pPr algn="ctr" indent="0" marL="0">
+                        <a:buNone/>
+                      </a:pPr>
+                      <a:r>
+                        <a:rPr lang="en-US" sz="1100" dirty="0">
+                          <a:solidFill>
+                            <a:srgbClr val="2A2621"/>
+                          </a:solidFill>
+                          <a:latin typeface="Calibri" pitchFamily="34" charset="0"/>
+                          <a:ea typeface="Calibri" pitchFamily="34" charset="-122"/>
+                          <a:cs typeface="Calibri" pitchFamily="34" charset="-120"/>
+                        </a:rPr>
+                        <a:t>11</a:t>
+                      </a:r>
+                      <a:endParaRPr lang="en-US" sz="1100" dirty="0">
+                        <a:latin typeface="Calibri" charset="0"/>
+                        <a:ea typeface="Calibri" charset="0"/>
+                        <a:cs typeface="Calibri" charset="0"/>
+                      </a:endParaRPr>
+                    </a:p>
+                  </a:txBody>
+                  <a:tcPr marL="91440" marR="91440" marT="45720" marB="45720" anchor="ctr">
+                    <a:lnL w="6350" cap="flat" cmpd="sng" algn="ctr">
+                      <a:solidFill>
+                        <a:srgbClr val="E6DECB"/>
+                      </a:solidFill>
+                      <a:prstDash val="solid"/>
+                      <a:round/>
+                      <a:headEnd type="none" w="med" len="med"/>
+                      <a:tailEnd type="none" w="med" len="med"/>
+                    </a:lnL>
+                    <a:lnR w="6350" cap="flat" cmpd="sng" algn="ctr">
+                      <a:solidFill>
+                        <a:srgbClr val="E6DECB"/>
+                      </a:solidFill>
+                      <a:prstDash val="solid"/>
+                      <a:round/>
+                      <a:headEnd type="none" w="med" len="med"/>
+                      <a:tailEnd type="none" w="med" len="med"/>
+                    </a:lnR>
+                    <a:lnT w="6350" cap="flat" cmpd="sng" algn="ctr">
+                      <a:solidFill>
+                        <a:srgbClr val="E6DECB"/>
+                      </a:solidFill>
+                      <a:prstDash val="solid"/>
+                      <a:round/>
+                      <a:headEnd type="none" w="med" len="med"/>
+                      <a:tailEnd type="none" w="med" len="med"/>
+                    </a:lnT>
+                    <a:lnB w="6350" cap="flat" cmpd="sng" algn="ctr">
+                      <a:solidFill>
+                        <a:srgbClr val="E6DECB"/>
+                      </a:solidFill>
+                      <a:prstDash val="solid"/>
+                      <a:round/>
+                      <a:headEnd type="none" w="med" len="med"/>
+                      <a:tailEnd type="none" w="med" len="med"/>
+                    </a:lnB>
+                    <a:solidFill>
+                      <a:srgbClr val="F7F3EA"/>
+                    </a:solidFill>
+                  </a:tcPr>
+                </a:tc>
+                <a:tc>
+                  <a:txBody>
+                    <a:bodyPr/>
+                    <a:lstStyle/>
+                    <a:p>
+                      <a:pPr algn="ctr" indent="0" marL="0">
+                        <a:buNone/>
+                      </a:pPr>
+                      <a:r>
+                        <a:rPr lang="en-US" sz="1100" dirty="0">
+                          <a:solidFill>
+                            <a:srgbClr val="2A2621"/>
+                          </a:solidFill>
+                          <a:latin typeface="Calibri" pitchFamily="34" charset="0"/>
+                          <a:ea typeface="Calibri" pitchFamily="34" charset="-122"/>
+                          <a:cs typeface="Calibri" pitchFamily="34" charset="-120"/>
+                        </a:rPr>
+                        <a:t>1,122</a:t>
+                      </a:r>
+                      <a:endParaRPr lang="en-US" sz="1100" dirty="0">
+                        <a:latin typeface="Calibri" charset="0"/>
+                        <a:ea typeface="Calibri" charset="0"/>
+                        <a:cs typeface="Calibri" charset="0"/>
+                      </a:endParaRPr>
+                    </a:p>
+                  </a:txBody>
+                  <a:tcPr marL="91440" marR="91440" marT="45720" marB="45720" anchor="ctr">
+                    <a:lnL w="6350" cap="flat" cmpd="sng" algn="ctr">
+                      <a:solidFill>
+                        <a:srgbClr val="E6DECB"/>
+                      </a:solidFill>
+                      <a:prstDash val="solid"/>
+                      <a:round/>
+                      <a:headEnd type="none" w="med" len="med"/>
+                      <a:tailEnd type="none" w="med" len="med"/>
+                    </a:lnL>
+                    <a:lnR w="6350" cap="flat" cmpd="sng" algn="ctr">
+                      <a:solidFill>
+                        <a:srgbClr val="E6DECB"/>
+                      </a:solidFill>
+                      <a:prstDash val="solid"/>
+                      <a:round/>
+                      <a:headEnd type="none" w="med" len="med"/>
+                      <a:tailEnd type="none" w="med" len="med"/>
+                    </a:lnR>
+                    <a:lnT w="6350" cap="flat" cmpd="sng" algn="ctr">
+                      <a:solidFill>
+                        <a:srgbClr val="E6DECB"/>
+                      </a:solidFill>
+                      <a:prstDash val="solid"/>
+                      <a:round/>
+                      <a:headEnd type="none" w="med" len="med"/>
+                      <a:tailEnd type="none" w="med" len="med"/>
+                    </a:lnT>
+                    <a:lnB w="6350" cap="flat" cmpd="sng" algn="ctr">
+                      <a:solidFill>
+                        <a:srgbClr val="E6DECB"/>
+                      </a:solidFill>
+                      <a:prstDash val="solid"/>
+                      <a:round/>
+                      <a:headEnd type="none" w="med" len="med"/>
+                      <a:tailEnd type="none" w="med" len="med"/>
+                    </a:lnB>
+                    <a:solidFill>
+                      <a:srgbClr val="F7F3EA"/>
+                    </a:solidFill>
+                  </a:tcPr>
+                </a:tc>
+                <a:tc>
+                  <a:txBody>
+                    <a:bodyPr/>
+                    <a:lstStyle/>
+                    <a:p>
+                      <a:pPr algn="ctr" indent="0" marL="0">
+                        <a:buNone/>
+                      </a:pPr>
+                      <a:r>
+                        <a:rPr lang="en-US" sz="1100" dirty="0">
+                          <a:solidFill>
+                            <a:srgbClr val="2A2621"/>
+                          </a:solidFill>
+                          <a:latin typeface="Calibri" pitchFamily="34" charset="0"/>
+                          <a:ea typeface="Calibri" pitchFamily="34" charset="-122"/>
+                          <a:cs typeface="Calibri" pitchFamily="34" charset="-120"/>
+                        </a:rPr>
+                        <a:t>8×8</a:t>
+                      </a:r>
+                      <a:endParaRPr lang="en-US" sz="1100" dirty="0">
+                        <a:latin typeface="Calibri" charset="0"/>
+                        <a:ea typeface="Calibri" charset="0"/>
+                        <a:cs typeface="Calibri" charset="0"/>
+                      </a:endParaRPr>
+                    </a:p>
+                  </a:txBody>
+                  <a:tcPr marL="91440" marR="91440" marT="45720" marB="45720" anchor="ctr">
+                    <a:lnL w="6350" cap="flat" cmpd="sng" algn="ctr">
+                      <a:solidFill>
+                        <a:srgbClr val="E6DECB"/>
+                      </a:solidFill>
+                      <a:prstDash val="solid"/>
+                      <a:round/>
+                      <a:headEnd type="none" w="med" len="med"/>
+                      <a:tailEnd type="none" w="med" len="med"/>
+                    </a:lnL>
+                    <a:lnR w="6350" cap="flat" cmpd="sng" algn="ctr">
+                      <a:solidFill>
+                        <a:srgbClr val="E6DECB"/>
+                      </a:solidFill>
+                      <a:prstDash val="solid"/>
+                      <a:round/>
+                      <a:headEnd type="none" w="med" len="med"/>
+                      <a:tailEnd type="none" w="med" len="med"/>
+                    </a:lnR>
+                    <a:lnT w="6350" cap="flat" cmpd="sng" algn="ctr">
+                      <a:solidFill>
+                        <a:srgbClr val="E6DECB"/>
+                      </a:solidFill>
+                      <a:prstDash val="solid"/>
+                      <a:round/>
+                      <a:headEnd type="none" w="med" len="med"/>
+                      <a:tailEnd type="none" w="med" len="med"/>
+                    </a:lnT>
+                    <a:lnB w="6350" cap="flat" cmpd="sng" algn="ctr">
+                      <a:solidFill>
+                        <a:srgbClr val="E6DECB"/>
+                      </a:solidFill>
+                      <a:prstDash val="solid"/>
+                      <a:round/>
+                      <a:headEnd type="none" w="med" len="med"/>
+                      <a:tailEnd type="none" w="med" len="med"/>
+                    </a:lnB>
+                    <a:solidFill>
+                      <a:srgbClr val="F7F3EA"/>
+                    </a:solidFill>
+                  </a:tcPr>
+                </a:tc>
+              </a:tr>
+              <a:tr h="310896">
+                <a:tc>
+                  <a:txBody>
+                    <a:bodyPr/>
+                    <a:lstStyle/>
+                    <a:p>
+                      <a:pPr algn="l" indent="0" marL="0">
+                        <a:buNone/>
+                      </a:pPr>
+                      <a:r>
+                        <a:rPr lang="en-US" sz="1100" b="1" dirty="0">
+                          <a:solidFill>
+                            <a:srgbClr val="2B2621"/>
+                          </a:solidFill>
+                          <a:latin typeface="Calibri" pitchFamily="34" charset="0"/>
+                          <a:ea typeface="Calibri" pitchFamily="34" charset="-122"/>
+                          <a:cs typeface="Calibri" pitchFamily="34" charset="-120"/>
+                        </a:rPr>
+                        <a:t>Chandigarh</a:t>
+                      </a:r>
+                      <a:endParaRPr lang="en-US" sz="1100" dirty="0">
+                        <a:latin typeface="Calibri" charset="0"/>
+                        <a:ea typeface="Calibri" charset="0"/>
+                        <a:cs typeface="Calibri" charset="0"/>
+                      </a:endParaRPr>
+                    </a:p>
+                  </a:txBody>
+                  <a:tcPr marL="91440" marR="91440" marT="45720" marB="45720" anchor="ctr">
+                    <a:lnL w="6350" cap="flat" cmpd="sng" algn="ctr">
+                      <a:solidFill>
+                        <a:srgbClr val="E6DECB"/>
+                      </a:solidFill>
+                      <a:prstDash val="solid"/>
+                      <a:round/>
+                      <a:headEnd type="none" w="med" len="med"/>
+                      <a:tailEnd type="none" w="med" len="med"/>
+                    </a:lnL>
+                    <a:lnR w="6350" cap="flat" cmpd="sng" algn="ctr">
+                      <a:solidFill>
+                        <a:srgbClr val="E6DECB"/>
+                      </a:solidFill>
+                      <a:prstDash val="solid"/>
+                      <a:round/>
+                      <a:headEnd type="none" w="med" len="med"/>
+                      <a:tailEnd type="none" w="med" len="med"/>
+                    </a:lnR>
+                    <a:lnT w="6350" cap="flat" cmpd="sng" algn="ctr">
+                      <a:solidFill>
+                        <a:srgbClr val="E6DECB"/>
+                      </a:solidFill>
+                      <a:prstDash val="solid"/>
+                      <a:round/>
+                      <a:headEnd type="none" w="med" len="med"/>
+                      <a:tailEnd type="none" w="med" len="med"/>
+                    </a:lnT>
+                    <a:lnB w="6350" cap="flat" cmpd="sng" algn="ctr">
+                      <a:solidFill>
+                        <a:srgbClr val="E6DECB"/>
+                      </a:solidFill>
+                      <a:prstDash val="solid"/>
+                      <a:round/>
+                      <a:headEnd type="none" w="med" len="med"/>
+                      <a:tailEnd type="none" w="med" len="med"/>
+                    </a:lnB>
+                    <a:solidFill>
+                      <a:srgbClr val="FFFFFF"/>
+                    </a:solidFill>
+                  </a:tcPr>
+                </a:tc>
+                <a:tc>
+                  <a:txBody>
+                    <a:bodyPr/>
+                    <a:lstStyle/>
+                    <a:p>
+                      <a:pPr algn="l" indent="0" marL="0">
+                        <a:buNone/>
+                      </a:pPr>
+                      <a:r>
+                        <a:rPr lang="en-US" sz="1100" dirty="0">
+                          <a:solidFill>
+                            <a:srgbClr val="2A2621"/>
+                          </a:solidFill>
+                          <a:latin typeface="Cambria" pitchFamily="34" charset="0"/>
+                          <a:ea typeface="Cambria" pitchFamily="34" charset="-122"/>
+                          <a:cs typeface="Cambria" pitchFamily="34" charset="-120"/>
+                        </a:rPr>
+                        <a:t>PVR Nexus Elante</a:t>
+                      </a:r>
+                      <a:endParaRPr lang="en-US" sz="1100" dirty="0">
+                        <a:latin typeface="Cambria" charset="0"/>
+                        <a:ea typeface="Cambria" charset="0"/>
+                        <a:cs typeface="Cambria" charset="0"/>
+                      </a:endParaRPr>
+                    </a:p>
+                  </a:txBody>
+                  <a:tcPr marL="91440" marR="91440" marT="45720" marB="45720" anchor="ctr">
+                    <a:lnL w="6350" cap="flat" cmpd="sng" algn="ctr">
+                      <a:solidFill>
+                        <a:srgbClr val="E6DECB"/>
+                      </a:solidFill>
+                      <a:prstDash val="solid"/>
+                      <a:round/>
+                      <a:headEnd type="none" w="med" len="med"/>
+                      <a:tailEnd type="none" w="med" len="med"/>
+                    </a:lnL>
+                    <a:lnR w="6350" cap="flat" cmpd="sng" algn="ctr">
+                      <a:solidFill>
+                        <a:srgbClr val="E6DECB"/>
+                      </a:solidFill>
+                      <a:prstDash val="solid"/>
+                      <a:round/>
+                      <a:headEnd type="none" w="med" len="med"/>
+                      <a:tailEnd type="none" w="med" len="med"/>
+                    </a:lnR>
+                    <a:lnT w="6350" cap="flat" cmpd="sng" algn="ctr">
+                      <a:solidFill>
+                        <a:srgbClr val="E6DECB"/>
+                      </a:solidFill>
+                      <a:prstDash val="solid"/>
+                      <a:round/>
+                      <a:headEnd type="none" w="med" len="med"/>
+                      <a:tailEnd type="none" w="med" len="med"/>
+                    </a:lnT>
+                    <a:lnB w="6350" cap="flat" cmpd="sng" algn="ctr">
+                      <a:solidFill>
+                        <a:srgbClr val="E6DECB"/>
+                      </a:solidFill>
+                      <a:prstDash val="solid"/>
+                      <a:round/>
+                      <a:headEnd type="none" w="med" len="med"/>
+                      <a:tailEnd type="none" w="med" len="med"/>
+                    </a:lnB>
+                    <a:solidFill>
+                      <a:srgbClr val="FFFFFF"/>
+                    </a:solidFill>
+                  </a:tcPr>
+                </a:tc>
+                <a:tc>
+                  <a:txBody>
+                    <a:bodyPr/>
+                    <a:lstStyle/>
+                    <a:p>
+                      <a:pPr algn="ctr" indent="0" marL="0">
+                        <a:buNone/>
+                      </a:pPr>
+                      <a:r>
+                        <a:rPr lang="en-US" sz="1100" dirty="0">
+                          <a:solidFill>
+                            <a:srgbClr val="2A2621"/>
+                          </a:solidFill>
+                          <a:latin typeface="Calibri" pitchFamily="34" charset="0"/>
+                          <a:ea typeface="Calibri" pitchFamily="34" charset="-122"/>
+                          <a:cs typeface="Calibri" pitchFamily="34" charset="-120"/>
+                        </a:rPr>
+                        <a:t>8</a:t>
+                      </a:r>
+                      <a:endParaRPr lang="en-US" sz="1100" dirty="0">
+                        <a:latin typeface="Calibri" charset="0"/>
+                        <a:ea typeface="Calibri" charset="0"/>
+                        <a:cs typeface="Calibri" charset="0"/>
+                      </a:endParaRPr>
+                    </a:p>
+                  </a:txBody>
+                  <a:tcPr marL="91440" marR="91440" marT="45720" marB="45720" anchor="ctr">
+                    <a:lnL w="6350" cap="flat" cmpd="sng" algn="ctr">
+                      <a:solidFill>
+                        <a:srgbClr val="E6DECB"/>
+                      </a:solidFill>
+                      <a:prstDash val="solid"/>
+                      <a:round/>
+                      <a:headEnd type="none" w="med" len="med"/>
+                      <a:tailEnd type="none" w="med" len="med"/>
+                    </a:lnL>
+                    <a:lnR w="6350" cap="flat" cmpd="sng" algn="ctr">
+                      <a:solidFill>
+                        <a:srgbClr val="E6DECB"/>
+                      </a:solidFill>
+                      <a:prstDash val="solid"/>
+                      <a:round/>
+                      <a:headEnd type="none" w="med" len="med"/>
+                      <a:tailEnd type="none" w="med" len="med"/>
+                    </a:lnR>
+                    <a:lnT w="6350" cap="flat" cmpd="sng" algn="ctr">
+                      <a:solidFill>
+                        <a:srgbClr val="E6DECB"/>
+                      </a:solidFill>
+                      <a:prstDash val="solid"/>
+                      <a:round/>
+                      <a:headEnd type="none" w="med" len="med"/>
+                      <a:tailEnd type="none" w="med" len="med"/>
+                    </a:lnT>
+                    <a:lnB w="6350" cap="flat" cmpd="sng" algn="ctr">
+                      <a:solidFill>
+                        <a:srgbClr val="E6DECB"/>
+                      </a:solidFill>
+                      <a:prstDash val="solid"/>
+                      <a:round/>
+                      <a:headEnd type="none" w="med" len="med"/>
+                      <a:tailEnd type="none" w="med" len="med"/>
+                    </a:lnB>
+                    <a:solidFill>
+                      <a:srgbClr val="FFFFFF"/>
+                    </a:solidFill>
+                  </a:tcPr>
+                </a:tc>
+                <a:tc>
+                  <a:txBody>
+                    <a:bodyPr/>
+                    <a:lstStyle/>
+                    <a:p>
+                      <a:pPr algn="ctr" indent="0" marL="0">
+                        <a:buNone/>
+                      </a:pPr>
+                      <a:r>
+                        <a:rPr lang="en-US" sz="1100" dirty="0">
+                          <a:solidFill>
+                            <a:srgbClr val="2A2621"/>
+                          </a:solidFill>
+                          <a:latin typeface="Calibri" pitchFamily="34" charset="0"/>
+                          <a:ea typeface="Calibri" pitchFamily="34" charset="-122"/>
+                          <a:cs typeface="Calibri" pitchFamily="34" charset="-120"/>
+                        </a:rPr>
+                        <a:t>1,599</a:t>
+                      </a:r>
+                      <a:endParaRPr lang="en-US" sz="1100" dirty="0">
+                        <a:latin typeface="Calibri" charset="0"/>
+                        <a:ea typeface="Calibri" charset="0"/>
+                        <a:cs typeface="Calibri" charset="0"/>
+                      </a:endParaRPr>
+                    </a:p>
+                  </a:txBody>
+                  <a:tcPr marL="91440" marR="91440" marT="45720" marB="45720" anchor="ctr">
+                    <a:lnL w="6350" cap="flat" cmpd="sng" algn="ctr">
+                      <a:solidFill>
+                        <a:srgbClr val="E6DECB"/>
+                      </a:solidFill>
+                      <a:prstDash val="solid"/>
+                      <a:round/>
+                      <a:headEnd type="none" w="med" len="med"/>
+                      <a:tailEnd type="none" w="med" len="med"/>
+                    </a:lnL>
+                    <a:lnR w="6350" cap="flat" cmpd="sng" algn="ctr">
+                      <a:solidFill>
+                        <a:srgbClr val="E6DECB"/>
+                      </a:solidFill>
+                      <a:prstDash val="solid"/>
+                      <a:round/>
+                      <a:headEnd type="none" w="med" len="med"/>
+                      <a:tailEnd type="none" w="med" len="med"/>
+                    </a:lnR>
+                    <a:lnT w="6350" cap="flat" cmpd="sng" algn="ctr">
+                      <a:solidFill>
+                        <a:srgbClr val="E6DECB"/>
+                      </a:solidFill>
+                      <a:prstDash val="solid"/>
+                      <a:round/>
+                      <a:headEnd type="none" w="med" len="med"/>
+                      <a:tailEnd type="none" w="med" len="med"/>
+                    </a:lnT>
+                    <a:lnB w="6350" cap="flat" cmpd="sng" algn="ctr">
+                      <a:solidFill>
+                        <a:srgbClr val="E6DECB"/>
+                      </a:solidFill>
+                      <a:prstDash val="solid"/>
+                      <a:round/>
+                      <a:headEnd type="none" w="med" len="med"/>
+                      <a:tailEnd type="none" w="med" len="med"/>
+                    </a:lnB>
+                    <a:solidFill>
+                      <a:srgbClr val="FFFFFF"/>
+                    </a:solidFill>
+                  </a:tcPr>
+                </a:tc>
+                <a:tc>
+                  <a:txBody>
+                    <a:bodyPr/>
+                    <a:lstStyle/>
+                    <a:p>
+                      <a:pPr algn="ctr" indent="0" marL="0">
+                        <a:buNone/>
+                      </a:pPr>
+                      <a:r>
+                        <a:rPr lang="en-US" sz="1100" dirty="0">
+                          <a:solidFill>
+                            <a:srgbClr val="2A2621"/>
+                          </a:solidFill>
+                          <a:latin typeface="Calibri" pitchFamily="34" charset="0"/>
+                          <a:ea typeface="Calibri" pitchFamily="34" charset="-122"/>
+                          <a:cs typeface="Calibri" pitchFamily="34" charset="-120"/>
+                        </a:rPr>
+                        <a:t>6×6</a:t>
+                      </a:r>
+                      <a:endParaRPr lang="en-US" sz="1100" dirty="0">
+                        <a:latin typeface="Calibri" charset="0"/>
+                        <a:ea typeface="Calibri" charset="0"/>
+                        <a:cs typeface="Calibri" charset="0"/>
+                      </a:endParaRPr>
+                    </a:p>
+                  </a:txBody>
+                  <a:tcPr marL="91440" marR="91440" marT="45720" marB="45720" anchor="ctr">
+                    <a:lnL w="6350" cap="flat" cmpd="sng" algn="ctr">
+                      <a:solidFill>
+                        <a:srgbClr val="E6DECB"/>
+                      </a:solidFill>
+                      <a:prstDash val="solid"/>
+                      <a:round/>
+                      <a:headEnd type="none" w="med" len="med"/>
+                      <a:tailEnd type="none" w="med" len="med"/>
+                    </a:lnL>
+                    <a:lnR w="6350" cap="flat" cmpd="sng" algn="ctr">
+                      <a:solidFill>
+                        <a:srgbClr val="E6DECB"/>
+                      </a:solidFill>
+                      <a:prstDash val="solid"/>
+                      <a:round/>
+                      <a:headEnd type="none" w="med" len="med"/>
+                      <a:tailEnd type="none" w="med" len="med"/>
+                    </a:lnR>
+                    <a:lnT w="6350" cap="flat" cmpd="sng" algn="ctr">
+                      <a:solidFill>
+                        <a:srgbClr val="E6DECB"/>
+                      </a:solidFill>
+                      <a:prstDash val="solid"/>
+                      <a:round/>
+                      <a:headEnd type="none" w="med" len="med"/>
+                      <a:tailEnd type="none" w="med" len="med"/>
+                    </a:lnT>
+                    <a:lnB w="6350" cap="flat" cmpd="sng" algn="ctr">
+                      <a:solidFill>
+                        <a:srgbClr val="E6DECB"/>
+                      </a:solidFill>
+                      <a:prstDash val="solid"/>
+                      <a:round/>
+                      <a:headEnd type="none" w="med" len="med"/>
+                      <a:tailEnd type="none" w="med" len="med"/>
+                    </a:lnB>
+                    <a:solidFill>
+                      <a:srgbClr val="FFFFFF"/>
+                    </a:solidFill>
+                  </a:tcPr>
+                </a:tc>
+              </a:tr>
+              <a:tr h="310896">
+                <a:tc>
+                  <a:txBody>
+                    <a:bodyPr/>
+                    <a:lstStyle/>
+                    <a:p>
+                      <a:pPr algn="l" indent="0" marL="0">
+                        <a:buNone/>
+                      </a:pPr>
+                      <a:r>
+                        <a:rPr lang="en-US" sz="1100" b="1" dirty="0">
+                          <a:solidFill>
+                            <a:srgbClr val="2B2621"/>
+                          </a:solidFill>
+                          <a:latin typeface="Calibri" pitchFamily="34" charset="0"/>
+                          <a:ea typeface="Calibri" pitchFamily="34" charset="-122"/>
+                          <a:cs typeface="Calibri" pitchFamily="34" charset="-120"/>
+                        </a:rPr>
+                        <a:t>Lucknow</a:t>
+                      </a:r>
+                      <a:endParaRPr lang="en-US" sz="1100" dirty="0">
+                        <a:latin typeface="Calibri" charset="0"/>
+                        <a:ea typeface="Calibri" charset="0"/>
+                        <a:cs typeface="Calibri" charset="0"/>
+                      </a:endParaRPr>
+                    </a:p>
+                  </a:txBody>
+                  <a:tcPr marL="91440" marR="91440" marT="45720" marB="45720" anchor="ctr">
+                    <a:lnL w="6350" cap="flat" cmpd="sng" algn="ctr">
+                      <a:solidFill>
+                        <a:srgbClr val="E6DECB"/>
+                      </a:solidFill>
+                      <a:prstDash val="solid"/>
+                      <a:round/>
+                      <a:headEnd type="none" w="med" len="med"/>
+                      <a:tailEnd type="none" w="med" len="med"/>
+                    </a:lnL>
+                    <a:lnR w="6350" cap="flat" cmpd="sng" algn="ctr">
+                      <a:solidFill>
+                        <a:srgbClr val="E6DECB"/>
+                      </a:solidFill>
+                      <a:prstDash val="solid"/>
+                      <a:round/>
+                      <a:headEnd type="none" w="med" len="med"/>
+                      <a:tailEnd type="none" w="med" len="med"/>
+                    </a:lnR>
+                    <a:lnT w="6350" cap="flat" cmpd="sng" algn="ctr">
+                      <a:solidFill>
+                        <a:srgbClr val="E6DECB"/>
+                      </a:solidFill>
+                      <a:prstDash val="solid"/>
+                      <a:round/>
+                      <a:headEnd type="none" w="med" len="med"/>
+                      <a:tailEnd type="none" w="med" len="med"/>
+                    </a:lnT>
+                    <a:lnB w="6350" cap="flat" cmpd="sng" algn="ctr">
+                      <a:solidFill>
+                        <a:srgbClr val="E6DECB"/>
+                      </a:solidFill>
+                      <a:prstDash val="solid"/>
+                      <a:round/>
+                      <a:headEnd type="none" w="med" len="med"/>
+                      <a:tailEnd type="none" w="med" len="med"/>
+                    </a:lnB>
+                    <a:solidFill>
+                      <a:srgbClr val="F7F3EA"/>
+                    </a:solidFill>
+                  </a:tcPr>
+                </a:tc>
+                <a:tc>
+                  <a:txBody>
+                    <a:bodyPr/>
+                    <a:lstStyle/>
+                    <a:p>
+                      <a:pPr algn="l" indent="0" marL="0">
+                        <a:buNone/>
+                      </a:pPr>
+                      <a:r>
+                        <a:rPr lang="en-US" sz="1100" dirty="0">
+                          <a:solidFill>
+                            <a:srgbClr val="2A2621"/>
+                          </a:solidFill>
+                          <a:latin typeface="Cambria" pitchFamily="34" charset="0"/>
+                          <a:ea typeface="Cambria" pitchFamily="34" charset="-122"/>
+                          <a:cs typeface="Cambria" pitchFamily="34" charset="-120"/>
+                        </a:rPr>
+                        <a:t>PVR Superplex · Lulu</a:t>
+                      </a:r>
+                      <a:endParaRPr lang="en-US" sz="1100" dirty="0">
+                        <a:latin typeface="Cambria" charset="0"/>
+                        <a:ea typeface="Cambria" charset="0"/>
+                        <a:cs typeface="Cambria" charset="0"/>
+                      </a:endParaRPr>
+                    </a:p>
+                  </a:txBody>
+                  <a:tcPr marL="91440" marR="91440" marT="45720" marB="45720" anchor="ctr">
+                    <a:lnL w="6350" cap="flat" cmpd="sng" algn="ctr">
+                      <a:solidFill>
+                        <a:srgbClr val="E6DECB"/>
+                      </a:solidFill>
+                      <a:prstDash val="solid"/>
+                      <a:round/>
+                      <a:headEnd type="none" w="med" len="med"/>
+                      <a:tailEnd type="none" w="med" len="med"/>
+                    </a:lnL>
+                    <a:lnR w="6350" cap="flat" cmpd="sng" algn="ctr">
+                      <a:solidFill>
+                        <a:srgbClr val="E6DECB"/>
+                      </a:solidFill>
+                      <a:prstDash val="solid"/>
+                      <a:round/>
+                      <a:headEnd type="none" w="med" len="med"/>
+                      <a:tailEnd type="none" w="med" len="med"/>
+                    </a:lnR>
+                    <a:lnT w="6350" cap="flat" cmpd="sng" algn="ctr">
+                      <a:solidFill>
+                        <a:srgbClr val="E6DECB"/>
+                      </a:solidFill>
+                      <a:prstDash val="solid"/>
+                      <a:round/>
+                      <a:headEnd type="none" w="med" len="med"/>
+                      <a:tailEnd type="none" w="med" len="med"/>
+                    </a:lnT>
+                    <a:lnB w="6350" cap="flat" cmpd="sng" algn="ctr">
+                      <a:solidFill>
+                        <a:srgbClr val="E6DECB"/>
+                      </a:solidFill>
+                      <a:prstDash val="solid"/>
+                      <a:round/>
+                      <a:headEnd type="none" w="med" len="med"/>
+                      <a:tailEnd type="none" w="med" len="med"/>
+                    </a:lnB>
+                    <a:solidFill>
+                      <a:srgbClr val="F7F3EA"/>
+                    </a:solidFill>
+                  </a:tcPr>
+                </a:tc>
+                <a:tc>
+                  <a:txBody>
+                    <a:bodyPr/>
+                    <a:lstStyle/>
+                    <a:p>
+                      <a:pPr algn="ctr" indent="0" marL="0">
+                        <a:buNone/>
+                      </a:pPr>
+                      <a:r>
+                        <a:rPr lang="en-US" sz="1100" dirty="0">
+                          <a:solidFill>
+                            <a:srgbClr val="2A2621"/>
+                          </a:solidFill>
+                          <a:latin typeface="Calibri" pitchFamily="34" charset="0"/>
+                          <a:ea typeface="Calibri" pitchFamily="34" charset="-122"/>
+                          <a:cs typeface="Calibri" pitchFamily="34" charset="-120"/>
+                        </a:rPr>
+                        <a:t>11</a:t>
+                      </a:r>
+                      <a:endParaRPr lang="en-US" sz="1100" dirty="0">
+                        <a:latin typeface="Calibri" charset="0"/>
+                        <a:ea typeface="Calibri" charset="0"/>
+                        <a:cs typeface="Calibri" charset="0"/>
+                      </a:endParaRPr>
+                    </a:p>
+                  </a:txBody>
+                  <a:tcPr marL="91440" marR="91440" marT="45720" marB="45720" anchor="ctr">
+                    <a:lnL w="6350" cap="flat" cmpd="sng" algn="ctr">
+                      <a:solidFill>
+                        <a:srgbClr val="E6DECB"/>
+                      </a:solidFill>
+                      <a:prstDash val="solid"/>
+                      <a:round/>
+                      <a:headEnd type="none" w="med" len="med"/>
+                      <a:tailEnd type="none" w="med" len="med"/>
+                    </a:lnL>
+                    <a:lnR w="6350" cap="flat" cmpd="sng" algn="ctr">
+                      <a:solidFill>
+                        <a:srgbClr val="E6DECB"/>
+                      </a:solidFill>
+                      <a:prstDash val="solid"/>
+                      <a:round/>
+                      <a:headEnd type="none" w="med" len="med"/>
+                      <a:tailEnd type="none" w="med" len="med"/>
+                    </a:lnR>
+                    <a:lnT w="6350" cap="flat" cmpd="sng" algn="ctr">
+                      <a:solidFill>
+                        <a:srgbClr val="E6DECB"/>
+                      </a:solidFill>
+                      <a:prstDash val="solid"/>
+                      <a:round/>
+                      <a:headEnd type="none" w="med" len="med"/>
+                      <a:tailEnd type="none" w="med" len="med"/>
+                    </a:lnT>
+                    <a:lnB w="6350" cap="flat" cmpd="sng" algn="ctr">
+                      <a:solidFill>
+                        <a:srgbClr val="E6DECB"/>
+                      </a:solidFill>
+                      <a:prstDash val="solid"/>
+                      <a:round/>
+                      <a:headEnd type="none" w="med" len="med"/>
+                      <a:tailEnd type="none" w="med" len="med"/>
+                    </a:lnB>
+                    <a:solidFill>
+                      <a:srgbClr val="F7F3EA"/>
+                    </a:solidFill>
+                  </a:tcPr>
+                </a:tc>
+                <a:tc>
+                  <a:txBody>
+                    <a:bodyPr/>
+                    <a:lstStyle/>
+                    <a:p>
+                      <a:pPr algn="ctr" indent="0" marL="0">
+                        <a:buNone/>
+                      </a:pPr>
+                      <a:r>
+                        <a:rPr lang="en-US" sz="1100" dirty="0">
+                          <a:solidFill>
+                            <a:srgbClr val="2A2621"/>
+                          </a:solidFill>
+                          <a:latin typeface="Calibri" pitchFamily="34" charset="0"/>
+                          <a:ea typeface="Calibri" pitchFamily="34" charset="-122"/>
+                          <a:cs typeface="Calibri" pitchFamily="34" charset="-120"/>
+                        </a:rPr>
+                        <a:t>1,841</a:t>
+                      </a:r>
+                      <a:endParaRPr lang="en-US" sz="1100" dirty="0">
+                        <a:latin typeface="Calibri" charset="0"/>
+                        <a:ea typeface="Calibri" charset="0"/>
+                        <a:cs typeface="Calibri" charset="0"/>
+                      </a:endParaRPr>
+                    </a:p>
+                  </a:txBody>
+                  <a:tcPr marL="91440" marR="91440" marT="45720" marB="45720" anchor="ctr">
+                    <a:lnL w="6350" cap="flat" cmpd="sng" algn="ctr">
+                      <a:solidFill>
+                        <a:srgbClr val="E6DECB"/>
+                      </a:solidFill>
+                      <a:prstDash val="solid"/>
+                      <a:round/>
+                      <a:headEnd type="none" w="med" len="med"/>
+                      <a:tailEnd type="none" w="med" len="med"/>
+                    </a:lnL>
+                    <a:lnR w="6350" cap="flat" cmpd="sng" algn="ctr">
+                      <a:solidFill>
+                        <a:srgbClr val="E6DECB"/>
+                      </a:solidFill>
+                      <a:prstDash val="solid"/>
+                      <a:round/>
+                      <a:headEnd type="none" w="med" len="med"/>
+                      <a:tailEnd type="none" w="med" len="med"/>
+                    </a:lnR>
+                    <a:lnT w="6350" cap="flat" cmpd="sng" algn="ctr">
+                      <a:solidFill>
+                        <a:srgbClr val="E6DECB"/>
+                      </a:solidFill>
+                      <a:prstDash val="solid"/>
+                      <a:round/>
+                      <a:headEnd type="none" w="med" len="med"/>
+                      <a:tailEnd type="none" w="med" len="med"/>
+                    </a:lnT>
+                    <a:lnB w="6350" cap="flat" cmpd="sng" algn="ctr">
+                      <a:solidFill>
+                        <a:srgbClr val="E6DECB"/>
+                      </a:solidFill>
+                      <a:prstDash val="solid"/>
+                      <a:round/>
+                      <a:headEnd type="none" w="med" len="med"/>
+                      <a:tailEnd type="none" w="med" len="med"/>
+                    </a:lnB>
+                    <a:solidFill>
+                      <a:srgbClr val="F7F3EA"/>
+                    </a:solidFill>
+                  </a:tcPr>
+                </a:tc>
+                <a:tc>
+                  <a:txBody>
+                    <a:bodyPr/>
+                    <a:lstStyle/>
+                    <a:p>
+                      <a:pPr algn="ctr" indent="0" marL="0">
+                        <a:buNone/>
+                      </a:pPr>
+                      <a:r>
+                        <a:rPr lang="en-US" sz="1100" dirty="0">
+                          <a:solidFill>
+                            <a:srgbClr val="2A2621"/>
+                          </a:solidFill>
+                          <a:latin typeface="Calibri" pitchFamily="34" charset="0"/>
+                          <a:ea typeface="Calibri" pitchFamily="34" charset="-122"/>
+                          <a:cs typeface="Calibri" pitchFamily="34" charset="-120"/>
+                        </a:rPr>
+                        <a:t>8×8</a:t>
+                      </a:r>
+                      <a:endParaRPr lang="en-US" sz="1100" dirty="0">
+                        <a:latin typeface="Calibri" charset="0"/>
+                        <a:ea typeface="Calibri" charset="0"/>
+                        <a:cs typeface="Calibri" charset="0"/>
+                      </a:endParaRPr>
+                    </a:p>
+                  </a:txBody>
+                  <a:tcPr marL="91440" marR="91440" marT="45720" marB="45720" anchor="ctr">
+                    <a:lnL w="6350" cap="flat" cmpd="sng" algn="ctr">
+                      <a:solidFill>
+                        <a:srgbClr val="E6DECB"/>
+                      </a:solidFill>
+                      <a:prstDash val="solid"/>
+                      <a:round/>
+                      <a:headEnd type="none" w="med" len="med"/>
+                      <a:tailEnd type="none" w="med" len="med"/>
+                    </a:lnL>
+                    <a:lnR w="6350" cap="flat" cmpd="sng" algn="ctr">
+                      <a:solidFill>
+                        <a:srgbClr val="E6DECB"/>
+                      </a:solidFill>
+                      <a:prstDash val="solid"/>
+                      <a:round/>
+                      <a:headEnd type="none" w="med" len="med"/>
+                      <a:tailEnd type="none" w="med" len="med"/>
+                    </a:lnR>
+                    <a:lnT w="6350" cap="flat" cmpd="sng" algn="ctr">
+                      <a:solidFill>
+                        <a:srgbClr val="E6DECB"/>
+                      </a:solidFill>
+                      <a:prstDash val="solid"/>
+                      <a:round/>
+                      <a:headEnd type="none" w="med" len="med"/>
+                      <a:tailEnd type="none" w="med" len="med"/>
+                    </a:lnT>
+                    <a:lnB w="6350" cap="flat" cmpd="sng" algn="ctr">
+                      <a:solidFill>
+                        <a:srgbClr val="E6DECB"/>
+                      </a:solidFill>
+                      <a:prstDash val="solid"/>
+                      <a:round/>
+                      <a:headEnd type="none" w="med" len="med"/>
+                      <a:tailEnd type="none" w="med" len="med"/>
+                    </a:lnB>
+                    <a:solidFill>
+                      <a:srgbClr val="F7F3EA"/>
+                    </a:solidFill>
+                  </a:tcPr>
+                </a:tc>
+              </a:tr>
+              <a:tr h="310896">
+                <a:tc>
+                  <a:txBody>
+                    <a:bodyPr/>
+                    <a:lstStyle/>
+                    <a:p>
+                      <a:pPr algn="l" indent="0" marL="0">
+                        <a:buNone/>
+                      </a:pPr>
+                      <a:r>
+                        <a:rPr lang="en-US" sz="1100" b="1" dirty="0">
+                          <a:solidFill>
+                            <a:srgbClr val="2B2621"/>
+                          </a:solidFill>
+                          <a:latin typeface="Calibri" pitchFamily="34" charset="0"/>
+                          <a:ea typeface="Calibri" pitchFamily="34" charset="-122"/>
+                          <a:cs typeface="Calibri" pitchFamily="34" charset="-120"/>
+                        </a:rPr>
+                        <a:t>Kolkata</a:t>
+                      </a:r>
+                      <a:endParaRPr lang="en-US" sz="1100" dirty="0">
+                        <a:latin typeface="Calibri" charset="0"/>
+                        <a:ea typeface="Calibri" charset="0"/>
+                        <a:cs typeface="Calibri" charset="0"/>
+                      </a:endParaRPr>
+                    </a:p>
+                  </a:txBody>
+                  <a:tcPr marL="91440" marR="91440" marT="45720" marB="45720" anchor="ctr">
+                    <a:lnL w="6350" cap="flat" cmpd="sng" algn="ctr">
+                      <a:solidFill>
+                        <a:srgbClr val="E6DECB"/>
+                      </a:solidFill>
+                      <a:prstDash val="solid"/>
+                      <a:round/>
+                      <a:headEnd type="none" w="med" len="med"/>
+                      <a:tailEnd type="none" w="med" len="med"/>
+                    </a:lnL>
+                    <a:lnR w="6350" cap="flat" cmpd="sng" algn="ctr">
+                      <a:solidFill>
+                        <a:srgbClr val="E6DECB"/>
+                      </a:solidFill>
+                      <a:prstDash val="solid"/>
+                      <a:round/>
+                      <a:headEnd type="none" w="med" len="med"/>
+                      <a:tailEnd type="none" w="med" len="med"/>
+                    </a:lnR>
+                    <a:lnT w="6350" cap="flat" cmpd="sng" algn="ctr">
+                      <a:solidFill>
+                        <a:srgbClr val="E6DECB"/>
+                      </a:solidFill>
+                      <a:prstDash val="solid"/>
+                      <a:round/>
+                      <a:headEnd type="none" w="med" len="med"/>
+                      <a:tailEnd type="none" w="med" len="med"/>
+                    </a:lnT>
+                    <a:lnB w="6350" cap="flat" cmpd="sng" algn="ctr">
+                      <a:solidFill>
+                        <a:srgbClr val="E6DECB"/>
+                      </a:solidFill>
+                      <a:prstDash val="solid"/>
+                      <a:round/>
+                      <a:headEnd type="none" w="med" len="med"/>
+                      <a:tailEnd type="none" w="med" len="med"/>
+                    </a:lnB>
+                    <a:solidFill>
+                      <a:srgbClr val="FFFFFF"/>
+                    </a:solidFill>
+                  </a:tcPr>
+                </a:tc>
+                <a:tc>
+                  <a:txBody>
+                    <a:bodyPr/>
+                    <a:lstStyle/>
+                    <a:p>
+                      <a:pPr algn="l" indent="0" marL="0">
+                        <a:buNone/>
+                      </a:pPr>
+                      <a:r>
+                        <a:rPr lang="en-US" sz="1100" dirty="0">
+                          <a:solidFill>
+                            <a:srgbClr val="2A2621"/>
+                          </a:solidFill>
+                          <a:latin typeface="Cambria" pitchFamily="34" charset="0"/>
+                          <a:ea typeface="Cambria" pitchFamily="34" charset="-122"/>
+                          <a:cs typeface="Cambria" pitchFamily="34" charset="-120"/>
+                        </a:rPr>
+                        <a:t>INOX City Centre</a:t>
+                      </a:r>
+                      <a:endParaRPr lang="en-US" sz="1100" dirty="0">
+                        <a:latin typeface="Cambria" charset="0"/>
+                        <a:ea typeface="Cambria" charset="0"/>
+                        <a:cs typeface="Cambria" charset="0"/>
+                      </a:endParaRPr>
+                    </a:p>
+                  </a:txBody>
+                  <a:tcPr marL="91440" marR="91440" marT="45720" marB="45720" anchor="ctr">
+                    <a:lnL w="6350" cap="flat" cmpd="sng" algn="ctr">
+                      <a:solidFill>
+                        <a:srgbClr val="E6DECB"/>
+                      </a:solidFill>
+                      <a:prstDash val="solid"/>
+                      <a:round/>
+                      <a:headEnd type="none" w="med" len="med"/>
+                      <a:tailEnd type="none" w="med" len="med"/>
+                    </a:lnL>
+                    <a:lnR w="6350" cap="flat" cmpd="sng" algn="ctr">
+                      <a:solidFill>
+                        <a:srgbClr val="E6DECB"/>
+                      </a:solidFill>
+                      <a:prstDash val="solid"/>
+                      <a:round/>
+                      <a:headEnd type="none" w="med" len="med"/>
+                      <a:tailEnd type="none" w="med" len="med"/>
+                    </a:lnR>
+                    <a:lnT w="6350" cap="flat" cmpd="sng" algn="ctr">
+                      <a:solidFill>
+                        <a:srgbClr val="E6DECB"/>
+                      </a:solidFill>
+                      <a:prstDash val="solid"/>
+                      <a:round/>
+                      <a:headEnd type="none" w="med" len="med"/>
+                      <a:tailEnd type="none" w="med" len="med"/>
+                    </a:lnT>
+                    <a:lnB w="6350" cap="flat" cmpd="sng" algn="ctr">
+                      <a:solidFill>
+                        <a:srgbClr val="E6DECB"/>
+                      </a:solidFill>
+                      <a:prstDash val="solid"/>
+                      <a:round/>
+                      <a:headEnd type="none" w="med" len="med"/>
+                      <a:tailEnd type="none" w="med" len="med"/>
+                    </a:lnB>
+                    <a:solidFill>
+                      <a:srgbClr val="FFFFFF"/>
+                    </a:solidFill>
+                  </a:tcPr>
+                </a:tc>
+                <a:tc>
+                  <a:txBody>
+                    <a:bodyPr/>
+                    <a:lstStyle/>
+                    <a:p>
+                      <a:pPr algn="ctr" indent="0" marL="0">
+                        <a:buNone/>
+                      </a:pPr>
+                      <a:r>
+                        <a:rPr lang="en-US" sz="1100" dirty="0">
+                          <a:solidFill>
+                            <a:srgbClr val="2A2621"/>
+                          </a:solidFill>
+                          <a:latin typeface="Calibri" pitchFamily="34" charset="0"/>
+                          <a:ea typeface="Calibri" pitchFamily="34" charset="-122"/>
+                          <a:cs typeface="Calibri" pitchFamily="34" charset="-120"/>
+                        </a:rPr>
+                        <a:t>4</a:t>
+                      </a:r>
+                      <a:endParaRPr lang="en-US" sz="1100" dirty="0">
+                        <a:latin typeface="Calibri" charset="0"/>
+                        <a:ea typeface="Calibri" charset="0"/>
+                        <a:cs typeface="Calibri" charset="0"/>
+                      </a:endParaRPr>
+                    </a:p>
+                  </a:txBody>
+                  <a:tcPr marL="91440" marR="91440" marT="45720" marB="45720" anchor="ctr">
+                    <a:lnL w="6350" cap="flat" cmpd="sng" algn="ctr">
+                      <a:solidFill>
+                        <a:srgbClr val="E6DECB"/>
+                      </a:solidFill>
+                      <a:prstDash val="solid"/>
+                      <a:round/>
+                      <a:headEnd type="none" w="med" len="med"/>
+                      <a:tailEnd type="none" w="med" len="med"/>
+                    </a:lnL>
+                    <a:lnR w="6350" cap="flat" cmpd="sng" algn="ctr">
+                      <a:solidFill>
+                        <a:srgbClr val="E6DECB"/>
+                      </a:solidFill>
+                      <a:prstDash val="solid"/>
+                      <a:round/>
+                      <a:headEnd type="none" w="med" len="med"/>
+                      <a:tailEnd type="none" w="med" len="med"/>
+                    </a:lnR>
+                    <a:lnT w="6350" cap="flat" cmpd="sng" algn="ctr">
+                      <a:solidFill>
+                        <a:srgbClr val="E6DECB"/>
+                      </a:solidFill>
+                      <a:prstDash val="solid"/>
+                      <a:round/>
+                      <a:headEnd type="none" w="med" len="med"/>
+                      <a:tailEnd type="none" w="med" len="med"/>
+                    </a:lnT>
+                    <a:lnB w="6350" cap="flat" cmpd="sng" algn="ctr">
+                      <a:solidFill>
+                        <a:srgbClr val="E6DECB"/>
+                      </a:solidFill>
+                      <a:prstDash val="solid"/>
+                      <a:round/>
+                      <a:headEnd type="none" w="med" len="med"/>
+                      <a:tailEnd type="none" w="med" len="med"/>
+                    </a:lnB>
+                    <a:solidFill>
+                      <a:srgbClr val="FFFFFF"/>
+                    </a:solidFill>
+                  </a:tcPr>
+                </a:tc>
+                <a:tc>
+                  <a:txBody>
+                    <a:bodyPr/>
+                    <a:lstStyle/>
+                    <a:p>
+                      <a:pPr algn="ctr" indent="0" marL="0">
+                        <a:buNone/>
+                      </a:pPr>
+                      <a:r>
+                        <a:rPr lang="en-US" sz="1100" dirty="0">
+                          <a:solidFill>
+                            <a:srgbClr val="2A2621"/>
+                          </a:solidFill>
+                          <a:latin typeface="Calibri" pitchFamily="34" charset="0"/>
+                          <a:ea typeface="Calibri" pitchFamily="34" charset="-122"/>
+                          <a:cs typeface="Calibri" pitchFamily="34" charset="-120"/>
+                        </a:rPr>
+                        <a:t>1,144</a:t>
+                      </a:r>
+                      <a:endParaRPr lang="en-US" sz="1100" dirty="0">
+                        <a:latin typeface="Calibri" charset="0"/>
+                        <a:ea typeface="Calibri" charset="0"/>
+                        <a:cs typeface="Calibri" charset="0"/>
+                      </a:endParaRPr>
+                    </a:p>
+                  </a:txBody>
+                  <a:tcPr marL="91440" marR="91440" marT="45720" marB="45720" anchor="ctr">
+                    <a:lnL w="6350" cap="flat" cmpd="sng" algn="ctr">
+                      <a:solidFill>
+                        <a:srgbClr val="E6DECB"/>
+                      </a:solidFill>
+                      <a:prstDash val="solid"/>
+                      <a:round/>
+                      <a:headEnd type="none" w="med" len="med"/>
+                      <a:tailEnd type="none" w="med" len="med"/>
+                    </a:lnL>
+                    <a:lnR w="6350" cap="flat" cmpd="sng" algn="ctr">
+                      <a:solidFill>
+                        <a:srgbClr val="E6DECB"/>
+                      </a:solidFill>
+                      <a:prstDash val="solid"/>
+                      <a:round/>
+                      <a:headEnd type="none" w="med" len="med"/>
+                      <a:tailEnd type="none" w="med" len="med"/>
+                    </a:lnR>
+                    <a:lnT w="6350" cap="flat" cmpd="sng" algn="ctr">
+                      <a:solidFill>
+                        <a:srgbClr val="E6DECB"/>
+                      </a:solidFill>
+                      <a:prstDash val="solid"/>
+                      <a:round/>
+                      <a:headEnd type="none" w="med" len="med"/>
+                      <a:tailEnd type="none" w="med" len="med"/>
+                    </a:lnT>
+                    <a:lnB w="6350" cap="flat" cmpd="sng" algn="ctr">
+                      <a:solidFill>
+                        <a:srgbClr val="E6DECB"/>
+                      </a:solidFill>
+                      <a:prstDash val="solid"/>
+                      <a:round/>
+                      <a:headEnd type="none" w="med" len="med"/>
+                      <a:tailEnd type="none" w="med" len="med"/>
+                    </a:lnB>
+                    <a:solidFill>
+                      <a:srgbClr val="FFFFFF"/>
+                    </a:solidFill>
+                  </a:tcPr>
+                </a:tc>
+                <a:tc>
+                  <a:txBody>
+                    <a:bodyPr/>
+                    <a:lstStyle/>
+                    <a:p>
+                      <a:pPr algn="ctr" indent="0" marL="0">
+                        <a:buNone/>
+                      </a:pPr>
+                      <a:r>
+                        <a:rPr lang="en-US" sz="1100" dirty="0">
+                          <a:solidFill>
+                            <a:srgbClr val="2A2621"/>
+                          </a:solidFill>
+                          <a:latin typeface="Calibri" pitchFamily="34" charset="0"/>
+                          <a:ea typeface="Calibri" pitchFamily="34" charset="-122"/>
+                          <a:cs typeface="Calibri" pitchFamily="34" charset="-120"/>
+                        </a:rPr>
+                        <a:t>8×8</a:t>
+                      </a:r>
+                      <a:endParaRPr lang="en-US" sz="1100" dirty="0">
+                        <a:latin typeface="Calibri" charset="0"/>
+                        <a:ea typeface="Calibri" charset="0"/>
+                        <a:cs typeface="Calibri" charset="0"/>
+                      </a:endParaRPr>
+                    </a:p>
+                  </a:txBody>
+                  <a:tcPr marL="91440" marR="91440" marT="45720" marB="45720" anchor="ctr">
+                    <a:lnL w="6350" cap="flat" cmpd="sng" algn="ctr">
+                      <a:solidFill>
+                        <a:srgbClr val="E6DECB"/>
+                      </a:solidFill>
+                      <a:prstDash val="solid"/>
+                      <a:round/>
+                      <a:headEnd type="none" w="med" len="med"/>
+                      <a:tailEnd type="none" w="med" len="med"/>
+                    </a:lnL>
+                    <a:lnR w="6350" cap="flat" cmpd="sng" algn="ctr">
+                      <a:solidFill>
+                        <a:srgbClr val="E6DECB"/>
+                      </a:solidFill>
+                      <a:prstDash val="solid"/>
+                      <a:round/>
+                      <a:headEnd type="none" w="med" len="med"/>
+                      <a:tailEnd type="none" w="med" len="med"/>
+                    </a:lnR>
+                    <a:lnT w="6350" cap="flat" cmpd="sng" algn="ctr">
+                      <a:solidFill>
+                        <a:srgbClr val="E6DECB"/>
+                      </a:solidFill>
+                      <a:prstDash val="solid"/>
+                      <a:round/>
+                      <a:headEnd type="none" w="med" len="med"/>
+                      <a:tailEnd type="none" w="med" len="med"/>
+                    </a:lnT>
+                    <a:lnB w="6350" cap="flat" cmpd="sng" algn="ctr">
+                      <a:solidFill>
+                        <a:srgbClr val="E6DECB"/>
+                      </a:solidFill>
+                      <a:prstDash val="solid"/>
+                      <a:round/>
+                      <a:headEnd type="none" w="med" len="med"/>
+                      <a:tailEnd type="none" w="med" len="med"/>
+                    </a:lnB>
+                    <a:solidFill>
+                      <a:srgbClr val="FFFFFF"/>
+                    </a:solidFill>
+                  </a:tcPr>
+                </a:tc>
+              </a:tr>
+              <a:tr h="310896">
+                <a:tc>
+                  <a:txBody>
+                    <a:bodyPr/>
+                    <a:lstStyle/>
+                    <a:p>
+                      <a:pPr algn="l" indent="0" marL="0">
+                        <a:buNone/>
+                      </a:pPr>
+                      <a:r>
+                        <a:rPr lang="en-US" sz="1100" b="1" dirty="0">
+                          <a:solidFill>
+                            <a:srgbClr val="2B2621"/>
+                          </a:solidFill>
+                          <a:latin typeface="Calibri" pitchFamily="34" charset="0"/>
+                          <a:ea typeface="Calibri" pitchFamily="34" charset="-122"/>
+                          <a:cs typeface="Calibri" pitchFamily="34" charset="-120"/>
+                        </a:rPr>
+                        <a:t>Kolkata</a:t>
+                      </a:r>
+                      <a:endParaRPr lang="en-US" sz="1100" dirty="0">
+                        <a:latin typeface="Calibri" charset="0"/>
+                        <a:ea typeface="Calibri" charset="0"/>
+                        <a:cs typeface="Calibri" charset="0"/>
+                      </a:endParaRPr>
+                    </a:p>
+                  </a:txBody>
+                  <a:tcPr marL="91440" marR="91440" marT="45720" marB="45720" anchor="ctr">
+                    <a:lnL w="6350" cap="flat" cmpd="sng" algn="ctr">
+                      <a:solidFill>
+                        <a:srgbClr val="E6DECB"/>
+                      </a:solidFill>
+                      <a:prstDash val="solid"/>
+                      <a:round/>
+                      <a:headEnd type="none" w="med" len="med"/>
+                      <a:tailEnd type="none" w="med" len="med"/>
+                    </a:lnL>
+                    <a:lnR w="6350" cap="flat" cmpd="sng" algn="ctr">
+                      <a:solidFill>
+                        <a:srgbClr val="E6DECB"/>
+                      </a:solidFill>
+                      <a:prstDash val="solid"/>
+                      <a:round/>
+                      <a:headEnd type="none" w="med" len="med"/>
+                      <a:tailEnd type="none" w="med" len="med"/>
+                    </a:lnR>
+                    <a:lnT w="6350" cap="flat" cmpd="sng" algn="ctr">
+                      <a:solidFill>
+                        <a:srgbClr val="E6DECB"/>
+                      </a:solidFill>
+                      <a:prstDash val="solid"/>
+                      <a:round/>
+                      <a:headEnd type="none" w="med" len="med"/>
+                      <a:tailEnd type="none" w="med" len="med"/>
+                    </a:lnT>
+                    <a:lnB w="6350" cap="flat" cmpd="sng" algn="ctr">
+                      <a:solidFill>
+                        <a:srgbClr val="E6DECB"/>
+                      </a:solidFill>
+                      <a:prstDash val="solid"/>
+                      <a:round/>
+                      <a:headEnd type="none" w="med" len="med"/>
+                      <a:tailEnd type="none" w="med" len="med"/>
+                    </a:lnB>
+                    <a:solidFill>
+                      <a:srgbClr val="F7F3EA"/>
+                    </a:solidFill>
+                  </a:tcPr>
+                </a:tc>
+                <a:tc>
+                  <a:txBody>
+                    <a:bodyPr/>
+                    <a:lstStyle/>
+                    <a:p>
+                      <a:pPr algn="l" indent="0" marL="0">
+                        <a:buNone/>
+                      </a:pPr>
+                      <a:r>
+                        <a:rPr lang="en-US" sz="1100" dirty="0">
+                          <a:solidFill>
+                            <a:srgbClr val="2A2621"/>
+                          </a:solidFill>
+                          <a:latin typeface="Cambria" pitchFamily="34" charset="0"/>
+                          <a:ea typeface="Cambria" pitchFamily="34" charset="-122"/>
+                          <a:cs typeface="Cambria" pitchFamily="34" charset="-120"/>
+                        </a:rPr>
+                        <a:t>INOX City Centre II</a:t>
+                      </a:r>
+                      <a:endParaRPr lang="en-US" sz="1100" dirty="0">
+                        <a:latin typeface="Cambria" charset="0"/>
+                        <a:ea typeface="Cambria" charset="0"/>
+                        <a:cs typeface="Cambria" charset="0"/>
+                      </a:endParaRPr>
+                    </a:p>
+                  </a:txBody>
+                  <a:tcPr marL="91440" marR="91440" marT="45720" marB="45720" anchor="ctr">
+                    <a:lnL w="6350" cap="flat" cmpd="sng" algn="ctr">
+                      <a:solidFill>
+                        <a:srgbClr val="E6DECB"/>
+                      </a:solidFill>
+                      <a:prstDash val="solid"/>
+                      <a:round/>
+                      <a:headEnd type="none" w="med" len="med"/>
+                      <a:tailEnd type="none" w="med" len="med"/>
+                    </a:lnL>
+                    <a:lnR w="6350" cap="flat" cmpd="sng" algn="ctr">
+                      <a:solidFill>
+                        <a:srgbClr val="E6DECB"/>
+                      </a:solidFill>
+                      <a:prstDash val="solid"/>
+                      <a:round/>
+                      <a:headEnd type="none" w="med" len="med"/>
+                      <a:tailEnd type="none" w="med" len="med"/>
+                    </a:lnR>
+                    <a:lnT w="6350" cap="flat" cmpd="sng" algn="ctr">
+                      <a:solidFill>
+                        <a:srgbClr val="E6DECB"/>
+                      </a:solidFill>
+                      <a:prstDash val="solid"/>
+                      <a:round/>
+                      <a:headEnd type="none" w="med" len="med"/>
+                      <a:tailEnd type="none" w="med" len="med"/>
+                    </a:lnT>
+                    <a:lnB w="6350" cap="flat" cmpd="sng" algn="ctr">
+                      <a:solidFill>
+                        <a:srgbClr val="E6DECB"/>
+                      </a:solidFill>
+                      <a:prstDash val="solid"/>
+                      <a:round/>
+                      <a:headEnd type="none" w="med" len="med"/>
+                      <a:tailEnd type="none" w="med" len="med"/>
+                    </a:lnB>
+                    <a:solidFill>
+                      <a:srgbClr val="F7F3EA"/>
+                    </a:solidFill>
+                  </a:tcPr>
+                </a:tc>
+                <a:tc>
+                  <a:txBody>
+                    <a:bodyPr/>
+                    <a:lstStyle/>
+                    <a:p>
+                      <a:pPr algn="ctr" indent="0" marL="0">
+                        <a:buNone/>
+                      </a:pPr>
+                      <a:r>
+                        <a:rPr lang="en-US" sz="1100" dirty="0">
+                          <a:solidFill>
+                            <a:srgbClr val="2A2621"/>
+                          </a:solidFill>
+                          <a:latin typeface="Calibri" pitchFamily="34" charset="0"/>
+                          <a:ea typeface="Calibri" pitchFamily="34" charset="-122"/>
+                          <a:cs typeface="Calibri" pitchFamily="34" charset="-120"/>
+                        </a:rPr>
+                        <a:t>4</a:t>
+                      </a:r>
+                      <a:endParaRPr lang="en-US" sz="1100" dirty="0">
+                        <a:latin typeface="Calibri" charset="0"/>
+                        <a:ea typeface="Calibri" charset="0"/>
+                        <a:cs typeface="Calibri" charset="0"/>
+                      </a:endParaRPr>
+                    </a:p>
+                  </a:txBody>
+                  <a:tcPr marL="91440" marR="91440" marT="45720" marB="45720" anchor="ctr">
+                    <a:lnL w="6350" cap="flat" cmpd="sng" algn="ctr">
+                      <a:solidFill>
+                        <a:srgbClr val="E6DECB"/>
+                      </a:solidFill>
+                      <a:prstDash val="solid"/>
+                      <a:round/>
+                      <a:headEnd type="none" w="med" len="med"/>
+                      <a:tailEnd type="none" w="med" len="med"/>
+                    </a:lnL>
+                    <a:lnR w="6350" cap="flat" cmpd="sng" algn="ctr">
+                      <a:solidFill>
+                        <a:srgbClr val="E6DECB"/>
+                      </a:solidFill>
+                      <a:prstDash val="solid"/>
+                      <a:round/>
+                      <a:headEnd type="none" w="med" len="med"/>
+                      <a:tailEnd type="none" w="med" len="med"/>
+                    </a:lnR>
+                    <a:lnT w="6350" cap="flat" cmpd="sng" algn="ctr">
+                      <a:solidFill>
+                        <a:srgbClr val="E6DECB"/>
+                      </a:solidFill>
+                      <a:prstDash val="solid"/>
+                      <a:round/>
+                      <a:headEnd type="none" w="med" len="med"/>
+                      <a:tailEnd type="none" w="med" len="med"/>
+                    </a:lnT>
+                    <a:lnB w="6350" cap="flat" cmpd="sng" algn="ctr">
+                      <a:solidFill>
+                        <a:srgbClr val="E6DECB"/>
+                      </a:solidFill>
+                      <a:prstDash val="solid"/>
+                      <a:round/>
+                      <a:headEnd type="none" w="med" len="med"/>
+                      <a:tailEnd type="none" w="med" len="med"/>
+                    </a:lnB>
+                    <a:solidFill>
+                      <a:srgbClr val="F7F3EA"/>
+                    </a:solidFill>
+                  </a:tcPr>
+                </a:tc>
+                <a:tc>
+                  <a:txBody>
+                    <a:bodyPr/>
+                    <a:lstStyle/>
+                    <a:p>
+                      <a:pPr algn="ctr" indent="0" marL="0">
+                        <a:buNone/>
+                      </a:pPr>
+                      <a:r>
+                        <a:rPr lang="en-US" sz="1100" dirty="0">
+                          <a:solidFill>
+                            <a:srgbClr val="2A2621"/>
+                          </a:solidFill>
+                          <a:latin typeface="Calibri" pitchFamily="34" charset="0"/>
+                          <a:ea typeface="Calibri" pitchFamily="34" charset="-122"/>
+                          <a:cs typeface="Calibri" pitchFamily="34" charset="-120"/>
+                        </a:rPr>
+                        <a:t>1,190</a:t>
+                      </a:r>
+                      <a:endParaRPr lang="en-US" sz="1100" dirty="0">
+                        <a:latin typeface="Calibri" charset="0"/>
+                        <a:ea typeface="Calibri" charset="0"/>
+                        <a:cs typeface="Calibri" charset="0"/>
+                      </a:endParaRPr>
+                    </a:p>
+                  </a:txBody>
+                  <a:tcPr marL="91440" marR="91440" marT="45720" marB="45720" anchor="ctr">
+                    <a:lnL w="6350" cap="flat" cmpd="sng" algn="ctr">
+                      <a:solidFill>
+                        <a:srgbClr val="E6DECB"/>
+                      </a:solidFill>
+                      <a:prstDash val="solid"/>
+                      <a:round/>
+                      <a:headEnd type="none" w="med" len="med"/>
+                      <a:tailEnd type="none" w="med" len="med"/>
+                    </a:lnL>
+                    <a:lnR w="6350" cap="flat" cmpd="sng" algn="ctr">
+                      <a:solidFill>
+                        <a:srgbClr val="E6DECB"/>
+                      </a:solidFill>
+                      <a:prstDash val="solid"/>
+                      <a:round/>
+                      <a:headEnd type="none" w="med" len="med"/>
+                      <a:tailEnd type="none" w="med" len="med"/>
+                    </a:lnR>
+                    <a:lnT w="6350" cap="flat" cmpd="sng" algn="ctr">
+                      <a:solidFill>
+                        <a:srgbClr val="E6DECB"/>
+                      </a:solidFill>
+                      <a:prstDash val="solid"/>
+                      <a:round/>
+                      <a:headEnd type="none" w="med" len="med"/>
+                      <a:tailEnd type="none" w="med" len="med"/>
+                    </a:lnT>
+                    <a:lnB w="6350" cap="flat" cmpd="sng" algn="ctr">
+                      <a:solidFill>
+                        <a:srgbClr val="E6DECB"/>
+                      </a:solidFill>
+                      <a:prstDash val="solid"/>
+                      <a:round/>
+                      <a:headEnd type="none" w="med" len="med"/>
+                      <a:tailEnd type="none" w="med" len="med"/>
+                    </a:lnB>
+                    <a:solidFill>
+                      <a:srgbClr val="F7F3EA"/>
+                    </a:solidFill>
+                  </a:tcPr>
+                </a:tc>
+                <a:tc>
+                  <a:txBody>
+                    <a:bodyPr/>
+                    <a:lstStyle/>
+                    <a:p>
+                      <a:pPr algn="ctr" indent="0" marL="0">
+                        <a:buNone/>
+                      </a:pPr>
+                      <a:r>
+                        <a:rPr lang="en-US" sz="1100" dirty="0">
+                          <a:solidFill>
+                            <a:srgbClr val="2A2621"/>
+                          </a:solidFill>
+                          <a:latin typeface="Calibri" pitchFamily="34" charset="0"/>
+                          <a:ea typeface="Calibri" pitchFamily="34" charset="-122"/>
+                          <a:cs typeface="Calibri" pitchFamily="34" charset="-120"/>
+                        </a:rPr>
+                        <a:t>8×8</a:t>
+                      </a:r>
+                      <a:endParaRPr lang="en-US" sz="1100" dirty="0">
+                        <a:latin typeface="Calibri" charset="0"/>
+                        <a:ea typeface="Calibri" charset="0"/>
+                        <a:cs typeface="Calibri" charset="0"/>
+                      </a:endParaRPr>
+                    </a:p>
+                  </a:txBody>
+                  <a:tcPr marL="91440" marR="91440" marT="45720" marB="45720" anchor="ctr">
+                    <a:lnL w="6350" cap="flat" cmpd="sng" algn="ctr">
+                      <a:solidFill>
+                        <a:srgbClr val="E6DECB"/>
+                      </a:solidFill>
+                      <a:prstDash val="solid"/>
+                      <a:round/>
+                      <a:headEnd type="none" w="med" len="med"/>
+                      <a:tailEnd type="none" w="med" len="med"/>
+                    </a:lnL>
+                    <a:lnR w="6350" cap="flat" cmpd="sng" algn="ctr">
+                      <a:solidFill>
+                        <a:srgbClr val="E6DECB"/>
+                      </a:solidFill>
+                      <a:prstDash val="solid"/>
+                      <a:round/>
+                      <a:headEnd type="none" w="med" len="med"/>
+                      <a:tailEnd type="none" w="med" len="med"/>
+                    </a:lnR>
+                    <a:lnT w="6350" cap="flat" cmpd="sng" algn="ctr">
+                      <a:solidFill>
+                        <a:srgbClr val="E6DECB"/>
+                      </a:solidFill>
+                      <a:prstDash val="solid"/>
+                      <a:round/>
+                      <a:headEnd type="none" w="med" len="med"/>
+                      <a:tailEnd type="none" w="med" len="med"/>
+                    </a:lnT>
+                    <a:lnB w="6350" cap="flat" cmpd="sng" algn="ctr">
+                      <a:solidFill>
+                        <a:srgbClr val="E6DECB"/>
+                      </a:solidFill>
+                      <a:prstDash val="solid"/>
+                      <a:round/>
+                      <a:headEnd type="none" w="med" len="med"/>
+                      <a:tailEnd type="none" w="med" len="med"/>
+                    </a:lnB>
+                    <a:solidFill>
+                      <a:srgbClr val="F7F3EA"/>
+                    </a:solidFill>
+                  </a:tcPr>
+                </a:tc>
+              </a:tr>
+              <a:tr h="310896">
+                <a:tc>
+                  <a:txBody>
+                    <a:bodyPr/>
+                    <a:lstStyle/>
+                    <a:p>
+                      <a:pPr algn="l" indent="0" marL="0">
+                        <a:buNone/>
+                      </a:pPr>
+                      <a:r>
+                        <a:rPr lang="en-US" sz="1100" b="1" dirty="0">
+                          <a:solidFill>
+                            <a:srgbClr val="2B2621"/>
+                          </a:solidFill>
+                          <a:latin typeface="Calibri" pitchFamily="34" charset="0"/>
+                          <a:ea typeface="Calibri" pitchFamily="34" charset="-122"/>
+                          <a:cs typeface="Calibri" pitchFamily="34" charset="-120"/>
+                        </a:rPr>
+                        <a:t>Hyderabad</a:t>
+                      </a:r>
+                      <a:endParaRPr lang="en-US" sz="1100" dirty="0">
+                        <a:latin typeface="Calibri" charset="0"/>
+                        <a:ea typeface="Calibri" charset="0"/>
+                        <a:cs typeface="Calibri" charset="0"/>
+                      </a:endParaRPr>
+                    </a:p>
+                  </a:txBody>
+                  <a:tcPr marL="91440" marR="91440" marT="45720" marB="45720" anchor="ctr">
+                    <a:lnL w="6350" cap="flat" cmpd="sng" algn="ctr">
+                      <a:solidFill>
+                        <a:srgbClr val="E6DECB"/>
+                      </a:solidFill>
+                      <a:prstDash val="solid"/>
+                      <a:round/>
+                      <a:headEnd type="none" w="med" len="med"/>
+                      <a:tailEnd type="none" w="med" len="med"/>
+                    </a:lnL>
+                    <a:lnR w="6350" cap="flat" cmpd="sng" algn="ctr">
+                      <a:solidFill>
+                        <a:srgbClr val="E6DECB"/>
+                      </a:solidFill>
+                      <a:prstDash val="solid"/>
+                      <a:round/>
+                      <a:headEnd type="none" w="med" len="med"/>
+                      <a:tailEnd type="none" w="med" len="med"/>
+                    </a:lnR>
+                    <a:lnT w="6350" cap="flat" cmpd="sng" algn="ctr">
+                      <a:solidFill>
+                        <a:srgbClr val="E6DECB"/>
+                      </a:solidFill>
+                      <a:prstDash val="solid"/>
+                      <a:round/>
+                      <a:headEnd type="none" w="med" len="med"/>
+                      <a:tailEnd type="none" w="med" len="med"/>
+                    </a:lnT>
+                    <a:lnB w="6350" cap="flat" cmpd="sng" algn="ctr">
+                      <a:solidFill>
+                        <a:srgbClr val="E6DECB"/>
+                      </a:solidFill>
+                      <a:prstDash val="solid"/>
+                      <a:round/>
+                      <a:headEnd type="none" w="med" len="med"/>
+                      <a:tailEnd type="none" w="med" len="med"/>
+                    </a:lnB>
+                    <a:solidFill>
+                      <a:srgbClr val="FFFFFF"/>
+                    </a:solidFill>
+                  </a:tcPr>
+                </a:tc>
+                <a:tc>
+                  <a:txBody>
+                    <a:bodyPr/>
+                    <a:lstStyle/>
+                    <a:p>
+                      <a:pPr algn="l" indent="0" marL="0">
+                        <a:buNone/>
+                      </a:pPr>
+                      <a:r>
+                        <a:rPr lang="en-US" sz="1100" dirty="0">
+                          <a:solidFill>
+                            <a:srgbClr val="2A2621"/>
+                          </a:solidFill>
+                          <a:latin typeface="Cambria" pitchFamily="34" charset="0"/>
+                          <a:ea typeface="Cambria" pitchFamily="34" charset="-122"/>
+                          <a:cs typeface="Cambria" pitchFamily="34" charset="-120"/>
+                        </a:rPr>
+                        <a:t>PVR Icon · Hitech City</a:t>
+                      </a:r>
+                      <a:endParaRPr lang="en-US" sz="1100" dirty="0">
+                        <a:latin typeface="Cambria" charset="0"/>
+                        <a:ea typeface="Cambria" charset="0"/>
+                        <a:cs typeface="Cambria" charset="0"/>
+                      </a:endParaRPr>
+                    </a:p>
+                  </a:txBody>
+                  <a:tcPr marL="91440" marR="91440" marT="45720" marB="45720" anchor="ctr">
+                    <a:lnL w="6350" cap="flat" cmpd="sng" algn="ctr">
+                      <a:solidFill>
+                        <a:srgbClr val="E6DECB"/>
+                      </a:solidFill>
+                      <a:prstDash val="solid"/>
+                      <a:round/>
+                      <a:headEnd type="none" w="med" len="med"/>
+                      <a:tailEnd type="none" w="med" len="med"/>
+                    </a:lnL>
+                    <a:lnR w="6350" cap="flat" cmpd="sng" algn="ctr">
+                      <a:solidFill>
+                        <a:srgbClr val="E6DECB"/>
+                      </a:solidFill>
+                      <a:prstDash val="solid"/>
+                      <a:round/>
+                      <a:headEnd type="none" w="med" len="med"/>
+                      <a:tailEnd type="none" w="med" len="med"/>
+                    </a:lnR>
+                    <a:lnT w="6350" cap="flat" cmpd="sng" algn="ctr">
+                      <a:solidFill>
+                        <a:srgbClr val="E6DECB"/>
+                      </a:solidFill>
+                      <a:prstDash val="solid"/>
+                      <a:round/>
+                      <a:headEnd type="none" w="med" len="med"/>
+                      <a:tailEnd type="none" w="med" len="med"/>
+                    </a:lnT>
+                    <a:lnB w="6350" cap="flat" cmpd="sng" algn="ctr">
+                      <a:solidFill>
+                        <a:srgbClr val="E6DECB"/>
+                      </a:solidFill>
+                      <a:prstDash val="solid"/>
+                      <a:round/>
+                      <a:headEnd type="none" w="med" len="med"/>
+                      <a:tailEnd type="none" w="med" len="med"/>
+                    </a:lnB>
+                    <a:solidFill>
+                      <a:srgbClr val="FFFFFF"/>
+                    </a:solidFill>
+                  </a:tcPr>
+                </a:tc>
+                <a:tc>
+                  <a:txBody>
+                    <a:bodyPr/>
+                    <a:lstStyle/>
+                    <a:p>
+                      <a:pPr algn="ctr" indent="0" marL="0">
+                        <a:buNone/>
+                      </a:pPr>
+                      <a:r>
+                        <a:rPr lang="en-US" sz="1100" dirty="0">
+                          <a:solidFill>
+                            <a:srgbClr val="2A2621"/>
+                          </a:solidFill>
+                          <a:latin typeface="Calibri" pitchFamily="34" charset="0"/>
+                          <a:ea typeface="Calibri" pitchFamily="34" charset="-122"/>
+                          <a:cs typeface="Calibri" pitchFamily="34" charset="-120"/>
+                        </a:rPr>
+                        <a:t>5</a:t>
+                      </a:r>
+                      <a:endParaRPr lang="en-US" sz="1100" dirty="0">
+                        <a:latin typeface="Calibri" charset="0"/>
+                        <a:ea typeface="Calibri" charset="0"/>
+                        <a:cs typeface="Calibri" charset="0"/>
+                      </a:endParaRPr>
+                    </a:p>
+                  </a:txBody>
+                  <a:tcPr marL="91440" marR="91440" marT="45720" marB="45720" anchor="ctr">
+                    <a:lnL w="6350" cap="flat" cmpd="sng" algn="ctr">
+                      <a:solidFill>
+                        <a:srgbClr val="E6DECB"/>
+                      </a:solidFill>
+                      <a:prstDash val="solid"/>
+                      <a:round/>
+                      <a:headEnd type="none" w="med" len="med"/>
+                      <a:tailEnd type="none" w="med" len="med"/>
+                    </a:lnL>
+                    <a:lnR w="6350" cap="flat" cmpd="sng" algn="ctr">
+                      <a:solidFill>
+                        <a:srgbClr val="E6DECB"/>
+                      </a:solidFill>
+                      <a:prstDash val="solid"/>
+                      <a:round/>
+                      <a:headEnd type="none" w="med" len="med"/>
+                      <a:tailEnd type="none" w="med" len="med"/>
+                    </a:lnR>
+                    <a:lnT w="6350" cap="flat" cmpd="sng" algn="ctr">
+                      <a:solidFill>
+                        <a:srgbClr val="E6DECB"/>
+                      </a:solidFill>
+                      <a:prstDash val="solid"/>
+                      <a:round/>
+                      <a:headEnd type="none" w="med" len="med"/>
+                      <a:tailEnd type="none" w="med" len="med"/>
+                    </a:lnT>
+                    <a:lnB w="6350" cap="flat" cmpd="sng" algn="ctr">
+                      <a:solidFill>
+                        <a:srgbClr val="E6DECB"/>
+                      </a:solidFill>
+                      <a:prstDash val="solid"/>
+                      <a:round/>
+                      <a:headEnd type="none" w="med" len="med"/>
+                      <a:tailEnd type="none" w="med" len="med"/>
+                    </a:lnB>
+                    <a:solidFill>
+                      <a:srgbClr val="FFFFFF"/>
+                    </a:solidFill>
+                  </a:tcPr>
+                </a:tc>
+                <a:tc>
+                  <a:txBody>
+                    <a:bodyPr/>
+                    <a:lstStyle/>
+                    <a:p>
+                      <a:pPr algn="ctr" indent="0" marL="0">
+                        <a:buNone/>
+                      </a:pPr>
+                      <a:r>
+                        <a:rPr lang="en-US" sz="1100" dirty="0">
+                          <a:solidFill>
+                            <a:srgbClr val="2A2621"/>
+                          </a:solidFill>
+                          <a:latin typeface="Calibri" pitchFamily="34" charset="0"/>
+                          <a:ea typeface="Calibri" pitchFamily="34" charset="-122"/>
+                          <a:cs typeface="Calibri" pitchFamily="34" charset="-120"/>
+                        </a:rPr>
+                        <a:t>936</a:t>
+                      </a:r>
+                      <a:endParaRPr lang="en-US" sz="1100" dirty="0">
+                        <a:latin typeface="Calibri" charset="0"/>
+                        <a:ea typeface="Calibri" charset="0"/>
+                        <a:cs typeface="Calibri" charset="0"/>
+                      </a:endParaRPr>
+                    </a:p>
+                  </a:txBody>
+                  <a:tcPr marL="91440" marR="91440" marT="45720" marB="45720" anchor="ctr">
+                    <a:lnL w="6350" cap="flat" cmpd="sng" algn="ctr">
+                      <a:solidFill>
+                        <a:srgbClr val="E6DECB"/>
+                      </a:solidFill>
+                      <a:prstDash val="solid"/>
+                      <a:round/>
+                      <a:headEnd type="none" w="med" len="med"/>
+                      <a:tailEnd type="none" w="med" len="med"/>
+                    </a:lnL>
+                    <a:lnR w="6350" cap="flat" cmpd="sng" algn="ctr">
+                      <a:solidFill>
+                        <a:srgbClr val="E6DECB"/>
+                      </a:solidFill>
+                      <a:prstDash val="solid"/>
+                      <a:round/>
+                      <a:headEnd type="none" w="med" len="med"/>
+                      <a:tailEnd type="none" w="med" len="med"/>
+                    </a:lnR>
+                    <a:lnT w="6350" cap="flat" cmpd="sng" algn="ctr">
+                      <a:solidFill>
+                        <a:srgbClr val="E6DECB"/>
+                      </a:solidFill>
+                      <a:prstDash val="solid"/>
+                      <a:round/>
+                      <a:headEnd type="none" w="med" len="med"/>
+                      <a:tailEnd type="none" w="med" len="med"/>
+                    </a:lnT>
+                    <a:lnB w="6350" cap="flat" cmpd="sng" algn="ctr">
+                      <a:solidFill>
+                        <a:srgbClr val="E6DECB"/>
+                      </a:solidFill>
+                      <a:prstDash val="solid"/>
+                      <a:round/>
+                      <a:headEnd type="none" w="med" len="med"/>
+                      <a:tailEnd type="none" w="med" len="med"/>
+                    </a:lnB>
+                    <a:solidFill>
+                      <a:srgbClr val="FFFFFF"/>
+                    </a:solidFill>
+                  </a:tcPr>
+                </a:tc>
+                <a:tc>
+                  <a:txBody>
+                    <a:bodyPr/>
+                    <a:lstStyle/>
+                    <a:p>
+                      <a:pPr algn="ctr" indent="0" marL="0">
+                        <a:buNone/>
+                      </a:pPr>
+                      <a:r>
+                        <a:rPr lang="en-US" sz="1100" dirty="0">
+                          <a:solidFill>
+                            <a:srgbClr val="2A2621"/>
+                          </a:solidFill>
+                          <a:latin typeface="Calibri" pitchFamily="34" charset="0"/>
+                          <a:ea typeface="Calibri" pitchFamily="34" charset="-122"/>
+                          <a:cs typeface="Calibri" pitchFamily="34" charset="-120"/>
+                        </a:rPr>
+                        <a:t>8×8</a:t>
+                      </a:r>
+                      <a:endParaRPr lang="en-US" sz="1100" dirty="0">
+                        <a:latin typeface="Calibri" charset="0"/>
+                        <a:ea typeface="Calibri" charset="0"/>
+                        <a:cs typeface="Calibri" charset="0"/>
+                      </a:endParaRPr>
+                    </a:p>
+                  </a:txBody>
+                  <a:tcPr marL="91440" marR="91440" marT="45720" marB="45720" anchor="ctr">
+                    <a:lnL w="6350" cap="flat" cmpd="sng" algn="ctr">
+                      <a:solidFill>
+                        <a:srgbClr val="E6DECB"/>
+                      </a:solidFill>
+                      <a:prstDash val="solid"/>
+                      <a:round/>
+                      <a:headEnd type="none" w="med" len="med"/>
+                      <a:tailEnd type="none" w="med" len="med"/>
+                    </a:lnL>
+                    <a:lnR w="6350" cap="flat" cmpd="sng" algn="ctr">
+                      <a:solidFill>
+                        <a:srgbClr val="E6DECB"/>
+                      </a:solidFill>
+                      <a:prstDash val="solid"/>
+                      <a:round/>
+                      <a:headEnd type="none" w="med" len="med"/>
+                      <a:tailEnd type="none" w="med" len="med"/>
+                    </a:lnR>
+                    <a:lnT w="6350" cap="flat" cmpd="sng" algn="ctr">
+                      <a:solidFill>
+                        <a:srgbClr val="E6DECB"/>
+                      </a:solidFill>
+                      <a:prstDash val="solid"/>
+                      <a:round/>
+                      <a:headEnd type="none" w="med" len="med"/>
+                      <a:tailEnd type="none" w="med" len="med"/>
+                    </a:lnT>
+                    <a:lnB w="6350" cap="flat" cmpd="sng" algn="ctr">
+                      <a:solidFill>
+                        <a:srgbClr val="E6DECB"/>
+                      </a:solidFill>
+                      <a:prstDash val="solid"/>
+                      <a:round/>
+                      <a:headEnd type="none" w="med" len="med"/>
+                      <a:tailEnd type="none" w="med" len="med"/>
+                    </a:lnB>
+                    <a:solidFill>
+                      <a:srgbClr val="FFFFFF"/>
+                    </a:solidFill>
+                  </a:tcPr>
+                </a:tc>
+              </a:tr>
+              <a:tr h="310896">
+                <a:tc>
+                  <a:txBody>
+                    <a:bodyPr/>
+                    <a:lstStyle/>
+                    <a:p>
+                      <a:pPr algn="l" indent="0" marL="0">
+                        <a:buNone/>
+                      </a:pPr>
+                      <a:r>
+                        <a:rPr lang="en-US" sz="1100" b="1" dirty="0">
+                          <a:solidFill>
+                            <a:srgbClr val="2B2621"/>
+                          </a:solidFill>
+                          <a:latin typeface="Calibri" pitchFamily="34" charset="0"/>
+                          <a:ea typeface="Calibri" pitchFamily="34" charset="-122"/>
+                          <a:cs typeface="Calibri" pitchFamily="34" charset="-120"/>
+                        </a:rPr>
+                        <a:t>Bengaluru</a:t>
+                      </a:r>
+                      <a:endParaRPr lang="en-US" sz="1100" dirty="0">
+                        <a:latin typeface="Calibri" charset="0"/>
+                        <a:ea typeface="Calibri" charset="0"/>
+                        <a:cs typeface="Calibri" charset="0"/>
+                      </a:endParaRPr>
+                    </a:p>
+                  </a:txBody>
+                  <a:tcPr marL="91440" marR="91440" marT="45720" marB="45720" anchor="ctr">
+                    <a:lnL w="6350" cap="flat" cmpd="sng" algn="ctr">
+                      <a:solidFill>
+                        <a:srgbClr val="E6DECB"/>
+                      </a:solidFill>
+                      <a:prstDash val="solid"/>
+                      <a:round/>
+                      <a:headEnd type="none" w="med" len="med"/>
+                      <a:tailEnd type="none" w="med" len="med"/>
+                    </a:lnL>
+                    <a:lnR w="6350" cap="flat" cmpd="sng" algn="ctr">
+                      <a:solidFill>
+                        <a:srgbClr val="E6DECB"/>
+                      </a:solidFill>
+                      <a:prstDash val="solid"/>
+                      <a:round/>
+                      <a:headEnd type="none" w="med" len="med"/>
+                      <a:tailEnd type="none" w="med" len="med"/>
+                    </a:lnR>
+                    <a:lnT w="6350" cap="flat" cmpd="sng" algn="ctr">
+                      <a:solidFill>
+                        <a:srgbClr val="E6DECB"/>
+                      </a:solidFill>
+                      <a:prstDash val="solid"/>
+                      <a:round/>
+                      <a:headEnd type="none" w="med" len="med"/>
+                      <a:tailEnd type="none" w="med" len="med"/>
+                    </a:lnT>
+                    <a:lnB w="6350" cap="flat" cmpd="sng" algn="ctr">
+                      <a:solidFill>
+                        <a:srgbClr val="E6DECB"/>
+                      </a:solidFill>
+                      <a:prstDash val="solid"/>
+                      <a:round/>
+                      <a:headEnd type="none" w="med" len="med"/>
+                      <a:tailEnd type="none" w="med" len="med"/>
+                    </a:lnB>
+                    <a:solidFill>
+                      <a:srgbClr val="F7F3EA"/>
+                    </a:solidFill>
+                  </a:tcPr>
+                </a:tc>
+                <a:tc>
+                  <a:txBody>
+                    <a:bodyPr/>
+                    <a:lstStyle/>
+                    <a:p>
+                      <a:pPr algn="l" indent="0" marL="0">
+                        <a:buNone/>
+                      </a:pPr>
+                      <a:r>
+                        <a:rPr lang="en-US" sz="1100" dirty="0">
+                          <a:solidFill>
+                            <a:srgbClr val="2A2621"/>
+                          </a:solidFill>
+                          <a:latin typeface="Cambria" pitchFamily="34" charset="0"/>
+                          <a:ea typeface="Cambria" pitchFamily="34" charset="-122"/>
+                          <a:cs typeface="Cambria" pitchFamily="34" charset="-120"/>
+                        </a:rPr>
+                        <a:t>PVR Phoenix Market City</a:t>
+                      </a:r>
+                      <a:endParaRPr lang="en-US" sz="1100" dirty="0">
+                        <a:latin typeface="Cambria" charset="0"/>
+                        <a:ea typeface="Cambria" charset="0"/>
+                        <a:cs typeface="Cambria" charset="0"/>
+                      </a:endParaRPr>
+                    </a:p>
+                  </a:txBody>
+                  <a:tcPr marL="91440" marR="91440" marT="45720" marB="45720" anchor="ctr">
+                    <a:lnL w="6350" cap="flat" cmpd="sng" algn="ctr">
+                      <a:solidFill>
+                        <a:srgbClr val="E6DECB"/>
+                      </a:solidFill>
+                      <a:prstDash val="solid"/>
+                      <a:round/>
+                      <a:headEnd type="none" w="med" len="med"/>
+                      <a:tailEnd type="none" w="med" len="med"/>
+                    </a:lnL>
+                    <a:lnR w="6350" cap="flat" cmpd="sng" algn="ctr">
+                      <a:solidFill>
+                        <a:srgbClr val="E6DECB"/>
+                      </a:solidFill>
+                      <a:prstDash val="solid"/>
+                      <a:round/>
+                      <a:headEnd type="none" w="med" len="med"/>
+                      <a:tailEnd type="none" w="med" len="med"/>
+                    </a:lnR>
+                    <a:lnT w="6350" cap="flat" cmpd="sng" algn="ctr">
+                      <a:solidFill>
+                        <a:srgbClr val="E6DECB"/>
+                      </a:solidFill>
+                      <a:prstDash val="solid"/>
+                      <a:round/>
+                      <a:headEnd type="none" w="med" len="med"/>
+                      <a:tailEnd type="none" w="med" len="med"/>
+                    </a:lnT>
+                    <a:lnB w="6350" cap="flat" cmpd="sng" algn="ctr">
+                      <a:solidFill>
+                        <a:srgbClr val="E6DECB"/>
+                      </a:solidFill>
+                      <a:prstDash val="solid"/>
+                      <a:round/>
+                      <a:headEnd type="none" w="med" len="med"/>
+                      <a:tailEnd type="none" w="med" len="med"/>
+                    </a:lnB>
+                    <a:solidFill>
+                      <a:srgbClr val="F7F3EA"/>
+                    </a:solidFill>
+                  </a:tcPr>
+                </a:tc>
+                <a:tc>
+                  <a:txBody>
+                    <a:bodyPr/>
+                    <a:lstStyle/>
+                    <a:p>
+                      <a:pPr algn="ctr" indent="0" marL="0">
+                        <a:buNone/>
+                      </a:pPr>
+                      <a:r>
+                        <a:rPr lang="en-US" sz="1100" dirty="0">
+                          <a:solidFill>
+                            <a:srgbClr val="2A2621"/>
+                          </a:solidFill>
+                          <a:latin typeface="Calibri" pitchFamily="34" charset="0"/>
+                          <a:ea typeface="Calibri" pitchFamily="34" charset="-122"/>
+                          <a:cs typeface="Calibri" pitchFamily="34" charset="-120"/>
+                        </a:rPr>
+                        <a:t>9</a:t>
+                      </a:r>
+                      <a:endParaRPr lang="en-US" sz="1100" dirty="0">
+                        <a:latin typeface="Calibri" charset="0"/>
+                        <a:ea typeface="Calibri" charset="0"/>
+                        <a:cs typeface="Calibri" charset="0"/>
+                      </a:endParaRPr>
+                    </a:p>
+                  </a:txBody>
+                  <a:tcPr marL="91440" marR="91440" marT="45720" marB="45720" anchor="ctr">
+                    <a:lnL w="6350" cap="flat" cmpd="sng" algn="ctr">
+                      <a:solidFill>
+                        <a:srgbClr val="E6DECB"/>
+                      </a:solidFill>
+                      <a:prstDash val="solid"/>
+                      <a:round/>
+                      <a:headEnd type="none" w="med" len="med"/>
+                      <a:tailEnd type="none" w="med" len="med"/>
+                    </a:lnL>
+                    <a:lnR w="6350" cap="flat" cmpd="sng" algn="ctr">
+                      <a:solidFill>
+                        <a:srgbClr val="E6DECB"/>
+                      </a:solidFill>
+                      <a:prstDash val="solid"/>
+                      <a:round/>
+                      <a:headEnd type="none" w="med" len="med"/>
+                      <a:tailEnd type="none" w="med" len="med"/>
+                    </a:lnR>
+                    <a:lnT w="6350" cap="flat" cmpd="sng" algn="ctr">
+                      <a:solidFill>
+                        <a:srgbClr val="E6DECB"/>
+                      </a:solidFill>
+                      <a:prstDash val="solid"/>
+                      <a:round/>
+                      <a:headEnd type="none" w="med" len="med"/>
+                      <a:tailEnd type="none" w="med" len="med"/>
+                    </a:lnT>
+                    <a:lnB w="6350" cap="flat" cmpd="sng" algn="ctr">
+                      <a:solidFill>
+                        <a:srgbClr val="E6DECB"/>
+                      </a:solidFill>
+                      <a:prstDash val="solid"/>
+                      <a:round/>
+                      <a:headEnd type="none" w="med" len="med"/>
+                      <a:tailEnd type="none" w="med" len="med"/>
+                    </a:lnB>
+                    <a:solidFill>
+                      <a:srgbClr val="F7F3EA"/>
+                    </a:solidFill>
+                  </a:tcPr>
+                </a:tc>
+                <a:tc>
+                  <a:txBody>
+                    <a:bodyPr/>
+                    <a:lstStyle/>
+                    <a:p>
+                      <a:pPr algn="ctr" indent="0" marL="0">
+                        <a:buNone/>
+                      </a:pPr>
+                      <a:r>
+                        <a:rPr lang="en-US" sz="1100" dirty="0">
+                          <a:solidFill>
+                            <a:srgbClr val="2A2621"/>
+                          </a:solidFill>
+                          <a:latin typeface="Calibri" pitchFamily="34" charset="0"/>
+                          <a:ea typeface="Calibri" pitchFamily="34" charset="-122"/>
+                          <a:cs typeface="Calibri" pitchFamily="34" charset="-120"/>
+                        </a:rPr>
+                        <a:t>1,401</a:t>
+                      </a:r>
+                      <a:endParaRPr lang="en-US" sz="1100" dirty="0">
+                        <a:latin typeface="Calibri" charset="0"/>
+                        <a:ea typeface="Calibri" charset="0"/>
+                        <a:cs typeface="Calibri" charset="0"/>
+                      </a:endParaRPr>
+                    </a:p>
+                  </a:txBody>
+                  <a:tcPr marL="91440" marR="91440" marT="45720" marB="45720" anchor="ctr">
+                    <a:lnL w="6350" cap="flat" cmpd="sng" algn="ctr">
+                      <a:solidFill>
+                        <a:srgbClr val="E6DECB"/>
+                      </a:solidFill>
+                      <a:prstDash val="solid"/>
+                      <a:round/>
+                      <a:headEnd type="none" w="med" len="med"/>
+                      <a:tailEnd type="none" w="med" len="med"/>
+                    </a:lnL>
+                    <a:lnR w="6350" cap="flat" cmpd="sng" algn="ctr">
+                      <a:solidFill>
+                        <a:srgbClr val="E6DECB"/>
+                      </a:solidFill>
+                      <a:prstDash val="solid"/>
+                      <a:round/>
+                      <a:headEnd type="none" w="med" len="med"/>
+                      <a:tailEnd type="none" w="med" len="med"/>
+                    </a:lnR>
+                    <a:lnT w="6350" cap="flat" cmpd="sng" algn="ctr">
+                      <a:solidFill>
+                        <a:srgbClr val="E6DECB"/>
+                      </a:solidFill>
+                      <a:prstDash val="solid"/>
+                      <a:round/>
+                      <a:headEnd type="none" w="med" len="med"/>
+                      <a:tailEnd type="none" w="med" len="med"/>
+                    </a:lnT>
+                    <a:lnB w="6350" cap="flat" cmpd="sng" algn="ctr">
+                      <a:solidFill>
+                        <a:srgbClr val="E6DECB"/>
+                      </a:solidFill>
+                      <a:prstDash val="solid"/>
+                      <a:round/>
+                      <a:headEnd type="none" w="med" len="med"/>
+                      <a:tailEnd type="none" w="med" len="med"/>
+                    </a:lnB>
+                    <a:solidFill>
+                      <a:srgbClr val="F7F3EA"/>
+                    </a:solidFill>
+                  </a:tcPr>
+                </a:tc>
+                <a:tc>
+                  <a:txBody>
+                    <a:bodyPr/>
+                    <a:lstStyle/>
+                    <a:p>
+                      <a:pPr algn="ctr" indent="0" marL="0">
+                        <a:buNone/>
+                      </a:pPr>
+                      <a:r>
+                        <a:rPr lang="en-US" sz="1100" dirty="0">
+                          <a:solidFill>
+                            <a:srgbClr val="2A2621"/>
+                          </a:solidFill>
+                          <a:latin typeface="Calibri" pitchFamily="34" charset="0"/>
+                          <a:ea typeface="Calibri" pitchFamily="34" charset="-122"/>
+                          <a:cs typeface="Calibri" pitchFamily="34" charset="-120"/>
+                        </a:rPr>
+                        <a:t>6×6</a:t>
+                      </a:r>
+                      <a:endParaRPr lang="en-US" sz="1100" dirty="0">
+                        <a:latin typeface="Calibri" charset="0"/>
+                        <a:ea typeface="Calibri" charset="0"/>
+                        <a:cs typeface="Calibri" charset="0"/>
+                      </a:endParaRPr>
+                    </a:p>
+                  </a:txBody>
+                  <a:tcPr marL="91440" marR="91440" marT="45720" marB="45720" anchor="ctr">
+                    <a:lnL w="6350" cap="flat" cmpd="sng" algn="ctr">
+                      <a:solidFill>
+                        <a:srgbClr val="E6DECB"/>
+                      </a:solidFill>
+                      <a:prstDash val="solid"/>
+                      <a:round/>
+                      <a:headEnd type="none" w="med" len="med"/>
+                      <a:tailEnd type="none" w="med" len="med"/>
+                    </a:lnL>
+                    <a:lnR w="6350" cap="flat" cmpd="sng" algn="ctr">
+                      <a:solidFill>
+                        <a:srgbClr val="E6DECB"/>
+                      </a:solidFill>
+                      <a:prstDash val="solid"/>
+                      <a:round/>
+                      <a:headEnd type="none" w="med" len="med"/>
+                      <a:tailEnd type="none" w="med" len="med"/>
+                    </a:lnR>
+                    <a:lnT w="6350" cap="flat" cmpd="sng" algn="ctr">
+                      <a:solidFill>
+                        <a:srgbClr val="E6DECB"/>
+                      </a:solidFill>
+                      <a:prstDash val="solid"/>
+                      <a:round/>
+                      <a:headEnd type="none" w="med" len="med"/>
+                      <a:tailEnd type="none" w="med" len="med"/>
+                    </a:lnT>
+                    <a:lnB w="6350" cap="flat" cmpd="sng" algn="ctr">
+                      <a:solidFill>
+                        <a:srgbClr val="E6DECB"/>
+                      </a:solidFill>
+                      <a:prstDash val="solid"/>
+                      <a:round/>
+                      <a:headEnd type="none" w="med" len="med"/>
+                      <a:tailEnd type="none" w="med" len="med"/>
+                    </a:lnB>
+                    <a:solidFill>
+                      <a:srgbClr val="F7F3EA"/>
+                    </a:solidFill>
+                  </a:tcPr>
+                </a:tc>
+              </a:tr>
+              <a:tr h="310896">
+                <a:tc>
+                  <a:txBody>
+                    <a:bodyPr/>
+                    <a:lstStyle/>
+                    <a:p>
+                      <a:pPr algn="l" indent="0" marL="0">
+                        <a:buNone/>
+                      </a:pPr>
+                      <a:r>
+                        <a:rPr lang="en-US" sz="1100" b="1" dirty="0">
+                          <a:solidFill>
+                            <a:srgbClr val="2B2621"/>
+                          </a:solidFill>
+                          <a:latin typeface="Calibri" pitchFamily="34" charset="0"/>
+                          <a:ea typeface="Calibri" pitchFamily="34" charset="-122"/>
+                          <a:cs typeface="Calibri" pitchFamily="34" charset="-120"/>
+                        </a:rPr>
+                        <a:t>Chennai</a:t>
+                      </a:r>
+                      <a:endParaRPr lang="en-US" sz="1100" dirty="0">
+                        <a:latin typeface="Calibri" charset="0"/>
+                        <a:ea typeface="Calibri" charset="0"/>
+                        <a:cs typeface="Calibri" charset="0"/>
+                      </a:endParaRPr>
+                    </a:p>
+                  </a:txBody>
+                  <a:tcPr marL="91440" marR="91440" marT="45720" marB="45720" anchor="ctr">
+                    <a:lnL w="6350" cap="flat" cmpd="sng" algn="ctr">
+                      <a:solidFill>
+                        <a:srgbClr val="E6DECB"/>
+                      </a:solidFill>
+                      <a:prstDash val="solid"/>
+                      <a:round/>
+                      <a:headEnd type="none" w="med" len="med"/>
+                      <a:tailEnd type="none" w="med" len="med"/>
+                    </a:lnL>
+                    <a:lnR w="6350" cap="flat" cmpd="sng" algn="ctr">
+                      <a:solidFill>
+                        <a:srgbClr val="E6DECB"/>
+                      </a:solidFill>
+                      <a:prstDash val="solid"/>
+                      <a:round/>
+                      <a:headEnd type="none" w="med" len="med"/>
+                      <a:tailEnd type="none" w="med" len="med"/>
+                    </a:lnR>
+                    <a:lnT w="6350" cap="flat" cmpd="sng" algn="ctr">
+                      <a:solidFill>
+                        <a:srgbClr val="E6DECB"/>
+                      </a:solidFill>
+                      <a:prstDash val="solid"/>
+                      <a:round/>
+                      <a:headEnd type="none" w="med" len="med"/>
+                      <a:tailEnd type="none" w="med" len="med"/>
+                    </a:lnT>
+                    <a:lnB w="6350" cap="flat" cmpd="sng" algn="ctr">
+                      <a:solidFill>
+                        <a:srgbClr val="E6DECB"/>
+                      </a:solidFill>
+                      <a:prstDash val="solid"/>
+                      <a:round/>
+                      <a:headEnd type="none" w="med" len="med"/>
+                      <a:tailEnd type="none" w="med" len="med"/>
+                    </a:lnB>
+                    <a:solidFill>
+                      <a:srgbClr val="FFFFFF"/>
+                    </a:solidFill>
+                  </a:tcPr>
+                </a:tc>
+                <a:tc>
+                  <a:txBody>
+                    <a:bodyPr/>
+                    <a:lstStyle/>
+                    <a:p>
+                      <a:pPr algn="l" indent="0" marL="0">
+                        <a:buNone/>
+                      </a:pPr>
+                      <a:r>
+                        <a:rPr lang="en-US" sz="1100" dirty="0">
+                          <a:solidFill>
+                            <a:srgbClr val="2A2621"/>
+                          </a:solidFill>
+                          <a:latin typeface="Cambria" pitchFamily="34" charset="0"/>
+                          <a:ea typeface="Cambria" pitchFamily="34" charset="-122"/>
+                          <a:cs typeface="Cambria" pitchFamily="34" charset="-120"/>
+                        </a:rPr>
+                        <a:t>INOX Luxe · Phoenix</a:t>
+                      </a:r>
+                      <a:endParaRPr lang="en-US" sz="1100" dirty="0">
+                        <a:latin typeface="Cambria" charset="0"/>
+                        <a:ea typeface="Cambria" charset="0"/>
+                        <a:cs typeface="Cambria" charset="0"/>
+                      </a:endParaRPr>
+                    </a:p>
+                  </a:txBody>
+                  <a:tcPr marL="91440" marR="91440" marT="45720" marB="45720" anchor="ctr">
+                    <a:lnL w="6350" cap="flat" cmpd="sng" algn="ctr">
+                      <a:solidFill>
+                        <a:srgbClr val="E6DECB"/>
+                      </a:solidFill>
+                      <a:prstDash val="solid"/>
+                      <a:round/>
+                      <a:headEnd type="none" w="med" len="med"/>
+                      <a:tailEnd type="none" w="med" len="med"/>
+                    </a:lnL>
+                    <a:lnR w="6350" cap="flat" cmpd="sng" algn="ctr">
+                      <a:solidFill>
+                        <a:srgbClr val="E6DECB"/>
+                      </a:solidFill>
+                      <a:prstDash val="solid"/>
+                      <a:round/>
+                      <a:headEnd type="none" w="med" len="med"/>
+                      <a:tailEnd type="none" w="med" len="med"/>
+                    </a:lnR>
+                    <a:lnT w="6350" cap="flat" cmpd="sng" algn="ctr">
+                      <a:solidFill>
+                        <a:srgbClr val="E6DECB"/>
+                      </a:solidFill>
+                      <a:prstDash val="solid"/>
+                      <a:round/>
+                      <a:headEnd type="none" w="med" len="med"/>
+                      <a:tailEnd type="none" w="med" len="med"/>
+                    </a:lnT>
+                    <a:lnB w="6350" cap="flat" cmpd="sng" algn="ctr">
+                      <a:solidFill>
+                        <a:srgbClr val="E6DECB"/>
+                      </a:solidFill>
+                      <a:prstDash val="solid"/>
+                      <a:round/>
+                      <a:headEnd type="none" w="med" len="med"/>
+                      <a:tailEnd type="none" w="med" len="med"/>
+                    </a:lnB>
+                    <a:solidFill>
+                      <a:srgbClr val="FFFFFF"/>
+                    </a:solidFill>
+                  </a:tcPr>
+                </a:tc>
+                <a:tc>
+                  <a:txBody>
+                    <a:bodyPr/>
+                    <a:lstStyle/>
+                    <a:p>
+                      <a:pPr algn="ctr" indent="0" marL="0">
+                        <a:buNone/>
+                      </a:pPr>
+                      <a:r>
+                        <a:rPr lang="en-US" sz="1100" dirty="0">
+                          <a:solidFill>
+                            <a:srgbClr val="2A2621"/>
+                          </a:solidFill>
+                          <a:latin typeface="Calibri" pitchFamily="34" charset="0"/>
+                          <a:ea typeface="Calibri" pitchFamily="34" charset="-122"/>
+                          <a:cs typeface="Calibri" pitchFamily="34" charset="-120"/>
+                        </a:rPr>
+                        <a:t>11</a:t>
+                      </a:r>
+                      <a:endParaRPr lang="en-US" sz="1100" dirty="0">
+                        <a:latin typeface="Calibri" charset="0"/>
+                        <a:ea typeface="Calibri" charset="0"/>
+                        <a:cs typeface="Calibri" charset="0"/>
+                      </a:endParaRPr>
+                    </a:p>
+                  </a:txBody>
+                  <a:tcPr marL="91440" marR="91440" marT="45720" marB="45720" anchor="ctr">
+                    <a:lnL w="6350" cap="flat" cmpd="sng" algn="ctr">
+                      <a:solidFill>
+                        <a:srgbClr val="E6DECB"/>
+                      </a:solidFill>
+                      <a:prstDash val="solid"/>
+                      <a:round/>
+                      <a:headEnd type="none" w="med" len="med"/>
+                      <a:tailEnd type="none" w="med" len="med"/>
+                    </a:lnL>
+                    <a:lnR w="6350" cap="flat" cmpd="sng" algn="ctr">
+                      <a:solidFill>
+                        <a:srgbClr val="E6DECB"/>
+                      </a:solidFill>
+                      <a:prstDash val="solid"/>
+                      <a:round/>
+                      <a:headEnd type="none" w="med" len="med"/>
+                      <a:tailEnd type="none" w="med" len="med"/>
+                    </a:lnR>
+                    <a:lnT w="6350" cap="flat" cmpd="sng" algn="ctr">
+                      <a:solidFill>
+                        <a:srgbClr val="E6DECB"/>
+                      </a:solidFill>
+                      <a:prstDash val="solid"/>
+                      <a:round/>
+                      <a:headEnd type="none" w="med" len="med"/>
+                      <a:tailEnd type="none" w="med" len="med"/>
+                    </a:lnT>
+                    <a:lnB w="6350" cap="flat" cmpd="sng" algn="ctr">
+                      <a:solidFill>
+                        <a:srgbClr val="E6DECB"/>
+                      </a:solidFill>
+                      <a:prstDash val="solid"/>
+                      <a:round/>
+                      <a:headEnd type="none" w="med" len="med"/>
+                      <a:tailEnd type="none" w="med" len="med"/>
+                    </a:lnB>
+                    <a:solidFill>
+                      <a:srgbClr val="FFFFFF"/>
+                    </a:solidFill>
+                  </a:tcPr>
+                </a:tc>
+                <a:tc>
+                  <a:txBody>
+                    <a:bodyPr/>
+                    <a:lstStyle/>
+                    <a:p>
+                      <a:pPr algn="ctr" indent="0" marL="0">
+                        <a:buNone/>
+                      </a:pPr>
+                      <a:r>
+                        <a:rPr lang="en-US" sz="1100" dirty="0">
+                          <a:solidFill>
+                            <a:srgbClr val="2A2621"/>
+                          </a:solidFill>
+                          <a:latin typeface="Calibri" pitchFamily="34" charset="0"/>
+                          <a:ea typeface="Calibri" pitchFamily="34" charset="-122"/>
+                          <a:cs typeface="Calibri" pitchFamily="34" charset="-120"/>
+                        </a:rPr>
+                        <a:t>2,688</a:t>
+                      </a:r>
+                      <a:endParaRPr lang="en-US" sz="1100" dirty="0">
+                        <a:latin typeface="Calibri" charset="0"/>
+                        <a:ea typeface="Calibri" charset="0"/>
+                        <a:cs typeface="Calibri" charset="0"/>
+                      </a:endParaRPr>
+                    </a:p>
+                  </a:txBody>
+                  <a:tcPr marL="91440" marR="91440" marT="45720" marB="45720" anchor="ctr">
+                    <a:lnL w="6350" cap="flat" cmpd="sng" algn="ctr">
+                      <a:solidFill>
+                        <a:srgbClr val="E6DECB"/>
+                      </a:solidFill>
+                      <a:prstDash val="solid"/>
+                      <a:round/>
+                      <a:headEnd type="none" w="med" len="med"/>
+                      <a:tailEnd type="none" w="med" len="med"/>
+                    </a:lnL>
+                    <a:lnR w="6350" cap="flat" cmpd="sng" algn="ctr">
+                      <a:solidFill>
+                        <a:srgbClr val="E6DECB"/>
+                      </a:solidFill>
+                      <a:prstDash val="solid"/>
+                      <a:round/>
+                      <a:headEnd type="none" w="med" len="med"/>
+                      <a:tailEnd type="none" w="med" len="med"/>
+                    </a:lnR>
+                    <a:lnT w="6350" cap="flat" cmpd="sng" algn="ctr">
+                      <a:solidFill>
+                        <a:srgbClr val="E6DECB"/>
+                      </a:solidFill>
+                      <a:prstDash val="solid"/>
+                      <a:round/>
+                      <a:headEnd type="none" w="med" len="med"/>
+                      <a:tailEnd type="none" w="med" len="med"/>
+                    </a:lnT>
+                    <a:lnB w="6350" cap="flat" cmpd="sng" algn="ctr">
+                      <a:solidFill>
+                        <a:srgbClr val="E6DECB"/>
+                      </a:solidFill>
+                      <a:prstDash val="solid"/>
+                      <a:round/>
+                      <a:headEnd type="none" w="med" len="med"/>
+                      <a:tailEnd type="none" w="med" len="med"/>
+                    </a:lnB>
+                    <a:solidFill>
+                      <a:srgbClr val="FFFFFF"/>
+                    </a:solidFill>
+                  </a:tcPr>
+                </a:tc>
+                <a:tc>
+                  <a:txBody>
+                    <a:bodyPr/>
+                    <a:lstStyle/>
+                    <a:p>
+                      <a:pPr algn="ctr" indent="0" marL="0">
+                        <a:buNone/>
+                      </a:pPr>
+                      <a:r>
+                        <a:rPr lang="en-US" sz="1100" dirty="0">
+                          <a:solidFill>
+                            <a:srgbClr val="2A2621"/>
+                          </a:solidFill>
+                          <a:latin typeface="Calibri" pitchFamily="34" charset="0"/>
+                          <a:ea typeface="Calibri" pitchFamily="34" charset="-122"/>
+                          <a:cs typeface="Calibri" pitchFamily="34" charset="-120"/>
+                        </a:rPr>
+                        <a:t>6×6</a:t>
+                      </a:r>
+                      <a:endParaRPr lang="en-US" sz="1100" dirty="0">
+                        <a:latin typeface="Calibri" charset="0"/>
+                        <a:ea typeface="Calibri" charset="0"/>
+                        <a:cs typeface="Calibri" charset="0"/>
+                      </a:endParaRPr>
+                    </a:p>
+                  </a:txBody>
+                  <a:tcPr marL="91440" marR="91440" marT="45720" marB="45720" anchor="ctr">
+                    <a:lnL w="6350" cap="flat" cmpd="sng" algn="ctr">
+                      <a:solidFill>
+                        <a:srgbClr val="E6DECB"/>
+                      </a:solidFill>
+                      <a:prstDash val="solid"/>
+                      <a:round/>
+                      <a:headEnd type="none" w="med" len="med"/>
+                      <a:tailEnd type="none" w="med" len="med"/>
+                    </a:lnL>
+                    <a:lnR w="6350" cap="flat" cmpd="sng" algn="ctr">
+                      <a:solidFill>
+                        <a:srgbClr val="E6DECB"/>
+                      </a:solidFill>
+                      <a:prstDash val="solid"/>
+                      <a:round/>
+                      <a:headEnd type="none" w="med" len="med"/>
+                      <a:tailEnd type="none" w="med" len="med"/>
+                    </a:lnR>
+                    <a:lnT w="6350" cap="flat" cmpd="sng" algn="ctr">
+                      <a:solidFill>
+                        <a:srgbClr val="E6DECB"/>
+                      </a:solidFill>
+                      <a:prstDash val="solid"/>
+                      <a:round/>
+                      <a:headEnd type="none" w="med" len="med"/>
+                      <a:tailEnd type="none" w="med" len="med"/>
+                    </a:lnT>
+                    <a:lnB w="6350" cap="flat" cmpd="sng" algn="ctr">
+                      <a:solidFill>
+                        <a:srgbClr val="E6DECB"/>
+                      </a:solidFill>
+                      <a:prstDash val="solid"/>
+                      <a:round/>
+                      <a:headEnd type="none" w="med" len="med"/>
+                      <a:tailEnd type="none" w="med" len="med"/>
+                    </a:lnB>
+                    <a:solidFill>
+                      <a:srgbClr val="FFFFFF"/>
+                    </a:solidFill>
+                  </a:tcPr>
+                </a:tc>
+              </a:tr>
+              <a:tr h="310896">
+                <a:tc>
+                  <a:txBody>
+                    <a:bodyPr/>
+                    <a:lstStyle/>
+                    <a:p>
+                      <a:pPr algn="l" indent="0" marL="0">
+                        <a:buNone/>
+                      </a:pPr>
+                      <a:r>
+                        <a:rPr lang="en-US" sz="1100" b="1" dirty="0">
+                          <a:solidFill>
+                            <a:srgbClr val="2B2621"/>
+                          </a:solidFill>
+                          <a:latin typeface="Calibri" pitchFamily="34" charset="0"/>
+                          <a:ea typeface="Calibri" pitchFamily="34" charset="-122"/>
+                          <a:cs typeface="Calibri" pitchFamily="34" charset="-120"/>
+                        </a:rPr>
+                        <a:t>Kochi</a:t>
+                      </a:r>
+                      <a:endParaRPr lang="en-US" sz="1100" dirty="0">
+                        <a:latin typeface="Calibri" charset="0"/>
+                        <a:ea typeface="Calibri" charset="0"/>
+                        <a:cs typeface="Calibri" charset="0"/>
+                      </a:endParaRPr>
+                    </a:p>
+                  </a:txBody>
+                  <a:tcPr marL="91440" marR="91440" marT="45720" marB="45720" anchor="ctr">
+                    <a:lnL w="6350" cap="flat" cmpd="sng" algn="ctr">
+                      <a:solidFill>
+                        <a:srgbClr val="E6DECB"/>
+                      </a:solidFill>
+                      <a:prstDash val="solid"/>
+                      <a:round/>
+                      <a:headEnd type="none" w="med" len="med"/>
+                      <a:tailEnd type="none" w="med" len="med"/>
+                    </a:lnL>
+                    <a:lnR w="6350" cap="flat" cmpd="sng" algn="ctr">
+                      <a:solidFill>
+                        <a:srgbClr val="E6DECB"/>
+                      </a:solidFill>
+                      <a:prstDash val="solid"/>
+                      <a:round/>
+                      <a:headEnd type="none" w="med" len="med"/>
+                      <a:tailEnd type="none" w="med" len="med"/>
+                    </a:lnR>
+                    <a:lnT w="6350" cap="flat" cmpd="sng" algn="ctr">
+                      <a:solidFill>
+                        <a:srgbClr val="E6DECB"/>
+                      </a:solidFill>
+                      <a:prstDash val="solid"/>
+                      <a:round/>
+                      <a:headEnd type="none" w="med" len="med"/>
+                      <a:tailEnd type="none" w="med" len="med"/>
+                    </a:lnT>
+                    <a:lnB w="6350" cap="flat" cmpd="sng" algn="ctr">
+                      <a:solidFill>
+                        <a:srgbClr val="E6DECB"/>
+                      </a:solidFill>
+                      <a:prstDash val="solid"/>
+                      <a:round/>
+                      <a:headEnd type="none" w="med" len="med"/>
+                      <a:tailEnd type="none" w="med" len="med"/>
+                    </a:lnB>
+                    <a:solidFill>
+                      <a:srgbClr val="F7F3EA"/>
+                    </a:solidFill>
+                  </a:tcPr>
+                </a:tc>
+                <a:tc>
+                  <a:txBody>
+                    <a:bodyPr/>
+                    <a:lstStyle/>
+                    <a:p>
+                      <a:pPr algn="l" indent="0" marL="0">
+                        <a:buNone/>
+                      </a:pPr>
+                      <a:r>
+                        <a:rPr lang="en-US" sz="1100" dirty="0">
+                          <a:solidFill>
+                            <a:srgbClr val="2A2621"/>
+                          </a:solidFill>
+                          <a:latin typeface="Cambria" pitchFamily="34" charset="0"/>
+                          <a:ea typeface="Cambria" pitchFamily="34" charset="-122"/>
+                          <a:cs typeface="Cambria" pitchFamily="34" charset="-120"/>
+                        </a:rPr>
+                        <a:t>PVR Lulu Mall</a:t>
+                      </a:r>
+                      <a:endParaRPr lang="en-US" sz="1100" dirty="0">
+                        <a:latin typeface="Cambria" charset="0"/>
+                        <a:ea typeface="Cambria" charset="0"/>
+                        <a:cs typeface="Cambria" charset="0"/>
+                      </a:endParaRPr>
+                    </a:p>
+                  </a:txBody>
+                  <a:tcPr marL="91440" marR="91440" marT="45720" marB="45720" anchor="ctr">
+                    <a:lnL w="6350" cap="flat" cmpd="sng" algn="ctr">
+                      <a:solidFill>
+                        <a:srgbClr val="E6DECB"/>
+                      </a:solidFill>
+                      <a:prstDash val="solid"/>
+                      <a:round/>
+                      <a:headEnd type="none" w="med" len="med"/>
+                      <a:tailEnd type="none" w="med" len="med"/>
+                    </a:lnL>
+                    <a:lnR w="6350" cap="flat" cmpd="sng" algn="ctr">
+                      <a:solidFill>
+                        <a:srgbClr val="E6DECB"/>
+                      </a:solidFill>
+                      <a:prstDash val="solid"/>
+                      <a:round/>
+                      <a:headEnd type="none" w="med" len="med"/>
+                      <a:tailEnd type="none" w="med" len="med"/>
+                    </a:lnR>
+                    <a:lnT w="6350" cap="flat" cmpd="sng" algn="ctr">
+                      <a:solidFill>
+                        <a:srgbClr val="E6DECB"/>
+                      </a:solidFill>
+                      <a:prstDash val="solid"/>
+                      <a:round/>
+                      <a:headEnd type="none" w="med" len="med"/>
+                      <a:tailEnd type="none" w="med" len="med"/>
+                    </a:lnT>
+                    <a:lnB w="6350" cap="flat" cmpd="sng" algn="ctr">
+                      <a:solidFill>
+                        <a:srgbClr val="E6DECB"/>
+                      </a:solidFill>
+                      <a:prstDash val="solid"/>
+                      <a:round/>
+                      <a:headEnd type="none" w="med" len="med"/>
+                      <a:tailEnd type="none" w="med" len="med"/>
+                    </a:lnB>
+                    <a:solidFill>
+                      <a:srgbClr val="F7F3EA"/>
+                    </a:solidFill>
+                  </a:tcPr>
+                </a:tc>
+                <a:tc>
+                  <a:txBody>
+                    <a:bodyPr/>
+                    <a:lstStyle/>
+                    <a:p>
+                      <a:pPr algn="ctr" indent="0" marL="0">
+                        <a:buNone/>
+                      </a:pPr>
+                      <a:r>
+                        <a:rPr lang="en-US" sz="1100" dirty="0">
+                          <a:solidFill>
+                            <a:srgbClr val="2A2621"/>
+                          </a:solidFill>
+                          <a:latin typeface="Calibri" pitchFamily="34" charset="0"/>
+                          <a:ea typeface="Calibri" pitchFamily="34" charset="-122"/>
+                          <a:cs typeface="Calibri" pitchFamily="34" charset="-120"/>
+                        </a:rPr>
+                        <a:t>9</a:t>
+                      </a:r>
+                      <a:endParaRPr lang="en-US" sz="1100" dirty="0">
+                        <a:latin typeface="Calibri" charset="0"/>
+                        <a:ea typeface="Calibri" charset="0"/>
+                        <a:cs typeface="Calibri" charset="0"/>
+                      </a:endParaRPr>
+                    </a:p>
+                  </a:txBody>
+                  <a:tcPr marL="91440" marR="91440" marT="45720" marB="45720" anchor="ctr">
+                    <a:lnL w="6350" cap="flat" cmpd="sng" algn="ctr">
+                      <a:solidFill>
+                        <a:srgbClr val="E6DECB"/>
+                      </a:solidFill>
+                      <a:prstDash val="solid"/>
+                      <a:round/>
+                      <a:headEnd type="none" w="med" len="med"/>
+                      <a:tailEnd type="none" w="med" len="med"/>
+                    </a:lnL>
+                    <a:lnR w="6350" cap="flat" cmpd="sng" algn="ctr">
+                      <a:solidFill>
+                        <a:srgbClr val="E6DECB"/>
+                      </a:solidFill>
+                      <a:prstDash val="solid"/>
+                      <a:round/>
+                      <a:headEnd type="none" w="med" len="med"/>
+                      <a:tailEnd type="none" w="med" len="med"/>
+                    </a:lnR>
+                    <a:lnT w="6350" cap="flat" cmpd="sng" algn="ctr">
+                      <a:solidFill>
+                        <a:srgbClr val="E6DECB"/>
+                      </a:solidFill>
+                      <a:prstDash val="solid"/>
+                      <a:round/>
+                      <a:headEnd type="none" w="med" len="med"/>
+                      <a:tailEnd type="none" w="med" len="med"/>
+                    </a:lnT>
+                    <a:lnB w="6350" cap="flat" cmpd="sng" algn="ctr">
+                      <a:solidFill>
+                        <a:srgbClr val="E6DECB"/>
+                      </a:solidFill>
+                      <a:prstDash val="solid"/>
+                      <a:round/>
+                      <a:headEnd type="none" w="med" len="med"/>
+                      <a:tailEnd type="none" w="med" len="med"/>
+                    </a:lnB>
+                    <a:solidFill>
+                      <a:srgbClr val="F7F3EA"/>
+                    </a:solidFill>
+                  </a:tcPr>
+                </a:tc>
+                <a:tc>
+                  <a:txBody>
+                    <a:bodyPr/>
+                    <a:lstStyle/>
+                    <a:p>
+                      <a:pPr algn="ctr" indent="0" marL="0">
+                        <a:buNone/>
+                      </a:pPr>
+                      <a:r>
+                        <a:rPr lang="en-US" sz="1100" dirty="0">
+                          <a:solidFill>
+                            <a:srgbClr val="2A2621"/>
+                          </a:solidFill>
+                          <a:latin typeface="Calibri" pitchFamily="34" charset="0"/>
+                          <a:ea typeface="Calibri" pitchFamily="34" charset="-122"/>
+                          <a:cs typeface="Calibri" pitchFamily="34" charset="-120"/>
+                        </a:rPr>
+                        <a:t>1,926</a:t>
+                      </a:r>
+                      <a:endParaRPr lang="en-US" sz="1100" dirty="0">
+                        <a:latin typeface="Calibri" charset="0"/>
+                        <a:ea typeface="Calibri" charset="0"/>
+                        <a:cs typeface="Calibri" charset="0"/>
+                      </a:endParaRPr>
+                    </a:p>
+                  </a:txBody>
+                  <a:tcPr marL="91440" marR="91440" marT="45720" marB="45720" anchor="ctr">
+                    <a:lnL w="6350" cap="flat" cmpd="sng" algn="ctr">
+                      <a:solidFill>
+                        <a:srgbClr val="E6DECB"/>
+                      </a:solidFill>
+                      <a:prstDash val="solid"/>
+                      <a:round/>
+                      <a:headEnd type="none" w="med" len="med"/>
+                      <a:tailEnd type="none" w="med" len="med"/>
+                    </a:lnL>
+                    <a:lnR w="6350" cap="flat" cmpd="sng" algn="ctr">
+                      <a:solidFill>
+                        <a:srgbClr val="E6DECB"/>
+                      </a:solidFill>
+                      <a:prstDash val="solid"/>
+                      <a:round/>
+                      <a:headEnd type="none" w="med" len="med"/>
+                      <a:tailEnd type="none" w="med" len="med"/>
+                    </a:lnR>
+                    <a:lnT w="6350" cap="flat" cmpd="sng" algn="ctr">
+                      <a:solidFill>
+                        <a:srgbClr val="E6DECB"/>
+                      </a:solidFill>
+                      <a:prstDash val="solid"/>
+                      <a:round/>
+                      <a:headEnd type="none" w="med" len="med"/>
+                      <a:tailEnd type="none" w="med" len="med"/>
+                    </a:lnT>
+                    <a:lnB w="6350" cap="flat" cmpd="sng" algn="ctr">
+                      <a:solidFill>
+                        <a:srgbClr val="E6DECB"/>
+                      </a:solidFill>
+                      <a:prstDash val="solid"/>
+                      <a:round/>
+                      <a:headEnd type="none" w="med" len="med"/>
+                      <a:tailEnd type="none" w="med" len="med"/>
+                    </a:lnB>
+                    <a:solidFill>
+                      <a:srgbClr val="F7F3EA"/>
+                    </a:solidFill>
+                  </a:tcPr>
+                </a:tc>
+                <a:tc>
+                  <a:txBody>
+                    <a:bodyPr/>
+                    <a:lstStyle/>
+                    <a:p>
+                      <a:pPr algn="ctr" indent="0" marL="0">
+                        <a:buNone/>
+                      </a:pPr>
+                      <a:r>
+                        <a:rPr lang="en-US" sz="1100" dirty="0">
+                          <a:solidFill>
+                            <a:srgbClr val="2A2621"/>
+                          </a:solidFill>
+                          <a:latin typeface="Calibri" pitchFamily="34" charset="0"/>
+                          <a:ea typeface="Calibri" pitchFamily="34" charset="-122"/>
+                          <a:cs typeface="Calibri" pitchFamily="34" charset="-120"/>
+                        </a:rPr>
+                        <a:t>8×8</a:t>
+                      </a:r>
+                      <a:endParaRPr lang="en-US" sz="1100" dirty="0">
+                        <a:latin typeface="Calibri" charset="0"/>
+                        <a:ea typeface="Calibri" charset="0"/>
+                        <a:cs typeface="Calibri" charset="0"/>
+                      </a:endParaRPr>
+                    </a:p>
+                  </a:txBody>
+                  <a:tcPr marL="91440" marR="91440" marT="45720" marB="45720" anchor="ctr">
+                    <a:lnL w="6350" cap="flat" cmpd="sng" algn="ctr">
+                      <a:solidFill>
+                        <a:srgbClr val="E6DECB"/>
+                      </a:solidFill>
+                      <a:prstDash val="solid"/>
+                      <a:round/>
+                      <a:headEnd type="none" w="med" len="med"/>
+                      <a:tailEnd type="none" w="med" len="med"/>
+                    </a:lnL>
+                    <a:lnR w="6350" cap="flat" cmpd="sng" algn="ctr">
+                      <a:solidFill>
+                        <a:srgbClr val="E6DECB"/>
+                      </a:solidFill>
+                      <a:prstDash val="solid"/>
+                      <a:round/>
+                      <a:headEnd type="none" w="med" len="med"/>
+                      <a:tailEnd type="none" w="med" len="med"/>
+                    </a:lnR>
+                    <a:lnT w="6350" cap="flat" cmpd="sng" algn="ctr">
+                      <a:solidFill>
+                        <a:srgbClr val="E6DECB"/>
+                      </a:solidFill>
+                      <a:prstDash val="solid"/>
+                      <a:round/>
+                      <a:headEnd type="none" w="med" len="med"/>
+                      <a:tailEnd type="none" w="med" len="med"/>
+                    </a:lnT>
+                    <a:lnB w="6350" cap="flat" cmpd="sng" algn="ctr">
+                      <a:solidFill>
+                        <a:srgbClr val="E6DECB"/>
+                      </a:solidFill>
+                      <a:prstDash val="solid"/>
+                      <a:round/>
+                      <a:headEnd type="none" w="med" len="med"/>
+                      <a:tailEnd type="none" w="med" len="med"/>
+                    </a:lnB>
+                    <a:solidFill>
+                      <a:srgbClr val="F7F3EA"/>
+                    </a:solidFill>
+                  </a:tcPr>
+                </a:tc>
+              </a:tr>
+            </a:tbl>
+          </a:graphicData>
+        </a:graphic>
+      </p:graphicFrame>
+      <p:sp>
+        <p:nvSpPr>
+          <p:cNvPr id="5" name="Text 2"/>
+          <p:cNvSpPr/>
+          <p:nvPr/>
+        </p:nvSpPr>
+        <p:spPr>
+          <a:xfrm>
+            <a:off x="502920" y="6172200"/>
+            <a:ext cx="10972800" cy="274320"/>
+          </a:xfrm>
+          <a:prstGeom prst="rect">
+            <a:avLst/>
+          </a:prstGeom>
+          <a:noFill/>
+          <a:ln/>
+        </p:spPr>
+        <p:txBody>
+          <a:bodyPr wrap="square" rtlCol="0" anchor="ctr"/>
+          <a:lstStyle/>
+          <a:p>
+            <a:pPr indent="0" marL="0">
+              <a:buNone/>
+            </a:pPr>
+            <a:r>
+              <a:rPr lang="en-US" sz="1200" b="1" dirty="0">
+                <a:solidFill>
+                  <a:srgbClr val="A9813A"/>
+                </a:solidFill>
+                <a:latin typeface="Calibri" pitchFamily="34" charset="0"/>
+                <a:ea typeface="Calibri" pitchFamily="34" charset="-122"/>
+                <a:cs typeface="Calibri" pitchFamily="34" charset="-120"/>
+              </a:rPr>
+              <a:t>Totals:  </a:t>
+            </a:r>
+            <a:pPr indent="0" marL="0">
+              <a:buNone/>
+            </a:pPr>
+            <a:r>
+              <a:rPr lang="en-US" sz="1200" dirty="0">
+                <a:solidFill>
+                  <a:srgbClr val="2A2621"/>
+                </a:solidFill>
+                <a:latin typeface="Calibri" pitchFamily="34" charset="0"/>
+                <a:ea typeface="Calibri" pitchFamily="34" charset="-122"/>
+                <a:cs typeface="Calibri" pitchFamily="34" charset="-120"/>
+              </a:rPr>
+              <a:t>14 multiplexes  ·  107 screens  ·  ~20,000 seats per show  (PVR + INOX)</a:t>
+            </a:r>
+            <a:endParaRPr lang="en-US" sz="1200" dirty="0"/>
+          </a:p>
+        </p:txBody>
+      </p:sp>
+      <p:sp>
+        <p:nvSpPr>
+          <p:cNvPr id="6" name="Text 3"/>
+          <p:cNvSpPr/>
+          <p:nvPr/>
+        </p:nvSpPr>
+        <p:spPr>
+          <a:xfrm>
+            <a:off x="457200" y="6419088"/>
+            <a:ext cx="7315200" cy="320040"/>
+          </a:xfrm>
+          <a:prstGeom prst="rect">
+            <a:avLst/>
+          </a:prstGeom>
+          <a:noFill/>
+          <a:ln/>
+        </p:spPr>
+        <p:txBody>
+          <a:bodyPr wrap="square" rtlCol="0" anchor="ctr"/>
+          <a:lstStyle/>
+          <a:p>
+            <a:pPr algn="l" indent="0" marL="0">
+              <a:buNone/>
+            </a:pPr>
+            <a:r>
+              <a:rPr lang="en-US" sz="950" b="1" spc="100" kern="0" dirty="0">
+                <a:solidFill>
+                  <a:srgbClr val="C6A24E"/>
+                </a:solidFill>
+                <a:latin typeface="Cambria" pitchFamily="34" charset="0"/>
+                <a:ea typeface="Cambria" pitchFamily="34" charset="-122"/>
+                <a:cs typeface="Cambria" pitchFamily="34" charset="-120"/>
+              </a:rPr>
+              <a:t>DOFT</a:t>
+            </a:r>
+            <a:pPr algn="l" indent="0" marL="0">
+              <a:buNone/>
+            </a:pPr>
+            <a:r>
+              <a:rPr lang="en-US" sz="950" spc="100" kern="0" dirty="0">
+                <a:solidFill>
+                  <a:srgbClr val="857B6C"/>
+                </a:solidFill>
+                <a:latin typeface="Calibri" pitchFamily="34" charset="0"/>
+                <a:ea typeface="Calibri" pitchFamily="34" charset="-122"/>
+                <a:cs typeface="Calibri" pitchFamily="34" charset="-120"/>
+              </a:rPr>
+              <a:t>  ·  SCENTED MEMORIES  ·  Diwali Pop-Up Kiosk Concept</a:t>
+            </a:r>
+            <a:endParaRPr lang="en-US" sz="950" dirty="0"/>
+          </a:p>
+        </p:txBody>
+      </p:sp>
+      <p:sp>
+        <p:nvSpPr>
+          <p:cNvPr id="7" name="Text 4"/>
+          <p:cNvSpPr/>
+          <p:nvPr/>
+        </p:nvSpPr>
+        <p:spPr>
+          <a:xfrm>
+            <a:off x="10058400" y="6419088"/>
+            <a:ext cx="1691640" cy="320040"/>
+          </a:xfrm>
+          <a:prstGeom prst="rect">
+            <a:avLst/>
+          </a:prstGeom>
+          <a:noFill/>
+          <a:ln/>
+        </p:spPr>
+        <p:txBody>
+          <a:bodyPr wrap="square" rtlCol="0" anchor="ctr"/>
+          <a:lstStyle/>
+          <a:p>
+            <a:pPr algn="r" indent="0" marL="0">
+              <a:buNone/>
+            </a:pPr>
+            <a:r>
+              <a:rPr lang="en-US" sz="950" dirty="0">
+                <a:solidFill>
+                  <a:srgbClr val="857B6C"/>
+                </a:solidFill>
+                <a:latin typeface="Calibri" pitchFamily="34" charset="0"/>
+                <a:ea typeface="Calibri" pitchFamily="34" charset="-122"/>
+                <a:cs typeface="Calibri" pitchFamily="34" charset="-120"/>
+              </a:rPr>
+              <a:t>ProMarcom</a:t>
+            </a:r>
+            <a:endParaRPr lang="en-US" sz="950" dirty="0"/>
+          </a:p>
+        </p:txBody>
+      </p:sp>
+      <p:sp>
+        <p:nvSpPr>
+          <p:cNvPr id="8" name="Shape 5"/>
+          <p:cNvSpPr/>
+          <p:nvPr/>
+        </p:nvSpPr>
+        <p:spPr>
+          <a:xfrm>
+            <a:off x="11475720" y="6364224"/>
+            <a:ext cx="402336" cy="402336"/>
+          </a:xfrm>
+          <a:prstGeom prst="ellipse">
+            <a:avLst/>
+          </a:prstGeom>
+          <a:solidFill>
+            <a:srgbClr val="FFFFFF"/>
+          </a:solidFill>
+          <a:ln w="12700">
+            <a:solidFill>
+              <a:srgbClr val="C6A24E"/>
+            </a:solidFill>
+            <a:prstDash val="solid"/>
+          </a:ln>
+        </p:spPr>
+      </p:sp>
+      <p:sp>
+        <p:nvSpPr>
+          <p:cNvPr id="9" name="Text 6"/>
+          <p:cNvSpPr/>
+          <p:nvPr/>
+        </p:nvSpPr>
+        <p:spPr>
+          <a:xfrm>
+            <a:off x="11475720" y="6364224"/>
+            <a:ext cx="402336" cy="402336"/>
+          </a:xfrm>
+          <a:prstGeom prst="rect">
+            <a:avLst/>
+          </a:prstGeom>
+          <a:noFill/>
+          <a:ln/>
+        </p:spPr>
+        <p:txBody>
+          <a:bodyPr wrap="square" rtlCol="0" anchor="ctr"/>
+          <a:lstStyle/>
+          <a:p>
+            <a:pPr algn="ctr" indent="0" marL="0">
+              <a:buNone/>
+            </a:pPr>
+            <a:r>
+              <a:rPr lang="en-US" sz="1100" b="1" dirty="0">
+                <a:solidFill>
+                  <a:srgbClr val="2B2621"/>
+                </a:solidFill>
+                <a:latin typeface="Cambria" pitchFamily="34" charset="0"/>
+                <a:ea typeface="Cambria" pitchFamily="34" charset="-122"/>
+                <a:cs typeface="Cambria" pitchFamily="34" charset="-120"/>
+              </a:rPr>
+              <a:t>13</a:t>
+            </a:r>
+            <a:endParaRPr lang="en-US" sz="1100" dirty="0"/>
+          </a:p>
+        </p:txBody>
+      </p:sp>
+    </p:spTree>
+  </p:cSld>
+  <p:clrMapOvr>
+    <a:masterClrMapping/>
+  </p:clrMapOvr>
+</p:sld>
+</file>
+
+<file path=ppt/slides/slide14.xml><?xml version="1.0" encoding="utf-8"?>
+<p:sld xmlns:a="http://schemas.openxmlformats.org/drawingml/2006/main" xmlns:r="http://schemas.openxmlformats.org/officeDocument/2006/relationships" xmlns:p="http://schemas.openxmlformats.org/presentationml/2006/main">
+  <p:cSld name="Slide 14">
+    <p:bg>
+      <p:bgPr>
+        <a:solidFill>
           <a:srgbClr val="EFEAE0"/>
         </a:solidFill>
       </p:bgPr>
@@ -3672,6 +10911,1208 @@
       </p:grpSpPr>
       <p:sp>
         <p:nvSpPr>
+          <p:cNvPr id="2" name="Shape 0"/>
+          <p:cNvSpPr/>
+          <p:nvPr/>
+        </p:nvSpPr>
+        <p:spPr>
+          <a:xfrm>
+            <a:off x="0" y="0"/>
+            <a:ext cx="6035040" cy="6858000"/>
+          </a:xfrm>
+          <a:prstGeom prst="rect">
+            <a:avLst/>
+          </a:prstGeom>
+          <a:solidFill>
+            <a:srgbClr val="FFFFFF"/>
+          </a:solidFill>
+          <a:ln/>
+        </p:spPr>
+      </p:sp>
+      <p:sp>
+        <p:nvSpPr>
+          <p:cNvPr id="3" name="Text 1"/>
+          <p:cNvSpPr/>
+          <p:nvPr/>
+        </p:nvSpPr>
+        <p:spPr>
+          <a:xfrm>
+            <a:off x="548640" y="548640"/>
+            <a:ext cx="6400800" cy="274320"/>
+          </a:xfrm>
+          <a:prstGeom prst="rect">
+            <a:avLst/>
+          </a:prstGeom>
+          <a:noFill/>
+          <a:ln/>
+        </p:spPr>
+        <p:txBody>
+          <a:bodyPr wrap="square" rtlCol="0" anchor="ctr"/>
+          <a:lstStyle/>
+          <a:p>
+            <a:pPr algn="l" indent="0" marL="0">
+              <a:buNone/>
+            </a:pPr>
+            <a:r>
+              <a:rPr lang="en-US" sz="1250" b="1" spc="300" kern="0" dirty="0">
+                <a:solidFill>
+                  <a:srgbClr val="A9813A"/>
+                </a:solidFill>
+                <a:latin typeface="Calibri" pitchFamily="34" charset="0"/>
+                <a:ea typeface="Calibri" pitchFamily="34" charset="-122"/>
+                <a:cs typeface="Calibri" pitchFamily="34" charset="-120"/>
+              </a:rPr>
+              <a:t>MULTIPLEX COMMERCIALS</a:t>
+            </a:r>
+            <a:endParaRPr lang="en-US" sz="1250" dirty="0"/>
+          </a:p>
+        </p:txBody>
+      </p:sp>
+      <p:sp>
+        <p:nvSpPr>
+          <p:cNvPr id="4" name="Text 2"/>
+          <p:cNvSpPr/>
+          <p:nvPr/>
+        </p:nvSpPr>
+        <p:spPr>
+          <a:xfrm>
+            <a:off x="502920" y="868680"/>
+            <a:ext cx="5029200" cy="640080"/>
+          </a:xfrm>
+          <a:prstGeom prst="rect">
+            <a:avLst/>
+          </a:prstGeom>
+          <a:noFill/>
+          <a:ln/>
+        </p:spPr>
+        <p:txBody>
+          <a:bodyPr wrap="square" rtlCol="0" anchor="ctr"/>
+          <a:lstStyle/>
+          <a:p>
+            <a:pPr indent="0" marL="0">
+              <a:buNone/>
+            </a:pPr>
+            <a:r>
+              <a:rPr lang="en-US" sz="3000" b="1" dirty="0">
+                <a:solidFill>
+                  <a:srgbClr val="2B2621"/>
+                </a:solidFill>
+                <a:latin typeface="Cambria" pitchFamily="34" charset="0"/>
+                <a:ea typeface="Cambria" pitchFamily="34" charset="-122"/>
+                <a:cs typeface="Cambria" pitchFamily="34" charset="-120"/>
+              </a:rPr>
+              <a:t>Activation cost</a:t>
+            </a:r>
+            <a:endParaRPr lang="en-US" sz="3000" dirty="0"/>
+          </a:p>
+        </p:txBody>
+      </p:sp>
+      <p:sp>
+        <p:nvSpPr>
+          <p:cNvPr id="5" name="Text 3"/>
+          <p:cNvSpPr/>
+          <p:nvPr/>
+        </p:nvSpPr>
+        <p:spPr>
+          <a:xfrm>
+            <a:off x="502920" y="1828800"/>
+            <a:ext cx="3383280" cy="457200"/>
+          </a:xfrm>
+          <a:prstGeom prst="rect">
+            <a:avLst/>
+          </a:prstGeom>
+          <a:noFill/>
+          <a:ln/>
+        </p:spPr>
+        <p:txBody>
+          <a:bodyPr wrap="square" rtlCol="0" anchor="ctr"/>
+          <a:lstStyle/>
+          <a:p>
+            <a:pPr indent="0" marL="0">
+              <a:buNone/>
+            </a:pPr>
+            <a:r>
+              <a:rPr lang="en-US" sz="1450" dirty="0">
+                <a:solidFill>
+                  <a:srgbClr val="2A2621"/>
+                </a:solidFill>
+                <a:latin typeface="Calibri" pitchFamily="34" charset="0"/>
+                <a:ea typeface="Calibri" pitchFamily="34" charset="-122"/>
+                <a:cs typeface="Calibri" pitchFamily="34" charset="-120"/>
+              </a:rPr>
+              <a:t>Per multiplex (6 weeks)</a:t>
+            </a:r>
+            <a:endParaRPr lang="en-US" sz="1450" dirty="0"/>
+          </a:p>
+        </p:txBody>
+      </p:sp>
+      <p:sp>
+        <p:nvSpPr>
+          <p:cNvPr id="6" name="Text 4"/>
+          <p:cNvSpPr/>
+          <p:nvPr/>
+        </p:nvSpPr>
+        <p:spPr>
+          <a:xfrm>
+            <a:off x="3794760" y="1828800"/>
+            <a:ext cx="1783080" cy="457200"/>
+          </a:xfrm>
+          <a:prstGeom prst="rect">
+            <a:avLst/>
+          </a:prstGeom>
+          <a:noFill/>
+          <a:ln/>
+        </p:spPr>
+        <p:txBody>
+          <a:bodyPr wrap="square" rtlCol="0" anchor="ctr"/>
+          <a:lstStyle/>
+          <a:p>
+            <a:pPr algn="r" indent="0" marL="0">
+              <a:buNone/>
+            </a:pPr>
+            <a:r>
+              <a:rPr lang="en-US" sz="1500" b="1" dirty="0">
+                <a:solidFill>
+                  <a:srgbClr val="2B2621"/>
+                </a:solidFill>
+                <a:latin typeface="Cambria" pitchFamily="34" charset="0"/>
+                <a:ea typeface="Cambria" pitchFamily="34" charset="-122"/>
+                <a:cs typeface="Cambria" pitchFamily="34" charset="-120"/>
+              </a:rPr>
+              <a:t>₹3,00,000</a:t>
+            </a:r>
+            <a:endParaRPr lang="en-US" sz="1500" dirty="0"/>
+          </a:p>
+        </p:txBody>
+      </p:sp>
+      <p:sp>
+        <p:nvSpPr>
+          <p:cNvPr id="7" name="Shape 5"/>
+          <p:cNvSpPr/>
+          <p:nvPr/>
+        </p:nvSpPr>
+        <p:spPr>
+          <a:xfrm>
+            <a:off x="502920" y="2340864"/>
+            <a:ext cx="5074920" cy="0"/>
+          </a:xfrm>
+          <a:prstGeom prst="line">
+            <a:avLst/>
+          </a:prstGeom>
+          <a:noFill/>
+          <a:ln w="9525">
+            <a:solidFill>
+              <a:srgbClr val="E6DECB"/>
+            </a:solidFill>
+            <a:prstDash val="solid"/>
+          </a:ln>
+        </p:spPr>
+      </p:sp>
+      <p:sp>
+        <p:nvSpPr>
+          <p:cNvPr id="8" name="Text 6"/>
+          <p:cNvSpPr/>
+          <p:nvPr/>
+        </p:nvSpPr>
+        <p:spPr>
+          <a:xfrm>
+            <a:off x="502920" y="2450592"/>
+            <a:ext cx="3383280" cy="457200"/>
+          </a:xfrm>
+          <a:prstGeom prst="rect">
+            <a:avLst/>
+          </a:prstGeom>
+          <a:noFill/>
+          <a:ln/>
+        </p:spPr>
+        <p:txBody>
+          <a:bodyPr wrap="square" rtlCol="0" anchor="ctr"/>
+          <a:lstStyle/>
+          <a:p>
+            <a:pPr indent="0" marL="0">
+              <a:buNone/>
+            </a:pPr>
+            <a:r>
+              <a:rPr lang="en-US" sz="1450" dirty="0">
+                <a:solidFill>
+                  <a:srgbClr val="2A2621"/>
+                </a:solidFill>
+                <a:latin typeface="Calibri" pitchFamily="34" charset="0"/>
+                <a:ea typeface="Calibri" pitchFamily="34" charset="-122"/>
+                <a:cs typeface="Calibri" pitchFamily="34" charset="-120"/>
+              </a:rPr>
+              <a:t>× 14 multiplexes</a:t>
+            </a:r>
+            <a:endParaRPr lang="en-US" sz="1450" dirty="0"/>
+          </a:p>
+        </p:txBody>
+      </p:sp>
+      <p:sp>
+        <p:nvSpPr>
+          <p:cNvPr id="9" name="Text 7"/>
+          <p:cNvSpPr/>
+          <p:nvPr/>
+        </p:nvSpPr>
+        <p:spPr>
+          <a:xfrm>
+            <a:off x="3794760" y="2450592"/>
+            <a:ext cx="1783080" cy="457200"/>
+          </a:xfrm>
+          <a:prstGeom prst="rect">
+            <a:avLst/>
+          </a:prstGeom>
+          <a:noFill/>
+          <a:ln/>
+        </p:spPr>
+        <p:txBody>
+          <a:bodyPr wrap="square" rtlCol="0" anchor="ctr"/>
+          <a:lstStyle/>
+          <a:p>
+            <a:pPr algn="r" indent="0" marL="0">
+              <a:buNone/>
+            </a:pPr>
+            <a:r>
+              <a:rPr lang="en-US" sz="1500" b="1" dirty="0">
+                <a:solidFill>
+                  <a:srgbClr val="2B2621"/>
+                </a:solidFill>
+                <a:latin typeface="Cambria" pitchFamily="34" charset="0"/>
+                <a:ea typeface="Cambria" pitchFamily="34" charset="-122"/>
+                <a:cs typeface="Cambria" pitchFamily="34" charset="-120"/>
+              </a:rPr>
+              <a:t>₹42,00,000</a:t>
+            </a:r>
+            <a:endParaRPr lang="en-US" sz="1500" dirty="0"/>
+          </a:p>
+        </p:txBody>
+      </p:sp>
+      <p:sp>
+        <p:nvSpPr>
+          <p:cNvPr id="10" name="Shape 8"/>
+          <p:cNvSpPr/>
+          <p:nvPr/>
+        </p:nvSpPr>
+        <p:spPr>
+          <a:xfrm>
+            <a:off x="502920" y="2962656"/>
+            <a:ext cx="5074920" cy="0"/>
+          </a:xfrm>
+          <a:prstGeom prst="line">
+            <a:avLst/>
+          </a:prstGeom>
+          <a:noFill/>
+          <a:ln w="9525">
+            <a:solidFill>
+              <a:srgbClr val="E6DECB"/>
+            </a:solidFill>
+            <a:prstDash val="solid"/>
+          </a:ln>
+        </p:spPr>
+      </p:sp>
+      <p:sp>
+        <p:nvSpPr>
+          <p:cNvPr id="11" name="Text 9"/>
+          <p:cNvSpPr/>
+          <p:nvPr/>
+        </p:nvSpPr>
+        <p:spPr>
+          <a:xfrm>
+            <a:off x="502920" y="3072384"/>
+            <a:ext cx="3383280" cy="457200"/>
+          </a:xfrm>
+          <a:prstGeom prst="rect">
+            <a:avLst/>
+          </a:prstGeom>
+          <a:noFill/>
+          <a:ln/>
+        </p:spPr>
+        <p:txBody>
+          <a:bodyPr wrap="square" rtlCol="0" anchor="ctr"/>
+          <a:lstStyle/>
+          <a:p>
+            <a:pPr indent="0" marL="0">
+              <a:buNone/>
+            </a:pPr>
+            <a:r>
+              <a:rPr lang="en-US" sz="1450" dirty="0">
+                <a:solidFill>
+                  <a:srgbClr val="2A2621"/>
+                </a:solidFill>
+                <a:latin typeface="Calibri" pitchFamily="34" charset="0"/>
+                <a:ea typeface="Calibri" pitchFamily="34" charset="-122"/>
+                <a:cs typeface="Calibri" pitchFamily="34" charset="-120"/>
+              </a:rPr>
+              <a:t>GST @ 18%</a:t>
+            </a:r>
+            <a:endParaRPr lang="en-US" sz="1450" dirty="0"/>
+          </a:p>
+        </p:txBody>
+      </p:sp>
+      <p:sp>
+        <p:nvSpPr>
+          <p:cNvPr id="12" name="Text 10"/>
+          <p:cNvSpPr/>
+          <p:nvPr/>
+        </p:nvSpPr>
+        <p:spPr>
+          <a:xfrm>
+            <a:off x="3794760" y="3072384"/>
+            <a:ext cx="1783080" cy="457200"/>
+          </a:xfrm>
+          <a:prstGeom prst="rect">
+            <a:avLst/>
+          </a:prstGeom>
+          <a:noFill/>
+          <a:ln/>
+        </p:spPr>
+        <p:txBody>
+          <a:bodyPr wrap="square" rtlCol="0" anchor="ctr"/>
+          <a:lstStyle/>
+          <a:p>
+            <a:pPr algn="r" indent="0" marL="0">
+              <a:buNone/>
+            </a:pPr>
+            <a:r>
+              <a:rPr lang="en-US" sz="1500" b="1" dirty="0">
+                <a:solidFill>
+                  <a:srgbClr val="2B2621"/>
+                </a:solidFill>
+                <a:latin typeface="Cambria" pitchFamily="34" charset="0"/>
+                <a:ea typeface="Cambria" pitchFamily="34" charset="-122"/>
+                <a:cs typeface="Cambria" pitchFamily="34" charset="-120"/>
+              </a:rPr>
+              <a:t>₹7,56,000</a:t>
+            </a:r>
+            <a:endParaRPr lang="en-US" sz="1500" dirty="0"/>
+          </a:p>
+        </p:txBody>
+      </p:sp>
+      <p:sp>
+        <p:nvSpPr>
+          <p:cNvPr id="13" name="Shape 11"/>
+          <p:cNvSpPr/>
+          <p:nvPr/>
+        </p:nvSpPr>
+        <p:spPr>
+          <a:xfrm>
+            <a:off x="502920" y="3584448"/>
+            <a:ext cx="5074920" cy="0"/>
+          </a:xfrm>
+          <a:prstGeom prst="line">
+            <a:avLst/>
+          </a:prstGeom>
+          <a:noFill/>
+          <a:ln w="9525">
+            <a:solidFill>
+              <a:srgbClr val="E6DECB"/>
+            </a:solidFill>
+            <a:prstDash val="solid"/>
+          </a:ln>
+        </p:spPr>
+      </p:sp>
+      <p:sp>
+        <p:nvSpPr>
+          <p:cNvPr id="14" name="Shape 12"/>
+          <p:cNvSpPr/>
+          <p:nvPr/>
+        </p:nvSpPr>
+        <p:spPr>
+          <a:xfrm>
+            <a:off x="502920" y="3785616"/>
+            <a:ext cx="5074920" cy="777240"/>
+          </a:xfrm>
+          <a:prstGeom prst="rect">
+            <a:avLst/>
+          </a:prstGeom>
+          <a:solidFill>
+            <a:srgbClr val="2B2621"/>
+          </a:solidFill>
+          <a:ln/>
+        </p:spPr>
+      </p:sp>
+      <p:sp>
+        <p:nvSpPr>
+          <p:cNvPr id="15" name="Text 13"/>
+          <p:cNvSpPr/>
+          <p:nvPr/>
+        </p:nvSpPr>
+        <p:spPr>
+          <a:xfrm>
+            <a:off x="685800" y="3785616"/>
+            <a:ext cx="2377440" cy="777240"/>
+          </a:xfrm>
+          <a:prstGeom prst="rect">
+            <a:avLst/>
+          </a:prstGeom>
+          <a:noFill/>
+          <a:ln/>
+        </p:spPr>
+        <p:txBody>
+          <a:bodyPr wrap="square" rtlCol="0" anchor="ctr"/>
+          <a:lstStyle/>
+          <a:p>
+            <a:pPr indent="0" marL="0">
+              <a:buNone/>
+            </a:pPr>
+            <a:r>
+              <a:rPr lang="en-US" sz="1500" b="1" dirty="0">
+                <a:solidFill>
+                  <a:srgbClr val="FFFFFF"/>
+                </a:solidFill>
+                <a:latin typeface="Cambria" pitchFamily="34" charset="0"/>
+                <a:ea typeface="Cambria" pitchFamily="34" charset="-122"/>
+                <a:cs typeface="Cambria" pitchFamily="34" charset="-120"/>
+              </a:rPr>
+              <a:t>Total (incl. GST)</a:t>
+            </a:r>
+            <a:endParaRPr lang="en-US" sz="1500" dirty="0"/>
+          </a:p>
+        </p:txBody>
+      </p:sp>
+      <p:sp>
+        <p:nvSpPr>
+          <p:cNvPr id="16" name="Text 14"/>
+          <p:cNvSpPr/>
+          <p:nvPr/>
+        </p:nvSpPr>
+        <p:spPr>
+          <a:xfrm>
+            <a:off x="3063240" y="3785616"/>
+            <a:ext cx="2377440" cy="777240"/>
+          </a:xfrm>
+          <a:prstGeom prst="rect">
+            <a:avLst/>
+          </a:prstGeom>
+          <a:noFill/>
+          <a:ln/>
+        </p:spPr>
+        <p:txBody>
+          <a:bodyPr wrap="square" rtlCol="0" anchor="ctr"/>
+          <a:lstStyle/>
+          <a:p>
+            <a:pPr algn="r" indent="0" marL="0">
+              <a:buNone/>
+            </a:pPr>
+            <a:r>
+              <a:rPr lang="en-US" sz="2200" b="1" dirty="0">
+                <a:solidFill>
+                  <a:srgbClr val="C6A24E"/>
+                </a:solidFill>
+                <a:latin typeface="Cambria" pitchFamily="34" charset="0"/>
+                <a:ea typeface="Cambria" pitchFamily="34" charset="-122"/>
+                <a:cs typeface="Cambria" pitchFamily="34" charset="-120"/>
+              </a:rPr>
+              <a:t>₹49,56,000</a:t>
+            </a:r>
+            <a:endParaRPr lang="en-US" sz="2200" dirty="0"/>
+          </a:p>
+        </p:txBody>
+      </p:sp>
+      <p:sp>
+        <p:nvSpPr>
+          <p:cNvPr id="17" name="Text 15"/>
+          <p:cNvSpPr/>
+          <p:nvPr/>
+        </p:nvSpPr>
+        <p:spPr>
+          <a:xfrm>
+            <a:off x="502920" y="4745736"/>
+            <a:ext cx="5120640" cy="731520"/>
+          </a:xfrm>
+          <a:prstGeom prst="rect">
+            <a:avLst/>
+          </a:prstGeom>
+          <a:noFill/>
+          <a:ln/>
+        </p:spPr>
+        <p:txBody>
+          <a:bodyPr wrap="square" rtlCol="0" anchor="t"/>
+          <a:lstStyle/>
+          <a:p>
+            <a:pPr indent="0" marL="0">
+              <a:lnSpc>
+                <a:spcPct val="110000"/>
+              </a:lnSpc>
+              <a:buNone/>
+            </a:pPr>
+            <a:r>
+              <a:rPr lang="en-US" sz="1150" dirty="0">
+                <a:solidFill>
+                  <a:srgbClr val="857B6C"/>
+                </a:solidFill>
+                <a:latin typeface="Calibri" pitchFamily="34" charset="0"/>
+                <a:ea typeface="Calibri" pitchFamily="34" charset="-122"/>
+                <a:cs typeface="Calibri" pitchFamily="34" charset="-120"/>
+              </a:rPr>
+              <a:t>For all 14 multiplexes, 6-week window.  Kiosk build, manpower &amp; logistics as per the operations costing.</a:t>
+            </a:r>
+            <a:endParaRPr lang="en-US" sz="1150" dirty="0"/>
+          </a:p>
+        </p:txBody>
+      </p:sp>
+      <p:sp>
+        <p:nvSpPr>
+          <p:cNvPr id="18" name="Shape 16"/>
+          <p:cNvSpPr/>
+          <p:nvPr/>
+        </p:nvSpPr>
+        <p:spPr>
+          <a:xfrm>
+            <a:off x="6035040" y="0"/>
+            <a:ext cx="36576" cy="6858000"/>
+          </a:xfrm>
+          <a:prstGeom prst="rect">
+            <a:avLst/>
+          </a:prstGeom>
+          <a:solidFill>
+            <a:srgbClr val="C6A24E"/>
+          </a:solidFill>
+          <a:ln/>
+        </p:spPr>
+      </p:sp>
+      <p:sp>
+        <p:nvSpPr>
+          <p:cNvPr id="19" name="Text 17"/>
+          <p:cNvSpPr/>
+          <p:nvPr/>
+        </p:nvSpPr>
+        <p:spPr>
+          <a:xfrm>
+            <a:off x="6400800" y="685800"/>
+            <a:ext cx="4572000" cy="320040"/>
+          </a:xfrm>
+          <a:prstGeom prst="rect">
+            <a:avLst/>
+          </a:prstGeom>
+          <a:noFill/>
+          <a:ln/>
+        </p:spPr>
+        <p:txBody>
+          <a:bodyPr wrap="square" rtlCol="0" anchor="ctr"/>
+          <a:lstStyle/>
+          <a:p>
+            <a:pPr indent="0" marL="0">
+              <a:buNone/>
+            </a:pPr>
+            <a:r>
+              <a:rPr lang="en-US" sz="1300" b="1" spc="300" kern="0" dirty="0">
+                <a:solidFill>
+                  <a:srgbClr val="A9813A"/>
+                </a:solidFill>
+                <a:latin typeface="Calibri" pitchFamily="34" charset="0"/>
+                <a:ea typeface="Calibri" pitchFamily="34" charset="-122"/>
+                <a:cs typeface="Calibri" pitchFamily="34" charset="-120"/>
+              </a:rPr>
+              <a:t>TERMS</a:t>
+            </a:r>
+            <a:endParaRPr lang="en-US" sz="1300" dirty="0"/>
+          </a:p>
+        </p:txBody>
+      </p:sp>
+      <p:sp>
+        <p:nvSpPr>
+          <p:cNvPr id="20" name="Shape 18"/>
+          <p:cNvSpPr/>
+          <p:nvPr/>
+        </p:nvSpPr>
+        <p:spPr>
+          <a:xfrm>
+            <a:off x="6400800" y="1289304"/>
+            <a:ext cx="137160" cy="137160"/>
+          </a:xfrm>
+          <a:prstGeom prst="ellipse">
+            <a:avLst/>
+          </a:prstGeom>
+          <a:solidFill>
+            <a:srgbClr val="C6A24E"/>
+          </a:solidFill>
+          <a:ln/>
+        </p:spPr>
+      </p:sp>
+      <p:sp>
+        <p:nvSpPr>
+          <p:cNvPr id="21" name="Text 19"/>
+          <p:cNvSpPr/>
+          <p:nvPr/>
+        </p:nvSpPr>
+        <p:spPr>
+          <a:xfrm>
+            <a:off x="6675120" y="1188720"/>
+            <a:ext cx="4937760" cy="457200"/>
+          </a:xfrm>
+          <a:prstGeom prst="rect">
+            <a:avLst/>
+          </a:prstGeom>
+          <a:noFill/>
+          <a:ln/>
+        </p:spPr>
+        <p:txBody>
+          <a:bodyPr wrap="square" rtlCol="0" anchor="t"/>
+          <a:lstStyle/>
+          <a:p>
+            <a:pPr indent="0" marL="0">
+              <a:lnSpc>
+                <a:spcPct val="100000"/>
+              </a:lnSpc>
+              <a:buNone/>
+            </a:pPr>
+            <a:r>
+              <a:rPr lang="en-US" sz="1350" dirty="0">
+                <a:solidFill>
+                  <a:srgbClr val="2A2621"/>
+                </a:solidFill>
+                <a:latin typeface="Calibri" pitchFamily="34" charset="0"/>
+                <a:ea typeface="Calibri" pitchFamily="34" charset="-122"/>
+                <a:cs typeface="Calibri" pitchFamily="34" charset="-120"/>
+              </a:rPr>
+              <a:t>100% advance, in favour of ProMarcom</a:t>
+            </a:r>
+            <a:endParaRPr lang="en-US" sz="1350" dirty="0"/>
+          </a:p>
+        </p:txBody>
+      </p:sp>
+      <p:sp>
+        <p:nvSpPr>
+          <p:cNvPr id="22" name="Shape 20"/>
+          <p:cNvSpPr/>
+          <p:nvPr/>
+        </p:nvSpPr>
+        <p:spPr>
+          <a:xfrm>
+            <a:off x="6400800" y="1856232"/>
+            <a:ext cx="137160" cy="137160"/>
+          </a:xfrm>
+          <a:prstGeom prst="ellipse">
+            <a:avLst/>
+          </a:prstGeom>
+          <a:solidFill>
+            <a:srgbClr val="C6A24E"/>
+          </a:solidFill>
+          <a:ln/>
+        </p:spPr>
+      </p:sp>
+      <p:sp>
+        <p:nvSpPr>
+          <p:cNvPr id="23" name="Text 21"/>
+          <p:cNvSpPr/>
+          <p:nvPr/>
+        </p:nvSpPr>
+        <p:spPr>
+          <a:xfrm>
+            <a:off x="6675120" y="1755648"/>
+            <a:ext cx="4937760" cy="457200"/>
+          </a:xfrm>
+          <a:prstGeom prst="rect">
+            <a:avLst/>
+          </a:prstGeom>
+          <a:noFill/>
+          <a:ln/>
+        </p:spPr>
+        <p:txBody>
+          <a:bodyPr wrap="square" rtlCol="0" anchor="t"/>
+          <a:lstStyle/>
+          <a:p>
+            <a:pPr indent="0" marL="0">
+              <a:lnSpc>
+                <a:spcPct val="100000"/>
+              </a:lnSpc>
+              <a:buNone/>
+            </a:pPr>
+            <a:r>
+              <a:rPr lang="en-US" sz="1350" dirty="0">
+                <a:solidFill>
+                  <a:srgbClr val="2A2621"/>
+                </a:solidFill>
+                <a:latin typeface="Calibri" pitchFamily="34" charset="0"/>
+                <a:ea typeface="Calibri" pitchFamily="34" charset="-122"/>
+                <a:cs typeface="Calibri" pitchFamily="34" charset="-120"/>
+              </a:rPr>
+              <a:t>18% GST extra on the above rates</a:t>
+            </a:r>
+            <a:endParaRPr lang="en-US" sz="1350" dirty="0"/>
+          </a:p>
+        </p:txBody>
+      </p:sp>
+      <p:sp>
+        <p:nvSpPr>
+          <p:cNvPr id="24" name="Shape 22"/>
+          <p:cNvSpPr/>
+          <p:nvPr/>
+        </p:nvSpPr>
+        <p:spPr>
+          <a:xfrm>
+            <a:off x="6400800" y="2423160"/>
+            <a:ext cx="137160" cy="137160"/>
+          </a:xfrm>
+          <a:prstGeom prst="ellipse">
+            <a:avLst/>
+          </a:prstGeom>
+          <a:solidFill>
+            <a:srgbClr val="C6A24E"/>
+          </a:solidFill>
+          <a:ln/>
+        </p:spPr>
+      </p:sp>
+      <p:sp>
+        <p:nvSpPr>
+          <p:cNvPr id="25" name="Text 23"/>
+          <p:cNvSpPr/>
+          <p:nvPr/>
+        </p:nvSpPr>
+        <p:spPr>
+          <a:xfrm>
+            <a:off x="6675120" y="2322576"/>
+            <a:ext cx="4937760" cy="457200"/>
+          </a:xfrm>
+          <a:prstGeom prst="rect">
+            <a:avLst/>
+          </a:prstGeom>
+          <a:noFill/>
+          <a:ln/>
+        </p:spPr>
+        <p:txBody>
+          <a:bodyPr wrap="square" rtlCol="0" anchor="t"/>
+          <a:lstStyle/>
+          <a:p>
+            <a:pPr indent="0" marL="0">
+              <a:lnSpc>
+                <a:spcPct val="100000"/>
+              </a:lnSpc>
+              <a:buNone/>
+            </a:pPr>
+            <a:r>
+              <a:rPr lang="en-US" sz="1350" dirty="0">
+                <a:solidFill>
+                  <a:srgbClr val="2A2621"/>
+                </a:solidFill>
+                <a:latin typeface="Calibri" pitchFamily="34" charset="0"/>
+                <a:ea typeface="Calibri" pitchFamily="34" charset="-122"/>
+                <a:cs typeface="Calibri" pitchFamily="34" charset="-120"/>
+              </a:rPr>
+              <a:t>Availability to be confirmed before booking</a:t>
+            </a:r>
+            <a:endParaRPr lang="en-US" sz="1350" dirty="0"/>
+          </a:p>
+        </p:txBody>
+      </p:sp>
+      <p:sp>
+        <p:nvSpPr>
+          <p:cNvPr id="26" name="Shape 24"/>
+          <p:cNvSpPr/>
+          <p:nvPr/>
+        </p:nvSpPr>
+        <p:spPr>
+          <a:xfrm>
+            <a:off x="6400800" y="2990088"/>
+            <a:ext cx="137160" cy="137160"/>
+          </a:xfrm>
+          <a:prstGeom prst="ellipse">
+            <a:avLst/>
+          </a:prstGeom>
+          <a:solidFill>
+            <a:srgbClr val="C6A24E"/>
+          </a:solidFill>
+          <a:ln/>
+        </p:spPr>
+      </p:sp>
+      <p:sp>
+        <p:nvSpPr>
+          <p:cNvPr id="27" name="Text 25"/>
+          <p:cNvSpPr/>
+          <p:nvPr/>
+        </p:nvSpPr>
+        <p:spPr>
+          <a:xfrm>
+            <a:off x="6675120" y="2889504"/>
+            <a:ext cx="4937760" cy="457200"/>
+          </a:xfrm>
+          <a:prstGeom prst="rect">
+            <a:avLst/>
+          </a:prstGeom>
+          <a:noFill/>
+          <a:ln/>
+        </p:spPr>
+        <p:txBody>
+          <a:bodyPr wrap="square" rtlCol="0" anchor="t"/>
+          <a:lstStyle/>
+          <a:p>
+            <a:pPr indent="0" marL="0">
+              <a:lnSpc>
+                <a:spcPct val="100000"/>
+              </a:lnSpc>
+              <a:buNone/>
+            </a:pPr>
+            <a:r>
+              <a:rPr lang="en-US" sz="1350" dirty="0">
+                <a:solidFill>
+                  <a:srgbClr val="2A2621"/>
+                </a:solidFill>
+                <a:latin typeface="Calibri" pitchFamily="34" charset="0"/>
+                <a:ea typeface="Calibri" pitchFamily="34" charset="-122"/>
+                <a:cs typeface="Calibri" pitchFamily="34" charset="-120"/>
+              </a:rPr>
+              <a:t>Site once booked cannot be postponed or cancelled</a:t>
+            </a:r>
+            <a:endParaRPr lang="en-US" sz="1350" dirty="0"/>
+          </a:p>
+        </p:txBody>
+      </p:sp>
+      <p:sp>
+        <p:nvSpPr>
+          <p:cNvPr id="28" name="Shape 26"/>
+          <p:cNvSpPr/>
+          <p:nvPr/>
+        </p:nvSpPr>
+        <p:spPr>
+          <a:xfrm>
+            <a:off x="6400800" y="3557016"/>
+            <a:ext cx="137160" cy="137160"/>
+          </a:xfrm>
+          <a:prstGeom prst="ellipse">
+            <a:avLst/>
+          </a:prstGeom>
+          <a:solidFill>
+            <a:srgbClr val="C6A24E"/>
+          </a:solidFill>
+          <a:ln/>
+        </p:spPr>
+      </p:sp>
+      <p:sp>
+        <p:nvSpPr>
+          <p:cNvPr id="29" name="Text 27"/>
+          <p:cNvSpPr/>
+          <p:nvPr/>
+        </p:nvSpPr>
+        <p:spPr>
+          <a:xfrm>
+            <a:off x="6675120" y="3456432"/>
+            <a:ext cx="4937760" cy="457200"/>
+          </a:xfrm>
+          <a:prstGeom prst="rect">
+            <a:avLst/>
+          </a:prstGeom>
+          <a:noFill/>
+          <a:ln/>
+        </p:spPr>
+        <p:txBody>
+          <a:bodyPr wrap="square" rtlCol="0" anchor="t"/>
+          <a:lstStyle/>
+          <a:p>
+            <a:pPr indent="0" marL="0">
+              <a:lnSpc>
+                <a:spcPct val="100000"/>
+              </a:lnSpc>
+              <a:buNone/>
+            </a:pPr>
+            <a:r>
+              <a:rPr lang="en-US" sz="1350" dirty="0">
+                <a:solidFill>
+                  <a:srgbClr val="2A2621"/>
+                </a:solidFill>
+                <a:latin typeface="Calibri" pitchFamily="34" charset="0"/>
+                <a:ea typeface="Calibri" pitchFamily="34" charset="-122"/>
+                <a:cs typeface="Calibri" pitchFamily="34" charset="-120"/>
+              </a:rPr>
+              <a:t>Billing from date of booking / availability</a:t>
+            </a:r>
+            <a:endParaRPr lang="en-US" sz="1350" dirty="0"/>
+          </a:p>
+        </p:txBody>
+      </p:sp>
+      <p:sp>
+        <p:nvSpPr>
+          <p:cNvPr id="30" name="Shape 28"/>
+          <p:cNvSpPr/>
+          <p:nvPr/>
+        </p:nvSpPr>
+        <p:spPr>
+          <a:xfrm>
+            <a:off x="6400800" y="4123944"/>
+            <a:ext cx="137160" cy="137160"/>
+          </a:xfrm>
+          <a:prstGeom prst="ellipse">
+            <a:avLst/>
+          </a:prstGeom>
+          <a:solidFill>
+            <a:srgbClr val="C6A24E"/>
+          </a:solidFill>
+          <a:ln/>
+        </p:spPr>
+      </p:sp>
+      <p:sp>
+        <p:nvSpPr>
+          <p:cNvPr id="31" name="Text 29"/>
+          <p:cNvSpPr/>
+          <p:nvPr/>
+        </p:nvSpPr>
+        <p:spPr>
+          <a:xfrm>
+            <a:off x="6675120" y="4023360"/>
+            <a:ext cx="4937760" cy="457200"/>
+          </a:xfrm>
+          <a:prstGeom prst="rect">
+            <a:avLst/>
+          </a:prstGeom>
+          <a:noFill/>
+          <a:ln/>
+        </p:spPr>
+        <p:txBody>
+          <a:bodyPr wrap="square" rtlCol="0" anchor="t"/>
+          <a:lstStyle/>
+          <a:p>
+            <a:pPr indent="0" marL="0">
+              <a:lnSpc>
+                <a:spcPct val="100000"/>
+              </a:lnSpc>
+              <a:buNone/>
+            </a:pPr>
+            <a:r>
+              <a:rPr lang="en-US" sz="1350" dirty="0">
+                <a:solidFill>
+                  <a:srgbClr val="2A2621"/>
+                </a:solidFill>
+                <a:latin typeface="Calibri" pitchFamily="34" charset="0"/>
+                <a:ea typeface="Calibri" pitchFamily="34" charset="-122"/>
+                <a:cs typeface="Calibri" pitchFamily="34" charset="-120"/>
+              </a:rPr>
+              <a:t>Rates subject to change without prior notice</a:t>
+            </a:r>
+            <a:endParaRPr lang="en-US" sz="1350" dirty="0"/>
+          </a:p>
+        </p:txBody>
+      </p:sp>
+      <p:sp>
+        <p:nvSpPr>
+          <p:cNvPr id="32" name="Text 30"/>
+          <p:cNvSpPr/>
+          <p:nvPr/>
+        </p:nvSpPr>
+        <p:spPr>
+          <a:xfrm>
+            <a:off x="6400800" y="4818888"/>
+            <a:ext cx="5212080" cy="640080"/>
+          </a:xfrm>
+          <a:prstGeom prst="rect">
+            <a:avLst/>
+          </a:prstGeom>
+          <a:noFill/>
+          <a:ln/>
+        </p:spPr>
+        <p:txBody>
+          <a:bodyPr wrap="square" rtlCol="0" anchor="t"/>
+          <a:lstStyle/>
+          <a:p>
+            <a:pPr indent="0" marL="0">
+              <a:lnSpc>
+                <a:spcPct val="110000"/>
+              </a:lnSpc>
+              <a:buNone/>
+            </a:pPr>
+            <a:r>
+              <a:rPr lang="en-US" sz="1100" i="1" dirty="0">
+                <a:solidFill>
+                  <a:srgbClr val="857B6C"/>
+                </a:solidFill>
+                <a:latin typeface="Calibri" pitchFamily="34" charset="0"/>
+                <a:ea typeface="Calibri" pitchFamily="34" charset="-122"/>
+                <a:cs typeface="Calibri" pitchFamily="34" charset="-120"/>
+              </a:rPr>
+              <a:t>Cinema-space commercials per the multiplex rate card; managed end-to-end by ProMarcom.</a:t>
+            </a:r>
+            <a:endParaRPr lang="en-US" sz="1100" dirty="0"/>
+          </a:p>
+        </p:txBody>
+      </p:sp>
+      <p:sp>
+        <p:nvSpPr>
+          <p:cNvPr id="33" name="Text 31"/>
+          <p:cNvSpPr/>
+          <p:nvPr/>
+        </p:nvSpPr>
+        <p:spPr>
+          <a:xfrm>
+            <a:off x="457200" y="6419088"/>
+            <a:ext cx="7315200" cy="320040"/>
+          </a:xfrm>
+          <a:prstGeom prst="rect">
+            <a:avLst/>
+          </a:prstGeom>
+          <a:noFill/>
+          <a:ln/>
+        </p:spPr>
+        <p:txBody>
+          <a:bodyPr wrap="square" rtlCol="0" anchor="ctr"/>
+          <a:lstStyle/>
+          <a:p>
+            <a:pPr algn="l" indent="0" marL="0">
+              <a:buNone/>
+            </a:pPr>
+            <a:r>
+              <a:rPr lang="en-US" sz="950" b="1" spc="100" kern="0" dirty="0">
+                <a:solidFill>
+                  <a:srgbClr val="C6A24E"/>
+                </a:solidFill>
+                <a:latin typeface="Cambria" pitchFamily="34" charset="0"/>
+                <a:ea typeface="Cambria" pitchFamily="34" charset="-122"/>
+                <a:cs typeface="Cambria" pitchFamily="34" charset="-120"/>
+              </a:rPr>
+              <a:t>DOFT</a:t>
+            </a:r>
+            <a:pPr algn="l" indent="0" marL="0">
+              <a:buNone/>
+            </a:pPr>
+            <a:r>
+              <a:rPr lang="en-US" sz="950" spc="100" kern="0" dirty="0">
+                <a:solidFill>
+                  <a:srgbClr val="857B6C"/>
+                </a:solidFill>
+                <a:latin typeface="Calibri" pitchFamily="34" charset="0"/>
+                <a:ea typeface="Calibri" pitchFamily="34" charset="-122"/>
+                <a:cs typeface="Calibri" pitchFamily="34" charset="-120"/>
+              </a:rPr>
+              <a:t>  ·  SCENTED MEMORIES  ·  Diwali Pop-Up Kiosk Concept</a:t>
+            </a:r>
+            <a:endParaRPr lang="en-US" sz="950" dirty="0"/>
+          </a:p>
+        </p:txBody>
+      </p:sp>
+      <p:sp>
+        <p:nvSpPr>
+          <p:cNvPr id="34" name="Text 32"/>
+          <p:cNvSpPr/>
+          <p:nvPr/>
+        </p:nvSpPr>
+        <p:spPr>
+          <a:xfrm>
+            <a:off x="10058400" y="6419088"/>
+            <a:ext cx="1691640" cy="320040"/>
+          </a:xfrm>
+          <a:prstGeom prst="rect">
+            <a:avLst/>
+          </a:prstGeom>
+          <a:noFill/>
+          <a:ln/>
+        </p:spPr>
+        <p:txBody>
+          <a:bodyPr wrap="square" rtlCol="0" anchor="ctr"/>
+          <a:lstStyle/>
+          <a:p>
+            <a:pPr algn="r" indent="0" marL="0">
+              <a:buNone/>
+            </a:pPr>
+            <a:r>
+              <a:rPr lang="en-US" sz="950" dirty="0">
+                <a:solidFill>
+                  <a:srgbClr val="857B6C"/>
+                </a:solidFill>
+                <a:latin typeface="Calibri" pitchFamily="34" charset="0"/>
+                <a:ea typeface="Calibri" pitchFamily="34" charset="-122"/>
+                <a:cs typeface="Calibri" pitchFamily="34" charset="-120"/>
+              </a:rPr>
+              <a:t>ProMarcom</a:t>
+            </a:r>
+            <a:endParaRPr lang="en-US" sz="950" dirty="0"/>
+          </a:p>
+        </p:txBody>
+      </p:sp>
+      <p:sp>
+        <p:nvSpPr>
+          <p:cNvPr id="35" name="Shape 33"/>
+          <p:cNvSpPr/>
+          <p:nvPr/>
+        </p:nvSpPr>
+        <p:spPr>
+          <a:xfrm>
+            <a:off x="11475720" y="6364224"/>
+            <a:ext cx="402336" cy="402336"/>
+          </a:xfrm>
+          <a:prstGeom prst="ellipse">
+            <a:avLst/>
+          </a:prstGeom>
+          <a:solidFill>
+            <a:srgbClr val="FFFFFF"/>
+          </a:solidFill>
+          <a:ln w="12700">
+            <a:solidFill>
+              <a:srgbClr val="C6A24E"/>
+            </a:solidFill>
+            <a:prstDash val="solid"/>
+          </a:ln>
+        </p:spPr>
+      </p:sp>
+      <p:sp>
+        <p:nvSpPr>
+          <p:cNvPr id="36" name="Text 34"/>
+          <p:cNvSpPr/>
+          <p:nvPr/>
+        </p:nvSpPr>
+        <p:spPr>
+          <a:xfrm>
+            <a:off x="11475720" y="6364224"/>
+            <a:ext cx="402336" cy="402336"/>
+          </a:xfrm>
+          <a:prstGeom prst="rect">
+            <a:avLst/>
+          </a:prstGeom>
+          <a:noFill/>
+          <a:ln/>
+        </p:spPr>
+        <p:txBody>
+          <a:bodyPr wrap="square" rtlCol="0" anchor="ctr"/>
+          <a:lstStyle/>
+          <a:p>
+            <a:pPr algn="ctr" indent="0" marL="0">
+              <a:buNone/>
+            </a:pPr>
+            <a:r>
+              <a:rPr lang="en-US" sz="1100" b="1" dirty="0">
+                <a:solidFill>
+                  <a:srgbClr val="2B2621"/>
+                </a:solidFill>
+                <a:latin typeface="Cambria" pitchFamily="34" charset="0"/>
+                <a:ea typeface="Cambria" pitchFamily="34" charset="-122"/>
+                <a:cs typeface="Cambria" pitchFamily="34" charset="-120"/>
+              </a:rPr>
+              <a:t>14</a:t>
+            </a:r>
+            <a:endParaRPr lang="en-US" sz="1100" dirty="0"/>
+          </a:p>
+        </p:txBody>
+      </p:sp>
+    </p:spTree>
+  </p:cSld>
+  <p:clrMapOvr>
+    <a:masterClrMapping/>
+  </p:clrMapOvr>
+</p:sld>
+</file>
+
+<file path=ppt/slides/slide15.xml><?xml version="1.0" encoding="utf-8"?>
+<p:sld xmlns:a="http://schemas.openxmlformats.org/drawingml/2006/main" xmlns:r="http://schemas.openxmlformats.org/officeDocument/2006/relationships" xmlns:p="http://schemas.openxmlformats.org/presentationml/2006/main">
+  <p:cSld name="Slide 15">
+    <p:bg>
+      <p:bgPr>
+        <a:solidFill>
+          <a:srgbClr val="EFEAE0"/>
+        </a:solidFill>
+      </p:bgPr>
+    </p:bg>
+    <p:spTree>
+      <p:nvGrpSpPr>
+        <p:cNvPr id="1" name=""/>
+        <p:cNvGrpSpPr/>
+        <p:nvPr/>
+      </p:nvGrpSpPr>
+      <p:grpSpPr>
+        <a:xfrm>
+          <a:off x="0" y="0"/>
+          <a:ext cx="0" cy="0"/>
+          <a:chOff x="0" y="0"/>
+          <a:chExt cx="0" cy="0"/>
+        </a:xfrm>
+      </p:grpSpPr>
+      <p:sp>
+        <p:nvSpPr>
           <p:cNvPr id="2" name="Text 0"/>
           <p:cNvSpPr/>
           <p:nvPr/>
@@ -4888,7 +13329,7 @@
                 <a:ea typeface="Cambria" pitchFamily="34" charset="-122"/>
                 <a:cs typeface="Cambria" pitchFamily="34" charset="-120"/>
               </a:rPr>
-              <a:t>11</a:t>
+              <a:t>15</a:t>
             </a:r>
             <a:endParaRPr lang="en-US" sz="1100" dirty="0"/>
           </a:p>
@@ -4902,9 +13343,9 @@
 </p:sld>
 </file>
 
-<file path=ppt/slides/slide12.xml><?xml version="1.0" encoding="utf-8"?>
+<file path=ppt/slides/slide16.xml><?xml version="1.0" encoding="utf-8"?>
 <p:sld xmlns:a="http://schemas.openxmlformats.org/drawingml/2006/main" xmlns:r="http://schemas.openxmlformats.org/officeDocument/2006/relationships" xmlns:p="http://schemas.openxmlformats.org/presentationml/2006/main">
-  <p:cSld name="Slide 12">
+  <p:cSld name="Slide 16">
     <p:bg>
       <p:bgPr>
         <a:solidFill>

--- a/doft_diwali_popup/Doft_Kiosk_Concept_Presentation.pptx
+++ b/doft_diwali_popup/Doft_Kiosk_Concept_Presentation.pptx
@@ -4,6 +4,9 @@
   <p:sldMasterIdLst>
     <p:sldMasterId id="2147483648" r:id="rId1"/>
   </p:sldMasterIdLst>
+  <p:notesMasterIdLst>
+    <p:notesMasterId r:id="rId18"/>
+  </p:notesMasterIdLst>
   <p:sldIdLst>
     <p:sldId id="256" r:id="rId2"/>
     <p:sldId id="257" r:id="rId3"/>
@@ -22,11 +25,8 @@
     <p:sldId id="270" r:id="rId16"/>
     <p:sldId id="271" r:id="rId17"/>
   </p:sldIdLst>
-  <p:notesMasterIdLst>
-    <p:notesMasterId r:id="rId18"/>
-  </p:notesMasterIdLst>
-  <p:sldSz cx="12191695" cy="6858000"/>
-  <p:notesSz cx="6858000" cy="12191695"/>
+  <p:sldSz cx="12192000" cy="6858000"/>
+  <p:notesSz cx="6858000" cy="12192000"/>
   <p:defaultTextStyle>
     <a:lvl1pPr marL="0" algn="l" defTabSz="914400" rtl="0" eaLnBrk="1" latinLnBrk="0" hangingPunct="1">
       <a:defRPr sz="1800" kern="1200">
@@ -119,6 +119,11 @@
       </a:defRPr>
     </a:lvl9pPr>
   </p:defaultTextStyle>
+  <p:extLst>
+    <p:ext uri="{EFAFB233-063F-42B5-8137-9DF3F51BA10A}">
+      <p15:sldGuideLst xmlns:p15="http://schemas.microsoft.com/office/powerpoint/2012/main"/>
+    </p:ext>
+  </p:extLst>
 </p:presentation>
 </file>
 
@@ -144,234 +149,10 @@
           <a:chExt cx="0" cy="0"/>
         </a:xfrm>
       </p:grpSpPr>
-      <p:sp>
-        <p:nvSpPr>
-          <p:cNvPr id="2" name="Header Placeholder 1"/>
-          <p:cNvSpPr>
-            <a:spLocks noGrp="1"/>
-          </p:cNvSpPr>
-          <p:nvPr>
-            <p:ph type="hdr" sz="quarter"/>
-          </p:nvPr>
-        </p:nvSpPr>
-        <p:spPr>
-          <a:xfrm>
-            <a:off x="0" y="0"/>
-            <a:ext cx="2971800" cy="458788"/>
-          </a:xfrm>
-          <a:prstGeom prst="rect">
-            <a:avLst/>
-          </a:prstGeom>
-        </p:spPr>
-        <p:txBody>
-          <a:bodyPr vert="horz" lIns="91440" tIns="45720" rIns="91440" bIns="45720" rtlCol="0"/>
-          <a:lstStyle>
-            <a:lvl1pPr algn="l">
-              <a:defRPr sz="1200"/>
-            </a:lvl1pPr>
-          </a:lstStyle>
-          <a:p>
-            <a:endParaRPr lang="en-US"/>
-          </a:p>
-        </p:txBody>
-      </p:sp>
-      <p:sp>
-        <p:nvSpPr>
-          <p:cNvPr id="3" name="Date Placeholder 2"/>
-          <p:cNvSpPr>
-            <a:spLocks noGrp="1"/>
-          </p:cNvSpPr>
-          <p:nvPr>
-            <p:ph type="dt" idx="1"/>
-          </p:nvPr>
-        </p:nvSpPr>
-        <p:spPr>
-          <a:xfrm>
-            <a:off x="3884613" y="0"/>
-            <a:ext cx="2971800" cy="458788"/>
-          </a:xfrm>
-          <a:prstGeom prst="rect">
-            <a:avLst/>
-          </a:prstGeom>
-        </p:spPr>
-        <p:txBody>
-          <a:bodyPr vert="horz" lIns="91440" tIns="45720" rIns="91440" bIns="45720" rtlCol="0"/>
-          <a:lstStyle>
-            <a:lvl1pPr algn="r">
-              <a:defRPr sz="1200"/>
-            </a:lvl1pPr>
-          </a:lstStyle>
-          <a:p>
-            <a:fld id="{5282F153-3F37-0F45-9E97-73ACFA13230C}" type="datetimeFigureOut">
-              <a:rPr lang="en-US"/>
-              <a:t>7/23/19</a:t>
-            </a:fld>
-            <a:endParaRPr lang="en-US"/>
-          </a:p>
-        </p:txBody>
-      </p:sp>
-      <p:sp>
-        <p:nvSpPr>
-          <p:cNvPr id="4" name="Slide Image Placeholder 3"/>
-          <p:cNvSpPr>
-            <a:spLocks noGrp="1" noRot="1" noChangeAspect="1"/>
-          </p:cNvSpPr>
-          <p:nvPr>
-            <p:ph type="sldImg" idx="2"/>
-          </p:nvPr>
-        </p:nvSpPr>
-        <p:spPr>
-          <a:xfrm>
-            <a:off x="685800" y="1143000"/>
-            <a:ext cx="5486400" cy="3086100"/>
-          </a:xfrm>
-          <a:prstGeom prst="rect">
-            <a:avLst/>
-          </a:prstGeom>
-          <a:noFill/>
-          <a:ln w="12700">
-            <a:solidFill>
-              <a:prstClr val="black"/>
-            </a:solidFill>
-          </a:ln>
-        </p:spPr>
-        <p:txBody>
-          <a:bodyPr vert="horz" lIns="91440" tIns="45720" rIns="91440" bIns="45720" rtlCol="0" anchor="ctr"/>
-          <a:lstStyle/>
-          <a:p>
-            <a:endParaRPr lang="en-US"/>
-          </a:p>
-        </p:txBody>
-      </p:sp>
-      <p:sp>
-        <p:nvSpPr>
-          <p:cNvPr id="5" name="Notes Placeholder 4"/>
-          <p:cNvSpPr>
-            <a:spLocks noGrp="1"/>
-          </p:cNvSpPr>
-          <p:nvPr>
-            <p:ph type="body" sz="quarter" idx="3"/>
-          </p:nvPr>
-        </p:nvSpPr>
-        <p:spPr>
-          <a:xfrm>
-            <a:off x="685800" y="4400550"/>
-            <a:ext cx="5486400" cy="3600450"/>
-          </a:xfrm>
-          <a:prstGeom prst="rect">
-            <a:avLst/>
-          </a:prstGeom>
-        </p:spPr>
-        <p:txBody>
-          <a:bodyPr vert="horz" lIns="91440" tIns="45720" rIns="91440" bIns="45720" rtlCol="0"/>
-          <a:lstStyle/>
-          <a:p>
-            <a:pPr lvl="0"/>
-            <a:r>
-              <a:rPr lang="en-US"/>
-              <a:t>Click to edit Master text styles</a:t>
-            </a:r>
-          </a:p>
-          <a:p>
-            <a:pPr lvl="1"/>
-            <a:r>
-              <a:rPr lang="en-US"/>
-              <a:t>Second level</a:t>
-            </a:r>
-          </a:p>
-          <a:p>
-            <a:pPr lvl="2"/>
-            <a:r>
-              <a:rPr lang="en-US"/>
-              <a:t>Third level</a:t>
-            </a:r>
-          </a:p>
-          <a:p>
-            <a:pPr lvl="3"/>
-            <a:r>
-              <a:rPr lang="en-US"/>
-              <a:t>Fourth level</a:t>
-            </a:r>
-          </a:p>
-          <a:p>
-            <a:pPr lvl="4"/>
-            <a:r>
-              <a:rPr lang="en-US"/>
-              <a:t>Fifth level</a:t>
-            </a:r>
-          </a:p>
-        </p:txBody>
-      </p:sp>
-      <p:sp>
-        <p:nvSpPr>
-          <p:cNvPr id="6" name="Footer Placeholder 5"/>
-          <p:cNvSpPr>
-            <a:spLocks noGrp="1"/>
-          </p:cNvSpPr>
-          <p:nvPr>
-            <p:ph type="ftr" sz="quarter" idx="4"/>
-          </p:nvPr>
-        </p:nvSpPr>
-        <p:spPr>
-          <a:xfrm>
-            <a:off x="0" y="8685213"/>
-            <a:ext cx="2971800" cy="458787"/>
-          </a:xfrm>
-          <a:prstGeom prst="rect">
-            <a:avLst/>
-          </a:prstGeom>
-        </p:spPr>
-        <p:txBody>
-          <a:bodyPr vert="horz" lIns="91440" tIns="45720" rIns="91440" bIns="45720" rtlCol="0" anchor="b"/>
-          <a:lstStyle>
-            <a:lvl1pPr algn="l">
-              <a:defRPr sz="1200"/>
-            </a:lvl1pPr>
-          </a:lstStyle>
-          <a:p>
-            <a:endParaRPr lang="en-US"/>
-          </a:p>
-        </p:txBody>
-      </p:sp>
-      <p:sp>
-        <p:nvSpPr>
-          <p:cNvPr id="7" name="Slide Number Placeholder 6"/>
-          <p:cNvSpPr>
-            <a:spLocks noGrp="1"/>
-          </p:cNvSpPr>
-          <p:nvPr>
-            <p:ph type="sldNum" sz="quarter" idx="5"/>
-          </p:nvPr>
-        </p:nvSpPr>
-        <p:spPr>
-          <a:xfrm>
-            <a:off x="3884613" y="8685213"/>
-            <a:ext cx="2971800" cy="458787"/>
-          </a:xfrm>
-          <a:prstGeom prst="rect">
-            <a:avLst/>
-          </a:prstGeom>
-        </p:spPr>
-        <p:txBody>
-          <a:bodyPr vert="horz" lIns="91440" tIns="45720" rIns="91440" bIns="45720" rtlCol="0" anchor="b"/>
-          <a:lstStyle>
-            <a:lvl1pPr algn="r">
-              <a:defRPr sz="1200"/>
-            </a:lvl1pPr>
-          </a:lstStyle>
-          <a:p>
-            <a:fld id="{CE5E9CC1-C706-0F49-92D6-E571CC5EEA8F}" type="slidenum">
-              <a:rPr lang="en-US"/>
-              <a:t>‹#›</a:t>
-            </a:fld>
-            <a:endParaRPr lang="en-US"/>
-          </a:p>
-        </p:txBody>
-      </p:sp>
     </p:spTree>
     <p:extLst>
       <p:ext uri="{BB962C8B-B14F-4D97-AF65-F5344CB8AC3E}">
-        <p14:creationId xmlns:p14="http://schemas.microsoft.com/office/powerpoint/2010/main" val="1024086991"/>
+        <p14:creationId xmlns:p14="http://schemas.microsoft.com/office/powerpoint/2010/main" val="1945946606"/>
       </p:ext>
     </p:extLst>
   </p:cSld>
@@ -519,7 +300,6 @@
               <a:rPr lang="en-US" dirty="0"/>
               <a:t>Cover: DOFT Diwali Pop-Up boutique kiosk, premium home-fragrance salon, 8x8 ft, 14 malls, by ProMarcom.</a:t>
             </a:r>
-            <a:endParaRPr lang="en-US" dirty="0"/>
           </a:p>
         </p:txBody>
       </p:sp>
@@ -607,7 +387,6 @@
               <a:rPr lang="en-US" dirty="0"/>
               <a:t>14 malls pan-India per revised client list. Same window; select extend to Xmas/NY.</a:t>
             </a:r>
-            <a:endParaRPr lang="en-US" dirty="0"/>
           </a:p>
         </p:txBody>
       </p:sp>
@@ -695,7 +474,6 @@
               <a:rPr lang="en-US" dirty="0"/>
               <a:t>Rationale: atrium space limited; propose PVR/INOX multiplex foyer activation in the same malls. 14 multiplexes, 107 screens, ~20,000 seats/show.</a:t>
             </a:r>
-            <a:endParaRPr lang="en-US" dirty="0"/>
           </a:p>
         </p:txBody>
       </p:sp>
@@ -783,7 +561,6 @@
               <a:rPr lang="en-US" dirty="0"/>
               <a:t>Multiplex concept: 8x8 foyer activation stall, high dwell, sampling and direct sales. Reference activation photos.</a:t>
             </a:r>
-            <a:endParaRPr lang="en-US" dirty="0"/>
           </a:p>
         </p:txBody>
       </p:sp>
@@ -871,7 +648,6 @@
               <a:rPr lang="en-US" dirty="0"/>
               <a:t>Network: 14 PVR/INOX multiplexes in the same malls; 107 screens; ~20,000 seats/show.</a:t>
             </a:r>
-            <a:endParaRPr lang="en-US" dirty="0"/>
           </a:p>
         </p:txBody>
       </p:sp>
@@ -959,7 +735,6 @@
               <a:rPr lang="en-US" dirty="0"/>
               <a:t>Multiplex commercials: Rs 3,00,000 per site (6 weeks), x14 = Rs 42,00,000, +18% GST = Rs 49,56,000. Terms in favour of ProMarcom.</a:t>
             </a:r>
-            <a:endParaRPr lang="en-US" dirty="0"/>
           </a:p>
         </p:txBody>
       </p:sp>
@@ -1047,7 +822,6 @@
               <a:rPr lang="en-US" dirty="0"/>
               <a:t>Turnkey scope: build, transport/install, manpower, logistics, licences, daily operations &amp; reporting.</a:t>
             </a:r>
-            <a:endParaRPr lang="en-US" dirty="0"/>
           </a:p>
         </p:txBody>
       </p:sp>
@@ -1135,7 +909,6 @@
               <a:rPr lang="en-US" dirty="0"/>
               <a:t>Closing: next step is the detailed commercial proposal &amp; costing (separate workbook).</a:t>
             </a:r>
-            <a:endParaRPr lang="en-US" dirty="0"/>
           </a:p>
         </p:txBody>
       </p:sp>
@@ -1223,7 +996,6 @@
               <a:rPr lang="en-US" dirty="0"/>
               <a:t>The opportunity: premium home fragrance, Diwali gifting, 14 malls, 8x8 boutique kiosk, turnkey.</a:t>
             </a:r>
-            <a:endParaRPr lang="en-US" dirty="0"/>
           </a:p>
         </p:txBody>
       </p:sp>
@@ -1311,7 +1083,6 @@
               <a:rPr lang="en-US" dirty="0"/>
               <a:t>Design concept: warm boutique fragrance salon: backlit brand wall, brass shelving, consultation seating, digital screen.</a:t>
             </a:r>
-            <a:endParaRPr lang="en-US" dirty="0"/>
           </a:p>
         </p:txBody>
       </p:sp>
@@ -1395,10 +1166,6 @@
           <a:bodyPr/>
           <a:lstStyle/>
           <a:p>
-            <a:r>
-              <a:rPr lang="en-US" dirty="0"/>
-              <a:t/>
-            </a:r>
             <a:endParaRPr lang="en-US" dirty="0"/>
           </a:p>
         </p:txBody>
@@ -1483,10 +1250,6 @@
           <a:bodyPr/>
           <a:lstStyle/>
           <a:p>
-            <a:r>
-              <a:rPr lang="en-US" dirty="0"/>
-              <a:t/>
-            </a:r>
             <a:endParaRPr lang="en-US" dirty="0"/>
           </a:p>
         </p:txBody>
@@ -1571,10 +1334,6 @@
           <a:bodyPr/>
           <a:lstStyle/>
           <a:p>
-            <a:r>
-              <a:rPr lang="en-US" dirty="0"/>
-              <a:t/>
-            </a:r>
             <a:endParaRPr lang="en-US" dirty="0"/>
           </a:p>
         </p:txBody>
@@ -1663,7 +1422,6 @@
               <a:rPr lang="en-US" dirty="0"/>
               <a:t>Top layout: dimensioned 8x8 ft plan: backlit brand wall, perimeter U-counter, central seating, open-corner entries, digital screen.</a:t>
             </a:r>
-            <a:endParaRPr lang="en-US" dirty="0"/>
           </a:p>
         </p:txBody>
       </p:sp>
@@ -1751,7 +1509,6 @@
               <a:rPr lang="en-US" dirty="0"/>
               <a:t>Materials: warm white lacquer, brushed brass, black stone, backlit acrylic seal, warm LED, digital screen.</a:t>
             </a:r>
-            <a:endParaRPr lang="en-US" dirty="0"/>
           </a:p>
         </p:txBody>
       </p:sp>
@@ -1839,7 +1596,6 @@
               <a:rPr lang="en-US" dirty="0"/>
               <a:t>Product story: candles, gift hampers, reed diffusers, room sprays &amp; wax melts on backlit shelving.</a:t>
             </a:r>
-            <a:endParaRPr lang="en-US" dirty="0"/>
           </a:p>
         </p:txBody>
       </p:sp>
@@ -1912,6 +1668,11 @@
 <file path=ppt/slideMasters/slideMaster1.xml><?xml version="1.0" encoding="utf-8"?>
 <p:sldMaster xmlns:a="http://schemas.openxmlformats.org/drawingml/2006/main" xmlns:r="http://schemas.openxmlformats.org/officeDocument/2006/relationships" xmlns:p="http://schemas.openxmlformats.org/presentationml/2006/main">
   <p:cSld>
+    <p:bg>
+      <p:bgRef idx="1001">
+        <a:schemeClr val="bg1"/>
+      </p:bgRef>
+    </p:bg>
     <p:spTree>
       <p:nvGrpSpPr>
         <p:cNvPr id="1" name=""/>
@@ -2194,6 +1955,7 @@
         <a:solidFill>
           <a:srgbClr val="1E1B17"/>
         </a:solidFill>
+        <a:effectLst/>
       </p:bgPr>
     </p:bg>
     <p:spTree>
@@ -2212,15 +1974,15 @@
       </p:grpSpPr>
       <p:pic>
         <p:nvPicPr>
-          <p:cNvPr id="2" name="Image 0" descr="ref_imgs/P1_s2_2.jpg">    </p:cNvPr>
+          <p:cNvPr id="2" name="Image 0" descr="ref_imgs/P1_s2_2.jpg"/>
           <p:cNvPicPr>
             <a:picLocks noChangeAspect="1"/>
           </p:cNvPicPr>
           <p:nvPr/>
         </p:nvPicPr>
         <p:blipFill>
-          <a:blip r:embed="rId1"/>
-          <a:srcRect l="0" r="0" t="0" b="0"/>
+          <a:blip r:embed="rId3"/>
+          <a:srcRect/>
           <a:stretch/>
         </p:blipFill>
         <p:spPr>
@@ -2252,6 +2014,13 @@
           </a:solidFill>
           <a:ln/>
         </p:spPr>
+        <p:txBody>
+          <a:bodyPr/>
+          <a:lstStyle/>
+          <a:p>
+            <a:endParaRPr lang="en-US"/>
+          </a:p>
+        </p:txBody>
       </p:sp>
       <p:sp>
         <p:nvSpPr>
@@ -2274,6 +2043,13 @@
           </a:solidFill>
           <a:ln/>
         </p:spPr>
+        <p:txBody>
+          <a:bodyPr/>
+          <a:lstStyle/>
+          <a:p>
+            <a:endParaRPr lang="en-US"/>
+          </a:p>
+        </p:txBody>
       </p:sp>
       <p:sp>
         <p:nvSpPr>
@@ -2294,6 +2070,13 @@
           </a:solidFill>
           <a:ln/>
         </p:spPr>
+        <p:txBody>
+          <a:bodyPr/>
+          <a:lstStyle/>
+          <a:p>
+            <a:endParaRPr lang="en-US"/>
+          </a:p>
+        </p:txBody>
       </p:sp>
       <p:sp>
         <p:nvSpPr>
@@ -2316,11 +2099,11 @@
           <a:bodyPr wrap="square" rtlCol="0" anchor="ctr"/>
           <a:lstStyle/>
           <a:p>
-            <a:pPr indent="0" marL="0">
+            <a:pPr marL="0" indent="0">
               <a:buNone/>
             </a:pPr>
             <a:r>
-              <a:rPr lang="en-US" sz="6600" b="1" spc="600" kern="0" dirty="0">
+              <a:rPr lang="en-US" sz="6600" b="1" kern="0" spc="600" dirty="0">
                 <a:solidFill>
                   <a:srgbClr val="C6A24E"/>
                 </a:solidFill>
@@ -2355,11 +2138,11 @@
           <a:bodyPr wrap="square" rtlCol="0" anchor="ctr"/>
           <a:lstStyle/>
           <a:p>
-            <a:pPr indent="0" marL="0">
+            <a:pPr marL="0" indent="0">
               <a:buNone/>
             </a:pPr>
             <a:r>
-              <a:rPr lang="en-US" sz="1600" spc="600" kern="0" dirty="0">
+              <a:rPr lang="en-US" sz="1600" kern="0" spc="600" dirty="0">
                 <a:solidFill>
                   <a:srgbClr val="D8CDB6"/>
                 </a:solidFill>
@@ -2395,6 +2178,13 @@
             <a:prstDash val="solid"/>
           </a:ln>
         </p:spPr>
+        <p:txBody>
+          <a:bodyPr/>
+          <a:lstStyle/>
+          <a:p>
+            <a:endParaRPr lang="en-US"/>
+          </a:p>
+        </p:txBody>
       </p:sp>
       <p:sp>
         <p:nvSpPr>
@@ -2417,7 +2207,7 @@
           <a:bodyPr wrap="square" rtlCol="0" anchor="ctr"/>
           <a:lstStyle/>
           <a:p>
-            <a:pPr indent="0" marL="0">
+            <a:pPr marL="0" indent="0">
               <a:lnSpc>
                 <a:spcPct val="98000"/>
               </a:lnSpc>
@@ -2437,7 +2227,7 @@
             <a:endParaRPr lang="en-US" sz="3800" dirty="0"/>
           </a:p>
           <a:p>
-            <a:pPr indent="0" marL="0">
+            <a:pPr marL="0" indent="0">
               <a:lnSpc>
                 <a:spcPct val="98000"/>
               </a:lnSpc>
@@ -2479,7 +2269,7 @@
           <a:bodyPr wrap="square" rtlCol="0" anchor="ctr"/>
           <a:lstStyle/>
           <a:p>
-            <a:pPr indent="0" marL="0">
+            <a:pPr marL="0" indent="0">
               <a:buNone/>
             </a:pPr>
             <a:r>
@@ -2518,7 +2308,7 @@
           <a:bodyPr wrap="square" rtlCol="0" anchor="ctr"/>
           <a:lstStyle/>
           <a:p>
-            <a:pPr indent="0" marL="0">
+            <a:pPr marL="0" indent="0">
               <a:buNone/>
             </a:pPr>
             <a:r>
@@ -2532,9 +2322,6 @@
               </a:rPr>
               <a:t>8 ft × 8 ft</a:t>
             </a:r>
-            <a:pPr indent="0" marL="0">
-              <a:buNone/>
-            </a:pPr>
             <a:r>
               <a:rPr lang="en-US" sz="1400" dirty="0">
                 <a:solidFill>
@@ -2571,11 +2358,11 @@
           <a:bodyPr wrap="square" rtlCol="0" anchor="ctr"/>
           <a:lstStyle/>
           <a:p>
-            <a:pPr indent="0" marL="0">
+            <a:pPr marL="0" indent="0">
               <a:buNone/>
             </a:pPr>
             <a:r>
-              <a:rPr lang="en-US" sz="1100" spc="200" kern="0" dirty="0">
+              <a:rPr lang="en-US" sz="1100" kern="0" spc="200" dirty="0">
                 <a:solidFill>
                   <a:srgbClr val="9A9184"/>
                 </a:solidFill>
@@ -2610,7 +2397,7 @@
           <a:bodyPr wrap="square" rtlCol="0" anchor="ctr"/>
           <a:lstStyle/>
           <a:p>
-            <a:pPr indent="0" marL="0">
+            <a:pPr marL="0" indent="0">
               <a:buNone/>
             </a:pPr>
             <a:r>
@@ -2644,6 +2431,7 @@
         <a:solidFill>
           <a:srgbClr val="FFFFFF"/>
         </a:solidFill>
+        <a:effectLst/>
       </p:bgPr>
     </p:bg>
     <p:spTree>
@@ -2681,11 +2469,11 @@
           <a:bodyPr wrap="square" rtlCol="0" anchor="ctr"/>
           <a:lstStyle/>
           <a:p>
-            <a:pPr algn="l" indent="0" marL="0">
+            <a:pPr marL="0" indent="0" algn="l">
               <a:buNone/>
             </a:pPr>
             <a:r>
-              <a:rPr lang="en-US" sz="1250" b="1" spc="300" kern="0" dirty="0">
+              <a:rPr lang="en-US" sz="1250" b="1" kern="0" spc="300" dirty="0">
                 <a:solidFill>
                   <a:srgbClr val="A9813A"/>
                 </a:solidFill>
@@ -2720,7 +2508,7 @@
           <a:bodyPr wrap="square" rtlCol="0" anchor="ctr"/>
           <a:lstStyle/>
           <a:p>
-            <a:pPr indent="0" marL="0">
+            <a:pPr marL="0" indent="0">
               <a:buNone/>
             </a:pPr>
             <a:r>
@@ -2757,6 +2545,13 @@
           </a:solidFill>
           <a:ln/>
         </p:spPr>
+        <p:txBody>
+          <a:bodyPr/>
+          <a:lstStyle/>
+          <a:p>
+            <a:endParaRPr lang="en-US"/>
+          </a:p>
+        </p:txBody>
       </p:sp>
       <p:sp>
         <p:nvSpPr>
@@ -2779,7 +2574,7 @@
           <a:bodyPr wrap="square" rtlCol="0" anchor="ctr"/>
           <a:lstStyle/>
           <a:p>
-            <a:pPr indent="0" marL="0">
+            <a:pPr marL="0" indent="0">
               <a:buNone/>
             </a:pPr>
             <a:r>
@@ -2793,9 +2588,6 @@
               </a:rPr>
               <a:t>Delhi   </a:t>
             </a:r>
-            <a:pPr indent="0" marL="0">
-              <a:buNone/>
-            </a:pPr>
             <a:r>
               <a:rPr lang="en-US" sz="1350" dirty="0">
                 <a:solidFill>
@@ -2830,6 +2622,13 @@
           </a:solidFill>
           <a:ln/>
         </p:spPr>
+        <p:txBody>
+          <a:bodyPr/>
+          <a:lstStyle/>
+          <a:p>
+            <a:endParaRPr lang="en-US"/>
+          </a:p>
+        </p:txBody>
       </p:sp>
       <p:sp>
         <p:nvSpPr>
@@ -2852,7 +2651,7 @@
           <a:bodyPr wrap="square" rtlCol="0" anchor="ctr"/>
           <a:lstStyle/>
           <a:p>
-            <a:pPr indent="0" marL="0">
+            <a:pPr marL="0" indent="0">
               <a:buNone/>
             </a:pPr>
             <a:r>
@@ -2866,9 +2665,6 @@
               </a:rPr>
               <a:t>Noida   </a:t>
             </a:r>
-            <a:pPr indent="0" marL="0">
-              <a:buNone/>
-            </a:pPr>
             <a:r>
               <a:rPr lang="en-US" sz="1350" dirty="0">
                 <a:solidFill>
@@ -2903,6 +2699,13 @@
           </a:solidFill>
           <a:ln/>
         </p:spPr>
+        <p:txBody>
+          <a:bodyPr/>
+          <a:lstStyle/>
+          <a:p>
+            <a:endParaRPr lang="en-US"/>
+          </a:p>
+        </p:txBody>
       </p:sp>
       <p:sp>
         <p:nvSpPr>
@@ -2925,7 +2728,7 @@
           <a:bodyPr wrap="square" rtlCol="0" anchor="ctr"/>
           <a:lstStyle/>
           <a:p>
-            <a:pPr indent="0" marL="0">
+            <a:pPr marL="0" indent="0">
               <a:buNone/>
             </a:pPr>
             <a:r>
@@ -2939,9 +2742,6 @@
               </a:rPr>
               <a:t>Gurgaon   </a:t>
             </a:r>
-            <a:pPr indent="0" marL="0">
-              <a:buNone/>
-            </a:pPr>
             <a:r>
               <a:rPr lang="en-US" sz="1350" dirty="0">
                 <a:solidFill>
@@ -2976,6 +2776,13 @@
           </a:solidFill>
           <a:ln/>
         </p:spPr>
+        <p:txBody>
+          <a:bodyPr/>
+          <a:lstStyle/>
+          <a:p>
+            <a:endParaRPr lang="en-US"/>
+          </a:p>
+        </p:txBody>
       </p:sp>
       <p:sp>
         <p:nvSpPr>
@@ -2998,7 +2805,7 @@
           <a:bodyPr wrap="square" rtlCol="0" anchor="ctr"/>
           <a:lstStyle/>
           <a:p>
-            <a:pPr indent="0" marL="0">
+            <a:pPr marL="0" indent="0">
               <a:buNone/>
             </a:pPr>
             <a:r>
@@ -3012,9 +2819,6 @@
               </a:rPr>
               <a:t>Chandigarh   </a:t>
             </a:r>
-            <a:pPr indent="0" marL="0">
-              <a:buNone/>
-            </a:pPr>
             <a:r>
               <a:rPr lang="en-US" sz="1350" dirty="0">
                 <a:solidFill>
@@ -3049,6 +2853,13 @@
           </a:solidFill>
           <a:ln/>
         </p:spPr>
+        <p:txBody>
+          <a:bodyPr/>
+          <a:lstStyle/>
+          <a:p>
+            <a:endParaRPr lang="en-US"/>
+          </a:p>
+        </p:txBody>
       </p:sp>
       <p:sp>
         <p:nvSpPr>
@@ -3071,7 +2882,7 @@
           <a:bodyPr wrap="square" rtlCol="0" anchor="ctr"/>
           <a:lstStyle/>
           <a:p>
-            <a:pPr indent="0" marL="0">
+            <a:pPr marL="0" indent="0">
               <a:buNone/>
             </a:pPr>
             <a:r>
@@ -3085,9 +2896,6 @@
               </a:rPr>
               <a:t>Lucknow   </a:t>
             </a:r>
-            <a:pPr indent="0" marL="0">
-              <a:buNone/>
-            </a:pPr>
             <a:r>
               <a:rPr lang="en-US" sz="1350" dirty="0">
                 <a:solidFill>
@@ -3122,6 +2930,13 @@
           </a:solidFill>
           <a:ln/>
         </p:spPr>
+        <p:txBody>
+          <a:bodyPr/>
+          <a:lstStyle/>
+          <a:p>
+            <a:endParaRPr lang="en-US"/>
+          </a:p>
+        </p:txBody>
       </p:sp>
       <p:sp>
         <p:nvSpPr>
@@ -3144,7 +2959,7 @@
           <a:bodyPr wrap="square" rtlCol="0" anchor="ctr"/>
           <a:lstStyle/>
           <a:p>
-            <a:pPr indent="0" marL="0">
+            <a:pPr marL="0" indent="0">
               <a:buNone/>
             </a:pPr>
             <a:r>
@@ -3158,9 +2973,6 @@
               </a:rPr>
               <a:t>Mumbai · BKC   </a:t>
             </a:r>
-            <a:pPr indent="0" marL="0">
-              <a:buNone/>
-            </a:pPr>
             <a:r>
               <a:rPr lang="en-US" sz="1350" dirty="0">
                 <a:solidFill>
@@ -3195,6 +3007,13 @@
           </a:solidFill>
           <a:ln/>
         </p:spPr>
+        <p:txBody>
+          <a:bodyPr/>
+          <a:lstStyle/>
+          <a:p>
+            <a:endParaRPr lang="en-US"/>
+          </a:p>
+        </p:txBody>
       </p:sp>
       <p:sp>
         <p:nvSpPr>
@@ -3217,7 +3036,7 @@
           <a:bodyPr wrap="square" rtlCol="0" anchor="ctr"/>
           <a:lstStyle/>
           <a:p>
-            <a:pPr indent="0" marL="0">
+            <a:pPr marL="0" indent="0">
               <a:buNone/>
             </a:pPr>
             <a:r>
@@ -3231,9 +3050,6 @@
               </a:rPr>
               <a:t>Mumbai · Lower Parel   </a:t>
             </a:r>
-            <a:pPr indent="0" marL="0">
-              <a:buNone/>
-            </a:pPr>
             <a:r>
               <a:rPr lang="en-US" sz="1350" dirty="0">
                 <a:solidFill>
@@ -3268,6 +3084,13 @@
           </a:solidFill>
           <a:ln/>
         </p:spPr>
+        <p:txBody>
+          <a:bodyPr/>
+          <a:lstStyle/>
+          <a:p>
+            <a:endParaRPr lang="en-US"/>
+          </a:p>
+        </p:txBody>
       </p:sp>
       <p:sp>
         <p:nvSpPr>
@@ -3290,7 +3113,7 @@
           <a:bodyPr wrap="square" rtlCol="0" anchor="ctr"/>
           <a:lstStyle/>
           <a:p>
-            <a:pPr indent="0" marL="0">
+            <a:pPr marL="0" indent="0">
               <a:buNone/>
             </a:pPr>
             <a:r>
@@ -3304,9 +3127,6 @@
               </a:rPr>
               <a:t>Ahmedabad   </a:t>
             </a:r>
-            <a:pPr indent="0" marL="0">
-              <a:buNone/>
-            </a:pPr>
             <a:r>
               <a:rPr lang="en-US" sz="1350" dirty="0">
                 <a:solidFill>
@@ -3341,6 +3161,13 @@
           </a:solidFill>
           <a:ln/>
         </p:spPr>
+        <p:txBody>
+          <a:bodyPr/>
+          <a:lstStyle/>
+          <a:p>
+            <a:endParaRPr lang="en-US"/>
+          </a:p>
+        </p:txBody>
       </p:sp>
       <p:sp>
         <p:nvSpPr>
@@ -3363,7 +3190,7 @@
           <a:bodyPr wrap="square" rtlCol="0" anchor="ctr"/>
           <a:lstStyle/>
           <a:p>
-            <a:pPr indent="0" marL="0">
+            <a:pPr marL="0" indent="0">
               <a:buNone/>
             </a:pPr>
             <a:r>
@@ -3377,9 +3204,6 @@
               </a:rPr>
               <a:t>Nagpur   </a:t>
             </a:r>
-            <a:pPr indent="0" marL="0">
-              <a:buNone/>
-            </a:pPr>
             <a:r>
               <a:rPr lang="en-US" sz="1350" dirty="0">
                 <a:solidFill>
@@ -3414,6 +3238,13 @@
           </a:solidFill>
           <a:ln/>
         </p:spPr>
+        <p:txBody>
+          <a:bodyPr/>
+          <a:lstStyle/>
+          <a:p>
+            <a:endParaRPr lang="en-US"/>
+          </a:p>
+        </p:txBody>
       </p:sp>
       <p:sp>
         <p:nvSpPr>
@@ -3436,7 +3267,7 @@
           <a:bodyPr wrap="square" rtlCol="0" anchor="ctr"/>
           <a:lstStyle/>
           <a:p>
-            <a:pPr indent="0" marL="0">
+            <a:pPr marL="0" indent="0">
               <a:buNone/>
             </a:pPr>
             <a:r>
@@ -3450,9 +3281,6 @@
               </a:rPr>
               <a:t>Kolkata   </a:t>
             </a:r>
-            <a:pPr indent="0" marL="0">
-              <a:buNone/>
-            </a:pPr>
             <a:r>
               <a:rPr lang="en-US" sz="1350" dirty="0">
                 <a:solidFill>
@@ -3487,6 +3315,13 @@
           </a:solidFill>
           <a:ln/>
         </p:spPr>
+        <p:txBody>
+          <a:bodyPr/>
+          <a:lstStyle/>
+          <a:p>
+            <a:endParaRPr lang="en-US"/>
+          </a:p>
+        </p:txBody>
       </p:sp>
       <p:sp>
         <p:nvSpPr>
@@ -3509,7 +3344,7 @@
           <a:bodyPr wrap="square" rtlCol="0" anchor="ctr"/>
           <a:lstStyle/>
           <a:p>
-            <a:pPr indent="0" marL="0">
+            <a:pPr marL="0" indent="0">
               <a:buNone/>
             </a:pPr>
             <a:r>
@@ -3523,9 +3358,6 @@
               </a:rPr>
               <a:t>Chennai   </a:t>
             </a:r>
-            <a:pPr indent="0" marL="0">
-              <a:buNone/>
-            </a:pPr>
             <a:r>
               <a:rPr lang="en-US" sz="1350" dirty="0">
                 <a:solidFill>
@@ -3560,6 +3392,13 @@
           </a:solidFill>
           <a:ln/>
         </p:spPr>
+        <p:txBody>
+          <a:bodyPr/>
+          <a:lstStyle/>
+          <a:p>
+            <a:endParaRPr lang="en-US"/>
+          </a:p>
+        </p:txBody>
       </p:sp>
       <p:sp>
         <p:nvSpPr>
@@ -3582,7 +3421,7 @@
           <a:bodyPr wrap="square" rtlCol="0" anchor="ctr"/>
           <a:lstStyle/>
           <a:p>
-            <a:pPr indent="0" marL="0">
+            <a:pPr marL="0" indent="0">
               <a:buNone/>
             </a:pPr>
             <a:r>
@@ -3596,9 +3435,6 @@
               </a:rPr>
               <a:t>Bengaluru   </a:t>
             </a:r>
-            <a:pPr indent="0" marL="0">
-              <a:buNone/>
-            </a:pPr>
             <a:r>
               <a:rPr lang="en-US" sz="1350" dirty="0">
                 <a:solidFill>
@@ -3633,6 +3469,13 @@
           </a:solidFill>
           <a:ln/>
         </p:spPr>
+        <p:txBody>
+          <a:bodyPr/>
+          <a:lstStyle/>
+          <a:p>
+            <a:endParaRPr lang="en-US"/>
+          </a:p>
+        </p:txBody>
       </p:sp>
       <p:sp>
         <p:nvSpPr>
@@ -3655,7 +3498,7 @@
           <a:bodyPr wrap="square" rtlCol="0" anchor="ctr"/>
           <a:lstStyle/>
           <a:p>
-            <a:pPr indent="0" marL="0">
+            <a:pPr marL="0" indent="0">
               <a:buNone/>
             </a:pPr>
             <a:r>
@@ -3669,9 +3512,6 @@
               </a:rPr>
               <a:t>Hyderabad   </a:t>
             </a:r>
-            <a:pPr indent="0" marL="0">
-              <a:buNone/>
-            </a:pPr>
             <a:r>
               <a:rPr lang="en-US" sz="1350" dirty="0">
                 <a:solidFill>
@@ -3706,6 +3546,13 @@
           </a:solidFill>
           <a:ln/>
         </p:spPr>
+        <p:txBody>
+          <a:bodyPr/>
+          <a:lstStyle/>
+          <a:p>
+            <a:endParaRPr lang="en-US"/>
+          </a:p>
+        </p:txBody>
       </p:sp>
       <p:sp>
         <p:nvSpPr>
@@ -3728,7 +3575,7 @@
           <a:bodyPr wrap="square" rtlCol="0" anchor="ctr"/>
           <a:lstStyle/>
           <a:p>
-            <a:pPr indent="0" marL="0">
+            <a:pPr marL="0" indent="0">
               <a:buNone/>
             </a:pPr>
             <a:r>
@@ -3742,9 +3589,6 @@
               </a:rPr>
               <a:t>Kochi   </a:t>
             </a:r>
-            <a:pPr indent="0" marL="0">
-              <a:buNone/>
-            </a:pPr>
             <a:r>
               <a:rPr lang="en-US" sz="1350" dirty="0">
                 <a:solidFill>
@@ -3784,6 +3628,13 @@
             <a:prstDash val="solid"/>
           </a:ln>
         </p:spPr>
+        <p:txBody>
+          <a:bodyPr/>
+          <a:lstStyle/>
+          <a:p>
+            <a:endParaRPr lang="en-US"/>
+          </a:p>
+        </p:txBody>
       </p:sp>
       <p:sp>
         <p:nvSpPr>
@@ -3806,7 +3657,7 @@
           <a:bodyPr wrap="square" rtlCol="0" anchor="ctr"/>
           <a:lstStyle/>
           <a:p>
-            <a:pPr indent="0" marL="0">
+            <a:pPr marL="0" indent="0">
               <a:buNone/>
             </a:pPr>
             <a:r>
@@ -3820,9 +3671,6 @@
               </a:rPr>
               <a:t>Same festive window across all locations.  </a:t>
             </a:r>
-            <a:pPr indent="0" marL="0">
-              <a:buNone/>
-            </a:pPr>
             <a:r>
               <a:rPr lang="en-US" sz="1250" dirty="0">
                 <a:solidFill>
@@ -3859,11 +3707,11 @@
           <a:bodyPr wrap="square" rtlCol="0" anchor="ctr"/>
           <a:lstStyle/>
           <a:p>
-            <a:pPr algn="l" indent="0" marL="0">
+            <a:pPr marL="0" indent="0" algn="l">
               <a:buNone/>
             </a:pPr>
             <a:r>
-              <a:rPr lang="en-US" sz="950" b="1" spc="100" kern="0" dirty="0">
+              <a:rPr lang="en-US" sz="950" b="1" kern="0" spc="100" dirty="0">
                 <a:solidFill>
                   <a:srgbClr val="C6A24E"/>
                 </a:solidFill>
@@ -3873,11 +3721,8 @@
               </a:rPr>
               <a:t>DOFT</a:t>
             </a:r>
-            <a:pPr algn="l" indent="0" marL="0">
-              <a:buNone/>
-            </a:pPr>
-            <a:r>
-              <a:rPr lang="en-US" sz="950" spc="100" kern="0" dirty="0">
+            <a:r>
+              <a:rPr lang="en-US" sz="950" kern="0" spc="100" dirty="0">
                 <a:solidFill>
                   <a:srgbClr val="857B6C"/>
                 </a:solidFill>
@@ -3912,7 +3757,7 @@
           <a:bodyPr wrap="square" rtlCol="0" anchor="ctr"/>
           <a:lstStyle/>
           <a:p>
-            <a:pPr algn="r" indent="0" marL="0">
+            <a:pPr marL="0" indent="0" algn="r">
               <a:buNone/>
             </a:pPr>
             <a:r>
@@ -3954,6 +3799,13 @@
             <a:prstDash val="solid"/>
           </a:ln>
         </p:spPr>
+        <p:txBody>
+          <a:bodyPr/>
+          <a:lstStyle/>
+          <a:p>
+            <a:endParaRPr lang="en-US"/>
+          </a:p>
+        </p:txBody>
       </p:sp>
       <p:sp>
         <p:nvSpPr>
@@ -3976,7 +3828,7 @@
           <a:bodyPr wrap="square" rtlCol="0" anchor="ctr"/>
           <a:lstStyle/>
           <a:p>
-            <a:pPr algn="ctr" indent="0" marL="0">
+            <a:pPr marL="0" indent="0" algn="ctr">
               <a:buNone/>
             </a:pPr>
             <a:r>
@@ -4010,6 +3862,7 @@
         <a:solidFill>
           <a:srgbClr val="FFFFFF"/>
         </a:solidFill>
+        <a:effectLst/>
       </p:bgPr>
     </p:bg>
     <p:spTree>
@@ -4047,11 +3900,11 @@
           <a:bodyPr wrap="square" rtlCol="0" anchor="ctr"/>
           <a:lstStyle/>
           <a:p>
-            <a:pPr algn="l" indent="0" marL="0">
+            <a:pPr marL="0" indent="0" algn="l">
               <a:buNone/>
             </a:pPr>
             <a:r>
-              <a:rPr lang="en-US" sz="1250" b="1" spc="300" kern="0" dirty="0">
+              <a:rPr lang="en-US" sz="1250" b="1" kern="0" spc="300" dirty="0">
                 <a:solidFill>
                   <a:srgbClr val="A9813A"/>
                 </a:solidFill>
@@ -4086,7 +3939,7 @@
           <a:bodyPr wrap="square" rtlCol="0" anchor="ctr"/>
           <a:lstStyle/>
           <a:p>
-            <a:pPr indent="0" marL="0">
+            <a:pPr marL="0" indent="0">
               <a:buNone/>
             </a:pPr>
             <a:r>
@@ -4125,7 +3978,7 @@
           <a:bodyPr wrap="square" rtlCol="0" anchor="t"/>
           <a:lstStyle/>
           <a:p>
-            <a:pPr indent="0" marL="0">
+            <a:pPr marL="0" indent="0">
               <a:lnSpc>
                 <a:spcPct val="125000"/>
               </a:lnSpc>
@@ -4140,31 +3993,41 @@
                 <a:ea typeface="Calibri" pitchFamily="34" charset="-122"/>
                 <a:cs typeface="Calibri" pitchFamily="34" charset="-120"/>
               </a:rPr>
-              <a:t>Premium atrium space on a six-week rental is limited and highly contested. To secure reach across every target city we propose a parallel Doft activation inside the </a:t>
-            </a:r>
-            <a:pPr indent="0" marL="0">
-              <a:lnSpc>
-                <a:spcPct val="125000"/>
-              </a:lnSpc>
-              <a:buNone/>
-            </a:pPr>
-            <a:r>
-              <a:rPr lang="en-US" sz="1600" b="1" dirty="0">
-                <a:solidFill>
-                  <a:srgbClr val="A9813A"/>
+              <a:t>Premium atrium space on a six-week rental is limited and highly contested. To secure reach across every target city we propose </a:t>
+            </a:r>
+            <a:r>
+              <a:rPr lang="en-US" sz="1600" dirty="0" err="1">
+                <a:solidFill>
+                  <a:srgbClr val="2A2621"/>
                 </a:solidFill>
                 <a:latin typeface="Calibri" pitchFamily="34" charset="0"/>
                 <a:ea typeface="Calibri" pitchFamily="34" charset="-122"/>
                 <a:cs typeface="Calibri" pitchFamily="34" charset="-120"/>
               </a:rPr>
+              <a:t>Doft</a:t>
+            </a:r>
+            <a:r>
+              <a:rPr lang="en-US" sz="1600" dirty="0">
+                <a:solidFill>
+                  <a:srgbClr val="2A2621"/>
+                </a:solidFill>
+                <a:latin typeface="Calibri" pitchFamily="34" charset="0"/>
+                <a:ea typeface="Calibri" pitchFamily="34" charset="-122"/>
+                <a:cs typeface="Calibri" pitchFamily="34" charset="-120"/>
+              </a:rPr>
+              <a:t> activation inside the </a:t>
+            </a:r>
+            <a:r>
+              <a:rPr lang="en-US" sz="1600" b="1" dirty="0">
+                <a:solidFill>
+                  <a:srgbClr val="A9813A"/>
+                </a:solidFill>
+                <a:latin typeface="Calibri" pitchFamily="34" charset="0"/>
+                <a:ea typeface="Calibri" pitchFamily="34" charset="-122"/>
+                <a:cs typeface="Calibri" pitchFamily="34" charset="-120"/>
+              </a:rPr>
               <a:t>PVR / INOX multiplexes located in the same malls</a:t>
             </a:r>
-            <a:pPr indent="0" marL="0">
-              <a:lnSpc>
-                <a:spcPct val="125000"/>
-              </a:lnSpc>
-              <a:buNone/>
-            </a:pPr>
             <a:r>
               <a:rPr lang="en-US" sz="1600" dirty="0">
                 <a:solidFill>
@@ -4204,6 +4067,13 @@
             <a:prstDash val="solid"/>
           </a:ln>
         </p:spPr>
+        <p:txBody>
+          <a:bodyPr/>
+          <a:lstStyle/>
+          <a:p>
+            <a:endParaRPr lang="en-US"/>
+          </a:p>
+        </p:txBody>
       </p:sp>
       <p:sp>
         <p:nvSpPr>
@@ -4226,7 +4096,7 @@
           <a:bodyPr wrap="square" rtlCol="0" anchor="ctr"/>
           <a:lstStyle/>
           <a:p>
-            <a:pPr algn="ctr" indent="0" marL="0">
+            <a:pPr marL="0" indent="0" algn="ctr">
               <a:buNone/>
             </a:pPr>
             <a:r>
@@ -4265,7 +4135,7 @@
           <a:bodyPr wrap="square" rtlCol="0" anchor="ctr"/>
           <a:lstStyle/>
           <a:p>
-            <a:pPr algn="ctr" indent="0" marL="0">
+            <a:pPr marL="0" indent="0" algn="ctr">
               <a:buNone/>
             </a:pPr>
             <a:r>
@@ -4304,7 +4174,7 @@
           <a:bodyPr wrap="square" rtlCol="0" anchor="ctr"/>
           <a:lstStyle/>
           <a:p>
-            <a:pPr algn="ctr" indent="0" marL="0">
+            <a:pPr marL="0" indent="0" algn="ctr">
               <a:buNone/>
             </a:pPr>
             <a:r>
@@ -4346,6 +4216,13 @@
             <a:prstDash val="solid"/>
           </a:ln>
         </p:spPr>
+        <p:txBody>
+          <a:bodyPr/>
+          <a:lstStyle/>
+          <a:p>
+            <a:endParaRPr lang="en-US"/>
+          </a:p>
+        </p:txBody>
       </p:sp>
       <p:sp>
         <p:nvSpPr>
@@ -4368,7 +4245,7 @@
           <a:bodyPr wrap="square" rtlCol="0" anchor="ctr"/>
           <a:lstStyle/>
           <a:p>
-            <a:pPr algn="ctr" indent="0" marL="0">
+            <a:pPr marL="0" indent="0" algn="ctr">
               <a:buNone/>
             </a:pPr>
             <a:r>
@@ -4407,7 +4284,7 @@
           <a:bodyPr wrap="square" rtlCol="0" anchor="ctr"/>
           <a:lstStyle/>
           <a:p>
-            <a:pPr algn="ctr" indent="0" marL="0">
+            <a:pPr marL="0" indent="0" algn="ctr">
               <a:buNone/>
             </a:pPr>
             <a:r>
@@ -4446,7 +4323,7 @@
           <a:bodyPr wrap="square" rtlCol="0" anchor="ctr"/>
           <a:lstStyle/>
           <a:p>
-            <a:pPr algn="ctr" indent="0" marL="0">
+            <a:pPr marL="0" indent="0" algn="ctr">
               <a:buNone/>
             </a:pPr>
             <a:r>
@@ -4488,6 +4365,13 @@
             <a:prstDash val="solid"/>
           </a:ln>
         </p:spPr>
+        <p:txBody>
+          <a:bodyPr/>
+          <a:lstStyle/>
+          <a:p>
+            <a:endParaRPr lang="en-US"/>
+          </a:p>
+        </p:txBody>
       </p:sp>
       <p:sp>
         <p:nvSpPr>
@@ -4510,7 +4394,7 @@
           <a:bodyPr wrap="square" rtlCol="0" anchor="ctr"/>
           <a:lstStyle/>
           <a:p>
-            <a:pPr algn="ctr" indent="0" marL="0">
+            <a:pPr marL="0" indent="0" algn="ctr">
               <a:buNone/>
             </a:pPr>
             <a:r>
@@ -4549,7 +4433,7 @@
           <a:bodyPr wrap="square" rtlCol="0" anchor="ctr"/>
           <a:lstStyle/>
           <a:p>
-            <a:pPr algn="ctr" indent="0" marL="0">
+            <a:pPr marL="0" indent="0" algn="ctr">
               <a:buNone/>
             </a:pPr>
             <a:r>
@@ -4588,7 +4472,7 @@
           <a:bodyPr wrap="square" rtlCol="0" anchor="ctr"/>
           <a:lstStyle/>
           <a:p>
-            <a:pPr algn="ctr" indent="0" marL="0">
+            <a:pPr marL="0" indent="0" algn="ctr">
               <a:buNone/>
             </a:pPr>
             <a:r>
@@ -4630,6 +4514,13 @@
             <a:prstDash val="solid"/>
           </a:ln>
         </p:spPr>
+        <p:txBody>
+          <a:bodyPr/>
+          <a:lstStyle/>
+          <a:p>
+            <a:endParaRPr lang="en-US"/>
+          </a:p>
+        </p:txBody>
       </p:sp>
       <p:sp>
         <p:nvSpPr>
@@ -4652,7 +4543,7 @@
           <a:bodyPr wrap="square" rtlCol="0" anchor="ctr"/>
           <a:lstStyle/>
           <a:p>
-            <a:pPr algn="ctr" indent="0" marL="0">
+            <a:pPr marL="0" indent="0" algn="ctr">
               <a:buNone/>
             </a:pPr>
             <a:r>
@@ -4691,7 +4582,7 @@
           <a:bodyPr wrap="square" rtlCol="0" anchor="ctr"/>
           <a:lstStyle/>
           <a:p>
-            <a:pPr algn="ctr" indent="0" marL="0">
+            <a:pPr marL="0" indent="0" algn="ctr">
               <a:buNone/>
             </a:pPr>
             <a:r>
@@ -4730,7 +4621,7 @@
           <a:bodyPr wrap="square" rtlCol="0" anchor="ctr"/>
           <a:lstStyle/>
           <a:p>
-            <a:pPr algn="ctr" indent="0" marL="0">
+            <a:pPr marL="0" indent="0" algn="ctr">
               <a:buNone/>
             </a:pPr>
             <a:r>
@@ -4769,11 +4660,11 @@
           <a:bodyPr wrap="square" rtlCol="0" anchor="ctr"/>
           <a:lstStyle/>
           <a:p>
-            <a:pPr algn="l" indent="0" marL="0">
+            <a:pPr marL="0" indent="0" algn="l">
               <a:buNone/>
             </a:pPr>
             <a:r>
-              <a:rPr lang="en-US" sz="950" b="1" spc="100" kern="0" dirty="0">
+              <a:rPr lang="en-US" sz="950" b="1" kern="0" spc="100" dirty="0">
                 <a:solidFill>
                   <a:srgbClr val="C6A24E"/>
                 </a:solidFill>
@@ -4783,11 +4674,8 @@
               </a:rPr>
               <a:t>DOFT</a:t>
             </a:r>
-            <a:pPr algn="l" indent="0" marL="0">
-              <a:buNone/>
-            </a:pPr>
-            <a:r>
-              <a:rPr lang="en-US" sz="950" spc="100" kern="0" dirty="0">
+            <a:r>
+              <a:rPr lang="en-US" sz="950" kern="0" spc="100" dirty="0">
                 <a:solidFill>
                   <a:srgbClr val="857B6C"/>
                 </a:solidFill>
@@ -4822,7 +4710,7 @@
           <a:bodyPr wrap="square" rtlCol="0" anchor="ctr"/>
           <a:lstStyle/>
           <a:p>
-            <a:pPr algn="r" indent="0" marL="0">
+            <a:pPr marL="0" indent="0" algn="r">
               <a:buNone/>
             </a:pPr>
             <a:r>
@@ -4864,6 +4752,13 @@
             <a:prstDash val="solid"/>
           </a:ln>
         </p:spPr>
+        <p:txBody>
+          <a:bodyPr/>
+          <a:lstStyle/>
+          <a:p>
+            <a:endParaRPr lang="en-US"/>
+          </a:p>
+        </p:txBody>
       </p:sp>
       <p:sp>
         <p:nvSpPr>
@@ -4886,7 +4781,7 @@
           <a:bodyPr wrap="square" rtlCol="0" anchor="ctr"/>
           <a:lstStyle/>
           <a:p>
-            <a:pPr algn="ctr" indent="0" marL="0">
+            <a:pPr marL="0" indent="0" algn="ctr">
               <a:buNone/>
             </a:pPr>
             <a:r>
@@ -4920,6 +4815,7 @@
         <a:solidFill>
           <a:srgbClr val="FFFFFF"/>
         </a:solidFill>
+        <a:effectLst/>
       </p:bgPr>
     </p:bg>
     <p:spTree>
@@ -4957,11 +4853,11 @@
           <a:bodyPr wrap="square" rtlCol="0" anchor="ctr"/>
           <a:lstStyle/>
           <a:p>
-            <a:pPr algn="l" indent="0" marL="0">
+            <a:pPr marL="0" indent="0" algn="l">
               <a:buNone/>
             </a:pPr>
             <a:r>
-              <a:rPr lang="en-US" sz="1250" b="1" spc="300" kern="0" dirty="0">
+              <a:rPr lang="en-US" sz="1250" b="1" kern="0" spc="300" dirty="0">
                 <a:solidFill>
                   <a:srgbClr val="A9813A"/>
                 </a:solidFill>
@@ -4996,7 +4892,7 @@
           <a:bodyPr wrap="square" rtlCol="0" anchor="ctr"/>
           <a:lstStyle/>
           <a:p>
-            <a:pPr indent="0" marL="0">
+            <a:pPr marL="0" indent="0">
               <a:buNone/>
             </a:pPr>
             <a:r>
@@ -5035,7 +4931,7 @@
           <a:bodyPr wrap="square" rtlCol="0" anchor="ctr"/>
           <a:lstStyle/>
           <a:p>
-            <a:pPr indent="0" marL="0">
+            <a:pPr marL="0" indent="0">
               <a:lnSpc>
                 <a:spcPct val="110000"/>
               </a:lnSpc>
@@ -5080,18 +4976,25 @@
             <a:prstDash val="solid"/>
           </a:ln>
         </p:spPr>
+        <p:txBody>
+          <a:bodyPr/>
+          <a:lstStyle/>
+          <a:p>
+            <a:endParaRPr lang="en-US"/>
+          </a:p>
+        </p:txBody>
       </p:sp>
       <p:pic>
         <p:nvPicPr>
-          <p:cNvPr id="6" name="Image 0" descr="ref_imgs/cinema_s6.jpg">    </p:cNvPr>
+          <p:cNvPr id="6" name="Image 0" descr="ref_imgs/cinema_s6.jpg"/>
           <p:cNvPicPr>
             <a:picLocks noChangeAspect="1"/>
           </p:cNvPicPr>
           <p:nvPr/>
         </p:nvPicPr>
         <p:blipFill>
-          <a:blip r:embed="rId1"/>
-          <a:srcRect l="0" r="0" t="0" b="0"/>
+          <a:blip r:embed="rId3"/>
+          <a:srcRect/>
           <a:stretch/>
         </p:blipFill>
         <p:spPr>
@@ -5128,18 +5031,25 @@
             <a:prstDash val="solid"/>
           </a:ln>
         </p:spPr>
+        <p:txBody>
+          <a:bodyPr/>
+          <a:lstStyle/>
+          <a:p>
+            <a:endParaRPr lang="en-US"/>
+          </a:p>
+        </p:txBody>
       </p:sp>
       <p:pic>
         <p:nvPicPr>
-          <p:cNvPr id="8" name="Image 1" descr="ref_imgs/cinema_s2.jpg">    </p:cNvPr>
+          <p:cNvPr id="8" name="Image 1" descr="ref_imgs/cinema_s2.jpg"/>
           <p:cNvPicPr>
             <a:picLocks noChangeAspect="1"/>
           </p:cNvPicPr>
           <p:nvPr/>
         </p:nvPicPr>
         <p:blipFill>
-          <a:blip r:embed="rId2"/>
-          <a:srcRect l="0" r="0" t="0" b="0"/>
+          <a:blip r:embed="rId4"/>
+          <a:srcRect/>
           <a:stretch/>
         </p:blipFill>
         <p:spPr>
@@ -5176,18 +5086,25 @@
             <a:prstDash val="solid"/>
           </a:ln>
         </p:spPr>
+        <p:txBody>
+          <a:bodyPr/>
+          <a:lstStyle/>
+          <a:p>
+            <a:endParaRPr lang="en-US"/>
+          </a:p>
+        </p:txBody>
       </p:sp>
       <p:pic>
         <p:nvPicPr>
-          <p:cNvPr id="10" name="Image 2" descr="ref_imgs/cinema_s4.jpg">    </p:cNvPr>
+          <p:cNvPr id="10" name="Image 2" descr="ref_imgs/cinema_s4.jpg"/>
           <p:cNvPicPr>
             <a:picLocks noChangeAspect="1"/>
           </p:cNvPicPr>
           <p:nvPr/>
         </p:nvPicPr>
         <p:blipFill>
-          <a:blip r:embed="rId3"/>
-          <a:srcRect l="0" r="0" t="0" b="0"/>
+          <a:blip r:embed="rId5"/>
+          <a:srcRect/>
           <a:stretch/>
         </p:blipFill>
         <p:spPr>
@@ -5221,7 +5138,7 @@
           <a:bodyPr wrap="square" rtlCol="0" anchor="ctr"/>
           <a:lstStyle/>
           <a:p>
-            <a:pPr indent="0" marL="0">
+            <a:pPr marL="0" indent="0">
               <a:buNone/>
             </a:pPr>
             <a:r>
@@ -5260,11 +5177,11 @@
           <a:bodyPr wrap="square" rtlCol="0" anchor="ctr"/>
           <a:lstStyle/>
           <a:p>
-            <a:pPr algn="l" indent="0" marL="0">
+            <a:pPr marL="0" indent="0" algn="l">
               <a:buNone/>
             </a:pPr>
             <a:r>
-              <a:rPr lang="en-US" sz="950" b="1" spc="100" kern="0" dirty="0">
+              <a:rPr lang="en-US" sz="950" b="1" kern="0" spc="100" dirty="0">
                 <a:solidFill>
                   <a:srgbClr val="C6A24E"/>
                 </a:solidFill>
@@ -5274,11 +5191,8 @@
               </a:rPr>
               <a:t>DOFT</a:t>
             </a:r>
-            <a:pPr algn="l" indent="0" marL="0">
-              <a:buNone/>
-            </a:pPr>
-            <a:r>
-              <a:rPr lang="en-US" sz="950" spc="100" kern="0" dirty="0">
+            <a:r>
+              <a:rPr lang="en-US" sz="950" kern="0" spc="100" dirty="0">
                 <a:solidFill>
                   <a:srgbClr val="857B6C"/>
                 </a:solidFill>
@@ -5313,7 +5227,7 @@
           <a:bodyPr wrap="square" rtlCol="0" anchor="ctr"/>
           <a:lstStyle/>
           <a:p>
-            <a:pPr algn="r" indent="0" marL="0">
+            <a:pPr marL="0" indent="0" algn="r">
               <a:buNone/>
             </a:pPr>
             <a:r>
@@ -5355,6 +5269,13 @@
             <a:prstDash val="solid"/>
           </a:ln>
         </p:spPr>
+        <p:txBody>
+          <a:bodyPr/>
+          <a:lstStyle/>
+          <a:p>
+            <a:endParaRPr lang="en-US"/>
+          </a:p>
+        </p:txBody>
       </p:sp>
       <p:sp>
         <p:nvSpPr>
@@ -5377,7 +5298,7 @@
           <a:bodyPr wrap="square" rtlCol="0" anchor="ctr"/>
           <a:lstStyle/>
           <a:p>
-            <a:pPr algn="ctr" indent="0" marL="0">
+            <a:pPr marL="0" indent="0" algn="ctr">
               <a:buNone/>
             </a:pPr>
             <a:r>
@@ -5411,6 +5332,7 @@
         <a:solidFill>
           <a:srgbClr val="FFFFFF"/>
         </a:solidFill>
+        <a:effectLst/>
       </p:bgPr>
     </p:bg>
     <p:spTree>
@@ -5448,11 +5370,11 @@
           <a:bodyPr wrap="square" rtlCol="0" anchor="ctr"/>
           <a:lstStyle/>
           <a:p>
-            <a:pPr algn="l" indent="0" marL="0">
+            <a:pPr marL="0" indent="0" algn="l">
               <a:buNone/>
             </a:pPr>
             <a:r>
-              <a:rPr lang="en-US" sz="1250" b="1" spc="300" kern="0" dirty="0">
+              <a:rPr lang="en-US" sz="1250" b="1" kern="0" spc="300" dirty="0">
                 <a:solidFill>
                   <a:srgbClr val="A9813A"/>
                 </a:solidFill>
@@ -5487,7 +5409,7 @@
           <a:bodyPr wrap="square" rtlCol="0" anchor="ctr"/>
           <a:lstStyle/>
           <a:p>
-            <a:pPr indent="0" marL="0">
+            <a:pPr marL="0" indent="0">
               <a:buNone/>
             </a:pPr>
             <a:r>
@@ -5521,18 +5443,48 @@
         </p:nvGraphicFramePr>
         <p:xfrm>
           <a:off x="502920" y="1417320"/>
-          <a:ext cx="11155680" cy="914400"/>
+          <a:ext cx="11155680" cy="4663440"/>
         </p:xfrm>
         <a:graphic>
           <a:graphicData uri="http://schemas.openxmlformats.org/drawingml/2006/table">
             <a:tbl>
               <a:tblPr/>
               <a:tblGrid>
-                <a:gridCol w="2743200"/>
-                <a:gridCol w="3566160"/>
-                <a:gridCol w="1554480"/>
-                <a:gridCol w="1737360"/>
-                <a:gridCol w="1554480"/>
+                <a:gridCol w="2743200">
+                  <a:extLst>
+                    <a:ext uri="{9D8B030D-6E8A-4147-A177-3AD203B41FA5}">
+                      <a16:colId xmlns:a16="http://schemas.microsoft.com/office/drawing/2014/main" val="20000"/>
+                    </a:ext>
+                  </a:extLst>
+                </a:gridCol>
+                <a:gridCol w="3566160">
+                  <a:extLst>
+                    <a:ext uri="{9D8B030D-6E8A-4147-A177-3AD203B41FA5}">
+                      <a16:colId xmlns:a16="http://schemas.microsoft.com/office/drawing/2014/main" val="20001"/>
+                    </a:ext>
+                  </a:extLst>
+                </a:gridCol>
+                <a:gridCol w="1554480">
+                  <a:extLst>
+                    <a:ext uri="{9D8B030D-6E8A-4147-A177-3AD203B41FA5}">
+                      <a16:colId xmlns:a16="http://schemas.microsoft.com/office/drawing/2014/main" val="20002"/>
+                    </a:ext>
+                  </a:extLst>
+                </a:gridCol>
+                <a:gridCol w="1737360">
+                  <a:extLst>
+                    <a:ext uri="{9D8B030D-6E8A-4147-A177-3AD203B41FA5}">
+                      <a16:colId xmlns:a16="http://schemas.microsoft.com/office/drawing/2014/main" val="20003"/>
+                    </a:ext>
+                  </a:extLst>
+                </a:gridCol>
+                <a:gridCol w="1554480">
+                  <a:extLst>
+                    <a:ext uri="{9D8B030D-6E8A-4147-A177-3AD203B41FA5}">
+                      <a16:colId xmlns:a16="http://schemas.microsoft.com/office/drawing/2014/main" val="20004"/>
+                    </a:ext>
+                  </a:extLst>
+                </a:gridCol>
               </a:tblGrid>
               <a:tr h="310896">
                 <a:tc>
@@ -5540,7 +5492,7 @@
                     <a:bodyPr/>
                     <a:lstStyle/>
                     <a:p>
-                      <a:pPr algn="l" indent="0" marL="0">
+                      <a:pPr marL="0" indent="0" algn="l">
                         <a:buNone/>
                       </a:pPr>
                       <a:r>
@@ -5561,7 +5513,7 @@
                       </a:endParaRPr>
                     </a:p>
                   </a:txBody>
-                  <a:tcPr marL="91440" marR="91440" marT="45720" marB="45720" anchor="ctr">
+                  <a:tcPr anchor="ctr">
                     <a:lnL w="6350" cap="flat" cmpd="sng" algn="ctr">
                       <a:solidFill>
                         <a:srgbClr val="E6DECB"/>
@@ -5608,7 +5560,7 @@
                     <a:bodyPr/>
                     <a:lstStyle/>
                     <a:p>
-                      <a:pPr algn="l" indent="0" marL="0">
+                      <a:pPr marL="0" indent="0" algn="l">
                         <a:buNone/>
                       </a:pPr>
                       <a:r>
@@ -5629,7 +5581,7 @@
                       </a:endParaRPr>
                     </a:p>
                   </a:txBody>
-                  <a:tcPr marL="91440" marR="91440" marT="45720" marB="45720" anchor="ctr">
+                  <a:tcPr anchor="ctr">
                     <a:lnL w="6350" cap="flat" cmpd="sng" algn="ctr">
                       <a:solidFill>
                         <a:srgbClr val="E6DECB"/>
@@ -5676,7 +5628,7 @@
                     <a:bodyPr/>
                     <a:lstStyle/>
                     <a:p>
-                      <a:pPr algn="l" indent="0" marL="0">
+                      <a:pPr marL="0" indent="0" algn="l">
                         <a:buNone/>
                       </a:pPr>
                       <a:r>
@@ -5697,7 +5649,7 @@
                       </a:endParaRPr>
                     </a:p>
                   </a:txBody>
-                  <a:tcPr marL="91440" marR="91440" marT="45720" marB="45720" anchor="ctr">
+                  <a:tcPr anchor="ctr">
                     <a:lnL w="6350" cap="flat" cmpd="sng" algn="ctr">
                       <a:solidFill>
                         <a:srgbClr val="E6DECB"/>
@@ -5744,7 +5696,7 @@
                     <a:bodyPr/>
                     <a:lstStyle/>
                     <a:p>
-                      <a:pPr algn="l" indent="0" marL="0">
+                      <a:pPr marL="0" indent="0" algn="l">
                         <a:buNone/>
                       </a:pPr>
                       <a:r>
@@ -5765,7 +5717,7 @@
                       </a:endParaRPr>
                     </a:p>
                   </a:txBody>
-                  <a:tcPr marL="91440" marR="91440" marT="45720" marB="45720" anchor="ctr">
+                  <a:tcPr anchor="ctr">
                     <a:lnL w="6350" cap="flat" cmpd="sng" algn="ctr">
                       <a:solidFill>
                         <a:srgbClr val="E6DECB"/>
@@ -5812,7 +5764,7 @@
                     <a:bodyPr/>
                     <a:lstStyle/>
                     <a:p>
-                      <a:pPr algn="l" indent="0" marL="0">
+                      <a:pPr marL="0" indent="0" algn="l">
                         <a:buNone/>
                       </a:pPr>
                       <a:r>
@@ -5833,7 +5785,7 @@
                       </a:endParaRPr>
                     </a:p>
                   </a:txBody>
-                  <a:tcPr marL="91440" marR="91440" marT="45720" marB="45720" anchor="ctr">
+                  <a:tcPr anchor="ctr">
                     <a:lnL w="6350" cap="flat" cmpd="sng" algn="ctr">
                       <a:solidFill>
                         <a:srgbClr val="E6DECB"/>
@@ -5875,6 +5827,11 @@
                     </a:solidFill>
                   </a:tcPr>
                 </a:tc>
+                <a:extLst>
+                  <a:ext uri="{0D108BD9-81ED-4DB2-BD59-A6C34878D82A}">
+                    <a16:rowId xmlns:a16="http://schemas.microsoft.com/office/drawing/2014/main" val="10000"/>
+                  </a:ext>
+                </a:extLst>
               </a:tr>
               <a:tr h="310896">
                 <a:tc>
@@ -5882,7 +5839,7 @@
                     <a:bodyPr/>
                     <a:lstStyle/>
                     <a:p>
-                      <a:pPr algn="l" indent="0" marL="0">
+                      <a:pPr marL="0" indent="0" algn="l">
                         <a:buNone/>
                       </a:pPr>
                       <a:r>
@@ -5903,7 +5860,7 @@
                       </a:endParaRPr>
                     </a:p>
                   </a:txBody>
-                  <a:tcPr marL="91440" marR="91440" marT="45720" marB="45720" anchor="ctr">
+                  <a:tcPr anchor="ctr">
                     <a:lnL w="6350" cap="flat" cmpd="sng" algn="ctr">
                       <a:solidFill>
                         <a:srgbClr val="E6DECB"/>
@@ -5950,7 +5907,7 @@
                     <a:bodyPr/>
                     <a:lstStyle/>
                     <a:p>
-                      <a:pPr algn="l" indent="0" marL="0">
+                      <a:pPr marL="0" indent="0" algn="l">
                         <a:buNone/>
                       </a:pPr>
                       <a:r>
@@ -5971,7 +5928,7 @@
                       </a:endParaRPr>
                     </a:p>
                   </a:txBody>
-                  <a:tcPr marL="91440" marR="91440" marT="45720" marB="45720" anchor="ctr">
+                  <a:tcPr anchor="ctr">
                     <a:lnL w="6350" cap="flat" cmpd="sng" algn="ctr">
                       <a:solidFill>
                         <a:srgbClr val="E6DECB"/>
@@ -6018,7 +5975,7 @@
                     <a:bodyPr/>
                     <a:lstStyle/>
                     <a:p>
-                      <a:pPr algn="ctr" indent="0" marL="0">
+                      <a:pPr marL="0" indent="0" algn="ctr">
                         <a:buNone/>
                       </a:pPr>
                       <a:r>
@@ -6039,7 +5996,7 @@
                       </a:endParaRPr>
                     </a:p>
                   </a:txBody>
-                  <a:tcPr marL="91440" marR="91440" marT="45720" marB="45720" anchor="ctr">
+                  <a:tcPr anchor="ctr">
                     <a:lnL w="6350" cap="flat" cmpd="sng" algn="ctr">
                       <a:solidFill>
                         <a:srgbClr val="E6DECB"/>
@@ -6086,7 +6043,7 @@
                     <a:bodyPr/>
                     <a:lstStyle/>
                     <a:p>
-                      <a:pPr algn="ctr" indent="0" marL="0">
+                      <a:pPr marL="0" indent="0" algn="ctr">
                         <a:buNone/>
                       </a:pPr>
                       <a:r>
@@ -6107,7 +6064,7 @@
                       </a:endParaRPr>
                     </a:p>
                   </a:txBody>
-                  <a:tcPr marL="91440" marR="91440" marT="45720" marB="45720" anchor="ctr">
+                  <a:tcPr anchor="ctr">
                     <a:lnL w="6350" cap="flat" cmpd="sng" algn="ctr">
                       <a:solidFill>
                         <a:srgbClr val="E6DECB"/>
@@ -6154,7 +6111,7 @@
                     <a:bodyPr/>
                     <a:lstStyle/>
                     <a:p>
-                      <a:pPr algn="ctr" indent="0" marL="0">
+                      <a:pPr marL="0" indent="0" algn="ctr">
                         <a:buNone/>
                       </a:pPr>
                       <a:r>
@@ -6175,7 +6132,7 @@
                       </a:endParaRPr>
                     </a:p>
                   </a:txBody>
-                  <a:tcPr marL="91440" marR="91440" marT="45720" marB="45720" anchor="ctr">
+                  <a:tcPr anchor="ctr">
                     <a:lnL w="6350" cap="flat" cmpd="sng" algn="ctr">
                       <a:solidFill>
                         <a:srgbClr val="E6DECB"/>
@@ -6217,6 +6174,11 @@
                     </a:solidFill>
                   </a:tcPr>
                 </a:tc>
+                <a:extLst>
+                  <a:ext uri="{0D108BD9-81ED-4DB2-BD59-A6C34878D82A}">
+                    <a16:rowId xmlns:a16="http://schemas.microsoft.com/office/drawing/2014/main" val="10001"/>
+                  </a:ext>
+                </a:extLst>
               </a:tr>
               <a:tr h="310896">
                 <a:tc>
@@ -6224,7 +6186,7 @@
                     <a:bodyPr/>
                     <a:lstStyle/>
                     <a:p>
-                      <a:pPr algn="l" indent="0" marL="0">
+                      <a:pPr marL="0" indent="0" algn="l">
                         <a:buNone/>
                       </a:pPr>
                       <a:r>
@@ -6245,7 +6207,7 @@
                       </a:endParaRPr>
                     </a:p>
                   </a:txBody>
-                  <a:tcPr marL="91440" marR="91440" marT="45720" marB="45720" anchor="ctr">
+                  <a:tcPr anchor="ctr">
                     <a:lnL w="6350" cap="flat" cmpd="sng" algn="ctr">
                       <a:solidFill>
                         <a:srgbClr val="E6DECB"/>
@@ -6292,7 +6254,7 @@
                     <a:bodyPr/>
                     <a:lstStyle/>
                     <a:p>
-                      <a:pPr algn="l" indent="0" marL="0">
+                      <a:pPr marL="0" indent="0" algn="l">
                         <a:buNone/>
                       </a:pPr>
                       <a:r>
@@ -6313,7 +6275,7 @@
                       </a:endParaRPr>
                     </a:p>
                   </a:txBody>
-                  <a:tcPr marL="91440" marR="91440" marT="45720" marB="45720" anchor="ctr">
+                  <a:tcPr anchor="ctr">
                     <a:lnL w="6350" cap="flat" cmpd="sng" algn="ctr">
                       <a:solidFill>
                         <a:srgbClr val="E6DECB"/>
@@ -6360,7 +6322,7 @@
                     <a:bodyPr/>
                     <a:lstStyle/>
                     <a:p>
-                      <a:pPr algn="ctr" indent="0" marL="0">
+                      <a:pPr marL="0" indent="0" algn="ctr">
                         <a:buNone/>
                       </a:pPr>
                       <a:r>
@@ -6381,7 +6343,7 @@
                       </a:endParaRPr>
                     </a:p>
                   </a:txBody>
-                  <a:tcPr marL="91440" marR="91440" marT="45720" marB="45720" anchor="ctr">
+                  <a:tcPr anchor="ctr">
                     <a:lnL w="6350" cap="flat" cmpd="sng" algn="ctr">
                       <a:solidFill>
                         <a:srgbClr val="E6DECB"/>
@@ -6428,7 +6390,7 @@
                     <a:bodyPr/>
                     <a:lstStyle/>
                     <a:p>
-                      <a:pPr algn="ctr" indent="0" marL="0">
+                      <a:pPr marL="0" indent="0" algn="ctr">
                         <a:buNone/>
                       </a:pPr>
                       <a:r>
@@ -6449,7 +6411,7 @@
                       </a:endParaRPr>
                     </a:p>
                   </a:txBody>
-                  <a:tcPr marL="91440" marR="91440" marT="45720" marB="45720" anchor="ctr">
+                  <a:tcPr anchor="ctr">
                     <a:lnL w="6350" cap="flat" cmpd="sng" algn="ctr">
                       <a:solidFill>
                         <a:srgbClr val="E6DECB"/>
@@ -6496,7 +6458,7 @@
                     <a:bodyPr/>
                     <a:lstStyle/>
                     <a:p>
-                      <a:pPr algn="ctr" indent="0" marL="0">
+                      <a:pPr marL="0" indent="0" algn="ctr">
                         <a:buNone/>
                       </a:pPr>
                       <a:r>
@@ -6517,7 +6479,7 @@
                       </a:endParaRPr>
                     </a:p>
                   </a:txBody>
-                  <a:tcPr marL="91440" marR="91440" marT="45720" marB="45720" anchor="ctr">
+                  <a:tcPr anchor="ctr">
                     <a:lnL w="6350" cap="flat" cmpd="sng" algn="ctr">
                       <a:solidFill>
                         <a:srgbClr val="E6DECB"/>
@@ -6559,6 +6521,11 @@
                     </a:solidFill>
                   </a:tcPr>
                 </a:tc>
+                <a:extLst>
+                  <a:ext uri="{0D108BD9-81ED-4DB2-BD59-A6C34878D82A}">
+                    <a16:rowId xmlns:a16="http://schemas.microsoft.com/office/drawing/2014/main" val="10002"/>
+                  </a:ext>
+                </a:extLst>
               </a:tr>
               <a:tr h="310896">
                 <a:tc>
@@ -6566,7 +6533,7 @@
                     <a:bodyPr/>
                     <a:lstStyle/>
                     <a:p>
-                      <a:pPr algn="l" indent="0" marL="0">
+                      <a:pPr marL="0" indent="0" algn="l">
                         <a:buNone/>
                       </a:pPr>
                       <a:r>
@@ -6587,7 +6554,7 @@
                       </a:endParaRPr>
                     </a:p>
                   </a:txBody>
-                  <a:tcPr marL="91440" marR="91440" marT="45720" marB="45720" anchor="ctr">
+                  <a:tcPr anchor="ctr">
                     <a:lnL w="6350" cap="flat" cmpd="sng" algn="ctr">
                       <a:solidFill>
                         <a:srgbClr val="E6DECB"/>
@@ -6634,7 +6601,7 @@
                     <a:bodyPr/>
                     <a:lstStyle/>
                     <a:p>
-                      <a:pPr algn="l" indent="0" marL="0">
+                      <a:pPr marL="0" indent="0" algn="l">
                         <a:buNone/>
                       </a:pPr>
                       <a:r>
@@ -6655,7 +6622,7 @@
                       </a:endParaRPr>
                     </a:p>
                   </a:txBody>
-                  <a:tcPr marL="91440" marR="91440" marT="45720" marB="45720" anchor="ctr">
+                  <a:tcPr anchor="ctr">
                     <a:lnL w="6350" cap="flat" cmpd="sng" algn="ctr">
                       <a:solidFill>
                         <a:srgbClr val="E6DECB"/>
@@ -6702,7 +6669,7 @@
                     <a:bodyPr/>
                     <a:lstStyle/>
                     <a:p>
-                      <a:pPr algn="ctr" indent="0" marL="0">
+                      <a:pPr marL="0" indent="0" algn="ctr">
                         <a:buNone/>
                       </a:pPr>
                       <a:r>
@@ -6723,7 +6690,7 @@
                       </a:endParaRPr>
                     </a:p>
                   </a:txBody>
-                  <a:tcPr marL="91440" marR="91440" marT="45720" marB="45720" anchor="ctr">
+                  <a:tcPr anchor="ctr">
                     <a:lnL w="6350" cap="flat" cmpd="sng" algn="ctr">
                       <a:solidFill>
                         <a:srgbClr val="E6DECB"/>
@@ -6770,7 +6737,7 @@
                     <a:bodyPr/>
                     <a:lstStyle/>
                     <a:p>
-                      <a:pPr algn="ctr" indent="0" marL="0">
+                      <a:pPr marL="0" indent="0" algn="ctr">
                         <a:buNone/>
                       </a:pPr>
                       <a:r>
@@ -6791,7 +6758,7 @@
                       </a:endParaRPr>
                     </a:p>
                   </a:txBody>
-                  <a:tcPr marL="91440" marR="91440" marT="45720" marB="45720" anchor="ctr">
+                  <a:tcPr anchor="ctr">
                     <a:lnL w="6350" cap="flat" cmpd="sng" algn="ctr">
                       <a:solidFill>
                         <a:srgbClr val="E6DECB"/>
@@ -6838,7 +6805,7 @@
                     <a:bodyPr/>
                     <a:lstStyle/>
                     <a:p>
-                      <a:pPr algn="ctr" indent="0" marL="0">
+                      <a:pPr marL="0" indent="0" algn="ctr">
                         <a:buNone/>
                       </a:pPr>
                       <a:r>
@@ -6859,7 +6826,7 @@
                       </a:endParaRPr>
                     </a:p>
                   </a:txBody>
-                  <a:tcPr marL="91440" marR="91440" marT="45720" marB="45720" anchor="ctr">
+                  <a:tcPr anchor="ctr">
                     <a:lnL w="6350" cap="flat" cmpd="sng" algn="ctr">
                       <a:solidFill>
                         <a:srgbClr val="E6DECB"/>
@@ -6901,6 +6868,11 @@
                     </a:solidFill>
                   </a:tcPr>
                 </a:tc>
+                <a:extLst>
+                  <a:ext uri="{0D108BD9-81ED-4DB2-BD59-A6C34878D82A}">
+                    <a16:rowId xmlns:a16="http://schemas.microsoft.com/office/drawing/2014/main" val="10003"/>
+                  </a:ext>
+                </a:extLst>
               </a:tr>
               <a:tr h="310896">
                 <a:tc>
@@ -6908,7 +6880,7 @@
                     <a:bodyPr/>
                     <a:lstStyle/>
                     <a:p>
-                      <a:pPr algn="l" indent="0" marL="0">
+                      <a:pPr marL="0" indent="0" algn="l">
                         <a:buNone/>
                       </a:pPr>
                       <a:r>
@@ -6929,7 +6901,7 @@
                       </a:endParaRPr>
                     </a:p>
                   </a:txBody>
-                  <a:tcPr marL="91440" marR="91440" marT="45720" marB="45720" anchor="ctr">
+                  <a:tcPr anchor="ctr">
                     <a:lnL w="6350" cap="flat" cmpd="sng" algn="ctr">
                       <a:solidFill>
                         <a:srgbClr val="E6DECB"/>
@@ -6976,7 +6948,7 @@
                     <a:bodyPr/>
                     <a:lstStyle/>
                     <a:p>
-                      <a:pPr algn="l" indent="0" marL="0">
+                      <a:pPr marL="0" indent="0" algn="l">
                         <a:buNone/>
                       </a:pPr>
                       <a:r>
@@ -6997,7 +6969,7 @@
                       </a:endParaRPr>
                     </a:p>
                   </a:txBody>
-                  <a:tcPr marL="91440" marR="91440" marT="45720" marB="45720" anchor="ctr">
+                  <a:tcPr anchor="ctr">
                     <a:lnL w="6350" cap="flat" cmpd="sng" algn="ctr">
                       <a:solidFill>
                         <a:srgbClr val="E6DECB"/>
@@ -7044,7 +7016,7 @@
                     <a:bodyPr/>
                     <a:lstStyle/>
                     <a:p>
-                      <a:pPr algn="ctr" indent="0" marL="0">
+                      <a:pPr marL="0" indent="0" algn="ctr">
                         <a:buNone/>
                       </a:pPr>
                       <a:r>
@@ -7065,7 +7037,7 @@
                       </a:endParaRPr>
                     </a:p>
                   </a:txBody>
-                  <a:tcPr marL="91440" marR="91440" marT="45720" marB="45720" anchor="ctr">
+                  <a:tcPr anchor="ctr">
                     <a:lnL w="6350" cap="flat" cmpd="sng" algn="ctr">
                       <a:solidFill>
                         <a:srgbClr val="E6DECB"/>
@@ -7112,7 +7084,7 @@
                     <a:bodyPr/>
                     <a:lstStyle/>
                     <a:p>
-                      <a:pPr algn="ctr" indent="0" marL="0">
+                      <a:pPr marL="0" indent="0" algn="ctr">
                         <a:buNone/>
                       </a:pPr>
                       <a:r>
@@ -7133,7 +7105,7 @@
                       </a:endParaRPr>
                     </a:p>
                   </a:txBody>
-                  <a:tcPr marL="91440" marR="91440" marT="45720" marB="45720" anchor="ctr">
+                  <a:tcPr anchor="ctr">
                     <a:lnL w="6350" cap="flat" cmpd="sng" algn="ctr">
                       <a:solidFill>
                         <a:srgbClr val="E6DECB"/>
@@ -7180,7 +7152,7 @@
                     <a:bodyPr/>
                     <a:lstStyle/>
                     <a:p>
-                      <a:pPr algn="ctr" indent="0" marL="0">
+                      <a:pPr marL="0" indent="0" algn="ctr">
                         <a:buNone/>
                       </a:pPr>
                       <a:r>
@@ -7201,7 +7173,7 @@
                       </a:endParaRPr>
                     </a:p>
                   </a:txBody>
-                  <a:tcPr marL="91440" marR="91440" marT="45720" marB="45720" anchor="ctr">
+                  <a:tcPr anchor="ctr">
                     <a:lnL w="6350" cap="flat" cmpd="sng" algn="ctr">
                       <a:solidFill>
                         <a:srgbClr val="E6DECB"/>
@@ -7243,6 +7215,11 @@
                     </a:solidFill>
                   </a:tcPr>
                 </a:tc>
+                <a:extLst>
+                  <a:ext uri="{0D108BD9-81ED-4DB2-BD59-A6C34878D82A}">
+                    <a16:rowId xmlns:a16="http://schemas.microsoft.com/office/drawing/2014/main" val="10004"/>
+                  </a:ext>
+                </a:extLst>
               </a:tr>
               <a:tr h="310896">
                 <a:tc>
@@ -7250,7 +7227,7 @@
                     <a:bodyPr/>
                     <a:lstStyle/>
                     <a:p>
-                      <a:pPr algn="l" indent="0" marL="0">
+                      <a:pPr marL="0" indent="0" algn="l">
                         <a:buNone/>
                       </a:pPr>
                       <a:r>
@@ -7271,7 +7248,7 @@
                       </a:endParaRPr>
                     </a:p>
                   </a:txBody>
-                  <a:tcPr marL="91440" marR="91440" marT="45720" marB="45720" anchor="ctr">
+                  <a:tcPr anchor="ctr">
                     <a:lnL w="6350" cap="flat" cmpd="sng" algn="ctr">
                       <a:solidFill>
                         <a:srgbClr val="E6DECB"/>
@@ -7318,7 +7295,7 @@
                     <a:bodyPr/>
                     <a:lstStyle/>
                     <a:p>
-                      <a:pPr algn="l" indent="0" marL="0">
+                      <a:pPr marL="0" indent="0" algn="l">
                         <a:buNone/>
                       </a:pPr>
                       <a:r>
@@ -7339,7 +7316,7 @@
                       </a:endParaRPr>
                     </a:p>
                   </a:txBody>
-                  <a:tcPr marL="91440" marR="91440" marT="45720" marB="45720" anchor="ctr">
+                  <a:tcPr anchor="ctr">
                     <a:lnL w="6350" cap="flat" cmpd="sng" algn="ctr">
                       <a:solidFill>
                         <a:srgbClr val="E6DECB"/>
@@ -7386,7 +7363,7 @@
                     <a:bodyPr/>
                     <a:lstStyle/>
                     <a:p>
-                      <a:pPr algn="ctr" indent="0" marL="0">
+                      <a:pPr marL="0" indent="0" algn="ctr">
                         <a:buNone/>
                       </a:pPr>
                       <a:r>
@@ -7407,7 +7384,7 @@
                       </a:endParaRPr>
                     </a:p>
                   </a:txBody>
-                  <a:tcPr marL="91440" marR="91440" marT="45720" marB="45720" anchor="ctr">
+                  <a:tcPr anchor="ctr">
                     <a:lnL w="6350" cap="flat" cmpd="sng" algn="ctr">
                       <a:solidFill>
                         <a:srgbClr val="E6DECB"/>
@@ -7454,7 +7431,7 @@
                     <a:bodyPr/>
                     <a:lstStyle/>
                     <a:p>
-                      <a:pPr algn="ctr" indent="0" marL="0">
+                      <a:pPr marL="0" indent="0" algn="ctr">
                         <a:buNone/>
                       </a:pPr>
                       <a:r>
@@ -7475,7 +7452,7 @@
                       </a:endParaRPr>
                     </a:p>
                   </a:txBody>
-                  <a:tcPr marL="91440" marR="91440" marT="45720" marB="45720" anchor="ctr">
+                  <a:tcPr anchor="ctr">
                     <a:lnL w="6350" cap="flat" cmpd="sng" algn="ctr">
                       <a:solidFill>
                         <a:srgbClr val="E6DECB"/>
@@ -7522,7 +7499,7 @@
                     <a:bodyPr/>
                     <a:lstStyle/>
                     <a:p>
-                      <a:pPr algn="ctr" indent="0" marL="0">
+                      <a:pPr marL="0" indent="0" algn="ctr">
                         <a:buNone/>
                       </a:pPr>
                       <a:r>
@@ -7543,7 +7520,7 @@
                       </a:endParaRPr>
                     </a:p>
                   </a:txBody>
-                  <a:tcPr marL="91440" marR="91440" marT="45720" marB="45720" anchor="ctr">
+                  <a:tcPr anchor="ctr">
                     <a:lnL w="6350" cap="flat" cmpd="sng" algn="ctr">
                       <a:solidFill>
                         <a:srgbClr val="E6DECB"/>
@@ -7585,6 +7562,11 @@
                     </a:solidFill>
                   </a:tcPr>
                 </a:tc>
+                <a:extLst>
+                  <a:ext uri="{0D108BD9-81ED-4DB2-BD59-A6C34878D82A}">
+                    <a16:rowId xmlns:a16="http://schemas.microsoft.com/office/drawing/2014/main" val="10005"/>
+                  </a:ext>
+                </a:extLst>
               </a:tr>
               <a:tr h="310896">
                 <a:tc>
@@ -7592,7 +7574,7 @@
                     <a:bodyPr/>
                     <a:lstStyle/>
                     <a:p>
-                      <a:pPr algn="l" indent="0" marL="0">
+                      <a:pPr marL="0" indent="0" algn="l">
                         <a:buNone/>
                       </a:pPr>
                       <a:r>
@@ -7613,7 +7595,7 @@
                       </a:endParaRPr>
                     </a:p>
                   </a:txBody>
-                  <a:tcPr marL="91440" marR="91440" marT="45720" marB="45720" anchor="ctr">
+                  <a:tcPr anchor="ctr">
                     <a:lnL w="6350" cap="flat" cmpd="sng" algn="ctr">
                       <a:solidFill>
                         <a:srgbClr val="E6DECB"/>
@@ -7660,7 +7642,7 @@
                     <a:bodyPr/>
                     <a:lstStyle/>
                     <a:p>
-                      <a:pPr algn="l" indent="0" marL="0">
+                      <a:pPr marL="0" indent="0" algn="l">
                         <a:buNone/>
                       </a:pPr>
                       <a:r>
@@ -7681,7 +7663,7 @@
                       </a:endParaRPr>
                     </a:p>
                   </a:txBody>
-                  <a:tcPr marL="91440" marR="91440" marT="45720" marB="45720" anchor="ctr">
+                  <a:tcPr anchor="ctr">
                     <a:lnL w="6350" cap="flat" cmpd="sng" algn="ctr">
                       <a:solidFill>
                         <a:srgbClr val="E6DECB"/>
@@ -7728,7 +7710,7 @@
                     <a:bodyPr/>
                     <a:lstStyle/>
                     <a:p>
-                      <a:pPr algn="ctr" indent="0" marL="0">
+                      <a:pPr marL="0" indent="0" algn="ctr">
                         <a:buNone/>
                       </a:pPr>
                       <a:r>
@@ -7749,7 +7731,7 @@
                       </a:endParaRPr>
                     </a:p>
                   </a:txBody>
-                  <a:tcPr marL="91440" marR="91440" marT="45720" marB="45720" anchor="ctr">
+                  <a:tcPr anchor="ctr">
                     <a:lnL w="6350" cap="flat" cmpd="sng" algn="ctr">
                       <a:solidFill>
                         <a:srgbClr val="E6DECB"/>
@@ -7796,7 +7778,7 @@
                     <a:bodyPr/>
                     <a:lstStyle/>
                     <a:p>
-                      <a:pPr algn="ctr" indent="0" marL="0">
+                      <a:pPr marL="0" indent="0" algn="ctr">
                         <a:buNone/>
                       </a:pPr>
                       <a:r>
@@ -7817,7 +7799,7 @@
                       </a:endParaRPr>
                     </a:p>
                   </a:txBody>
-                  <a:tcPr marL="91440" marR="91440" marT="45720" marB="45720" anchor="ctr">
+                  <a:tcPr anchor="ctr">
                     <a:lnL w="6350" cap="flat" cmpd="sng" algn="ctr">
                       <a:solidFill>
                         <a:srgbClr val="E6DECB"/>
@@ -7864,7 +7846,7 @@
                     <a:bodyPr/>
                     <a:lstStyle/>
                     <a:p>
-                      <a:pPr algn="ctr" indent="0" marL="0">
+                      <a:pPr marL="0" indent="0" algn="ctr">
                         <a:buNone/>
                       </a:pPr>
                       <a:r>
@@ -7885,7 +7867,7 @@
                       </a:endParaRPr>
                     </a:p>
                   </a:txBody>
-                  <a:tcPr marL="91440" marR="91440" marT="45720" marB="45720" anchor="ctr">
+                  <a:tcPr anchor="ctr">
                     <a:lnL w="6350" cap="flat" cmpd="sng" algn="ctr">
                       <a:solidFill>
                         <a:srgbClr val="E6DECB"/>
@@ -7927,6 +7909,11 @@
                     </a:solidFill>
                   </a:tcPr>
                 </a:tc>
+                <a:extLst>
+                  <a:ext uri="{0D108BD9-81ED-4DB2-BD59-A6C34878D82A}">
+                    <a16:rowId xmlns:a16="http://schemas.microsoft.com/office/drawing/2014/main" val="10006"/>
+                  </a:ext>
+                </a:extLst>
               </a:tr>
               <a:tr h="310896">
                 <a:tc>
@@ -7934,7 +7921,7 @@
                     <a:bodyPr/>
                     <a:lstStyle/>
                     <a:p>
-                      <a:pPr algn="l" indent="0" marL="0">
+                      <a:pPr marL="0" indent="0" algn="l">
                         <a:buNone/>
                       </a:pPr>
                       <a:r>
@@ -7955,7 +7942,7 @@
                       </a:endParaRPr>
                     </a:p>
                   </a:txBody>
-                  <a:tcPr marL="91440" marR="91440" marT="45720" marB="45720" anchor="ctr">
+                  <a:tcPr anchor="ctr">
                     <a:lnL w="6350" cap="flat" cmpd="sng" algn="ctr">
                       <a:solidFill>
                         <a:srgbClr val="E6DECB"/>
@@ -8002,7 +7989,7 @@
                     <a:bodyPr/>
                     <a:lstStyle/>
                     <a:p>
-                      <a:pPr algn="l" indent="0" marL="0">
+                      <a:pPr marL="0" indent="0" algn="l">
                         <a:buNone/>
                       </a:pPr>
                       <a:r>
@@ -8023,7 +8010,7 @@
                       </a:endParaRPr>
                     </a:p>
                   </a:txBody>
-                  <a:tcPr marL="91440" marR="91440" marT="45720" marB="45720" anchor="ctr">
+                  <a:tcPr anchor="ctr">
                     <a:lnL w="6350" cap="flat" cmpd="sng" algn="ctr">
                       <a:solidFill>
                         <a:srgbClr val="E6DECB"/>
@@ -8070,7 +8057,7 @@
                     <a:bodyPr/>
                     <a:lstStyle/>
                     <a:p>
-                      <a:pPr algn="ctr" indent="0" marL="0">
+                      <a:pPr marL="0" indent="0" algn="ctr">
                         <a:buNone/>
                       </a:pPr>
                       <a:r>
@@ -8091,7 +8078,7 @@
                       </a:endParaRPr>
                     </a:p>
                   </a:txBody>
-                  <a:tcPr marL="91440" marR="91440" marT="45720" marB="45720" anchor="ctr">
+                  <a:tcPr anchor="ctr">
                     <a:lnL w="6350" cap="flat" cmpd="sng" algn="ctr">
                       <a:solidFill>
                         <a:srgbClr val="E6DECB"/>
@@ -8138,7 +8125,7 @@
                     <a:bodyPr/>
                     <a:lstStyle/>
                     <a:p>
-                      <a:pPr algn="ctr" indent="0" marL="0">
+                      <a:pPr marL="0" indent="0" algn="ctr">
                         <a:buNone/>
                       </a:pPr>
                       <a:r>
@@ -8159,7 +8146,7 @@
                       </a:endParaRPr>
                     </a:p>
                   </a:txBody>
-                  <a:tcPr marL="91440" marR="91440" marT="45720" marB="45720" anchor="ctr">
+                  <a:tcPr anchor="ctr">
                     <a:lnL w="6350" cap="flat" cmpd="sng" algn="ctr">
                       <a:solidFill>
                         <a:srgbClr val="E6DECB"/>
@@ -8206,7 +8193,7 @@
                     <a:bodyPr/>
                     <a:lstStyle/>
                     <a:p>
-                      <a:pPr algn="ctr" indent="0" marL="0">
+                      <a:pPr marL="0" indent="0" algn="ctr">
                         <a:buNone/>
                       </a:pPr>
                       <a:r>
@@ -8227,7 +8214,7 @@
                       </a:endParaRPr>
                     </a:p>
                   </a:txBody>
-                  <a:tcPr marL="91440" marR="91440" marT="45720" marB="45720" anchor="ctr">
+                  <a:tcPr anchor="ctr">
                     <a:lnL w="6350" cap="flat" cmpd="sng" algn="ctr">
                       <a:solidFill>
                         <a:srgbClr val="E6DECB"/>
@@ -8269,6 +8256,11 @@
                     </a:solidFill>
                   </a:tcPr>
                 </a:tc>
+                <a:extLst>
+                  <a:ext uri="{0D108BD9-81ED-4DB2-BD59-A6C34878D82A}">
+                    <a16:rowId xmlns:a16="http://schemas.microsoft.com/office/drawing/2014/main" val="10007"/>
+                  </a:ext>
+                </a:extLst>
               </a:tr>
               <a:tr h="310896">
                 <a:tc>
@@ -8276,7 +8268,7 @@
                     <a:bodyPr/>
                     <a:lstStyle/>
                     <a:p>
-                      <a:pPr algn="l" indent="0" marL="0">
+                      <a:pPr marL="0" indent="0" algn="l">
                         <a:buNone/>
                       </a:pPr>
                       <a:r>
@@ -8297,7 +8289,7 @@
                       </a:endParaRPr>
                     </a:p>
                   </a:txBody>
-                  <a:tcPr marL="91440" marR="91440" marT="45720" marB="45720" anchor="ctr">
+                  <a:tcPr anchor="ctr">
                     <a:lnL w="6350" cap="flat" cmpd="sng" algn="ctr">
                       <a:solidFill>
                         <a:srgbClr val="E6DECB"/>
@@ -8344,7 +8336,7 @@
                     <a:bodyPr/>
                     <a:lstStyle/>
                     <a:p>
-                      <a:pPr algn="l" indent="0" marL="0">
+                      <a:pPr marL="0" indent="0" algn="l">
                         <a:buNone/>
                       </a:pPr>
                       <a:r>
@@ -8365,7 +8357,7 @@
                       </a:endParaRPr>
                     </a:p>
                   </a:txBody>
-                  <a:tcPr marL="91440" marR="91440" marT="45720" marB="45720" anchor="ctr">
+                  <a:tcPr anchor="ctr">
                     <a:lnL w="6350" cap="flat" cmpd="sng" algn="ctr">
                       <a:solidFill>
                         <a:srgbClr val="E6DECB"/>
@@ -8412,7 +8404,7 @@
                     <a:bodyPr/>
                     <a:lstStyle/>
                     <a:p>
-                      <a:pPr algn="ctr" indent="0" marL="0">
+                      <a:pPr marL="0" indent="0" algn="ctr">
                         <a:buNone/>
                       </a:pPr>
                       <a:r>
@@ -8433,7 +8425,7 @@
                       </a:endParaRPr>
                     </a:p>
                   </a:txBody>
-                  <a:tcPr marL="91440" marR="91440" marT="45720" marB="45720" anchor="ctr">
+                  <a:tcPr anchor="ctr">
                     <a:lnL w="6350" cap="flat" cmpd="sng" algn="ctr">
                       <a:solidFill>
                         <a:srgbClr val="E6DECB"/>
@@ -8480,7 +8472,7 @@
                     <a:bodyPr/>
                     <a:lstStyle/>
                     <a:p>
-                      <a:pPr algn="ctr" indent="0" marL="0">
+                      <a:pPr marL="0" indent="0" algn="ctr">
                         <a:buNone/>
                       </a:pPr>
                       <a:r>
@@ -8501,7 +8493,7 @@
                       </a:endParaRPr>
                     </a:p>
                   </a:txBody>
-                  <a:tcPr marL="91440" marR="91440" marT="45720" marB="45720" anchor="ctr">
+                  <a:tcPr anchor="ctr">
                     <a:lnL w="6350" cap="flat" cmpd="sng" algn="ctr">
                       <a:solidFill>
                         <a:srgbClr val="E6DECB"/>
@@ -8548,7 +8540,7 @@
                     <a:bodyPr/>
                     <a:lstStyle/>
                     <a:p>
-                      <a:pPr algn="ctr" indent="0" marL="0">
+                      <a:pPr marL="0" indent="0" algn="ctr">
                         <a:buNone/>
                       </a:pPr>
                       <a:r>
@@ -8569,7 +8561,7 @@
                       </a:endParaRPr>
                     </a:p>
                   </a:txBody>
-                  <a:tcPr marL="91440" marR="91440" marT="45720" marB="45720" anchor="ctr">
+                  <a:tcPr anchor="ctr">
                     <a:lnL w="6350" cap="flat" cmpd="sng" algn="ctr">
                       <a:solidFill>
                         <a:srgbClr val="E6DECB"/>
@@ -8611,6 +8603,11 @@
                     </a:solidFill>
                   </a:tcPr>
                 </a:tc>
+                <a:extLst>
+                  <a:ext uri="{0D108BD9-81ED-4DB2-BD59-A6C34878D82A}">
+                    <a16:rowId xmlns:a16="http://schemas.microsoft.com/office/drawing/2014/main" val="10008"/>
+                  </a:ext>
+                </a:extLst>
               </a:tr>
               <a:tr h="310896">
                 <a:tc>
@@ -8618,7 +8615,7 @@
                     <a:bodyPr/>
                     <a:lstStyle/>
                     <a:p>
-                      <a:pPr algn="l" indent="0" marL="0">
+                      <a:pPr marL="0" indent="0" algn="l">
                         <a:buNone/>
                       </a:pPr>
                       <a:r>
@@ -8639,7 +8636,7 @@
                       </a:endParaRPr>
                     </a:p>
                   </a:txBody>
-                  <a:tcPr marL="91440" marR="91440" marT="45720" marB="45720" anchor="ctr">
+                  <a:tcPr anchor="ctr">
                     <a:lnL w="6350" cap="flat" cmpd="sng" algn="ctr">
                       <a:solidFill>
                         <a:srgbClr val="E6DECB"/>
@@ -8686,7 +8683,7 @@
                     <a:bodyPr/>
                     <a:lstStyle/>
                     <a:p>
-                      <a:pPr algn="l" indent="0" marL="0">
+                      <a:pPr marL="0" indent="0" algn="l">
                         <a:buNone/>
                       </a:pPr>
                       <a:r>
@@ -8707,7 +8704,7 @@
                       </a:endParaRPr>
                     </a:p>
                   </a:txBody>
-                  <a:tcPr marL="91440" marR="91440" marT="45720" marB="45720" anchor="ctr">
+                  <a:tcPr anchor="ctr">
                     <a:lnL w="6350" cap="flat" cmpd="sng" algn="ctr">
                       <a:solidFill>
                         <a:srgbClr val="E6DECB"/>
@@ -8754,7 +8751,7 @@
                     <a:bodyPr/>
                     <a:lstStyle/>
                     <a:p>
-                      <a:pPr algn="ctr" indent="0" marL="0">
+                      <a:pPr marL="0" indent="0" algn="ctr">
                         <a:buNone/>
                       </a:pPr>
                       <a:r>
@@ -8775,7 +8772,7 @@
                       </a:endParaRPr>
                     </a:p>
                   </a:txBody>
-                  <a:tcPr marL="91440" marR="91440" marT="45720" marB="45720" anchor="ctr">
+                  <a:tcPr anchor="ctr">
                     <a:lnL w="6350" cap="flat" cmpd="sng" algn="ctr">
                       <a:solidFill>
                         <a:srgbClr val="E6DECB"/>
@@ -8822,7 +8819,7 @@
                     <a:bodyPr/>
                     <a:lstStyle/>
                     <a:p>
-                      <a:pPr algn="ctr" indent="0" marL="0">
+                      <a:pPr marL="0" indent="0" algn="ctr">
                         <a:buNone/>
                       </a:pPr>
                       <a:r>
@@ -8843,7 +8840,7 @@
                       </a:endParaRPr>
                     </a:p>
                   </a:txBody>
-                  <a:tcPr marL="91440" marR="91440" marT="45720" marB="45720" anchor="ctr">
+                  <a:tcPr anchor="ctr">
                     <a:lnL w="6350" cap="flat" cmpd="sng" algn="ctr">
                       <a:solidFill>
                         <a:srgbClr val="E6DECB"/>
@@ -8890,7 +8887,7 @@
                     <a:bodyPr/>
                     <a:lstStyle/>
                     <a:p>
-                      <a:pPr algn="ctr" indent="0" marL="0">
+                      <a:pPr marL="0" indent="0" algn="ctr">
                         <a:buNone/>
                       </a:pPr>
                       <a:r>
@@ -8911,7 +8908,7 @@
                       </a:endParaRPr>
                     </a:p>
                   </a:txBody>
-                  <a:tcPr marL="91440" marR="91440" marT="45720" marB="45720" anchor="ctr">
+                  <a:tcPr anchor="ctr">
                     <a:lnL w="6350" cap="flat" cmpd="sng" algn="ctr">
                       <a:solidFill>
                         <a:srgbClr val="E6DECB"/>
@@ -8953,6 +8950,11 @@
                     </a:solidFill>
                   </a:tcPr>
                 </a:tc>
+                <a:extLst>
+                  <a:ext uri="{0D108BD9-81ED-4DB2-BD59-A6C34878D82A}">
+                    <a16:rowId xmlns:a16="http://schemas.microsoft.com/office/drawing/2014/main" val="10009"/>
+                  </a:ext>
+                </a:extLst>
               </a:tr>
               <a:tr h="310896">
                 <a:tc>
@@ -8960,7 +8962,7 @@
                     <a:bodyPr/>
                     <a:lstStyle/>
                     <a:p>
-                      <a:pPr algn="l" indent="0" marL="0">
+                      <a:pPr marL="0" indent="0" algn="l">
                         <a:buNone/>
                       </a:pPr>
                       <a:r>
@@ -8981,7 +8983,7 @@
                       </a:endParaRPr>
                     </a:p>
                   </a:txBody>
-                  <a:tcPr marL="91440" marR="91440" marT="45720" marB="45720" anchor="ctr">
+                  <a:tcPr anchor="ctr">
                     <a:lnL w="6350" cap="flat" cmpd="sng" algn="ctr">
                       <a:solidFill>
                         <a:srgbClr val="E6DECB"/>
@@ -9028,7 +9030,7 @@
                     <a:bodyPr/>
                     <a:lstStyle/>
                     <a:p>
-                      <a:pPr algn="l" indent="0" marL="0">
+                      <a:pPr marL="0" indent="0" algn="l">
                         <a:buNone/>
                       </a:pPr>
                       <a:r>
@@ -9049,7 +9051,7 @@
                       </a:endParaRPr>
                     </a:p>
                   </a:txBody>
-                  <a:tcPr marL="91440" marR="91440" marT="45720" marB="45720" anchor="ctr">
+                  <a:tcPr anchor="ctr">
                     <a:lnL w="6350" cap="flat" cmpd="sng" algn="ctr">
                       <a:solidFill>
                         <a:srgbClr val="E6DECB"/>
@@ -9096,7 +9098,7 @@
                     <a:bodyPr/>
                     <a:lstStyle/>
                     <a:p>
-                      <a:pPr algn="ctr" indent="0" marL="0">
+                      <a:pPr marL="0" indent="0" algn="ctr">
                         <a:buNone/>
                       </a:pPr>
                       <a:r>
@@ -9117,7 +9119,7 @@
                       </a:endParaRPr>
                     </a:p>
                   </a:txBody>
-                  <a:tcPr marL="91440" marR="91440" marT="45720" marB="45720" anchor="ctr">
+                  <a:tcPr anchor="ctr">
                     <a:lnL w="6350" cap="flat" cmpd="sng" algn="ctr">
                       <a:solidFill>
                         <a:srgbClr val="E6DECB"/>
@@ -9164,7 +9166,7 @@
                     <a:bodyPr/>
                     <a:lstStyle/>
                     <a:p>
-                      <a:pPr algn="ctr" indent="0" marL="0">
+                      <a:pPr marL="0" indent="0" algn="ctr">
                         <a:buNone/>
                       </a:pPr>
                       <a:r>
@@ -9185,7 +9187,7 @@
                       </a:endParaRPr>
                     </a:p>
                   </a:txBody>
-                  <a:tcPr marL="91440" marR="91440" marT="45720" marB="45720" anchor="ctr">
+                  <a:tcPr anchor="ctr">
                     <a:lnL w="6350" cap="flat" cmpd="sng" algn="ctr">
                       <a:solidFill>
                         <a:srgbClr val="E6DECB"/>
@@ -9232,7 +9234,7 @@
                     <a:bodyPr/>
                     <a:lstStyle/>
                     <a:p>
-                      <a:pPr algn="ctr" indent="0" marL="0">
+                      <a:pPr marL="0" indent="0" algn="ctr">
                         <a:buNone/>
                       </a:pPr>
                       <a:r>
@@ -9253,7 +9255,7 @@
                       </a:endParaRPr>
                     </a:p>
                   </a:txBody>
-                  <a:tcPr marL="91440" marR="91440" marT="45720" marB="45720" anchor="ctr">
+                  <a:tcPr anchor="ctr">
                     <a:lnL w="6350" cap="flat" cmpd="sng" algn="ctr">
                       <a:solidFill>
                         <a:srgbClr val="E6DECB"/>
@@ -9295,6 +9297,11 @@
                     </a:solidFill>
                   </a:tcPr>
                 </a:tc>
+                <a:extLst>
+                  <a:ext uri="{0D108BD9-81ED-4DB2-BD59-A6C34878D82A}">
+                    <a16:rowId xmlns:a16="http://schemas.microsoft.com/office/drawing/2014/main" val="10010"/>
+                  </a:ext>
+                </a:extLst>
               </a:tr>
               <a:tr h="310896">
                 <a:tc>
@@ -9302,7 +9309,7 @@
                     <a:bodyPr/>
                     <a:lstStyle/>
                     <a:p>
-                      <a:pPr algn="l" indent="0" marL="0">
+                      <a:pPr marL="0" indent="0" algn="l">
                         <a:buNone/>
                       </a:pPr>
                       <a:r>
@@ -9323,7 +9330,7 @@
                       </a:endParaRPr>
                     </a:p>
                   </a:txBody>
-                  <a:tcPr marL="91440" marR="91440" marT="45720" marB="45720" anchor="ctr">
+                  <a:tcPr anchor="ctr">
                     <a:lnL w="6350" cap="flat" cmpd="sng" algn="ctr">
                       <a:solidFill>
                         <a:srgbClr val="E6DECB"/>
@@ -9370,7 +9377,7 @@
                     <a:bodyPr/>
                     <a:lstStyle/>
                     <a:p>
-                      <a:pPr algn="l" indent="0" marL="0">
+                      <a:pPr marL="0" indent="0" algn="l">
                         <a:buNone/>
                       </a:pPr>
                       <a:r>
@@ -9391,7 +9398,7 @@
                       </a:endParaRPr>
                     </a:p>
                   </a:txBody>
-                  <a:tcPr marL="91440" marR="91440" marT="45720" marB="45720" anchor="ctr">
+                  <a:tcPr anchor="ctr">
                     <a:lnL w="6350" cap="flat" cmpd="sng" algn="ctr">
                       <a:solidFill>
                         <a:srgbClr val="E6DECB"/>
@@ -9438,7 +9445,7 @@
                     <a:bodyPr/>
                     <a:lstStyle/>
                     <a:p>
-                      <a:pPr algn="ctr" indent="0" marL="0">
+                      <a:pPr marL="0" indent="0" algn="ctr">
                         <a:buNone/>
                       </a:pPr>
                       <a:r>
@@ -9459,7 +9466,7 @@
                       </a:endParaRPr>
                     </a:p>
                   </a:txBody>
-                  <a:tcPr marL="91440" marR="91440" marT="45720" marB="45720" anchor="ctr">
+                  <a:tcPr anchor="ctr">
                     <a:lnL w="6350" cap="flat" cmpd="sng" algn="ctr">
                       <a:solidFill>
                         <a:srgbClr val="E6DECB"/>
@@ -9506,7 +9513,7 @@
                     <a:bodyPr/>
                     <a:lstStyle/>
                     <a:p>
-                      <a:pPr algn="ctr" indent="0" marL="0">
+                      <a:pPr marL="0" indent="0" algn="ctr">
                         <a:buNone/>
                       </a:pPr>
                       <a:r>
@@ -9527,7 +9534,7 @@
                       </a:endParaRPr>
                     </a:p>
                   </a:txBody>
-                  <a:tcPr marL="91440" marR="91440" marT="45720" marB="45720" anchor="ctr">
+                  <a:tcPr anchor="ctr">
                     <a:lnL w="6350" cap="flat" cmpd="sng" algn="ctr">
                       <a:solidFill>
                         <a:srgbClr val="E6DECB"/>
@@ -9574,7 +9581,7 @@
                     <a:bodyPr/>
                     <a:lstStyle/>
                     <a:p>
-                      <a:pPr algn="ctr" indent="0" marL="0">
+                      <a:pPr marL="0" indent="0" algn="ctr">
                         <a:buNone/>
                       </a:pPr>
                       <a:r>
@@ -9595,7 +9602,7 @@
                       </a:endParaRPr>
                     </a:p>
                   </a:txBody>
-                  <a:tcPr marL="91440" marR="91440" marT="45720" marB="45720" anchor="ctr">
+                  <a:tcPr anchor="ctr">
                     <a:lnL w="6350" cap="flat" cmpd="sng" algn="ctr">
                       <a:solidFill>
                         <a:srgbClr val="E6DECB"/>
@@ -9637,6 +9644,11 @@
                     </a:solidFill>
                   </a:tcPr>
                 </a:tc>
+                <a:extLst>
+                  <a:ext uri="{0D108BD9-81ED-4DB2-BD59-A6C34878D82A}">
+                    <a16:rowId xmlns:a16="http://schemas.microsoft.com/office/drawing/2014/main" val="10011"/>
+                  </a:ext>
+                </a:extLst>
               </a:tr>
               <a:tr h="310896">
                 <a:tc>
@@ -9644,7 +9656,7 @@
                     <a:bodyPr/>
                     <a:lstStyle/>
                     <a:p>
-                      <a:pPr algn="l" indent="0" marL="0">
+                      <a:pPr marL="0" indent="0" algn="l">
                         <a:buNone/>
                       </a:pPr>
                       <a:r>
@@ -9665,7 +9677,7 @@
                       </a:endParaRPr>
                     </a:p>
                   </a:txBody>
-                  <a:tcPr marL="91440" marR="91440" marT="45720" marB="45720" anchor="ctr">
+                  <a:tcPr anchor="ctr">
                     <a:lnL w="6350" cap="flat" cmpd="sng" algn="ctr">
                       <a:solidFill>
                         <a:srgbClr val="E6DECB"/>
@@ -9712,7 +9724,7 @@
                     <a:bodyPr/>
                     <a:lstStyle/>
                     <a:p>
-                      <a:pPr algn="l" indent="0" marL="0">
+                      <a:pPr marL="0" indent="0" algn="l">
                         <a:buNone/>
                       </a:pPr>
                       <a:r>
@@ -9733,7 +9745,7 @@
                       </a:endParaRPr>
                     </a:p>
                   </a:txBody>
-                  <a:tcPr marL="91440" marR="91440" marT="45720" marB="45720" anchor="ctr">
+                  <a:tcPr anchor="ctr">
                     <a:lnL w="6350" cap="flat" cmpd="sng" algn="ctr">
                       <a:solidFill>
                         <a:srgbClr val="E6DECB"/>
@@ -9780,7 +9792,7 @@
                     <a:bodyPr/>
                     <a:lstStyle/>
                     <a:p>
-                      <a:pPr algn="ctr" indent="0" marL="0">
+                      <a:pPr marL="0" indent="0" algn="ctr">
                         <a:buNone/>
                       </a:pPr>
                       <a:r>
@@ -9801,7 +9813,7 @@
                       </a:endParaRPr>
                     </a:p>
                   </a:txBody>
-                  <a:tcPr marL="91440" marR="91440" marT="45720" marB="45720" anchor="ctr">
+                  <a:tcPr anchor="ctr">
                     <a:lnL w="6350" cap="flat" cmpd="sng" algn="ctr">
                       <a:solidFill>
                         <a:srgbClr val="E6DECB"/>
@@ -9848,7 +9860,7 @@
                     <a:bodyPr/>
                     <a:lstStyle/>
                     <a:p>
-                      <a:pPr algn="ctr" indent="0" marL="0">
+                      <a:pPr marL="0" indent="0" algn="ctr">
                         <a:buNone/>
                       </a:pPr>
                       <a:r>
@@ -9869,7 +9881,7 @@
                       </a:endParaRPr>
                     </a:p>
                   </a:txBody>
-                  <a:tcPr marL="91440" marR="91440" marT="45720" marB="45720" anchor="ctr">
+                  <a:tcPr anchor="ctr">
                     <a:lnL w="6350" cap="flat" cmpd="sng" algn="ctr">
                       <a:solidFill>
                         <a:srgbClr val="E6DECB"/>
@@ -9916,7 +9928,7 @@
                     <a:bodyPr/>
                     <a:lstStyle/>
                     <a:p>
-                      <a:pPr algn="ctr" indent="0" marL="0">
+                      <a:pPr marL="0" indent="0" algn="ctr">
                         <a:buNone/>
                       </a:pPr>
                       <a:r>
@@ -9937,7 +9949,7 @@
                       </a:endParaRPr>
                     </a:p>
                   </a:txBody>
-                  <a:tcPr marL="91440" marR="91440" marT="45720" marB="45720" anchor="ctr">
+                  <a:tcPr anchor="ctr">
                     <a:lnL w="6350" cap="flat" cmpd="sng" algn="ctr">
                       <a:solidFill>
                         <a:srgbClr val="E6DECB"/>
@@ -9979,6 +9991,11 @@
                     </a:solidFill>
                   </a:tcPr>
                 </a:tc>
+                <a:extLst>
+                  <a:ext uri="{0D108BD9-81ED-4DB2-BD59-A6C34878D82A}">
+                    <a16:rowId xmlns:a16="http://schemas.microsoft.com/office/drawing/2014/main" val="10012"/>
+                  </a:ext>
+                </a:extLst>
               </a:tr>
               <a:tr h="310896">
                 <a:tc>
@@ -9986,7 +10003,7 @@
                     <a:bodyPr/>
                     <a:lstStyle/>
                     <a:p>
-                      <a:pPr algn="l" indent="0" marL="0">
+                      <a:pPr marL="0" indent="0" algn="l">
                         <a:buNone/>
                       </a:pPr>
                       <a:r>
@@ -10007,7 +10024,7 @@
                       </a:endParaRPr>
                     </a:p>
                   </a:txBody>
-                  <a:tcPr marL="91440" marR="91440" marT="45720" marB="45720" anchor="ctr">
+                  <a:tcPr anchor="ctr">
                     <a:lnL w="6350" cap="flat" cmpd="sng" algn="ctr">
                       <a:solidFill>
                         <a:srgbClr val="E6DECB"/>
@@ -10054,7 +10071,7 @@
                     <a:bodyPr/>
                     <a:lstStyle/>
                     <a:p>
-                      <a:pPr algn="l" indent="0" marL="0">
+                      <a:pPr marL="0" indent="0" algn="l">
                         <a:buNone/>
                       </a:pPr>
                       <a:r>
@@ -10075,7 +10092,7 @@
                       </a:endParaRPr>
                     </a:p>
                   </a:txBody>
-                  <a:tcPr marL="91440" marR="91440" marT="45720" marB="45720" anchor="ctr">
+                  <a:tcPr anchor="ctr">
                     <a:lnL w="6350" cap="flat" cmpd="sng" algn="ctr">
                       <a:solidFill>
                         <a:srgbClr val="E6DECB"/>
@@ -10122,7 +10139,7 @@
                     <a:bodyPr/>
                     <a:lstStyle/>
                     <a:p>
-                      <a:pPr algn="ctr" indent="0" marL="0">
+                      <a:pPr marL="0" indent="0" algn="ctr">
                         <a:buNone/>
                       </a:pPr>
                       <a:r>
@@ -10143,7 +10160,7 @@
                       </a:endParaRPr>
                     </a:p>
                   </a:txBody>
-                  <a:tcPr marL="91440" marR="91440" marT="45720" marB="45720" anchor="ctr">
+                  <a:tcPr anchor="ctr">
                     <a:lnL w="6350" cap="flat" cmpd="sng" algn="ctr">
                       <a:solidFill>
                         <a:srgbClr val="E6DECB"/>
@@ -10190,7 +10207,7 @@
                     <a:bodyPr/>
                     <a:lstStyle/>
                     <a:p>
-                      <a:pPr algn="ctr" indent="0" marL="0">
+                      <a:pPr marL="0" indent="0" algn="ctr">
                         <a:buNone/>
                       </a:pPr>
                       <a:r>
@@ -10211,7 +10228,7 @@
                       </a:endParaRPr>
                     </a:p>
                   </a:txBody>
-                  <a:tcPr marL="91440" marR="91440" marT="45720" marB="45720" anchor="ctr">
+                  <a:tcPr anchor="ctr">
                     <a:lnL w="6350" cap="flat" cmpd="sng" algn="ctr">
                       <a:solidFill>
                         <a:srgbClr val="E6DECB"/>
@@ -10258,7 +10275,7 @@
                     <a:bodyPr/>
                     <a:lstStyle/>
                     <a:p>
-                      <a:pPr algn="ctr" indent="0" marL="0">
+                      <a:pPr marL="0" indent="0" algn="ctr">
                         <a:buNone/>
                       </a:pPr>
                       <a:r>
@@ -10279,7 +10296,7 @@
                       </a:endParaRPr>
                     </a:p>
                   </a:txBody>
-                  <a:tcPr marL="91440" marR="91440" marT="45720" marB="45720" anchor="ctr">
+                  <a:tcPr anchor="ctr">
                     <a:lnL w="6350" cap="flat" cmpd="sng" algn="ctr">
                       <a:solidFill>
                         <a:srgbClr val="E6DECB"/>
@@ -10321,6 +10338,11 @@
                     </a:solidFill>
                   </a:tcPr>
                 </a:tc>
+                <a:extLst>
+                  <a:ext uri="{0D108BD9-81ED-4DB2-BD59-A6C34878D82A}">
+                    <a16:rowId xmlns:a16="http://schemas.microsoft.com/office/drawing/2014/main" val="10013"/>
+                  </a:ext>
+                </a:extLst>
               </a:tr>
               <a:tr h="310896">
                 <a:tc>
@@ -10328,7 +10350,7 @@
                     <a:bodyPr/>
                     <a:lstStyle/>
                     <a:p>
-                      <a:pPr algn="l" indent="0" marL="0">
+                      <a:pPr marL="0" indent="0" algn="l">
                         <a:buNone/>
                       </a:pPr>
                       <a:r>
@@ -10349,7 +10371,7 @@
                       </a:endParaRPr>
                     </a:p>
                   </a:txBody>
-                  <a:tcPr marL="91440" marR="91440" marT="45720" marB="45720" anchor="ctr">
+                  <a:tcPr anchor="ctr">
                     <a:lnL w="6350" cap="flat" cmpd="sng" algn="ctr">
                       <a:solidFill>
                         <a:srgbClr val="E6DECB"/>
@@ -10396,7 +10418,7 @@
                     <a:bodyPr/>
                     <a:lstStyle/>
                     <a:p>
-                      <a:pPr algn="l" indent="0" marL="0">
+                      <a:pPr marL="0" indent="0" algn="l">
                         <a:buNone/>
                       </a:pPr>
                       <a:r>
@@ -10417,7 +10439,7 @@
                       </a:endParaRPr>
                     </a:p>
                   </a:txBody>
-                  <a:tcPr marL="91440" marR="91440" marT="45720" marB="45720" anchor="ctr">
+                  <a:tcPr anchor="ctr">
                     <a:lnL w="6350" cap="flat" cmpd="sng" algn="ctr">
                       <a:solidFill>
                         <a:srgbClr val="E6DECB"/>
@@ -10464,7 +10486,7 @@
                     <a:bodyPr/>
                     <a:lstStyle/>
                     <a:p>
-                      <a:pPr algn="ctr" indent="0" marL="0">
+                      <a:pPr marL="0" indent="0" algn="ctr">
                         <a:buNone/>
                       </a:pPr>
                       <a:r>
@@ -10485,7 +10507,7 @@
                       </a:endParaRPr>
                     </a:p>
                   </a:txBody>
-                  <a:tcPr marL="91440" marR="91440" marT="45720" marB="45720" anchor="ctr">
+                  <a:tcPr anchor="ctr">
                     <a:lnL w="6350" cap="flat" cmpd="sng" algn="ctr">
                       <a:solidFill>
                         <a:srgbClr val="E6DECB"/>
@@ -10532,7 +10554,7 @@
                     <a:bodyPr/>
                     <a:lstStyle/>
                     <a:p>
-                      <a:pPr algn="ctr" indent="0" marL="0">
+                      <a:pPr marL="0" indent="0" algn="ctr">
                         <a:buNone/>
                       </a:pPr>
                       <a:r>
@@ -10553,7 +10575,7 @@
                       </a:endParaRPr>
                     </a:p>
                   </a:txBody>
-                  <a:tcPr marL="91440" marR="91440" marT="45720" marB="45720" anchor="ctr">
+                  <a:tcPr anchor="ctr">
                     <a:lnL w="6350" cap="flat" cmpd="sng" algn="ctr">
                       <a:solidFill>
                         <a:srgbClr val="E6DECB"/>
@@ -10600,7 +10622,7 @@
                     <a:bodyPr/>
                     <a:lstStyle/>
                     <a:p>
-                      <a:pPr algn="ctr" indent="0" marL="0">
+                      <a:pPr marL="0" indent="0" algn="ctr">
                         <a:buNone/>
                       </a:pPr>
                       <a:r>
@@ -10621,7 +10643,7 @@
                       </a:endParaRPr>
                     </a:p>
                   </a:txBody>
-                  <a:tcPr marL="91440" marR="91440" marT="45720" marB="45720" anchor="ctr">
+                  <a:tcPr anchor="ctr">
                     <a:lnL w="6350" cap="flat" cmpd="sng" algn="ctr">
                       <a:solidFill>
                         <a:srgbClr val="E6DECB"/>
@@ -10663,6 +10685,11 @@
                     </a:solidFill>
                   </a:tcPr>
                 </a:tc>
+                <a:extLst>
+                  <a:ext uri="{0D108BD9-81ED-4DB2-BD59-A6C34878D82A}">
+                    <a16:rowId xmlns:a16="http://schemas.microsoft.com/office/drawing/2014/main" val="10014"/>
+                  </a:ext>
+                </a:extLst>
               </a:tr>
             </a:tbl>
           </a:graphicData>
@@ -10689,7 +10716,7 @@
           <a:bodyPr wrap="square" rtlCol="0" anchor="ctr"/>
           <a:lstStyle/>
           <a:p>
-            <a:pPr indent="0" marL="0">
+            <a:pPr marL="0" indent="0">
               <a:buNone/>
             </a:pPr>
             <a:r>
@@ -10703,9 +10730,6 @@
               </a:rPr>
               <a:t>Totals:  </a:t>
             </a:r>
-            <a:pPr indent="0" marL="0">
-              <a:buNone/>
-            </a:pPr>
             <a:r>
               <a:rPr lang="en-US" sz="1200" dirty="0">
                 <a:solidFill>
@@ -10742,11 +10766,11 @@
           <a:bodyPr wrap="square" rtlCol="0" anchor="ctr"/>
           <a:lstStyle/>
           <a:p>
-            <a:pPr algn="l" indent="0" marL="0">
+            <a:pPr marL="0" indent="0" algn="l">
               <a:buNone/>
             </a:pPr>
             <a:r>
-              <a:rPr lang="en-US" sz="950" b="1" spc="100" kern="0" dirty="0">
+              <a:rPr lang="en-US" sz="950" b="1" kern="0" spc="100" dirty="0">
                 <a:solidFill>
                   <a:srgbClr val="C6A24E"/>
                 </a:solidFill>
@@ -10756,11 +10780,8 @@
               </a:rPr>
               <a:t>DOFT</a:t>
             </a:r>
-            <a:pPr algn="l" indent="0" marL="0">
-              <a:buNone/>
-            </a:pPr>
-            <a:r>
-              <a:rPr lang="en-US" sz="950" spc="100" kern="0" dirty="0">
+            <a:r>
+              <a:rPr lang="en-US" sz="950" kern="0" spc="100" dirty="0">
                 <a:solidFill>
                   <a:srgbClr val="857B6C"/>
                 </a:solidFill>
@@ -10795,7 +10816,7 @@
           <a:bodyPr wrap="square" rtlCol="0" anchor="ctr"/>
           <a:lstStyle/>
           <a:p>
-            <a:pPr algn="r" indent="0" marL="0">
+            <a:pPr marL="0" indent="0" algn="r">
               <a:buNone/>
             </a:pPr>
             <a:r>
@@ -10837,6 +10858,13 @@
             <a:prstDash val="solid"/>
           </a:ln>
         </p:spPr>
+        <p:txBody>
+          <a:bodyPr/>
+          <a:lstStyle/>
+          <a:p>
+            <a:endParaRPr lang="en-US"/>
+          </a:p>
+        </p:txBody>
       </p:sp>
       <p:sp>
         <p:nvSpPr>
@@ -10859,7 +10887,7 @@
           <a:bodyPr wrap="square" rtlCol="0" anchor="ctr"/>
           <a:lstStyle/>
           <a:p>
-            <a:pPr algn="ctr" indent="0" marL="0">
+            <a:pPr marL="0" indent="0" algn="ctr">
               <a:buNone/>
             </a:pPr>
             <a:r>
@@ -10893,6 +10921,7 @@
         <a:solidFill>
           <a:srgbClr val="EFEAE0"/>
         </a:solidFill>
+        <a:effectLst/>
       </p:bgPr>
     </p:bg>
     <p:spTree>
@@ -10917,8 +10946,8 @@
         </p:nvSpPr>
         <p:spPr>
           <a:xfrm>
-            <a:off x="0" y="0"/>
-            <a:ext cx="6035040" cy="6858000"/>
+            <a:off x="0" y="155448"/>
+            <a:ext cx="10972800" cy="6858000"/>
           </a:xfrm>
           <a:prstGeom prst="rect">
             <a:avLst/>
@@ -10928,6 +10957,13 @@
           </a:solidFill>
           <a:ln/>
         </p:spPr>
+        <p:txBody>
+          <a:bodyPr/>
+          <a:lstStyle/>
+          <a:p>
+            <a:endParaRPr lang="en-US"/>
+          </a:p>
+        </p:txBody>
       </p:sp>
       <p:sp>
         <p:nvSpPr>
@@ -10950,11 +10986,11 @@
           <a:bodyPr wrap="square" rtlCol="0" anchor="ctr"/>
           <a:lstStyle/>
           <a:p>
-            <a:pPr algn="l" indent="0" marL="0">
+            <a:pPr marL="0" indent="0" algn="l">
               <a:buNone/>
             </a:pPr>
             <a:r>
-              <a:rPr lang="en-US" sz="1250" b="1" spc="300" kern="0" dirty="0">
+              <a:rPr lang="en-US" sz="1250" b="1" kern="0" spc="300" dirty="0">
                 <a:solidFill>
                   <a:srgbClr val="A9813A"/>
                 </a:solidFill>
@@ -10989,7 +11025,7 @@
           <a:bodyPr wrap="square" rtlCol="0" anchor="ctr"/>
           <a:lstStyle/>
           <a:p>
-            <a:pPr indent="0" marL="0">
+            <a:pPr marL="0" indent="0">
               <a:buNone/>
             </a:pPr>
             <a:r>
@@ -11009,14 +11045,14 @@
       </p:sp>
       <p:sp>
         <p:nvSpPr>
-          <p:cNvPr id="5" name="Text 3"/>
-          <p:cNvSpPr/>
-          <p:nvPr/>
-        </p:nvSpPr>
-        <p:spPr>
-          <a:xfrm>
-            <a:off x="502920" y="1828800"/>
-            <a:ext cx="3383280" cy="457200"/>
+          <p:cNvPr id="15" name="Text 13"/>
+          <p:cNvSpPr/>
+          <p:nvPr/>
+        </p:nvSpPr>
+        <p:spPr>
+          <a:xfrm>
+            <a:off x="685800" y="3785616"/>
+            <a:ext cx="2377440" cy="777240"/>
           </a:xfrm>
           <a:prstGeom prst="rect">
             <a:avLst/>
@@ -11028,34 +11064,84 @@
           <a:bodyPr wrap="square" rtlCol="0" anchor="ctr"/>
           <a:lstStyle/>
           <a:p>
-            <a:pPr indent="0" marL="0">
+            <a:pPr marL="0" indent="0">
               <a:buNone/>
             </a:pPr>
             <a:r>
-              <a:rPr lang="en-US" sz="1450" dirty="0">
-                <a:solidFill>
-                  <a:srgbClr val="2A2621"/>
+              <a:rPr lang="en-US" sz="1500" b="1" dirty="0">
+                <a:solidFill>
+                  <a:srgbClr val="FFFFFF"/>
+                </a:solidFill>
+                <a:latin typeface="Cambria" pitchFamily="34" charset="0"/>
+                <a:ea typeface="Cambria" pitchFamily="34" charset="-122"/>
+                <a:cs typeface="Cambria" pitchFamily="34" charset="-120"/>
+              </a:rPr>
+              <a:t>Total (incl. GST)</a:t>
+            </a:r>
+            <a:endParaRPr lang="en-US" sz="1500" dirty="0"/>
+          </a:p>
+        </p:txBody>
+      </p:sp>
+      <p:sp>
+        <p:nvSpPr>
+          <p:cNvPr id="33" name="Text 31"/>
+          <p:cNvSpPr/>
+          <p:nvPr/>
+        </p:nvSpPr>
+        <p:spPr>
+          <a:xfrm>
+            <a:off x="457200" y="6419088"/>
+            <a:ext cx="7315200" cy="320040"/>
+          </a:xfrm>
+          <a:prstGeom prst="rect">
+            <a:avLst/>
+          </a:prstGeom>
+          <a:noFill/>
+          <a:ln/>
+        </p:spPr>
+        <p:txBody>
+          <a:bodyPr wrap="square" rtlCol="0" anchor="ctr"/>
+          <a:lstStyle/>
+          <a:p>
+            <a:pPr marL="0" indent="0" algn="l">
+              <a:buNone/>
+            </a:pPr>
+            <a:r>
+              <a:rPr lang="en-US" sz="950" b="1" kern="0" spc="100" dirty="0">
+                <a:solidFill>
+                  <a:srgbClr val="C6A24E"/>
+                </a:solidFill>
+                <a:latin typeface="Cambria" pitchFamily="34" charset="0"/>
+                <a:ea typeface="Cambria" pitchFamily="34" charset="-122"/>
+                <a:cs typeface="Cambria" pitchFamily="34" charset="-120"/>
+              </a:rPr>
+              <a:t>DOFT</a:t>
+            </a:r>
+            <a:r>
+              <a:rPr lang="en-US" sz="950" kern="0" spc="100" dirty="0">
+                <a:solidFill>
+                  <a:srgbClr val="857B6C"/>
                 </a:solidFill>
                 <a:latin typeface="Calibri" pitchFamily="34" charset="0"/>
                 <a:ea typeface="Calibri" pitchFamily="34" charset="-122"/>
                 <a:cs typeface="Calibri" pitchFamily="34" charset="-120"/>
               </a:rPr>
-              <a:t>Per multiplex (6 weeks)</a:t>
-            </a:r>
-            <a:endParaRPr lang="en-US" sz="1450" dirty="0"/>
-          </a:p>
-        </p:txBody>
-      </p:sp>
-      <p:sp>
-        <p:nvSpPr>
-          <p:cNvPr id="6" name="Text 4"/>
-          <p:cNvSpPr/>
-          <p:nvPr/>
-        </p:nvSpPr>
-        <p:spPr>
-          <a:xfrm>
-            <a:off x="3794760" y="1828800"/>
-            <a:ext cx="1783080" cy="457200"/>
+              <a:t>  ·  SCENTED MEMORIES  ·  Diwali Pop-Up Kiosk Concept</a:t>
+            </a:r>
+            <a:endParaRPr lang="en-US" sz="950" dirty="0"/>
+          </a:p>
+        </p:txBody>
+      </p:sp>
+      <p:sp>
+        <p:nvSpPr>
+          <p:cNvPr id="34" name="Text 32"/>
+          <p:cNvSpPr/>
+          <p:nvPr/>
+        </p:nvSpPr>
+        <p:spPr>
+          <a:xfrm>
+            <a:off x="10058400" y="6419088"/>
+            <a:ext cx="1691640" cy="320040"/>
           </a:xfrm>
           <a:prstGeom prst="rect">
             <a:avLst/>
@@ -11067,910 +11153,19 @@
           <a:bodyPr wrap="square" rtlCol="0" anchor="ctr"/>
           <a:lstStyle/>
           <a:p>
-            <a:pPr algn="r" indent="0" marL="0">
+            <a:pPr marL="0" indent="0" algn="r">
               <a:buNone/>
             </a:pPr>
             <a:r>
-              <a:rPr lang="en-US" sz="1500" b="1" dirty="0">
-                <a:solidFill>
-                  <a:srgbClr val="2B2621"/>
-                </a:solidFill>
-                <a:latin typeface="Cambria" pitchFamily="34" charset="0"/>
-                <a:ea typeface="Cambria" pitchFamily="34" charset="-122"/>
-                <a:cs typeface="Cambria" pitchFamily="34" charset="-120"/>
-              </a:rPr>
-              <a:t>₹3,00,000</a:t>
-            </a:r>
-            <a:endParaRPr lang="en-US" sz="1500" dirty="0"/>
-          </a:p>
-        </p:txBody>
-      </p:sp>
-      <p:sp>
-        <p:nvSpPr>
-          <p:cNvPr id="7" name="Shape 5"/>
-          <p:cNvSpPr/>
-          <p:nvPr/>
-        </p:nvSpPr>
-        <p:spPr>
-          <a:xfrm>
-            <a:off x="502920" y="2340864"/>
-            <a:ext cx="5074920" cy="0"/>
-          </a:xfrm>
-          <a:prstGeom prst="line">
-            <a:avLst/>
-          </a:prstGeom>
-          <a:noFill/>
-          <a:ln w="9525">
-            <a:solidFill>
-              <a:srgbClr val="E6DECB"/>
-            </a:solidFill>
-            <a:prstDash val="solid"/>
-          </a:ln>
-        </p:spPr>
-      </p:sp>
-      <p:sp>
-        <p:nvSpPr>
-          <p:cNvPr id="8" name="Text 6"/>
-          <p:cNvSpPr/>
-          <p:nvPr/>
-        </p:nvSpPr>
-        <p:spPr>
-          <a:xfrm>
-            <a:off x="502920" y="2450592"/>
-            <a:ext cx="3383280" cy="457200"/>
-          </a:xfrm>
-          <a:prstGeom prst="rect">
-            <a:avLst/>
-          </a:prstGeom>
-          <a:noFill/>
-          <a:ln/>
-        </p:spPr>
-        <p:txBody>
-          <a:bodyPr wrap="square" rtlCol="0" anchor="ctr"/>
-          <a:lstStyle/>
-          <a:p>
-            <a:pPr indent="0" marL="0">
-              <a:buNone/>
-            </a:pPr>
-            <a:r>
-              <a:rPr lang="en-US" sz="1450" dirty="0">
-                <a:solidFill>
-                  <a:srgbClr val="2A2621"/>
+              <a:rPr lang="en-US" sz="950" dirty="0">
+                <a:solidFill>
+                  <a:srgbClr val="857B6C"/>
                 </a:solidFill>
                 <a:latin typeface="Calibri" pitchFamily="34" charset="0"/>
                 <a:ea typeface="Calibri" pitchFamily="34" charset="-122"/>
                 <a:cs typeface="Calibri" pitchFamily="34" charset="-120"/>
               </a:rPr>
-              <a:t>× 14 multiplexes</a:t>
-            </a:r>
-            <a:endParaRPr lang="en-US" sz="1450" dirty="0"/>
-          </a:p>
-        </p:txBody>
-      </p:sp>
-      <p:sp>
-        <p:nvSpPr>
-          <p:cNvPr id="9" name="Text 7"/>
-          <p:cNvSpPr/>
-          <p:nvPr/>
-        </p:nvSpPr>
-        <p:spPr>
-          <a:xfrm>
-            <a:off x="3794760" y="2450592"/>
-            <a:ext cx="1783080" cy="457200"/>
-          </a:xfrm>
-          <a:prstGeom prst="rect">
-            <a:avLst/>
-          </a:prstGeom>
-          <a:noFill/>
-          <a:ln/>
-        </p:spPr>
-        <p:txBody>
-          <a:bodyPr wrap="square" rtlCol="0" anchor="ctr"/>
-          <a:lstStyle/>
-          <a:p>
-            <a:pPr algn="r" indent="0" marL="0">
-              <a:buNone/>
-            </a:pPr>
-            <a:r>
-              <a:rPr lang="en-US" sz="1500" b="1" dirty="0">
-                <a:solidFill>
-                  <a:srgbClr val="2B2621"/>
-                </a:solidFill>
-                <a:latin typeface="Cambria" pitchFamily="34" charset="0"/>
-                <a:ea typeface="Cambria" pitchFamily="34" charset="-122"/>
-                <a:cs typeface="Cambria" pitchFamily="34" charset="-120"/>
-              </a:rPr>
-              <a:t>₹42,00,000</a:t>
-            </a:r>
-            <a:endParaRPr lang="en-US" sz="1500" dirty="0"/>
-          </a:p>
-        </p:txBody>
-      </p:sp>
-      <p:sp>
-        <p:nvSpPr>
-          <p:cNvPr id="10" name="Shape 8"/>
-          <p:cNvSpPr/>
-          <p:nvPr/>
-        </p:nvSpPr>
-        <p:spPr>
-          <a:xfrm>
-            <a:off x="502920" y="2962656"/>
-            <a:ext cx="5074920" cy="0"/>
-          </a:xfrm>
-          <a:prstGeom prst="line">
-            <a:avLst/>
-          </a:prstGeom>
-          <a:noFill/>
-          <a:ln w="9525">
-            <a:solidFill>
-              <a:srgbClr val="E6DECB"/>
-            </a:solidFill>
-            <a:prstDash val="solid"/>
-          </a:ln>
-        </p:spPr>
-      </p:sp>
-      <p:sp>
-        <p:nvSpPr>
-          <p:cNvPr id="11" name="Text 9"/>
-          <p:cNvSpPr/>
-          <p:nvPr/>
-        </p:nvSpPr>
-        <p:spPr>
-          <a:xfrm>
-            <a:off x="502920" y="3072384"/>
-            <a:ext cx="3383280" cy="457200"/>
-          </a:xfrm>
-          <a:prstGeom prst="rect">
-            <a:avLst/>
-          </a:prstGeom>
-          <a:noFill/>
-          <a:ln/>
-        </p:spPr>
-        <p:txBody>
-          <a:bodyPr wrap="square" rtlCol="0" anchor="ctr"/>
-          <a:lstStyle/>
-          <a:p>
-            <a:pPr indent="0" marL="0">
-              <a:buNone/>
-            </a:pPr>
-            <a:r>
-              <a:rPr lang="en-US" sz="1450" dirty="0">
-                <a:solidFill>
-                  <a:srgbClr val="2A2621"/>
-                </a:solidFill>
-                <a:latin typeface="Calibri" pitchFamily="34" charset="0"/>
-                <a:ea typeface="Calibri" pitchFamily="34" charset="-122"/>
-                <a:cs typeface="Calibri" pitchFamily="34" charset="-120"/>
-              </a:rPr>
-              <a:t>GST @ 18%</a:t>
-            </a:r>
-            <a:endParaRPr lang="en-US" sz="1450" dirty="0"/>
-          </a:p>
-        </p:txBody>
-      </p:sp>
-      <p:sp>
-        <p:nvSpPr>
-          <p:cNvPr id="12" name="Text 10"/>
-          <p:cNvSpPr/>
-          <p:nvPr/>
-        </p:nvSpPr>
-        <p:spPr>
-          <a:xfrm>
-            <a:off x="3794760" y="3072384"/>
-            <a:ext cx="1783080" cy="457200"/>
-          </a:xfrm>
-          <a:prstGeom prst="rect">
-            <a:avLst/>
-          </a:prstGeom>
-          <a:noFill/>
-          <a:ln/>
-        </p:spPr>
-        <p:txBody>
-          <a:bodyPr wrap="square" rtlCol="0" anchor="ctr"/>
-          <a:lstStyle/>
-          <a:p>
-            <a:pPr algn="r" indent="0" marL="0">
-              <a:buNone/>
-            </a:pPr>
-            <a:r>
-              <a:rPr lang="en-US" sz="1500" b="1" dirty="0">
-                <a:solidFill>
-                  <a:srgbClr val="2B2621"/>
-                </a:solidFill>
-                <a:latin typeface="Cambria" pitchFamily="34" charset="0"/>
-                <a:ea typeface="Cambria" pitchFamily="34" charset="-122"/>
-                <a:cs typeface="Cambria" pitchFamily="34" charset="-120"/>
-              </a:rPr>
-              <a:t>₹7,56,000</a:t>
-            </a:r>
-            <a:endParaRPr lang="en-US" sz="1500" dirty="0"/>
-          </a:p>
-        </p:txBody>
-      </p:sp>
-      <p:sp>
-        <p:nvSpPr>
-          <p:cNvPr id="13" name="Shape 11"/>
-          <p:cNvSpPr/>
-          <p:nvPr/>
-        </p:nvSpPr>
-        <p:spPr>
-          <a:xfrm>
-            <a:off x="502920" y="3584448"/>
-            <a:ext cx="5074920" cy="0"/>
-          </a:xfrm>
-          <a:prstGeom prst="line">
-            <a:avLst/>
-          </a:prstGeom>
-          <a:noFill/>
-          <a:ln w="9525">
-            <a:solidFill>
-              <a:srgbClr val="E6DECB"/>
-            </a:solidFill>
-            <a:prstDash val="solid"/>
-          </a:ln>
-        </p:spPr>
-      </p:sp>
-      <p:sp>
-        <p:nvSpPr>
-          <p:cNvPr id="14" name="Shape 12"/>
-          <p:cNvSpPr/>
-          <p:nvPr/>
-        </p:nvSpPr>
-        <p:spPr>
-          <a:xfrm>
-            <a:off x="502920" y="3785616"/>
-            <a:ext cx="5074920" cy="777240"/>
-          </a:xfrm>
-          <a:prstGeom prst="rect">
-            <a:avLst/>
-          </a:prstGeom>
-          <a:solidFill>
-            <a:srgbClr val="2B2621"/>
-          </a:solidFill>
-          <a:ln/>
-        </p:spPr>
-      </p:sp>
-      <p:sp>
-        <p:nvSpPr>
-          <p:cNvPr id="15" name="Text 13"/>
-          <p:cNvSpPr/>
-          <p:nvPr/>
-        </p:nvSpPr>
-        <p:spPr>
-          <a:xfrm>
-            <a:off x="685800" y="3785616"/>
-            <a:ext cx="2377440" cy="777240"/>
-          </a:xfrm>
-          <a:prstGeom prst="rect">
-            <a:avLst/>
-          </a:prstGeom>
-          <a:noFill/>
-          <a:ln/>
-        </p:spPr>
-        <p:txBody>
-          <a:bodyPr wrap="square" rtlCol="0" anchor="ctr"/>
-          <a:lstStyle/>
-          <a:p>
-            <a:pPr indent="0" marL="0">
-              <a:buNone/>
-            </a:pPr>
-            <a:r>
-              <a:rPr lang="en-US" sz="1500" b="1" dirty="0">
-                <a:solidFill>
-                  <a:srgbClr val="FFFFFF"/>
-                </a:solidFill>
-                <a:latin typeface="Cambria" pitchFamily="34" charset="0"/>
-                <a:ea typeface="Cambria" pitchFamily="34" charset="-122"/>
-                <a:cs typeface="Cambria" pitchFamily="34" charset="-120"/>
-              </a:rPr>
-              <a:t>Total (incl. GST)</a:t>
-            </a:r>
-            <a:endParaRPr lang="en-US" sz="1500" dirty="0"/>
-          </a:p>
-        </p:txBody>
-      </p:sp>
-      <p:sp>
-        <p:nvSpPr>
-          <p:cNvPr id="16" name="Text 14"/>
-          <p:cNvSpPr/>
-          <p:nvPr/>
-        </p:nvSpPr>
-        <p:spPr>
-          <a:xfrm>
-            <a:off x="3063240" y="3785616"/>
-            <a:ext cx="2377440" cy="777240"/>
-          </a:xfrm>
-          <a:prstGeom prst="rect">
-            <a:avLst/>
-          </a:prstGeom>
-          <a:noFill/>
-          <a:ln/>
-        </p:spPr>
-        <p:txBody>
-          <a:bodyPr wrap="square" rtlCol="0" anchor="ctr"/>
-          <a:lstStyle/>
-          <a:p>
-            <a:pPr algn="r" indent="0" marL="0">
-              <a:buNone/>
-            </a:pPr>
-            <a:r>
-              <a:rPr lang="en-US" sz="2200" b="1" dirty="0">
-                <a:solidFill>
-                  <a:srgbClr val="C6A24E"/>
-                </a:solidFill>
-                <a:latin typeface="Cambria" pitchFamily="34" charset="0"/>
-                <a:ea typeface="Cambria" pitchFamily="34" charset="-122"/>
-                <a:cs typeface="Cambria" pitchFamily="34" charset="-120"/>
-              </a:rPr>
-              <a:t>₹49,56,000</a:t>
-            </a:r>
-            <a:endParaRPr lang="en-US" sz="2200" dirty="0"/>
-          </a:p>
-        </p:txBody>
-      </p:sp>
-      <p:sp>
-        <p:nvSpPr>
-          <p:cNvPr id="17" name="Text 15"/>
-          <p:cNvSpPr/>
-          <p:nvPr/>
-        </p:nvSpPr>
-        <p:spPr>
-          <a:xfrm>
-            <a:off x="502920" y="4745736"/>
-            <a:ext cx="5120640" cy="731520"/>
-          </a:xfrm>
-          <a:prstGeom prst="rect">
-            <a:avLst/>
-          </a:prstGeom>
-          <a:noFill/>
-          <a:ln/>
-        </p:spPr>
-        <p:txBody>
-          <a:bodyPr wrap="square" rtlCol="0" anchor="t"/>
-          <a:lstStyle/>
-          <a:p>
-            <a:pPr indent="0" marL="0">
-              <a:lnSpc>
-                <a:spcPct val="110000"/>
-              </a:lnSpc>
-              <a:buNone/>
-            </a:pPr>
-            <a:r>
-              <a:rPr lang="en-US" sz="1150" dirty="0">
-                <a:solidFill>
-                  <a:srgbClr val="857B6C"/>
-                </a:solidFill>
-                <a:latin typeface="Calibri" pitchFamily="34" charset="0"/>
-                <a:ea typeface="Calibri" pitchFamily="34" charset="-122"/>
-                <a:cs typeface="Calibri" pitchFamily="34" charset="-120"/>
-              </a:rPr>
-              <a:t>For all 14 multiplexes, 6-week window.  Kiosk build, manpower &amp; logistics as per the operations costing.</a:t>
-            </a:r>
-            <a:endParaRPr lang="en-US" sz="1150" dirty="0"/>
-          </a:p>
-        </p:txBody>
-      </p:sp>
-      <p:sp>
-        <p:nvSpPr>
-          <p:cNvPr id="18" name="Shape 16"/>
-          <p:cNvSpPr/>
-          <p:nvPr/>
-        </p:nvSpPr>
-        <p:spPr>
-          <a:xfrm>
-            <a:off x="6035040" y="0"/>
-            <a:ext cx="36576" cy="6858000"/>
-          </a:xfrm>
-          <a:prstGeom prst="rect">
-            <a:avLst/>
-          </a:prstGeom>
-          <a:solidFill>
-            <a:srgbClr val="C6A24E"/>
-          </a:solidFill>
-          <a:ln/>
-        </p:spPr>
-      </p:sp>
-      <p:sp>
-        <p:nvSpPr>
-          <p:cNvPr id="19" name="Text 17"/>
-          <p:cNvSpPr/>
-          <p:nvPr/>
-        </p:nvSpPr>
-        <p:spPr>
-          <a:xfrm>
-            <a:off x="6400800" y="685800"/>
-            <a:ext cx="4572000" cy="320040"/>
-          </a:xfrm>
-          <a:prstGeom prst="rect">
-            <a:avLst/>
-          </a:prstGeom>
-          <a:noFill/>
-          <a:ln/>
-        </p:spPr>
-        <p:txBody>
-          <a:bodyPr wrap="square" rtlCol="0" anchor="ctr"/>
-          <a:lstStyle/>
-          <a:p>
-            <a:pPr indent="0" marL="0">
-              <a:buNone/>
-            </a:pPr>
-            <a:r>
-              <a:rPr lang="en-US" sz="1300" b="1" spc="300" kern="0" dirty="0">
-                <a:solidFill>
-                  <a:srgbClr val="A9813A"/>
-                </a:solidFill>
-                <a:latin typeface="Calibri" pitchFamily="34" charset="0"/>
-                <a:ea typeface="Calibri" pitchFamily="34" charset="-122"/>
-                <a:cs typeface="Calibri" pitchFamily="34" charset="-120"/>
-              </a:rPr>
-              <a:t>TERMS</a:t>
-            </a:r>
-            <a:endParaRPr lang="en-US" sz="1300" dirty="0"/>
-          </a:p>
-        </p:txBody>
-      </p:sp>
-      <p:sp>
-        <p:nvSpPr>
-          <p:cNvPr id="20" name="Shape 18"/>
-          <p:cNvSpPr/>
-          <p:nvPr/>
-        </p:nvSpPr>
-        <p:spPr>
-          <a:xfrm>
-            <a:off x="6400800" y="1289304"/>
-            <a:ext cx="137160" cy="137160"/>
-          </a:xfrm>
-          <a:prstGeom prst="ellipse">
-            <a:avLst/>
-          </a:prstGeom>
-          <a:solidFill>
-            <a:srgbClr val="C6A24E"/>
-          </a:solidFill>
-          <a:ln/>
-        </p:spPr>
-      </p:sp>
-      <p:sp>
-        <p:nvSpPr>
-          <p:cNvPr id="21" name="Text 19"/>
-          <p:cNvSpPr/>
-          <p:nvPr/>
-        </p:nvSpPr>
-        <p:spPr>
-          <a:xfrm>
-            <a:off x="6675120" y="1188720"/>
-            <a:ext cx="4937760" cy="457200"/>
-          </a:xfrm>
-          <a:prstGeom prst="rect">
-            <a:avLst/>
-          </a:prstGeom>
-          <a:noFill/>
-          <a:ln/>
-        </p:spPr>
-        <p:txBody>
-          <a:bodyPr wrap="square" rtlCol="0" anchor="t"/>
-          <a:lstStyle/>
-          <a:p>
-            <a:pPr indent="0" marL="0">
-              <a:lnSpc>
-                <a:spcPct val="100000"/>
-              </a:lnSpc>
-              <a:buNone/>
-            </a:pPr>
-            <a:r>
-              <a:rPr lang="en-US" sz="1350" dirty="0">
-                <a:solidFill>
-                  <a:srgbClr val="2A2621"/>
-                </a:solidFill>
-                <a:latin typeface="Calibri" pitchFamily="34" charset="0"/>
-                <a:ea typeface="Calibri" pitchFamily="34" charset="-122"/>
-                <a:cs typeface="Calibri" pitchFamily="34" charset="-120"/>
-              </a:rPr>
-              <a:t>100% advance, in favour of ProMarcom</a:t>
-            </a:r>
-            <a:endParaRPr lang="en-US" sz="1350" dirty="0"/>
-          </a:p>
-        </p:txBody>
-      </p:sp>
-      <p:sp>
-        <p:nvSpPr>
-          <p:cNvPr id="22" name="Shape 20"/>
-          <p:cNvSpPr/>
-          <p:nvPr/>
-        </p:nvSpPr>
-        <p:spPr>
-          <a:xfrm>
-            <a:off x="6400800" y="1856232"/>
-            <a:ext cx="137160" cy="137160"/>
-          </a:xfrm>
-          <a:prstGeom prst="ellipse">
-            <a:avLst/>
-          </a:prstGeom>
-          <a:solidFill>
-            <a:srgbClr val="C6A24E"/>
-          </a:solidFill>
-          <a:ln/>
-        </p:spPr>
-      </p:sp>
-      <p:sp>
-        <p:nvSpPr>
-          <p:cNvPr id="23" name="Text 21"/>
-          <p:cNvSpPr/>
-          <p:nvPr/>
-        </p:nvSpPr>
-        <p:spPr>
-          <a:xfrm>
-            <a:off x="6675120" y="1755648"/>
-            <a:ext cx="4937760" cy="457200"/>
-          </a:xfrm>
-          <a:prstGeom prst="rect">
-            <a:avLst/>
-          </a:prstGeom>
-          <a:noFill/>
-          <a:ln/>
-        </p:spPr>
-        <p:txBody>
-          <a:bodyPr wrap="square" rtlCol="0" anchor="t"/>
-          <a:lstStyle/>
-          <a:p>
-            <a:pPr indent="0" marL="0">
-              <a:lnSpc>
-                <a:spcPct val="100000"/>
-              </a:lnSpc>
-              <a:buNone/>
-            </a:pPr>
-            <a:r>
-              <a:rPr lang="en-US" sz="1350" dirty="0">
-                <a:solidFill>
-                  <a:srgbClr val="2A2621"/>
-                </a:solidFill>
-                <a:latin typeface="Calibri" pitchFamily="34" charset="0"/>
-                <a:ea typeface="Calibri" pitchFamily="34" charset="-122"/>
-                <a:cs typeface="Calibri" pitchFamily="34" charset="-120"/>
-              </a:rPr>
-              <a:t>18% GST extra on the above rates</a:t>
-            </a:r>
-            <a:endParaRPr lang="en-US" sz="1350" dirty="0"/>
-          </a:p>
-        </p:txBody>
-      </p:sp>
-      <p:sp>
-        <p:nvSpPr>
-          <p:cNvPr id="24" name="Shape 22"/>
-          <p:cNvSpPr/>
-          <p:nvPr/>
-        </p:nvSpPr>
-        <p:spPr>
-          <a:xfrm>
-            <a:off x="6400800" y="2423160"/>
-            <a:ext cx="137160" cy="137160"/>
-          </a:xfrm>
-          <a:prstGeom prst="ellipse">
-            <a:avLst/>
-          </a:prstGeom>
-          <a:solidFill>
-            <a:srgbClr val="C6A24E"/>
-          </a:solidFill>
-          <a:ln/>
-        </p:spPr>
-      </p:sp>
-      <p:sp>
-        <p:nvSpPr>
-          <p:cNvPr id="25" name="Text 23"/>
-          <p:cNvSpPr/>
-          <p:nvPr/>
-        </p:nvSpPr>
-        <p:spPr>
-          <a:xfrm>
-            <a:off x="6675120" y="2322576"/>
-            <a:ext cx="4937760" cy="457200"/>
-          </a:xfrm>
-          <a:prstGeom prst="rect">
-            <a:avLst/>
-          </a:prstGeom>
-          <a:noFill/>
-          <a:ln/>
-        </p:spPr>
-        <p:txBody>
-          <a:bodyPr wrap="square" rtlCol="0" anchor="t"/>
-          <a:lstStyle/>
-          <a:p>
-            <a:pPr indent="0" marL="0">
-              <a:lnSpc>
-                <a:spcPct val="100000"/>
-              </a:lnSpc>
-              <a:buNone/>
-            </a:pPr>
-            <a:r>
-              <a:rPr lang="en-US" sz="1350" dirty="0">
-                <a:solidFill>
-                  <a:srgbClr val="2A2621"/>
-                </a:solidFill>
-                <a:latin typeface="Calibri" pitchFamily="34" charset="0"/>
-                <a:ea typeface="Calibri" pitchFamily="34" charset="-122"/>
-                <a:cs typeface="Calibri" pitchFamily="34" charset="-120"/>
-              </a:rPr>
-              <a:t>Availability to be confirmed before booking</a:t>
-            </a:r>
-            <a:endParaRPr lang="en-US" sz="1350" dirty="0"/>
-          </a:p>
-        </p:txBody>
-      </p:sp>
-      <p:sp>
-        <p:nvSpPr>
-          <p:cNvPr id="26" name="Shape 24"/>
-          <p:cNvSpPr/>
-          <p:nvPr/>
-        </p:nvSpPr>
-        <p:spPr>
-          <a:xfrm>
-            <a:off x="6400800" y="2990088"/>
-            <a:ext cx="137160" cy="137160"/>
-          </a:xfrm>
-          <a:prstGeom prst="ellipse">
-            <a:avLst/>
-          </a:prstGeom>
-          <a:solidFill>
-            <a:srgbClr val="C6A24E"/>
-          </a:solidFill>
-          <a:ln/>
-        </p:spPr>
-      </p:sp>
-      <p:sp>
-        <p:nvSpPr>
-          <p:cNvPr id="27" name="Text 25"/>
-          <p:cNvSpPr/>
-          <p:nvPr/>
-        </p:nvSpPr>
-        <p:spPr>
-          <a:xfrm>
-            <a:off x="6675120" y="2889504"/>
-            <a:ext cx="4937760" cy="457200"/>
-          </a:xfrm>
-          <a:prstGeom prst="rect">
-            <a:avLst/>
-          </a:prstGeom>
-          <a:noFill/>
-          <a:ln/>
-        </p:spPr>
-        <p:txBody>
-          <a:bodyPr wrap="square" rtlCol="0" anchor="t"/>
-          <a:lstStyle/>
-          <a:p>
-            <a:pPr indent="0" marL="0">
-              <a:lnSpc>
-                <a:spcPct val="100000"/>
-              </a:lnSpc>
-              <a:buNone/>
-            </a:pPr>
-            <a:r>
-              <a:rPr lang="en-US" sz="1350" dirty="0">
-                <a:solidFill>
-                  <a:srgbClr val="2A2621"/>
-                </a:solidFill>
-                <a:latin typeface="Calibri" pitchFamily="34" charset="0"/>
-                <a:ea typeface="Calibri" pitchFamily="34" charset="-122"/>
-                <a:cs typeface="Calibri" pitchFamily="34" charset="-120"/>
-              </a:rPr>
-              <a:t>Site once booked cannot be postponed or cancelled</a:t>
-            </a:r>
-            <a:endParaRPr lang="en-US" sz="1350" dirty="0"/>
-          </a:p>
-        </p:txBody>
-      </p:sp>
-      <p:sp>
-        <p:nvSpPr>
-          <p:cNvPr id="28" name="Shape 26"/>
-          <p:cNvSpPr/>
-          <p:nvPr/>
-        </p:nvSpPr>
-        <p:spPr>
-          <a:xfrm>
-            <a:off x="6400800" y="3557016"/>
-            <a:ext cx="137160" cy="137160"/>
-          </a:xfrm>
-          <a:prstGeom prst="ellipse">
-            <a:avLst/>
-          </a:prstGeom>
-          <a:solidFill>
-            <a:srgbClr val="C6A24E"/>
-          </a:solidFill>
-          <a:ln/>
-        </p:spPr>
-      </p:sp>
-      <p:sp>
-        <p:nvSpPr>
-          <p:cNvPr id="29" name="Text 27"/>
-          <p:cNvSpPr/>
-          <p:nvPr/>
-        </p:nvSpPr>
-        <p:spPr>
-          <a:xfrm>
-            <a:off x="6675120" y="3456432"/>
-            <a:ext cx="4937760" cy="457200"/>
-          </a:xfrm>
-          <a:prstGeom prst="rect">
-            <a:avLst/>
-          </a:prstGeom>
-          <a:noFill/>
-          <a:ln/>
-        </p:spPr>
-        <p:txBody>
-          <a:bodyPr wrap="square" rtlCol="0" anchor="t"/>
-          <a:lstStyle/>
-          <a:p>
-            <a:pPr indent="0" marL="0">
-              <a:lnSpc>
-                <a:spcPct val="100000"/>
-              </a:lnSpc>
-              <a:buNone/>
-            </a:pPr>
-            <a:r>
-              <a:rPr lang="en-US" sz="1350" dirty="0">
-                <a:solidFill>
-                  <a:srgbClr val="2A2621"/>
-                </a:solidFill>
-                <a:latin typeface="Calibri" pitchFamily="34" charset="0"/>
-                <a:ea typeface="Calibri" pitchFamily="34" charset="-122"/>
-                <a:cs typeface="Calibri" pitchFamily="34" charset="-120"/>
-              </a:rPr>
-              <a:t>Billing from date of booking / availability</a:t>
-            </a:r>
-            <a:endParaRPr lang="en-US" sz="1350" dirty="0"/>
-          </a:p>
-        </p:txBody>
-      </p:sp>
-      <p:sp>
-        <p:nvSpPr>
-          <p:cNvPr id="30" name="Shape 28"/>
-          <p:cNvSpPr/>
-          <p:nvPr/>
-        </p:nvSpPr>
-        <p:spPr>
-          <a:xfrm>
-            <a:off x="6400800" y="4123944"/>
-            <a:ext cx="137160" cy="137160"/>
-          </a:xfrm>
-          <a:prstGeom prst="ellipse">
-            <a:avLst/>
-          </a:prstGeom>
-          <a:solidFill>
-            <a:srgbClr val="C6A24E"/>
-          </a:solidFill>
-          <a:ln/>
-        </p:spPr>
-      </p:sp>
-      <p:sp>
-        <p:nvSpPr>
-          <p:cNvPr id="31" name="Text 29"/>
-          <p:cNvSpPr/>
-          <p:nvPr/>
-        </p:nvSpPr>
-        <p:spPr>
-          <a:xfrm>
-            <a:off x="6675120" y="4023360"/>
-            <a:ext cx="4937760" cy="457200"/>
-          </a:xfrm>
-          <a:prstGeom prst="rect">
-            <a:avLst/>
-          </a:prstGeom>
-          <a:noFill/>
-          <a:ln/>
-        </p:spPr>
-        <p:txBody>
-          <a:bodyPr wrap="square" rtlCol="0" anchor="t"/>
-          <a:lstStyle/>
-          <a:p>
-            <a:pPr indent="0" marL="0">
-              <a:lnSpc>
-                <a:spcPct val="100000"/>
-              </a:lnSpc>
-              <a:buNone/>
-            </a:pPr>
-            <a:r>
-              <a:rPr lang="en-US" sz="1350" dirty="0">
-                <a:solidFill>
-                  <a:srgbClr val="2A2621"/>
-                </a:solidFill>
-                <a:latin typeface="Calibri" pitchFamily="34" charset="0"/>
-                <a:ea typeface="Calibri" pitchFamily="34" charset="-122"/>
-                <a:cs typeface="Calibri" pitchFamily="34" charset="-120"/>
-              </a:rPr>
-              <a:t>Rates subject to change without prior notice</a:t>
-            </a:r>
-            <a:endParaRPr lang="en-US" sz="1350" dirty="0"/>
-          </a:p>
-        </p:txBody>
-      </p:sp>
-      <p:sp>
-        <p:nvSpPr>
-          <p:cNvPr id="32" name="Text 30"/>
-          <p:cNvSpPr/>
-          <p:nvPr/>
-        </p:nvSpPr>
-        <p:spPr>
-          <a:xfrm>
-            <a:off x="6400800" y="4818888"/>
-            <a:ext cx="5212080" cy="640080"/>
-          </a:xfrm>
-          <a:prstGeom prst="rect">
-            <a:avLst/>
-          </a:prstGeom>
-          <a:noFill/>
-          <a:ln/>
-        </p:spPr>
-        <p:txBody>
-          <a:bodyPr wrap="square" rtlCol="0" anchor="t"/>
-          <a:lstStyle/>
-          <a:p>
-            <a:pPr indent="0" marL="0">
-              <a:lnSpc>
-                <a:spcPct val="110000"/>
-              </a:lnSpc>
-              <a:buNone/>
-            </a:pPr>
-            <a:r>
-              <a:rPr lang="en-US" sz="1100" i="1" dirty="0">
-                <a:solidFill>
-                  <a:srgbClr val="857B6C"/>
-                </a:solidFill>
-                <a:latin typeface="Calibri" pitchFamily="34" charset="0"/>
-                <a:ea typeface="Calibri" pitchFamily="34" charset="-122"/>
-                <a:cs typeface="Calibri" pitchFamily="34" charset="-120"/>
-              </a:rPr>
-              <a:t>Cinema-space commercials per the multiplex rate card; managed end-to-end by ProMarcom.</a:t>
-            </a:r>
-            <a:endParaRPr lang="en-US" sz="1100" dirty="0"/>
-          </a:p>
-        </p:txBody>
-      </p:sp>
-      <p:sp>
-        <p:nvSpPr>
-          <p:cNvPr id="33" name="Text 31"/>
-          <p:cNvSpPr/>
-          <p:nvPr/>
-        </p:nvSpPr>
-        <p:spPr>
-          <a:xfrm>
-            <a:off x="457200" y="6419088"/>
-            <a:ext cx="7315200" cy="320040"/>
-          </a:xfrm>
-          <a:prstGeom prst="rect">
-            <a:avLst/>
-          </a:prstGeom>
-          <a:noFill/>
-          <a:ln/>
-        </p:spPr>
-        <p:txBody>
-          <a:bodyPr wrap="square" rtlCol="0" anchor="ctr"/>
-          <a:lstStyle/>
-          <a:p>
-            <a:pPr algn="l" indent="0" marL="0">
-              <a:buNone/>
-            </a:pPr>
-            <a:r>
-              <a:rPr lang="en-US" sz="950" b="1" spc="100" kern="0" dirty="0">
-                <a:solidFill>
-                  <a:srgbClr val="C6A24E"/>
-                </a:solidFill>
-                <a:latin typeface="Cambria" pitchFamily="34" charset="0"/>
-                <a:ea typeface="Cambria" pitchFamily="34" charset="-122"/>
-                <a:cs typeface="Cambria" pitchFamily="34" charset="-120"/>
-              </a:rPr>
-              <a:t>DOFT</a:t>
-            </a:r>
-            <a:pPr algn="l" indent="0" marL="0">
-              <a:buNone/>
-            </a:pPr>
-            <a:r>
-              <a:rPr lang="en-US" sz="950" spc="100" kern="0" dirty="0">
-                <a:solidFill>
-                  <a:srgbClr val="857B6C"/>
-                </a:solidFill>
-                <a:latin typeface="Calibri" pitchFamily="34" charset="0"/>
-                <a:ea typeface="Calibri" pitchFamily="34" charset="-122"/>
-                <a:cs typeface="Calibri" pitchFamily="34" charset="-120"/>
-              </a:rPr>
-              <a:t>  ·  SCENTED MEMORIES  ·  Diwali Pop-Up Kiosk Concept</a:t>
+              <a:t>ProMarcom</a:t>
             </a:r>
             <a:endParaRPr lang="en-US" sz="950" dirty="0"/>
           </a:p>
@@ -11978,52 +11173,13 @@
       </p:sp>
       <p:sp>
         <p:nvSpPr>
-          <p:cNvPr id="34" name="Text 32"/>
-          <p:cNvSpPr/>
-          <p:nvPr/>
-        </p:nvSpPr>
-        <p:spPr>
-          <a:xfrm>
-            <a:off x="10058400" y="6419088"/>
-            <a:ext cx="1691640" cy="320040"/>
-          </a:xfrm>
-          <a:prstGeom prst="rect">
-            <a:avLst/>
-          </a:prstGeom>
-          <a:noFill/>
-          <a:ln/>
-        </p:spPr>
-        <p:txBody>
-          <a:bodyPr wrap="square" rtlCol="0" anchor="ctr"/>
-          <a:lstStyle/>
-          <a:p>
-            <a:pPr algn="r" indent="0" marL="0">
-              <a:buNone/>
-            </a:pPr>
-            <a:r>
-              <a:rPr lang="en-US" sz="950" dirty="0">
-                <a:solidFill>
-                  <a:srgbClr val="857B6C"/>
-                </a:solidFill>
-                <a:latin typeface="Calibri" pitchFamily="34" charset="0"/>
-                <a:ea typeface="Calibri" pitchFamily="34" charset="-122"/>
-                <a:cs typeface="Calibri" pitchFamily="34" charset="-120"/>
-              </a:rPr>
-              <a:t>ProMarcom</a:t>
-            </a:r>
-            <a:endParaRPr lang="en-US" sz="950" dirty="0"/>
-          </a:p>
-        </p:txBody>
-      </p:sp>
-      <p:sp>
-        <p:nvSpPr>
           <p:cNvPr id="35" name="Shape 33"/>
           <p:cNvSpPr/>
           <p:nvPr/>
         </p:nvSpPr>
         <p:spPr>
           <a:xfrm>
-            <a:off x="11475720" y="6364224"/>
+            <a:off x="11512296" y="6377940"/>
             <a:ext cx="402336" cy="402336"/>
           </a:xfrm>
           <a:prstGeom prst="ellipse">
@@ -12039,6 +11195,13 @@
             <a:prstDash val="solid"/>
           </a:ln>
         </p:spPr>
+        <p:txBody>
+          <a:bodyPr/>
+          <a:lstStyle/>
+          <a:p>
+            <a:endParaRPr lang="en-US"/>
+          </a:p>
+        </p:txBody>
       </p:sp>
       <p:sp>
         <p:nvSpPr>
@@ -12061,7 +11224,7 @@
           <a:bodyPr wrap="square" rtlCol="0" anchor="ctr"/>
           <a:lstStyle/>
           <a:p>
-            <a:pPr algn="ctr" indent="0" marL="0">
+            <a:pPr marL="0" indent="0" algn="ctr">
               <a:buNone/>
             </a:pPr>
             <a:r>
@@ -12079,6 +11242,101 @@
           </a:p>
         </p:txBody>
       </p:sp>
+      <p:sp>
+        <p:nvSpPr>
+          <p:cNvPr id="37" name="TextBox 36">
+            <a:extLst>
+              <a:ext uri="{FF2B5EF4-FFF2-40B4-BE49-F238E27FC236}">
+                <a16:creationId xmlns:a16="http://schemas.microsoft.com/office/drawing/2014/main" id="{011CCC03-2D74-CCC5-81BE-9B26C0DBCCD6}"/>
+              </a:ext>
+            </a:extLst>
+          </p:cNvPr>
+          <p:cNvSpPr txBox="1"/>
+          <p:nvPr/>
+        </p:nvSpPr>
+        <p:spPr>
+          <a:xfrm>
+            <a:off x="-187287" y="-33051"/>
+            <a:ext cx="184731" cy="369332"/>
+          </a:xfrm>
+          <a:prstGeom prst="rect">
+            <a:avLst/>
+          </a:prstGeom>
+          <a:noFill/>
+        </p:spPr>
+        <p:txBody>
+          <a:bodyPr wrap="none" rtlCol="0">
+            <a:spAutoFit/>
+          </a:bodyPr>
+          <a:lstStyle/>
+          <a:p>
+            <a:endParaRPr lang="en-US" dirty="0"/>
+          </a:p>
+        </p:txBody>
+      </p:sp>
+      <p:graphicFrame>
+        <p:nvGraphicFramePr>
+          <p:cNvPr id="42" name="Object 41">
+            <a:extLst>
+              <a:ext uri="{FF2B5EF4-FFF2-40B4-BE49-F238E27FC236}">
+                <a16:creationId xmlns:a16="http://schemas.microsoft.com/office/drawing/2014/main" id="{99A0BEB5-D690-9BE7-222C-0D4E61CB33AC}"/>
+              </a:ext>
+            </a:extLst>
+          </p:cNvPr>
+          <p:cNvGraphicFramePr>
+            <a:graphicFrameLocks noChangeAspect="1"/>
+          </p:cNvGraphicFramePr>
+          <p:nvPr>
+            <p:extLst>
+              <p:ext uri="{D42A27DB-BD31-4B8C-83A1-F6EECF244321}">
+                <p14:modId xmlns:p14="http://schemas.microsoft.com/office/powerpoint/2010/main" val="545006565"/>
+              </p:ext>
+            </p:extLst>
+          </p:nvPr>
+        </p:nvGraphicFramePr>
+        <p:xfrm>
+          <a:off x="548640" y="1554480"/>
+          <a:ext cx="9283700" cy="2667000"/>
+        </p:xfrm>
+        <a:graphic>
+          <a:graphicData uri="http://schemas.openxmlformats.org/presentationml/2006/ole">
+            <mc:AlternateContent xmlns:mc="http://schemas.openxmlformats.org/markup-compatibility/2006">
+              <mc:Choice xmlns:v="urn:schemas-microsoft-com:vml" Requires="v">
+                <p:oleObj name="Worksheet" r:id="rId3" imgW="9283700" imgH="2667000" progId="Excel.Sheet.12">
+                  <p:embed/>
+                </p:oleObj>
+              </mc:Choice>
+              <mc:Fallback>
+                <p:oleObj name="Worksheet" r:id="rId3" imgW="9283700" imgH="2667000" progId="Excel.Sheet.12">
+                  <p:embed/>
+                  <p:pic>
+                    <p:nvPicPr>
+                      <p:cNvPr id="0" name=""/>
+                      <p:cNvPicPr/>
+                      <p:nvPr/>
+                    </p:nvPicPr>
+                    <p:blipFill>
+                      <a:blip r:embed="rId4"/>
+                      <a:stretch>
+                        <a:fillRect/>
+                      </a:stretch>
+                    </p:blipFill>
+                    <p:spPr>
+                      <a:xfrm>
+                        <a:off x="548640" y="1554480"/>
+                        <a:ext cx="9283700" cy="2667000"/>
+                      </a:xfrm>
+                      <a:prstGeom prst="rect">
+                        <a:avLst/>
+                      </a:prstGeom>
+                    </p:spPr>
+                  </p:pic>
+                </p:oleObj>
+              </mc:Fallback>
+            </mc:AlternateContent>
+          </a:graphicData>
+        </a:graphic>
+      </p:graphicFrame>
     </p:spTree>
   </p:cSld>
   <p:clrMapOvr>
@@ -12095,6 +11353,7 @@
         <a:solidFill>
           <a:srgbClr val="EFEAE0"/>
         </a:solidFill>
+        <a:effectLst/>
       </p:bgPr>
     </p:bg>
     <p:spTree>
@@ -12132,11 +11391,11 @@
           <a:bodyPr wrap="square" rtlCol="0" anchor="ctr"/>
           <a:lstStyle/>
           <a:p>
-            <a:pPr algn="l" indent="0" marL="0">
+            <a:pPr marL="0" indent="0" algn="l">
               <a:buNone/>
             </a:pPr>
             <a:r>
-              <a:rPr lang="en-US" sz="1250" b="1" spc="300" kern="0" dirty="0">
+              <a:rPr lang="en-US" sz="1250" b="1" kern="0" spc="300" dirty="0">
                 <a:solidFill>
                   <a:srgbClr val="A9813A"/>
                 </a:solidFill>
@@ -12171,7 +11430,7 @@
           <a:bodyPr wrap="square" rtlCol="0" anchor="ctr"/>
           <a:lstStyle/>
           <a:p>
-            <a:pPr indent="0" marL="0">
+            <a:pPr marL="0" indent="0">
               <a:buNone/>
             </a:pPr>
             <a:r>
@@ -12213,6 +11472,13 @@
             <a:prstDash val="solid"/>
           </a:ln>
         </p:spPr>
+        <p:txBody>
+          <a:bodyPr/>
+          <a:lstStyle/>
+          <a:p>
+            <a:endParaRPr lang="en-US"/>
+          </a:p>
+        </p:txBody>
       </p:sp>
       <p:sp>
         <p:nvSpPr>
@@ -12233,6 +11499,13 @@
           </a:solidFill>
           <a:ln/>
         </p:spPr>
+        <p:txBody>
+          <a:bodyPr/>
+          <a:lstStyle/>
+          <a:p>
+            <a:endParaRPr lang="en-US"/>
+          </a:p>
+        </p:txBody>
       </p:sp>
       <p:sp>
         <p:nvSpPr>
@@ -12255,7 +11528,7 @@
           <a:bodyPr wrap="square" rtlCol="0" anchor="ctr"/>
           <a:lstStyle/>
           <a:p>
-            <a:pPr algn="ctr" indent="0" marL="0">
+            <a:pPr marL="0" indent="0" algn="ctr">
               <a:buNone/>
             </a:pPr>
             <a:r>
@@ -12294,7 +11567,7 @@
           <a:bodyPr wrap="square" rtlCol="0" anchor="ctr"/>
           <a:lstStyle/>
           <a:p>
-            <a:pPr indent="0" marL="0">
+            <a:pPr marL="0" indent="0">
               <a:buNone/>
             </a:pPr>
             <a:r>
@@ -12333,7 +11606,7 @@
           <a:bodyPr wrap="square" rtlCol="0" anchor="t"/>
           <a:lstStyle/>
           <a:p>
-            <a:pPr indent="0" marL="0">
+            <a:pPr marL="0" indent="0">
               <a:lnSpc>
                 <a:spcPct val="100000"/>
               </a:lnSpc>
@@ -12378,6 +11651,13 @@
             <a:prstDash val="solid"/>
           </a:ln>
         </p:spPr>
+        <p:txBody>
+          <a:bodyPr/>
+          <a:lstStyle/>
+          <a:p>
+            <a:endParaRPr lang="en-US"/>
+          </a:p>
+        </p:txBody>
       </p:sp>
       <p:sp>
         <p:nvSpPr>
@@ -12398,6 +11678,13 @@
           </a:solidFill>
           <a:ln/>
         </p:spPr>
+        <p:txBody>
+          <a:bodyPr/>
+          <a:lstStyle/>
+          <a:p>
+            <a:endParaRPr lang="en-US"/>
+          </a:p>
+        </p:txBody>
       </p:sp>
       <p:sp>
         <p:nvSpPr>
@@ -12420,7 +11707,7 @@
           <a:bodyPr wrap="square" rtlCol="0" anchor="ctr"/>
           <a:lstStyle/>
           <a:p>
-            <a:pPr algn="ctr" indent="0" marL="0">
+            <a:pPr marL="0" indent="0" algn="ctr">
               <a:buNone/>
             </a:pPr>
             <a:r>
@@ -12459,7 +11746,7 @@
           <a:bodyPr wrap="square" rtlCol="0" anchor="ctr"/>
           <a:lstStyle/>
           <a:p>
-            <a:pPr indent="0" marL="0">
+            <a:pPr marL="0" indent="0">
               <a:buNone/>
             </a:pPr>
             <a:r>
@@ -12498,7 +11785,7 @@
           <a:bodyPr wrap="square" rtlCol="0" anchor="t"/>
           <a:lstStyle/>
           <a:p>
-            <a:pPr indent="0" marL="0">
+            <a:pPr marL="0" indent="0">
               <a:lnSpc>
                 <a:spcPct val="100000"/>
               </a:lnSpc>
@@ -12543,6 +11830,13 @@
             <a:prstDash val="solid"/>
           </a:ln>
         </p:spPr>
+        <p:txBody>
+          <a:bodyPr/>
+          <a:lstStyle/>
+          <a:p>
+            <a:endParaRPr lang="en-US"/>
+          </a:p>
+        </p:txBody>
       </p:sp>
       <p:sp>
         <p:nvSpPr>
@@ -12563,6 +11857,13 @@
           </a:solidFill>
           <a:ln/>
         </p:spPr>
+        <p:txBody>
+          <a:bodyPr/>
+          <a:lstStyle/>
+          <a:p>
+            <a:endParaRPr lang="en-US"/>
+          </a:p>
+        </p:txBody>
       </p:sp>
       <p:sp>
         <p:nvSpPr>
@@ -12585,7 +11886,7 @@
           <a:bodyPr wrap="square" rtlCol="0" anchor="ctr"/>
           <a:lstStyle/>
           <a:p>
-            <a:pPr algn="ctr" indent="0" marL="0">
+            <a:pPr marL="0" indent="0" algn="ctr">
               <a:buNone/>
             </a:pPr>
             <a:r>
@@ -12624,7 +11925,7 @@
           <a:bodyPr wrap="square" rtlCol="0" anchor="ctr"/>
           <a:lstStyle/>
           <a:p>
-            <a:pPr indent="0" marL="0">
+            <a:pPr marL="0" indent="0">
               <a:buNone/>
             </a:pPr>
             <a:r>
@@ -12663,7 +11964,7 @@
           <a:bodyPr wrap="square" rtlCol="0" anchor="t"/>
           <a:lstStyle/>
           <a:p>
-            <a:pPr indent="0" marL="0">
+            <a:pPr marL="0" indent="0">
               <a:lnSpc>
                 <a:spcPct val="100000"/>
               </a:lnSpc>
@@ -12708,6 +12009,13 @@
             <a:prstDash val="solid"/>
           </a:ln>
         </p:spPr>
+        <p:txBody>
+          <a:bodyPr/>
+          <a:lstStyle/>
+          <a:p>
+            <a:endParaRPr lang="en-US"/>
+          </a:p>
+        </p:txBody>
       </p:sp>
       <p:sp>
         <p:nvSpPr>
@@ -12728,6 +12036,13 @@
           </a:solidFill>
           <a:ln/>
         </p:spPr>
+        <p:txBody>
+          <a:bodyPr/>
+          <a:lstStyle/>
+          <a:p>
+            <a:endParaRPr lang="en-US"/>
+          </a:p>
+        </p:txBody>
       </p:sp>
       <p:sp>
         <p:nvSpPr>
@@ -12750,7 +12065,7 @@
           <a:bodyPr wrap="square" rtlCol="0" anchor="ctr"/>
           <a:lstStyle/>
           <a:p>
-            <a:pPr algn="ctr" indent="0" marL="0">
+            <a:pPr marL="0" indent="0" algn="ctr">
               <a:buNone/>
             </a:pPr>
             <a:r>
@@ -12789,7 +12104,7 @@
           <a:bodyPr wrap="square" rtlCol="0" anchor="ctr"/>
           <a:lstStyle/>
           <a:p>
-            <a:pPr indent="0" marL="0">
+            <a:pPr marL="0" indent="0">
               <a:buNone/>
             </a:pPr>
             <a:r>
@@ -12828,7 +12143,7 @@
           <a:bodyPr wrap="square" rtlCol="0" anchor="t"/>
           <a:lstStyle/>
           <a:p>
-            <a:pPr indent="0" marL="0">
+            <a:pPr marL="0" indent="0">
               <a:lnSpc>
                 <a:spcPct val="100000"/>
               </a:lnSpc>
@@ -12873,6 +12188,13 @@
             <a:prstDash val="solid"/>
           </a:ln>
         </p:spPr>
+        <p:txBody>
+          <a:bodyPr/>
+          <a:lstStyle/>
+          <a:p>
+            <a:endParaRPr lang="en-US"/>
+          </a:p>
+        </p:txBody>
       </p:sp>
       <p:sp>
         <p:nvSpPr>
@@ -12893,6 +12215,13 @@
           </a:solidFill>
           <a:ln/>
         </p:spPr>
+        <p:txBody>
+          <a:bodyPr/>
+          <a:lstStyle/>
+          <a:p>
+            <a:endParaRPr lang="en-US"/>
+          </a:p>
+        </p:txBody>
       </p:sp>
       <p:sp>
         <p:nvSpPr>
@@ -12915,7 +12244,7 @@
           <a:bodyPr wrap="square" rtlCol="0" anchor="ctr"/>
           <a:lstStyle/>
           <a:p>
-            <a:pPr algn="ctr" indent="0" marL="0">
+            <a:pPr marL="0" indent="0" algn="ctr">
               <a:buNone/>
             </a:pPr>
             <a:r>
@@ -12954,7 +12283,7 @@
           <a:bodyPr wrap="square" rtlCol="0" anchor="ctr"/>
           <a:lstStyle/>
           <a:p>
-            <a:pPr indent="0" marL="0">
+            <a:pPr marL="0" indent="0">
               <a:buNone/>
             </a:pPr>
             <a:r>
@@ -12993,7 +12322,7 @@
           <a:bodyPr wrap="square" rtlCol="0" anchor="t"/>
           <a:lstStyle/>
           <a:p>
-            <a:pPr indent="0" marL="0">
+            <a:pPr marL="0" indent="0">
               <a:lnSpc>
                 <a:spcPct val="100000"/>
               </a:lnSpc>
@@ -13038,6 +12367,13 @@
             <a:prstDash val="solid"/>
           </a:ln>
         </p:spPr>
+        <p:txBody>
+          <a:bodyPr/>
+          <a:lstStyle/>
+          <a:p>
+            <a:endParaRPr lang="en-US"/>
+          </a:p>
+        </p:txBody>
       </p:sp>
       <p:sp>
         <p:nvSpPr>
@@ -13058,6 +12394,13 @@
           </a:solidFill>
           <a:ln/>
         </p:spPr>
+        <p:txBody>
+          <a:bodyPr/>
+          <a:lstStyle/>
+          <a:p>
+            <a:endParaRPr lang="en-US"/>
+          </a:p>
+        </p:txBody>
       </p:sp>
       <p:sp>
         <p:nvSpPr>
@@ -13080,7 +12423,7 @@
           <a:bodyPr wrap="square" rtlCol="0" anchor="ctr"/>
           <a:lstStyle/>
           <a:p>
-            <a:pPr algn="ctr" indent="0" marL="0">
+            <a:pPr marL="0" indent="0" algn="ctr">
               <a:buNone/>
             </a:pPr>
             <a:r>
@@ -13119,7 +12462,7 @@
           <a:bodyPr wrap="square" rtlCol="0" anchor="ctr"/>
           <a:lstStyle/>
           <a:p>
-            <a:pPr indent="0" marL="0">
+            <a:pPr marL="0" indent="0">
               <a:buNone/>
             </a:pPr>
             <a:r>
@@ -13158,7 +12501,7 @@
           <a:bodyPr wrap="square" rtlCol="0" anchor="t"/>
           <a:lstStyle/>
           <a:p>
-            <a:pPr indent="0" marL="0">
+            <a:pPr marL="0" indent="0">
               <a:lnSpc>
                 <a:spcPct val="100000"/>
               </a:lnSpc>
@@ -13200,11 +12543,11 @@
           <a:bodyPr wrap="square" rtlCol="0" anchor="ctr"/>
           <a:lstStyle/>
           <a:p>
-            <a:pPr algn="l" indent="0" marL="0">
+            <a:pPr marL="0" indent="0" algn="l">
               <a:buNone/>
             </a:pPr>
             <a:r>
-              <a:rPr lang="en-US" sz="950" b="1" spc="100" kern="0" dirty="0">
+              <a:rPr lang="en-US" sz="950" b="1" kern="0" spc="100" dirty="0">
                 <a:solidFill>
                   <a:srgbClr val="C6A24E"/>
                 </a:solidFill>
@@ -13214,11 +12557,8 @@
               </a:rPr>
               <a:t>DOFT</a:t>
             </a:r>
-            <a:pPr algn="l" indent="0" marL="0">
-              <a:buNone/>
-            </a:pPr>
-            <a:r>
-              <a:rPr lang="en-US" sz="950" spc="100" kern="0" dirty="0">
+            <a:r>
+              <a:rPr lang="en-US" sz="950" kern="0" spc="100" dirty="0">
                 <a:solidFill>
                   <a:srgbClr val="857B6C"/>
                 </a:solidFill>
@@ -13253,7 +12593,7 @@
           <a:bodyPr wrap="square" rtlCol="0" anchor="ctr"/>
           <a:lstStyle/>
           <a:p>
-            <a:pPr algn="r" indent="0" marL="0">
+            <a:pPr marL="0" indent="0" algn="r">
               <a:buNone/>
             </a:pPr>
             <a:r>
@@ -13295,6 +12635,13 @@
             <a:prstDash val="solid"/>
           </a:ln>
         </p:spPr>
+        <p:txBody>
+          <a:bodyPr/>
+          <a:lstStyle/>
+          <a:p>
+            <a:endParaRPr lang="en-US"/>
+          </a:p>
+        </p:txBody>
       </p:sp>
       <p:sp>
         <p:nvSpPr>
@@ -13317,7 +12664,7 @@
           <a:bodyPr wrap="square" rtlCol="0" anchor="ctr"/>
           <a:lstStyle/>
           <a:p>
-            <a:pPr algn="ctr" indent="0" marL="0">
+            <a:pPr marL="0" indent="0" algn="ctr">
               <a:buNone/>
             </a:pPr>
             <a:r>
@@ -13351,6 +12698,7 @@
         <a:solidFill>
           <a:srgbClr val="1E1B17"/>
         </a:solidFill>
+        <a:effectLst/>
       </p:bgPr>
     </p:bg>
     <p:spTree>
@@ -13369,15 +12717,15 @@
       </p:grpSpPr>
       <p:pic>
         <p:nvPicPr>
-          <p:cNvPr id="2" name="Image 0" descr="ref_imgs/P1_s2_2.jpg">    </p:cNvPr>
+          <p:cNvPr id="2" name="Image 0" descr="ref_imgs/P1_s2_2.jpg"/>
           <p:cNvPicPr>
             <a:picLocks noChangeAspect="1"/>
           </p:cNvPicPr>
           <p:nvPr/>
         </p:nvPicPr>
         <p:blipFill>
-          <a:blip r:embed="rId1"/>
-          <a:srcRect l="0" r="0" t="0" b="0"/>
+          <a:blip r:embed="rId3"/>
+          <a:srcRect/>
           <a:stretch/>
         </p:blipFill>
         <p:spPr>
@@ -13411,6 +12759,13 @@
           </a:solidFill>
           <a:ln/>
         </p:spPr>
+        <p:txBody>
+          <a:bodyPr/>
+          <a:lstStyle/>
+          <a:p>
+            <a:endParaRPr lang="en-US"/>
+          </a:p>
+        </p:txBody>
       </p:sp>
       <p:sp>
         <p:nvSpPr>
@@ -13431,6 +12786,13 @@
           </a:solidFill>
           <a:ln/>
         </p:spPr>
+        <p:txBody>
+          <a:bodyPr/>
+          <a:lstStyle/>
+          <a:p>
+            <a:endParaRPr lang="en-US"/>
+          </a:p>
+        </p:txBody>
       </p:sp>
       <p:sp>
         <p:nvSpPr>
@@ -13451,6 +12813,13 @@
           </a:solidFill>
           <a:ln/>
         </p:spPr>
+        <p:txBody>
+          <a:bodyPr/>
+          <a:lstStyle/>
+          <a:p>
+            <a:endParaRPr lang="en-US"/>
+          </a:p>
+        </p:txBody>
       </p:sp>
       <p:sp>
         <p:nvSpPr>
@@ -13473,11 +12842,11 @@
           <a:bodyPr wrap="square" rtlCol="0" anchor="ctr"/>
           <a:lstStyle/>
           <a:p>
-            <a:pPr indent="0" marL="0">
+            <a:pPr marL="0" indent="0">
               <a:buNone/>
             </a:pPr>
             <a:r>
-              <a:rPr lang="en-US" sz="4400" b="1" spc="500" kern="0" dirty="0">
+              <a:rPr lang="en-US" sz="4400" b="1" kern="0" spc="500" dirty="0">
                 <a:solidFill>
                   <a:srgbClr val="C6A24E"/>
                 </a:solidFill>
@@ -13512,7 +12881,7 @@
           <a:bodyPr wrap="square" rtlCol="0" anchor="ctr"/>
           <a:lstStyle/>
           <a:p>
-            <a:pPr indent="0" marL="0">
+            <a:pPr marL="0" indent="0">
               <a:lnSpc>
                 <a:spcPct val="98000"/>
               </a:lnSpc>
@@ -13555,6 +12924,13 @@
             <a:prstDash val="solid"/>
           </a:ln>
         </p:spPr>
+        <p:txBody>
+          <a:bodyPr/>
+          <a:lstStyle/>
+          <a:p>
+            <a:endParaRPr lang="en-US"/>
+          </a:p>
+        </p:txBody>
       </p:sp>
       <p:sp>
         <p:nvSpPr>
@@ -13577,7 +12953,7 @@
           <a:bodyPr wrap="square" rtlCol="0" anchor="t"/>
           <a:lstStyle/>
           <a:p>
-            <a:pPr indent="0" marL="0">
+            <a:pPr marL="0" indent="0">
               <a:lnSpc>
                 <a:spcPct val="115000"/>
               </a:lnSpc>
@@ -13594,7 +12970,21 @@
               </a:rPr>
               <a:t>Next:  </a:t>
             </a:r>
-            <a:pPr indent="0" marL="0">
+            <a:r>
+              <a:rPr lang="en-US" sz="1500" dirty="0">
+                <a:solidFill>
+                  <a:srgbClr val="D8CDB6"/>
+                </a:solidFill>
+                <a:latin typeface="Calibri" pitchFamily="34" charset="0"/>
+                <a:ea typeface="Calibri" pitchFamily="34" charset="-122"/>
+                <a:cs typeface="Calibri" pitchFamily="34" charset="-120"/>
+              </a:rPr>
+              <a:t>detailed commercial proposal &amp; costing:</a:t>
+            </a:r>
+            <a:endParaRPr lang="en-US" sz="1500" dirty="0"/>
+          </a:p>
+          <a:p>
+            <a:pPr marL="0" indent="0">
               <a:lnSpc>
                 <a:spcPct val="115000"/>
               </a:lnSpc>
@@ -13609,26 +12999,6 @@
                 <a:ea typeface="Calibri" pitchFamily="34" charset="-122"/>
                 <a:cs typeface="Calibri" pitchFamily="34" charset="-120"/>
               </a:rPr>
-              <a:t>detailed commercial proposal &amp; costing:</a:t>
-            </a:r>
-            <a:endParaRPr lang="en-US" sz="1500" dirty="0"/>
-          </a:p>
-          <a:p>
-            <a:pPr indent="0" marL="0">
-              <a:lnSpc>
-                <a:spcPct val="115000"/>
-              </a:lnSpc>
-              <a:buNone/>
-            </a:pPr>
-            <a:r>
-              <a:rPr lang="en-US" sz="1500" dirty="0">
-                <a:solidFill>
-                  <a:srgbClr val="D8CDB6"/>
-                </a:solidFill>
-                <a:latin typeface="Calibri" pitchFamily="34" charset="0"/>
-                <a:ea typeface="Calibri" pitchFamily="34" charset="-122"/>
-                <a:cs typeface="Calibri" pitchFamily="34" charset="-120"/>
-              </a:rPr>
               <a:t>setup, manpower, location charges, logistics, insurance &amp; hardware.</a:t>
             </a:r>
             <a:endParaRPr lang="en-US" sz="1500" dirty="0"/>
@@ -13656,7 +13026,7 @@
           <a:bodyPr wrap="square" rtlCol="0" anchor="ctr"/>
           <a:lstStyle/>
           <a:p>
-            <a:pPr indent="0" marL="0">
+            <a:pPr marL="0" indent="0">
               <a:buNone/>
             </a:pPr>
             <a:r>
@@ -13695,7 +13065,7 @@
           <a:bodyPr wrap="square" rtlCol="0" anchor="ctr"/>
           <a:lstStyle/>
           <a:p>
-            <a:pPr indent="0" marL="0">
+            <a:pPr marL="0" indent="0">
               <a:buNone/>
             </a:pPr>
             <a:r>
@@ -13729,6 +13099,7 @@
         <a:solidFill>
           <a:srgbClr val="FFFFFF"/>
         </a:solidFill>
+        <a:effectLst/>
       </p:bgPr>
     </p:bg>
     <p:spTree>
@@ -13766,11 +13137,11 @@
           <a:bodyPr wrap="square" rtlCol="0" anchor="ctr"/>
           <a:lstStyle/>
           <a:p>
-            <a:pPr algn="l" indent="0" marL="0">
+            <a:pPr marL="0" indent="0" algn="l">
               <a:buNone/>
             </a:pPr>
             <a:r>
-              <a:rPr lang="en-US" sz="1250" b="1" spc="300" kern="0" dirty="0">
+              <a:rPr lang="en-US" sz="1250" b="1" kern="0" spc="300" dirty="0">
                 <a:solidFill>
                   <a:srgbClr val="A9813A"/>
                 </a:solidFill>
@@ -13805,7 +13176,7 @@
           <a:bodyPr wrap="square" rtlCol="0" anchor="ctr"/>
           <a:lstStyle/>
           <a:p>
-            <a:pPr indent="0" marL="0">
+            <a:pPr marL="0" indent="0">
               <a:lnSpc>
                 <a:spcPct val="98000"/>
               </a:lnSpc>
@@ -13825,7 +13196,7 @@
             <a:endParaRPr lang="en-US" sz="3200" dirty="0"/>
           </a:p>
           <a:p>
-            <a:pPr indent="0" marL="0">
+            <a:pPr marL="0" indent="0">
               <a:lnSpc>
                 <a:spcPct val="98000"/>
               </a:lnSpc>
@@ -13867,7 +13238,7 @@
           <a:bodyPr wrap="square" rtlCol="0" anchor="t"/>
           <a:lstStyle/>
           <a:p>
-            <a:pPr indent="0" marL="0">
+            <a:pPr marL="0" indent="0">
               <a:lnSpc>
                 <a:spcPct val="115000"/>
               </a:lnSpc>
@@ -13885,12 +13256,6 @@
               <a:t>Doft Candles is a premium home-fragrance brand. For the Diwali gifting season we take the brand into India's highest-footfall malls with a turnkey pop-up boutique kiosk, a warm and luminous salon that invites shoppers to sit, smell and gift.
 </a:t>
             </a:r>
-            <a:pPr indent="0" marL="0">
-              <a:lnSpc>
-                <a:spcPct val="115000"/>
-              </a:lnSpc>
-              <a:buNone/>
-            </a:pPr>
             <a:r>
               <a:rPr lang="en-US" sz="1500" b="1" dirty="0">
                 <a:solidFill>
@@ -13902,12 +13267,6 @@
               </a:rPr>
               <a:t>Product range:  </a:t>
             </a:r>
-            <a:pPr indent="0" marL="0">
-              <a:lnSpc>
-                <a:spcPct val="115000"/>
-              </a:lnSpc>
-              <a:buNone/>
-            </a:pPr>
             <a:r>
               <a:rPr lang="en-US" sz="1500" dirty="0">
                 <a:solidFill>
@@ -13947,6 +13306,13 @@
             <a:prstDash val="solid"/>
           </a:ln>
         </p:spPr>
+        <p:txBody>
+          <a:bodyPr/>
+          <a:lstStyle/>
+          <a:p>
+            <a:endParaRPr lang="en-US"/>
+          </a:p>
+        </p:txBody>
       </p:sp>
       <p:sp>
         <p:nvSpPr>
@@ -13969,7 +13335,7 @@
           <a:bodyPr wrap="square" rtlCol="0" anchor="ctr"/>
           <a:lstStyle/>
           <a:p>
-            <a:pPr algn="ctr" indent="0" marL="0">
+            <a:pPr marL="0" indent="0" algn="ctr">
               <a:buNone/>
             </a:pPr>
             <a:r>
@@ -14008,7 +13374,7 @@
           <a:bodyPr wrap="square" rtlCol="0" anchor="ctr"/>
           <a:lstStyle/>
           <a:p>
-            <a:pPr algn="ctr" indent="0" marL="0">
+            <a:pPr marL="0" indent="0" algn="ctr">
               <a:lnSpc>
                 <a:spcPct val="98000"/>
               </a:lnSpc>
@@ -14028,7 +13394,7 @@
             <a:endParaRPr lang="en-US" sz="1250" dirty="0"/>
           </a:p>
           <a:p>
-            <a:pPr algn="ctr" indent="0" marL="0">
+            <a:pPr marL="0" indent="0" algn="ctr">
               <a:lnSpc>
                 <a:spcPct val="98000"/>
               </a:lnSpc>
@@ -14073,6 +13439,13 @@
             <a:prstDash val="solid"/>
           </a:ln>
         </p:spPr>
+        <p:txBody>
+          <a:bodyPr/>
+          <a:lstStyle/>
+          <a:p>
+            <a:endParaRPr lang="en-US"/>
+          </a:p>
+        </p:txBody>
       </p:sp>
       <p:sp>
         <p:nvSpPr>
@@ -14095,7 +13468,7 @@
           <a:bodyPr wrap="square" rtlCol="0" anchor="ctr"/>
           <a:lstStyle/>
           <a:p>
-            <a:pPr algn="ctr" indent="0" marL="0">
+            <a:pPr marL="0" indent="0" algn="ctr">
               <a:buNone/>
             </a:pPr>
             <a:r>
@@ -14134,7 +13507,7 @@
           <a:bodyPr wrap="square" rtlCol="0" anchor="ctr"/>
           <a:lstStyle/>
           <a:p>
-            <a:pPr algn="ctr" indent="0" marL="0">
+            <a:pPr marL="0" indent="0" algn="ctr">
               <a:lnSpc>
                 <a:spcPct val="98000"/>
               </a:lnSpc>
@@ -14154,7 +13527,7 @@
             <a:endParaRPr lang="en-US" sz="1250" dirty="0"/>
           </a:p>
           <a:p>
-            <a:pPr algn="ctr" indent="0" marL="0">
+            <a:pPr marL="0" indent="0" algn="ctr">
               <a:lnSpc>
                 <a:spcPct val="98000"/>
               </a:lnSpc>
@@ -14199,6 +13572,13 @@
             <a:prstDash val="solid"/>
           </a:ln>
         </p:spPr>
+        <p:txBody>
+          <a:bodyPr/>
+          <a:lstStyle/>
+          <a:p>
+            <a:endParaRPr lang="en-US"/>
+          </a:p>
+        </p:txBody>
       </p:sp>
       <p:sp>
         <p:nvSpPr>
@@ -14221,7 +13601,7 @@
           <a:bodyPr wrap="square" rtlCol="0" anchor="ctr"/>
           <a:lstStyle/>
           <a:p>
-            <a:pPr algn="ctr" indent="0" marL="0">
+            <a:pPr marL="0" indent="0" algn="ctr">
               <a:buNone/>
             </a:pPr>
             <a:r>
@@ -14260,7 +13640,7 @@
           <a:bodyPr wrap="square" rtlCol="0" anchor="ctr"/>
           <a:lstStyle/>
           <a:p>
-            <a:pPr algn="ctr" indent="0" marL="0">
+            <a:pPr marL="0" indent="0" algn="ctr">
               <a:lnSpc>
                 <a:spcPct val="98000"/>
               </a:lnSpc>
@@ -14280,7 +13660,7 @@
             <a:endParaRPr lang="en-US" sz="1250" dirty="0"/>
           </a:p>
           <a:p>
-            <a:pPr algn="ctr" indent="0" marL="0">
+            <a:pPr marL="0" indent="0" algn="ctr">
               <a:lnSpc>
                 <a:spcPct val="98000"/>
               </a:lnSpc>
@@ -14325,6 +13705,13 @@
             <a:prstDash val="solid"/>
           </a:ln>
         </p:spPr>
+        <p:txBody>
+          <a:bodyPr/>
+          <a:lstStyle/>
+          <a:p>
+            <a:endParaRPr lang="en-US"/>
+          </a:p>
+        </p:txBody>
       </p:sp>
       <p:sp>
         <p:nvSpPr>
@@ -14347,7 +13734,7 @@
           <a:bodyPr wrap="square" rtlCol="0" anchor="ctr"/>
           <a:lstStyle/>
           <a:p>
-            <a:pPr algn="ctr" indent="0" marL="0">
+            <a:pPr marL="0" indent="0" algn="ctr">
               <a:buNone/>
             </a:pPr>
             <a:r>
@@ -14386,7 +13773,7 @@
           <a:bodyPr wrap="square" rtlCol="0" anchor="ctr"/>
           <a:lstStyle/>
           <a:p>
-            <a:pPr algn="ctr" indent="0" marL="0">
+            <a:pPr marL="0" indent="0" algn="ctr">
               <a:lnSpc>
                 <a:spcPct val="98000"/>
               </a:lnSpc>
@@ -14406,7 +13793,7 @@
             <a:endParaRPr lang="en-US" sz="1250" dirty="0"/>
           </a:p>
           <a:p>
-            <a:pPr algn="ctr" indent="0" marL="0">
+            <a:pPr marL="0" indent="0" algn="ctr">
               <a:lnSpc>
                 <a:spcPct val="98000"/>
               </a:lnSpc>
@@ -14448,11 +13835,11 @@
           <a:bodyPr wrap="square" rtlCol="0" anchor="ctr"/>
           <a:lstStyle/>
           <a:p>
-            <a:pPr algn="l" indent="0" marL="0">
+            <a:pPr marL="0" indent="0" algn="l">
               <a:buNone/>
             </a:pPr>
             <a:r>
-              <a:rPr lang="en-US" sz="950" b="1" spc="100" kern="0" dirty="0">
+              <a:rPr lang="en-US" sz="950" b="1" kern="0" spc="100" dirty="0">
                 <a:solidFill>
                   <a:srgbClr val="C6A24E"/>
                 </a:solidFill>
@@ -14462,11 +13849,8 @@
               </a:rPr>
               <a:t>DOFT</a:t>
             </a:r>
-            <a:pPr algn="l" indent="0" marL="0">
-              <a:buNone/>
-            </a:pPr>
-            <a:r>
-              <a:rPr lang="en-US" sz="950" spc="100" kern="0" dirty="0">
+            <a:r>
+              <a:rPr lang="en-US" sz="950" kern="0" spc="100" dirty="0">
                 <a:solidFill>
                   <a:srgbClr val="857B6C"/>
                 </a:solidFill>
@@ -14501,7 +13885,7 @@
           <a:bodyPr wrap="square" rtlCol="0" anchor="ctr"/>
           <a:lstStyle/>
           <a:p>
-            <a:pPr algn="r" indent="0" marL="0">
+            <a:pPr marL="0" indent="0" algn="r">
               <a:buNone/>
             </a:pPr>
             <a:r>
@@ -14516,70 +13900,6 @@
               <a:t>ProMarcom</a:t>
             </a:r>
             <a:endParaRPr lang="en-US" sz="950" dirty="0"/>
-          </a:p>
-        </p:txBody>
-      </p:sp>
-      <p:sp>
-        <p:nvSpPr>
-          <p:cNvPr id="19" name="Shape 17"/>
-          <p:cNvSpPr/>
-          <p:nvPr/>
-        </p:nvSpPr>
-        <p:spPr>
-          <a:xfrm>
-            <a:off x="11475720" y="6364224"/>
-            <a:ext cx="402336" cy="402336"/>
-          </a:xfrm>
-          <a:prstGeom prst="ellipse">
-            <a:avLst/>
-          </a:prstGeom>
-          <a:solidFill>
-            <a:srgbClr val="FFFFFF"/>
-          </a:solidFill>
-          <a:ln w="12700">
-            <a:solidFill>
-              <a:srgbClr val="C6A24E"/>
-            </a:solidFill>
-            <a:prstDash val="solid"/>
-          </a:ln>
-        </p:spPr>
-      </p:sp>
-      <p:sp>
-        <p:nvSpPr>
-          <p:cNvPr id="20" name="Text 18"/>
-          <p:cNvSpPr/>
-          <p:nvPr/>
-        </p:nvSpPr>
-        <p:spPr>
-          <a:xfrm>
-            <a:off x="11475720" y="6364224"/>
-            <a:ext cx="402336" cy="402336"/>
-          </a:xfrm>
-          <a:prstGeom prst="rect">
-            <a:avLst/>
-          </a:prstGeom>
-          <a:noFill/>
-          <a:ln/>
-        </p:spPr>
-        <p:txBody>
-          <a:bodyPr wrap="square" rtlCol="0" anchor="ctr"/>
-          <a:lstStyle/>
-          <a:p>
-            <a:pPr algn="ctr" indent="0" marL="0">
-              <a:buNone/>
-            </a:pPr>
-            <a:r>
-              <a:rPr lang="en-US" sz="1100" b="1" dirty="0">
-                <a:solidFill>
-                  <a:srgbClr val="2B2621"/>
-                </a:solidFill>
-                <a:latin typeface="Cambria" pitchFamily="34" charset="0"/>
-                <a:ea typeface="Cambria" pitchFamily="34" charset="-122"/>
-                <a:cs typeface="Cambria" pitchFamily="34" charset="-120"/>
-              </a:rPr>
-              <a:t>2</a:t>
-            </a:r>
-            <a:endParaRPr lang="en-US" sz="1100" dirty="0"/>
           </a:p>
         </p:txBody>
       </p:sp>
@@ -14599,6 +13919,7 @@
         <a:solidFill>
           <a:srgbClr val="EFEAE0"/>
         </a:solidFill>
+        <a:effectLst/>
       </p:bgPr>
     </p:bg>
     <p:spTree>
@@ -14634,6 +13955,13 @@
           </a:solidFill>
           <a:ln/>
         </p:spPr>
+        <p:txBody>
+          <a:bodyPr/>
+          <a:lstStyle/>
+          <a:p>
+            <a:endParaRPr lang="en-US"/>
+          </a:p>
+        </p:txBody>
       </p:sp>
       <p:sp>
         <p:nvSpPr>
@@ -14656,11 +13984,11 @@
           <a:bodyPr wrap="square" rtlCol="0" anchor="ctr"/>
           <a:lstStyle/>
           <a:p>
-            <a:pPr algn="l" indent="0" marL="0">
+            <a:pPr marL="0" indent="0" algn="l">
               <a:buNone/>
             </a:pPr>
             <a:r>
-              <a:rPr lang="en-US" sz="1250" b="1" spc="300" kern="0" dirty="0">
+              <a:rPr lang="en-US" sz="1250" b="1" kern="0" spc="300" dirty="0">
                 <a:solidFill>
                   <a:srgbClr val="A9813A"/>
                 </a:solidFill>
@@ -14695,7 +14023,7 @@
           <a:bodyPr wrap="square" rtlCol="0" anchor="ctr"/>
           <a:lstStyle/>
           <a:p>
-            <a:pPr indent="0" marL="0">
+            <a:pPr marL="0" indent="0">
               <a:lnSpc>
                 <a:spcPct val="95000"/>
               </a:lnSpc>
@@ -14737,7 +14065,7 @@
           <a:bodyPr wrap="square" rtlCol="0" anchor="t"/>
           <a:lstStyle/>
           <a:p>
-            <a:pPr indent="0" marL="0">
+            <a:pPr marL="0" indent="0">
               <a:lnSpc>
                 <a:spcPct val="112000"/>
               </a:lnSpc>
@@ -14777,6 +14105,13 @@
           </a:solidFill>
           <a:ln/>
         </p:spPr>
+        <p:txBody>
+          <a:bodyPr/>
+          <a:lstStyle/>
+          <a:p>
+            <a:endParaRPr lang="en-US"/>
+          </a:p>
+        </p:txBody>
       </p:sp>
       <p:sp>
         <p:nvSpPr>
@@ -14799,7 +14134,7 @@
           <a:bodyPr wrap="square" rtlCol="0" anchor="ctr"/>
           <a:lstStyle/>
           <a:p>
-            <a:pPr indent="0" marL="0">
+            <a:pPr marL="0" indent="0">
               <a:buNone/>
             </a:pPr>
             <a:r>
@@ -14838,7 +14173,7 @@
           <a:bodyPr wrap="square" rtlCol="0" anchor="t"/>
           <a:lstStyle/>
           <a:p>
-            <a:pPr indent="0" marL="0">
+            <a:pPr marL="0" indent="0">
               <a:lnSpc>
                 <a:spcPct val="100000"/>
               </a:lnSpc>
@@ -14878,6 +14213,13 @@
           </a:solidFill>
           <a:ln/>
         </p:spPr>
+        <p:txBody>
+          <a:bodyPr/>
+          <a:lstStyle/>
+          <a:p>
+            <a:endParaRPr lang="en-US"/>
+          </a:p>
+        </p:txBody>
       </p:sp>
       <p:sp>
         <p:nvSpPr>
@@ -14900,7 +14242,7 @@
           <a:bodyPr wrap="square" rtlCol="0" anchor="ctr"/>
           <a:lstStyle/>
           <a:p>
-            <a:pPr indent="0" marL="0">
+            <a:pPr marL="0" indent="0">
               <a:buNone/>
             </a:pPr>
             <a:r>
@@ -14939,7 +14281,7 @@
           <a:bodyPr wrap="square" rtlCol="0" anchor="t"/>
           <a:lstStyle/>
           <a:p>
-            <a:pPr indent="0" marL="0">
+            <a:pPr marL="0" indent="0">
               <a:lnSpc>
                 <a:spcPct val="100000"/>
               </a:lnSpc>
@@ -14979,6 +14321,13 @@
           </a:solidFill>
           <a:ln/>
         </p:spPr>
+        <p:txBody>
+          <a:bodyPr/>
+          <a:lstStyle/>
+          <a:p>
+            <a:endParaRPr lang="en-US"/>
+          </a:p>
+        </p:txBody>
       </p:sp>
       <p:sp>
         <p:nvSpPr>
@@ -15001,7 +14350,7 @@
           <a:bodyPr wrap="square" rtlCol="0" anchor="ctr"/>
           <a:lstStyle/>
           <a:p>
-            <a:pPr indent="0" marL="0">
+            <a:pPr marL="0" indent="0">
               <a:buNone/>
             </a:pPr>
             <a:r>
@@ -15040,7 +14389,7 @@
           <a:bodyPr wrap="square" rtlCol="0" anchor="t"/>
           <a:lstStyle/>
           <a:p>
-            <a:pPr indent="0" marL="0">
+            <a:pPr marL="0" indent="0">
               <a:lnSpc>
                 <a:spcPct val="100000"/>
               </a:lnSpc>
@@ -15080,6 +14429,13 @@
           </a:solidFill>
           <a:ln/>
         </p:spPr>
+        <p:txBody>
+          <a:bodyPr/>
+          <a:lstStyle/>
+          <a:p>
+            <a:endParaRPr lang="en-US"/>
+          </a:p>
+        </p:txBody>
       </p:sp>
       <p:sp>
         <p:nvSpPr>
@@ -15102,7 +14458,7 @@
           <a:bodyPr wrap="square" rtlCol="0" anchor="ctr"/>
           <a:lstStyle/>
           <a:p>
-            <a:pPr indent="0" marL="0">
+            <a:pPr marL="0" indent="0">
               <a:buNone/>
             </a:pPr>
             <a:r>
@@ -15141,7 +14497,7 @@
           <a:bodyPr wrap="square" rtlCol="0" anchor="t"/>
           <a:lstStyle/>
           <a:p>
-            <a:pPr indent="0" marL="0">
+            <a:pPr marL="0" indent="0">
               <a:lnSpc>
                 <a:spcPct val="100000"/>
               </a:lnSpc>
@@ -15164,15 +14520,15 @@
       </p:sp>
       <p:pic>
         <p:nvPicPr>
-          <p:cNvPr id="18" name="Image 0" descr="ref_imgs/P1_s4_4.jpg">    </p:cNvPr>
+          <p:cNvPr id="18" name="Image 0" descr="ref_imgs/P1_s4_4.jpg"/>
           <p:cNvPicPr>
             <a:picLocks noChangeAspect="1"/>
           </p:cNvPicPr>
           <p:nvPr/>
         </p:nvPicPr>
         <p:blipFill>
-          <a:blip r:embed="rId1"/>
-          <a:srcRect l="0" r="0" t="0" b="0"/>
+          <a:blip r:embed="rId3"/>
+          <a:srcRect/>
           <a:stretch/>
         </p:blipFill>
         <p:spPr>
@@ -15206,11 +14562,11 @@
           <a:bodyPr wrap="square" rtlCol="0" anchor="ctr"/>
           <a:lstStyle/>
           <a:p>
-            <a:pPr algn="l" indent="0" marL="0">
+            <a:pPr marL="0" indent="0" algn="l">
               <a:buNone/>
             </a:pPr>
             <a:r>
-              <a:rPr lang="en-US" sz="950" b="1" spc="100" kern="0" dirty="0">
+              <a:rPr lang="en-US" sz="950" b="1" kern="0" spc="100" dirty="0">
                 <a:solidFill>
                   <a:srgbClr val="C6A24E"/>
                 </a:solidFill>
@@ -15220,11 +14576,8 @@
               </a:rPr>
               <a:t>DOFT</a:t>
             </a:r>
-            <a:pPr algn="l" indent="0" marL="0">
-              <a:buNone/>
-            </a:pPr>
-            <a:r>
-              <a:rPr lang="en-US" sz="950" spc="100" kern="0" dirty="0">
+            <a:r>
+              <a:rPr lang="en-US" sz="950" kern="0" spc="100" dirty="0">
                 <a:solidFill>
                   <a:srgbClr val="857B6C"/>
                 </a:solidFill>
@@ -15259,7 +14612,7 @@
           <a:bodyPr wrap="square" rtlCol="0" anchor="ctr"/>
           <a:lstStyle/>
           <a:p>
-            <a:pPr algn="r" indent="0" marL="0">
+            <a:pPr marL="0" indent="0" algn="r">
               <a:buNone/>
             </a:pPr>
             <a:r>
@@ -15301,6 +14654,13 @@
             <a:prstDash val="solid"/>
           </a:ln>
         </p:spPr>
+        <p:txBody>
+          <a:bodyPr/>
+          <a:lstStyle/>
+          <a:p>
+            <a:endParaRPr lang="en-US"/>
+          </a:p>
+        </p:txBody>
       </p:sp>
       <p:sp>
         <p:nvSpPr>
@@ -15323,7 +14683,7 @@
           <a:bodyPr wrap="square" rtlCol="0" anchor="ctr"/>
           <a:lstStyle/>
           <a:p>
-            <a:pPr algn="ctr" indent="0" marL="0">
+            <a:pPr marL="0" indent="0" algn="ctr">
               <a:buNone/>
             </a:pPr>
             <a:r>
@@ -15357,6 +14717,7 @@
         <a:solidFill>
           <a:srgbClr val="EFEAE0"/>
         </a:solidFill>
+        <a:effectLst/>
       </p:bgPr>
     </p:bg>
     <p:spTree>
@@ -15392,18 +14753,25 @@
           </a:solidFill>
           <a:ln/>
         </p:spPr>
+        <p:txBody>
+          <a:bodyPr/>
+          <a:lstStyle/>
+          <a:p>
+            <a:endParaRPr lang="en-US"/>
+          </a:p>
+        </p:txBody>
       </p:sp>
       <p:pic>
         <p:nvPicPr>
-          <p:cNvPr id="3" name="Image 0" descr="ref_imgs/P1_s4_4.jpg">    </p:cNvPr>
+          <p:cNvPr id="3" name="Image 0" descr="ref_imgs/P1_s4_4.jpg"/>
           <p:cNvPicPr>
             <a:picLocks noChangeAspect="1"/>
           </p:cNvPicPr>
           <p:nvPr/>
         </p:nvPicPr>
         <p:blipFill>
-          <a:blip r:embed="rId1"/>
-          <a:srcRect l="0" r="0" t="0" b="0"/>
+          <a:blip r:embed="rId3"/>
+          <a:srcRect/>
           <a:stretch/>
         </p:blipFill>
         <p:spPr>
@@ -15435,6 +14803,13 @@
           </a:solidFill>
           <a:ln/>
         </p:spPr>
+        <p:txBody>
+          <a:bodyPr/>
+          <a:lstStyle/>
+          <a:p>
+            <a:endParaRPr lang="en-US"/>
+          </a:p>
+        </p:txBody>
       </p:sp>
       <p:sp>
         <p:nvSpPr>
@@ -15455,6 +14830,13 @@
           </a:solidFill>
           <a:ln/>
         </p:spPr>
+        <p:txBody>
+          <a:bodyPr/>
+          <a:lstStyle/>
+          <a:p>
+            <a:endParaRPr lang="en-US"/>
+          </a:p>
+        </p:txBody>
       </p:sp>
       <p:sp>
         <p:nvSpPr>
@@ -15477,11 +14859,11 @@
           <a:bodyPr wrap="square" rtlCol="0" anchor="ctr"/>
           <a:lstStyle/>
           <a:p>
-            <a:pPr algn="l" indent="0" marL="0">
+            <a:pPr marL="0" indent="0" algn="l">
               <a:buNone/>
             </a:pPr>
             <a:r>
-              <a:rPr lang="en-US" sz="1250" b="1" spc="300" kern="0" dirty="0">
+              <a:rPr lang="en-US" sz="1250" b="1" kern="0" spc="300" dirty="0">
                 <a:solidFill>
                   <a:srgbClr val="C6A24E"/>
                 </a:solidFill>
@@ -15516,7 +14898,7 @@
           <a:bodyPr wrap="square" rtlCol="0" anchor="ctr"/>
           <a:lstStyle/>
           <a:p>
-            <a:pPr indent="0" marL="0">
+            <a:pPr marL="0" indent="0">
               <a:lnSpc>
                 <a:spcPct val="98000"/>
               </a:lnSpc>
@@ -15559,6 +14941,13 @@
             <a:prstDash val="solid"/>
           </a:ln>
         </p:spPr>
+        <p:txBody>
+          <a:bodyPr/>
+          <a:lstStyle/>
+          <a:p>
+            <a:endParaRPr lang="en-US"/>
+          </a:p>
+        </p:txBody>
       </p:sp>
       <p:sp>
         <p:nvSpPr>
@@ -15581,7 +14970,7 @@
           <a:bodyPr wrap="square" rtlCol="0" anchor="t"/>
           <a:lstStyle/>
           <a:p>
-            <a:pPr indent="0" marL="0">
+            <a:pPr marL="0" indent="0">
               <a:lnSpc>
                 <a:spcPct val="102000"/>
               </a:lnSpc>
@@ -15598,7 +14987,43 @@
               </a:rPr>
               <a:t>·   </a:t>
             </a:r>
-            <a:pPr indent="0" marL="0">
+            <a:r>
+              <a:rPr lang="en-US" sz="1450" dirty="0">
+                <a:solidFill>
+                  <a:srgbClr val="E9E2D3"/>
+                </a:solidFill>
+                <a:latin typeface="Calibri" pitchFamily="34" charset="0"/>
+                <a:ea typeface="Calibri" pitchFamily="34" charset="-122"/>
+                <a:cs typeface="Calibri" pitchFamily="34" charset="-120"/>
+              </a:rPr>
+              <a:t>Backlit MEMORIES DOFT SCENTED seal wall</a:t>
+            </a:r>
+            <a:endParaRPr lang="en-US" sz="1450" dirty="0"/>
+          </a:p>
+        </p:txBody>
+      </p:sp>
+      <p:sp>
+        <p:nvSpPr>
+          <p:cNvPr id="10" name="Text 7"/>
+          <p:cNvSpPr/>
+          <p:nvPr/>
+        </p:nvSpPr>
+        <p:spPr>
+          <a:xfrm>
+            <a:off x="8396935" y="3630168"/>
+            <a:ext cx="3429000" cy="640080"/>
+          </a:xfrm>
+          <a:prstGeom prst="rect">
+            <a:avLst/>
+          </a:prstGeom>
+          <a:noFill/>
+          <a:ln/>
+        </p:spPr>
+        <p:txBody>
+          <a:bodyPr wrap="square" rtlCol="0" anchor="t"/>
+          <a:lstStyle/>
+          <a:p>
+            <a:pPr marL="0" indent="0">
               <a:lnSpc>
                 <a:spcPct val="102000"/>
               </a:lnSpc>
@@ -15607,13 +15032,24 @@
             <a:r>
               <a:rPr lang="en-US" sz="1450" dirty="0">
                 <a:solidFill>
-                  <a:srgbClr val="E9E2D3"/>
+                  <a:srgbClr val="C6A24E"/>
                 </a:solidFill>
                 <a:latin typeface="Calibri" pitchFamily="34" charset="0"/>
                 <a:ea typeface="Calibri" pitchFamily="34" charset="-122"/>
                 <a:cs typeface="Calibri" pitchFamily="34" charset="-120"/>
               </a:rPr>
-              <a:t>Backlit MEMORIES DOFT SCENTED seal wall</a:t>
+              <a:t>·   </a:t>
+            </a:r>
+            <a:r>
+              <a:rPr lang="en-US" sz="1450" dirty="0">
+                <a:solidFill>
+                  <a:srgbClr val="E9E2D3"/>
+                </a:solidFill>
+                <a:latin typeface="Calibri" pitchFamily="34" charset="0"/>
+                <a:ea typeface="Calibri" pitchFamily="34" charset="-122"/>
+                <a:cs typeface="Calibri" pitchFamily="34" charset="-120"/>
+              </a:rPr>
+              <a:t>Warm-lit brass gallery shelving</a:t>
             </a:r>
             <a:endParaRPr lang="en-US" sz="1450" dirty="0"/>
           </a:p>
@@ -15621,13 +15057,13 @@
       </p:sp>
       <p:sp>
         <p:nvSpPr>
-          <p:cNvPr id="10" name="Text 7"/>
-          <p:cNvSpPr/>
-          <p:nvPr/>
-        </p:nvSpPr>
-        <p:spPr>
-          <a:xfrm>
-            <a:off x="8396935" y="3630168"/>
+          <p:cNvPr id="11" name="Text 8"/>
+          <p:cNvSpPr/>
+          <p:nvPr/>
+        </p:nvSpPr>
+        <p:spPr>
+          <a:xfrm>
+            <a:off x="8396935" y="4288536"/>
             <a:ext cx="3429000" cy="640080"/>
           </a:xfrm>
           <a:prstGeom prst="rect">
@@ -15640,7 +15076,7 @@
           <a:bodyPr wrap="square" rtlCol="0" anchor="t"/>
           <a:lstStyle/>
           <a:p>
-            <a:pPr indent="0" marL="0">
+            <a:pPr marL="0" indent="0">
               <a:lnSpc>
                 <a:spcPct val="102000"/>
               </a:lnSpc>
@@ -15657,7 +15093,43 @@
               </a:rPr>
               <a:t>·   </a:t>
             </a:r>
-            <a:pPr indent="0" marL="0">
+            <a:r>
+              <a:rPr lang="en-US" sz="1450" dirty="0">
+                <a:solidFill>
+                  <a:srgbClr val="E9E2D3"/>
+                </a:solidFill>
+                <a:latin typeface="Calibri" pitchFamily="34" charset="0"/>
+                <a:ea typeface="Calibri" pitchFamily="34" charset="-122"/>
+                <a:cs typeface="Calibri" pitchFamily="34" charset="-120"/>
+              </a:rPr>
+              <a:t>White counters with black-stone tops</a:t>
+            </a:r>
+            <a:endParaRPr lang="en-US" sz="1450" dirty="0"/>
+          </a:p>
+        </p:txBody>
+      </p:sp>
+      <p:sp>
+        <p:nvSpPr>
+          <p:cNvPr id="12" name="Text 9"/>
+          <p:cNvSpPr/>
+          <p:nvPr/>
+        </p:nvSpPr>
+        <p:spPr>
+          <a:xfrm>
+            <a:off x="8396935" y="4946904"/>
+            <a:ext cx="3429000" cy="640080"/>
+          </a:xfrm>
+          <a:prstGeom prst="rect">
+            <a:avLst/>
+          </a:prstGeom>
+          <a:noFill/>
+          <a:ln/>
+        </p:spPr>
+        <p:txBody>
+          <a:bodyPr wrap="square" rtlCol="0" anchor="t"/>
+          <a:lstStyle/>
+          <a:p>
+            <a:pPr marL="0" indent="0">
               <a:lnSpc>
                 <a:spcPct val="102000"/>
               </a:lnSpc>
@@ -15666,183 +15138,73 @@
             <a:r>
               <a:rPr lang="en-US" sz="1450" dirty="0">
                 <a:solidFill>
-                  <a:srgbClr val="E9E2D3"/>
+                  <a:srgbClr val="C6A24E"/>
                 </a:solidFill>
                 <a:latin typeface="Calibri" pitchFamily="34" charset="0"/>
                 <a:ea typeface="Calibri" pitchFamily="34" charset="-122"/>
                 <a:cs typeface="Calibri" pitchFamily="34" charset="-120"/>
               </a:rPr>
-              <a:t>Warm-lit brass gallery shelving</a:t>
-            </a:r>
-            <a:endParaRPr lang="en-US" sz="1450" dirty="0"/>
-          </a:p>
-        </p:txBody>
-      </p:sp>
-      <p:sp>
-        <p:nvSpPr>
-          <p:cNvPr id="11" name="Text 8"/>
-          <p:cNvSpPr/>
-          <p:nvPr/>
-        </p:nvSpPr>
-        <p:spPr>
-          <a:xfrm>
-            <a:off x="8396935" y="4288536"/>
-            <a:ext cx="3429000" cy="640080"/>
-          </a:xfrm>
-          <a:prstGeom prst="rect">
-            <a:avLst/>
-          </a:prstGeom>
-          <a:noFill/>
-          <a:ln/>
-        </p:spPr>
-        <p:txBody>
-          <a:bodyPr wrap="square" rtlCol="0" anchor="t"/>
-          <a:lstStyle/>
-          <a:p>
-            <a:pPr indent="0" marL="0">
-              <a:lnSpc>
-                <a:spcPct val="102000"/>
-              </a:lnSpc>
-              <a:buNone/>
-            </a:pPr>
+              <a:t>·   </a:t>
+            </a:r>
             <a:r>
               <a:rPr lang="en-US" sz="1450" dirty="0">
                 <a:solidFill>
-                  <a:srgbClr val="C6A24E"/>
+                  <a:srgbClr val="E9E2D3"/>
                 </a:solidFill>
                 <a:latin typeface="Calibri" pitchFamily="34" charset="0"/>
                 <a:ea typeface="Calibri" pitchFamily="34" charset="-122"/>
                 <a:cs typeface="Calibri" pitchFamily="34" charset="-120"/>
               </a:rPr>
-              <a:t>·   </a:t>
-            </a:r>
-            <a:pPr indent="0" marL="0">
-              <a:lnSpc>
-                <a:spcPct val="102000"/>
-              </a:lnSpc>
+              <a:t>Backlit seal counter fronts</a:t>
+            </a:r>
+            <a:endParaRPr lang="en-US" sz="1450" dirty="0"/>
+          </a:p>
+        </p:txBody>
+      </p:sp>
+      <p:sp>
+        <p:nvSpPr>
+          <p:cNvPr id="13" name="Text 10"/>
+          <p:cNvSpPr/>
+          <p:nvPr/>
+        </p:nvSpPr>
+        <p:spPr>
+          <a:xfrm>
+            <a:off x="457200" y="6419088"/>
+            <a:ext cx="7315200" cy="320040"/>
+          </a:xfrm>
+          <a:prstGeom prst="rect">
+            <a:avLst/>
+          </a:prstGeom>
+          <a:noFill/>
+          <a:ln/>
+        </p:spPr>
+        <p:txBody>
+          <a:bodyPr wrap="square" rtlCol="0" anchor="ctr"/>
+          <a:lstStyle/>
+          <a:p>
+            <a:pPr marL="0" indent="0" algn="l">
               <a:buNone/>
             </a:pPr>
             <a:r>
-              <a:rPr lang="en-US" sz="1450" dirty="0">
-                <a:solidFill>
-                  <a:srgbClr val="E9E2D3"/>
+              <a:rPr lang="en-US" sz="950" b="1" kern="0" spc="100" dirty="0">
+                <a:solidFill>
+                  <a:srgbClr val="C6A24E"/>
+                </a:solidFill>
+                <a:latin typeface="Cambria" pitchFamily="34" charset="0"/>
+                <a:ea typeface="Cambria" pitchFamily="34" charset="-122"/>
+                <a:cs typeface="Cambria" pitchFamily="34" charset="-120"/>
+              </a:rPr>
+              <a:t>DOFT</a:t>
+            </a:r>
+            <a:r>
+              <a:rPr lang="en-US" sz="950" kern="0" spc="100" dirty="0">
+                <a:solidFill>
+                  <a:srgbClr val="B8AE9C"/>
                 </a:solidFill>
                 <a:latin typeface="Calibri" pitchFamily="34" charset="0"/>
                 <a:ea typeface="Calibri" pitchFamily="34" charset="-122"/>
                 <a:cs typeface="Calibri" pitchFamily="34" charset="-120"/>
               </a:rPr>
-              <a:t>White counters with black-stone tops</a:t>
-            </a:r>
-            <a:endParaRPr lang="en-US" sz="1450" dirty="0"/>
-          </a:p>
-        </p:txBody>
-      </p:sp>
-      <p:sp>
-        <p:nvSpPr>
-          <p:cNvPr id="12" name="Text 9"/>
-          <p:cNvSpPr/>
-          <p:nvPr/>
-        </p:nvSpPr>
-        <p:spPr>
-          <a:xfrm>
-            <a:off x="8396935" y="4946904"/>
-            <a:ext cx="3429000" cy="640080"/>
-          </a:xfrm>
-          <a:prstGeom prst="rect">
-            <a:avLst/>
-          </a:prstGeom>
-          <a:noFill/>
-          <a:ln/>
-        </p:spPr>
-        <p:txBody>
-          <a:bodyPr wrap="square" rtlCol="0" anchor="t"/>
-          <a:lstStyle/>
-          <a:p>
-            <a:pPr indent="0" marL="0">
-              <a:lnSpc>
-                <a:spcPct val="102000"/>
-              </a:lnSpc>
-              <a:buNone/>
-            </a:pPr>
-            <a:r>
-              <a:rPr lang="en-US" sz="1450" dirty="0">
-                <a:solidFill>
-                  <a:srgbClr val="C6A24E"/>
-                </a:solidFill>
-                <a:latin typeface="Calibri" pitchFamily="34" charset="0"/>
-                <a:ea typeface="Calibri" pitchFamily="34" charset="-122"/>
-                <a:cs typeface="Calibri" pitchFamily="34" charset="-120"/>
-              </a:rPr>
-              <a:t>·   </a:t>
-            </a:r>
-            <a:pPr indent="0" marL="0">
-              <a:lnSpc>
-                <a:spcPct val="102000"/>
-              </a:lnSpc>
-              <a:buNone/>
-            </a:pPr>
-            <a:r>
-              <a:rPr lang="en-US" sz="1450" dirty="0">
-                <a:solidFill>
-                  <a:srgbClr val="E9E2D3"/>
-                </a:solidFill>
-                <a:latin typeface="Calibri" pitchFamily="34" charset="0"/>
-                <a:ea typeface="Calibri" pitchFamily="34" charset="-122"/>
-                <a:cs typeface="Calibri" pitchFamily="34" charset="-120"/>
-              </a:rPr>
-              <a:t>Backlit seal counter fronts</a:t>
-            </a:r>
-            <a:endParaRPr lang="en-US" sz="1450" dirty="0"/>
-          </a:p>
-        </p:txBody>
-      </p:sp>
-      <p:sp>
-        <p:nvSpPr>
-          <p:cNvPr id="13" name="Text 10"/>
-          <p:cNvSpPr/>
-          <p:nvPr/>
-        </p:nvSpPr>
-        <p:spPr>
-          <a:xfrm>
-            <a:off x="457200" y="6419088"/>
-            <a:ext cx="7315200" cy="320040"/>
-          </a:xfrm>
-          <a:prstGeom prst="rect">
-            <a:avLst/>
-          </a:prstGeom>
-          <a:noFill/>
-          <a:ln/>
-        </p:spPr>
-        <p:txBody>
-          <a:bodyPr wrap="square" rtlCol="0" anchor="ctr"/>
-          <a:lstStyle/>
-          <a:p>
-            <a:pPr algn="l" indent="0" marL="0">
-              <a:buNone/>
-            </a:pPr>
-            <a:r>
-              <a:rPr lang="en-US" sz="950" b="1" spc="100" kern="0" dirty="0">
-                <a:solidFill>
-                  <a:srgbClr val="C6A24E"/>
-                </a:solidFill>
-                <a:latin typeface="Cambria" pitchFamily="34" charset="0"/>
-                <a:ea typeface="Cambria" pitchFamily="34" charset="-122"/>
-                <a:cs typeface="Cambria" pitchFamily="34" charset="-120"/>
-              </a:rPr>
-              <a:t>DOFT</a:t>
-            </a:r>
-            <a:pPr algn="l" indent="0" marL="0">
-              <a:buNone/>
-            </a:pPr>
-            <a:r>
-              <a:rPr lang="en-US" sz="950" spc="100" kern="0" dirty="0">
-                <a:solidFill>
-                  <a:srgbClr val="B8AE9C"/>
-                </a:solidFill>
-                <a:latin typeface="Calibri" pitchFamily="34" charset="0"/>
-                <a:ea typeface="Calibri" pitchFamily="34" charset="-122"/>
-                <a:cs typeface="Calibri" pitchFamily="34" charset="-120"/>
-              </a:rPr>
               <a:t>  ·  SCENTED MEMORIES  ·  Diwali Pop-Up Kiosk Concept</a:t>
             </a:r>
             <a:endParaRPr lang="en-US" sz="950" dirty="0"/>
@@ -15870,7 +15232,7 @@
           <a:bodyPr wrap="square" rtlCol="0" anchor="ctr"/>
           <a:lstStyle/>
           <a:p>
-            <a:pPr algn="r" indent="0" marL="0">
+            <a:pPr marL="0" indent="0" algn="r">
               <a:buNone/>
             </a:pPr>
             <a:r>
@@ -15912,6 +15274,13 @@
             <a:prstDash val="solid"/>
           </a:ln>
         </p:spPr>
+        <p:txBody>
+          <a:bodyPr/>
+          <a:lstStyle/>
+          <a:p>
+            <a:endParaRPr lang="en-US"/>
+          </a:p>
+        </p:txBody>
       </p:sp>
       <p:sp>
         <p:nvSpPr>
@@ -15934,7 +15303,7 @@
           <a:bodyPr wrap="square" rtlCol="0" anchor="ctr"/>
           <a:lstStyle/>
           <a:p>
-            <a:pPr algn="ctr" indent="0" marL="0">
+            <a:pPr marL="0" indent="0" algn="ctr">
               <a:buNone/>
             </a:pPr>
             <a:r>
@@ -15968,6 +15337,7 @@
         <a:solidFill>
           <a:srgbClr val="EFEAE0"/>
         </a:solidFill>
+        <a:effectLst/>
       </p:bgPr>
     </p:bg>
     <p:spTree>
@@ -16003,18 +15373,25 @@
           </a:solidFill>
           <a:ln/>
         </p:spPr>
+        <p:txBody>
+          <a:bodyPr/>
+          <a:lstStyle/>
+          <a:p>
+            <a:endParaRPr lang="en-US"/>
+          </a:p>
+        </p:txBody>
       </p:sp>
       <p:pic>
         <p:nvPicPr>
-          <p:cNvPr id="3" name="Image 0" descr="ref_imgs/P1_s3_3.jpg">    </p:cNvPr>
+          <p:cNvPr id="3" name="Image 0" descr="ref_imgs/P1_s3_3.jpg"/>
           <p:cNvPicPr>
             <a:picLocks noChangeAspect="1"/>
           </p:cNvPicPr>
           <p:nvPr/>
         </p:nvPicPr>
         <p:blipFill>
-          <a:blip r:embed="rId1"/>
-          <a:srcRect l="0" r="0" t="0" b="0"/>
+          <a:blip r:embed="rId3"/>
+          <a:srcRect/>
           <a:stretch/>
         </p:blipFill>
         <p:spPr>
@@ -16046,6 +15423,13 @@
           </a:solidFill>
           <a:ln/>
         </p:spPr>
+        <p:txBody>
+          <a:bodyPr/>
+          <a:lstStyle/>
+          <a:p>
+            <a:endParaRPr lang="en-US"/>
+          </a:p>
+        </p:txBody>
       </p:sp>
       <p:sp>
         <p:nvSpPr>
@@ -16066,6 +15450,13 @@
           </a:solidFill>
           <a:ln/>
         </p:spPr>
+        <p:txBody>
+          <a:bodyPr/>
+          <a:lstStyle/>
+          <a:p>
+            <a:endParaRPr lang="en-US"/>
+          </a:p>
+        </p:txBody>
       </p:sp>
       <p:sp>
         <p:nvSpPr>
@@ -16088,11 +15479,11 @@
           <a:bodyPr wrap="square" rtlCol="0" anchor="ctr"/>
           <a:lstStyle/>
           <a:p>
-            <a:pPr algn="l" indent="0" marL="0">
+            <a:pPr marL="0" indent="0" algn="l">
               <a:buNone/>
             </a:pPr>
             <a:r>
-              <a:rPr lang="en-US" sz="1250" b="1" spc="300" kern="0" dirty="0">
+              <a:rPr lang="en-US" sz="1250" b="1" kern="0" spc="300" dirty="0">
                 <a:solidFill>
                   <a:srgbClr val="C6A24E"/>
                 </a:solidFill>
@@ -16127,7 +15518,7 @@
           <a:bodyPr wrap="square" rtlCol="0" anchor="ctr"/>
           <a:lstStyle/>
           <a:p>
-            <a:pPr indent="0" marL="0">
+            <a:pPr marL="0" indent="0">
               <a:lnSpc>
                 <a:spcPct val="98000"/>
               </a:lnSpc>
@@ -16170,6 +15561,13 @@
             <a:prstDash val="solid"/>
           </a:ln>
         </p:spPr>
+        <p:txBody>
+          <a:bodyPr/>
+          <a:lstStyle/>
+          <a:p>
+            <a:endParaRPr lang="en-US"/>
+          </a:p>
+        </p:txBody>
       </p:sp>
       <p:sp>
         <p:nvSpPr>
@@ -16192,7 +15590,7 @@
           <a:bodyPr wrap="square" rtlCol="0" anchor="t"/>
           <a:lstStyle/>
           <a:p>
-            <a:pPr indent="0" marL="0">
+            <a:pPr marL="0" indent="0">
               <a:lnSpc>
                 <a:spcPct val="102000"/>
               </a:lnSpc>
@@ -16209,7 +15607,43 @@
               </a:rPr>
               <a:t>·   </a:t>
             </a:r>
-            <a:pPr indent="0" marL="0">
+            <a:r>
+              <a:rPr lang="en-US" sz="1450" dirty="0">
+                <a:solidFill>
+                  <a:srgbClr val="E9E2D3"/>
+                </a:solidFill>
+                <a:latin typeface="Calibri" pitchFamily="34" charset="0"/>
+                <a:ea typeface="Calibri" pitchFamily="34" charset="-122"/>
+                <a:cs typeface="Calibri" pitchFamily="34" charset="-120"/>
+              </a:rPr>
+              <a:t>Symmetrical premium storefront</a:t>
+            </a:r>
+            <a:endParaRPr lang="en-US" sz="1450" dirty="0"/>
+          </a:p>
+        </p:txBody>
+      </p:sp>
+      <p:sp>
+        <p:nvSpPr>
+          <p:cNvPr id="10" name="Text 7"/>
+          <p:cNvSpPr/>
+          <p:nvPr/>
+        </p:nvSpPr>
+        <p:spPr>
+          <a:xfrm>
+            <a:off x="502920" y="3630168"/>
+            <a:ext cx="3429000" cy="640080"/>
+          </a:xfrm>
+          <a:prstGeom prst="rect">
+            <a:avLst/>
+          </a:prstGeom>
+          <a:noFill/>
+          <a:ln/>
+        </p:spPr>
+        <p:txBody>
+          <a:bodyPr wrap="square" rtlCol="0" anchor="t"/>
+          <a:lstStyle/>
+          <a:p>
+            <a:pPr marL="0" indent="0">
               <a:lnSpc>
                 <a:spcPct val="102000"/>
               </a:lnSpc>
@@ -16218,13 +15652,24 @@
             <a:r>
               <a:rPr lang="en-US" sz="1450" dirty="0">
                 <a:solidFill>
-                  <a:srgbClr val="E9E2D3"/>
+                  <a:srgbClr val="C6A24E"/>
                 </a:solidFill>
                 <a:latin typeface="Calibri" pitchFamily="34" charset="0"/>
                 <a:ea typeface="Calibri" pitchFamily="34" charset="-122"/>
                 <a:cs typeface="Calibri" pitchFamily="34" charset="-120"/>
               </a:rPr>
-              <a:t>Symmetrical premium storefront</a:t>
+              <a:t>·   </a:t>
+            </a:r>
+            <a:r>
+              <a:rPr lang="en-US" sz="1450" dirty="0">
+                <a:solidFill>
+                  <a:srgbClr val="E9E2D3"/>
+                </a:solidFill>
+                <a:latin typeface="Calibri" pitchFamily="34" charset="0"/>
+                <a:ea typeface="Calibri" pitchFamily="34" charset="-122"/>
+                <a:cs typeface="Calibri" pitchFamily="34" charset="-120"/>
+              </a:rPr>
+              <a:t>Illuminated brand seal as the hero</a:t>
             </a:r>
             <a:endParaRPr lang="en-US" sz="1450" dirty="0"/>
           </a:p>
@@ -16232,13 +15677,13 @@
       </p:sp>
       <p:sp>
         <p:nvSpPr>
-          <p:cNvPr id="10" name="Text 7"/>
-          <p:cNvSpPr/>
-          <p:nvPr/>
-        </p:nvSpPr>
-        <p:spPr>
-          <a:xfrm>
-            <a:off x="502920" y="3630168"/>
+          <p:cNvPr id="11" name="Text 8"/>
+          <p:cNvSpPr/>
+          <p:nvPr/>
+        </p:nvSpPr>
+        <p:spPr>
+          <a:xfrm>
+            <a:off x="502920" y="4288536"/>
             <a:ext cx="3429000" cy="640080"/>
           </a:xfrm>
           <a:prstGeom prst="rect">
@@ -16251,7 +15696,7 @@
           <a:bodyPr wrap="square" rtlCol="0" anchor="t"/>
           <a:lstStyle/>
           <a:p>
-            <a:pPr indent="0" marL="0">
+            <a:pPr marL="0" indent="0">
               <a:lnSpc>
                 <a:spcPct val="102000"/>
               </a:lnSpc>
@@ -16268,7 +15713,43 @@
               </a:rPr>
               <a:t>·   </a:t>
             </a:r>
-            <a:pPr indent="0" marL="0">
+            <a:r>
+              <a:rPr lang="en-US" sz="1450" dirty="0">
+                <a:solidFill>
+                  <a:srgbClr val="E9E2D3"/>
+                </a:solidFill>
+                <a:latin typeface="Calibri" pitchFamily="34" charset="0"/>
+                <a:ea typeface="Calibri" pitchFamily="34" charset="-122"/>
+                <a:cs typeface="Calibri" pitchFamily="34" charset="-120"/>
+              </a:rPr>
+              <a:t>Reed diffusers, candles &amp; gift sets staged</a:t>
+            </a:r>
+            <a:endParaRPr lang="en-US" sz="1450" dirty="0"/>
+          </a:p>
+        </p:txBody>
+      </p:sp>
+      <p:sp>
+        <p:nvSpPr>
+          <p:cNvPr id="12" name="Text 9"/>
+          <p:cNvSpPr/>
+          <p:nvPr/>
+        </p:nvSpPr>
+        <p:spPr>
+          <a:xfrm>
+            <a:off x="502920" y="4946904"/>
+            <a:ext cx="3429000" cy="640080"/>
+          </a:xfrm>
+          <a:prstGeom prst="rect">
+            <a:avLst/>
+          </a:prstGeom>
+          <a:noFill/>
+          <a:ln/>
+        </p:spPr>
+        <p:txBody>
+          <a:bodyPr wrap="square" rtlCol="0" anchor="t"/>
+          <a:lstStyle/>
+          <a:p>
+            <a:pPr marL="0" indent="0">
               <a:lnSpc>
                 <a:spcPct val="102000"/>
               </a:lnSpc>
@@ -16277,183 +15758,73 @@
             <a:r>
               <a:rPr lang="en-US" sz="1450" dirty="0">
                 <a:solidFill>
-                  <a:srgbClr val="E9E2D3"/>
+                  <a:srgbClr val="C6A24E"/>
                 </a:solidFill>
                 <a:latin typeface="Calibri" pitchFamily="34" charset="0"/>
                 <a:ea typeface="Calibri" pitchFamily="34" charset="-122"/>
                 <a:cs typeface="Calibri" pitchFamily="34" charset="-120"/>
               </a:rPr>
-              <a:t>Illuminated brand seal as the hero</a:t>
-            </a:r>
-            <a:endParaRPr lang="en-US" sz="1450" dirty="0"/>
-          </a:p>
-        </p:txBody>
-      </p:sp>
-      <p:sp>
-        <p:nvSpPr>
-          <p:cNvPr id="11" name="Text 8"/>
-          <p:cNvSpPr/>
-          <p:nvPr/>
-        </p:nvSpPr>
-        <p:spPr>
-          <a:xfrm>
-            <a:off x="502920" y="4288536"/>
-            <a:ext cx="3429000" cy="640080"/>
-          </a:xfrm>
-          <a:prstGeom prst="rect">
-            <a:avLst/>
-          </a:prstGeom>
-          <a:noFill/>
-          <a:ln/>
-        </p:spPr>
-        <p:txBody>
-          <a:bodyPr wrap="square" rtlCol="0" anchor="t"/>
-          <a:lstStyle/>
-          <a:p>
-            <a:pPr indent="0" marL="0">
-              <a:lnSpc>
-                <a:spcPct val="102000"/>
-              </a:lnSpc>
-              <a:buNone/>
-            </a:pPr>
+              <a:t>·   </a:t>
+            </a:r>
             <a:r>
               <a:rPr lang="en-US" sz="1450" dirty="0">
                 <a:solidFill>
-                  <a:srgbClr val="C6A24E"/>
+                  <a:srgbClr val="E9E2D3"/>
                 </a:solidFill>
                 <a:latin typeface="Calibri" pitchFamily="34" charset="0"/>
                 <a:ea typeface="Calibri" pitchFamily="34" charset="-122"/>
                 <a:cs typeface="Calibri" pitchFamily="34" charset="-120"/>
               </a:rPr>
-              <a:t>·   </a:t>
-            </a:r>
-            <a:pPr indent="0" marL="0">
-              <a:lnSpc>
-                <a:spcPct val="102000"/>
-              </a:lnSpc>
+              <a:t>Downlit header fascia &amp; warm LED base</a:t>
+            </a:r>
+            <a:endParaRPr lang="en-US" sz="1450" dirty="0"/>
+          </a:p>
+        </p:txBody>
+      </p:sp>
+      <p:sp>
+        <p:nvSpPr>
+          <p:cNvPr id="13" name="Text 10"/>
+          <p:cNvSpPr/>
+          <p:nvPr/>
+        </p:nvSpPr>
+        <p:spPr>
+          <a:xfrm>
+            <a:off x="457200" y="6419088"/>
+            <a:ext cx="7315200" cy="320040"/>
+          </a:xfrm>
+          <a:prstGeom prst="rect">
+            <a:avLst/>
+          </a:prstGeom>
+          <a:noFill/>
+          <a:ln/>
+        </p:spPr>
+        <p:txBody>
+          <a:bodyPr wrap="square" rtlCol="0" anchor="ctr"/>
+          <a:lstStyle/>
+          <a:p>
+            <a:pPr marL="0" indent="0" algn="l">
               <a:buNone/>
             </a:pPr>
             <a:r>
-              <a:rPr lang="en-US" sz="1450" dirty="0">
-                <a:solidFill>
-                  <a:srgbClr val="E9E2D3"/>
+              <a:rPr lang="en-US" sz="950" b="1" kern="0" spc="100" dirty="0">
+                <a:solidFill>
+                  <a:srgbClr val="C6A24E"/>
+                </a:solidFill>
+                <a:latin typeface="Cambria" pitchFamily="34" charset="0"/>
+                <a:ea typeface="Cambria" pitchFamily="34" charset="-122"/>
+                <a:cs typeface="Cambria" pitchFamily="34" charset="-120"/>
+              </a:rPr>
+              <a:t>DOFT</a:t>
+            </a:r>
+            <a:r>
+              <a:rPr lang="en-US" sz="950" kern="0" spc="100" dirty="0">
+                <a:solidFill>
+                  <a:srgbClr val="B8AE9C"/>
                 </a:solidFill>
                 <a:latin typeface="Calibri" pitchFamily="34" charset="0"/>
                 <a:ea typeface="Calibri" pitchFamily="34" charset="-122"/>
                 <a:cs typeface="Calibri" pitchFamily="34" charset="-120"/>
               </a:rPr>
-              <a:t>Reed diffusers, candles &amp; gift sets staged</a:t>
-            </a:r>
-            <a:endParaRPr lang="en-US" sz="1450" dirty="0"/>
-          </a:p>
-        </p:txBody>
-      </p:sp>
-      <p:sp>
-        <p:nvSpPr>
-          <p:cNvPr id="12" name="Text 9"/>
-          <p:cNvSpPr/>
-          <p:nvPr/>
-        </p:nvSpPr>
-        <p:spPr>
-          <a:xfrm>
-            <a:off x="502920" y="4946904"/>
-            <a:ext cx="3429000" cy="640080"/>
-          </a:xfrm>
-          <a:prstGeom prst="rect">
-            <a:avLst/>
-          </a:prstGeom>
-          <a:noFill/>
-          <a:ln/>
-        </p:spPr>
-        <p:txBody>
-          <a:bodyPr wrap="square" rtlCol="0" anchor="t"/>
-          <a:lstStyle/>
-          <a:p>
-            <a:pPr indent="0" marL="0">
-              <a:lnSpc>
-                <a:spcPct val="102000"/>
-              </a:lnSpc>
-              <a:buNone/>
-            </a:pPr>
-            <a:r>
-              <a:rPr lang="en-US" sz="1450" dirty="0">
-                <a:solidFill>
-                  <a:srgbClr val="C6A24E"/>
-                </a:solidFill>
-                <a:latin typeface="Calibri" pitchFamily="34" charset="0"/>
-                <a:ea typeface="Calibri" pitchFamily="34" charset="-122"/>
-                <a:cs typeface="Calibri" pitchFamily="34" charset="-120"/>
-              </a:rPr>
-              <a:t>·   </a:t>
-            </a:r>
-            <a:pPr indent="0" marL="0">
-              <a:lnSpc>
-                <a:spcPct val="102000"/>
-              </a:lnSpc>
-              <a:buNone/>
-            </a:pPr>
-            <a:r>
-              <a:rPr lang="en-US" sz="1450" dirty="0">
-                <a:solidFill>
-                  <a:srgbClr val="E9E2D3"/>
-                </a:solidFill>
-                <a:latin typeface="Calibri" pitchFamily="34" charset="0"/>
-                <a:ea typeface="Calibri" pitchFamily="34" charset="-122"/>
-                <a:cs typeface="Calibri" pitchFamily="34" charset="-120"/>
-              </a:rPr>
-              <a:t>Downlit header fascia &amp; warm LED base</a:t>
-            </a:r>
-            <a:endParaRPr lang="en-US" sz="1450" dirty="0"/>
-          </a:p>
-        </p:txBody>
-      </p:sp>
-      <p:sp>
-        <p:nvSpPr>
-          <p:cNvPr id="13" name="Text 10"/>
-          <p:cNvSpPr/>
-          <p:nvPr/>
-        </p:nvSpPr>
-        <p:spPr>
-          <a:xfrm>
-            <a:off x="457200" y="6419088"/>
-            <a:ext cx="7315200" cy="320040"/>
-          </a:xfrm>
-          <a:prstGeom prst="rect">
-            <a:avLst/>
-          </a:prstGeom>
-          <a:noFill/>
-          <a:ln/>
-        </p:spPr>
-        <p:txBody>
-          <a:bodyPr wrap="square" rtlCol="0" anchor="ctr"/>
-          <a:lstStyle/>
-          <a:p>
-            <a:pPr algn="l" indent="0" marL="0">
-              <a:buNone/>
-            </a:pPr>
-            <a:r>
-              <a:rPr lang="en-US" sz="950" b="1" spc="100" kern="0" dirty="0">
-                <a:solidFill>
-                  <a:srgbClr val="C6A24E"/>
-                </a:solidFill>
-                <a:latin typeface="Cambria" pitchFamily="34" charset="0"/>
-                <a:ea typeface="Cambria" pitchFamily="34" charset="-122"/>
-                <a:cs typeface="Cambria" pitchFamily="34" charset="-120"/>
-              </a:rPr>
-              <a:t>DOFT</a:t>
-            </a:r>
-            <a:pPr algn="l" indent="0" marL="0">
-              <a:buNone/>
-            </a:pPr>
-            <a:r>
-              <a:rPr lang="en-US" sz="950" spc="100" kern="0" dirty="0">
-                <a:solidFill>
-                  <a:srgbClr val="B8AE9C"/>
-                </a:solidFill>
-                <a:latin typeface="Calibri" pitchFamily="34" charset="0"/>
-                <a:ea typeface="Calibri" pitchFamily="34" charset="-122"/>
-                <a:cs typeface="Calibri" pitchFamily="34" charset="-120"/>
-              </a:rPr>
               <a:t>  ·  SCENTED MEMORIES  ·  Diwali Pop-Up Kiosk Concept</a:t>
             </a:r>
             <a:endParaRPr lang="en-US" sz="950" dirty="0"/>
@@ -16481,7 +15852,7 @@
           <a:bodyPr wrap="square" rtlCol="0" anchor="ctr"/>
           <a:lstStyle/>
           <a:p>
-            <a:pPr algn="r" indent="0" marL="0">
+            <a:pPr marL="0" indent="0" algn="r">
               <a:buNone/>
             </a:pPr>
             <a:r>
@@ -16523,6 +15894,13 @@
             <a:prstDash val="solid"/>
           </a:ln>
         </p:spPr>
+        <p:txBody>
+          <a:bodyPr/>
+          <a:lstStyle/>
+          <a:p>
+            <a:endParaRPr lang="en-US"/>
+          </a:p>
+        </p:txBody>
       </p:sp>
       <p:sp>
         <p:nvSpPr>
@@ -16545,7 +15923,7 @@
           <a:bodyPr wrap="square" rtlCol="0" anchor="ctr"/>
           <a:lstStyle/>
           <a:p>
-            <a:pPr algn="ctr" indent="0" marL="0">
+            <a:pPr marL="0" indent="0" algn="ctr">
               <a:buNone/>
             </a:pPr>
             <a:r>
@@ -16579,6 +15957,7 @@
         <a:solidFill>
           <a:srgbClr val="EFEAE0"/>
         </a:solidFill>
+        <a:effectLst/>
       </p:bgPr>
     </p:bg>
     <p:spTree>
@@ -16614,18 +15993,25 @@
           </a:solidFill>
           <a:ln/>
         </p:spPr>
+        <p:txBody>
+          <a:bodyPr/>
+          <a:lstStyle/>
+          <a:p>
+            <a:endParaRPr lang="en-US"/>
+          </a:p>
+        </p:txBody>
       </p:sp>
       <p:pic>
         <p:nvPicPr>
-          <p:cNvPr id="3" name="Image 0" descr="ref_imgs/P1_s1_1.jpg">    </p:cNvPr>
+          <p:cNvPr id="3" name="Image 0" descr="ref_imgs/P1_s1_1.jpg"/>
           <p:cNvPicPr>
             <a:picLocks noChangeAspect="1"/>
           </p:cNvPicPr>
           <p:nvPr/>
         </p:nvPicPr>
         <p:blipFill>
-          <a:blip r:embed="rId1"/>
-          <a:srcRect l="0" r="0" t="0" b="0"/>
+          <a:blip r:embed="rId3"/>
+          <a:srcRect/>
           <a:stretch/>
         </p:blipFill>
         <p:spPr>
@@ -16657,6 +16043,13 @@
           </a:solidFill>
           <a:ln/>
         </p:spPr>
+        <p:txBody>
+          <a:bodyPr/>
+          <a:lstStyle/>
+          <a:p>
+            <a:endParaRPr lang="en-US"/>
+          </a:p>
+        </p:txBody>
       </p:sp>
       <p:sp>
         <p:nvSpPr>
@@ -16677,6 +16070,13 @@
           </a:solidFill>
           <a:ln/>
         </p:spPr>
+        <p:txBody>
+          <a:bodyPr/>
+          <a:lstStyle/>
+          <a:p>
+            <a:endParaRPr lang="en-US"/>
+          </a:p>
+        </p:txBody>
       </p:sp>
       <p:sp>
         <p:nvSpPr>
@@ -16699,11 +16099,11 @@
           <a:bodyPr wrap="square" rtlCol="0" anchor="ctr"/>
           <a:lstStyle/>
           <a:p>
-            <a:pPr algn="l" indent="0" marL="0">
+            <a:pPr marL="0" indent="0" algn="l">
               <a:buNone/>
             </a:pPr>
             <a:r>
-              <a:rPr lang="en-US" sz="1250" b="1" spc="300" kern="0" dirty="0">
+              <a:rPr lang="en-US" sz="1250" b="1" kern="0" spc="300" dirty="0">
                 <a:solidFill>
                   <a:srgbClr val="C6A24E"/>
                 </a:solidFill>
@@ -16738,7 +16138,7 @@
           <a:bodyPr wrap="square" rtlCol="0" anchor="ctr"/>
           <a:lstStyle/>
           <a:p>
-            <a:pPr indent="0" marL="0">
+            <a:pPr marL="0" indent="0">
               <a:lnSpc>
                 <a:spcPct val="98000"/>
               </a:lnSpc>
@@ -16781,6 +16181,13 @@
             <a:prstDash val="solid"/>
           </a:ln>
         </p:spPr>
+        <p:txBody>
+          <a:bodyPr/>
+          <a:lstStyle/>
+          <a:p>
+            <a:endParaRPr lang="en-US"/>
+          </a:p>
+        </p:txBody>
       </p:sp>
       <p:sp>
         <p:nvSpPr>
@@ -16803,7 +16210,7 @@
           <a:bodyPr wrap="square" rtlCol="0" anchor="t"/>
           <a:lstStyle/>
           <a:p>
-            <a:pPr indent="0" marL="0">
+            <a:pPr marL="0" indent="0">
               <a:lnSpc>
                 <a:spcPct val="102000"/>
               </a:lnSpc>
@@ -16820,7 +16227,43 @@
               </a:rPr>
               <a:t>·   </a:t>
             </a:r>
-            <a:pPr indent="0" marL="0">
+            <a:r>
+              <a:rPr lang="en-US" sz="1450" dirty="0">
+                <a:solidFill>
+                  <a:srgbClr val="E9E2D3"/>
+                </a:solidFill>
+                <a:latin typeface="Calibri" pitchFamily="34" charset="0"/>
+                <a:ea typeface="Calibri" pitchFamily="34" charset="-122"/>
+                <a:cs typeface="Calibri" pitchFamily="34" charset="-120"/>
+              </a:rPr>
+              <a:t>Open-corner customer entry</a:t>
+            </a:r>
+            <a:endParaRPr lang="en-US" sz="1450" dirty="0"/>
+          </a:p>
+        </p:txBody>
+      </p:sp>
+      <p:sp>
+        <p:nvSpPr>
+          <p:cNvPr id="10" name="Text 7"/>
+          <p:cNvSpPr/>
+          <p:nvPr/>
+        </p:nvSpPr>
+        <p:spPr>
+          <a:xfrm>
+            <a:off x="8396935" y="3630168"/>
+            <a:ext cx="3429000" cy="640080"/>
+          </a:xfrm>
+          <a:prstGeom prst="rect">
+            <a:avLst/>
+          </a:prstGeom>
+          <a:noFill/>
+          <a:ln/>
+        </p:spPr>
+        <p:txBody>
+          <a:bodyPr wrap="square" rtlCol="0" anchor="t"/>
+          <a:lstStyle/>
+          <a:p>
+            <a:pPr marL="0" indent="0">
               <a:lnSpc>
                 <a:spcPct val="102000"/>
               </a:lnSpc>
@@ -16829,13 +16272,24 @@
             <a:r>
               <a:rPr lang="en-US" sz="1450" dirty="0">
                 <a:solidFill>
-                  <a:srgbClr val="E9E2D3"/>
+                  <a:srgbClr val="C6A24E"/>
                 </a:solidFill>
                 <a:latin typeface="Calibri" pitchFamily="34" charset="0"/>
                 <a:ea typeface="Calibri" pitchFamily="34" charset="-122"/>
                 <a:cs typeface="Calibri" pitchFamily="34" charset="-120"/>
               </a:rPr>
-              <a:t>Open-corner customer entry</a:t>
+              <a:t>·   </a:t>
+            </a:r>
+            <a:r>
+              <a:rPr lang="en-US" sz="1450" dirty="0">
+                <a:solidFill>
+                  <a:srgbClr val="E9E2D3"/>
+                </a:solidFill>
+                <a:latin typeface="Calibri" pitchFamily="34" charset="0"/>
+                <a:ea typeface="Calibri" pitchFamily="34" charset="-122"/>
+                <a:cs typeface="Calibri" pitchFamily="34" charset="-120"/>
+              </a:rPr>
+              <a:t>U-counter wraps the display zone</a:t>
             </a:r>
             <a:endParaRPr lang="en-US" sz="1450" dirty="0"/>
           </a:p>
@@ -16843,13 +16297,13 @@
       </p:sp>
       <p:sp>
         <p:nvSpPr>
-          <p:cNvPr id="10" name="Text 7"/>
-          <p:cNvSpPr/>
-          <p:nvPr/>
-        </p:nvSpPr>
-        <p:spPr>
-          <a:xfrm>
-            <a:off x="8396935" y="3630168"/>
+          <p:cNvPr id="11" name="Text 8"/>
+          <p:cNvSpPr/>
+          <p:nvPr/>
+        </p:nvSpPr>
+        <p:spPr>
+          <a:xfrm>
+            <a:off x="8396935" y="4288536"/>
             <a:ext cx="3429000" cy="640080"/>
           </a:xfrm>
           <a:prstGeom prst="rect">
@@ -16862,7 +16316,7 @@
           <a:bodyPr wrap="square" rtlCol="0" anchor="t"/>
           <a:lstStyle/>
           <a:p>
-            <a:pPr indent="0" marL="0">
+            <a:pPr marL="0" indent="0">
               <a:lnSpc>
                 <a:spcPct val="102000"/>
               </a:lnSpc>
@@ -16879,7 +16333,43 @@
               </a:rPr>
               <a:t>·   </a:t>
             </a:r>
-            <a:pPr indent="0" marL="0">
+            <a:r>
+              <a:rPr lang="en-US" sz="1450" dirty="0">
+                <a:solidFill>
+                  <a:srgbClr val="E9E2D3"/>
+                </a:solidFill>
+                <a:latin typeface="Calibri" pitchFamily="34" charset="0"/>
+                <a:ea typeface="Calibri" pitchFamily="34" charset="-122"/>
+                <a:cs typeface="Calibri" pitchFamily="34" charset="-120"/>
+              </a:rPr>
+              <a:t>Central table &amp; seating for gifting consults</a:t>
+            </a:r>
+            <a:endParaRPr lang="en-US" sz="1450" dirty="0"/>
+          </a:p>
+        </p:txBody>
+      </p:sp>
+      <p:sp>
+        <p:nvSpPr>
+          <p:cNvPr id="12" name="Text 9"/>
+          <p:cNvSpPr/>
+          <p:nvPr/>
+        </p:nvSpPr>
+        <p:spPr>
+          <a:xfrm>
+            <a:off x="8396935" y="4946904"/>
+            <a:ext cx="3429000" cy="640080"/>
+          </a:xfrm>
+          <a:prstGeom prst="rect">
+            <a:avLst/>
+          </a:prstGeom>
+          <a:noFill/>
+          <a:ln/>
+        </p:spPr>
+        <p:txBody>
+          <a:bodyPr wrap="square" rtlCol="0" anchor="t"/>
+          <a:lstStyle/>
+          <a:p>
+            <a:pPr marL="0" indent="0">
               <a:lnSpc>
                 <a:spcPct val="102000"/>
               </a:lnSpc>
@@ -16888,183 +16378,73 @@
             <a:r>
               <a:rPr lang="en-US" sz="1450" dirty="0">
                 <a:solidFill>
-                  <a:srgbClr val="E9E2D3"/>
+                  <a:srgbClr val="C6A24E"/>
                 </a:solidFill>
                 <a:latin typeface="Calibri" pitchFamily="34" charset="0"/>
                 <a:ea typeface="Calibri" pitchFamily="34" charset="-122"/>
                 <a:cs typeface="Calibri" pitchFamily="34" charset="-120"/>
               </a:rPr>
-              <a:t>U-counter wraps the display zone</a:t>
-            </a:r>
-            <a:endParaRPr lang="en-US" sz="1450" dirty="0"/>
-          </a:p>
-        </p:txBody>
-      </p:sp>
-      <p:sp>
-        <p:nvSpPr>
-          <p:cNvPr id="11" name="Text 8"/>
-          <p:cNvSpPr/>
-          <p:nvPr/>
-        </p:nvSpPr>
-        <p:spPr>
-          <a:xfrm>
-            <a:off x="8396935" y="4288536"/>
-            <a:ext cx="3429000" cy="640080"/>
-          </a:xfrm>
-          <a:prstGeom prst="rect">
-            <a:avLst/>
-          </a:prstGeom>
-          <a:noFill/>
-          <a:ln/>
-        </p:spPr>
-        <p:txBody>
-          <a:bodyPr wrap="square" rtlCol="0" anchor="t"/>
-          <a:lstStyle/>
-          <a:p>
-            <a:pPr indent="0" marL="0">
-              <a:lnSpc>
-                <a:spcPct val="102000"/>
-              </a:lnSpc>
-              <a:buNone/>
-            </a:pPr>
+              <a:t>·   </a:t>
+            </a:r>
             <a:r>
               <a:rPr lang="en-US" sz="1450" dirty="0">
                 <a:solidFill>
-                  <a:srgbClr val="C6A24E"/>
+                  <a:srgbClr val="E9E2D3"/>
                 </a:solidFill>
                 <a:latin typeface="Calibri" pitchFamily="34" charset="0"/>
                 <a:ea typeface="Calibri" pitchFamily="34" charset="-122"/>
                 <a:cs typeface="Calibri" pitchFamily="34" charset="-120"/>
               </a:rPr>
-              <a:t>·   </a:t>
-            </a:r>
-            <a:pPr indent="0" marL="0">
-              <a:lnSpc>
-                <a:spcPct val="102000"/>
-              </a:lnSpc>
+              <a:t>Digital brand screen at the aisle</a:t>
+            </a:r>
+            <a:endParaRPr lang="en-US" sz="1450" dirty="0"/>
+          </a:p>
+        </p:txBody>
+      </p:sp>
+      <p:sp>
+        <p:nvSpPr>
+          <p:cNvPr id="13" name="Text 10"/>
+          <p:cNvSpPr/>
+          <p:nvPr/>
+        </p:nvSpPr>
+        <p:spPr>
+          <a:xfrm>
+            <a:off x="457200" y="6419088"/>
+            <a:ext cx="7315200" cy="320040"/>
+          </a:xfrm>
+          <a:prstGeom prst="rect">
+            <a:avLst/>
+          </a:prstGeom>
+          <a:noFill/>
+          <a:ln/>
+        </p:spPr>
+        <p:txBody>
+          <a:bodyPr wrap="square" rtlCol="0" anchor="ctr"/>
+          <a:lstStyle/>
+          <a:p>
+            <a:pPr marL="0" indent="0" algn="l">
               <a:buNone/>
             </a:pPr>
             <a:r>
-              <a:rPr lang="en-US" sz="1450" dirty="0">
-                <a:solidFill>
-                  <a:srgbClr val="E9E2D3"/>
+              <a:rPr lang="en-US" sz="950" b="1" kern="0" spc="100" dirty="0">
+                <a:solidFill>
+                  <a:srgbClr val="C6A24E"/>
+                </a:solidFill>
+                <a:latin typeface="Cambria" pitchFamily="34" charset="0"/>
+                <a:ea typeface="Cambria" pitchFamily="34" charset="-122"/>
+                <a:cs typeface="Cambria" pitchFamily="34" charset="-120"/>
+              </a:rPr>
+              <a:t>DOFT</a:t>
+            </a:r>
+            <a:r>
+              <a:rPr lang="en-US" sz="950" kern="0" spc="100" dirty="0">
+                <a:solidFill>
+                  <a:srgbClr val="B8AE9C"/>
                 </a:solidFill>
                 <a:latin typeface="Calibri" pitchFamily="34" charset="0"/>
                 <a:ea typeface="Calibri" pitchFamily="34" charset="-122"/>
                 <a:cs typeface="Calibri" pitchFamily="34" charset="-120"/>
               </a:rPr>
-              <a:t>Central table &amp; seating for gifting consults</a:t>
-            </a:r>
-            <a:endParaRPr lang="en-US" sz="1450" dirty="0"/>
-          </a:p>
-        </p:txBody>
-      </p:sp>
-      <p:sp>
-        <p:nvSpPr>
-          <p:cNvPr id="12" name="Text 9"/>
-          <p:cNvSpPr/>
-          <p:nvPr/>
-        </p:nvSpPr>
-        <p:spPr>
-          <a:xfrm>
-            <a:off x="8396935" y="4946904"/>
-            <a:ext cx="3429000" cy="640080"/>
-          </a:xfrm>
-          <a:prstGeom prst="rect">
-            <a:avLst/>
-          </a:prstGeom>
-          <a:noFill/>
-          <a:ln/>
-        </p:spPr>
-        <p:txBody>
-          <a:bodyPr wrap="square" rtlCol="0" anchor="t"/>
-          <a:lstStyle/>
-          <a:p>
-            <a:pPr indent="0" marL="0">
-              <a:lnSpc>
-                <a:spcPct val="102000"/>
-              </a:lnSpc>
-              <a:buNone/>
-            </a:pPr>
-            <a:r>
-              <a:rPr lang="en-US" sz="1450" dirty="0">
-                <a:solidFill>
-                  <a:srgbClr val="C6A24E"/>
-                </a:solidFill>
-                <a:latin typeface="Calibri" pitchFamily="34" charset="0"/>
-                <a:ea typeface="Calibri" pitchFamily="34" charset="-122"/>
-                <a:cs typeface="Calibri" pitchFamily="34" charset="-120"/>
-              </a:rPr>
-              <a:t>·   </a:t>
-            </a:r>
-            <a:pPr indent="0" marL="0">
-              <a:lnSpc>
-                <a:spcPct val="102000"/>
-              </a:lnSpc>
-              <a:buNone/>
-            </a:pPr>
-            <a:r>
-              <a:rPr lang="en-US" sz="1450" dirty="0">
-                <a:solidFill>
-                  <a:srgbClr val="E9E2D3"/>
-                </a:solidFill>
-                <a:latin typeface="Calibri" pitchFamily="34" charset="0"/>
-                <a:ea typeface="Calibri" pitchFamily="34" charset="-122"/>
-                <a:cs typeface="Calibri" pitchFamily="34" charset="-120"/>
-              </a:rPr>
-              <a:t>Digital brand screen at the aisle</a:t>
-            </a:r>
-            <a:endParaRPr lang="en-US" sz="1450" dirty="0"/>
-          </a:p>
-        </p:txBody>
-      </p:sp>
-      <p:sp>
-        <p:nvSpPr>
-          <p:cNvPr id="13" name="Text 10"/>
-          <p:cNvSpPr/>
-          <p:nvPr/>
-        </p:nvSpPr>
-        <p:spPr>
-          <a:xfrm>
-            <a:off x="457200" y="6419088"/>
-            <a:ext cx="7315200" cy="320040"/>
-          </a:xfrm>
-          <a:prstGeom prst="rect">
-            <a:avLst/>
-          </a:prstGeom>
-          <a:noFill/>
-          <a:ln/>
-        </p:spPr>
-        <p:txBody>
-          <a:bodyPr wrap="square" rtlCol="0" anchor="ctr"/>
-          <a:lstStyle/>
-          <a:p>
-            <a:pPr algn="l" indent="0" marL="0">
-              <a:buNone/>
-            </a:pPr>
-            <a:r>
-              <a:rPr lang="en-US" sz="950" b="1" spc="100" kern="0" dirty="0">
-                <a:solidFill>
-                  <a:srgbClr val="C6A24E"/>
-                </a:solidFill>
-                <a:latin typeface="Cambria" pitchFamily="34" charset="0"/>
-                <a:ea typeface="Cambria" pitchFamily="34" charset="-122"/>
-                <a:cs typeface="Cambria" pitchFamily="34" charset="-120"/>
-              </a:rPr>
-              <a:t>DOFT</a:t>
-            </a:r>
-            <a:pPr algn="l" indent="0" marL="0">
-              <a:buNone/>
-            </a:pPr>
-            <a:r>
-              <a:rPr lang="en-US" sz="950" spc="100" kern="0" dirty="0">
-                <a:solidFill>
-                  <a:srgbClr val="B8AE9C"/>
-                </a:solidFill>
-                <a:latin typeface="Calibri" pitchFamily="34" charset="0"/>
-                <a:ea typeface="Calibri" pitchFamily="34" charset="-122"/>
-                <a:cs typeface="Calibri" pitchFamily="34" charset="-120"/>
-              </a:rPr>
               <a:t>  ·  SCENTED MEMORIES  ·  Diwali Pop-Up Kiosk Concept</a:t>
             </a:r>
             <a:endParaRPr lang="en-US" sz="950" dirty="0"/>
@@ -17092,7 +16472,7 @@
           <a:bodyPr wrap="square" rtlCol="0" anchor="ctr"/>
           <a:lstStyle/>
           <a:p>
-            <a:pPr algn="r" indent="0" marL="0">
+            <a:pPr marL="0" indent="0" algn="r">
               <a:buNone/>
             </a:pPr>
             <a:r>
@@ -17134,6 +16514,13 @@
             <a:prstDash val="solid"/>
           </a:ln>
         </p:spPr>
+        <p:txBody>
+          <a:bodyPr/>
+          <a:lstStyle/>
+          <a:p>
+            <a:endParaRPr lang="en-US"/>
+          </a:p>
+        </p:txBody>
       </p:sp>
       <p:sp>
         <p:nvSpPr>
@@ -17156,7 +16543,7 @@
           <a:bodyPr wrap="square" rtlCol="0" anchor="ctr"/>
           <a:lstStyle/>
           <a:p>
-            <a:pPr algn="ctr" indent="0" marL="0">
+            <a:pPr marL="0" indent="0" algn="ctr">
               <a:buNone/>
             </a:pPr>
             <a:r>
@@ -17190,6 +16577,7 @@
         <a:solidFill>
           <a:srgbClr val="FFFFFF"/>
         </a:solidFill>
+        <a:effectLst/>
       </p:bgPr>
     </p:bg>
     <p:spTree>
@@ -17227,11 +16615,11 @@
           <a:bodyPr wrap="square" rtlCol="0" anchor="ctr"/>
           <a:lstStyle/>
           <a:p>
-            <a:pPr algn="l" indent="0" marL="0">
+            <a:pPr marL="0" indent="0" algn="l">
               <a:buNone/>
             </a:pPr>
             <a:r>
-              <a:rPr lang="en-US" sz="1250" b="1" spc="300" kern="0" dirty="0">
+              <a:rPr lang="en-US" sz="1250" b="1" kern="0" spc="300" dirty="0">
                 <a:solidFill>
                   <a:srgbClr val="A9813A"/>
                 </a:solidFill>
@@ -17266,7 +16654,7 @@
           <a:bodyPr wrap="square" rtlCol="0" anchor="ctr"/>
           <a:lstStyle/>
           <a:p>
-            <a:pPr indent="0" marL="0">
+            <a:pPr marL="0" indent="0">
               <a:buNone/>
             </a:pPr>
             <a:r>
@@ -17286,15 +16674,15 @@
       </p:sp>
       <p:pic>
         <p:nvPicPr>
-          <p:cNvPr id="4" name="Image 0" descr="ref_imgs/P1_s5_5.jpg">    </p:cNvPr>
+          <p:cNvPr id="4" name="Image 0" descr="ref_imgs/P1_s5_5.jpg"/>
           <p:cNvPicPr>
             <a:picLocks noChangeAspect="1"/>
           </p:cNvPicPr>
           <p:nvPr/>
         </p:nvPicPr>
         <p:blipFill>
-          <a:blip r:embed="rId1"/>
-          <a:srcRect l="0" r="0" t="0" b="0"/>
+          <a:blip r:embed="rId3"/>
+          <a:srcRect/>
           <a:stretch/>
         </p:blipFill>
         <p:spPr>
@@ -17331,6 +16719,13 @@
             <a:prstDash val="solid"/>
           </a:ln>
         </p:spPr>
+        <p:txBody>
+          <a:bodyPr/>
+          <a:lstStyle/>
+          <a:p>
+            <a:endParaRPr lang="en-US"/>
+          </a:p>
+        </p:txBody>
       </p:sp>
       <p:sp>
         <p:nvSpPr>
@@ -17353,11 +16748,11 @@
           <a:bodyPr wrap="square" rtlCol="0" anchor="ctr"/>
           <a:lstStyle/>
           <a:p>
-            <a:pPr indent="0" marL="0">
+            <a:pPr marL="0" indent="0">
               <a:buNone/>
             </a:pPr>
             <a:r>
-              <a:rPr lang="en-US" sz="1300" b="1" spc="200" kern="0" dirty="0">
+              <a:rPr lang="en-US" sz="1300" b="1" kern="0" spc="200" dirty="0">
                 <a:solidFill>
                   <a:srgbClr val="A9813A"/>
                 </a:solidFill>
@@ -17390,6 +16785,13 @@
           </a:solidFill>
           <a:ln/>
         </p:spPr>
+        <p:txBody>
+          <a:bodyPr/>
+          <a:lstStyle/>
+          <a:p>
+            <a:endParaRPr lang="en-US"/>
+          </a:p>
+        </p:txBody>
       </p:sp>
       <p:sp>
         <p:nvSpPr>
@@ -17412,7 +16814,7 @@
           <a:bodyPr wrap="square" rtlCol="0" anchor="ctr"/>
           <a:lstStyle/>
           <a:p>
-            <a:pPr indent="0" marL="0">
+            <a:pPr marL="0" indent="0">
               <a:buNone/>
             </a:pPr>
             <a:r>
@@ -17451,7 +16853,7 @@
           <a:bodyPr wrap="square" rtlCol="0" anchor="ctr"/>
           <a:lstStyle/>
           <a:p>
-            <a:pPr indent="0" marL="0">
+            <a:pPr marL="0" indent="0">
               <a:lnSpc>
                 <a:spcPct val="95000"/>
               </a:lnSpc>
@@ -17491,6 +16893,13 @@
           </a:solidFill>
           <a:ln/>
         </p:spPr>
+        <p:txBody>
+          <a:bodyPr/>
+          <a:lstStyle/>
+          <a:p>
+            <a:endParaRPr lang="en-US"/>
+          </a:p>
+        </p:txBody>
       </p:sp>
       <p:sp>
         <p:nvSpPr>
@@ -17513,7 +16922,7 @@
           <a:bodyPr wrap="square" rtlCol="0" anchor="ctr"/>
           <a:lstStyle/>
           <a:p>
-            <a:pPr indent="0" marL="0">
+            <a:pPr marL="0" indent="0">
               <a:buNone/>
             </a:pPr>
             <a:r>
@@ -17552,7 +16961,7 @@
           <a:bodyPr wrap="square" rtlCol="0" anchor="ctr"/>
           <a:lstStyle/>
           <a:p>
-            <a:pPr indent="0" marL="0">
+            <a:pPr marL="0" indent="0">
               <a:lnSpc>
                 <a:spcPct val="95000"/>
               </a:lnSpc>
@@ -17592,6 +17001,13 @@
           </a:solidFill>
           <a:ln/>
         </p:spPr>
+        <p:txBody>
+          <a:bodyPr/>
+          <a:lstStyle/>
+          <a:p>
+            <a:endParaRPr lang="en-US"/>
+          </a:p>
+        </p:txBody>
       </p:sp>
       <p:sp>
         <p:nvSpPr>
@@ -17614,7 +17030,7 @@
           <a:bodyPr wrap="square" rtlCol="0" anchor="ctr"/>
           <a:lstStyle/>
           <a:p>
-            <a:pPr indent="0" marL="0">
+            <a:pPr marL="0" indent="0">
               <a:buNone/>
             </a:pPr>
             <a:r>
@@ -17653,7 +17069,7 @@
           <a:bodyPr wrap="square" rtlCol="0" anchor="ctr"/>
           <a:lstStyle/>
           <a:p>
-            <a:pPr indent="0" marL="0">
+            <a:pPr marL="0" indent="0">
               <a:lnSpc>
                 <a:spcPct val="95000"/>
               </a:lnSpc>
@@ -17693,6 +17109,13 @@
           </a:solidFill>
           <a:ln/>
         </p:spPr>
+        <p:txBody>
+          <a:bodyPr/>
+          <a:lstStyle/>
+          <a:p>
+            <a:endParaRPr lang="en-US"/>
+          </a:p>
+        </p:txBody>
       </p:sp>
       <p:sp>
         <p:nvSpPr>
@@ -17715,7 +17138,7 @@
           <a:bodyPr wrap="square" rtlCol="0" anchor="ctr"/>
           <a:lstStyle/>
           <a:p>
-            <a:pPr indent="0" marL="0">
+            <a:pPr marL="0" indent="0">
               <a:buNone/>
             </a:pPr>
             <a:r>
@@ -17754,7 +17177,7 @@
           <a:bodyPr wrap="square" rtlCol="0" anchor="ctr"/>
           <a:lstStyle/>
           <a:p>
-            <a:pPr indent="0" marL="0">
+            <a:pPr marL="0" indent="0">
               <a:lnSpc>
                 <a:spcPct val="95000"/>
               </a:lnSpc>
@@ -17794,6 +17217,13 @@
           </a:solidFill>
           <a:ln/>
         </p:spPr>
+        <p:txBody>
+          <a:bodyPr/>
+          <a:lstStyle/>
+          <a:p>
+            <a:endParaRPr lang="en-US"/>
+          </a:p>
+        </p:txBody>
       </p:sp>
       <p:sp>
         <p:nvSpPr>
@@ -17816,7 +17246,7 @@
           <a:bodyPr wrap="square" rtlCol="0" anchor="ctr"/>
           <a:lstStyle/>
           <a:p>
-            <a:pPr indent="0" marL="0">
+            <a:pPr marL="0" indent="0">
               <a:buNone/>
             </a:pPr>
             <a:r>
@@ -17855,7 +17285,7 @@
           <a:bodyPr wrap="square" rtlCol="0" anchor="ctr"/>
           <a:lstStyle/>
           <a:p>
-            <a:pPr indent="0" marL="0">
+            <a:pPr marL="0" indent="0">
               <a:lnSpc>
                 <a:spcPct val="95000"/>
               </a:lnSpc>
@@ -17897,11 +17327,11 @@
           <a:bodyPr wrap="square" rtlCol="0" anchor="ctr"/>
           <a:lstStyle/>
           <a:p>
-            <a:pPr algn="l" indent="0" marL="0">
+            <a:pPr marL="0" indent="0" algn="l">
               <a:buNone/>
             </a:pPr>
             <a:r>
-              <a:rPr lang="en-US" sz="950" b="1" spc="100" kern="0" dirty="0">
+              <a:rPr lang="en-US" sz="950" b="1" kern="0" spc="100" dirty="0">
                 <a:solidFill>
                   <a:srgbClr val="C6A24E"/>
                 </a:solidFill>
@@ -17911,11 +17341,8 @@
               </a:rPr>
               <a:t>DOFT</a:t>
             </a:r>
-            <a:pPr algn="l" indent="0" marL="0">
-              <a:buNone/>
-            </a:pPr>
-            <a:r>
-              <a:rPr lang="en-US" sz="950" spc="100" kern="0" dirty="0">
+            <a:r>
+              <a:rPr lang="en-US" sz="950" kern="0" spc="100" dirty="0">
                 <a:solidFill>
                   <a:srgbClr val="857B6C"/>
                 </a:solidFill>
@@ -17950,7 +17377,7 @@
           <a:bodyPr wrap="square" rtlCol="0" anchor="ctr"/>
           <a:lstStyle/>
           <a:p>
-            <a:pPr algn="r" indent="0" marL="0">
+            <a:pPr marL="0" indent="0" algn="r">
               <a:buNone/>
             </a:pPr>
             <a:r>
@@ -17992,6 +17419,13 @@
             <a:prstDash val="solid"/>
           </a:ln>
         </p:spPr>
+        <p:txBody>
+          <a:bodyPr/>
+          <a:lstStyle/>
+          <a:p>
+            <a:endParaRPr lang="en-US"/>
+          </a:p>
+        </p:txBody>
       </p:sp>
       <p:sp>
         <p:nvSpPr>
@@ -18014,7 +17448,7 @@
           <a:bodyPr wrap="square" rtlCol="0" anchor="ctr"/>
           <a:lstStyle/>
           <a:p>
-            <a:pPr algn="ctr" indent="0" marL="0">
+            <a:pPr marL="0" indent="0" algn="ctr">
               <a:buNone/>
             </a:pPr>
             <a:r>
@@ -18048,6 +17482,7 @@
         <a:solidFill>
           <a:srgbClr val="FFFFFF"/>
         </a:solidFill>
+        <a:effectLst/>
       </p:bgPr>
     </p:bg>
     <p:spTree>
@@ -18085,11 +17520,11 @@
           <a:bodyPr wrap="square" rtlCol="0" anchor="ctr"/>
           <a:lstStyle/>
           <a:p>
-            <a:pPr algn="l" indent="0" marL="0">
+            <a:pPr marL="0" indent="0" algn="l">
               <a:buNone/>
             </a:pPr>
             <a:r>
-              <a:rPr lang="en-US" sz="1250" b="1" spc="300" kern="0" dirty="0">
+              <a:rPr lang="en-US" sz="1250" b="1" kern="0" spc="300" dirty="0">
                 <a:solidFill>
                   <a:srgbClr val="A9813A"/>
                 </a:solidFill>
@@ -18124,7 +17559,7 @@
           <a:bodyPr wrap="square" rtlCol="0" anchor="ctr"/>
           <a:lstStyle/>
           <a:p>
-            <a:pPr indent="0" marL="0">
+            <a:pPr marL="0" indent="0">
               <a:buNone/>
             </a:pPr>
             <a:r>
@@ -18166,6 +17601,13 @@
             <a:prstDash val="solid"/>
           </a:ln>
         </p:spPr>
+        <p:txBody>
+          <a:bodyPr/>
+          <a:lstStyle/>
+          <a:p>
+            <a:endParaRPr lang="en-US"/>
+          </a:p>
+        </p:txBody>
       </p:sp>
       <p:sp>
         <p:nvSpPr>
@@ -18188,7 +17630,7 @@
           <a:bodyPr wrap="square" rtlCol="0" anchor="ctr"/>
           <a:lstStyle/>
           <a:p>
-            <a:pPr indent="0" marL="0">
+            <a:pPr marL="0" indent="0">
               <a:buNone/>
             </a:pPr>
             <a:r>
@@ -18227,7 +17669,7 @@
           <a:bodyPr wrap="square" rtlCol="0" anchor="ctr"/>
           <a:lstStyle/>
           <a:p>
-            <a:pPr indent="0" marL="0">
+            <a:pPr marL="0" indent="0">
               <a:buNone/>
             </a:pPr>
             <a:r>
@@ -18269,6 +17711,13 @@
             <a:prstDash val="solid"/>
           </a:ln>
         </p:spPr>
+        <p:txBody>
+          <a:bodyPr/>
+          <a:lstStyle/>
+          <a:p>
+            <a:endParaRPr lang="en-US"/>
+          </a:p>
+        </p:txBody>
       </p:sp>
       <p:sp>
         <p:nvSpPr>
@@ -18291,7 +17740,7 @@
           <a:bodyPr wrap="square" rtlCol="0" anchor="ctr"/>
           <a:lstStyle/>
           <a:p>
-            <a:pPr indent="0" marL="0">
+            <a:pPr marL="0" indent="0">
               <a:buNone/>
             </a:pPr>
             <a:r>
@@ -18330,7 +17779,7 @@
           <a:bodyPr wrap="square" rtlCol="0" anchor="ctr"/>
           <a:lstStyle/>
           <a:p>
-            <a:pPr indent="0" marL="0">
+            <a:pPr marL="0" indent="0">
               <a:buNone/>
             </a:pPr>
             <a:r>
@@ -18372,6 +17821,13 @@
             <a:prstDash val="solid"/>
           </a:ln>
         </p:spPr>
+        <p:txBody>
+          <a:bodyPr/>
+          <a:lstStyle/>
+          <a:p>
+            <a:endParaRPr lang="en-US"/>
+          </a:p>
+        </p:txBody>
       </p:sp>
       <p:sp>
         <p:nvSpPr>
@@ -18394,7 +17850,7 @@
           <a:bodyPr wrap="square" rtlCol="0" anchor="ctr"/>
           <a:lstStyle/>
           <a:p>
-            <a:pPr indent="0" marL="0">
+            <a:pPr marL="0" indent="0">
               <a:buNone/>
             </a:pPr>
             <a:r>
@@ -18433,7 +17889,7 @@
           <a:bodyPr wrap="square" rtlCol="0" anchor="ctr"/>
           <a:lstStyle/>
           <a:p>
-            <a:pPr indent="0" marL="0">
+            <a:pPr marL="0" indent="0">
               <a:buNone/>
             </a:pPr>
             <a:r>
@@ -18475,6 +17931,13 @@
             <a:prstDash val="solid"/>
           </a:ln>
         </p:spPr>
+        <p:txBody>
+          <a:bodyPr/>
+          <a:lstStyle/>
+          <a:p>
+            <a:endParaRPr lang="en-US"/>
+          </a:p>
+        </p:txBody>
       </p:sp>
       <p:sp>
         <p:nvSpPr>
@@ -18497,7 +17960,7 @@
           <a:bodyPr wrap="square" rtlCol="0" anchor="ctr"/>
           <a:lstStyle/>
           <a:p>
-            <a:pPr indent="0" marL="0">
+            <a:pPr marL="0" indent="0">
               <a:buNone/>
             </a:pPr>
             <a:r>
@@ -18536,7 +17999,7 @@
           <a:bodyPr wrap="square" rtlCol="0" anchor="ctr"/>
           <a:lstStyle/>
           <a:p>
-            <a:pPr indent="0" marL="0">
+            <a:pPr marL="0" indent="0">
               <a:buNone/>
             </a:pPr>
             <a:r>
@@ -18578,6 +18041,13 @@
             <a:prstDash val="solid"/>
           </a:ln>
         </p:spPr>
+        <p:txBody>
+          <a:bodyPr/>
+          <a:lstStyle/>
+          <a:p>
+            <a:endParaRPr lang="en-US"/>
+          </a:p>
+        </p:txBody>
       </p:sp>
       <p:sp>
         <p:nvSpPr>
@@ -18600,7 +18070,7 @@
           <a:bodyPr wrap="square" rtlCol="0" anchor="ctr"/>
           <a:lstStyle/>
           <a:p>
-            <a:pPr indent="0" marL="0">
+            <a:pPr marL="0" indent="0">
               <a:buNone/>
             </a:pPr>
             <a:r>
@@ -18639,7 +18109,7 @@
           <a:bodyPr wrap="square" rtlCol="0" anchor="ctr"/>
           <a:lstStyle/>
           <a:p>
-            <a:pPr indent="0" marL="0">
+            <a:pPr marL="0" indent="0">
               <a:buNone/>
             </a:pPr>
             <a:r>
@@ -18681,6 +18151,13 @@
             <a:prstDash val="solid"/>
           </a:ln>
         </p:spPr>
+        <p:txBody>
+          <a:bodyPr/>
+          <a:lstStyle/>
+          <a:p>
+            <a:endParaRPr lang="en-US"/>
+          </a:p>
+        </p:txBody>
       </p:sp>
       <p:sp>
         <p:nvSpPr>
@@ -18703,7 +18180,7 @@
           <a:bodyPr wrap="square" rtlCol="0" anchor="ctr"/>
           <a:lstStyle/>
           <a:p>
-            <a:pPr indent="0" marL="0">
+            <a:pPr marL="0" indent="0">
               <a:buNone/>
             </a:pPr>
             <a:r>
@@ -18742,7 +18219,7 @@
           <a:bodyPr wrap="square" rtlCol="0" anchor="ctr"/>
           <a:lstStyle/>
           <a:p>
-            <a:pPr indent="0" marL="0">
+            <a:pPr marL="0" indent="0">
               <a:buNone/>
             </a:pPr>
             <a:r>
@@ -18781,11 +18258,11 @@
           <a:bodyPr wrap="square" rtlCol="0" anchor="ctr"/>
           <a:lstStyle/>
           <a:p>
-            <a:pPr algn="l" indent="0" marL="0">
+            <a:pPr marL="0" indent="0" algn="l">
               <a:buNone/>
             </a:pPr>
             <a:r>
-              <a:rPr lang="en-US" sz="950" b="1" spc="100" kern="0" dirty="0">
+              <a:rPr lang="en-US" sz="950" b="1" kern="0" spc="100" dirty="0">
                 <a:solidFill>
                   <a:srgbClr val="C6A24E"/>
                 </a:solidFill>
@@ -18795,11 +18272,8 @@
               </a:rPr>
               <a:t>DOFT</a:t>
             </a:r>
-            <a:pPr algn="l" indent="0" marL="0">
-              <a:buNone/>
-            </a:pPr>
-            <a:r>
-              <a:rPr lang="en-US" sz="950" spc="100" kern="0" dirty="0">
+            <a:r>
+              <a:rPr lang="en-US" sz="950" kern="0" spc="100" dirty="0">
                 <a:solidFill>
                   <a:srgbClr val="857B6C"/>
                 </a:solidFill>
@@ -18834,7 +18308,7 @@
           <a:bodyPr wrap="square" rtlCol="0" anchor="ctr"/>
           <a:lstStyle/>
           <a:p>
-            <a:pPr algn="r" indent="0" marL="0">
+            <a:pPr marL="0" indent="0" algn="r">
               <a:buNone/>
             </a:pPr>
             <a:r>
@@ -18876,6 +18350,13 @@
             <a:prstDash val="solid"/>
           </a:ln>
         </p:spPr>
+        <p:txBody>
+          <a:bodyPr/>
+          <a:lstStyle/>
+          <a:p>
+            <a:endParaRPr lang="en-US"/>
+          </a:p>
+        </p:txBody>
       </p:sp>
       <p:sp>
         <p:nvSpPr>
@@ -18898,7 +18379,7 @@
           <a:bodyPr wrap="square" rtlCol="0" anchor="ctr"/>
           <a:lstStyle/>
           <a:p>
-            <a:pPr algn="ctr" indent="0" marL="0">
+            <a:pPr marL="0" indent="0" algn="ctr">
               <a:buNone/>
             </a:pPr>
             <a:r>
@@ -18932,6 +18413,7 @@
         <a:solidFill>
           <a:srgbClr val="1E1B17"/>
         </a:solidFill>
+        <a:effectLst/>
       </p:bgPr>
     </p:bg>
     <p:spTree>
@@ -18969,11 +18451,11 @@
           <a:bodyPr wrap="square" rtlCol="0" anchor="ctr"/>
           <a:lstStyle/>
           <a:p>
-            <a:pPr algn="l" indent="0" marL="0">
+            <a:pPr marL="0" indent="0" algn="l">
               <a:buNone/>
             </a:pPr>
             <a:r>
-              <a:rPr lang="en-US" sz="1250" b="1" spc="300" kern="0" dirty="0">
+              <a:rPr lang="en-US" sz="1250" b="1" kern="0" spc="300" dirty="0">
                 <a:solidFill>
                   <a:srgbClr val="C6A24E"/>
                 </a:solidFill>
@@ -19008,7 +18490,7 @@
           <a:bodyPr wrap="square" rtlCol="0" anchor="ctr"/>
           <a:lstStyle/>
           <a:p>
-            <a:pPr indent="0" marL="0">
+            <a:pPr marL="0" indent="0">
               <a:buNone/>
             </a:pPr>
             <a:r>
@@ -19047,7 +18529,7 @@
           <a:bodyPr wrap="square" rtlCol="0" anchor="ctr"/>
           <a:lstStyle/>
           <a:p>
-            <a:pPr indent="0" marL="0">
+            <a:pPr marL="0" indent="0">
               <a:buNone/>
             </a:pPr>
             <a:r>
@@ -19089,18 +18571,25 @@
             <a:prstDash val="solid"/>
           </a:ln>
         </p:spPr>
+        <p:txBody>
+          <a:bodyPr/>
+          <a:lstStyle/>
+          <a:p>
+            <a:endParaRPr lang="en-US"/>
+          </a:p>
+        </p:txBody>
       </p:sp>
       <p:pic>
         <p:nvPicPr>
-          <p:cNvPr id="6" name="Image 0" descr="brief_assets/DOFT/16871dda-65d9-4f51-acfd-b2b5ad6183e9.JPG">    </p:cNvPr>
+          <p:cNvPr id="6" name="Image 0" descr="brief_assets/DOFT/16871dda-65d9-4f51-acfd-b2b5ad6183e9.JPG"/>
           <p:cNvPicPr>
             <a:picLocks noChangeAspect="1"/>
           </p:cNvPicPr>
           <p:nvPr/>
         </p:nvPicPr>
         <p:blipFill>
-          <a:blip r:embed="rId1"/>
-          <a:srcRect l="0" r="0" t="0" b="0"/>
+          <a:blip r:embed="rId3"/>
+          <a:srcRect/>
           <a:stretch/>
         </p:blipFill>
         <p:spPr>
@@ -19134,7 +18623,7 @@
           <a:bodyPr wrap="square" rtlCol="0" anchor="ctr"/>
           <a:lstStyle/>
           <a:p>
-            <a:pPr algn="ctr" indent="0" marL="0">
+            <a:pPr marL="0" indent="0" algn="ctr">
               <a:buNone/>
             </a:pPr>
             <a:r>
@@ -19176,18 +18665,25 @@
             <a:prstDash val="solid"/>
           </a:ln>
         </p:spPr>
+        <p:txBody>
+          <a:bodyPr/>
+          <a:lstStyle/>
+          <a:p>
+            <a:endParaRPr lang="en-US"/>
+          </a:p>
+        </p:txBody>
       </p:sp>
       <p:pic>
         <p:nvPicPr>
-          <p:cNvPr id="9" name="Image 1" descr="brief_assets/DOFT/5dc4e2f7-31d9-4a47-ba1e-1ed1f98adf47.JPG">    </p:cNvPr>
+          <p:cNvPr id="9" name="Image 1" descr="brief_assets/DOFT/5dc4e2f7-31d9-4a47-ba1e-1ed1f98adf47.JPG"/>
           <p:cNvPicPr>
             <a:picLocks noChangeAspect="1"/>
           </p:cNvPicPr>
           <p:nvPr/>
         </p:nvPicPr>
         <p:blipFill>
-          <a:blip r:embed="rId2"/>
-          <a:srcRect l="0" r="0" t="0" b="0"/>
+          <a:blip r:embed="rId4"/>
+          <a:srcRect/>
           <a:stretch/>
         </p:blipFill>
         <p:spPr>
@@ -19221,7 +18717,7 @@
           <a:bodyPr wrap="square" rtlCol="0" anchor="ctr"/>
           <a:lstStyle/>
           <a:p>
-            <a:pPr algn="ctr" indent="0" marL="0">
+            <a:pPr marL="0" indent="0" algn="ctr">
               <a:buNone/>
             </a:pPr>
             <a:r>
@@ -19263,18 +18759,25 @@
             <a:prstDash val="solid"/>
           </a:ln>
         </p:spPr>
+        <p:txBody>
+          <a:bodyPr/>
+          <a:lstStyle/>
+          <a:p>
+            <a:endParaRPr lang="en-US"/>
+          </a:p>
+        </p:txBody>
       </p:sp>
       <p:pic>
         <p:nvPicPr>
-          <p:cNvPr id="12" name="Image 2" descr="brief_assets/DOFT/14f3dd5c-717d-40c6-9314-74ee5f820af0.JPG">    </p:cNvPr>
+          <p:cNvPr id="12" name="Image 2" descr="brief_assets/DOFT/14f3dd5c-717d-40c6-9314-74ee5f820af0.JPG"/>
           <p:cNvPicPr>
             <a:picLocks noChangeAspect="1"/>
           </p:cNvPicPr>
           <p:nvPr/>
         </p:nvPicPr>
         <p:blipFill>
-          <a:blip r:embed="rId3"/>
-          <a:srcRect l="0" r="0" t="0" b="0"/>
+          <a:blip r:embed="rId5"/>
+          <a:srcRect/>
           <a:stretch/>
         </p:blipFill>
         <p:spPr>
@@ -19308,7 +18811,7 @@
           <a:bodyPr wrap="square" rtlCol="0" anchor="ctr"/>
           <a:lstStyle/>
           <a:p>
-            <a:pPr algn="ctr" indent="0" marL="0">
+            <a:pPr marL="0" indent="0" algn="ctr">
               <a:buNone/>
             </a:pPr>
             <a:r>
@@ -19350,18 +18853,25 @@
             <a:prstDash val="solid"/>
           </a:ln>
         </p:spPr>
+        <p:txBody>
+          <a:bodyPr/>
+          <a:lstStyle/>
+          <a:p>
+            <a:endParaRPr lang="en-US"/>
+          </a:p>
+        </p:txBody>
       </p:sp>
       <p:pic>
         <p:nvPicPr>
-          <p:cNvPr id="15" name="Image 3" descr="brief_assets/DOFT/66d435a3-c7c1-44d9-b723-01f7df92b433.JPG">    </p:cNvPr>
+          <p:cNvPr id="15" name="Image 3" descr="brief_assets/DOFT/66d435a3-c7c1-44d9-b723-01f7df92b433.JPG"/>
           <p:cNvPicPr>
             <a:picLocks noChangeAspect="1"/>
           </p:cNvPicPr>
           <p:nvPr/>
         </p:nvPicPr>
         <p:blipFill>
-          <a:blip r:embed="rId4"/>
-          <a:srcRect l="0" r="0" t="0" b="0"/>
+          <a:blip r:embed="rId6"/>
+          <a:srcRect/>
           <a:stretch/>
         </p:blipFill>
         <p:spPr>
@@ -19395,7 +18905,7 @@
           <a:bodyPr wrap="square" rtlCol="0" anchor="ctr"/>
           <a:lstStyle/>
           <a:p>
-            <a:pPr algn="ctr" indent="0" marL="0">
+            <a:pPr marL="0" indent="0" algn="ctr">
               <a:buNone/>
             </a:pPr>
             <a:r>
@@ -19434,11 +18944,11 @@
           <a:bodyPr wrap="square" rtlCol="0" anchor="ctr"/>
           <a:lstStyle/>
           <a:p>
-            <a:pPr algn="l" indent="0" marL="0">
+            <a:pPr marL="0" indent="0" algn="l">
               <a:buNone/>
             </a:pPr>
             <a:r>
-              <a:rPr lang="en-US" sz="950" b="1" spc="100" kern="0" dirty="0">
+              <a:rPr lang="en-US" sz="950" b="1" kern="0" spc="100" dirty="0">
                 <a:solidFill>
                   <a:srgbClr val="C6A24E"/>
                 </a:solidFill>
@@ -19448,11 +18958,8 @@
               </a:rPr>
               <a:t>DOFT</a:t>
             </a:r>
-            <a:pPr algn="l" indent="0" marL="0">
-              <a:buNone/>
-            </a:pPr>
-            <a:r>
-              <a:rPr lang="en-US" sz="950" spc="100" kern="0" dirty="0">
+            <a:r>
+              <a:rPr lang="en-US" sz="950" kern="0" spc="100" dirty="0">
                 <a:solidFill>
                   <a:srgbClr val="B8AE9C"/>
                 </a:solidFill>
@@ -19487,7 +18994,7 @@
           <a:bodyPr wrap="square" rtlCol="0" anchor="ctr"/>
           <a:lstStyle/>
           <a:p>
-            <a:pPr algn="r" indent="0" marL="0">
+            <a:pPr marL="0" indent="0" algn="r">
               <a:buNone/>
             </a:pPr>
             <a:r>
@@ -19529,6 +19036,13 @@
             <a:prstDash val="solid"/>
           </a:ln>
         </p:spPr>
+        <p:txBody>
+          <a:bodyPr/>
+          <a:lstStyle/>
+          <a:p>
+            <a:endParaRPr lang="en-US"/>
+          </a:p>
+        </p:txBody>
       </p:sp>
       <p:sp>
         <p:nvSpPr>
@@ -19551,7 +19065,7 @@
           <a:bodyPr wrap="square" rtlCol="0" anchor="ctr"/>
           <a:lstStyle/>
           <a:p>
-            <a:pPr algn="ctr" indent="0" marL="0">
+            <a:pPr marL="0" indent="0" algn="ctr">
               <a:buNone/>
             </a:pPr>
             <a:r>
@@ -19870,4 +19384,319 @@
     </a:ext>
   </a:extLst>
 </a:theme>
+</file>
+
+<file path=ppt/theme/theme2.xml><?xml version="1.0" encoding="utf-8"?>
+<a:theme xmlns:a="http://schemas.openxmlformats.org/drawingml/2006/main" name="Office Theme">
+  <a:themeElements>
+    <a:clrScheme name="Office">
+      <a:dk1>
+        <a:sysClr val="windowText" lastClr="000000"/>
+      </a:dk1>
+      <a:lt1>
+        <a:sysClr val="window" lastClr="FFFFFF"/>
+      </a:lt1>
+      <a:dk2>
+        <a:srgbClr val="0E2841"/>
+      </a:dk2>
+      <a:lt2>
+        <a:srgbClr val="E8E8E8"/>
+      </a:lt2>
+      <a:accent1>
+        <a:srgbClr val="156082"/>
+      </a:accent1>
+      <a:accent2>
+        <a:srgbClr val="E97132"/>
+      </a:accent2>
+      <a:accent3>
+        <a:srgbClr val="196B24"/>
+      </a:accent3>
+      <a:accent4>
+        <a:srgbClr val="0F9ED5"/>
+      </a:accent4>
+      <a:accent5>
+        <a:srgbClr val="A02B93"/>
+      </a:accent5>
+      <a:accent6>
+        <a:srgbClr val="4EA72E"/>
+      </a:accent6>
+      <a:hlink>
+        <a:srgbClr val="467886"/>
+      </a:hlink>
+      <a:folHlink>
+        <a:srgbClr val="96607D"/>
+      </a:folHlink>
+    </a:clrScheme>
+    <a:fontScheme name="Office">
+      <a:majorFont>
+        <a:latin typeface="Aptos Display" panose="02110004020202020204"/>
+        <a:ea typeface=""/>
+        <a:cs typeface=""/>
+        <a:font script="Jpan" typeface="游ゴシック Light"/>
+        <a:font script="Hang" typeface="맑은 고딕"/>
+        <a:font script="Hans" typeface="等线 Light"/>
+        <a:font script="Hant" typeface="新細明體"/>
+        <a:font script="Arab" typeface="Times New Roman"/>
+        <a:font script="Hebr" typeface="Times New Roman"/>
+        <a:font script="Thai" typeface="Angsana New"/>
+        <a:font script="Ethi" typeface="Nyala"/>
+        <a:font script="Beng" typeface="Vrinda"/>
+        <a:font script="Gujr" typeface="Shruti"/>
+        <a:font script="Khmr" typeface="MoolBoran"/>
+        <a:font script="Knda" typeface="Tunga"/>
+        <a:font script="Guru" typeface="Raavi"/>
+        <a:font script="Cans" typeface="Euphemia"/>
+        <a:font script="Cher" typeface="Plantagenet Cherokee"/>
+        <a:font script="Yiii" typeface="Microsoft Yi Baiti"/>
+        <a:font script="Tibt" typeface="Microsoft Himalaya"/>
+        <a:font script="Thaa" typeface="MV Boli"/>
+        <a:font script="Deva" typeface="Mangal"/>
+        <a:font script="Telu" typeface="Gautami"/>
+        <a:font script="Taml" typeface="Latha"/>
+        <a:font script="Syrc" typeface="Estrangelo Edessa"/>
+        <a:font script="Orya" typeface="Kalinga"/>
+        <a:font script="Mlym" typeface="Kartika"/>
+        <a:font script="Laoo" typeface="DokChampa"/>
+        <a:font script="Sinh" typeface="Iskoola Pota"/>
+        <a:font script="Mong" typeface="Mongolian Baiti"/>
+        <a:font script="Viet" typeface="Times New Roman"/>
+        <a:font script="Uigh" typeface="Microsoft Uighur"/>
+        <a:font script="Geor" typeface="Sylfaen"/>
+        <a:font script="Armn" typeface="Arial"/>
+        <a:font script="Bugi" typeface="Leelawadee UI"/>
+        <a:font script="Bopo" typeface="Microsoft JhengHei"/>
+        <a:font script="Java" typeface="Javanese Text"/>
+        <a:font script="Lisu" typeface="Segoe UI"/>
+        <a:font script="Mymr" typeface="Myanmar Text"/>
+        <a:font script="Nkoo" typeface="Ebrima"/>
+        <a:font script="Olck" typeface="Nirmala UI"/>
+        <a:font script="Osma" typeface="Ebrima"/>
+        <a:font script="Phag" typeface="Phagspa"/>
+        <a:font script="Syrn" typeface="Estrangelo Edessa"/>
+        <a:font script="Syrj" typeface="Estrangelo Edessa"/>
+        <a:font script="Syre" typeface="Estrangelo Edessa"/>
+        <a:font script="Sora" typeface="Nirmala UI"/>
+        <a:font script="Tale" typeface="Microsoft Tai Le"/>
+        <a:font script="Talu" typeface="Microsoft New Tai Lue"/>
+        <a:font script="Tfng" typeface="Ebrima"/>
+      </a:majorFont>
+      <a:minorFont>
+        <a:latin typeface="Aptos" panose="02110004020202020204"/>
+        <a:ea typeface=""/>
+        <a:cs typeface=""/>
+        <a:font script="Jpan" typeface="游ゴシック"/>
+        <a:font script="Hang" typeface="맑은 고딕"/>
+        <a:font script="Hans" typeface="等线"/>
+        <a:font script="Hant" typeface="新細明體"/>
+        <a:font script="Arab" typeface="Arial"/>
+        <a:font script="Hebr" typeface="Arial"/>
+        <a:font script="Thai" typeface="Cordia New"/>
+        <a:font script="Ethi" typeface="Nyala"/>
+        <a:font script="Beng" typeface="Vrinda"/>
+        <a:font script="Gujr" typeface="Shruti"/>
+        <a:font script="Khmr" typeface="DaunPenh"/>
+        <a:font script="Knda" typeface="Tunga"/>
+        <a:font script="Guru" typeface="Raavi"/>
+        <a:font script="Cans" typeface="Euphemia"/>
+        <a:font script="Cher" typeface="Plantagenet Cherokee"/>
+        <a:font script="Yiii" typeface="Microsoft Yi Baiti"/>
+        <a:font script="Tibt" typeface="Microsoft Himalaya"/>
+        <a:font script="Thaa" typeface="MV Boli"/>
+        <a:font script="Deva" typeface="Mangal"/>
+        <a:font script="Telu" typeface="Gautami"/>
+        <a:font script="Taml" typeface="Latha"/>
+        <a:font script="Syrc" typeface="Estrangelo Edessa"/>
+        <a:font script="Orya" typeface="Kalinga"/>
+        <a:font script="Mlym" typeface="Kartika"/>
+        <a:font script="Laoo" typeface="DokChampa"/>
+        <a:font script="Sinh" typeface="Iskoola Pota"/>
+        <a:font script="Mong" typeface="Mongolian Baiti"/>
+        <a:font script="Viet" typeface="Arial"/>
+        <a:font script="Uigh" typeface="Microsoft Uighur"/>
+        <a:font script="Geor" typeface="Sylfaen"/>
+        <a:font script="Armn" typeface="Arial"/>
+        <a:font script="Bugi" typeface="Leelawadee UI"/>
+        <a:font script="Bopo" typeface="Microsoft JhengHei"/>
+        <a:font script="Java" typeface="Javanese Text"/>
+        <a:font script="Lisu" typeface="Segoe UI"/>
+        <a:font script="Mymr" typeface="Myanmar Text"/>
+        <a:font script="Nkoo" typeface="Ebrima"/>
+        <a:font script="Olck" typeface="Nirmala UI"/>
+        <a:font script="Osma" typeface="Ebrima"/>
+        <a:font script="Phag" typeface="Phagspa"/>
+        <a:font script="Syrn" typeface="Estrangelo Edessa"/>
+        <a:font script="Syrj" typeface="Estrangelo Edessa"/>
+        <a:font script="Syre" typeface="Estrangelo Edessa"/>
+        <a:font script="Sora" typeface="Nirmala UI"/>
+        <a:font script="Tale" typeface="Microsoft Tai Le"/>
+        <a:font script="Talu" typeface="Microsoft New Tai Lue"/>
+        <a:font script="Tfng" typeface="Ebrima"/>
+      </a:minorFont>
+    </a:fontScheme>
+    <a:fmtScheme name="Office">
+      <a:fillStyleLst>
+        <a:solidFill>
+          <a:schemeClr val="phClr"/>
+        </a:solidFill>
+        <a:gradFill rotWithShape="1">
+          <a:gsLst>
+            <a:gs pos="0">
+              <a:schemeClr val="phClr">
+                <a:lumMod val="110000"/>
+                <a:satMod val="105000"/>
+                <a:tint val="67000"/>
+              </a:schemeClr>
+            </a:gs>
+            <a:gs pos="50000">
+              <a:schemeClr val="phClr">
+                <a:lumMod val="105000"/>
+                <a:satMod val="103000"/>
+                <a:tint val="73000"/>
+              </a:schemeClr>
+            </a:gs>
+            <a:gs pos="100000">
+              <a:schemeClr val="phClr">
+                <a:lumMod val="105000"/>
+                <a:satMod val="109000"/>
+                <a:tint val="81000"/>
+              </a:schemeClr>
+            </a:gs>
+          </a:gsLst>
+          <a:lin ang="5400000" scaled="0"/>
+        </a:gradFill>
+        <a:gradFill rotWithShape="1">
+          <a:gsLst>
+            <a:gs pos="0">
+              <a:schemeClr val="phClr">
+                <a:satMod val="103000"/>
+                <a:lumMod val="102000"/>
+                <a:tint val="94000"/>
+              </a:schemeClr>
+            </a:gs>
+            <a:gs pos="50000">
+              <a:schemeClr val="phClr">
+                <a:satMod val="110000"/>
+                <a:lumMod val="100000"/>
+                <a:shade val="100000"/>
+              </a:schemeClr>
+            </a:gs>
+            <a:gs pos="100000">
+              <a:schemeClr val="phClr">
+                <a:lumMod val="99000"/>
+                <a:satMod val="120000"/>
+                <a:shade val="78000"/>
+              </a:schemeClr>
+            </a:gs>
+          </a:gsLst>
+          <a:lin ang="5400000" scaled="0"/>
+        </a:gradFill>
+      </a:fillStyleLst>
+      <a:lnStyleLst>
+        <a:ln w="12700" cap="flat" cmpd="sng" algn="ctr">
+          <a:solidFill>
+            <a:schemeClr val="phClr"/>
+          </a:solidFill>
+          <a:prstDash val="solid"/>
+          <a:miter lim="800000"/>
+        </a:ln>
+        <a:ln w="19050" cap="flat" cmpd="sng" algn="ctr">
+          <a:solidFill>
+            <a:schemeClr val="phClr"/>
+          </a:solidFill>
+          <a:prstDash val="solid"/>
+          <a:miter lim="800000"/>
+        </a:ln>
+        <a:ln w="25400" cap="flat" cmpd="sng" algn="ctr">
+          <a:solidFill>
+            <a:schemeClr val="phClr"/>
+          </a:solidFill>
+          <a:prstDash val="solid"/>
+          <a:miter lim="800000"/>
+        </a:ln>
+      </a:lnStyleLst>
+      <a:effectStyleLst>
+        <a:effectStyle>
+          <a:effectLst/>
+        </a:effectStyle>
+        <a:effectStyle>
+          <a:effectLst/>
+        </a:effectStyle>
+        <a:effectStyle>
+          <a:effectLst>
+            <a:outerShdw blurRad="57150" dist="19050" dir="5400000" algn="ctr" rotWithShape="0">
+              <a:srgbClr val="000000">
+                <a:alpha val="63000"/>
+              </a:srgbClr>
+            </a:outerShdw>
+          </a:effectLst>
+        </a:effectStyle>
+      </a:effectStyleLst>
+      <a:bgFillStyleLst>
+        <a:solidFill>
+          <a:schemeClr val="phClr"/>
+        </a:solidFill>
+        <a:solidFill>
+          <a:schemeClr val="phClr">
+            <a:tint val="95000"/>
+            <a:satMod val="170000"/>
+          </a:schemeClr>
+        </a:solidFill>
+        <a:gradFill rotWithShape="1">
+          <a:gsLst>
+            <a:gs pos="0">
+              <a:schemeClr val="phClr">
+                <a:tint val="93000"/>
+                <a:satMod val="150000"/>
+                <a:shade val="98000"/>
+                <a:lumMod val="102000"/>
+              </a:schemeClr>
+            </a:gs>
+            <a:gs pos="50000">
+              <a:schemeClr val="phClr">
+                <a:tint val="98000"/>
+                <a:satMod val="130000"/>
+                <a:shade val="90000"/>
+                <a:lumMod val="103000"/>
+              </a:schemeClr>
+            </a:gs>
+            <a:gs pos="100000">
+              <a:schemeClr val="phClr">
+                <a:shade val="63000"/>
+                <a:satMod val="120000"/>
+              </a:schemeClr>
+            </a:gs>
+          </a:gsLst>
+          <a:lin ang="5400000" scaled="0"/>
+        </a:gradFill>
+      </a:bgFillStyleLst>
+    </a:fmtScheme>
+  </a:themeElements>
+  <a:objectDefaults>
+    <a:lnDef>
+      <a:spPr/>
+      <a:bodyPr/>
+      <a:lstStyle/>
+      <a:style>
+        <a:lnRef idx="2">
+          <a:schemeClr val="accent1"/>
+        </a:lnRef>
+        <a:fillRef idx="0">
+          <a:schemeClr val="accent1"/>
+        </a:fillRef>
+        <a:effectRef idx="1">
+          <a:schemeClr val="accent1"/>
+        </a:effectRef>
+        <a:fontRef idx="minor">
+          <a:schemeClr val="tx1"/>
+        </a:fontRef>
+      </a:style>
+    </a:lnDef>
+  </a:objectDefaults>
+  <a:extraClrSchemeLst/>
+  <a:extLst>
+    <a:ext uri="{05A4C25C-085E-4340-85A3-A5531E510DB2}">
+      <thm15:themeFamily xmlns:thm15="http://schemas.microsoft.com/office/thememl/2012/main" name="Office Theme" id="{2E142A2C-CD16-42D6-873A-C26D2A0506FA}" vid="{1BDDFF52-6CD6-40A5-AB3C-68EB2F1E4D0A}"/>
+    </a:ext>
+  </a:extLst>
+</a:theme>
 </file>